--- a/protected-downloads/praesentation/M21.pptx
+++ b/protected-downloads/praesentation/M21.pptx
@@ -8,16 +8,17 @@
     <p:sldId id="256" r:id="rId7"/>
     <p:sldId id="257" r:id="rId8"/>
     <p:sldId id="258" r:id="rId9"/>
-    <p:sldId id="259" r:id="rId10"/>
-    <p:sldId id="260" r:id="rId11"/>
-    <p:sldId id="261" r:id="rId12"/>
-    <p:sldId id="262" r:id="rId13"/>
-    <p:sldId id="263" r:id="rId14"/>
-    <p:sldId id="264" r:id="rId15"/>
-    <p:sldId id="265" r:id="rId16"/>
-    <p:sldId id="266" r:id="rId17"/>
-    <p:sldId id="267" r:id="rId18"/>
-    <p:sldId id="268" r:id="rId19"/>
+    <p:sldId id="259" r:id="rId11"/>
+    <p:sldId id="260" r:id="rId12"/>
+    <p:sldId id="261" r:id="rId13"/>
+    <p:sldId id="262" r:id="rId14"/>
+    <p:sldId id="263" r:id="rId15"/>
+    <p:sldId id="264" r:id="rId16"/>
+    <p:sldId id="265" r:id="rId17"/>
+    <p:sldId id="266" r:id="rId18"/>
+    <p:sldId id="267" r:id="rId19"/>
+    <p:sldId id="268" r:id="rId20"/>
+    <p:sldId id="269" r:id="rId21"/>
   </p:sldIdLst>
   <p:sldSz cx="12188952" cy="6858000" type="screen4x3"/>
   <p:notesSz cx="6858000" cy="9144000"/>
@@ -117,6 +118,1086 @@
     </a:lvl9pPr>
   </p:defaultTextStyle>
 </p:presentation>
+</file>
+
+<file path=ppt/notesMasters/notesMaster1.xml><?xml version="1.0" encoding="utf-8"?>
+<p:notesMaster xmlns:a="http://schemas.openxmlformats.org/drawingml/2006/main" xmlns:p="http://schemas.openxmlformats.org/presentationml/2006/main" xmlns:r="http://schemas.openxmlformats.org/officeDocument/2006/relationships">
+  <p:cSld>
+    <p:bg>
+      <p:bgRef idx="1001">
+        <a:schemeClr val="bg1"/>
+      </p:bgRef>
+    </p:bg>
+    <p:spTree>
+      <p:nvGrpSpPr>
+        <p:cNvPr id="1" name=""/>
+        <p:cNvGrpSpPr/>
+        <p:nvPr/>
+      </p:nvGrpSpPr>
+      <p:grpSpPr>
+        <a:xfrm>
+          <a:off x="0" y="0"/>
+          <a:ext cx="0" cy="0"/>
+          <a:chOff x="0" y="0"/>
+          <a:chExt cx="0" cy="0"/>
+        </a:xfrm>
+      </p:grpSpPr>
+      <p:sp>
+        <p:nvSpPr>
+          <p:cNvPr id="2" name="Header Placeholder 1"/>
+          <p:cNvSpPr>
+            <a:spLocks noGrp="1"/>
+          </p:cNvSpPr>
+          <p:nvPr>
+            <p:ph type="hdr" sz="quarter"/>
+          </p:nvPr>
+        </p:nvSpPr>
+        <p:spPr>
+          <a:xfrm>
+            <a:off x="0" y="0"/>
+            <a:ext cx="2971800" cy="457200"/>
+          </a:xfrm>
+          <a:prstGeom prst="rect">
+            <a:avLst/>
+          </a:prstGeom>
+        </p:spPr>
+        <p:txBody>
+          <a:bodyPr vert="horz" lIns="91440" tIns="45720" rIns="91440" bIns="45720" rtlCol="0"/>
+          <a:lstStyle>
+            <a:lvl1pPr algn="l">
+              <a:defRPr sz="1200"/>
+            </a:lvl1pPr>
+          </a:lstStyle>
+          <a:p>
+            <a:endParaRPr lang="en-US"/>
+          </a:p>
+        </p:txBody>
+      </p:sp>
+      <p:sp>
+        <p:nvSpPr>
+          <p:cNvPr id="3" name="Date Placeholder 2"/>
+          <p:cNvSpPr>
+            <a:spLocks noGrp="1"/>
+          </p:cNvSpPr>
+          <p:nvPr>
+            <p:ph type="dt" idx="1"/>
+          </p:nvPr>
+        </p:nvSpPr>
+        <p:spPr>
+          <a:xfrm>
+            <a:off x="3884613" y="0"/>
+            <a:ext cx="2971800" cy="457200"/>
+          </a:xfrm>
+          <a:prstGeom prst="rect">
+            <a:avLst/>
+          </a:prstGeom>
+        </p:spPr>
+        <p:txBody>
+          <a:bodyPr vert="horz" lIns="91440" tIns="45720" rIns="91440" bIns="45720" rtlCol="0"/>
+          <a:lstStyle>
+            <a:lvl1pPr algn="r">
+              <a:defRPr sz="1200"/>
+            </a:lvl1pPr>
+          </a:lstStyle>
+          <a:p>
+            <a:fld id="{0F89C1C7-3DCD-1040-A9CF-14679D8B5DDD}" type="datetimeFigureOut">
+              <a:rPr lang="en-US" smtClean="0"/>
+              <a:t>10/17/16</a:t>
+            </a:fld>
+            <a:endParaRPr lang="en-US"/>
+          </a:p>
+        </p:txBody>
+      </p:sp>
+      <p:sp>
+        <p:nvSpPr>
+          <p:cNvPr id="4" name="Slide Image Placeholder 3"/>
+          <p:cNvSpPr>
+            <a:spLocks noGrp="1" noRot="1" noChangeAspect="1"/>
+          </p:cNvSpPr>
+          <p:nvPr>
+            <p:ph type="sldImg" idx="2"/>
+          </p:nvPr>
+        </p:nvSpPr>
+        <p:spPr>
+          <a:xfrm>
+            <a:off x="1143000" y="685800"/>
+            <a:ext cx="4572000" cy="3429000"/>
+          </a:xfrm>
+          <a:prstGeom prst="rect">
+            <a:avLst/>
+          </a:prstGeom>
+          <a:noFill/>
+          <a:ln w="12700">
+            <a:solidFill>
+              <a:prstClr val="black"/>
+            </a:solidFill>
+          </a:ln>
+        </p:spPr>
+        <p:txBody>
+          <a:bodyPr vert="horz" lIns="91440" tIns="45720" rIns="91440" bIns="45720" rtlCol="0" anchor="ctr"/>
+          <a:lstStyle/>
+          <a:p>
+            <a:endParaRPr lang="en-US"/>
+          </a:p>
+        </p:txBody>
+      </p:sp>
+      <p:sp>
+        <p:nvSpPr>
+          <p:cNvPr id="5" name="Notes Placeholder 4"/>
+          <p:cNvSpPr>
+            <a:spLocks noGrp="1"/>
+          </p:cNvSpPr>
+          <p:nvPr>
+            <p:ph type="body" sz="quarter" idx="3"/>
+          </p:nvPr>
+        </p:nvSpPr>
+        <p:spPr>
+          <a:xfrm>
+            <a:off x="685800" y="4343400"/>
+            <a:ext cx="5486400" cy="4114800"/>
+          </a:xfrm>
+          <a:prstGeom prst="rect">
+            <a:avLst/>
+          </a:prstGeom>
+        </p:spPr>
+        <p:txBody>
+          <a:bodyPr vert="horz" lIns="91440" tIns="45720" rIns="91440" bIns="45720" rtlCol="0"/>
+          <a:lstStyle/>
+          <a:p>
+            <a:pPr lvl="0"/>
+            <a:r>
+              <a:rPr lang="en-US" smtClean="0"/>
+              <a:t>Click to edit Master text styles</a:t>
+            </a:r>
+          </a:p>
+          <a:p>
+            <a:pPr lvl="1"/>
+            <a:r>
+              <a:rPr lang="en-US" smtClean="0"/>
+              <a:t>Second level</a:t>
+            </a:r>
+          </a:p>
+          <a:p>
+            <a:pPr lvl="2"/>
+            <a:r>
+              <a:rPr lang="en-US" smtClean="0"/>
+              <a:t>Third level</a:t>
+            </a:r>
+          </a:p>
+          <a:p>
+            <a:pPr lvl="3"/>
+            <a:r>
+              <a:rPr lang="en-US" smtClean="0"/>
+              <a:t>Fourth level</a:t>
+            </a:r>
+          </a:p>
+          <a:p>
+            <a:pPr lvl="4"/>
+            <a:r>
+              <a:rPr lang="en-US" smtClean="0"/>
+              <a:t>Fifth level</a:t>
+            </a:r>
+            <a:endParaRPr lang="en-US"/>
+          </a:p>
+        </p:txBody>
+      </p:sp>
+      <p:sp>
+        <p:nvSpPr>
+          <p:cNvPr id="6" name="Footer Placeholder 5"/>
+          <p:cNvSpPr>
+            <a:spLocks noGrp="1"/>
+          </p:cNvSpPr>
+          <p:nvPr>
+            <p:ph type="ftr" sz="quarter" idx="4"/>
+          </p:nvPr>
+        </p:nvSpPr>
+        <p:spPr>
+          <a:xfrm>
+            <a:off x="0" y="8685213"/>
+            <a:ext cx="2971800" cy="457200"/>
+          </a:xfrm>
+          <a:prstGeom prst="rect">
+            <a:avLst/>
+          </a:prstGeom>
+        </p:spPr>
+        <p:txBody>
+          <a:bodyPr vert="horz" lIns="91440" tIns="45720" rIns="91440" bIns="45720" rtlCol="0" anchor="b"/>
+          <a:lstStyle>
+            <a:lvl1pPr algn="l">
+              <a:defRPr sz="1200"/>
+            </a:lvl1pPr>
+          </a:lstStyle>
+          <a:p>
+            <a:endParaRPr lang="en-US"/>
+          </a:p>
+        </p:txBody>
+      </p:sp>
+      <p:sp>
+        <p:nvSpPr>
+          <p:cNvPr id="7" name="Slide Number Placeholder 6"/>
+          <p:cNvSpPr>
+            <a:spLocks noGrp="1"/>
+          </p:cNvSpPr>
+          <p:nvPr>
+            <p:ph type="sldNum" sz="quarter" idx="5"/>
+          </p:nvPr>
+        </p:nvSpPr>
+        <p:spPr>
+          <a:xfrm>
+            <a:off x="3884613" y="8685213"/>
+            <a:ext cx="2971800" cy="457200"/>
+          </a:xfrm>
+          <a:prstGeom prst="rect">
+            <a:avLst/>
+          </a:prstGeom>
+        </p:spPr>
+        <p:txBody>
+          <a:bodyPr vert="horz" lIns="91440" tIns="45720" rIns="91440" bIns="45720" rtlCol="0" anchor="b"/>
+          <a:lstStyle>
+            <a:lvl1pPr algn="r">
+              <a:defRPr sz="1200"/>
+            </a:lvl1pPr>
+          </a:lstStyle>
+          <a:p>
+            <a:fld id="{BB5E49A5-4136-284D-997B-48E1D791AD67}" type="slidenum">
+              <a:rPr lang="en-US" smtClean="0"/>
+              <a:t>‹#›</a:t>
+            </a:fld>
+            <a:endParaRPr lang="en-US"/>
+          </a:p>
+        </p:txBody>
+      </p:sp>
+    </p:spTree>
+    <p:extLst>
+      <p:ext uri="{BB962C8B-B14F-4D97-AF65-F5344CB8AC3E}">
+        <p14:creationId xmlns:p14="http://schemas.microsoft.com/office/powerpoint/2010/main" val="2623252185"/>
+      </p:ext>
+    </p:extLst>
+  </p:cSld>
+  <p:clrMap bg1="lt1" tx1="dk1" bg2="lt2" tx2="dk2" accent1="accent1" accent2="accent2" accent3="accent3" accent4="accent4" accent5="accent5" accent6="accent6" hlink="hlink" folHlink="folHlink"/>
+  <p:notesStyle>
+    <a:lvl1pPr marL="0" algn="l" defTabSz="457200" rtl="0" eaLnBrk="1" latinLnBrk="0" hangingPunct="1">
+      <a:defRPr sz="1200" kern="1200">
+        <a:solidFill>
+          <a:schemeClr val="tx1"/>
+        </a:solidFill>
+        <a:latin typeface="+mn-lt"/>
+        <a:ea typeface="+mn-ea"/>
+        <a:cs typeface="+mn-cs"/>
+      </a:defRPr>
+    </a:lvl1pPr>
+    <a:lvl2pPr marL="457200" algn="l" defTabSz="457200" rtl="0" eaLnBrk="1" latinLnBrk="0" hangingPunct="1">
+      <a:defRPr sz="1200" kern="1200">
+        <a:solidFill>
+          <a:schemeClr val="tx1"/>
+        </a:solidFill>
+        <a:latin typeface="+mn-lt"/>
+        <a:ea typeface="+mn-ea"/>
+        <a:cs typeface="+mn-cs"/>
+      </a:defRPr>
+    </a:lvl2pPr>
+    <a:lvl3pPr marL="914400" algn="l" defTabSz="457200" rtl="0" eaLnBrk="1" latinLnBrk="0" hangingPunct="1">
+      <a:defRPr sz="1200" kern="1200">
+        <a:solidFill>
+          <a:schemeClr val="tx1"/>
+        </a:solidFill>
+        <a:latin typeface="+mn-lt"/>
+        <a:ea typeface="+mn-ea"/>
+        <a:cs typeface="+mn-cs"/>
+      </a:defRPr>
+    </a:lvl3pPr>
+    <a:lvl4pPr marL="1371600" algn="l" defTabSz="457200" rtl="0" eaLnBrk="1" latinLnBrk="0" hangingPunct="1">
+      <a:defRPr sz="1200" kern="1200">
+        <a:solidFill>
+          <a:schemeClr val="tx1"/>
+        </a:solidFill>
+        <a:latin typeface="+mn-lt"/>
+        <a:ea typeface="+mn-ea"/>
+        <a:cs typeface="+mn-cs"/>
+      </a:defRPr>
+    </a:lvl4pPr>
+    <a:lvl5pPr marL="1828800" algn="l" defTabSz="457200" rtl="0" eaLnBrk="1" latinLnBrk="0" hangingPunct="1">
+      <a:defRPr sz="1200" kern="1200">
+        <a:solidFill>
+          <a:schemeClr val="tx1"/>
+        </a:solidFill>
+        <a:latin typeface="+mn-lt"/>
+        <a:ea typeface="+mn-ea"/>
+        <a:cs typeface="+mn-cs"/>
+      </a:defRPr>
+    </a:lvl5pPr>
+    <a:lvl6pPr marL="2286000" algn="l" defTabSz="457200" rtl="0" eaLnBrk="1" latinLnBrk="0" hangingPunct="1">
+      <a:defRPr sz="1200" kern="1200">
+        <a:solidFill>
+          <a:schemeClr val="tx1"/>
+        </a:solidFill>
+        <a:latin typeface="+mn-lt"/>
+        <a:ea typeface="+mn-ea"/>
+        <a:cs typeface="+mn-cs"/>
+      </a:defRPr>
+    </a:lvl6pPr>
+    <a:lvl7pPr marL="2743200" algn="l" defTabSz="457200" rtl="0" eaLnBrk="1" latinLnBrk="0" hangingPunct="1">
+      <a:defRPr sz="1200" kern="1200">
+        <a:solidFill>
+          <a:schemeClr val="tx1"/>
+        </a:solidFill>
+        <a:latin typeface="+mn-lt"/>
+        <a:ea typeface="+mn-ea"/>
+        <a:cs typeface="+mn-cs"/>
+      </a:defRPr>
+    </a:lvl7pPr>
+    <a:lvl8pPr marL="3200400" algn="l" defTabSz="457200" rtl="0" eaLnBrk="1" latinLnBrk="0" hangingPunct="1">
+      <a:defRPr sz="1200" kern="1200">
+        <a:solidFill>
+          <a:schemeClr val="tx1"/>
+        </a:solidFill>
+        <a:latin typeface="+mn-lt"/>
+        <a:ea typeface="+mn-ea"/>
+        <a:cs typeface="+mn-cs"/>
+      </a:defRPr>
+    </a:lvl8pPr>
+    <a:lvl9pPr marL="3657600" algn="l" defTabSz="457200" rtl="0" eaLnBrk="1" latinLnBrk="0" hangingPunct="1">
+      <a:defRPr sz="1200" kern="1200">
+        <a:solidFill>
+          <a:schemeClr val="tx1"/>
+        </a:solidFill>
+        <a:latin typeface="+mn-lt"/>
+        <a:ea typeface="+mn-ea"/>
+        <a:cs typeface="+mn-cs"/>
+      </a:defRPr>
+    </a:lvl9pPr>
+  </p:notesStyle>
+</p:notesMaster>
+</file>
+
+<file path=ppt/notesSlides/notesSlide1.xml><?xml version="1.0" encoding="utf-8"?>
+<p:notes xmlns:a="http://schemas.openxmlformats.org/drawingml/2006/main" xmlns:p="http://schemas.openxmlformats.org/presentationml/2006/main" xmlns:r="http://schemas.openxmlformats.org/officeDocument/2006/relationships">
+  <p:cSld>
+    <p:spTree>
+      <p:nvGrpSpPr>
+        <p:cNvPr id="1" name=""/>
+        <p:cNvGrpSpPr/>
+        <p:nvPr/>
+      </p:nvGrpSpPr>
+      <p:grpSpPr>
+        <a:xfrm>
+          <a:off x="0" y="0"/>
+          <a:ext cx="0" cy="0"/>
+          <a:chOff x="0" y="0"/>
+          <a:chExt cx="0" cy="0"/>
+        </a:xfrm>
+      </p:grpSpPr>
+      <p:sp>
+        <p:nvSpPr>
+          <p:cNvPr id="2" name="Slide Image Placeholder 1"/>
+          <p:cNvSpPr>
+            <a:spLocks noGrp="1"/>
+          </p:cNvSpPr>
+          <p:nvPr>
+            <p:ph type="sldImg" idx="2"/>
+          </p:nvPr>
+        </p:nvSpPr>
+        <p:spPr/>
+      </p:sp>
+      <p:sp>
+        <p:nvSpPr>
+          <p:cNvPr id="3" name="Notes Placeholder 2"/>
+          <p:cNvSpPr>
+            <a:spLocks noGrp="1"/>
+          </p:cNvSpPr>
+          <p:nvPr>
+            <p:ph type="body" idx="3" sz="quarter"/>
+          </p:nvPr>
+        </p:nvSpPr>
+        <p:spPr/>
+        <p:txBody>
+          <a:bodyPr/>
+          <a:lstStyle/>
+          <a:p>
+            <a:r>
+              <a:t>Agenda-Überblick. Timing und Pausen siehe Ablaufplan im Trainerhandbuch (Sektion 3).</a:t>
+            </a:r>
+          </a:p>
+        </p:txBody>
+      </p:sp>
+      <p:sp>
+        <p:nvSpPr>
+          <p:cNvPr id="4" name="Slide Number Placeholder 3"/>
+          <p:cNvSpPr>
+            <a:spLocks noGrp="1"/>
+          </p:cNvSpPr>
+          <p:nvPr>
+            <p:ph type="sldNum" idx="5" sz="quarter"/>
+          </p:nvPr>
+        </p:nvSpPr>
+        <p:spPr/>
+      </p:sp>
+    </p:spTree>
+  </p:cSld>
+  <p:clrMapOvr>
+    <a:masterClrMapping/>
+  </p:clrMapOvr>
+</p:notes>
+</file>
+
+<file path=ppt/notesSlides/notesSlide2.xml><?xml version="1.0" encoding="utf-8"?>
+<p:notes xmlns:a="http://schemas.openxmlformats.org/drawingml/2006/main" xmlns:p="http://schemas.openxmlformats.org/presentationml/2006/main" xmlns:r="http://schemas.openxmlformats.org/officeDocument/2006/relationships">
+  <p:cSld>
+    <p:spTree>
+      <p:nvGrpSpPr>
+        <p:cNvPr id="1" name=""/>
+        <p:cNvGrpSpPr/>
+        <p:nvPr/>
+      </p:nvGrpSpPr>
+      <p:grpSpPr>
+        <a:xfrm>
+          <a:off x="0" y="0"/>
+          <a:ext cx="0" cy="0"/>
+          <a:chOff x="0" y="0"/>
+          <a:chExt cx="0" cy="0"/>
+        </a:xfrm>
+      </p:grpSpPr>
+      <p:sp>
+        <p:nvSpPr>
+          <p:cNvPr id="2" name="Slide Image Placeholder 1"/>
+          <p:cNvSpPr>
+            <a:spLocks noGrp="1"/>
+          </p:cNvSpPr>
+          <p:nvPr>
+            <p:ph type="sldImg" idx="2"/>
+          </p:nvPr>
+        </p:nvSpPr>
+        <p:spPr/>
+      </p:sp>
+      <p:sp>
+        <p:nvSpPr>
+          <p:cNvPr id="3" name="Notes Placeholder 2"/>
+          <p:cNvSpPr>
+            <a:spLocks noGrp="1"/>
+          </p:cNvSpPr>
+          <p:nvPr>
+            <p:ph type="body" idx="3" sz="quarter"/>
+          </p:nvPr>
+        </p:nvSpPr>
+        <p:spPr/>
+        <p:txBody>
+          <a:bodyPr/>
+          <a:lstStyle/>
+          <a:p>
+            <a:r>
+              <a:t>Siehe Trainerhandbuch (Sektion 3) für Moderationshinweise, Timing und erwartete Teilnehmerreaktionen.</a:t>
+            </a:r>
+          </a:p>
+        </p:txBody>
+      </p:sp>
+      <p:sp>
+        <p:nvSpPr>
+          <p:cNvPr id="4" name="Slide Number Placeholder 3"/>
+          <p:cNvSpPr>
+            <a:spLocks noGrp="1"/>
+          </p:cNvSpPr>
+          <p:nvPr>
+            <p:ph type="sldNum" idx="5" sz="quarter"/>
+          </p:nvPr>
+        </p:nvSpPr>
+        <p:spPr/>
+      </p:sp>
+    </p:spTree>
+  </p:cSld>
+  <p:clrMapOvr>
+    <a:masterClrMapping/>
+  </p:clrMapOvr>
+</p:notes>
+</file>
+
+<file path=ppt/notesSlides/notesSlide3.xml><?xml version="1.0" encoding="utf-8"?>
+<p:notes xmlns:a="http://schemas.openxmlformats.org/drawingml/2006/main" xmlns:p="http://schemas.openxmlformats.org/presentationml/2006/main" xmlns:r="http://schemas.openxmlformats.org/officeDocument/2006/relationships">
+  <p:cSld>
+    <p:spTree>
+      <p:nvGrpSpPr>
+        <p:cNvPr id="1" name=""/>
+        <p:cNvGrpSpPr/>
+        <p:nvPr/>
+      </p:nvGrpSpPr>
+      <p:grpSpPr>
+        <a:xfrm>
+          <a:off x="0" y="0"/>
+          <a:ext cx="0" cy="0"/>
+          <a:chOff x="0" y="0"/>
+          <a:chExt cx="0" cy="0"/>
+        </a:xfrm>
+      </p:grpSpPr>
+      <p:sp>
+        <p:nvSpPr>
+          <p:cNvPr id="2" name="Slide Image Placeholder 1"/>
+          <p:cNvSpPr>
+            <a:spLocks noGrp="1"/>
+          </p:cNvSpPr>
+          <p:nvPr>
+            <p:ph type="sldImg" idx="2"/>
+          </p:nvPr>
+        </p:nvSpPr>
+        <p:spPr/>
+      </p:sp>
+      <p:sp>
+        <p:nvSpPr>
+          <p:cNvPr id="3" name="Notes Placeholder 2"/>
+          <p:cNvSpPr>
+            <a:spLocks noGrp="1"/>
+          </p:cNvSpPr>
+          <p:nvPr>
+            <p:ph type="body" idx="3" sz="quarter"/>
+          </p:nvPr>
+        </p:nvSpPr>
+        <p:spPr/>
+        <p:txBody>
+          <a:bodyPr/>
+          <a:lstStyle/>
+          <a:p>
+            <a:r>
+              <a:t>Siehe Trainerhandbuch (Sektion 3) für Moderationshinweise, Timing und erwartete Teilnehmerreaktionen.</a:t>
+            </a:r>
+          </a:p>
+        </p:txBody>
+      </p:sp>
+      <p:sp>
+        <p:nvSpPr>
+          <p:cNvPr id="4" name="Slide Number Placeholder 3"/>
+          <p:cNvSpPr>
+            <a:spLocks noGrp="1"/>
+          </p:cNvSpPr>
+          <p:nvPr>
+            <p:ph type="sldNum" idx="5" sz="quarter"/>
+          </p:nvPr>
+        </p:nvSpPr>
+        <p:spPr/>
+      </p:sp>
+    </p:spTree>
+  </p:cSld>
+  <p:clrMapOvr>
+    <a:masterClrMapping/>
+  </p:clrMapOvr>
+</p:notes>
+</file>
+
+<file path=ppt/notesSlides/notesSlide4.xml><?xml version="1.0" encoding="utf-8"?>
+<p:notes xmlns:a="http://schemas.openxmlformats.org/drawingml/2006/main" xmlns:p="http://schemas.openxmlformats.org/presentationml/2006/main" xmlns:r="http://schemas.openxmlformats.org/officeDocument/2006/relationships">
+  <p:cSld>
+    <p:spTree>
+      <p:nvGrpSpPr>
+        <p:cNvPr id="1" name=""/>
+        <p:cNvGrpSpPr/>
+        <p:nvPr/>
+      </p:nvGrpSpPr>
+      <p:grpSpPr>
+        <a:xfrm>
+          <a:off x="0" y="0"/>
+          <a:ext cx="0" cy="0"/>
+          <a:chOff x="0" y="0"/>
+          <a:chExt cx="0" cy="0"/>
+        </a:xfrm>
+      </p:grpSpPr>
+      <p:sp>
+        <p:nvSpPr>
+          <p:cNvPr id="2" name="Slide Image Placeholder 1"/>
+          <p:cNvSpPr>
+            <a:spLocks noGrp="1"/>
+          </p:cNvSpPr>
+          <p:nvPr>
+            <p:ph type="sldImg" idx="2"/>
+          </p:nvPr>
+        </p:nvSpPr>
+        <p:spPr/>
+      </p:sp>
+      <p:sp>
+        <p:nvSpPr>
+          <p:cNvPr id="3" name="Notes Placeholder 2"/>
+          <p:cNvSpPr>
+            <a:spLocks noGrp="1"/>
+          </p:cNvSpPr>
+          <p:nvPr>
+            <p:ph type="body" idx="3" sz="quarter"/>
+          </p:nvPr>
+        </p:nvSpPr>
+        <p:spPr/>
+        <p:txBody>
+          <a:bodyPr/>
+          <a:lstStyle/>
+          <a:p>
+            <a:r>
+              <a:t>Siehe Trainerhandbuch (Sektion 3) für Moderationshinweise, Timing und erwartete Teilnehmerreaktionen.</a:t>
+            </a:r>
+          </a:p>
+        </p:txBody>
+      </p:sp>
+      <p:sp>
+        <p:nvSpPr>
+          <p:cNvPr id="4" name="Slide Number Placeholder 3"/>
+          <p:cNvSpPr>
+            <a:spLocks noGrp="1"/>
+          </p:cNvSpPr>
+          <p:nvPr>
+            <p:ph type="sldNum" idx="5" sz="quarter"/>
+          </p:nvPr>
+        </p:nvSpPr>
+        <p:spPr/>
+      </p:sp>
+    </p:spTree>
+  </p:cSld>
+  <p:clrMapOvr>
+    <a:masterClrMapping/>
+  </p:clrMapOvr>
+</p:notes>
+</file>
+
+<file path=ppt/notesSlides/notesSlide5.xml><?xml version="1.0" encoding="utf-8"?>
+<p:notes xmlns:a="http://schemas.openxmlformats.org/drawingml/2006/main" xmlns:p="http://schemas.openxmlformats.org/presentationml/2006/main" xmlns:r="http://schemas.openxmlformats.org/officeDocument/2006/relationships">
+  <p:cSld>
+    <p:spTree>
+      <p:nvGrpSpPr>
+        <p:cNvPr id="1" name=""/>
+        <p:cNvGrpSpPr/>
+        <p:nvPr/>
+      </p:nvGrpSpPr>
+      <p:grpSpPr>
+        <a:xfrm>
+          <a:off x="0" y="0"/>
+          <a:ext cx="0" cy="0"/>
+          <a:chOff x="0" y="0"/>
+          <a:chExt cx="0" cy="0"/>
+        </a:xfrm>
+      </p:grpSpPr>
+      <p:sp>
+        <p:nvSpPr>
+          <p:cNvPr id="2" name="Slide Image Placeholder 1"/>
+          <p:cNvSpPr>
+            <a:spLocks noGrp="1"/>
+          </p:cNvSpPr>
+          <p:nvPr>
+            <p:ph type="sldImg" idx="2"/>
+          </p:nvPr>
+        </p:nvSpPr>
+        <p:spPr/>
+      </p:sp>
+      <p:sp>
+        <p:nvSpPr>
+          <p:cNvPr id="3" name="Notes Placeholder 2"/>
+          <p:cNvSpPr>
+            <a:spLocks noGrp="1"/>
+          </p:cNvSpPr>
+          <p:nvPr>
+            <p:ph type="body" idx="3" sz="quarter"/>
+          </p:nvPr>
+        </p:nvSpPr>
+        <p:spPr/>
+        <p:txBody>
+          <a:bodyPr/>
+          <a:lstStyle/>
+          <a:p>
+            <a:r>
+              <a:t>Siehe Trainerhandbuch (Sektion 3) für Moderationshinweise, Timing und erwartete Teilnehmerreaktionen.</a:t>
+            </a:r>
+          </a:p>
+        </p:txBody>
+      </p:sp>
+      <p:sp>
+        <p:nvSpPr>
+          <p:cNvPr id="4" name="Slide Number Placeholder 3"/>
+          <p:cNvSpPr>
+            <a:spLocks noGrp="1"/>
+          </p:cNvSpPr>
+          <p:nvPr>
+            <p:ph type="sldNum" idx="5" sz="quarter"/>
+          </p:nvPr>
+        </p:nvSpPr>
+        <p:spPr/>
+      </p:sp>
+    </p:spTree>
+  </p:cSld>
+  <p:clrMapOvr>
+    <a:masterClrMapping/>
+  </p:clrMapOvr>
+</p:notes>
+</file>
+
+<file path=ppt/notesSlides/notesSlide6.xml><?xml version="1.0" encoding="utf-8"?>
+<p:notes xmlns:a="http://schemas.openxmlformats.org/drawingml/2006/main" xmlns:p="http://schemas.openxmlformats.org/presentationml/2006/main" xmlns:r="http://schemas.openxmlformats.org/officeDocument/2006/relationships">
+  <p:cSld>
+    <p:spTree>
+      <p:nvGrpSpPr>
+        <p:cNvPr id="1" name=""/>
+        <p:cNvGrpSpPr/>
+        <p:nvPr/>
+      </p:nvGrpSpPr>
+      <p:grpSpPr>
+        <a:xfrm>
+          <a:off x="0" y="0"/>
+          <a:ext cx="0" cy="0"/>
+          <a:chOff x="0" y="0"/>
+          <a:chExt cx="0" cy="0"/>
+        </a:xfrm>
+      </p:grpSpPr>
+      <p:sp>
+        <p:nvSpPr>
+          <p:cNvPr id="2" name="Slide Image Placeholder 1"/>
+          <p:cNvSpPr>
+            <a:spLocks noGrp="1"/>
+          </p:cNvSpPr>
+          <p:nvPr>
+            <p:ph type="sldImg" idx="2"/>
+          </p:nvPr>
+        </p:nvSpPr>
+        <p:spPr/>
+      </p:sp>
+      <p:sp>
+        <p:nvSpPr>
+          <p:cNvPr id="3" name="Notes Placeholder 2"/>
+          <p:cNvSpPr>
+            <a:spLocks noGrp="1"/>
+          </p:cNvSpPr>
+          <p:nvPr>
+            <p:ph type="body" idx="3" sz="quarter"/>
+          </p:nvPr>
+        </p:nvSpPr>
+        <p:spPr/>
+        <p:txBody>
+          <a:bodyPr/>
+          <a:lstStyle/>
+          <a:p>
+            <a:r>
+              <a:t>Siehe Trainerhandbuch (Sektion 3) für Moderationshinweise, Timing und erwartete Teilnehmerreaktionen.</a:t>
+            </a:r>
+          </a:p>
+        </p:txBody>
+      </p:sp>
+      <p:sp>
+        <p:nvSpPr>
+          <p:cNvPr id="4" name="Slide Number Placeholder 3"/>
+          <p:cNvSpPr>
+            <a:spLocks noGrp="1"/>
+          </p:cNvSpPr>
+          <p:nvPr>
+            <p:ph type="sldNum" idx="5" sz="quarter"/>
+          </p:nvPr>
+        </p:nvSpPr>
+        <p:spPr/>
+      </p:sp>
+    </p:spTree>
+  </p:cSld>
+  <p:clrMapOvr>
+    <a:masterClrMapping/>
+  </p:clrMapOvr>
+</p:notes>
+</file>
+
+<file path=ppt/notesSlides/notesSlide7.xml><?xml version="1.0" encoding="utf-8"?>
+<p:notes xmlns:a="http://schemas.openxmlformats.org/drawingml/2006/main" xmlns:p="http://schemas.openxmlformats.org/presentationml/2006/main" xmlns:r="http://schemas.openxmlformats.org/officeDocument/2006/relationships">
+  <p:cSld>
+    <p:spTree>
+      <p:nvGrpSpPr>
+        <p:cNvPr id="1" name=""/>
+        <p:cNvGrpSpPr/>
+        <p:nvPr/>
+      </p:nvGrpSpPr>
+      <p:grpSpPr>
+        <a:xfrm>
+          <a:off x="0" y="0"/>
+          <a:ext cx="0" cy="0"/>
+          <a:chOff x="0" y="0"/>
+          <a:chExt cx="0" cy="0"/>
+        </a:xfrm>
+      </p:grpSpPr>
+      <p:sp>
+        <p:nvSpPr>
+          <p:cNvPr id="2" name="Slide Image Placeholder 1"/>
+          <p:cNvSpPr>
+            <a:spLocks noGrp="1"/>
+          </p:cNvSpPr>
+          <p:nvPr>
+            <p:ph type="sldImg" idx="2"/>
+          </p:nvPr>
+        </p:nvSpPr>
+        <p:spPr/>
+      </p:sp>
+      <p:sp>
+        <p:nvSpPr>
+          <p:cNvPr id="3" name="Notes Placeholder 2"/>
+          <p:cNvSpPr>
+            <a:spLocks noGrp="1"/>
+          </p:cNvSpPr>
+          <p:nvPr>
+            <p:ph type="body" idx="3" sz="quarter"/>
+          </p:nvPr>
+        </p:nvSpPr>
+        <p:spPr/>
+        <p:txBody>
+          <a:bodyPr/>
+          <a:lstStyle/>
+          <a:p>
+            <a:r>
+              <a:t>Moderation (HB Sec 3): Trainer-Hinweis: Diese Checkliste verbleibt in der Trainermappe. Eine Woche vorher [ ] Teilnehmerliste prüfen: Haben alle M02 und M04 absolviert? [ ] Bei fehlenden Voraussetzungen: Kurzwiederholung „8-Felder-Framework" versenden [ ] Fallstudienmappe drucken und binden [ ] Raumreservierung und Technik bestätigen Am Vortag [ ] Alle Arbeitsblätter ausgedruckt (12 × je AB) [ ] Trainermappe mit Musterlösung griffbereit [ ] Gruppenaufteilung vorbereiten 30 Minuten vor Beginn [ ] Raum aufbauen (U-Form oder 3er-Gruppentische) [ ] Flip-Charts aufstellen, Marker testen [ ] Beamer und Foliensatz testen [ ] Taschenrechner auf Tische legen [ ] Namensschilder bereitlegen</a:t>
+            </a:r>
+          </a:p>
+        </p:txBody>
+      </p:sp>
+      <p:sp>
+        <p:nvSpPr>
+          <p:cNvPr id="4" name="Slide Number Placeholder 3"/>
+          <p:cNvSpPr>
+            <a:spLocks noGrp="1"/>
+          </p:cNvSpPr>
+          <p:nvPr>
+            <p:ph type="sldNum" idx="5" sz="quarter"/>
+          </p:nvPr>
+        </p:nvSpPr>
+        <p:spPr/>
+      </p:sp>
+    </p:spTree>
+  </p:cSld>
+  <p:clrMapOvr>
+    <a:masterClrMapping/>
+  </p:clrMapOvr>
+</p:notes>
+</file>
+
+<file path=ppt/notesSlides/notesSlide8.xml><?xml version="1.0" encoding="utf-8"?>
+<p:notes xmlns:a="http://schemas.openxmlformats.org/drawingml/2006/main" xmlns:p="http://schemas.openxmlformats.org/presentationml/2006/main" xmlns:r="http://schemas.openxmlformats.org/officeDocument/2006/relationships">
+  <p:cSld>
+    <p:spTree>
+      <p:nvGrpSpPr>
+        <p:cNvPr id="1" name=""/>
+        <p:cNvGrpSpPr/>
+        <p:nvPr/>
+      </p:nvGrpSpPr>
+      <p:grpSpPr>
+        <a:xfrm>
+          <a:off x="0" y="0"/>
+          <a:ext cx="0" cy="0"/>
+          <a:chOff x="0" y="0"/>
+          <a:chExt cx="0" cy="0"/>
+        </a:xfrm>
+      </p:grpSpPr>
+      <p:sp>
+        <p:nvSpPr>
+          <p:cNvPr id="2" name="Slide Image Placeholder 1"/>
+          <p:cNvSpPr>
+            <a:spLocks noGrp="1"/>
+          </p:cNvSpPr>
+          <p:nvPr>
+            <p:ph type="sldImg" idx="2"/>
+          </p:nvPr>
+        </p:nvSpPr>
+        <p:spPr/>
+      </p:sp>
+      <p:sp>
+        <p:nvSpPr>
+          <p:cNvPr id="3" name="Notes Placeholder 2"/>
+          <p:cNvSpPr>
+            <a:spLocks noGrp="1"/>
+          </p:cNvSpPr>
+          <p:nvPr>
+            <p:ph type="body" idx="3" sz="quarter"/>
+          </p:nvPr>
+        </p:nvSpPr>
+        <p:spPr/>
+        <p:txBody>
+          <a:bodyPr/>
+          <a:lstStyle/>
+          <a:p>
+            <a:r>
+              <a:t>4.4.5 Kreditempfehlung (Musterlösung)</a:t>
+            </a:r>
+          </a:p>
+          <a:p>
+            <a:r>
+              <a:t>Empfehlung: ZUSAGE MIT AUFLAGEN</a:t>
+            </a:r>
+          </a:p>
+          <a:p>
+            <a:r>
+              <a:t>Begründung:</a:t>
+            </a:r>
+          </a:p>
+          <a:p>
+            <a:r>
+              <a:t>1. Cashflow-Tragfähigkeit nachgewiesen (Deckungsquote 1,53x, ZDQ 9,4x), auch bei moderatem Stress ausreichend</a:t>
+            </a:r>
+          </a:p>
+          <a:p>
+            <a:r>
+              <a:t>2. Investitionszweck wirtschaftlich sinnvoll und vollständig dokumentiert</a:t>
+            </a:r>
+          </a:p>
+          <a:p>
+            <a:r>
+              <a:t>3. Managementqualität gut, aber Nachfolgerisiko signifikant und adressierbar</a:t>
+            </a:r>
+          </a:p>
+          <a:p>
+            <a:r>
+              <a:t>4. Branchendiversifikation schützt vor Einzelsegment-Schocks</a:t>
+            </a:r>
+          </a:p>
+          <a:p>
+            <a:r>
+              <a:t>5. Sicherheitenpaket knapp ausreichend bei Einbeziehung aller Bürgschaften</a:t>
+            </a:r>
+          </a:p>
+          <a:p>
+            <a:r>
+              <a:t>Auflagenkatalog:</a:t>
+            </a:r>
+          </a:p>
+          <a:p>
+            <a:r>
+              <a:t>1. Eigenkapitalerhöhung: Thesaurierung Jahresgewinn 2025 mind. 100.000 € (EK-Quote nach 12 Monaten ≥ 23 %)</a:t>
+            </a:r>
+          </a:p>
+          <a:p>
+            <a:r>
+              <a:t>2. Nachfolgeplan: Schriftliche Nachfolgeregelung bis 31.12.2026 (Rollen, Zeitachse, Berater)</a:t>
+            </a:r>
+          </a:p>
+          <a:p>
+            <a:r>
+              <a:t>3. Monitoring: Monatliche Umsatzmeldung, Quartalsmeldung GuV-Rohfassung</a:t>
+            </a:r>
+          </a:p>
+          <a:p>
+            <a:r>
+              <a:t>4. Covenant: EK-Quote ≥ 22 %; Warnung bei &lt; 22 %, Kündigung bei &lt; 20 %</a:t>
+            </a:r>
+          </a:p>
+          <a:p>
+            <a:r>
+              <a:t>5. Sicherheiten: Rang-2-Grundschuld Hallenerweiterung + Sicherungsübereignung CNC-Maschine + selbstschuldnerische Bürgschaft Klaus und Sabine Schnell je 210.000 €</a:t>
+            </a:r>
+          </a:p>
+          <a:p>
+            <a:r>
+              <a:t>Praxishinweis zu Auflage 5 – Bürgschaft Klaus Schnell (75 Jahre): Bei Bürgschaften von Gesellschaftern über 70 Jahren ist das Erbfall-Szenario zu prüfen: Geht die Bürgschaft auf die Erben über, und ist der Bürgschaftsvertrag entsprechend gestaltet? Empfehlung: Ergänzend eine Risikolebensversicherung auf das Leben von Klaus Schnell (Todesfallsumme mind. 210.000 €, Bank als unwiderrufliche Bezugsberechtigte) als Sicherheitsauflage prüfen. Klärung mit Rechtsabteilung/Marktfolge vor Beschlussfassung.</a:t>
+            </a:r>
+          </a:p>
+          <a:p>
+            <a:r>
+              <a:t>Konditionen:</a:t>
+            </a:r>
+          </a:p>
+          <a:p>
+            <a:r>
+              <a:t>Kreditbetrag: 420.000 €</a:t>
+            </a:r>
+          </a:p>
+          <a:p>
+            <a:r>
+              <a:t>Zinssatz: 5,00 % p. a. (EURIBOR + 2,0 % Spread)</a:t>
+            </a:r>
+          </a:p>
+          <a:p>
+            <a:r>
+              <a:t>Laufzeit: 7 Jahre (84 Monate)</a:t>
+            </a:r>
+          </a:p>
+          <a:p>
+            <a:r>
+              <a:t>Tilgung: Annuitätisch, erste Rate 6 Monate nach Auszahlung</a:t>
+            </a:r>
+          </a:p>
+          <a:p>
+            <a:r>
+              <a:t>Jahresrate: ca. 73.000 € (Zins) + 60.000 € (Tilgung) = 133.000 €</a:t>
+            </a:r>
+          </a:p>
+        </p:txBody>
+      </p:sp>
+      <p:sp>
+        <p:nvSpPr>
+          <p:cNvPr id="4" name="Slide Number Placeholder 3"/>
+          <p:cNvSpPr>
+            <a:spLocks noGrp="1"/>
+          </p:cNvSpPr>
+          <p:nvPr>
+            <p:ph type="sldNum" idx="5" sz="quarter"/>
+          </p:nvPr>
+        </p:nvSpPr>
+        <p:spPr/>
+      </p:sp>
+    </p:spTree>
+  </p:cSld>
+  <p:clrMapOvr>
+    <a:masterClrMapping/>
+  </p:clrMapOvr>
+</p:notes>
+</file>
+
+<file path=ppt/notesSlides/notesSlide9.xml><?xml version="1.0" encoding="utf-8"?>
+<p:notes xmlns:a="http://schemas.openxmlformats.org/drawingml/2006/main" xmlns:p="http://schemas.openxmlformats.org/presentationml/2006/main" xmlns:r="http://schemas.openxmlformats.org/officeDocument/2006/relationships">
+  <p:cSld>
+    <p:spTree>
+      <p:nvGrpSpPr>
+        <p:cNvPr id="1" name=""/>
+        <p:cNvGrpSpPr/>
+        <p:nvPr/>
+      </p:nvGrpSpPr>
+      <p:grpSpPr>
+        <a:xfrm>
+          <a:off x="0" y="0"/>
+          <a:ext cx="0" cy="0"/>
+          <a:chOff x="0" y="0"/>
+          <a:chExt cx="0" cy="0"/>
+        </a:xfrm>
+      </p:grpSpPr>
+      <p:sp>
+        <p:nvSpPr>
+          <p:cNvPr id="2" name="Slide Image Placeholder 1"/>
+          <p:cNvSpPr>
+            <a:spLocks noGrp="1"/>
+          </p:cNvSpPr>
+          <p:nvPr>
+            <p:ph type="sldImg" idx="2"/>
+          </p:nvPr>
+        </p:nvSpPr>
+        <p:spPr/>
+      </p:sp>
+      <p:sp>
+        <p:nvSpPr>
+          <p:cNvPr id="3" name="Notes Placeholder 2"/>
+          <p:cNvSpPr>
+            <a:spLocks noGrp="1"/>
+          </p:cNvSpPr>
+          <p:nvPr>
+            <p:ph type="body" idx="3" sz="quarter"/>
+          </p:nvPr>
+        </p:nvSpPr>
+        <p:spPr/>
+        <p:txBody>
+          <a:bodyPr/>
+          <a:lstStyle/>
+          <a:p>
+            <a:r>
+              <a:t>Siehe Trainerhandbuch (Sektion 3) für Moderationshinweise, Timing und erwartete Teilnehmerreaktionen.</a:t>
+            </a:r>
+          </a:p>
+        </p:txBody>
+      </p:sp>
+      <p:sp>
+        <p:nvSpPr>
+          <p:cNvPr id="4" name="Slide Number Placeholder 3"/>
+          <p:cNvSpPr>
+            <a:spLocks noGrp="1"/>
+          </p:cNvSpPr>
+          <p:nvPr>
+            <p:ph type="sldNum" idx="5" sz="quarter"/>
+          </p:nvPr>
+        </p:nvSpPr>
+        <p:spPr/>
+      </p:sp>
+    </p:spTree>
+  </p:cSld>
+  <p:clrMapOvr>
+    <a:masterClrMapping/>
+  </p:clrMapOvr>
+</p:notes>
 </file>
 
 <file path=ppt/slideLayouts/slideLayout1.xml><?xml version="1.0" encoding="utf-8"?>
@@ -3737,7 +4818,7 @@
                 </a:solidFill>
                 <a:latin typeface="Source Serif 4"/>
               </a:rPr>
-              <a:t>4.3b Betriebsmittelkredite und Kontokorrent: Kurzfall</a:t>
+              <a:t>4.3a Sicherheitenbewertung im Alltag</a:t>
             </a:r>
           </a:p>
         </p:txBody>
@@ -3779,7 +4860,7 @@
                 </a:solidFill>
                 <a:latin typeface="Arial"/>
               </a:rPr>
-              <a:t>Nicht alle Kreditentscheidungen sind langfristige Investitionskredite. Häufiger Alltag: KK-Linie läuft an ihre Grenze oder wird regelmäßig überzogen.</a:t>
+              <a:t>Die BelWertV-Theorie ist eine Sache – der Alltag stellt andere Fragen:</a:t>
             </a:r>
           </a:p>
           <a:p>
@@ -3798,7 +4879,7 @@
                 </a:solidFill>
                 <a:latin typeface="Arial"/>
               </a:rPr>
-              <a:t>Kurzfall: Bäckerei Weber KG, Überzug KK-Linie</a:t>
+              <a:t>Wann ist ein aktuelles Gutachten Pflicht?</a:t>
             </a:r>
           </a:p>
           <a:p>
@@ -3811,13 +4892,13 @@
               </a:spcAft>
             </a:pPr>
             <a:r>
-              <a:rPr sz="1200">
+              <a:rPr sz="1300">
                 <a:solidFill>
                   <a:srgbClr val="3D5466"/>
                 </a:solidFill>
                 <a:latin typeface="Arial"/>
               </a:rPr>
-              <a:t>Beraterin Schmidt stellt fest: Bäckerei Weber KG, Linie 80.000 €, seit 6 Wochen durchgehend bei 95–100 % ausgelastet, in einer Woche zweimal kurz drüber.</a:t>
+              <a:t>▸  Bei Erstverpfändung einer Immobilie und Krediten typischerweise ab 150.000–300 T€ (bankindividuell – Grenze mit Marktfolge klären)</a:t>
             </a:r>
           </a:p>
           <a:p>
@@ -3830,13 +4911,13 @@
               </a:spcAft>
             </a:pPr>
             <a:r>
-              <a:rPr sz="1200">
+              <a:rPr sz="1300">
                 <a:solidFill>
                   <a:srgbClr val="3D5466"/>
                 </a:solidFill>
                 <a:latin typeface="Arial"/>
               </a:rPr>
-              <a:t>Analysefragen für Kontokorrent:</a:t>
+              <a:t>▸  Bei wesentlicher Wertveränderung (Umbau, Schaden, Marktveränderung)</a:t>
             </a:r>
           </a:p>
           <a:p>
@@ -3849,13 +4930,13 @@
               </a:spcAft>
             </a:pPr>
             <a:r>
-              <a:rPr sz="1200">
+              <a:rPr sz="1300">
                 <a:solidFill>
                   <a:srgbClr val="3D5466"/>
                 </a:solidFill>
                 <a:latin typeface="Arial"/>
               </a:rPr>
-              <a:t>Mögliche Entscheidungen:</a:t>
+              <a:t>▸  Bei Verlängerung mit mehr als 5 Jahren ohne zwischenzeitliches Update</a:t>
             </a:r>
           </a:p>
           <a:p>
@@ -3868,13 +4949,13 @@
               </a:spcAft>
             </a:pPr>
             <a:r>
-              <a:rPr sz="1300">
+              <a:rPr sz="1200">
                 <a:solidFill>
                   <a:srgbClr val="3D5466"/>
                 </a:solidFill>
                 <a:latin typeface="Arial"/>
               </a:rPr>
-              <a:t>▸  Temporärer saisonaler Überzug, stabile Bonität: Dulden mit Dokumentation</a:t>
+              <a:t>Wann reicht eine Plausibilisierung?</a:t>
             </a:r>
           </a:p>
           <a:p>
@@ -3893,7 +4974,7 @@
                 </a:solidFill>
                 <a:latin typeface="Arial"/>
               </a:rPr>
-              <a:t>▸  Strukturelle Auslastung, gute Bonität: Linienerhöhung prüfen (mit Analyse Feld 2 und 3)</a:t>
+              <a:t>▸  Bei kleinen Beträgen und gut bekannten Objekten kann der Berater eine Marktplausibilisierung vornehmen (Vergleichspreise Onlineportale, Gespräch mit lokalem Makler)</a:t>
             </a:r>
           </a:p>
           <a:p>
@@ -3912,26 +4993,7 @@
                 </a:solidFill>
                 <a:latin typeface="Arial"/>
               </a:rPr>
-              <a:t>▸  Überzug + Warnsignale: Sofort persönliches Gespräch, ggf. Frühwarnmeldung</a:t>
-            </a:r>
-          </a:p>
-          <a:p>
-            <a:pPr>
-              <a:spcBef>
-                <a:spcPts val="600"/>
-              </a:spcBef>
-              <a:spcAft>
-                <a:spcPts val="200"/>
-              </a:spcAft>
-            </a:pPr>
-            <a:r>
-              <a:rPr sz="1200" i="1">
-                <a:solidFill>
-                  <a:srgbClr val="3D5466"/>
-                </a:solidFill>
-                <a:latin typeface="Arial"/>
-              </a:rPr>
-              <a:t>→  Wichtig: Jede Überzugsduldung – auch eine kurzfristige – muss dokumentiert werden (MaRisk BTO 1.1). Nicht dokumentierte Überzüge sind ein Prüfungsrisiko.</a:t>
+              <a:t>▸  Diese Schätzung muss dokumentiert und dem Kreditbeschluss beigefügt werden</a:t>
             </a:r>
           </a:p>
           <a:p>
@@ -3950,7 +5012,64 @@
                 </a:solidFill>
                 <a:latin typeface="Arial"/>
               </a:rPr>
-              <a:t>Entscheidungsmatrix: Wann ist eine neue Kreditvorlage Pflicht?</a:t>
+              <a:t>Alte Gutachten – Faustregel:</a:t>
+            </a:r>
+          </a:p>
+          <a:p>
+            <a:pPr>
+              <a:spcBef>
+                <a:spcPts val="400"/>
+              </a:spcBef>
+              <a:spcAft>
+                <a:spcPts val="200"/>
+              </a:spcAft>
+            </a:pPr>
+            <a:r>
+              <a:rPr sz="1300">
+                <a:solidFill>
+                  <a:srgbClr val="3D5466"/>
+                </a:solidFill>
+                <a:latin typeface="Arial"/>
+              </a:rPr>
+              <a:t>▸  Gutachten älter als 3 Jahre: Abschlag von 10–20 % auf den damaligen Wert je nach Marktentwicklung</a:t>
+            </a:r>
+          </a:p>
+          <a:p>
+            <a:pPr>
+              <a:spcBef>
+                <a:spcPts val="400"/>
+              </a:spcBef>
+              <a:spcAft>
+                <a:spcPts val="200"/>
+              </a:spcAft>
+            </a:pPr>
+            <a:r>
+              <a:rPr sz="1300">
+                <a:solidFill>
+                  <a:srgbClr val="3D5466"/>
+                </a:solidFill>
+                <a:latin typeface="Arial"/>
+              </a:rPr>
+              <a:t>▸  Gutachten älter als 5 Jahre: Neugutachten oder erheblicher konservativer Abschlag empfohlen</a:t>
+            </a:r>
+          </a:p>
+          <a:p>
+            <a:pPr>
+              <a:spcBef>
+                <a:spcPts val="400"/>
+              </a:spcBef>
+              <a:spcAft>
+                <a:spcPts val="200"/>
+              </a:spcAft>
+            </a:pPr>
+            <a:r>
+              <a:rPr sz="1300">
+                <a:solidFill>
+                  <a:srgbClr val="3D5466"/>
+                </a:solidFill>
+                <a:latin typeface="Arial"/>
+              </a:rPr>
+              <a:t>▸  Bei Gewerbeimmobilien: Marktentwicklung oft volatiler als bei Wohnimmobilien – früher erneuern</a:t>
             </a:r>
           </a:p>
         </p:txBody>
@@ -4288,7 +5407,7 @@
                 </a:solidFill>
                 <a:latin typeface="Source Serif 4"/>
               </a:rPr>
-              <a:t>4.3c Checkliste: Bestandskredit in der Krise – erste Schritte</a:t>
+              <a:t>4.3b Betriebsmittelkredite und Kontokorrent: Kurzfall</a:t>
             </a:r>
           </a:p>
         </p:txBody>
@@ -4330,7 +5449,7 @@
                 </a:solidFill>
                 <a:latin typeface="Arial"/>
               </a:rPr>
-              <a:t>Die schwierigste Kreditentscheidung ist nicht die Neuvergabe, sondern: Was tue ich, wenn ein Bestandskunde in Schieflage gerät?</a:t>
+              <a:t>Nicht alle Kreditentscheidungen sind langfristige Investitionskredite. Häufiger Alltag: KK-Linie läuft an ihre Grenze oder wird regelmäßig überzogen.</a:t>
             </a:r>
           </a:p>
           <a:p>
@@ -4349,7 +5468,121 @@
                 </a:solidFill>
                 <a:latin typeface="Arial"/>
               </a:rPr>
-              <a:t>Diese Situation ist emotional belastend (langjährige Kundenbeziehung) und rechtlich heikel. Erste Schritte:</a:t>
+              <a:t>Kurzfall: Bäckerei Weber KG, Überzug KK-Linie</a:t>
+            </a:r>
+          </a:p>
+          <a:p>
+            <a:pPr>
+              <a:spcBef>
+                <a:spcPts val="400"/>
+              </a:spcBef>
+              <a:spcAft>
+                <a:spcPts val="200"/>
+              </a:spcAft>
+            </a:pPr>
+            <a:r>
+              <a:rPr sz="1200">
+                <a:solidFill>
+                  <a:srgbClr val="3D5466"/>
+                </a:solidFill>
+                <a:latin typeface="Arial"/>
+              </a:rPr>
+              <a:t>Beraterin Schmidt stellt fest: Bäckerei Weber KG, Linie 80.000 €, seit 6 Wochen durchgehend bei 95–100 % ausgelastet, in einer Woche zweimal kurz drüber.</a:t>
+            </a:r>
+          </a:p>
+          <a:p>
+            <a:pPr>
+              <a:spcBef>
+                <a:spcPts val="400"/>
+              </a:spcBef>
+              <a:spcAft>
+                <a:spcPts val="200"/>
+              </a:spcAft>
+            </a:pPr>
+            <a:r>
+              <a:rPr sz="1200">
+                <a:solidFill>
+                  <a:srgbClr val="3D5466"/>
+                </a:solidFill>
+                <a:latin typeface="Arial"/>
+              </a:rPr>
+              <a:t>Analysefragen für Kontokorrent:</a:t>
+            </a:r>
+          </a:p>
+          <a:p>
+            <a:pPr>
+              <a:spcBef>
+                <a:spcPts val="400"/>
+              </a:spcBef>
+              <a:spcAft>
+                <a:spcPts val="200"/>
+              </a:spcAft>
+            </a:pPr>
+            <a:r>
+              <a:rPr sz="1200">
+                <a:solidFill>
+                  <a:srgbClr val="3D5466"/>
+                </a:solidFill>
+                <a:latin typeface="Arial"/>
+              </a:rPr>
+              <a:t>Mögliche Entscheidungen:</a:t>
+            </a:r>
+          </a:p>
+          <a:p>
+            <a:pPr>
+              <a:spcBef>
+                <a:spcPts val="400"/>
+              </a:spcBef>
+              <a:spcAft>
+                <a:spcPts val="200"/>
+              </a:spcAft>
+            </a:pPr>
+            <a:r>
+              <a:rPr sz="1300">
+                <a:solidFill>
+                  <a:srgbClr val="3D5466"/>
+                </a:solidFill>
+                <a:latin typeface="Arial"/>
+              </a:rPr>
+              <a:t>▸  Temporärer saisonaler Überzug, stabile Bonität: Dulden mit Dokumentation</a:t>
+            </a:r>
+          </a:p>
+          <a:p>
+            <a:pPr>
+              <a:spcBef>
+                <a:spcPts val="400"/>
+              </a:spcBef>
+              <a:spcAft>
+                <a:spcPts val="200"/>
+              </a:spcAft>
+            </a:pPr>
+            <a:r>
+              <a:rPr sz="1300">
+                <a:solidFill>
+                  <a:srgbClr val="3D5466"/>
+                </a:solidFill>
+                <a:latin typeface="Arial"/>
+              </a:rPr>
+              <a:t>▸  Strukturelle Auslastung, gute Bonität: Linienerhöhung prüfen (mit Analyse Feld 2 und 3)</a:t>
+            </a:r>
+          </a:p>
+          <a:p>
+            <a:pPr>
+              <a:spcBef>
+                <a:spcPts val="400"/>
+              </a:spcBef>
+              <a:spcAft>
+                <a:spcPts val="200"/>
+              </a:spcAft>
+            </a:pPr>
+            <a:r>
+              <a:rPr sz="1300">
+                <a:solidFill>
+                  <a:srgbClr val="3D5466"/>
+                </a:solidFill>
+                <a:latin typeface="Arial"/>
+              </a:rPr>
+              <a:t>▸  Überzug + Warnsignale: Sofort persönliches Gespräch, ggf. Frühwarnmeldung</a:t>
             </a:r>
           </a:p>
           <a:p>
@@ -4368,7 +5601,26 @@
                 </a:solidFill>
                 <a:latin typeface="Arial"/>
               </a:rPr>
-              <a:t>→  Praxistipp: Wer früh eskaliert und dokumentiert, schützt sich selbst und gibt dem Kunden eine echte Chance. Wer zu lange alleine trägt, verliert beides.</a:t>
+              <a:t>→  Wichtig: Jede Überzugsduldung – auch eine kurzfristige – muss dokumentiert werden (MaRisk BTO 1.1). Nicht dokumentierte Überzüge sind ein Prüfungsrisiko.</a:t>
+            </a:r>
+          </a:p>
+          <a:p>
+            <a:pPr>
+              <a:spcBef>
+                <a:spcPts val="400"/>
+              </a:spcBef>
+              <a:spcAft>
+                <a:spcPts val="200"/>
+              </a:spcAft>
+            </a:pPr>
+            <a:r>
+              <a:rPr sz="1200">
+                <a:solidFill>
+                  <a:srgbClr val="3D5466"/>
+                </a:solidFill>
+                <a:latin typeface="Arial"/>
+              </a:rPr>
+              <a:t>Entscheidungsmatrix: Wann ist eine neue Kreditvorlage Pflicht?</a:t>
             </a:r>
           </a:p>
         </p:txBody>
@@ -4706,7 +5958,7 @@
                 </a:solidFill>
                 <a:latin typeface="Source Serif 4"/>
               </a:rPr>
-              <a:t>Praxisfall: Metallbau Schnell GmbH (Heilbronn, fiktiv)</a:t>
+              <a:t>4.3c Checkliste: Bestandskredit in der Krise – erste Schritte</a:t>
             </a:r>
           </a:p>
         </p:txBody>
@@ -4732,25 +5984,6 @@
             <a:spAutoFit/>
           </a:bodyPr>
           <a:lstStyle/>
-          <a:p>
-            <a:pPr>
-              <a:spcBef>
-                <a:spcPts val="1000"/>
-              </a:spcBef>
-              <a:spcAft>
-                <a:spcPts val="200"/>
-              </a:spcAft>
-            </a:pPr>
-            <a:r>
-              <a:rPr sz="800" b="1">
-                <a:solidFill>
-                  <a:srgbClr val="78808C"/>
-                </a:solidFill>
-                <a:latin typeface="JetBrains Mono"/>
-              </a:rPr>
-              <a:t>4.4.1 UNTERNEHMENSPROFIL</a:t>
-            </a:r>
-          </a:p>
           <a:p>
             <a:pPr>
               <a:spcBef>
@@ -4767,7 +6000,7 @@
                 </a:solidFill>
                 <a:latin typeface="Arial"/>
               </a:rPr>
-              <a:t>Kreditantrag:</a:t>
+              <a:t>Die schwierigste Kreditentscheidung ist nicht die Neuvergabe, sondern: Was tue ich, wenn ein Bestandskunde in Schieflage gerät?</a:t>
             </a:r>
           </a:p>
           <a:p>
@@ -4780,184 +6013,32 @@
               </a:spcAft>
             </a:pPr>
             <a:r>
-              <a:rPr sz="1300">
+              <a:rPr sz="1200">
                 <a:solidFill>
                   <a:srgbClr val="3D5466"/>
                 </a:solidFill>
                 <a:latin typeface="Arial"/>
               </a:rPr>
-              <a:t>▸  Art: Investitionskredit</a:t>
+              <a:t>Diese Situation ist emotional belastend (langjährige Kundenbeziehung) und rechtlich heikel. Erste Schritte:</a:t>
             </a:r>
           </a:p>
           <a:p>
             <a:pPr>
               <a:spcBef>
-                <a:spcPts val="400"/>
+                <a:spcPts val="600"/>
               </a:spcBef>
               <a:spcAft>
                 <a:spcPts val="200"/>
               </a:spcAft>
             </a:pPr>
             <a:r>
-              <a:rPr sz="1300">
+              <a:rPr sz="1200" i="1">
                 <a:solidFill>
                   <a:srgbClr val="3D5466"/>
                 </a:solidFill>
                 <a:latin typeface="Arial"/>
               </a:rPr>
-              <a:t>▸  Betrag: 420.000 €</a:t>
-            </a:r>
-          </a:p>
-          <a:p>
-            <a:pPr>
-              <a:spcBef>
-                <a:spcPts val="400"/>
-              </a:spcBef>
-              <a:spcAft>
-                <a:spcPts val="200"/>
-              </a:spcAft>
-            </a:pPr>
-            <a:r>
-              <a:rPr sz="1300">
-                <a:solidFill>
-                  <a:srgbClr val="3D5466"/>
-                </a:solidFill>
-                <a:latin typeface="Arial"/>
-              </a:rPr>
-              <a:t>▸  Verwendung: 5-Achs-CNC-Drehmaschine Heidenhain TNC 640 (280.000 €) + Hallenerweiterung (140.000 €)</a:t>
-            </a:r>
-          </a:p>
-          <a:p>
-            <a:pPr>
-              <a:spcBef>
-                <a:spcPts val="400"/>
-              </a:spcBef>
-              <a:spcAft>
-                <a:spcPts val="200"/>
-              </a:spcAft>
-            </a:pPr>
-            <a:r>
-              <a:rPr sz="1300">
-                <a:solidFill>
-                  <a:srgbClr val="3D5466"/>
-                </a:solidFill>
-                <a:latin typeface="Arial"/>
-              </a:rPr>
-              <a:t>▸  Laufzeit: 7 Jahre</a:t>
-            </a:r>
-          </a:p>
-          <a:p>
-            <a:pPr>
-              <a:spcBef>
-                <a:spcPts val="1000"/>
-              </a:spcBef>
-              <a:spcAft>
-                <a:spcPts val="200"/>
-              </a:spcAft>
-            </a:pPr>
-            <a:r>
-              <a:rPr sz="800" b="1">
-                <a:solidFill>
-                  <a:srgbClr val="78808C"/>
-                </a:solidFill>
-                <a:latin typeface="JetBrains Mono"/>
-              </a:rPr>
-              <a:t>4.4.2 FINANZLAGE: 3-JAHRESVERGLEICH</a:t>
-            </a:r>
-          </a:p>
-          <a:p>
-            <a:pPr>
-              <a:spcBef>
-                <a:spcPts val="400"/>
-              </a:spcBef>
-              <a:spcAft>
-                <a:spcPts val="200"/>
-              </a:spcAft>
-            </a:pPr>
-            <a:r>
-              <a:rPr sz="1200">
-                <a:solidFill>
-                  <a:srgbClr val="3D5466"/>
-                </a:solidFill>
-                <a:latin typeface="Arial"/>
-              </a:rPr>
-              <a:t>Bilanzauszüge (in T€):</a:t>
-            </a:r>
-          </a:p>
-          <a:p>
-            <a:pPr>
-              <a:spcBef>
-                <a:spcPts val="400"/>
-              </a:spcBef>
-              <a:spcAft>
-                <a:spcPts val="200"/>
-              </a:spcAft>
-            </a:pPr>
-            <a:r>
-              <a:rPr sz="1200">
-                <a:solidFill>
-                  <a:srgbClr val="3D5466"/>
-                </a:solidFill>
-                <a:latin typeface="Arial"/>
-              </a:rPr>
-              <a:t>Gewinn- und Verlustrechnung (in T€):</a:t>
-            </a:r>
-          </a:p>
-          <a:p>
-            <a:pPr>
-              <a:spcBef>
-                <a:spcPts val="400"/>
-              </a:spcBef>
-              <a:spcAft>
-                <a:spcPts val="200"/>
-              </a:spcAft>
-            </a:pPr>
-            <a:r>
-              <a:rPr sz="1200">
-                <a:solidFill>
-                  <a:srgbClr val="3D5466"/>
-                </a:solidFill>
-                <a:latin typeface="Arial"/>
-              </a:rPr>
-              <a:t>Kennzahlenanalyse:</a:t>
-            </a:r>
-          </a:p>
-          <a:p>
-            <a:pPr>
-              <a:spcBef>
-                <a:spcPts val="1000"/>
-              </a:spcBef>
-              <a:spcAft>
-                <a:spcPts val="200"/>
-              </a:spcAft>
-            </a:pPr>
-            <a:r>
-              <a:rPr sz="800" b="1">
-                <a:solidFill>
-                  <a:srgbClr val="78808C"/>
-                </a:solidFill>
-                <a:latin typeface="JetBrains Mono"/>
-              </a:rPr>
-              <a:t>4.4.3 8-FELDER-ANALYSE: METALLBAU SCHNELL GMBH</a:t>
-            </a:r>
-          </a:p>
-          <a:p>
-            <a:pPr>
-              <a:spcBef>
-                <a:spcPts val="400"/>
-              </a:spcBef>
-              <a:spcAft>
-                <a:spcPts val="200"/>
-              </a:spcAft>
-            </a:pPr>
-            <a:r>
-              <a:rPr sz="1200">
-                <a:solidFill>
-                  <a:srgbClr val="3D5466"/>
-                </a:solidFill>
-                <a:latin typeface="Arial"/>
-              </a:rPr>
-              <a:t>Feld 1 – Zweck &amp; Verwendung | Bewertung: 5/5 POSITIV</a:t>
+              <a:t>→  Praxistipp: Wer früh eskaliert und dokumentiert, schützt sich selbst und gibt dem Kunden eine echte Chance. Wer zu lange alleine trägt, verliert beides.</a:t>
             </a:r>
           </a:p>
         </p:txBody>
@@ -5295,7 +6376,7 @@
                 </a:solidFill>
                 <a:latin typeface="Source Serif 4"/>
               </a:rPr>
-              <a:t>Arbeitsblatt: 8-Felder-Kreditanalyse-Template</a:t>
+              <a:t>Praxisfall: Metallbau Schnell GmbH (Heilbronn, fiktiv)</a:t>
             </a:r>
           </a:p>
         </p:txBody>
@@ -5321,6 +6402,25 @@
             <a:spAutoFit/>
           </a:bodyPr>
           <a:lstStyle/>
+          <a:p>
+            <a:pPr>
+              <a:spcBef>
+                <a:spcPts val="1000"/>
+              </a:spcBef>
+              <a:spcAft>
+                <a:spcPts val="200"/>
+              </a:spcAft>
+            </a:pPr>
+            <a:r>
+              <a:rPr sz="800" b="1">
+                <a:solidFill>
+                  <a:srgbClr val="78808C"/>
+                </a:solidFill>
+                <a:latin typeface="JetBrains Mono"/>
+              </a:rPr>
+              <a:t>4.4.1 UNTERNEHMENSPROFIL</a:t>
+            </a:r>
+          </a:p>
           <a:p>
             <a:pPr>
               <a:spcBef>
@@ -5337,7 +6437,7 @@
                 </a:solidFill>
                 <a:latin typeface="Arial"/>
               </a:rPr>
-              <a:t>KREDIT-ANALYSE FORMULAR</a:t>
+              <a:t>Kreditantrag:</a:t>
             </a:r>
           </a:p>
           <a:p>
@@ -5350,13 +6450,13 @@
               </a:spcAft>
             </a:pPr>
             <a:r>
-              <a:rPr sz="1200">
+              <a:rPr sz="1300">
                 <a:solidFill>
                   <a:srgbClr val="3D5466"/>
                 </a:solidFill>
                 <a:latin typeface="Arial"/>
               </a:rPr>
-              <a:t>Kreditnehmer: _______________ | Kreditnummer: _______________ | Berater/in: _______________ | Datum: ___.____.______</a:t>
+              <a:t>▸  Art: Investitionskredit</a:t>
             </a:r>
           </a:p>
           <a:p>
@@ -5369,13 +6469,13 @@
               </a:spcAft>
             </a:pPr>
             <a:r>
-              <a:rPr sz="1200">
+              <a:rPr sz="1300">
                 <a:solidFill>
                   <a:srgbClr val="3D5466"/>
                 </a:solidFill>
                 <a:latin typeface="Arial"/>
               </a:rPr>
-              <a:t>Feld 1 – Zweck &amp; Verwendung (Gewichtung: 10 %)</a:t>
+              <a:t>▸  Betrag: 420.000 €</a:t>
             </a:r>
           </a:p>
           <a:p>
@@ -5388,13 +6488,13 @@
               </a:spcAft>
             </a:pPr>
             <a:r>
-              <a:rPr sz="1200">
+              <a:rPr sz="1300">
                 <a:solidFill>
                   <a:srgbClr val="3D5466"/>
                 </a:solidFill>
                 <a:latin typeface="Arial"/>
               </a:rPr>
-              <a:t>Ist der Verwendungszweck konkret, prüfbar und wirtschaftlich sinnvoll?</a:t>
+              <a:t>▸  Verwendung: 5-Achs-CNC-Drehmaschine Heidenhain TNC 640 (280.000 €) + Hallenerweiterung (140.000 €)</a:t>
             </a:r>
           </a:p>
           <a:p>
@@ -5407,13 +6507,32 @@
               </a:spcAft>
             </a:pPr>
             <a:r>
-              <a:rPr sz="1200">
+              <a:rPr sz="1300">
                 <a:solidFill>
                   <a:srgbClr val="3D5466"/>
                 </a:solidFill>
                 <a:latin typeface="Arial"/>
               </a:rPr>
-              <a:t>Bewertung: ☐ 1 (kritisch) ☐ 2 ☐ 3 (ausreichend) ☐ 4 ☐ 5 (sehr gut)</a:t>
+              <a:t>▸  Laufzeit: 7 Jahre</a:t>
+            </a:r>
+          </a:p>
+          <a:p>
+            <a:pPr>
+              <a:spcBef>
+                <a:spcPts val="1000"/>
+              </a:spcBef>
+              <a:spcAft>
+                <a:spcPts val="200"/>
+              </a:spcAft>
+            </a:pPr>
+            <a:r>
+              <a:rPr sz="800" b="1">
+                <a:solidFill>
+                  <a:srgbClr val="78808C"/>
+                </a:solidFill>
+                <a:latin typeface="JetBrains Mono"/>
+              </a:rPr>
+              <a:t>4.4.2 FINANZLAGE: 3-JAHRESVERGLEICH</a:t>
             </a:r>
           </a:p>
           <a:p>
@@ -5432,7 +6551,7 @@
                 </a:solidFill>
                 <a:latin typeface="Arial"/>
               </a:rPr>
-              <a:t>Begründung: _______________</a:t>
+              <a:t>Bilanzauszüge (in T€):</a:t>
             </a:r>
           </a:p>
           <a:p>
@@ -5451,7 +6570,7 @@
                 </a:solidFill>
                 <a:latin typeface="Arial"/>
               </a:rPr>
-              <a:t>Risiko identifiziert? ☐ Ja ☐ Nein | Mitigation: _______________</a:t>
+              <a:t>Gewinn- und Verlustrechnung (in T€):</a:t>
             </a:r>
           </a:p>
           <a:p>
@@ -5470,7 +6589,26 @@
                 </a:solidFill>
                 <a:latin typeface="Arial"/>
               </a:rPr>
-              <a:t>Feld 2 – Rückzahlungsquelle (Gewichtung: 25 %)</a:t>
+              <a:t>Kennzahlenanalyse:</a:t>
+            </a:r>
+          </a:p>
+          <a:p>
+            <a:pPr>
+              <a:spcBef>
+                <a:spcPts val="1000"/>
+              </a:spcBef>
+              <a:spcAft>
+                <a:spcPts val="200"/>
+              </a:spcAft>
+            </a:pPr>
+            <a:r>
+              <a:rPr sz="800" b="1">
+                <a:solidFill>
+                  <a:srgbClr val="78808C"/>
+                </a:solidFill>
+                <a:latin typeface="JetBrains Mono"/>
+              </a:rPr>
+              <a:t>4.4.3 8-FELDER-ANALYSE: METALLBAU SCHNELL GMBH</a:t>
             </a:r>
           </a:p>
           <a:p>
@@ -5489,9 +6627,370 @@
                 </a:solidFill>
                 <a:latin typeface="Arial"/>
               </a:rPr>
-              <a:t>EBITDA (aktuell): ___ T€ | Verfügbarer Cashflow: ___ T€ | Kreditrate p. a.: ___ T€</a:t>
-            </a:r>
-          </a:p>
+              <a:t>Feld 1 – Zweck &amp; Verwendung | Bewertung: 5/5 POSITIV</a:t>
+            </a:r>
+          </a:p>
+        </p:txBody>
+      </p:sp>
+      <p:sp>
+        <p:nvSpPr>
+          <p:cNvPr id="9" name="Rectangle 8"/>
+          <p:cNvSpPr/>
+          <p:nvPr/>
+        </p:nvSpPr>
+        <p:spPr>
+          <a:xfrm>
+            <a:off x="0" y="6510528"/>
+            <a:ext cx="12188952" cy="347472"/>
+          </a:xfrm>
+          <a:prstGeom prst="rect">
+            <a:avLst/>
+          </a:prstGeom>
+          <a:solidFill>
+            <a:srgbClr val="0A1937"/>
+          </a:solidFill>
+          <a:ln>
+            <a:noFill/>
+          </a:ln>
+        </p:spPr>
+        <p:style>
+          <a:lnRef idx="1">
+            <a:schemeClr val="accent1"/>
+          </a:lnRef>
+          <a:fillRef idx="3">
+            <a:schemeClr val="accent1"/>
+          </a:fillRef>
+          <a:effectRef idx="2">
+            <a:schemeClr val="accent1"/>
+          </a:effectRef>
+          <a:fontRef idx="minor">
+            <a:schemeClr val="lt1"/>
+          </a:fontRef>
+        </p:style>
+        <p:txBody>
+          <a:bodyPr rtlCol="0" anchor="ctr"/>
+          <a:lstStyle/>
+          <a:p>
+            <a:pPr algn="ctr"/>
+          </a:p>
+        </p:txBody>
+      </p:sp>
+      <p:sp>
+        <p:nvSpPr>
+          <p:cNvPr id="10" name="TextBox 9"/>
+          <p:cNvSpPr txBox="1"/>
+          <p:nvPr/>
+        </p:nvSpPr>
+        <p:spPr>
+          <a:xfrm>
+            <a:off x="685800" y="6583680"/>
+            <a:ext cx="6490411" cy="256032"/>
+          </a:xfrm>
+          <a:prstGeom prst="rect">
+            <a:avLst/>
+          </a:prstGeom>
+          <a:noFill/>
+        </p:spPr>
+        <p:txBody>
+          <a:bodyPr wrap="none">
+            <a:spAutoFit/>
+          </a:bodyPr>
+          <a:lstStyle/>
+          <a:p>
+            <a:pPr algn="l"/>
+            <a:r>
+              <a:rPr sz="700">
+                <a:solidFill>
+                  <a:srgbClr val="A0B4D2"/>
+                </a:solidFill>
+                <a:latin typeface="JetBrains Mono"/>
+              </a:rPr>
+              <a:t>Benedikt Zoller Coaching  ·  FKB Campus  ·  M21</a:t>
+            </a:r>
+          </a:p>
+        </p:txBody>
+      </p:sp>
+    </p:spTree>
+  </p:cSld>
+  <p:clrMapOvr>
+    <a:masterClrMapping/>
+  </p:clrMapOvr>
+</p:sld>
+</file>
+
+<file path=ppt/slides/slide14.xml><?xml version="1.0" encoding="utf-8"?>
+<p:sld xmlns:a="http://schemas.openxmlformats.org/drawingml/2006/main" xmlns:p="http://schemas.openxmlformats.org/presentationml/2006/main" xmlns:r="http://schemas.openxmlformats.org/officeDocument/2006/relationships">
+  <p:cSld>
+    <p:spTree>
+      <p:nvGrpSpPr>
+        <p:cNvPr id="1" name=""/>
+        <p:cNvGrpSpPr/>
+        <p:nvPr/>
+      </p:nvGrpSpPr>
+      <p:grpSpPr/>
+      <p:sp>
+        <p:nvSpPr>
+          <p:cNvPr id="2" name="Rectangle 1"/>
+          <p:cNvSpPr/>
+          <p:nvPr/>
+        </p:nvSpPr>
+        <p:spPr>
+          <a:xfrm>
+            <a:off x="0" y="0"/>
+            <a:ext cx="12188952" cy="6858000"/>
+          </a:xfrm>
+          <a:prstGeom prst="rect">
+            <a:avLst/>
+          </a:prstGeom>
+          <a:solidFill>
+            <a:srgbClr val="EDEDF3"/>
+          </a:solidFill>
+          <a:ln>
+            <a:noFill/>
+          </a:ln>
+        </p:spPr>
+        <p:style>
+          <a:lnRef idx="1">
+            <a:schemeClr val="accent1"/>
+          </a:lnRef>
+          <a:fillRef idx="3">
+            <a:schemeClr val="accent1"/>
+          </a:fillRef>
+          <a:effectRef idx="2">
+            <a:schemeClr val="accent1"/>
+          </a:effectRef>
+          <a:fontRef idx="minor">
+            <a:schemeClr val="lt1"/>
+          </a:fontRef>
+        </p:style>
+        <p:txBody>
+          <a:bodyPr rtlCol="0" anchor="ctr"/>
+          <a:lstStyle/>
+          <a:p>
+            <a:pPr algn="ctr"/>
+          </a:p>
+        </p:txBody>
+      </p:sp>
+      <p:sp>
+        <p:nvSpPr>
+          <p:cNvPr id="3" name="Rectangle 2"/>
+          <p:cNvSpPr/>
+          <p:nvPr/>
+        </p:nvSpPr>
+        <p:spPr>
+          <a:xfrm>
+            <a:off x="0" y="0"/>
+            <a:ext cx="12188952" cy="50292"/>
+          </a:xfrm>
+          <a:prstGeom prst="rect">
+            <a:avLst/>
+          </a:prstGeom>
+          <a:solidFill>
+            <a:srgbClr val="1F2C56"/>
+          </a:solidFill>
+          <a:ln>
+            <a:noFill/>
+          </a:ln>
+        </p:spPr>
+        <p:style>
+          <a:lnRef idx="1">
+            <a:schemeClr val="accent1"/>
+          </a:lnRef>
+          <a:fillRef idx="3">
+            <a:schemeClr val="accent1"/>
+          </a:fillRef>
+          <a:effectRef idx="2">
+            <a:schemeClr val="accent1"/>
+          </a:effectRef>
+          <a:fontRef idx="minor">
+            <a:schemeClr val="lt1"/>
+          </a:fontRef>
+        </p:style>
+        <p:txBody>
+          <a:bodyPr rtlCol="0" anchor="ctr"/>
+          <a:lstStyle/>
+          <a:p>
+            <a:pPr algn="ctr"/>
+          </a:p>
+        </p:txBody>
+      </p:sp>
+      <p:sp>
+        <p:nvSpPr>
+          <p:cNvPr id="4" name="TextBox 3"/>
+          <p:cNvSpPr txBox="1"/>
+          <p:nvPr/>
+        </p:nvSpPr>
+        <p:spPr>
+          <a:xfrm>
+            <a:off x="685800" y="109728"/>
+            <a:ext cx="10817352" cy="228600"/>
+          </a:xfrm>
+          <a:prstGeom prst="rect">
+            <a:avLst/>
+          </a:prstGeom>
+          <a:noFill/>
+        </p:spPr>
+        <p:txBody>
+          <a:bodyPr wrap="none">
+            <a:spAutoFit/>
+          </a:bodyPr>
+          <a:lstStyle/>
+          <a:p>
+            <a:pPr algn="l"/>
+            <a:r>
+              <a:rPr sz="750">
+                <a:solidFill>
+                  <a:srgbClr val="78808C"/>
+                </a:solidFill>
+                <a:latin typeface="JetBrains Mono"/>
+              </a:rPr>
+              <a:t>M21  ·  INHALT</a:t>
+            </a:r>
+          </a:p>
+        </p:txBody>
+      </p:sp>
+      <p:sp>
+        <p:nvSpPr>
+          <p:cNvPr id="5" name="Rectangle 4"/>
+          <p:cNvSpPr/>
+          <p:nvPr/>
+        </p:nvSpPr>
+        <p:spPr>
+          <a:xfrm>
+            <a:off x="0" y="1234440"/>
+            <a:ext cx="12188952" cy="12700"/>
+          </a:xfrm>
+          <a:prstGeom prst="rect">
+            <a:avLst/>
+          </a:prstGeom>
+          <a:solidFill>
+            <a:srgbClr val="D8DFE4"/>
+          </a:solidFill>
+          <a:ln>
+            <a:noFill/>
+          </a:ln>
+        </p:spPr>
+        <p:style>
+          <a:lnRef idx="1">
+            <a:schemeClr val="accent1"/>
+          </a:lnRef>
+          <a:fillRef idx="3">
+            <a:schemeClr val="accent1"/>
+          </a:fillRef>
+          <a:effectRef idx="2">
+            <a:schemeClr val="accent1"/>
+          </a:effectRef>
+          <a:fontRef idx="minor">
+            <a:schemeClr val="lt1"/>
+          </a:fontRef>
+        </p:style>
+        <p:txBody>
+          <a:bodyPr rtlCol="0" anchor="ctr"/>
+          <a:lstStyle/>
+          <a:p>
+            <a:pPr algn="ctr"/>
+          </a:p>
+        </p:txBody>
+      </p:sp>
+      <p:sp>
+        <p:nvSpPr>
+          <p:cNvPr id="6" name="Rectangle 5"/>
+          <p:cNvSpPr/>
+          <p:nvPr/>
+        </p:nvSpPr>
+        <p:spPr>
+          <a:xfrm>
+            <a:off x="685800" y="502920"/>
+            <a:ext cx="36576" cy="658368"/>
+          </a:xfrm>
+          <a:prstGeom prst="rect">
+            <a:avLst/>
+          </a:prstGeom>
+          <a:solidFill>
+            <a:srgbClr val="D9C089"/>
+          </a:solidFill>
+          <a:ln>
+            <a:noFill/>
+          </a:ln>
+        </p:spPr>
+        <p:style>
+          <a:lnRef idx="1">
+            <a:schemeClr val="accent1"/>
+          </a:lnRef>
+          <a:fillRef idx="3">
+            <a:schemeClr val="accent1"/>
+          </a:fillRef>
+          <a:effectRef idx="2">
+            <a:schemeClr val="accent1"/>
+          </a:effectRef>
+          <a:fontRef idx="minor">
+            <a:schemeClr val="lt1"/>
+          </a:fontRef>
+        </p:style>
+        <p:txBody>
+          <a:bodyPr rtlCol="0" anchor="ctr"/>
+          <a:lstStyle/>
+          <a:p>
+            <a:pPr algn="ctr"/>
+          </a:p>
+        </p:txBody>
+      </p:sp>
+      <p:sp>
+        <p:nvSpPr>
+          <p:cNvPr id="7" name="TextBox 6"/>
+          <p:cNvSpPr txBox="1"/>
+          <p:nvPr/>
+        </p:nvSpPr>
+        <p:spPr>
+          <a:xfrm>
+            <a:off x="813816" y="502920"/>
+            <a:ext cx="10634472" cy="685800"/>
+          </a:xfrm>
+          <a:prstGeom prst="rect">
+            <a:avLst/>
+          </a:prstGeom>
+          <a:noFill/>
+        </p:spPr>
+        <p:txBody>
+          <a:bodyPr wrap="square">
+            <a:spAutoFit/>
+          </a:bodyPr>
+          <a:lstStyle/>
+          <a:p>
+            <a:pPr algn="l"/>
+            <a:r>
+              <a:rPr sz="2400" b="1" i="0">
+                <a:solidFill>
+                  <a:srgbClr val="1F2C56"/>
+                </a:solidFill>
+                <a:latin typeface="Source Serif 4"/>
+              </a:rPr>
+              <a:t>Arbeitsblatt: 8-Felder-Kreditanalyse-Template</a:t>
+            </a:r>
+          </a:p>
+        </p:txBody>
+      </p:sp>
+      <p:sp>
+        <p:nvSpPr>
+          <p:cNvPr id="8" name="TextBox 7"/>
+          <p:cNvSpPr txBox="1"/>
+          <p:nvPr/>
+        </p:nvSpPr>
+        <p:spPr>
+          <a:xfrm>
+            <a:off x="685800" y="1417320"/>
+            <a:ext cx="10817352" cy="5029200"/>
+          </a:xfrm>
+          <a:prstGeom prst="rect">
+            <a:avLst/>
+          </a:prstGeom>
+          <a:noFill/>
+        </p:spPr>
+        <p:txBody>
+          <a:bodyPr wrap="square">
+            <a:spAutoFit/>
+          </a:bodyPr>
+          <a:lstStyle/>
           <a:p>
             <a:pPr>
               <a:spcBef>
@@ -5508,7 +7007,7 @@
                 </a:solidFill>
                 <a:latin typeface="Arial"/>
               </a:rPr>
-              <a:t>Cashflow-Deckungsquote: ___x | Zinsdeckungsquote: ___x | Dyn. Verschuldungsgrad: ___x</a:t>
+              <a:t>KREDIT-ANALYSE FORMULAR</a:t>
             </a:r>
           </a:p>
           <a:p>
@@ -5527,7 +7026,178 @@
                 </a:solidFill>
                 <a:latin typeface="Arial"/>
               </a:rPr>
+              <a:t>Feld 1 – Zweck &amp; Verwendung (Gewichtung: 10 %)</a:t>
+            </a:r>
+          </a:p>
+          <a:p>
+            <a:pPr>
+              <a:spcBef>
+                <a:spcPts val="400"/>
+              </a:spcBef>
+              <a:spcAft>
+                <a:spcPts val="200"/>
+              </a:spcAft>
+            </a:pPr>
+            <a:r>
+              <a:rPr sz="1200">
+                <a:solidFill>
+                  <a:srgbClr val="3D5466"/>
+                </a:solidFill>
+                <a:latin typeface="Arial"/>
+              </a:rPr>
+              <a:t>Ist der Verwendungszweck konkret, prüfbar und wirtschaftlich sinnvoll?</a:t>
+            </a:r>
+          </a:p>
+          <a:p>
+            <a:pPr>
+              <a:spcBef>
+                <a:spcPts val="400"/>
+              </a:spcBef>
+              <a:spcAft>
+                <a:spcPts val="200"/>
+              </a:spcAft>
+            </a:pPr>
+            <a:r>
+              <a:rPr sz="1200">
+                <a:solidFill>
+                  <a:srgbClr val="3D5466"/>
+                </a:solidFill>
+                <a:latin typeface="Arial"/>
+              </a:rPr>
+              <a:t>Bewertung: ☐ 1 (kritisch) ☐ 2 ☐ 3 (ausreichend) ☐ 4 ☐ 5 (sehr gut)</a:t>
+            </a:r>
+          </a:p>
+          <a:p>
+            <a:pPr>
+              <a:spcBef>
+                <a:spcPts val="400"/>
+              </a:spcBef>
+              <a:spcAft>
+                <a:spcPts val="200"/>
+              </a:spcAft>
+            </a:pPr>
+            <a:r>
+              <a:rPr sz="1200">
+                <a:solidFill>
+                  <a:srgbClr val="3D5466"/>
+                </a:solidFill>
+                <a:latin typeface="Arial"/>
+              </a:rPr>
+              <a:t>Feld 2 – Rückzahlungsquelle (Gewichtung: 25 %)</a:t>
+            </a:r>
+          </a:p>
+          <a:p>
+            <a:pPr>
+              <a:spcBef>
+                <a:spcPts val="400"/>
+              </a:spcBef>
+              <a:spcAft>
+                <a:spcPts val="200"/>
+              </a:spcAft>
+            </a:pPr>
+            <a:r>
+              <a:rPr sz="1200">
+                <a:solidFill>
+                  <a:srgbClr val="3D5466"/>
+                </a:solidFill>
+                <a:latin typeface="Arial"/>
+              </a:rPr>
               <a:t>Stress-Szenario (−10 % Umsatz): Deckungsquote sinkt auf ___x</a:t>
+            </a:r>
+          </a:p>
+          <a:p>
+            <a:pPr>
+              <a:spcBef>
+                <a:spcPts val="400"/>
+              </a:spcBef>
+              <a:spcAft>
+                <a:spcPts val="200"/>
+              </a:spcAft>
+            </a:pPr>
+            <a:r>
+              <a:rPr sz="1200">
+                <a:solidFill>
+                  <a:srgbClr val="3D5466"/>
+                </a:solidFill>
+                <a:latin typeface="Arial"/>
+              </a:rPr>
+              <a:t>Bewertung: ☐ 1 ☐ 2 ☐ 3 ☐ 4 ☐ 5</a:t>
+            </a:r>
+          </a:p>
+          <a:p>
+            <a:pPr>
+              <a:spcBef>
+                <a:spcPts val="400"/>
+              </a:spcBef>
+              <a:spcAft>
+                <a:spcPts val="200"/>
+              </a:spcAft>
+            </a:pPr>
+            <a:r>
+              <a:rPr sz="1200">
+                <a:solidFill>
+                  <a:srgbClr val="3D5466"/>
+                </a:solidFill>
+                <a:latin typeface="Arial"/>
+              </a:rPr>
+              <a:t>Feld 3 – Kapitalstruktur (Gewichtung: 15 %)</a:t>
+            </a:r>
+          </a:p>
+          <a:p>
+            <a:pPr>
+              <a:spcBef>
+                <a:spcPts val="400"/>
+              </a:spcBef>
+              <a:spcAft>
+                <a:spcPts val="200"/>
+              </a:spcAft>
+            </a:pPr>
+            <a:r>
+              <a:rPr sz="1200">
+                <a:solidFill>
+                  <a:srgbClr val="3D5466"/>
+                </a:solidFill>
+                <a:latin typeface="Arial"/>
+              </a:rPr>
+              <a:t>Bewertung: ☐ 1 ☐ 2 ☐ 3 ☐ 4 ☐ 5</a:t>
+            </a:r>
+          </a:p>
+          <a:p>
+            <a:pPr>
+              <a:spcBef>
+                <a:spcPts val="400"/>
+              </a:spcBef>
+              <a:spcAft>
+                <a:spcPts val="200"/>
+              </a:spcAft>
+            </a:pPr>
+            <a:r>
+              <a:rPr sz="1200">
+                <a:solidFill>
+                  <a:srgbClr val="3D5466"/>
+                </a:solidFill>
+                <a:latin typeface="Arial"/>
+              </a:rPr>
+              <a:t>Feld 4 – Managementqualität (Gewichtung: 20 %)</a:t>
+            </a:r>
+          </a:p>
+          <a:p>
+            <a:pPr>
+              <a:spcBef>
+                <a:spcPts val="400"/>
+              </a:spcBef>
+              <a:spcAft>
+                <a:spcPts val="200"/>
+              </a:spcAft>
+            </a:pPr>
+            <a:r>
+              <a:rPr sz="1200">
+                <a:solidFill>
+                  <a:srgbClr val="3D5466"/>
+                </a:solidFill>
+                <a:latin typeface="Arial"/>
+              </a:rPr>
+              <a:t>Nachfolge geklärt? ☐ Ja ☐ Nein | Transparenz im Gespräch: ☐ offen ☐ ausweichend</a:t>
             </a:r>
           </a:p>
           <a:p>
@@ -6056,7 +7726,7 @@
             <a:avLst/>
           </a:prstGeom>
           <a:solidFill>
-            <a:srgbClr val="FFFFFF"/>
+            <a:srgbClr val="EDEDF3"/>
           </a:solidFill>
           <a:ln>
             <a:noFill/>
@@ -6157,62 +7827,27 @@
                 </a:solidFill>
                 <a:latin typeface="JetBrains Mono"/>
               </a:rPr>
-              <a:t>M21  ·  SCHAUBILD</a:t>
-            </a:r>
-          </a:p>
-        </p:txBody>
-      </p:sp>
-      <p:sp>
-        <p:nvSpPr>
-          <p:cNvPr id="5" name="TextBox 4"/>
-          <p:cNvSpPr txBox="1"/>
-          <p:nvPr/>
-        </p:nvSpPr>
-        <p:spPr>
-          <a:xfrm>
-            <a:off x="685800" y="502920"/>
-            <a:ext cx="10817352" cy="594360"/>
-          </a:xfrm>
-          <a:prstGeom prst="rect">
-            <a:avLst/>
-          </a:prstGeom>
-          <a:noFill/>
-        </p:spPr>
-        <p:txBody>
-          <a:bodyPr wrap="square">
-            <a:spAutoFit/>
-          </a:bodyPr>
-          <a:lstStyle/>
-          <a:p>
-            <a:pPr algn="l"/>
-            <a:r>
-              <a:rPr sz="2000" b="1" i="0">
-                <a:solidFill>
-                  <a:srgbClr val="1F2C56"/>
-                </a:solidFill>
-                <a:latin typeface="Source Serif 4"/>
-              </a:rPr>
-              <a:t>Handlungsempfehlung Kreditentscheidung</a:t>
-            </a:r>
-          </a:p>
-        </p:txBody>
-      </p:sp>
-      <p:sp>
-        <p:nvSpPr>
-          <p:cNvPr id="6" name="Rectangle 5"/>
+              <a:t>AGENDA  ·  M21</a:t>
+            </a:r>
+          </a:p>
+        </p:txBody>
+      </p:sp>
+      <p:sp>
+        <p:nvSpPr>
+          <p:cNvPr id="5" name="Rectangle 4"/>
           <p:cNvSpPr/>
           <p:nvPr/>
         </p:nvSpPr>
         <p:spPr>
           <a:xfrm>
-            <a:off x="685800" y="1143000"/>
-            <a:ext cx="10817352" cy="25400"/>
+            <a:off x="0" y="1234440"/>
+            <a:ext cx="12188952" cy="12700"/>
           </a:xfrm>
           <a:prstGeom prst="rect">
             <a:avLst/>
           </a:prstGeom>
           <a:solidFill>
-            <a:srgbClr val="D9C089"/>
+            <a:srgbClr val="D8DFE4"/>
           </a:solidFill>
           <a:ln>
             <a:noFill/>
@@ -6240,30 +7875,216 @@
           </a:p>
         </p:txBody>
       </p:sp>
-      <p:pic>
-        <p:nvPicPr>
-          <p:cNvPr id="7" name="Picture 6" descr="image.png"/>
-          <p:cNvPicPr>
-            <a:picLocks noChangeAspect="1"/>
-          </p:cNvPicPr>
-          <p:nvPr/>
-        </p:nvPicPr>
-        <p:blipFill>
-          <a:blip r:embed="rId2"/>
-          <a:stretch>
-            <a:fillRect/>
-          </a:stretch>
-        </p:blipFill>
-        <p:spPr>
-          <a:xfrm>
-            <a:off x="2303489" y="1325880"/>
-            <a:ext cx="7581973" cy="4937760"/>
-          </a:xfrm>
-          <a:prstGeom prst="rect">
-            <a:avLst/>
-          </a:prstGeom>
-        </p:spPr>
-      </p:pic>
+      <p:sp>
+        <p:nvSpPr>
+          <p:cNvPr id="6" name="TextBox 5"/>
+          <p:cNvSpPr txBox="1"/>
+          <p:nvPr/>
+        </p:nvSpPr>
+        <p:spPr>
+          <a:xfrm>
+            <a:off x="685800" y="502920"/>
+            <a:ext cx="10817352" cy="658368"/>
+          </a:xfrm>
+          <a:prstGeom prst="rect">
+            <a:avLst/>
+          </a:prstGeom>
+          <a:noFill/>
+        </p:spPr>
+        <p:txBody>
+          <a:bodyPr wrap="square">
+            <a:spAutoFit/>
+          </a:bodyPr>
+          <a:lstStyle/>
+          <a:p>
+            <a:pPr algn="l"/>
+            <a:r>
+              <a:rPr sz="2600" b="1" i="0">
+                <a:solidFill>
+                  <a:srgbClr val="1F2C56"/>
+                </a:solidFill>
+                <a:latin typeface="Source Serif 4"/>
+              </a:rPr>
+              <a:t>Agenda</a:t>
+            </a:r>
+          </a:p>
+        </p:txBody>
+      </p:sp>
+      <p:sp>
+        <p:nvSpPr>
+          <p:cNvPr id="7" name="TextBox 6"/>
+          <p:cNvSpPr txBox="1"/>
+          <p:nvPr/>
+        </p:nvSpPr>
+        <p:spPr>
+          <a:xfrm>
+            <a:off x="685800" y="1463040"/>
+            <a:ext cx="10817352" cy="4937760"/>
+          </a:xfrm>
+          <a:prstGeom prst="rect">
+            <a:avLst/>
+          </a:prstGeom>
+          <a:noFill/>
+        </p:spPr>
+        <p:txBody>
+          <a:bodyPr wrap="square">
+            <a:spAutoFit/>
+          </a:bodyPr>
+          <a:lstStyle/>
+          <a:p>
+            <a:pPr>
+              <a:spcBef>
+                <a:spcPts val="800"/>
+              </a:spcBef>
+              <a:spcAft>
+                <a:spcPts val="200"/>
+              </a:spcAft>
+            </a:pPr>
+            <a:r>
+              <a:rPr sz="1500">
+                <a:solidFill>
+                  <a:srgbClr val="3D5466"/>
+                </a:solidFill>
+                <a:latin typeface="Arial"/>
+              </a:rPr>
+              <a:t>01   Theorie-Input: Das 8-Felder-Framework für KMU-Kreditentscheidungen</a:t>
+            </a:r>
+          </a:p>
+          <a:p>
+            <a:pPr>
+              <a:spcBef>
+                <a:spcPts val="800"/>
+              </a:spcBef>
+              <a:spcAft>
+                <a:spcPts val="200"/>
+              </a:spcAft>
+            </a:pPr>
+            <a:r>
+              <a:rPr sz="1500">
+                <a:solidFill>
+                  <a:srgbClr val="3D5466"/>
+                </a:solidFill>
+                <a:latin typeface="Arial"/>
+              </a:rPr>
+              <a:t>02   Theorie-Input: Von der Analyse zur Entscheidungsvorlage</a:t>
+            </a:r>
+          </a:p>
+          <a:p>
+            <a:pPr>
+              <a:spcBef>
+                <a:spcPts val="800"/>
+              </a:spcBef>
+              <a:spcAft>
+                <a:spcPts val="200"/>
+              </a:spcAft>
+            </a:pPr>
+            <a:r>
+              <a:rPr sz="1500">
+                <a:solidFill>
+                  <a:srgbClr val="3D5466"/>
+                </a:solidFill>
+                <a:latin typeface="Arial"/>
+              </a:rPr>
+              <a:t>03   Theorie-Input: Sicherheitenbewertung nach BelWertV</a:t>
+            </a:r>
+          </a:p>
+          <a:p>
+            <a:pPr>
+              <a:spcBef>
+                <a:spcPts val="800"/>
+              </a:spcBef>
+              <a:spcAft>
+                <a:spcPts val="200"/>
+              </a:spcAft>
+            </a:pPr>
+            <a:r>
+              <a:rPr sz="1500">
+                <a:solidFill>
+                  <a:srgbClr val="3D5466"/>
+                </a:solidFill>
+                <a:latin typeface="Arial"/>
+              </a:rPr>
+              <a:t>04   4.3a Sicherheitenbewertung im Alltag</a:t>
+            </a:r>
+          </a:p>
+          <a:p>
+            <a:pPr>
+              <a:spcBef>
+                <a:spcPts val="800"/>
+              </a:spcBef>
+              <a:spcAft>
+                <a:spcPts val="200"/>
+              </a:spcAft>
+            </a:pPr>
+            <a:r>
+              <a:rPr sz="1500">
+                <a:solidFill>
+                  <a:srgbClr val="3D5466"/>
+                </a:solidFill>
+                <a:latin typeface="Arial"/>
+              </a:rPr>
+              <a:t>05   4.3b Betriebsmittelkredite und Kontokorrent: Kurzfall</a:t>
+            </a:r>
+          </a:p>
+          <a:p>
+            <a:pPr>
+              <a:spcBef>
+                <a:spcPts val="800"/>
+              </a:spcBef>
+              <a:spcAft>
+                <a:spcPts val="200"/>
+              </a:spcAft>
+            </a:pPr>
+            <a:r>
+              <a:rPr sz="1500">
+                <a:solidFill>
+                  <a:srgbClr val="3D5466"/>
+                </a:solidFill>
+                <a:latin typeface="Arial"/>
+              </a:rPr>
+              <a:t>06   4.3c Checkliste: Bestandskredit in der Krise – erste Schritte</a:t>
+            </a:r>
+          </a:p>
+          <a:p>
+            <a:pPr>
+              <a:spcBef>
+                <a:spcPts val="800"/>
+              </a:spcBef>
+              <a:spcAft>
+                <a:spcPts val="200"/>
+              </a:spcAft>
+            </a:pPr>
+            <a:r>
+              <a:rPr sz="1500">
+                <a:solidFill>
+                  <a:srgbClr val="3D5466"/>
+                </a:solidFill>
+                <a:latin typeface="Arial"/>
+              </a:rPr>
+              <a:t>07   Praxisfall: Metallbau Schnell GmbH (Heilbronn, fiktiv)</a:t>
+            </a:r>
+          </a:p>
+          <a:p>
+            <a:pPr>
+              <a:spcBef>
+                <a:spcPts val="800"/>
+              </a:spcBef>
+              <a:spcAft>
+                <a:spcPts val="200"/>
+              </a:spcAft>
+            </a:pPr>
+            <a:r>
+              <a:rPr sz="1500">
+                <a:solidFill>
+                  <a:srgbClr val="3D5466"/>
+                </a:solidFill>
+                <a:latin typeface="Arial"/>
+              </a:rPr>
+              <a:t>08   Arbeitsblatt: 8-Felder-Kreditanalyse-Template</a:t>
+            </a:r>
+          </a:p>
+        </p:txBody>
+      </p:sp>
       <p:sp>
         <p:nvSpPr>
           <p:cNvPr id="8" name="Rectangle 7"/>
@@ -6338,41 +8159,6 @@
                 <a:latin typeface="JetBrains Mono"/>
               </a:rPr>
               <a:t>Benedikt Zoller Coaching  ·  FKB Campus  ·  M21</a:t>
-            </a:r>
-          </a:p>
-        </p:txBody>
-      </p:sp>
-      <p:sp>
-        <p:nvSpPr>
-          <p:cNvPr id="10" name="TextBox 9"/>
-          <p:cNvSpPr txBox="1"/>
-          <p:nvPr/>
-        </p:nvSpPr>
-        <p:spPr>
-          <a:xfrm>
-            <a:off x="7176211" y="6583680"/>
-            <a:ext cx="4326940" cy="256032"/>
-          </a:xfrm>
-          <a:prstGeom prst="rect">
-            <a:avLst/>
-          </a:prstGeom>
-          <a:noFill/>
-        </p:spPr>
-        <p:txBody>
-          <a:bodyPr wrap="none">
-            <a:spAutoFit/>
-          </a:bodyPr>
-          <a:lstStyle/>
-          <a:p>
-            <a:pPr algn="r"/>
-            <a:r>
-              <a:rPr sz="700">
-                <a:solidFill>
-                  <a:srgbClr val="A0B4D2"/>
-                </a:solidFill>
-                <a:latin typeface="JetBrains Mono"/>
-              </a:rPr>
-              <a:t>Schaubild</a:t>
             </a:r>
           </a:p>
         </p:txBody>
@@ -6410,7 +8196,7 @@
             <a:avLst/>
           </a:prstGeom>
           <a:solidFill>
-            <a:srgbClr val="EDEDF3"/>
+            <a:srgbClr val="FFFFFF"/>
           </a:solidFill>
           <a:ln>
             <a:noFill/>
@@ -6511,51 +8297,43 @@
                 </a:solidFill>
                 <a:latin typeface="JetBrains Mono"/>
               </a:rPr>
-              <a:t>M21  ·  INHALT</a:t>
-            </a:r>
-          </a:p>
-        </p:txBody>
-      </p:sp>
-      <p:sp>
-        <p:nvSpPr>
-          <p:cNvPr id="5" name="Rectangle 4"/>
-          <p:cNvSpPr/>
-          <p:nvPr/>
-        </p:nvSpPr>
-        <p:spPr>
-          <a:xfrm>
-            <a:off x="0" y="1234440"/>
-            <a:ext cx="12188952" cy="12700"/>
-          </a:xfrm>
-          <a:prstGeom prst="rect">
-            <a:avLst/>
-          </a:prstGeom>
-          <a:solidFill>
-            <a:srgbClr val="D8DFE4"/>
-          </a:solidFill>
-          <a:ln>
-            <a:noFill/>
-          </a:ln>
-        </p:spPr>
-        <p:style>
-          <a:lnRef idx="1">
-            <a:schemeClr val="accent1"/>
-          </a:lnRef>
-          <a:fillRef idx="3">
-            <a:schemeClr val="accent1"/>
-          </a:fillRef>
-          <a:effectRef idx="2">
-            <a:schemeClr val="accent1"/>
-          </a:effectRef>
-          <a:fontRef idx="minor">
-            <a:schemeClr val="lt1"/>
-          </a:fontRef>
-        </p:style>
-        <p:txBody>
-          <a:bodyPr rtlCol="0" anchor="ctr"/>
-          <a:lstStyle/>
-          <a:p>
-            <a:pPr algn="ctr"/>
+              <a:t>M21  ·  SCHAUBILD</a:t>
+            </a:r>
+          </a:p>
+        </p:txBody>
+      </p:sp>
+      <p:sp>
+        <p:nvSpPr>
+          <p:cNvPr id="5" name="TextBox 4"/>
+          <p:cNvSpPr txBox="1"/>
+          <p:nvPr/>
+        </p:nvSpPr>
+        <p:spPr>
+          <a:xfrm>
+            <a:off x="685800" y="502920"/>
+            <a:ext cx="10817352" cy="594360"/>
+          </a:xfrm>
+          <a:prstGeom prst="rect">
+            <a:avLst/>
+          </a:prstGeom>
+          <a:noFill/>
+        </p:spPr>
+        <p:txBody>
+          <a:bodyPr wrap="square">
+            <a:spAutoFit/>
+          </a:bodyPr>
+          <a:lstStyle/>
+          <a:p>
+            <a:pPr algn="l"/>
+            <a:r>
+              <a:rPr sz="2000" b="1" i="0">
+                <a:solidFill>
+                  <a:srgbClr val="1F2C56"/>
+                </a:solidFill>
+                <a:latin typeface="Source Serif 4"/>
+              </a:rPr>
+              <a:t>Handlungsempfehlung Kreditentscheidung</a:t>
+            </a:r>
           </a:p>
         </p:txBody>
       </p:sp>
@@ -6567,8 +8345,8 @@
         </p:nvSpPr>
         <p:spPr>
           <a:xfrm>
-            <a:off x="685800" y="502920"/>
-            <a:ext cx="36576" cy="658368"/>
+            <a:off x="685800" y="1143000"/>
+            <a:ext cx="10817352" cy="25400"/>
           </a:xfrm>
           <a:prstGeom prst="rect">
             <a:avLst/>
@@ -6602,295 +8380,33 @@
           </a:p>
         </p:txBody>
       </p:sp>
-      <p:sp>
-        <p:nvSpPr>
-          <p:cNvPr id="7" name="TextBox 6"/>
-          <p:cNvSpPr txBox="1"/>
-          <p:nvPr/>
-        </p:nvSpPr>
-        <p:spPr>
-          <a:xfrm>
-            <a:off x="813816" y="502920"/>
-            <a:ext cx="10634472" cy="685800"/>
-          </a:xfrm>
-          <a:prstGeom prst="rect">
-            <a:avLst/>
-          </a:prstGeom>
-          <a:noFill/>
-        </p:spPr>
-        <p:txBody>
-          <a:bodyPr wrap="square">
-            <a:spAutoFit/>
-          </a:bodyPr>
-          <a:lstStyle/>
-          <a:p>
-            <a:pPr algn="l"/>
-            <a:r>
-              <a:rPr sz="2400" b="1" i="0">
-                <a:solidFill>
-                  <a:srgbClr val="1F2C56"/>
-                </a:solidFill>
-                <a:latin typeface="Source Serif 4"/>
-              </a:rPr>
-              <a:t>Theorie-Input: Das 8-Felder-Framework für KMU-Kreditentscheidungen</a:t>
-            </a:r>
-          </a:p>
-        </p:txBody>
-      </p:sp>
-      <p:sp>
-        <p:nvSpPr>
-          <p:cNvPr id="8" name="TextBox 7"/>
-          <p:cNvSpPr txBox="1"/>
-          <p:nvPr/>
-        </p:nvSpPr>
-        <p:spPr>
-          <a:xfrm>
-            <a:off x="685800" y="1417320"/>
-            <a:ext cx="10817352" cy="5029200"/>
-          </a:xfrm>
-          <a:prstGeom prst="rect">
-            <a:avLst/>
-          </a:prstGeom>
-          <a:noFill/>
-        </p:spPr>
-        <p:txBody>
-          <a:bodyPr wrap="square">
-            <a:spAutoFit/>
-          </a:bodyPr>
-          <a:lstStyle/>
-          <a:p>
-            <a:pPr>
-              <a:spcBef>
-                <a:spcPts val="1000"/>
-              </a:spcBef>
-              <a:spcAft>
-                <a:spcPts val="200"/>
-              </a:spcAft>
-            </a:pPr>
-            <a:r>
-              <a:rPr sz="800" b="1">
-                <a:solidFill>
-                  <a:srgbClr val="78808C"/>
-                </a:solidFill>
-                <a:latin typeface="JetBrains Mono"/>
-              </a:rPr>
-              <a:t>4.1.1 KONZEPTIONELLER RAHMEN</a:t>
-            </a:r>
-          </a:p>
-          <a:p>
-            <a:pPr>
-              <a:spcBef>
-                <a:spcPts val="400"/>
-              </a:spcBef>
-              <a:spcAft>
-                <a:spcPts val="200"/>
-              </a:spcAft>
-            </a:pPr>
-            <a:r>
-              <a:rPr sz="1200">
-                <a:solidFill>
-                  <a:srgbClr val="3D5466"/>
-                </a:solidFill>
-                <a:latin typeface="Arial"/>
-              </a:rPr>
-              <a:t>Übersicht der 8 Felder:</a:t>
-            </a:r>
-          </a:p>
-          <a:p>
-            <a:pPr>
-              <a:spcBef>
-                <a:spcPts val="1000"/>
-              </a:spcBef>
-              <a:spcAft>
-                <a:spcPts val="200"/>
-              </a:spcAft>
-            </a:pPr>
-            <a:r>
-              <a:rPr sz="800" b="1">
-                <a:solidFill>
-                  <a:srgbClr val="78808C"/>
-                </a:solidFill>
-                <a:latin typeface="JetBrains Mono"/>
-              </a:rPr>
-              <a:t>4.1.2 FELD 1 – ZWECK UND VERWENDUNG</a:t>
-            </a:r>
-          </a:p>
-          <a:p>
-            <a:pPr>
-              <a:spcBef>
-                <a:spcPts val="400"/>
-              </a:spcBef>
-              <a:spcAft>
-                <a:spcPts val="200"/>
-              </a:spcAft>
-            </a:pPr>
-            <a:r>
-              <a:rPr sz="1200">
-                <a:solidFill>
-                  <a:srgbClr val="3D5466"/>
-                </a:solidFill>
-                <a:latin typeface="Arial"/>
-              </a:rPr>
-              <a:t>Definition: Wozu wird der Kredit konkret verwendet? Ist die Verwendung wirtschaftlich sinnvoll und bankseits nachvollziehbar?</a:t>
-            </a:r>
-          </a:p>
-          <a:p>
-            <a:pPr>
-              <a:spcBef>
-                <a:spcPts val="400"/>
-              </a:spcBef>
-              <a:spcAft>
-                <a:spcPts val="200"/>
-              </a:spcAft>
-            </a:pPr>
-            <a:r>
-              <a:rPr sz="1200">
-                <a:solidFill>
-                  <a:srgbClr val="3D5466"/>
-                </a:solidFill>
-                <a:latin typeface="Arial"/>
-              </a:rPr>
-              <a:t>Analysefragen:</a:t>
-            </a:r>
-          </a:p>
-          <a:p>
-            <a:pPr>
-              <a:spcBef>
-                <a:spcPts val="400"/>
-              </a:spcBef>
-              <a:spcAft>
-                <a:spcPts val="200"/>
-              </a:spcAft>
-            </a:pPr>
-            <a:r>
-              <a:rPr sz="1300">
-                <a:solidFill>
-                  <a:srgbClr val="3D5466"/>
-                </a:solidFill>
-                <a:latin typeface="Arial"/>
-              </a:rPr>
-              <a:t>▸  Ist der Zweck konkret und überprüfbar? (Nicht „Betriebsmittel", sondern „5-Achs-CNC-Drehmaschine Heidenhain TNC 640 für Werkstatt Gebäude 2")</a:t>
-            </a:r>
-          </a:p>
-          <a:p>
-            <a:pPr>
-              <a:spcBef>
-                <a:spcPts val="400"/>
-              </a:spcBef>
-              <a:spcAft>
-                <a:spcPts val="200"/>
-              </a:spcAft>
-            </a:pPr>
-            <a:r>
-              <a:rPr sz="1300">
-                <a:solidFill>
-                  <a:srgbClr val="3D5466"/>
-                </a:solidFill>
-                <a:latin typeface="Arial"/>
-              </a:rPr>
-              <a:t>▸  Dient er der Substanzerhaltung (Ersatz) oder Substanzverbesserung (Wachstum, Rationalisierung)?</a:t>
-            </a:r>
-          </a:p>
-          <a:p>
-            <a:pPr>
-              <a:spcBef>
-                <a:spcPts val="400"/>
-              </a:spcBef>
-              <a:spcAft>
-                <a:spcPts val="200"/>
-              </a:spcAft>
-            </a:pPr>
-            <a:r>
-              <a:rPr sz="1300">
-                <a:solidFill>
-                  <a:srgbClr val="3D5466"/>
-                </a:solidFill>
-                <a:latin typeface="Arial"/>
-              </a:rPr>
-              <a:t>▸  Passt der Zweck zur wirtschaftlichen Lage des Unternehmens?</a:t>
-            </a:r>
-          </a:p>
-          <a:p>
-            <a:pPr>
-              <a:spcBef>
-                <a:spcPts val="400"/>
-              </a:spcBef>
-              <a:spcAft>
-                <a:spcPts val="200"/>
-              </a:spcAft>
-            </a:pPr>
-            <a:r>
-              <a:rPr sz="1300">
-                <a:solidFill>
-                  <a:srgbClr val="3D5466"/>
-                </a:solidFill>
-                <a:latin typeface="Arial"/>
-              </a:rPr>
-              <a:t>▸  Ist die Amortisationszeit realistisch für die gewählte Laufzeit?</a:t>
-            </a:r>
-          </a:p>
-          <a:p>
-            <a:pPr>
-              <a:spcBef>
-                <a:spcPts val="400"/>
-              </a:spcBef>
-              <a:spcAft>
-                <a:spcPts val="200"/>
-              </a:spcAft>
-            </a:pPr>
-            <a:r>
-              <a:rPr sz="1200">
-                <a:solidFill>
-                  <a:srgbClr val="3D5466"/>
-                </a:solidFill>
-                <a:latin typeface="Arial"/>
-              </a:rPr>
-              <a:t>Typische Risiken: Mehrfachzweck ohne Aufteilung, Verwendung für Schuldenumschuldung ohne explizite Nennung, fehlende Kostenaufstellungen.</a:t>
-            </a:r>
-          </a:p>
-          <a:p>
-            <a:pPr>
-              <a:spcBef>
-                <a:spcPts val="1000"/>
-              </a:spcBef>
-              <a:spcAft>
-                <a:spcPts val="200"/>
-              </a:spcAft>
-            </a:pPr>
-            <a:r>
-              <a:rPr sz="800" b="1">
-                <a:solidFill>
-                  <a:srgbClr val="78808C"/>
-                </a:solidFill>
-                <a:latin typeface="JetBrains Mono"/>
-              </a:rPr>
-              <a:t>4.1.3 FELD 2 – RÜCKZAHLUNGSQUELLE (CASHFLOW-ANALYSE)</a:t>
-            </a:r>
-          </a:p>
-          <a:p>
-            <a:pPr>
-              <a:spcBef>
-                <a:spcPts val="400"/>
-              </a:spcBef>
-              <a:spcAft>
-                <a:spcPts val="200"/>
-              </a:spcAft>
-            </a:pPr>
-            <a:r>
-              <a:rPr sz="1200">
-                <a:solidFill>
-                  <a:srgbClr val="3D5466"/>
-                </a:solidFill>
-                <a:latin typeface="Arial"/>
-              </a:rPr>
-              <a:t>Definition: Kann das Unternehmen Zins und Tilgung aus operativem Cashflow decken, oder ist es auf Desinvestitionen oder Dritte angewiesen?</a:t>
-            </a:r>
-          </a:p>
-        </p:txBody>
-      </p:sp>
-      <p:sp>
-        <p:nvSpPr>
-          <p:cNvPr id="9" name="Rectangle 8"/>
+      <p:pic>
+        <p:nvPicPr>
+          <p:cNvPr id="7" name="Picture 6" descr="image.png"/>
+          <p:cNvPicPr>
+            <a:picLocks noChangeAspect="1"/>
+          </p:cNvPicPr>
+          <p:nvPr/>
+        </p:nvPicPr>
+        <p:blipFill>
+          <a:blip r:embed="rId2"/>
+          <a:stretch>
+            <a:fillRect/>
+          </a:stretch>
+        </p:blipFill>
+        <p:spPr>
+          <a:xfrm>
+            <a:off x="2303489" y="1325880"/>
+            <a:ext cx="7581973" cy="4937760"/>
+          </a:xfrm>
+          <a:prstGeom prst="rect">
+            <a:avLst/>
+          </a:prstGeom>
+        </p:spPr>
+      </p:pic>
+      <p:sp>
+        <p:nvSpPr>
+          <p:cNvPr id="8" name="Rectangle 7"/>
           <p:cNvSpPr/>
           <p:nvPr/>
         </p:nvSpPr>
@@ -6933,7 +8449,7 @@
       </p:sp>
       <p:sp>
         <p:nvSpPr>
-          <p:cNvPr id="10" name="TextBox 9"/>
+          <p:cNvPr id="9" name="TextBox 8"/>
           <p:cNvSpPr txBox="1"/>
           <p:nvPr/>
         </p:nvSpPr>
@@ -6962,6 +8478,41 @@
                 <a:latin typeface="JetBrains Mono"/>
               </a:rPr>
               <a:t>Benedikt Zoller Coaching  ·  FKB Campus  ·  M21</a:t>
+            </a:r>
+          </a:p>
+        </p:txBody>
+      </p:sp>
+      <p:sp>
+        <p:nvSpPr>
+          <p:cNvPr id="10" name="TextBox 9"/>
+          <p:cNvSpPr txBox="1"/>
+          <p:nvPr/>
+        </p:nvSpPr>
+        <p:spPr>
+          <a:xfrm>
+            <a:off x="7176211" y="6583680"/>
+            <a:ext cx="4326940" cy="256032"/>
+          </a:xfrm>
+          <a:prstGeom prst="rect">
+            <a:avLst/>
+          </a:prstGeom>
+          <a:noFill/>
+        </p:spPr>
+        <p:txBody>
+          <a:bodyPr wrap="none">
+            <a:spAutoFit/>
+          </a:bodyPr>
+          <a:lstStyle/>
+          <a:p>
+            <a:pPr algn="r"/>
+            <a:r>
+              <a:rPr sz="700">
+                <a:solidFill>
+                  <a:srgbClr val="A0B4D2"/>
+                </a:solidFill>
+                <a:latin typeface="JetBrains Mono"/>
+              </a:rPr>
+              <a:t>Schaubild</a:t>
             </a:r>
           </a:p>
         </p:txBody>
@@ -6999,7 +8550,7 @@
             <a:avLst/>
           </a:prstGeom>
           <a:solidFill>
-            <a:srgbClr val="FFFFFF"/>
+            <a:srgbClr val="EDEDF3"/>
           </a:solidFill>
           <a:ln>
             <a:noFill/>
@@ -7100,43 +8651,51 @@
                 </a:solidFill>
                 <a:latin typeface="JetBrains Mono"/>
               </a:rPr>
-              <a:t>M21  ·  SCHAUBILD</a:t>
-            </a:r>
-          </a:p>
-        </p:txBody>
-      </p:sp>
-      <p:sp>
-        <p:nvSpPr>
-          <p:cNvPr id="5" name="TextBox 4"/>
-          <p:cNvSpPr txBox="1"/>
-          <p:nvPr/>
-        </p:nvSpPr>
-        <p:spPr>
-          <a:xfrm>
-            <a:off x="685800" y="502920"/>
-            <a:ext cx="10817352" cy="594360"/>
-          </a:xfrm>
-          <a:prstGeom prst="rect">
-            <a:avLst/>
-          </a:prstGeom>
-          <a:noFill/>
-        </p:spPr>
-        <p:txBody>
-          <a:bodyPr wrap="square">
-            <a:spAutoFit/>
-          </a:bodyPr>
-          <a:lstStyle/>
-          <a:p>
-            <a:pPr algn="l"/>
-            <a:r>
-              <a:rPr sz="2000" b="1" i="0">
-                <a:solidFill>
-                  <a:srgbClr val="1F2C56"/>
-                </a:solidFill>
-                <a:latin typeface="Source Serif 4"/>
-              </a:rPr>
-              <a:t>8-Felder-Framework der Kreditentscheidung</a:t>
-            </a:r>
+              <a:t>M21  ·  INHALT</a:t>
+            </a:r>
+          </a:p>
+        </p:txBody>
+      </p:sp>
+      <p:sp>
+        <p:nvSpPr>
+          <p:cNvPr id="5" name="Rectangle 4"/>
+          <p:cNvSpPr/>
+          <p:nvPr/>
+        </p:nvSpPr>
+        <p:spPr>
+          <a:xfrm>
+            <a:off x="0" y="1234440"/>
+            <a:ext cx="12188952" cy="12700"/>
+          </a:xfrm>
+          <a:prstGeom prst="rect">
+            <a:avLst/>
+          </a:prstGeom>
+          <a:solidFill>
+            <a:srgbClr val="D8DFE4"/>
+          </a:solidFill>
+          <a:ln>
+            <a:noFill/>
+          </a:ln>
+        </p:spPr>
+        <p:style>
+          <a:lnRef idx="1">
+            <a:schemeClr val="accent1"/>
+          </a:lnRef>
+          <a:fillRef idx="3">
+            <a:schemeClr val="accent1"/>
+          </a:fillRef>
+          <a:effectRef idx="2">
+            <a:schemeClr val="accent1"/>
+          </a:effectRef>
+          <a:fontRef idx="minor">
+            <a:schemeClr val="lt1"/>
+          </a:fontRef>
+        </p:style>
+        <p:txBody>
+          <a:bodyPr rtlCol="0" anchor="ctr"/>
+          <a:lstStyle/>
+          <a:p>
+            <a:pPr algn="ctr"/>
           </a:p>
         </p:txBody>
       </p:sp>
@@ -7148,8 +8707,8 @@
         </p:nvSpPr>
         <p:spPr>
           <a:xfrm>
-            <a:off x="685800" y="1143000"/>
-            <a:ext cx="10817352" cy="25400"/>
+            <a:off x="685800" y="502920"/>
+            <a:ext cx="36576" cy="658368"/>
           </a:xfrm>
           <a:prstGeom prst="rect">
             <a:avLst/>
@@ -7183,33 +8742,295 @@
           </a:p>
         </p:txBody>
       </p:sp>
-      <p:pic>
-        <p:nvPicPr>
-          <p:cNvPr id="7" name="Picture 6" descr="image.png"/>
-          <p:cNvPicPr>
-            <a:picLocks noChangeAspect="1"/>
-          </p:cNvPicPr>
-          <p:nvPr/>
-        </p:nvPicPr>
-        <p:blipFill>
-          <a:blip r:embed="rId2"/>
-          <a:stretch>
-            <a:fillRect/>
-          </a:stretch>
-        </p:blipFill>
-        <p:spPr>
-          <a:xfrm>
-            <a:off x="2163921" y="1325880"/>
-            <a:ext cx="7861110" cy="4937760"/>
-          </a:xfrm>
-          <a:prstGeom prst="rect">
-            <a:avLst/>
-          </a:prstGeom>
-        </p:spPr>
-      </p:pic>
-      <p:sp>
-        <p:nvSpPr>
-          <p:cNvPr id="8" name="Rectangle 7"/>
+      <p:sp>
+        <p:nvSpPr>
+          <p:cNvPr id="7" name="TextBox 6"/>
+          <p:cNvSpPr txBox="1"/>
+          <p:nvPr/>
+        </p:nvSpPr>
+        <p:spPr>
+          <a:xfrm>
+            <a:off x="813816" y="502920"/>
+            <a:ext cx="10634472" cy="685800"/>
+          </a:xfrm>
+          <a:prstGeom prst="rect">
+            <a:avLst/>
+          </a:prstGeom>
+          <a:noFill/>
+        </p:spPr>
+        <p:txBody>
+          <a:bodyPr wrap="square">
+            <a:spAutoFit/>
+          </a:bodyPr>
+          <a:lstStyle/>
+          <a:p>
+            <a:pPr algn="l"/>
+            <a:r>
+              <a:rPr sz="2400" b="1" i="0">
+                <a:solidFill>
+                  <a:srgbClr val="1F2C56"/>
+                </a:solidFill>
+                <a:latin typeface="Source Serif 4"/>
+              </a:rPr>
+              <a:t>Theorie-Input: Das 8-Felder-Framework für KMU-Kreditentscheidungen</a:t>
+            </a:r>
+          </a:p>
+        </p:txBody>
+      </p:sp>
+      <p:sp>
+        <p:nvSpPr>
+          <p:cNvPr id="8" name="TextBox 7"/>
+          <p:cNvSpPr txBox="1"/>
+          <p:nvPr/>
+        </p:nvSpPr>
+        <p:spPr>
+          <a:xfrm>
+            <a:off x="685800" y="1417320"/>
+            <a:ext cx="10817352" cy="5029200"/>
+          </a:xfrm>
+          <a:prstGeom prst="rect">
+            <a:avLst/>
+          </a:prstGeom>
+          <a:noFill/>
+        </p:spPr>
+        <p:txBody>
+          <a:bodyPr wrap="square">
+            <a:spAutoFit/>
+          </a:bodyPr>
+          <a:lstStyle/>
+          <a:p>
+            <a:pPr>
+              <a:spcBef>
+                <a:spcPts val="1000"/>
+              </a:spcBef>
+              <a:spcAft>
+                <a:spcPts val="200"/>
+              </a:spcAft>
+            </a:pPr>
+            <a:r>
+              <a:rPr sz="800" b="1">
+                <a:solidFill>
+                  <a:srgbClr val="78808C"/>
+                </a:solidFill>
+                <a:latin typeface="JetBrains Mono"/>
+              </a:rPr>
+              <a:t>4.1.1 KONZEPTIONELLER RAHMEN</a:t>
+            </a:r>
+          </a:p>
+          <a:p>
+            <a:pPr>
+              <a:spcBef>
+                <a:spcPts val="400"/>
+              </a:spcBef>
+              <a:spcAft>
+                <a:spcPts val="200"/>
+              </a:spcAft>
+            </a:pPr>
+            <a:r>
+              <a:rPr sz="1200">
+                <a:solidFill>
+                  <a:srgbClr val="3D5466"/>
+                </a:solidFill>
+                <a:latin typeface="Arial"/>
+              </a:rPr>
+              <a:t>Übersicht der 8 Felder:</a:t>
+            </a:r>
+          </a:p>
+          <a:p>
+            <a:pPr>
+              <a:spcBef>
+                <a:spcPts val="1000"/>
+              </a:spcBef>
+              <a:spcAft>
+                <a:spcPts val="200"/>
+              </a:spcAft>
+            </a:pPr>
+            <a:r>
+              <a:rPr sz="800" b="1">
+                <a:solidFill>
+                  <a:srgbClr val="78808C"/>
+                </a:solidFill>
+                <a:latin typeface="JetBrains Mono"/>
+              </a:rPr>
+              <a:t>4.1.2 FELD 1 – ZWECK UND VERWENDUNG</a:t>
+            </a:r>
+          </a:p>
+          <a:p>
+            <a:pPr>
+              <a:spcBef>
+                <a:spcPts val="400"/>
+              </a:spcBef>
+              <a:spcAft>
+                <a:spcPts val="200"/>
+              </a:spcAft>
+            </a:pPr>
+            <a:r>
+              <a:rPr sz="1200">
+                <a:solidFill>
+                  <a:srgbClr val="3D5466"/>
+                </a:solidFill>
+                <a:latin typeface="Arial"/>
+              </a:rPr>
+              <a:t>Definition: Wozu wird der Kredit konkret verwendet? Ist die Verwendung wirtschaftlich sinnvoll und bankseits nachvollziehbar?</a:t>
+            </a:r>
+          </a:p>
+          <a:p>
+            <a:pPr>
+              <a:spcBef>
+                <a:spcPts val="400"/>
+              </a:spcBef>
+              <a:spcAft>
+                <a:spcPts val="200"/>
+              </a:spcAft>
+            </a:pPr>
+            <a:r>
+              <a:rPr sz="1200">
+                <a:solidFill>
+                  <a:srgbClr val="3D5466"/>
+                </a:solidFill>
+                <a:latin typeface="Arial"/>
+              </a:rPr>
+              <a:t>Analysefragen:</a:t>
+            </a:r>
+          </a:p>
+          <a:p>
+            <a:pPr>
+              <a:spcBef>
+                <a:spcPts val="400"/>
+              </a:spcBef>
+              <a:spcAft>
+                <a:spcPts val="200"/>
+              </a:spcAft>
+            </a:pPr>
+            <a:r>
+              <a:rPr sz="1300">
+                <a:solidFill>
+                  <a:srgbClr val="3D5466"/>
+                </a:solidFill>
+                <a:latin typeface="Arial"/>
+              </a:rPr>
+              <a:t>▸  Ist der Zweck konkret und überprüfbar? (Nicht „Betriebsmittel", sondern „5-Achs-CNC-Drehmaschine Heidenhain TNC 640 für Werkstatt Gebäude 2")</a:t>
+            </a:r>
+          </a:p>
+          <a:p>
+            <a:pPr>
+              <a:spcBef>
+                <a:spcPts val="400"/>
+              </a:spcBef>
+              <a:spcAft>
+                <a:spcPts val="200"/>
+              </a:spcAft>
+            </a:pPr>
+            <a:r>
+              <a:rPr sz="1300">
+                <a:solidFill>
+                  <a:srgbClr val="3D5466"/>
+                </a:solidFill>
+                <a:latin typeface="Arial"/>
+              </a:rPr>
+              <a:t>▸  Dient er der Substanzerhaltung (Ersatz) oder Substanzverbesserung (Wachstum, Rationalisierung)?</a:t>
+            </a:r>
+          </a:p>
+          <a:p>
+            <a:pPr>
+              <a:spcBef>
+                <a:spcPts val="400"/>
+              </a:spcBef>
+              <a:spcAft>
+                <a:spcPts val="200"/>
+              </a:spcAft>
+            </a:pPr>
+            <a:r>
+              <a:rPr sz="1300">
+                <a:solidFill>
+                  <a:srgbClr val="3D5466"/>
+                </a:solidFill>
+                <a:latin typeface="Arial"/>
+              </a:rPr>
+              <a:t>▸  Passt der Zweck zur wirtschaftlichen Lage des Unternehmens?</a:t>
+            </a:r>
+          </a:p>
+          <a:p>
+            <a:pPr>
+              <a:spcBef>
+                <a:spcPts val="400"/>
+              </a:spcBef>
+              <a:spcAft>
+                <a:spcPts val="200"/>
+              </a:spcAft>
+            </a:pPr>
+            <a:r>
+              <a:rPr sz="1300">
+                <a:solidFill>
+                  <a:srgbClr val="3D5466"/>
+                </a:solidFill>
+                <a:latin typeface="Arial"/>
+              </a:rPr>
+              <a:t>▸  Ist die Amortisationszeit realistisch für die gewählte Laufzeit?</a:t>
+            </a:r>
+          </a:p>
+          <a:p>
+            <a:pPr>
+              <a:spcBef>
+                <a:spcPts val="400"/>
+              </a:spcBef>
+              <a:spcAft>
+                <a:spcPts val="200"/>
+              </a:spcAft>
+            </a:pPr>
+            <a:r>
+              <a:rPr sz="1200">
+                <a:solidFill>
+                  <a:srgbClr val="3D5466"/>
+                </a:solidFill>
+                <a:latin typeface="Arial"/>
+              </a:rPr>
+              <a:t>Typische Risiken: Mehrfachzweck ohne Aufteilung, Verwendung für Schuldenumschuldung ohne explizite Nennung, fehlende Kostenaufstellungen.</a:t>
+            </a:r>
+          </a:p>
+          <a:p>
+            <a:pPr>
+              <a:spcBef>
+                <a:spcPts val="1000"/>
+              </a:spcBef>
+              <a:spcAft>
+                <a:spcPts val="200"/>
+              </a:spcAft>
+            </a:pPr>
+            <a:r>
+              <a:rPr sz="800" b="1">
+                <a:solidFill>
+                  <a:srgbClr val="78808C"/>
+                </a:solidFill>
+                <a:latin typeface="JetBrains Mono"/>
+              </a:rPr>
+              <a:t>4.1.3 FELD 2 – RÜCKZAHLUNGSQUELLE (CASHFLOW-ANALYSE)</a:t>
+            </a:r>
+          </a:p>
+          <a:p>
+            <a:pPr>
+              <a:spcBef>
+                <a:spcPts val="400"/>
+              </a:spcBef>
+              <a:spcAft>
+                <a:spcPts val="200"/>
+              </a:spcAft>
+            </a:pPr>
+            <a:r>
+              <a:rPr sz="1200">
+                <a:solidFill>
+                  <a:srgbClr val="3D5466"/>
+                </a:solidFill>
+                <a:latin typeface="Arial"/>
+              </a:rPr>
+              <a:t>Definition: Kann das Unternehmen Zins und Tilgung aus operativem Cashflow decken, oder ist es auf Desinvestitionen oder Dritte angewiesen?</a:t>
+            </a:r>
+          </a:p>
+        </p:txBody>
+      </p:sp>
+      <p:sp>
+        <p:nvSpPr>
+          <p:cNvPr id="9" name="Rectangle 8"/>
           <p:cNvSpPr/>
           <p:nvPr/>
         </p:nvSpPr>
@@ -7252,7 +9073,7 @@
       </p:sp>
       <p:sp>
         <p:nvSpPr>
-          <p:cNvPr id="9" name="TextBox 8"/>
+          <p:cNvPr id="10" name="TextBox 9"/>
           <p:cNvSpPr txBox="1"/>
           <p:nvPr/>
         </p:nvSpPr>
@@ -7281,41 +9102,6 @@
                 <a:latin typeface="JetBrains Mono"/>
               </a:rPr>
               <a:t>Benedikt Zoller Coaching  ·  FKB Campus  ·  M21</a:t>
-            </a:r>
-          </a:p>
-        </p:txBody>
-      </p:sp>
-      <p:sp>
-        <p:nvSpPr>
-          <p:cNvPr id="10" name="TextBox 9"/>
-          <p:cNvSpPr txBox="1"/>
-          <p:nvPr/>
-        </p:nvSpPr>
-        <p:spPr>
-          <a:xfrm>
-            <a:off x="7176211" y="6583680"/>
-            <a:ext cx="4326940" cy="256032"/>
-          </a:xfrm>
-          <a:prstGeom prst="rect">
-            <a:avLst/>
-          </a:prstGeom>
-          <a:noFill/>
-        </p:spPr>
-        <p:txBody>
-          <a:bodyPr wrap="none">
-            <a:spAutoFit/>
-          </a:bodyPr>
-          <a:lstStyle/>
-          <a:p>
-            <a:pPr algn="r"/>
-            <a:r>
-              <a:rPr sz="700">
-                <a:solidFill>
-                  <a:srgbClr val="A0B4D2"/>
-                </a:solidFill>
-                <a:latin typeface="JetBrains Mono"/>
-              </a:rPr>
-              <a:t>Schaubild</a:t>
             </a:r>
           </a:p>
         </p:txBody>
@@ -7353,7 +9139,7 @@
             <a:avLst/>
           </a:prstGeom>
           <a:solidFill>
-            <a:srgbClr val="EDEDF3"/>
+            <a:srgbClr val="FFFFFF"/>
           </a:solidFill>
           <a:ln>
             <a:noFill/>
@@ -7454,51 +9240,43 @@
                 </a:solidFill>
                 <a:latin typeface="JetBrains Mono"/>
               </a:rPr>
-              <a:t>M21  ·  INHALT</a:t>
-            </a:r>
-          </a:p>
-        </p:txBody>
-      </p:sp>
-      <p:sp>
-        <p:nvSpPr>
-          <p:cNvPr id="5" name="Rectangle 4"/>
-          <p:cNvSpPr/>
-          <p:nvPr/>
-        </p:nvSpPr>
-        <p:spPr>
-          <a:xfrm>
-            <a:off x="0" y="1234440"/>
-            <a:ext cx="12188952" cy="12700"/>
-          </a:xfrm>
-          <a:prstGeom prst="rect">
-            <a:avLst/>
-          </a:prstGeom>
-          <a:solidFill>
-            <a:srgbClr val="D8DFE4"/>
-          </a:solidFill>
-          <a:ln>
-            <a:noFill/>
-          </a:ln>
-        </p:spPr>
-        <p:style>
-          <a:lnRef idx="1">
-            <a:schemeClr val="accent1"/>
-          </a:lnRef>
-          <a:fillRef idx="3">
-            <a:schemeClr val="accent1"/>
-          </a:fillRef>
-          <a:effectRef idx="2">
-            <a:schemeClr val="accent1"/>
-          </a:effectRef>
-          <a:fontRef idx="minor">
-            <a:schemeClr val="lt1"/>
-          </a:fontRef>
-        </p:style>
-        <p:txBody>
-          <a:bodyPr rtlCol="0" anchor="ctr"/>
-          <a:lstStyle/>
-          <a:p>
-            <a:pPr algn="ctr"/>
+              <a:t>M21  ·  SCHAUBILD</a:t>
+            </a:r>
+          </a:p>
+        </p:txBody>
+      </p:sp>
+      <p:sp>
+        <p:nvSpPr>
+          <p:cNvPr id="5" name="TextBox 4"/>
+          <p:cNvSpPr txBox="1"/>
+          <p:nvPr/>
+        </p:nvSpPr>
+        <p:spPr>
+          <a:xfrm>
+            <a:off x="685800" y="502920"/>
+            <a:ext cx="10817352" cy="594360"/>
+          </a:xfrm>
+          <a:prstGeom prst="rect">
+            <a:avLst/>
+          </a:prstGeom>
+          <a:noFill/>
+        </p:spPr>
+        <p:txBody>
+          <a:bodyPr wrap="square">
+            <a:spAutoFit/>
+          </a:bodyPr>
+          <a:lstStyle/>
+          <a:p>
+            <a:pPr algn="l"/>
+            <a:r>
+              <a:rPr sz="2000" b="1" i="0">
+                <a:solidFill>
+                  <a:srgbClr val="1F2C56"/>
+                </a:solidFill>
+                <a:latin typeface="Source Serif 4"/>
+              </a:rPr>
+              <a:t>8-Felder-Framework der Kreditentscheidung</a:t>
+            </a:r>
           </a:p>
         </p:txBody>
       </p:sp>
@@ -7510,8 +9288,8 @@
         </p:nvSpPr>
         <p:spPr>
           <a:xfrm>
-            <a:off x="685800" y="502920"/>
-            <a:ext cx="36576" cy="658368"/>
+            <a:off x="685800" y="1143000"/>
+            <a:ext cx="10817352" cy="25400"/>
           </a:xfrm>
           <a:prstGeom prst="rect">
             <a:avLst/>
@@ -7545,295 +9323,33 @@
           </a:p>
         </p:txBody>
       </p:sp>
-      <p:sp>
-        <p:nvSpPr>
-          <p:cNvPr id="7" name="TextBox 6"/>
-          <p:cNvSpPr txBox="1"/>
-          <p:nvPr/>
-        </p:nvSpPr>
-        <p:spPr>
-          <a:xfrm>
-            <a:off x="813816" y="502920"/>
-            <a:ext cx="10634472" cy="685800"/>
-          </a:xfrm>
-          <a:prstGeom prst="rect">
-            <a:avLst/>
-          </a:prstGeom>
-          <a:noFill/>
-        </p:spPr>
-        <p:txBody>
-          <a:bodyPr wrap="square">
-            <a:spAutoFit/>
-          </a:bodyPr>
-          <a:lstStyle/>
-          <a:p>
-            <a:pPr algn="l"/>
-            <a:r>
-              <a:rPr sz="2400" b="1" i="0">
-                <a:solidFill>
-                  <a:srgbClr val="1F2C56"/>
-                </a:solidFill>
-                <a:latin typeface="Source Serif 4"/>
-              </a:rPr>
-              <a:t>Theorie-Input: Von der Analyse zur Entscheidungsvorlage</a:t>
-            </a:r>
-          </a:p>
-        </p:txBody>
-      </p:sp>
-      <p:sp>
-        <p:nvSpPr>
-          <p:cNvPr id="8" name="TextBox 7"/>
-          <p:cNvSpPr txBox="1"/>
-          <p:nvPr/>
-        </p:nvSpPr>
-        <p:spPr>
-          <a:xfrm>
-            <a:off x="685800" y="1417320"/>
-            <a:ext cx="10817352" cy="5029200"/>
-          </a:xfrm>
-          <a:prstGeom prst="rect">
-            <a:avLst/>
-          </a:prstGeom>
-          <a:noFill/>
-        </p:spPr>
-        <p:txBody>
-          <a:bodyPr wrap="square">
-            <a:spAutoFit/>
-          </a:bodyPr>
-          <a:lstStyle/>
-          <a:p>
-            <a:pPr>
-              <a:spcBef>
-                <a:spcPts val="1000"/>
-              </a:spcBef>
-              <a:spcAft>
-                <a:spcPts val="200"/>
-              </a:spcAft>
-            </a:pPr>
-            <a:r>
-              <a:rPr sz="800" b="1">
-                <a:solidFill>
-                  <a:srgbClr val="78808C"/>
-                </a:solidFill>
-                <a:latin typeface="JetBrains Mono"/>
-              </a:rPr>
-              <a:t>4.2.1 STRUKTUR EINER KREDITVORLAGE NACH MARISK BTO 1.1</a:t>
-            </a:r>
-          </a:p>
-          <a:p>
-            <a:pPr>
-              <a:spcBef>
-                <a:spcPts val="400"/>
-              </a:spcBef>
-              <a:spcAft>
-                <a:spcPts val="200"/>
-              </a:spcAft>
-            </a:pPr>
-            <a:r>
-              <a:rPr sz="1200">
-                <a:solidFill>
-                  <a:srgbClr val="3D5466"/>
-                </a:solidFill>
-                <a:latin typeface="Arial"/>
-              </a:rPr>
-              <a:t>Eine bankinterne Kreditvorlage muss nach MaRisk BTO 1.1 (Bundesanstalt für Finanzdienstleistungsaufsicht, 2023 ) folgende Elemente enthalten:</a:t>
-            </a:r>
-          </a:p>
-          <a:p>
-            <a:pPr>
-              <a:spcBef>
-                <a:spcPts val="400"/>
-              </a:spcBef>
-              <a:spcAft>
-                <a:spcPts val="200"/>
-              </a:spcAft>
-            </a:pPr>
-            <a:r>
-              <a:rPr sz="1200">
-                <a:solidFill>
-                  <a:srgbClr val="3D5466"/>
-                </a:solidFill>
-                <a:latin typeface="Arial"/>
-              </a:rPr>
-              <a:t>Gesamtumfang: 12–20 Seiten (je nach Komplexität)</a:t>
-            </a:r>
-          </a:p>
-          <a:p>
-            <a:pPr>
-              <a:spcBef>
-                <a:spcPts val="1000"/>
-              </a:spcBef>
-              <a:spcAft>
-                <a:spcPts val="200"/>
-              </a:spcAft>
-            </a:pPr>
-            <a:r>
-              <a:rPr sz="800" b="1">
-                <a:solidFill>
-                  <a:srgbClr val="78808C"/>
-                </a:solidFill>
-                <a:latin typeface="JetBrains Mono"/>
-              </a:rPr>
-              <a:t>4.2.2 DIE DREI ENTSCHEIDUNGSERGEBNISSE</a:t>
-            </a:r>
-          </a:p>
-          <a:p>
-            <a:pPr>
-              <a:spcBef>
-                <a:spcPts val="400"/>
-              </a:spcBef>
-              <a:spcAft>
-                <a:spcPts val="200"/>
-              </a:spcAft>
-            </a:pPr>
-            <a:r>
-              <a:rPr sz="1200">
-                <a:solidFill>
-                  <a:srgbClr val="3D5466"/>
-                </a:solidFill>
-                <a:latin typeface="Arial"/>
-              </a:rPr>
-              <a:t>Entscheidung 1: ZUSAGE</a:t>
-            </a:r>
-          </a:p>
-          <a:p>
-            <a:pPr>
-              <a:spcBef>
-                <a:spcPts val="400"/>
-              </a:spcBef>
-              <a:spcAft>
-                <a:spcPts val="200"/>
-              </a:spcAft>
-            </a:pPr>
-            <a:r>
-              <a:rPr sz="1300">
-                <a:solidFill>
-                  <a:srgbClr val="3D5466"/>
-                </a:solidFill>
-                <a:latin typeface="Arial"/>
-              </a:rPr>
-              <a:t>▸  Alle 8 Felder positiv oder neutral</a:t>
-            </a:r>
-          </a:p>
-          <a:p>
-            <a:pPr>
-              <a:spcBef>
-                <a:spcPts val="400"/>
-              </a:spcBef>
-              <a:spcAft>
-                <a:spcPts val="200"/>
-              </a:spcAft>
-            </a:pPr>
-            <a:r>
-              <a:rPr sz="1300">
-                <a:solidFill>
-                  <a:srgbClr val="3D5466"/>
-                </a:solidFill>
-                <a:latin typeface="Arial"/>
-              </a:rPr>
-              <a:t>▸  Keine einschränkenden Bedingungen</a:t>
-            </a:r>
-          </a:p>
-          <a:p>
-            <a:pPr>
-              <a:spcBef>
-                <a:spcPts val="400"/>
-              </a:spcBef>
-              <a:spcAft>
-                <a:spcPts val="200"/>
-              </a:spcAft>
-            </a:pPr>
-            <a:r>
-              <a:rPr sz="1300">
-                <a:solidFill>
-                  <a:srgbClr val="3D5466"/>
-                </a:solidFill>
-                <a:latin typeface="Arial"/>
-              </a:rPr>
-              <a:t>▸  Dokumentation: Kreditausschuss-Beschluss, Krediturkunde</a:t>
-            </a:r>
-          </a:p>
-          <a:p>
-            <a:pPr>
-              <a:spcBef>
-                <a:spcPts val="400"/>
-              </a:spcBef>
-              <a:spcAft>
-                <a:spcPts val="200"/>
-              </a:spcAft>
-            </a:pPr>
-            <a:r>
-              <a:rPr sz="1200">
-                <a:solidFill>
-                  <a:srgbClr val="3D5466"/>
-                </a:solidFill>
-                <a:latin typeface="Arial"/>
-              </a:rPr>
-              <a:t>Entscheidung 2: ZUSAGE MIT AUFLAGEN</a:t>
-            </a:r>
-          </a:p>
-          <a:p>
-            <a:pPr>
-              <a:spcBef>
-                <a:spcPts val="400"/>
-              </a:spcBef>
-              <a:spcAft>
-                <a:spcPts val="200"/>
-              </a:spcAft>
-            </a:pPr>
-            <a:r>
-              <a:rPr sz="1300">
-                <a:solidFill>
-                  <a:srgbClr val="3D5466"/>
-                </a:solidFill>
-                <a:latin typeface="Arial"/>
-              </a:rPr>
-              <a:t>▸  Einzelne Felder mit Risiken, die durch Auflagen mitigierbar sind</a:t>
-            </a:r>
-          </a:p>
-          <a:p>
-            <a:pPr>
-              <a:spcBef>
-                <a:spcPts val="400"/>
-              </a:spcBef>
-              <a:spcAft>
-                <a:spcPts val="200"/>
-              </a:spcAft>
-            </a:pPr>
-            <a:r>
-              <a:rPr sz="1300">
-                <a:solidFill>
-                  <a:srgbClr val="3D5466"/>
-                </a:solidFill>
-                <a:latin typeface="Arial"/>
-              </a:rPr>
-              <a:t>▸  Auflagen müssen SMART formuliert sein (Spezifisch, Messbar, Akzeptabel, Realistisch, Terminiert)</a:t>
-            </a:r>
-          </a:p>
-          <a:p>
-            <a:pPr>
-              <a:spcBef>
-                <a:spcPts val="400"/>
-              </a:spcBef>
-              <a:spcAft>
-                <a:spcPts val="200"/>
-              </a:spcAft>
-            </a:pPr>
-            <a:r>
-              <a:rPr sz="1300">
-                <a:solidFill>
-                  <a:srgbClr val="3D5466"/>
-                </a:solidFill>
-                <a:latin typeface="Arial"/>
-              </a:rPr>
-              <a:t>▸  Beispiel: „EK-Quote muss innerhalb von 24 Monaten auf ≥ 23 % steigen; Nachweis quartalsweise."</a:t>
-            </a:r>
-          </a:p>
-        </p:txBody>
-      </p:sp>
-      <p:sp>
-        <p:nvSpPr>
-          <p:cNvPr id="9" name="Rectangle 8"/>
+      <p:pic>
+        <p:nvPicPr>
+          <p:cNvPr id="7" name="Picture 6" descr="image.png"/>
+          <p:cNvPicPr>
+            <a:picLocks noChangeAspect="1"/>
+          </p:cNvPicPr>
+          <p:nvPr/>
+        </p:nvPicPr>
+        <p:blipFill>
+          <a:blip r:embed="rId2"/>
+          <a:stretch>
+            <a:fillRect/>
+          </a:stretch>
+        </p:blipFill>
+        <p:spPr>
+          <a:xfrm>
+            <a:off x="2163921" y="1325880"/>
+            <a:ext cx="7861110" cy="4937760"/>
+          </a:xfrm>
+          <a:prstGeom prst="rect">
+            <a:avLst/>
+          </a:prstGeom>
+        </p:spPr>
+      </p:pic>
+      <p:sp>
+        <p:nvSpPr>
+          <p:cNvPr id="8" name="Rectangle 7"/>
           <p:cNvSpPr/>
           <p:nvPr/>
         </p:nvSpPr>
@@ -7876,7 +9392,7 @@
       </p:sp>
       <p:sp>
         <p:nvSpPr>
-          <p:cNvPr id="10" name="TextBox 9"/>
+          <p:cNvPr id="9" name="TextBox 8"/>
           <p:cNvSpPr txBox="1"/>
           <p:nvPr/>
         </p:nvSpPr>
@@ -7905,6 +9421,41 @@
                 <a:latin typeface="JetBrains Mono"/>
               </a:rPr>
               <a:t>Benedikt Zoller Coaching  ·  FKB Campus  ·  M21</a:t>
+            </a:r>
+          </a:p>
+        </p:txBody>
+      </p:sp>
+      <p:sp>
+        <p:nvSpPr>
+          <p:cNvPr id="10" name="TextBox 9"/>
+          <p:cNvSpPr txBox="1"/>
+          <p:nvPr/>
+        </p:nvSpPr>
+        <p:spPr>
+          <a:xfrm>
+            <a:off x="7176211" y="6583680"/>
+            <a:ext cx="4326940" cy="256032"/>
+          </a:xfrm>
+          <a:prstGeom prst="rect">
+            <a:avLst/>
+          </a:prstGeom>
+          <a:noFill/>
+        </p:spPr>
+        <p:txBody>
+          <a:bodyPr wrap="none">
+            <a:spAutoFit/>
+          </a:bodyPr>
+          <a:lstStyle/>
+          <a:p>
+            <a:pPr algn="r"/>
+            <a:r>
+              <a:rPr sz="700">
+                <a:solidFill>
+                  <a:srgbClr val="A0B4D2"/>
+                </a:solidFill>
+                <a:latin typeface="JetBrains Mono"/>
+              </a:rPr>
+              <a:t>Schaubild</a:t>
             </a:r>
           </a:p>
         </p:txBody>
@@ -7942,7 +9493,7 @@
             <a:avLst/>
           </a:prstGeom>
           <a:solidFill>
-            <a:srgbClr val="FFFFFF"/>
+            <a:srgbClr val="EDEDF3"/>
           </a:solidFill>
           <a:ln>
             <a:noFill/>
@@ -8043,43 +9594,51 @@
                 </a:solidFill>
                 <a:latin typeface="JetBrains Mono"/>
               </a:rPr>
-              <a:t>M21  ·  SCHAUBILD</a:t>
-            </a:r>
-          </a:p>
-        </p:txBody>
-      </p:sp>
-      <p:sp>
-        <p:nvSpPr>
-          <p:cNvPr id="5" name="TextBox 4"/>
-          <p:cNvSpPr txBox="1"/>
-          <p:nvPr/>
-        </p:nvSpPr>
-        <p:spPr>
-          <a:xfrm>
-            <a:off x="685800" y="502920"/>
-            <a:ext cx="10817352" cy="594360"/>
-          </a:xfrm>
-          <a:prstGeom prst="rect">
-            <a:avLst/>
-          </a:prstGeom>
-          <a:noFill/>
-        </p:spPr>
-        <p:txBody>
-          <a:bodyPr wrap="square">
-            <a:spAutoFit/>
-          </a:bodyPr>
-          <a:lstStyle/>
-          <a:p>
-            <a:pPr algn="l"/>
-            <a:r>
-              <a:rPr sz="2000" b="1" i="0">
-                <a:solidFill>
-                  <a:srgbClr val="1F2C56"/>
-                </a:solidFill>
-                <a:latin typeface="Source Serif 4"/>
-              </a:rPr>
-              <a:t>Zwei Denksysteme nach Kahneman</a:t>
-            </a:r>
+              <a:t>M21  ·  INHALT</a:t>
+            </a:r>
+          </a:p>
+        </p:txBody>
+      </p:sp>
+      <p:sp>
+        <p:nvSpPr>
+          <p:cNvPr id="5" name="Rectangle 4"/>
+          <p:cNvSpPr/>
+          <p:nvPr/>
+        </p:nvSpPr>
+        <p:spPr>
+          <a:xfrm>
+            <a:off x="0" y="1234440"/>
+            <a:ext cx="12188952" cy="12700"/>
+          </a:xfrm>
+          <a:prstGeom prst="rect">
+            <a:avLst/>
+          </a:prstGeom>
+          <a:solidFill>
+            <a:srgbClr val="D8DFE4"/>
+          </a:solidFill>
+          <a:ln>
+            <a:noFill/>
+          </a:ln>
+        </p:spPr>
+        <p:style>
+          <a:lnRef idx="1">
+            <a:schemeClr val="accent1"/>
+          </a:lnRef>
+          <a:fillRef idx="3">
+            <a:schemeClr val="accent1"/>
+          </a:fillRef>
+          <a:effectRef idx="2">
+            <a:schemeClr val="accent1"/>
+          </a:effectRef>
+          <a:fontRef idx="minor">
+            <a:schemeClr val="lt1"/>
+          </a:fontRef>
+        </p:style>
+        <p:txBody>
+          <a:bodyPr rtlCol="0" anchor="ctr"/>
+          <a:lstStyle/>
+          <a:p>
+            <a:pPr algn="ctr"/>
           </a:p>
         </p:txBody>
       </p:sp>
@@ -8091,8 +9650,8 @@
         </p:nvSpPr>
         <p:spPr>
           <a:xfrm>
-            <a:off x="685800" y="1143000"/>
-            <a:ext cx="10817352" cy="25400"/>
+            <a:off x="685800" y="502920"/>
+            <a:ext cx="36576" cy="658368"/>
           </a:xfrm>
           <a:prstGeom prst="rect">
             <a:avLst/>
@@ -8126,33 +9685,295 @@
           </a:p>
         </p:txBody>
       </p:sp>
-      <p:pic>
-        <p:nvPicPr>
-          <p:cNvPr id="7" name="Picture 6" descr="image.png"/>
-          <p:cNvPicPr>
-            <a:picLocks noChangeAspect="1"/>
-          </p:cNvPicPr>
-          <p:nvPr/>
-        </p:nvPicPr>
-        <p:blipFill>
-          <a:blip r:embed="rId2"/>
-          <a:stretch>
-            <a:fillRect/>
-          </a:stretch>
-        </p:blipFill>
-        <p:spPr>
-          <a:xfrm>
-            <a:off x="2303489" y="1325880"/>
-            <a:ext cx="7581973" cy="4937760"/>
-          </a:xfrm>
-          <a:prstGeom prst="rect">
-            <a:avLst/>
-          </a:prstGeom>
-        </p:spPr>
-      </p:pic>
-      <p:sp>
-        <p:nvSpPr>
-          <p:cNvPr id="8" name="Rectangle 7"/>
+      <p:sp>
+        <p:nvSpPr>
+          <p:cNvPr id="7" name="TextBox 6"/>
+          <p:cNvSpPr txBox="1"/>
+          <p:nvPr/>
+        </p:nvSpPr>
+        <p:spPr>
+          <a:xfrm>
+            <a:off x="813816" y="502920"/>
+            <a:ext cx="10634472" cy="685800"/>
+          </a:xfrm>
+          <a:prstGeom prst="rect">
+            <a:avLst/>
+          </a:prstGeom>
+          <a:noFill/>
+        </p:spPr>
+        <p:txBody>
+          <a:bodyPr wrap="square">
+            <a:spAutoFit/>
+          </a:bodyPr>
+          <a:lstStyle/>
+          <a:p>
+            <a:pPr algn="l"/>
+            <a:r>
+              <a:rPr sz="2400" b="1" i="0">
+                <a:solidFill>
+                  <a:srgbClr val="1F2C56"/>
+                </a:solidFill>
+                <a:latin typeface="Source Serif 4"/>
+              </a:rPr>
+              <a:t>Theorie-Input: Von der Analyse zur Entscheidungsvorlage</a:t>
+            </a:r>
+          </a:p>
+        </p:txBody>
+      </p:sp>
+      <p:sp>
+        <p:nvSpPr>
+          <p:cNvPr id="8" name="TextBox 7"/>
+          <p:cNvSpPr txBox="1"/>
+          <p:nvPr/>
+        </p:nvSpPr>
+        <p:spPr>
+          <a:xfrm>
+            <a:off x="685800" y="1417320"/>
+            <a:ext cx="10817352" cy="5029200"/>
+          </a:xfrm>
+          <a:prstGeom prst="rect">
+            <a:avLst/>
+          </a:prstGeom>
+          <a:noFill/>
+        </p:spPr>
+        <p:txBody>
+          <a:bodyPr wrap="square">
+            <a:spAutoFit/>
+          </a:bodyPr>
+          <a:lstStyle/>
+          <a:p>
+            <a:pPr>
+              <a:spcBef>
+                <a:spcPts val="1000"/>
+              </a:spcBef>
+              <a:spcAft>
+                <a:spcPts val="200"/>
+              </a:spcAft>
+            </a:pPr>
+            <a:r>
+              <a:rPr sz="800" b="1">
+                <a:solidFill>
+                  <a:srgbClr val="78808C"/>
+                </a:solidFill>
+                <a:latin typeface="JetBrains Mono"/>
+              </a:rPr>
+              <a:t>4.2.1 STRUKTUR EINER KREDITVORLAGE NACH MARISK BTO 1.1</a:t>
+            </a:r>
+          </a:p>
+          <a:p>
+            <a:pPr>
+              <a:spcBef>
+                <a:spcPts val="400"/>
+              </a:spcBef>
+              <a:spcAft>
+                <a:spcPts val="200"/>
+              </a:spcAft>
+            </a:pPr>
+            <a:r>
+              <a:rPr sz="1200">
+                <a:solidFill>
+                  <a:srgbClr val="3D5466"/>
+                </a:solidFill>
+                <a:latin typeface="Arial"/>
+              </a:rPr>
+              <a:t>Eine bankinterne Kreditvorlage muss nach MaRisk BTO 1.1 (Bundesanstalt für Finanzdienstleistungsaufsicht, 2023 ) folgende Elemente enthalten:</a:t>
+            </a:r>
+          </a:p>
+          <a:p>
+            <a:pPr>
+              <a:spcBef>
+                <a:spcPts val="400"/>
+              </a:spcBef>
+              <a:spcAft>
+                <a:spcPts val="200"/>
+              </a:spcAft>
+            </a:pPr>
+            <a:r>
+              <a:rPr sz="1200">
+                <a:solidFill>
+                  <a:srgbClr val="3D5466"/>
+                </a:solidFill>
+                <a:latin typeface="Arial"/>
+              </a:rPr>
+              <a:t>Gesamtumfang: 12–20 Seiten (je nach Komplexität)</a:t>
+            </a:r>
+          </a:p>
+          <a:p>
+            <a:pPr>
+              <a:spcBef>
+                <a:spcPts val="1000"/>
+              </a:spcBef>
+              <a:spcAft>
+                <a:spcPts val="200"/>
+              </a:spcAft>
+            </a:pPr>
+            <a:r>
+              <a:rPr sz="800" b="1">
+                <a:solidFill>
+                  <a:srgbClr val="78808C"/>
+                </a:solidFill>
+                <a:latin typeface="JetBrains Mono"/>
+              </a:rPr>
+              <a:t>4.2.2 DIE DREI ENTSCHEIDUNGSERGEBNISSE</a:t>
+            </a:r>
+          </a:p>
+          <a:p>
+            <a:pPr>
+              <a:spcBef>
+                <a:spcPts val="400"/>
+              </a:spcBef>
+              <a:spcAft>
+                <a:spcPts val="200"/>
+              </a:spcAft>
+            </a:pPr>
+            <a:r>
+              <a:rPr sz="1200">
+                <a:solidFill>
+                  <a:srgbClr val="3D5466"/>
+                </a:solidFill>
+                <a:latin typeface="Arial"/>
+              </a:rPr>
+              <a:t>Entscheidung 1: ZUSAGE</a:t>
+            </a:r>
+          </a:p>
+          <a:p>
+            <a:pPr>
+              <a:spcBef>
+                <a:spcPts val="400"/>
+              </a:spcBef>
+              <a:spcAft>
+                <a:spcPts val="200"/>
+              </a:spcAft>
+            </a:pPr>
+            <a:r>
+              <a:rPr sz="1300">
+                <a:solidFill>
+                  <a:srgbClr val="3D5466"/>
+                </a:solidFill>
+                <a:latin typeface="Arial"/>
+              </a:rPr>
+              <a:t>▸  Alle 8 Felder positiv oder neutral</a:t>
+            </a:r>
+          </a:p>
+          <a:p>
+            <a:pPr>
+              <a:spcBef>
+                <a:spcPts val="400"/>
+              </a:spcBef>
+              <a:spcAft>
+                <a:spcPts val="200"/>
+              </a:spcAft>
+            </a:pPr>
+            <a:r>
+              <a:rPr sz="1300">
+                <a:solidFill>
+                  <a:srgbClr val="3D5466"/>
+                </a:solidFill>
+                <a:latin typeface="Arial"/>
+              </a:rPr>
+              <a:t>▸  Keine einschränkenden Bedingungen</a:t>
+            </a:r>
+          </a:p>
+          <a:p>
+            <a:pPr>
+              <a:spcBef>
+                <a:spcPts val="400"/>
+              </a:spcBef>
+              <a:spcAft>
+                <a:spcPts val="200"/>
+              </a:spcAft>
+            </a:pPr>
+            <a:r>
+              <a:rPr sz="1300">
+                <a:solidFill>
+                  <a:srgbClr val="3D5466"/>
+                </a:solidFill>
+                <a:latin typeface="Arial"/>
+              </a:rPr>
+              <a:t>▸  Dokumentation: Kreditausschuss-Beschluss, Krediturkunde</a:t>
+            </a:r>
+          </a:p>
+          <a:p>
+            <a:pPr>
+              <a:spcBef>
+                <a:spcPts val="400"/>
+              </a:spcBef>
+              <a:spcAft>
+                <a:spcPts val="200"/>
+              </a:spcAft>
+            </a:pPr>
+            <a:r>
+              <a:rPr sz="1200">
+                <a:solidFill>
+                  <a:srgbClr val="3D5466"/>
+                </a:solidFill>
+                <a:latin typeface="Arial"/>
+              </a:rPr>
+              <a:t>Entscheidung 2: ZUSAGE MIT AUFLAGEN</a:t>
+            </a:r>
+          </a:p>
+          <a:p>
+            <a:pPr>
+              <a:spcBef>
+                <a:spcPts val="400"/>
+              </a:spcBef>
+              <a:spcAft>
+                <a:spcPts val="200"/>
+              </a:spcAft>
+            </a:pPr>
+            <a:r>
+              <a:rPr sz="1300">
+                <a:solidFill>
+                  <a:srgbClr val="3D5466"/>
+                </a:solidFill>
+                <a:latin typeface="Arial"/>
+              </a:rPr>
+              <a:t>▸  Einzelne Felder mit Risiken, die durch Auflagen mitigierbar sind</a:t>
+            </a:r>
+          </a:p>
+          <a:p>
+            <a:pPr>
+              <a:spcBef>
+                <a:spcPts val="400"/>
+              </a:spcBef>
+              <a:spcAft>
+                <a:spcPts val="200"/>
+              </a:spcAft>
+            </a:pPr>
+            <a:r>
+              <a:rPr sz="1300">
+                <a:solidFill>
+                  <a:srgbClr val="3D5466"/>
+                </a:solidFill>
+                <a:latin typeface="Arial"/>
+              </a:rPr>
+              <a:t>▸  Auflagen müssen SMART formuliert sein (Spezifisch, Messbar, Akzeptabel, Realistisch, Terminiert)</a:t>
+            </a:r>
+          </a:p>
+          <a:p>
+            <a:pPr>
+              <a:spcBef>
+                <a:spcPts val="400"/>
+              </a:spcBef>
+              <a:spcAft>
+                <a:spcPts val="200"/>
+              </a:spcAft>
+            </a:pPr>
+            <a:r>
+              <a:rPr sz="1300">
+                <a:solidFill>
+                  <a:srgbClr val="3D5466"/>
+                </a:solidFill>
+                <a:latin typeface="Arial"/>
+              </a:rPr>
+              <a:t>▸  Beispiel: „EK-Quote muss innerhalb von 24 Monaten auf ≥ 23 % steigen; Nachweis quartalsweise."</a:t>
+            </a:r>
+          </a:p>
+        </p:txBody>
+      </p:sp>
+      <p:sp>
+        <p:nvSpPr>
+          <p:cNvPr id="9" name="Rectangle 8"/>
           <p:cNvSpPr/>
           <p:nvPr/>
         </p:nvSpPr>
@@ -8195,7 +10016,7 @@
       </p:sp>
       <p:sp>
         <p:nvSpPr>
-          <p:cNvPr id="9" name="TextBox 8"/>
+          <p:cNvPr id="10" name="TextBox 9"/>
           <p:cNvSpPr txBox="1"/>
           <p:nvPr/>
         </p:nvSpPr>
@@ -8224,41 +10045,6 @@
                 <a:latin typeface="JetBrains Mono"/>
               </a:rPr>
               <a:t>Benedikt Zoller Coaching  ·  FKB Campus  ·  M21</a:t>
-            </a:r>
-          </a:p>
-        </p:txBody>
-      </p:sp>
-      <p:sp>
-        <p:nvSpPr>
-          <p:cNvPr id="10" name="TextBox 9"/>
-          <p:cNvSpPr txBox="1"/>
-          <p:nvPr/>
-        </p:nvSpPr>
-        <p:spPr>
-          <a:xfrm>
-            <a:off x="7176211" y="6583680"/>
-            <a:ext cx="4326940" cy="256032"/>
-          </a:xfrm>
-          <a:prstGeom prst="rect">
-            <a:avLst/>
-          </a:prstGeom>
-          <a:noFill/>
-        </p:spPr>
-        <p:txBody>
-          <a:bodyPr wrap="none">
-            <a:spAutoFit/>
-          </a:bodyPr>
-          <a:lstStyle/>
-          <a:p>
-            <a:pPr algn="r"/>
-            <a:r>
-              <a:rPr sz="700">
-                <a:solidFill>
-                  <a:srgbClr val="A0B4D2"/>
-                </a:solidFill>
-                <a:latin typeface="JetBrains Mono"/>
-              </a:rPr>
-              <a:t>Schaubild</a:t>
             </a:r>
           </a:p>
         </p:txBody>
@@ -8296,7 +10082,7 @@
             <a:avLst/>
           </a:prstGeom>
           <a:solidFill>
-            <a:srgbClr val="EDEDF3"/>
+            <a:srgbClr val="FFFFFF"/>
           </a:solidFill>
           <a:ln>
             <a:noFill/>
@@ -8397,51 +10183,43 @@
                 </a:solidFill>
                 <a:latin typeface="JetBrains Mono"/>
               </a:rPr>
-              <a:t>M21  ·  INHALT</a:t>
-            </a:r>
-          </a:p>
-        </p:txBody>
-      </p:sp>
-      <p:sp>
-        <p:nvSpPr>
-          <p:cNvPr id="5" name="Rectangle 4"/>
-          <p:cNvSpPr/>
-          <p:nvPr/>
-        </p:nvSpPr>
-        <p:spPr>
-          <a:xfrm>
-            <a:off x="0" y="1234440"/>
-            <a:ext cx="12188952" cy="12700"/>
-          </a:xfrm>
-          <a:prstGeom prst="rect">
-            <a:avLst/>
-          </a:prstGeom>
-          <a:solidFill>
-            <a:srgbClr val="D8DFE4"/>
-          </a:solidFill>
-          <a:ln>
-            <a:noFill/>
-          </a:ln>
-        </p:spPr>
-        <p:style>
-          <a:lnRef idx="1">
-            <a:schemeClr val="accent1"/>
-          </a:lnRef>
-          <a:fillRef idx="3">
-            <a:schemeClr val="accent1"/>
-          </a:fillRef>
-          <a:effectRef idx="2">
-            <a:schemeClr val="accent1"/>
-          </a:effectRef>
-          <a:fontRef idx="minor">
-            <a:schemeClr val="lt1"/>
-          </a:fontRef>
-        </p:style>
-        <p:txBody>
-          <a:bodyPr rtlCol="0" anchor="ctr"/>
-          <a:lstStyle/>
-          <a:p>
-            <a:pPr algn="ctr"/>
+              <a:t>M21  ·  SCHAUBILD</a:t>
+            </a:r>
+          </a:p>
+        </p:txBody>
+      </p:sp>
+      <p:sp>
+        <p:nvSpPr>
+          <p:cNvPr id="5" name="TextBox 4"/>
+          <p:cNvSpPr txBox="1"/>
+          <p:nvPr/>
+        </p:nvSpPr>
+        <p:spPr>
+          <a:xfrm>
+            <a:off x="685800" y="502920"/>
+            <a:ext cx="10817352" cy="594360"/>
+          </a:xfrm>
+          <a:prstGeom prst="rect">
+            <a:avLst/>
+          </a:prstGeom>
+          <a:noFill/>
+        </p:spPr>
+        <p:txBody>
+          <a:bodyPr wrap="square">
+            <a:spAutoFit/>
+          </a:bodyPr>
+          <a:lstStyle/>
+          <a:p>
+            <a:pPr algn="l"/>
+            <a:r>
+              <a:rPr sz="2000" b="1" i="0">
+                <a:solidFill>
+                  <a:srgbClr val="1F2C56"/>
+                </a:solidFill>
+                <a:latin typeface="Source Serif 4"/>
+              </a:rPr>
+              <a:t>Zwei Denksysteme nach Kahneman</a:t>
+            </a:r>
           </a:p>
         </p:txBody>
       </p:sp>
@@ -8453,8 +10231,8 @@
         </p:nvSpPr>
         <p:spPr>
           <a:xfrm>
-            <a:off x="685800" y="502920"/>
-            <a:ext cx="36576" cy="658368"/>
+            <a:off x="685800" y="1143000"/>
+            <a:ext cx="10817352" cy="25400"/>
           </a:xfrm>
           <a:prstGeom prst="rect">
             <a:avLst/>
@@ -8488,181 +10266,33 @@
           </a:p>
         </p:txBody>
       </p:sp>
-      <p:sp>
-        <p:nvSpPr>
-          <p:cNvPr id="7" name="TextBox 6"/>
-          <p:cNvSpPr txBox="1"/>
-          <p:nvPr/>
-        </p:nvSpPr>
-        <p:spPr>
-          <a:xfrm>
-            <a:off x="813816" y="502920"/>
-            <a:ext cx="10634472" cy="685800"/>
-          </a:xfrm>
-          <a:prstGeom prst="rect">
-            <a:avLst/>
-          </a:prstGeom>
-          <a:noFill/>
-        </p:spPr>
-        <p:txBody>
-          <a:bodyPr wrap="square">
-            <a:spAutoFit/>
-          </a:bodyPr>
-          <a:lstStyle/>
-          <a:p>
-            <a:pPr algn="l"/>
-            <a:r>
-              <a:rPr sz="2400" b="1" i="0">
-                <a:solidFill>
-                  <a:srgbClr val="1F2C56"/>
-                </a:solidFill>
-                <a:latin typeface="Source Serif 4"/>
-              </a:rPr>
-              <a:t>Theorie-Input: Sicherheitenbewertung nach BelWertV</a:t>
-            </a:r>
-          </a:p>
-        </p:txBody>
-      </p:sp>
-      <p:sp>
-        <p:nvSpPr>
-          <p:cNvPr id="8" name="TextBox 7"/>
-          <p:cNvSpPr txBox="1"/>
-          <p:nvPr/>
-        </p:nvSpPr>
-        <p:spPr>
-          <a:xfrm>
-            <a:off x="685800" y="1417320"/>
-            <a:ext cx="10817352" cy="5029200"/>
-          </a:xfrm>
-          <a:prstGeom prst="rect">
-            <a:avLst/>
-          </a:prstGeom>
-          <a:noFill/>
-        </p:spPr>
-        <p:txBody>
-          <a:bodyPr wrap="square">
-            <a:spAutoFit/>
-          </a:bodyPr>
-          <a:lstStyle/>
-          <a:p>
-            <a:pPr>
-              <a:spcBef>
-                <a:spcPts val="400"/>
-              </a:spcBef>
-              <a:spcAft>
-                <a:spcPts val="200"/>
-              </a:spcAft>
-            </a:pPr>
-            <a:r>
-              <a:rPr sz="1200">
-                <a:solidFill>
-                  <a:srgbClr val="3D5466"/>
-                </a:solidFill>
-                <a:latin typeface="Arial"/>
-              </a:rPr>
-              <a:t>Grundpfandrechte auf Immobilien:</a:t>
-            </a:r>
-          </a:p>
-          <a:p>
-            <a:pPr>
-              <a:spcBef>
-                <a:spcPts val="400"/>
-              </a:spcBef>
-              <a:spcAft>
-                <a:spcPts val="200"/>
-              </a:spcAft>
-            </a:pPr>
-            <a:r>
-              <a:rPr sz="1300">
-                <a:solidFill>
-                  <a:srgbClr val="3D5466"/>
-                </a:solidFill>
-                <a:latin typeface="Arial"/>
-              </a:rPr>
-              <a:t>▸  Verkehrswert ermitteln (Gutachter oder Vergleichswerte)</a:t>
-            </a:r>
-          </a:p>
-          <a:p>
-            <a:pPr>
-              <a:spcBef>
-                <a:spcPts val="400"/>
-              </a:spcBef>
-              <a:spcAft>
-                <a:spcPts val="200"/>
-              </a:spcAft>
-            </a:pPr>
-            <a:r>
-              <a:rPr sz="1300">
-                <a:solidFill>
-                  <a:srgbClr val="3D5466"/>
-                </a:solidFill>
-                <a:latin typeface="Arial"/>
-              </a:rPr>
-              <a:t>▸  Abschlag von 20–30 % anwenden (je nach Marktvolatilität und Verwertbarkeit)</a:t>
-            </a:r>
-          </a:p>
-          <a:p>
-            <a:pPr>
-              <a:spcBef>
-                <a:spcPts val="400"/>
-              </a:spcBef>
-              <a:spcAft>
-                <a:spcPts val="200"/>
-              </a:spcAft>
-            </a:pPr>
-            <a:r>
-              <a:rPr sz="1300">
-                <a:solidFill>
-                  <a:srgbClr val="3D5466"/>
-                </a:solidFill>
-                <a:latin typeface="Arial"/>
-              </a:rPr>
-              <a:t>▸  Beleihungswert = ca. 60–70 % des Verkehrswerts</a:t>
-            </a:r>
-          </a:p>
-          <a:p>
-            <a:pPr>
-              <a:spcBef>
-                <a:spcPts val="400"/>
-              </a:spcBef>
-              <a:spcAft>
-                <a:spcPts val="200"/>
-              </a:spcAft>
-            </a:pPr>
-            <a:r>
-              <a:rPr sz="1200">
-                <a:solidFill>
-                  <a:srgbClr val="3D5466"/>
-                </a:solidFill>
-                <a:latin typeface="Arial"/>
-              </a:rPr>
-              <a:t>Rangfolge: Rang 1 hat volle Priorität. Rang 2 und 3 erhalten erst nach vollständiger Bedienung von Rang 1 Erlöse – dies kann im Verwertungsfall zu erheblichen Ausfällen führen.</a:t>
-            </a:r>
-          </a:p>
-          <a:p>
-            <a:pPr>
-              <a:spcBef>
-                <a:spcPts val="400"/>
-              </a:spcBef>
-              <a:spcAft>
-                <a:spcPts val="200"/>
-              </a:spcAft>
-            </a:pPr>
-            <a:r>
-              <a:rPr sz="1200">
-                <a:solidFill>
-                  <a:srgbClr val="3D5466"/>
-                </a:solidFill>
-                <a:latin typeface="Arial"/>
-              </a:rPr>
-              <a:t>Bewegliche Sicherheiten: Maschinen und Anlagen verlieren durch Spezialisierung, Betrieb und Marktlage schnell an Wert. Beleihungssatz 30–50 % des Buchwerts ist konservativ, aber realistisch.</a:t>
-            </a:r>
-          </a:p>
-        </p:txBody>
-      </p:sp>
-      <p:sp>
-        <p:nvSpPr>
-          <p:cNvPr id="9" name="Rectangle 8"/>
+      <p:pic>
+        <p:nvPicPr>
+          <p:cNvPr id="7" name="Picture 6" descr="image.png"/>
+          <p:cNvPicPr>
+            <a:picLocks noChangeAspect="1"/>
+          </p:cNvPicPr>
+          <p:nvPr/>
+        </p:nvPicPr>
+        <p:blipFill>
+          <a:blip r:embed="rId2"/>
+          <a:stretch>
+            <a:fillRect/>
+          </a:stretch>
+        </p:blipFill>
+        <p:spPr>
+          <a:xfrm>
+            <a:off x="2303489" y="1325880"/>
+            <a:ext cx="7581973" cy="4937760"/>
+          </a:xfrm>
+          <a:prstGeom prst="rect">
+            <a:avLst/>
+          </a:prstGeom>
+        </p:spPr>
+      </p:pic>
+      <p:sp>
+        <p:nvSpPr>
+          <p:cNvPr id="8" name="Rectangle 7"/>
           <p:cNvSpPr/>
           <p:nvPr/>
         </p:nvSpPr>
@@ -8705,7 +10335,7 @@
       </p:sp>
       <p:sp>
         <p:nvSpPr>
-          <p:cNvPr id="10" name="TextBox 9"/>
+          <p:cNvPr id="9" name="TextBox 8"/>
           <p:cNvSpPr txBox="1"/>
           <p:nvPr/>
         </p:nvSpPr>
@@ -8734,6 +10364,41 @@
                 <a:latin typeface="JetBrains Mono"/>
               </a:rPr>
               <a:t>Benedikt Zoller Coaching  ·  FKB Campus  ·  M21</a:t>
+            </a:r>
+          </a:p>
+        </p:txBody>
+      </p:sp>
+      <p:sp>
+        <p:nvSpPr>
+          <p:cNvPr id="10" name="TextBox 9"/>
+          <p:cNvSpPr txBox="1"/>
+          <p:nvPr/>
+        </p:nvSpPr>
+        <p:spPr>
+          <a:xfrm>
+            <a:off x="7176211" y="6583680"/>
+            <a:ext cx="4326940" cy="256032"/>
+          </a:xfrm>
+          <a:prstGeom prst="rect">
+            <a:avLst/>
+          </a:prstGeom>
+          <a:noFill/>
+        </p:spPr>
+        <p:txBody>
+          <a:bodyPr wrap="none">
+            <a:spAutoFit/>
+          </a:bodyPr>
+          <a:lstStyle/>
+          <a:p>
+            <a:pPr algn="r"/>
+            <a:r>
+              <a:rPr sz="700">
+                <a:solidFill>
+                  <a:srgbClr val="A0B4D2"/>
+                </a:solidFill>
+                <a:latin typeface="JetBrains Mono"/>
+              </a:rPr>
+              <a:t>Schaubild</a:t>
             </a:r>
           </a:p>
         </p:txBody>
@@ -8993,7 +10658,7 @@
                 </a:solidFill>
                 <a:latin typeface="Source Serif 4"/>
               </a:rPr>
-              <a:t>4.3a Sicherheitenbewertung im Alltag</a:t>
+              <a:t>Theorie-Input: Sicherheitenbewertung nach BelWertV</a:t>
             </a:r>
           </a:p>
         </p:txBody>
@@ -9035,7 +10700,7 @@
                 </a:solidFill>
                 <a:latin typeface="Arial"/>
               </a:rPr>
-              <a:t>Die BelWertV-Theorie ist eine Sache – der Alltag stellt andere Fragen:</a:t>
+              <a:t>Grundpfandrechte auf Immobilien:</a:t>
             </a:r>
           </a:p>
           <a:p>
@@ -9048,13 +10713,13 @@
               </a:spcAft>
             </a:pPr>
             <a:r>
-              <a:rPr sz="1200">
+              <a:rPr sz="1300">
                 <a:solidFill>
                   <a:srgbClr val="3D5466"/>
                 </a:solidFill>
                 <a:latin typeface="Arial"/>
               </a:rPr>
-              <a:t>Wann ist ein aktuelles Gutachten Pflicht?</a:t>
+              <a:t>▸  Verkehrswert ermitteln (Gutachter oder Vergleichswerte)</a:t>
             </a:r>
           </a:p>
           <a:p>
@@ -9073,7 +10738,7 @@
                 </a:solidFill>
                 <a:latin typeface="Arial"/>
               </a:rPr>
-              <a:t>▸  Bei Erstverpfändung einer Immobilie und Krediten typischerweise ab 150.000–300 T€ (bankindividuell – Grenze mit Marktfolge klären)</a:t>
+              <a:t>▸  Abschlag von 20–30 % anwenden (je nach Marktvolatilität und Verwertbarkeit)</a:t>
             </a:r>
           </a:p>
           <a:p>
@@ -9092,7 +10757,7 @@
                 </a:solidFill>
                 <a:latin typeface="Arial"/>
               </a:rPr>
-              <a:t>▸  Bei wesentlicher Wertveränderung (Umbau, Schaden, Marktveränderung)</a:t>
+              <a:t>▸  Beleihungswert = ca. 60–70 % des Verkehrswerts</a:t>
             </a:r>
           </a:p>
           <a:p>
@@ -9105,13 +10770,13 @@
               </a:spcAft>
             </a:pPr>
             <a:r>
-              <a:rPr sz="1300">
+              <a:rPr sz="1200">
                 <a:solidFill>
                   <a:srgbClr val="3D5466"/>
                 </a:solidFill>
                 <a:latin typeface="Arial"/>
               </a:rPr>
-              <a:t>▸  Bei Verlängerung mit mehr als 5 Jahren ohne zwischenzeitliches Update</a:t>
+              <a:t>Rangfolge: Rang 1 hat volle Priorität. Rang 2 und 3 erhalten erst nach vollständiger Bedienung von Rang 1 Erlöse – dies kann im Verwertungsfall zu erheblichen Ausfällen führen.</a:t>
             </a:r>
           </a:p>
           <a:p>
@@ -9130,121 +10795,7 @@
                 </a:solidFill>
                 <a:latin typeface="Arial"/>
               </a:rPr>
-              <a:t>Wann reicht eine Plausibilisierung?</a:t>
-            </a:r>
-          </a:p>
-          <a:p>
-            <a:pPr>
-              <a:spcBef>
-                <a:spcPts val="400"/>
-              </a:spcBef>
-              <a:spcAft>
-                <a:spcPts val="200"/>
-              </a:spcAft>
-            </a:pPr>
-            <a:r>
-              <a:rPr sz="1300">
-                <a:solidFill>
-                  <a:srgbClr val="3D5466"/>
-                </a:solidFill>
-                <a:latin typeface="Arial"/>
-              </a:rPr>
-              <a:t>▸  Bei kleinen Beträgen und gut bekannten Objekten kann der Berater eine Marktplausibilisierung vornehmen (Vergleichspreise Onlineportale, Gespräch mit lokalem Makler)</a:t>
-            </a:r>
-          </a:p>
-          <a:p>
-            <a:pPr>
-              <a:spcBef>
-                <a:spcPts val="400"/>
-              </a:spcBef>
-              <a:spcAft>
-                <a:spcPts val="200"/>
-              </a:spcAft>
-            </a:pPr>
-            <a:r>
-              <a:rPr sz="1300">
-                <a:solidFill>
-                  <a:srgbClr val="3D5466"/>
-                </a:solidFill>
-                <a:latin typeface="Arial"/>
-              </a:rPr>
-              <a:t>▸  Diese Schätzung muss dokumentiert und dem Kreditbeschluss beigefügt werden</a:t>
-            </a:r>
-          </a:p>
-          <a:p>
-            <a:pPr>
-              <a:spcBef>
-                <a:spcPts val="400"/>
-              </a:spcBef>
-              <a:spcAft>
-                <a:spcPts val="200"/>
-              </a:spcAft>
-            </a:pPr>
-            <a:r>
-              <a:rPr sz="1200">
-                <a:solidFill>
-                  <a:srgbClr val="3D5466"/>
-                </a:solidFill>
-                <a:latin typeface="Arial"/>
-              </a:rPr>
-              <a:t>Alte Gutachten – Faustregel:</a:t>
-            </a:r>
-          </a:p>
-          <a:p>
-            <a:pPr>
-              <a:spcBef>
-                <a:spcPts val="400"/>
-              </a:spcBef>
-              <a:spcAft>
-                <a:spcPts val="200"/>
-              </a:spcAft>
-            </a:pPr>
-            <a:r>
-              <a:rPr sz="1300">
-                <a:solidFill>
-                  <a:srgbClr val="3D5466"/>
-                </a:solidFill>
-                <a:latin typeface="Arial"/>
-              </a:rPr>
-              <a:t>▸  Gutachten älter als 3 Jahre: Abschlag von 10–20 % auf den damaligen Wert je nach Marktentwicklung</a:t>
-            </a:r>
-          </a:p>
-          <a:p>
-            <a:pPr>
-              <a:spcBef>
-                <a:spcPts val="400"/>
-              </a:spcBef>
-              <a:spcAft>
-                <a:spcPts val="200"/>
-              </a:spcAft>
-            </a:pPr>
-            <a:r>
-              <a:rPr sz="1300">
-                <a:solidFill>
-                  <a:srgbClr val="3D5466"/>
-                </a:solidFill>
-                <a:latin typeface="Arial"/>
-              </a:rPr>
-              <a:t>▸  Gutachten älter als 5 Jahre: Neugutachten oder erheblicher konservativer Abschlag empfohlen</a:t>
-            </a:r>
-          </a:p>
-          <a:p>
-            <a:pPr>
-              <a:spcBef>
-                <a:spcPts val="400"/>
-              </a:spcBef>
-              <a:spcAft>
-                <a:spcPts val="200"/>
-              </a:spcAft>
-            </a:pPr>
-            <a:r>
-              <a:rPr sz="1300">
-                <a:solidFill>
-                  <a:srgbClr val="3D5466"/>
-                </a:solidFill>
-                <a:latin typeface="Arial"/>
-              </a:rPr>
-              <a:t>▸  Bei Gewerbeimmobilien: Marktentwicklung oft volatiler als bei Wohnimmobilien – früher erneuern</a:t>
+              <a:t>Bewegliche Sicherheiten: Maschinen und Anlagen verlieren durch Spezialisierung, Betrieb und Marktlage schnell an Wert. Beleihungssatz 30–50 % des Buchwerts ist konservativ, aber realistisch.</a:t>
             </a:r>
           </a:p>
         </p:txBody>
@@ -9653,4 +11204,324 @@
   </a:objectDefaults>
   <a:extraClrSchemeLst/>
 </a:theme>
+</file>
+
+<file path=ppt/theme/theme2.xml><?xml version="1.0" encoding="utf-8"?>
+<a:theme xmlns:a="http://schemas.openxmlformats.org/drawingml/2006/main" name="Office Theme">
+  <a:themeElements>
+    <a:clrScheme name="Office">
+      <a:dk1>
+        <a:sysClr val="windowText" lastClr="000000"/>
+      </a:dk1>
+      <a:lt1>
+        <a:sysClr val="window" lastClr="FFFFFF"/>
+      </a:lt1>
+      <a:dk2>
+        <a:srgbClr val="1F497D"/>
+      </a:dk2>
+      <a:lt2>
+        <a:srgbClr val="EEECE1"/>
+      </a:lt2>
+      <a:accent1>
+        <a:srgbClr val="4F81BD"/>
+      </a:accent1>
+      <a:accent2>
+        <a:srgbClr val="C0504D"/>
+      </a:accent2>
+      <a:accent3>
+        <a:srgbClr val="9BBB59"/>
+      </a:accent3>
+      <a:accent4>
+        <a:srgbClr val="8064A2"/>
+      </a:accent4>
+      <a:accent5>
+        <a:srgbClr val="4BACC6"/>
+      </a:accent5>
+      <a:accent6>
+        <a:srgbClr val="F79646"/>
+      </a:accent6>
+      <a:hlink>
+        <a:srgbClr val="0000FF"/>
+      </a:hlink>
+      <a:folHlink>
+        <a:srgbClr val="800080"/>
+      </a:folHlink>
+    </a:clrScheme>
+    <a:fontScheme name="Office">
+      <a:majorFont>
+        <a:latin typeface="Calibri"/>
+        <a:ea typeface=""/>
+        <a:cs typeface=""/>
+        <a:font script="Jpan" typeface="ＭＳ Ｐゴシック"/>
+        <a:font script="Hang" typeface="맑은 고딕"/>
+        <a:font script="Hans" typeface="宋体"/>
+        <a:font script="Hant" typeface="新細明體"/>
+        <a:font script="Arab" typeface="Times New Roman"/>
+        <a:font script="Hebr" typeface="Times New Roman"/>
+        <a:font script="Thai" typeface="Angsana New"/>
+        <a:font script="Ethi" typeface="Nyala"/>
+        <a:font script="Beng" typeface="Vrinda"/>
+        <a:font script="Gujr" typeface="Shruti"/>
+        <a:font script="Khmr" typeface="MoolBoran"/>
+        <a:font script="Knda" typeface="Tunga"/>
+        <a:font script="Guru" typeface="Raavi"/>
+        <a:font script="Cans" typeface="Euphemia"/>
+        <a:font script="Cher" typeface="Plantagenet Cherokee"/>
+        <a:font script="Yiii" typeface="Microsoft Yi Baiti"/>
+        <a:font script="Tibt" typeface="Microsoft Himalaya"/>
+        <a:font script="Thaa" typeface="MV Boli"/>
+        <a:font script="Deva" typeface="Mangal"/>
+        <a:font script="Telu" typeface="Gautami"/>
+        <a:font script="Taml" typeface="Latha"/>
+        <a:font script="Syrc" typeface="Estrangelo Edessa"/>
+        <a:font script="Orya" typeface="Kalinga"/>
+        <a:font script="Mlym" typeface="Kartika"/>
+        <a:font script="Laoo" typeface="DokChampa"/>
+        <a:font script="Sinh" typeface="Iskoola Pota"/>
+        <a:font script="Mong" typeface="Mongolian Baiti"/>
+        <a:font script="Viet" typeface="Times New Roman"/>
+        <a:font script="Uigh" typeface="Microsoft Uighur"/>
+        <a:font script="Geor" typeface="Sylfaen"/>
+      </a:majorFont>
+      <a:minorFont>
+        <a:latin typeface="Calibri"/>
+        <a:ea typeface=""/>
+        <a:cs typeface=""/>
+        <a:font script="Jpan" typeface="ＭＳ Ｐゴシック"/>
+        <a:font script="Hang" typeface="맑은 고딕"/>
+        <a:font script="Hans" typeface="宋体"/>
+        <a:font script="Hant" typeface="新細明體"/>
+        <a:font script="Arab" typeface="Arial"/>
+        <a:font script="Hebr" typeface="Arial"/>
+        <a:font script="Thai" typeface="Cordia New"/>
+        <a:font script="Ethi" typeface="Nyala"/>
+        <a:font script="Beng" typeface="Vrinda"/>
+        <a:font script="Gujr" typeface="Shruti"/>
+        <a:font script="Khmr" typeface="DaunPenh"/>
+        <a:font script="Knda" typeface="Tunga"/>
+        <a:font script="Guru" typeface="Raavi"/>
+        <a:font script="Cans" typeface="Euphemia"/>
+        <a:font script="Cher" typeface="Plantagenet Cherokee"/>
+        <a:font script="Yiii" typeface="Microsoft Yi Baiti"/>
+        <a:font script="Tibt" typeface="Microsoft Himalaya"/>
+        <a:font script="Thaa" typeface="MV Boli"/>
+        <a:font script="Deva" typeface="Mangal"/>
+        <a:font script="Telu" typeface="Gautami"/>
+        <a:font script="Taml" typeface="Latha"/>
+        <a:font script="Syrc" typeface="Estrangelo Edessa"/>
+        <a:font script="Orya" typeface="Kalinga"/>
+        <a:font script="Mlym" typeface="Kartika"/>
+        <a:font script="Laoo" typeface="DokChampa"/>
+        <a:font script="Sinh" typeface="Iskoola Pota"/>
+        <a:font script="Mong" typeface="Mongolian Baiti"/>
+        <a:font script="Viet" typeface="Arial"/>
+        <a:font script="Uigh" typeface="Microsoft Uighur"/>
+        <a:font script="Geor" typeface="Sylfaen"/>
+      </a:minorFont>
+    </a:fontScheme>
+    <a:fmtScheme name="Office">
+      <a:fillStyleLst>
+        <a:solidFill>
+          <a:schemeClr val="phClr"/>
+        </a:solidFill>
+        <a:gradFill rotWithShape="1">
+          <a:gsLst>
+            <a:gs pos="0">
+              <a:schemeClr val="phClr">
+                <a:tint val="50000"/>
+                <a:satMod val="300000"/>
+              </a:schemeClr>
+            </a:gs>
+            <a:gs pos="35000">
+              <a:schemeClr val="phClr">
+                <a:tint val="37000"/>
+                <a:satMod val="300000"/>
+              </a:schemeClr>
+            </a:gs>
+            <a:gs pos="100000">
+              <a:schemeClr val="phClr">
+                <a:tint val="15000"/>
+                <a:satMod val="350000"/>
+              </a:schemeClr>
+            </a:gs>
+          </a:gsLst>
+          <a:lin ang="16200000" scaled="1"/>
+        </a:gradFill>
+        <a:gradFill rotWithShape="1">
+          <a:gsLst>
+            <a:gs pos="0">
+              <a:schemeClr val="phClr">
+                <a:tint val="100000"/>
+                <a:shade val="100000"/>
+                <a:satMod val="130000"/>
+              </a:schemeClr>
+            </a:gs>
+            <a:gs pos="100000">
+              <a:schemeClr val="phClr">
+                <a:tint val="50000"/>
+                <a:shade val="100000"/>
+                <a:satMod val="350000"/>
+              </a:schemeClr>
+            </a:gs>
+          </a:gsLst>
+          <a:lin ang="16200000" scaled="0"/>
+        </a:gradFill>
+      </a:fillStyleLst>
+      <a:lnStyleLst>
+        <a:ln w="9525" cap="flat" cmpd="sng" algn="ctr">
+          <a:solidFill>
+            <a:schemeClr val="phClr">
+              <a:shade val="95000"/>
+              <a:satMod val="105000"/>
+            </a:schemeClr>
+          </a:solidFill>
+          <a:prstDash val="solid"/>
+        </a:ln>
+        <a:ln w="25400" cap="flat" cmpd="sng" algn="ctr">
+          <a:solidFill>
+            <a:schemeClr val="phClr"/>
+          </a:solidFill>
+          <a:prstDash val="solid"/>
+        </a:ln>
+        <a:ln w="38100" cap="flat" cmpd="sng" algn="ctr">
+          <a:solidFill>
+            <a:schemeClr val="phClr"/>
+          </a:solidFill>
+          <a:prstDash val="solid"/>
+        </a:ln>
+      </a:lnStyleLst>
+      <a:effectStyleLst>
+        <a:effectStyle>
+          <a:effectLst>
+            <a:outerShdw blurRad="40000" dist="20000" dir="5400000" rotWithShape="0">
+              <a:srgbClr val="000000">
+                <a:alpha val="38000"/>
+              </a:srgbClr>
+            </a:outerShdw>
+          </a:effectLst>
+        </a:effectStyle>
+        <a:effectStyle>
+          <a:effectLst>
+            <a:outerShdw blurRad="40000" dist="23000" dir="5400000" rotWithShape="0">
+              <a:srgbClr val="000000">
+                <a:alpha val="35000"/>
+              </a:srgbClr>
+            </a:outerShdw>
+          </a:effectLst>
+        </a:effectStyle>
+        <a:effectStyle>
+          <a:effectLst>
+            <a:outerShdw blurRad="40000" dist="23000" dir="5400000" rotWithShape="0">
+              <a:srgbClr val="000000">
+                <a:alpha val="35000"/>
+              </a:srgbClr>
+            </a:outerShdw>
+          </a:effectLst>
+          <a:scene3d>
+            <a:camera prst="orthographicFront">
+              <a:rot lat="0" lon="0" rev="0"/>
+            </a:camera>
+            <a:lightRig rig="threePt" dir="t">
+              <a:rot lat="0" lon="0" rev="1200000"/>
+            </a:lightRig>
+          </a:scene3d>
+          <a:sp3d>
+            <a:bevelT w="63500" h="25400"/>
+          </a:sp3d>
+        </a:effectStyle>
+      </a:effectStyleLst>
+      <a:bgFillStyleLst>
+        <a:solidFill>
+          <a:schemeClr val="phClr"/>
+        </a:solidFill>
+        <a:gradFill rotWithShape="1">
+          <a:gsLst>
+            <a:gs pos="0">
+              <a:schemeClr val="phClr">
+                <a:tint val="40000"/>
+                <a:satMod val="350000"/>
+              </a:schemeClr>
+            </a:gs>
+            <a:gs pos="40000">
+              <a:schemeClr val="phClr">
+                <a:tint val="45000"/>
+                <a:shade val="99000"/>
+                <a:satMod val="350000"/>
+              </a:schemeClr>
+            </a:gs>
+            <a:gs pos="100000">
+              <a:schemeClr val="phClr">
+                <a:shade val="20000"/>
+                <a:satMod val="255000"/>
+              </a:schemeClr>
+            </a:gs>
+          </a:gsLst>
+          <a:path path="circle">
+            <a:fillToRect l="50000" t="-80000" r="50000" b="180000"/>
+          </a:path>
+        </a:gradFill>
+        <a:gradFill rotWithShape="1">
+          <a:gsLst>
+            <a:gs pos="0">
+              <a:schemeClr val="phClr">
+                <a:tint val="80000"/>
+                <a:satMod val="300000"/>
+              </a:schemeClr>
+            </a:gs>
+            <a:gs pos="100000">
+              <a:schemeClr val="phClr">
+                <a:shade val="30000"/>
+                <a:satMod val="200000"/>
+              </a:schemeClr>
+            </a:gs>
+          </a:gsLst>
+          <a:path path="circle">
+            <a:fillToRect l="50000" t="50000" r="50000" b="50000"/>
+          </a:path>
+        </a:gradFill>
+      </a:bgFillStyleLst>
+    </a:fmtScheme>
+  </a:themeElements>
+  <a:objectDefaults>
+    <a:spDef>
+      <a:spPr/>
+      <a:bodyPr/>
+      <a:lstStyle/>
+      <a:style>
+        <a:lnRef idx="1">
+          <a:schemeClr val="accent1"/>
+        </a:lnRef>
+        <a:fillRef idx="3">
+          <a:schemeClr val="accent1"/>
+        </a:fillRef>
+        <a:effectRef idx="2">
+          <a:schemeClr val="accent1"/>
+        </a:effectRef>
+        <a:fontRef idx="minor">
+          <a:schemeClr val="lt1"/>
+        </a:fontRef>
+      </a:style>
+    </a:spDef>
+    <a:lnDef>
+      <a:spPr/>
+      <a:bodyPr/>
+      <a:lstStyle/>
+      <a:style>
+        <a:lnRef idx="2">
+          <a:schemeClr val="accent1"/>
+        </a:lnRef>
+        <a:fillRef idx="0">
+          <a:schemeClr val="accent1"/>
+        </a:fillRef>
+        <a:effectRef idx="1">
+          <a:schemeClr val="accent1"/>
+        </a:effectRef>
+        <a:fontRef idx="minor">
+          <a:schemeClr val="tx1"/>
+        </a:fontRef>
+      </a:style>
+    </a:lnDef>
+  </a:objectDefaults>
+  <a:extraClrSchemeLst/>
+</a:theme>
 </file>
--- a/protected-downloads/praesentation/M21.pptx
+++ b/protected-downloads/praesentation/M21.pptx
@@ -4339,7 +4339,42 @@
       </p:sp>
       <p:sp>
         <p:nvSpPr>
-          <p:cNvPr id="6" name="Rectangle 5"/>
+          <p:cNvPr id="6" name="TextBox 5"/>
+          <p:cNvSpPr txBox="1"/>
+          <p:nvPr/>
+        </p:nvSpPr>
+        <p:spPr>
+          <a:xfrm>
+            <a:off x="685800" y="3977639"/>
+            <a:ext cx="10817352" cy="731520"/>
+          </a:xfrm>
+          <a:prstGeom prst="rect">
+            <a:avLst/>
+          </a:prstGeom>
+          <a:noFill/>
+        </p:spPr>
+        <p:txBody>
+          <a:bodyPr wrap="square">
+            <a:spAutoFit/>
+          </a:bodyPr>
+          <a:lstStyle/>
+          <a:p>
+            <a:pPr algn="l"/>
+            <a:r>
+              <a:rPr sz="1900" b="0" i="1">
+                <a:solidFill>
+                  <a:srgbClr val="BECDE6"/>
+                </a:solidFill>
+                <a:latin typeface="Source Serif 4"/>
+              </a:rPr>
+              <a:t>Strukturierte Kreditanalyse und überzeugende Entscheidungsvorlage</a:t>
+            </a:r>
+          </a:p>
+        </p:txBody>
+      </p:sp>
+      <p:sp>
+        <p:nvSpPr>
+          <p:cNvPr id="7" name="Rectangle 6"/>
           <p:cNvSpPr/>
           <p:nvPr/>
         </p:nvSpPr>
@@ -4382,14 +4417,14 @@
       </p:sp>
       <p:sp>
         <p:nvSpPr>
-          <p:cNvPr id="7" name="TextBox 6"/>
+          <p:cNvPr id="8" name="TextBox 7"/>
           <p:cNvSpPr txBox="1"/>
           <p:nvPr/>
         </p:nvSpPr>
         <p:spPr>
           <a:xfrm>
             <a:off x="685800" y="5193792"/>
-            <a:ext cx="10817352" cy="201168"/>
+            <a:ext cx="3605784" cy="201168"/>
           </a:xfrm>
           <a:prstGeom prst="rect">
             <a:avLst/>
@@ -4410,21 +4445,21 @@
                 </a:solidFill>
                 <a:latin typeface="JetBrains Mono"/>
               </a:rPr>
-              <a:t>VERSION</a:t>
-            </a:r>
-          </a:p>
-        </p:txBody>
-      </p:sp>
-      <p:sp>
-        <p:nvSpPr>
-          <p:cNvPr id="8" name="TextBox 7"/>
+              <a:t>KOMPETENZFELD</a:t>
+            </a:r>
+          </a:p>
+        </p:txBody>
+      </p:sp>
+      <p:sp>
+        <p:nvSpPr>
+          <p:cNvPr id="9" name="TextBox 8"/>
           <p:cNvSpPr txBox="1"/>
           <p:nvPr/>
         </p:nvSpPr>
         <p:spPr>
           <a:xfrm>
             <a:off x="685800" y="5394960"/>
-            <a:ext cx="10817352" cy="320040"/>
+            <a:ext cx="3605784" cy="320040"/>
           </a:xfrm>
           <a:prstGeom prst="rect">
             <a:avLst/>
@@ -4445,14 +4480,154 @@
                 </a:solidFill>
                 <a:latin typeface="Arial"/>
               </a:rPr>
-              <a:t>v0.3_KERN</a:t>
-            </a:r>
-          </a:p>
-        </p:txBody>
-      </p:sp>
-      <p:sp>
-        <p:nvSpPr>
-          <p:cNvPr id="9" name="Rectangle 8"/>
+              <a:t>K-01 Finanzanalyse &amp; Kreditexpertise</a:t>
+            </a:r>
+          </a:p>
+        </p:txBody>
+      </p:sp>
+      <p:sp>
+        <p:nvSpPr>
+          <p:cNvPr id="10" name="TextBox 9"/>
+          <p:cNvSpPr txBox="1"/>
+          <p:nvPr/>
+        </p:nvSpPr>
+        <p:spPr>
+          <a:xfrm>
+            <a:off x="4291584" y="5193792"/>
+            <a:ext cx="3605784" cy="201168"/>
+          </a:xfrm>
+          <a:prstGeom prst="rect">
+            <a:avLst/>
+          </a:prstGeom>
+          <a:noFill/>
+        </p:spPr>
+        <p:txBody>
+          <a:bodyPr wrap="none">
+            <a:spAutoFit/>
+          </a:bodyPr>
+          <a:lstStyle/>
+          <a:p>
+            <a:pPr algn="l"/>
+            <a:r>
+              <a:rPr sz="700">
+                <a:solidFill>
+                  <a:srgbClr val="A0B4D2"/>
+                </a:solidFill>
+                <a:latin typeface="JetBrains Mono"/>
+              </a:rPr>
+              <a:t>KOMPETENZSTUFE</a:t>
+            </a:r>
+          </a:p>
+        </p:txBody>
+      </p:sp>
+      <p:sp>
+        <p:nvSpPr>
+          <p:cNvPr id="11" name="TextBox 10"/>
+          <p:cNvSpPr txBox="1"/>
+          <p:nvPr/>
+        </p:nvSpPr>
+        <p:spPr>
+          <a:xfrm>
+            <a:off x="4291584" y="5394960"/>
+            <a:ext cx="3605784" cy="320040"/>
+          </a:xfrm>
+          <a:prstGeom prst="rect">
+            <a:avLst/>
+          </a:prstGeom>
+          <a:noFill/>
+        </p:spPr>
+        <p:txBody>
+          <a:bodyPr wrap="square">
+            <a:spAutoFit/>
+          </a:bodyPr>
+          <a:lstStyle/>
+          <a:p>
+            <a:pPr algn="l"/>
+            <a:r>
+              <a:rPr sz="1100" b="0" i="0">
+                <a:solidFill>
+                  <a:srgbClr val="FFFFFF"/>
+                </a:solidFill>
+                <a:latin typeface="Arial"/>
+              </a:rPr>
+              <a:t>Sparringspartner</a:t>
+            </a:r>
+          </a:p>
+        </p:txBody>
+      </p:sp>
+      <p:sp>
+        <p:nvSpPr>
+          <p:cNvPr id="12" name="TextBox 11"/>
+          <p:cNvSpPr txBox="1"/>
+          <p:nvPr/>
+        </p:nvSpPr>
+        <p:spPr>
+          <a:xfrm>
+            <a:off x="7897368" y="5193792"/>
+            <a:ext cx="3605784" cy="201168"/>
+          </a:xfrm>
+          <a:prstGeom prst="rect">
+            <a:avLst/>
+          </a:prstGeom>
+          <a:noFill/>
+        </p:spPr>
+        <p:txBody>
+          <a:bodyPr wrap="none">
+            <a:spAutoFit/>
+          </a:bodyPr>
+          <a:lstStyle/>
+          <a:p>
+            <a:pPr algn="l"/>
+            <a:r>
+              <a:rPr sz="700">
+                <a:solidFill>
+                  <a:srgbClr val="A0B4D2"/>
+                </a:solidFill>
+                <a:latin typeface="JetBrains Mono"/>
+              </a:rPr>
+              <a:t>VERSION</a:t>
+            </a:r>
+          </a:p>
+        </p:txBody>
+      </p:sp>
+      <p:sp>
+        <p:nvSpPr>
+          <p:cNvPr id="13" name="TextBox 12"/>
+          <p:cNvSpPr txBox="1"/>
+          <p:nvPr/>
+        </p:nvSpPr>
+        <p:spPr>
+          <a:xfrm>
+            <a:off x="7897368" y="5394960"/>
+            <a:ext cx="3605784" cy="320040"/>
+          </a:xfrm>
+          <a:prstGeom prst="rect">
+            <a:avLst/>
+          </a:prstGeom>
+          <a:noFill/>
+        </p:spPr>
+        <p:txBody>
+          <a:bodyPr wrap="square">
+            <a:spAutoFit/>
+          </a:bodyPr>
+          <a:lstStyle/>
+          <a:p>
+            <a:pPr algn="l"/>
+            <a:r>
+              <a:rPr sz="1100" b="0" i="0">
+                <a:solidFill>
+                  <a:srgbClr val="FFFFFF"/>
+                </a:solidFill>
+                <a:latin typeface="Arial"/>
+              </a:rPr>
+              <a:t>v0.3</a:t>
+            </a:r>
+          </a:p>
+        </p:txBody>
+      </p:sp>
+      <p:sp>
+        <p:nvSpPr>
+          <p:cNvPr id="14" name="Rectangle 13"/>
           <p:cNvSpPr/>
           <p:nvPr/>
         </p:nvSpPr>
@@ -4495,7 +4670,7 @@
       </p:sp>
       <p:sp>
         <p:nvSpPr>
-          <p:cNvPr id="10" name="TextBox 9"/>
+          <p:cNvPr id="15" name="TextBox 14"/>
           <p:cNvSpPr txBox="1"/>
           <p:nvPr/>
         </p:nvSpPr>
@@ -4530,7 +4705,7 @@
       </p:sp>
       <p:sp>
         <p:nvSpPr>
-          <p:cNvPr id="11" name="TextBox 10"/>
+          <p:cNvPr id="16" name="TextBox 15"/>
           <p:cNvSpPr txBox="1"/>
           <p:nvPr/>
         </p:nvSpPr>
@@ -7553,7 +7728,7 @@
                 </a:solidFill>
                 <a:latin typeface="Arial"/>
               </a:rPr>
-              <a:t>▸  Eine strukturierte Kreditanalyse anhand des 8-Felder-Frameworks selbstständig durchführen und MaRisk-konform dokumentieren (Bloom 3)</a:t>
+              <a:t>▸  Eine strukturierte Kreditanalyse anhand des 8-Felder-Frameworks selbstständig durchführen und MaRisk-konform dokumentieren</a:t>
             </a:r>
           </a:p>
           <a:p>
@@ -7572,7 +7747,7 @@
                 </a:solidFill>
                 <a:latin typeface="Arial"/>
               </a:rPr>
-              <a:t>▸  Quantitative und qualitative Risikofaktoren eines Kreditantrags systematisch analysieren und nach Relevanz gewichten (Bloom 4)</a:t>
+              <a:t>▸  Quantitative und qualitative Risikofaktoren eines Kreditantrags systematisch analysieren und nach Relevanz gewichten</a:t>
             </a:r>
           </a:p>
           <a:p>
@@ -7591,7 +7766,7 @@
                 </a:solidFill>
                 <a:latin typeface="Arial"/>
               </a:rPr>
-              <a:t>▸  Eine begründete Kreditempfehlung bewerten, entscheiden und vor dem Kreditausschuss vertreten (Bloom 5)</a:t>
+              <a:t>▸  Eine begründete Kreditempfehlung bewerten, entscheiden und vor dem Kreditausschuss vertreten</a:t>
             </a:r>
           </a:p>
           <a:p>
@@ -7610,7 +7785,7 @@
                 </a:solidFill>
                 <a:latin typeface="Arial"/>
               </a:rPr>
-              <a:t>▸  Kreditvorlagen Dritter kritisch prüfen und Verbesserungspotenziale benennen (Bloom 5)</a:t>
+              <a:t>▸  Kreditvorlagen Dritter kritisch prüfen und Verbesserungspotenziale benennen</a:t>
             </a:r>
           </a:p>
         </p:txBody>

--- a/protected-downloads/praesentation/M21.pptx
+++ b/protected-downloads/praesentation/M21.pptx
@@ -8,7 +8,7 @@
     <p:sldId id="256" r:id="rId7"/>
     <p:sldId id="257" r:id="rId8"/>
     <p:sldId id="258" r:id="rId9"/>
-    <p:sldId id="259" r:id="rId11"/>
+    <p:sldId id="259" r:id="rId10"/>
     <p:sldId id="260" r:id="rId12"/>
     <p:sldId id="261" r:id="rId13"/>
     <p:sldId id="262" r:id="rId14"/>
@@ -19,6 +19,7 @@
     <p:sldId id="267" r:id="rId19"/>
     <p:sldId id="268" r:id="rId20"/>
     <p:sldId id="269" r:id="rId21"/>
+    <p:sldId id="270" r:id="rId22"/>
   </p:sldIdLst>
   <p:sldSz cx="12188952" cy="6858000" type="screen4x3"/>
   <p:notesSz cx="6858000" cy="9144000"/>
@@ -4993,7 +4994,7 @@
                 </a:solidFill>
                 <a:latin typeface="Source Serif 4"/>
               </a:rPr>
-              <a:t>4.3a Sicherheitenbewertung im Alltag</a:t>
+              <a:t>Theorie-Input: Sicherheitenbewertung nach BelWertV</a:t>
             </a:r>
           </a:p>
         </p:txBody>
@@ -5035,7 +5036,7 @@
                 </a:solidFill>
                 <a:latin typeface="Arial"/>
               </a:rPr>
-              <a:t>Die BelWertV-Theorie ist eine Sache – der Alltag stellt andere Fragen:</a:t>
+              <a:t>Grundpfandrechte auf Immobilien:</a:t>
             </a:r>
           </a:p>
           <a:p>
@@ -5048,13 +5049,13 @@
               </a:spcAft>
             </a:pPr>
             <a:r>
-              <a:rPr sz="1200">
+              <a:rPr sz="1300">
                 <a:solidFill>
                   <a:srgbClr val="3D5466"/>
                 </a:solidFill>
                 <a:latin typeface="Arial"/>
               </a:rPr>
-              <a:t>Wann ist ein aktuelles Gutachten Pflicht?</a:t>
+              <a:t>▸  Verkehrswert ermitteln (Gutachter oder Vergleichswerte)</a:t>
             </a:r>
           </a:p>
           <a:p>
@@ -5073,7 +5074,7 @@
                 </a:solidFill>
                 <a:latin typeface="Arial"/>
               </a:rPr>
-              <a:t>▸  Bei Erstverpfändung einer Immobilie und Krediten typischerweise ab 150.000–300 T€ (bankindividuell – Grenze mit Marktfolge klären)</a:t>
+              <a:t>▸  Abschlag von 20–30 % anwenden (je nach Marktvolatilität und Verwertbarkeit)</a:t>
             </a:r>
           </a:p>
           <a:p>
@@ -5092,7 +5093,7 @@
                 </a:solidFill>
                 <a:latin typeface="Arial"/>
               </a:rPr>
-              <a:t>▸  Bei wesentlicher Wertveränderung (Umbau, Schaden, Marktveränderung)</a:t>
+              <a:t>▸  Beleihungswert = ca. 60–70 % des Verkehrswerts</a:t>
             </a:r>
           </a:p>
           <a:p>
@@ -5105,13 +5106,13 @@
               </a:spcAft>
             </a:pPr>
             <a:r>
-              <a:rPr sz="1300">
+              <a:rPr sz="1200">
                 <a:solidFill>
                   <a:srgbClr val="3D5466"/>
                 </a:solidFill>
                 <a:latin typeface="Arial"/>
               </a:rPr>
-              <a:t>▸  Bei Verlängerung mit mehr als 5 Jahren ohne zwischenzeitliches Update</a:t>
+              <a:t>Rangfolge: Rang 1 hat volle Priorität. Rang 2 und 3 erhalten erst nach vollständiger Bedienung von Rang 1 Erlöse – dies kann im Verwertungsfall zu erheblichen Ausfällen führen.</a:t>
             </a:r>
           </a:p>
           <a:p>
@@ -5130,121 +5131,7 @@
                 </a:solidFill>
                 <a:latin typeface="Arial"/>
               </a:rPr>
-              <a:t>Wann reicht eine Plausibilisierung?</a:t>
-            </a:r>
-          </a:p>
-          <a:p>
-            <a:pPr>
-              <a:spcBef>
-                <a:spcPts val="400"/>
-              </a:spcBef>
-              <a:spcAft>
-                <a:spcPts val="200"/>
-              </a:spcAft>
-            </a:pPr>
-            <a:r>
-              <a:rPr sz="1300">
-                <a:solidFill>
-                  <a:srgbClr val="3D5466"/>
-                </a:solidFill>
-                <a:latin typeface="Arial"/>
-              </a:rPr>
-              <a:t>▸  Bei kleinen Beträgen und gut bekannten Objekten kann der Berater eine Marktplausibilisierung vornehmen (Vergleichspreise Onlineportale, Gespräch mit lokalem Makler)</a:t>
-            </a:r>
-          </a:p>
-          <a:p>
-            <a:pPr>
-              <a:spcBef>
-                <a:spcPts val="400"/>
-              </a:spcBef>
-              <a:spcAft>
-                <a:spcPts val="200"/>
-              </a:spcAft>
-            </a:pPr>
-            <a:r>
-              <a:rPr sz="1300">
-                <a:solidFill>
-                  <a:srgbClr val="3D5466"/>
-                </a:solidFill>
-                <a:latin typeface="Arial"/>
-              </a:rPr>
-              <a:t>▸  Diese Schätzung muss dokumentiert und dem Kreditbeschluss beigefügt werden</a:t>
-            </a:r>
-          </a:p>
-          <a:p>
-            <a:pPr>
-              <a:spcBef>
-                <a:spcPts val="400"/>
-              </a:spcBef>
-              <a:spcAft>
-                <a:spcPts val="200"/>
-              </a:spcAft>
-            </a:pPr>
-            <a:r>
-              <a:rPr sz="1200">
-                <a:solidFill>
-                  <a:srgbClr val="3D5466"/>
-                </a:solidFill>
-                <a:latin typeface="Arial"/>
-              </a:rPr>
-              <a:t>Alte Gutachten – Faustregel:</a:t>
-            </a:r>
-          </a:p>
-          <a:p>
-            <a:pPr>
-              <a:spcBef>
-                <a:spcPts val="400"/>
-              </a:spcBef>
-              <a:spcAft>
-                <a:spcPts val="200"/>
-              </a:spcAft>
-            </a:pPr>
-            <a:r>
-              <a:rPr sz="1300">
-                <a:solidFill>
-                  <a:srgbClr val="3D5466"/>
-                </a:solidFill>
-                <a:latin typeface="Arial"/>
-              </a:rPr>
-              <a:t>▸  Gutachten älter als 3 Jahre: Abschlag von 10–20 % auf den damaligen Wert je nach Marktentwicklung</a:t>
-            </a:r>
-          </a:p>
-          <a:p>
-            <a:pPr>
-              <a:spcBef>
-                <a:spcPts val="400"/>
-              </a:spcBef>
-              <a:spcAft>
-                <a:spcPts val="200"/>
-              </a:spcAft>
-            </a:pPr>
-            <a:r>
-              <a:rPr sz="1300">
-                <a:solidFill>
-                  <a:srgbClr val="3D5466"/>
-                </a:solidFill>
-                <a:latin typeface="Arial"/>
-              </a:rPr>
-              <a:t>▸  Gutachten älter als 5 Jahre: Neugutachten oder erheblicher konservativer Abschlag empfohlen</a:t>
-            </a:r>
-          </a:p>
-          <a:p>
-            <a:pPr>
-              <a:spcBef>
-                <a:spcPts val="400"/>
-              </a:spcBef>
-              <a:spcAft>
-                <a:spcPts val="200"/>
-              </a:spcAft>
-            </a:pPr>
-            <a:r>
-              <a:rPr sz="1300">
-                <a:solidFill>
-                  <a:srgbClr val="3D5466"/>
-                </a:solidFill>
-                <a:latin typeface="Arial"/>
-              </a:rPr>
-              <a:t>▸  Bei Gewerbeimmobilien: Marktentwicklung oft volatiler als bei Wohnimmobilien – früher erneuern</a:t>
+              <a:t>Bewegliche Sicherheiten: Maschinen und Anlagen verlieren durch Spezialisierung, Betrieb und Marktlage schnell an Wert. Beleihungssatz 30–50 % des Buchwerts ist konservativ, aber realistisch.</a:t>
             </a:r>
           </a:p>
         </p:txBody>
@@ -5582,7 +5469,7 @@
                 </a:solidFill>
                 <a:latin typeface="Source Serif 4"/>
               </a:rPr>
-              <a:t>4.3b Betriebsmittelkredite und Kontokorrent: Kurzfall</a:t>
+              <a:t>4.3a Sicherheitenbewertung im Alltag</a:t>
             </a:r>
           </a:p>
         </p:txBody>
@@ -5624,7 +5511,7 @@
                 </a:solidFill>
                 <a:latin typeface="Arial"/>
               </a:rPr>
-              <a:t>Nicht alle Kreditentscheidungen sind langfristige Investitionskredite. Häufiger Alltag: KK-Linie läuft an ihre Grenze oder wird regelmäßig überzogen.</a:t>
+              <a:t>Die BelWertV-Theorie ist eine Sache – der Alltag stellt andere Fragen:</a:t>
             </a:r>
           </a:p>
           <a:p>
@@ -5643,7 +5530,7 @@
                 </a:solidFill>
                 <a:latin typeface="Arial"/>
               </a:rPr>
-              <a:t>Kurzfall: Bäckerei Weber KG, Überzug KK-Linie</a:t>
+              <a:t>Wann ist ein aktuelles Gutachten Pflicht?</a:t>
             </a:r>
           </a:p>
           <a:p>
@@ -5656,13 +5543,13 @@
               </a:spcAft>
             </a:pPr>
             <a:r>
-              <a:rPr sz="1200">
+              <a:rPr sz="1300">
                 <a:solidFill>
                   <a:srgbClr val="3D5466"/>
                 </a:solidFill>
                 <a:latin typeface="Arial"/>
               </a:rPr>
-              <a:t>Beraterin Schmidt stellt fest: Bäckerei Weber KG, Linie 80.000 €, seit 6 Wochen durchgehend bei 95–100 % ausgelastet, in einer Woche zweimal kurz drüber.</a:t>
+              <a:t>▸  Bei Erstverpfändung einer Immobilie und Krediten typischerweise ab 150.000–300 T€ (bankindividuell – Grenze mit Marktfolge klären)</a:t>
             </a:r>
           </a:p>
           <a:p>
@@ -5675,13 +5562,13 @@
               </a:spcAft>
             </a:pPr>
             <a:r>
-              <a:rPr sz="1200">
+              <a:rPr sz="1300">
                 <a:solidFill>
                   <a:srgbClr val="3D5466"/>
                 </a:solidFill>
                 <a:latin typeface="Arial"/>
               </a:rPr>
-              <a:t>Analysefragen für Kontokorrent:</a:t>
+              <a:t>▸  Bei wesentlicher Wertveränderung (Umbau, Schaden, Marktveränderung)</a:t>
             </a:r>
           </a:p>
           <a:p>
@@ -5694,13 +5581,13 @@
               </a:spcAft>
             </a:pPr>
             <a:r>
-              <a:rPr sz="1200">
+              <a:rPr sz="1300">
                 <a:solidFill>
                   <a:srgbClr val="3D5466"/>
                 </a:solidFill>
                 <a:latin typeface="Arial"/>
               </a:rPr>
-              <a:t>Mögliche Entscheidungen:</a:t>
+              <a:t>▸  Bei Verlängerung mit mehr als 5 Jahren ohne zwischenzeitliches Update</a:t>
             </a:r>
           </a:p>
           <a:p>
@@ -5713,13 +5600,13 @@
               </a:spcAft>
             </a:pPr>
             <a:r>
-              <a:rPr sz="1300">
+              <a:rPr sz="1200">
                 <a:solidFill>
                   <a:srgbClr val="3D5466"/>
                 </a:solidFill>
                 <a:latin typeface="Arial"/>
               </a:rPr>
-              <a:t>▸  Temporärer saisonaler Überzug, stabile Bonität: Dulden mit Dokumentation</a:t>
+              <a:t>Wann reicht eine Plausibilisierung?</a:t>
             </a:r>
           </a:p>
           <a:p>
@@ -5738,7 +5625,7 @@
                 </a:solidFill>
                 <a:latin typeface="Arial"/>
               </a:rPr>
-              <a:t>▸  Strukturelle Auslastung, gute Bonität: Linienerhöhung prüfen (mit Analyse Feld 2 und 3)</a:t>
+              <a:t>▸  Bei kleinen Beträgen und gut bekannten Objekten kann der Berater eine Marktplausibilisierung vornehmen (Vergleichspreise Onlineportale, Gespräch mit lokalem Makler)</a:t>
             </a:r>
           </a:p>
           <a:p>
@@ -5757,26 +5644,7 @@
                 </a:solidFill>
                 <a:latin typeface="Arial"/>
               </a:rPr>
-              <a:t>▸  Überzug + Warnsignale: Sofort persönliches Gespräch, ggf. Frühwarnmeldung</a:t>
-            </a:r>
-          </a:p>
-          <a:p>
-            <a:pPr>
-              <a:spcBef>
-                <a:spcPts val="600"/>
-              </a:spcBef>
-              <a:spcAft>
-                <a:spcPts val="200"/>
-              </a:spcAft>
-            </a:pPr>
-            <a:r>
-              <a:rPr sz="1200" i="1">
-                <a:solidFill>
-                  <a:srgbClr val="3D5466"/>
-                </a:solidFill>
-                <a:latin typeface="Arial"/>
-              </a:rPr>
-              <a:t>→  Wichtig: Jede Überzugsduldung – auch eine kurzfristige – muss dokumentiert werden (MaRisk BTO 1.1). Nicht dokumentierte Überzüge sind ein Prüfungsrisiko.</a:t>
+              <a:t>▸  Diese Schätzung muss dokumentiert und dem Kreditbeschluss beigefügt werden</a:t>
             </a:r>
           </a:p>
           <a:p>
@@ -5795,7 +5663,64 @@
                 </a:solidFill>
                 <a:latin typeface="Arial"/>
               </a:rPr>
-              <a:t>Entscheidungsmatrix: Wann ist eine neue Kreditvorlage Pflicht?</a:t>
+              <a:t>Alte Gutachten – Faustregel:</a:t>
+            </a:r>
+          </a:p>
+          <a:p>
+            <a:pPr>
+              <a:spcBef>
+                <a:spcPts val="400"/>
+              </a:spcBef>
+              <a:spcAft>
+                <a:spcPts val="200"/>
+              </a:spcAft>
+            </a:pPr>
+            <a:r>
+              <a:rPr sz="1300">
+                <a:solidFill>
+                  <a:srgbClr val="3D5466"/>
+                </a:solidFill>
+                <a:latin typeface="Arial"/>
+              </a:rPr>
+              <a:t>▸  Gutachten älter als 3 Jahre: Abschlag von 10–20 % auf den damaligen Wert je nach Marktentwicklung</a:t>
+            </a:r>
+          </a:p>
+          <a:p>
+            <a:pPr>
+              <a:spcBef>
+                <a:spcPts val="400"/>
+              </a:spcBef>
+              <a:spcAft>
+                <a:spcPts val="200"/>
+              </a:spcAft>
+            </a:pPr>
+            <a:r>
+              <a:rPr sz="1300">
+                <a:solidFill>
+                  <a:srgbClr val="3D5466"/>
+                </a:solidFill>
+                <a:latin typeface="Arial"/>
+              </a:rPr>
+              <a:t>▸  Gutachten älter als 5 Jahre: Neugutachten oder erheblicher konservativer Abschlag empfohlen</a:t>
+            </a:r>
+          </a:p>
+          <a:p>
+            <a:pPr>
+              <a:spcBef>
+                <a:spcPts val="400"/>
+              </a:spcBef>
+              <a:spcAft>
+                <a:spcPts val="200"/>
+              </a:spcAft>
+            </a:pPr>
+            <a:r>
+              <a:rPr sz="1300">
+                <a:solidFill>
+                  <a:srgbClr val="3D5466"/>
+                </a:solidFill>
+                <a:latin typeface="Arial"/>
+              </a:rPr>
+              <a:t>▸  Bei Gewerbeimmobilien: Marktentwicklung oft volatiler als bei Wohnimmobilien – früher erneuern</a:t>
             </a:r>
           </a:p>
         </p:txBody>
@@ -6133,7 +6058,7 @@
                 </a:solidFill>
                 <a:latin typeface="Source Serif 4"/>
               </a:rPr>
-              <a:t>4.3c Checkliste: Bestandskredit in der Krise – erste Schritte</a:t>
+              <a:t>4.3b Betriebsmittelkredite und Kontokorrent: Kurzfall</a:t>
             </a:r>
           </a:p>
         </p:txBody>
@@ -6175,7 +6100,7 @@
                 </a:solidFill>
                 <a:latin typeface="Arial"/>
               </a:rPr>
-              <a:t>Die schwierigste Kreditentscheidung ist nicht die Neuvergabe, sondern: Was tue ich, wenn ein Bestandskunde in Schieflage gerät?</a:t>
+              <a:t>Nicht alle Kreditentscheidungen sind langfristige Investitionskredite. Häufiger Alltag: KK-Linie läuft an ihre Grenze oder wird regelmäßig überzogen.</a:t>
             </a:r>
           </a:p>
           <a:p>
@@ -6194,7 +6119,121 @@
                 </a:solidFill>
                 <a:latin typeface="Arial"/>
               </a:rPr>
-              <a:t>Diese Situation ist emotional belastend (langjährige Kundenbeziehung) und rechtlich heikel. Erste Schritte:</a:t>
+              <a:t>Kurzfall: Bäckerei Weber KG, Überzug KK-Linie</a:t>
+            </a:r>
+          </a:p>
+          <a:p>
+            <a:pPr>
+              <a:spcBef>
+                <a:spcPts val="400"/>
+              </a:spcBef>
+              <a:spcAft>
+                <a:spcPts val="200"/>
+              </a:spcAft>
+            </a:pPr>
+            <a:r>
+              <a:rPr sz="1200">
+                <a:solidFill>
+                  <a:srgbClr val="3D5466"/>
+                </a:solidFill>
+                <a:latin typeface="Arial"/>
+              </a:rPr>
+              <a:t>Beraterin Schmidt stellt fest: Bäckerei Weber KG, Linie 80.000 €, seit 6 Wochen durchgehend bei 95–100 % ausgelastet, in einer Woche zweimal kurz drüber.</a:t>
+            </a:r>
+          </a:p>
+          <a:p>
+            <a:pPr>
+              <a:spcBef>
+                <a:spcPts val="400"/>
+              </a:spcBef>
+              <a:spcAft>
+                <a:spcPts val="200"/>
+              </a:spcAft>
+            </a:pPr>
+            <a:r>
+              <a:rPr sz="1200">
+                <a:solidFill>
+                  <a:srgbClr val="3D5466"/>
+                </a:solidFill>
+                <a:latin typeface="Arial"/>
+              </a:rPr>
+              <a:t>Analysefragen für Kontokorrent:</a:t>
+            </a:r>
+          </a:p>
+          <a:p>
+            <a:pPr>
+              <a:spcBef>
+                <a:spcPts val="400"/>
+              </a:spcBef>
+              <a:spcAft>
+                <a:spcPts val="200"/>
+              </a:spcAft>
+            </a:pPr>
+            <a:r>
+              <a:rPr sz="1200">
+                <a:solidFill>
+                  <a:srgbClr val="3D5466"/>
+                </a:solidFill>
+                <a:latin typeface="Arial"/>
+              </a:rPr>
+              <a:t>Mögliche Entscheidungen:</a:t>
+            </a:r>
+          </a:p>
+          <a:p>
+            <a:pPr>
+              <a:spcBef>
+                <a:spcPts val="400"/>
+              </a:spcBef>
+              <a:spcAft>
+                <a:spcPts val="200"/>
+              </a:spcAft>
+            </a:pPr>
+            <a:r>
+              <a:rPr sz="1300">
+                <a:solidFill>
+                  <a:srgbClr val="3D5466"/>
+                </a:solidFill>
+                <a:latin typeface="Arial"/>
+              </a:rPr>
+              <a:t>▸  Temporärer saisonaler Überzug, stabile Bonität: Dulden mit Dokumentation</a:t>
+            </a:r>
+          </a:p>
+          <a:p>
+            <a:pPr>
+              <a:spcBef>
+                <a:spcPts val="400"/>
+              </a:spcBef>
+              <a:spcAft>
+                <a:spcPts val="200"/>
+              </a:spcAft>
+            </a:pPr>
+            <a:r>
+              <a:rPr sz="1300">
+                <a:solidFill>
+                  <a:srgbClr val="3D5466"/>
+                </a:solidFill>
+                <a:latin typeface="Arial"/>
+              </a:rPr>
+              <a:t>▸  Strukturelle Auslastung, gute Bonität: Linienerhöhung prüfen (mit Analyse Feld 2 und 3)</a:t>
+            </a:r>
+          </a:p>
+          <a:p>
+            <a:pPr>
+              <a:spcBef>
+                <a:spcPts val="400"/>
+              </a:spcBef>
+              <a:spcAft>
+                <a:spcPts val="200"/>
+              </a:spcAft>
+            </a:pPr>
+            <a:r>
+              <a:rPr sz="1300">
+                <a:solidFill>
+                  <a:srgbClr val="3D5466"/>
+                </a:solidFill>
+                <a:latin typeface="Arial"/>
+              </a:rPr>
+              <a:t>▸  Überzug + Warnsignale: Sofort persönliches Gespräch, ggf. Frühwarnmeldung</a:t>
             </a:r>
           </a:p>
           <a:p>
@@ -6213,7 +6252,26 @@
                 </a:solidFill>
                 <a:latin typeface="Arial"/>
               </a:rPr>
-              <a:t>→  Praxistipp: Wer früh eskaliert und dokumentiert, schützt sich selbst und gibt dem Kunden eine echte Chance. Wer zu lange alleine trägt, verliert beides.</a:t>
+              <a:t>→  Wichtig: Jede Überzugsduldung – auch eine kurzfristige – muss dokumentiert werden (MaRisk BTO 1.1). Nicht dokumentierte Überzüge sind ein Prüfungsrisiko.</a:t>
+            </a:r>
+          </a:p>
+          <a:p>
+            <a:pPr>
+              <a:spcBef>
+                <a:spcPts val="400"/>
+              </a:spcBef>
+              <a:spcAft>
+                <a:spcPts val="200"/>
+              </a:spcAft>
+            </a:pPr>
+            <a:r>
+              <a:rPr sz="1200">
+                <a:solidFill>
+                  <a:srgbClr val="3D5466"/>
+                </a:solidFill>
+                <a:latin typeface="Arial"/>
+              </a:rPr>
+              <a:t>Entscheidungsmatrix: Wann ist eine neue Kreditvorlage Pflicht?</a:t>
             </a:r>
           </a:p>
         </p:txBody>
@@ -6551,7 +6609,7 @@
                 </a:solidFill>
                 <a:latin typeface="Source Serif 4"/>
               </a:rPr>
-              <a:t>Praxisfall: Metallbau Schnell GmbH (Heilbronn, fiktiv)</a:t>
+              <a:t>4.3c Checkliste: Bestandskredit in der Krise – erste Schritte</a:t>
             </a:r>
           </a:p>
         </p:txBody>
@@ -6577,25 +6635,6 @@
             <a:spAutoFit/>
           </a:bodyPr>
           <a:lstStyle/>
-          <a:p>
-            <a:pPr>
-              <a:spcBef>
-                <a:spcPts val="1000"/>
-              </a:spcBef>
-              <a:spcAft>
-                <a:spcPts val="200"/>
-              </a:spcAft>
-            </a:pPr>
-            <a:r>
-              <a:rPr sz="800" b="1">
-                <a:solidFill>
-                  <a:srgbClr val="78808C"/>
-                </a:solidFill>
-                <a:latin typeface="JetBrains Mono"/>
-              </a:rPr>
-              <a:t>4.4.1 UNTERNEHMENSPROFIL</a:t>
-            </a:r>
-          </a:p>
           <a:p>
             <a:pPr>
               <a:spcBef>
@@ -6612,7 +6651,7 @@
                 </a:solidFill>
                 <a:latin typeface="Arial"/>
               </a:rPr>
-              <a:t>Kreditantrag:</a:t>
+              <a:t>Die schwierigste Kreditentscheidung ist nicht die Neuvergabe, sondern: Was tue ich, wenn ein Bestandskunde in Schieflage gerät?</a:t>
             </a:r>
           </a:p>
           <a:p>
@@ -6625,184 +6664,32 @@
               </a:spcAft>
             </a:pPr>
             <a:r>
-              <a:rPr sz="1300">
+              <a:rPr sz="1200">
                 <a:solidFill>
                   <a:srgbClr val="3D5466"/>
                 </a:solidFill>
                 <a:latin typeface="Arial"/>
               </a:rPr>
-              <a:t>▸  Art: Investitionskredit</a:t>
+              <a:t>Diese Situation ist emotional belastend (langjährige Kundenbeziehung) und rechtlich heikel. Erste Schritte:</a:t>
             </a:r>
           </a:p>
           <a:p>
             <a:pPr>
               <a:spcBef>
-                <a:spcPts val="400"/>
+                <a:spcPts val="600"/>
               </a:spcBef>
               <a:spcAft>
                 <a:spcPts val="200"/>
               </a:spcAft>
             </a:pPr>
             <a:r>
-              <a:rPr sz="1300">
+              <a:rPr sz="1200" i="1">
                 <a:solidFill>
                   <a:srgbClr val="3D5466"/>
                 </a:solidFill>
                 <a:latin typeface="Arial"/>
               </a:rPr>
-              <a:t>▸  Betrag: 420.000 €</a:t>
-            </a:r>
-          </a:p>
-          <a:p>
-            <a:pPr>
-              <a:spcBef>
-                <a:spcPts val="400"/>
-              </a:spcBef>
-              <a:spcAft>
-                <a:spcPts val="200"/>
-              </a:spcAft>
-            </a:pPr>
-            <a:r>
-              <a:rPr sz="1300">
-                <a:solidFill>
-                  <a:srgbClr val="3D5466"/>
-                </a:solidFill>
-                <a:latin typeface="Arial"/>
-              </a:rPr>
-              <a:t>▸  Verwendung: 5-Achs-CNC-Drehmaschine Heidenhain TNC 640 (280.000 €) + Hallenerweiterung (140.000 €)</a:t>
-            </a:r>
-          </a:p>
-          <a:p>
-            <a:pPr>
-              <a:spcBef>
-                <a:spcPts val="400"/>
-              </a:spcBef>
-              <a:spcAft>
-                <a:spcPts val="200"/>
-              </a:spcAft>
-            </a:pPr>
-            <a:r>
-              <a:rPr sz="1300">
-                <a:solidFill>
-                  <a:srgbClr val="3D5466"/>
-                </a:solidFill>
-                <a:latin typeface="Arial"/>
-              </a:rPr>
-              <a:t>▸  Laufzeit: 7 Jahre</a:t>
-            </a:r>
-          </a:p>
-          <a:p>
-            <a:pPr>
-              <a:spcBef>
-                <a:spcPts val="1000"/>
-              </a:spcBef>
-              <a:spcAft>
-                <a:spcPts val="200"/>
-              </a:spcAft>
-            </a:pPr>
-            <a:r>
-              <a:rPr sz="800" b="1">
-                <a:solidFill>
-                  <a:srgbClr val="78808C"/>
-                </a:solidFill>
-                <a:latin typeface="JetBrains Mono"/>
-              </a:rPr>
-              <a:t>4.4.2 FINANZLAGE: 3-JAHRESVERGLEICH</a:t>
-            </a:r>
-          </a:p>
-          <a:p>
-            <a:pPr>
-              <a:spcBef>
-                <a:spcPts val="400"/>
-              </a:spcBef>
-              <a:spcAft>
-                <a:spcPts val="200"/>
-              </a:spcAft>
-            </a:pPr>
-            <a:r>
-              <a:rPr sz="1200">
-                <a:solidFill>
-                  <a:srgbClr val="3D5466"/>
-                </a:solidFill>
-                <a:latin typeface="Arial"/>
-              </a:rPr>
-              <a:t>Bilanzauszüge (in T€):</a:t>
-            </a:r>
-          </a:p>
-          <a:p>
-            <a:pPr>
-              <a:spcBef>
-                <a:spcPts val="400"/>
-              </a:spcBef>
-              <a:spcAft>
-                <a:spcPts val="200"/>
-              </a:spcAft>
-            </a:pPr>
-            <a:r>
-              <a:rPr sz="1200">
-                <a:solidFill>
-                  <a:srgbClr val="3D5466"/>
-                </a:solidFill>
-                <a:latin typeface="Arial"/>
-              </a:rPr>
-              <a:t>Gewinn- und Verlustrechnung (in T€):</a:t>
-            </a:r>
-          </a:p>
-          <a:p>
-            <a:pPr>
-              <a:spcBef>
-                <a:spcPts val="400"/>
-              </a:spcBef>
-              <a:spcAft>
-                <a:spcPts val="200"/>
-              </a:spcAft>
-            </a:pPr>
-            <a:r>
-              <a:rPr sz="1200">
-                <a:solidFill>
-                  <a:srgbClr val="3D5466"/>
-                </a:solidFill>
-                <a:latin typeface="Arial"/>
-              </a:rPr>
-              <a:t>Kennzahlenanalyse:</a:t>
-            </a:r>
-          </a:p>
-          <a:p>
-            <a:pPr>
-              <a:spcBef>
-                <a:spcPts val="1000"/>
-              </a:spcBef>
-              <a:spcAft>
-                <a:spcPts val="200"/>
-              </a:spcAft>
-            </a:pPr>
-            <a:r>
-              <a:rPr sz="800" b="1">
-                <a:solidFill>
-                  <a:srgbClr val="78808C"/>
-                </a:solidFill>
-                <a:latin typeface="JetBrains Mono"/>
-              </a:rPr>
-              <a:t>4.4.3 8-FELDER-ANALYSE: METALLBAU SCHNELL GMBH</a:t>
-            </a:r>
-          </a:p>
-          <a:p>
-            <a:pPr>
-              <a:spcBef>
-                <a:spcPts val="400"/>
-              </a:spcBef>
-              <a:spcAft>
-                <a:spcPts val="200"/>
-              </a:spcAft>
-            </a:pPr>
-            <a:r>
-              <a:rPr sz="1200">
-                <a:solidFill>
-                  <a:srgbClr val="3D5466"/>
-                </a:solidFill>
-                <a:latin typeface="Arial"/>
-              </a:rPr>
-              <a:t>Feld 1 – Zweck &amp; Verwendung | Bewertung: 5/5 POSITIV</a:t>
+              <a:t>→  Praxistipp: Wer früh eskaliert und dokumentiert, schützt sich selbst und gibt dem Kunden eine echte Chance. Wer zu lange alleine trägt, verliert beides.</a:t>
             </a:r>
           </a:p>
         </p:txBody>
@@ -7140,6 +7027,595 @@
                 </a:solidFill>
                 <a:latin typeface="Source Serif 4"/>
               </a:rPr>
+              <a:t>Praxisfall: Metallbau Schnell GmbH (Heilbronn, fiktiv)</a:t>
+            </a:r>
+          </a:p>
+        </p:txBody>
+      </p:sp>
+      <p:sp>
+        <p:nvSpPr>
+          <p:cNvPr id="8" name="TextBox 7"/>
+          <p:cNvSpPr txBox="1"/>
+          <p:nvPr/>
+        </p:nvSpPr>
+        <p:spPr>
+          <a:xfrm>
+            <a:off x="685800" y="1417320"/>
+            <a:ext cx="10817352" cy="5029200"/>
+          </a:xfrm>
+          <a:prstGeom prst="rect">
+            <a:avLst/>
+          </a:prstGeom>
+          <a:noFill/>
+        </p:spPr>
+        <p:txBody>
+          <a:bodyPr wrap="square">
+            <a:spAutoFit/>
+          </a:bodyPr>
+          <a:lstStyle/>
+          <a:p>
+            <a:pPr>
+              <a:spcBef>
+                <a:spcPts val="1000"/>
+              </a:spcBef>
+              <a:spcAft>
+                <a:spcPts val="200"/>
+              </a:spcAft>
+            </a:pPr>
+            <a:r>
+              <a:rPr sz="800" b="1">
+                <a:solidFill>
+                  <a:srgbClr val="78808C"/>
+                </a:solidFill>
+                <a:latin typeface="JetBrains Mono"/>
+              </a:rPr>
+              <a:t>4.4.1 UNTERNEHMENSPROFIL</a:t>
+            </a:r>
+          </a:p>
+          <a:p>
+            <a:pPr>
+              <a:spcBef>
+                <a:spcPts val="400"/>
+              </a:spcBef>
+              <a:spcAft>
+                <a:spcPts val="200"/>
+              </a:spcAft>
+            </a:pPr>
+            <a:r>
+              <a:rPr sz="1200">
+                <a:solidFill>
+                  <a:srgbClr val="3D5466"/>
+                </a:solidFill>
+                <a:latin typeface="Arial"/>
+              </a:rPr>
+              <a:t>Kreditantrag:</a:t>
+            </a:r>
+          </a:p>
+          <a:p>
+            <a:pPr>
+              <a:spcBef>
+                <a:spcPts val="400"/>
+              </a:spcBef>
+              <a:spcAft>
+                <a:spcPts val="200"/>
+              </a:spcAft>
+            </a:pPr>
+            <a:r>
+              <a:rPr sz="1300">
+                <a:solidFill>
+                  <a:srgbClr val="3D5466"/>
+                </a:solidFill>
+                <a:latin typeface="Arial"/>
+              </a:rPr>
+              <a:t>▸  Art: Investitionskredit</a:t>
+            </a:r>
+          </a:p>
+          <a:p>
+            <a:pPr>
+              <a:spcBef>
+                <a:spcPts val="400"/>
+              </a:spcBef>
+              <a:spcAft>
+                <a:spcPts val="200"/>
+              </a:spcAft>
+            </a:pPr>
+            <a:r>
+              <a:rPr sz="1300">
+                <a:solidFill>
+                  <a:srgbClr val="3D5466"/>
+                </a:solidFill>
+                <a:latin typeface="Arial"/>
+              </a:rPr>
+              <a:t>▸  Betrag: 420.000 €</a:t>
+            </a:r>
+          </a:p>
+          <a:p>
+            <a:pPr>
+              <a:spcBef>
+                <a:spcPts val="400"/>
+              </a:spcBef>
+              <a:spcAft>
+                <a:spcPts val="200"/>
+              </a:spcAft>
+            </a:pPr>
+            <a:r>
+              <a:rPr sz="1300">
+                <a:solidFill>
+                  <a:srgbClr val="3D5466"/>
+                </a:solidFill>
+                <a:latin typeface="Arial"/>
+              </a:rPr>
+              <a:t>▸  Verwendung: 5-Achs-CNC-Drehmaschine Heidenhain TNC 640 (280.000 €) + Hallenerweiterung (140.000 €)</a:t>
+            </a:r>
+          </a:p>
+          <a:p>
+            <a:pPr>
+              <a:spcBef>
+                <a:spcPts val="400"/>
+              </a:spcBef>
+              <a:spcAft>
+                <a:spcPts val="200"/>
+              </a:spcAft>
+            </a:pPr>
+            <a:r>
+              <a:rPr sz="1300">
+                <a:solidFill>
+                  <a:srgbClr val="3D5466"/>
+                </a:solidFill>
+                <a:latin typeface="Arial"/>
+              </a:rPr>
+              <a:t>▸  Laufzeit: 7 Jahre</a:t>
+            </a:r>
+          </a:p>
+          <a:p>
+            <a:pPr>
+              <a:spcBef>
+                <a:spcPts val="1000"/>
+              </a:spcBef>
+              <a:spcAft>
+                <a:spcPts val="200"/>
+              </a:spcAft>
+            </a:pPr>
+            <a:r>
+              <a:rPr sz="800" b="1">
+                <a:solidFill>
+                  <a:srgbClr val="78808C"/>
+                </a:solidFill>
+                <a:latin typeface="JetBrains Mono"/>
+              </a:rPr>
+              <a:t>4.4.2 FINANZLAGE: 3-JAHRESVERGLEICH</a:t>
+            </a:r>
+          </a:p>
+          <a:p>
+            <a:pPr>
+              <a:spcBef>
+                <a:spcPts val="400"/>
+              </a:spcBef>
+              <a:spcAft>
+                <a:spcPts val="200"/>
+              </a:spcAft>
+            </a:pPr>
+            <a:r>
+              <a:rPr sz="1200">
+                <a:solidFill>
+                  <a:srgbClr val="3D5466"/>
+                </a:solidFill>
+                <a:latin typeface="Arial"/>
+              </a:rPr>
+              <a:t>Bilanzauszüge (in T€):</a:t>
+            </a:r>
+          </a:p>
+          <a:p>
+            <a:pPr>
+              <a:spcBef>
+                <a:spcPts val="400"/>
+              </a:spcBef>
+              <a:spcAft>
+                <a:spcPts val="200"/>
+              </a:spcAft>
+            </a:pPr>
+            <a:r>
+              <a:rPr sz="1200">
+                <a:solidFill>
+                  <a:srgbClr val="3D5466"/>
+                </a:solidFill>
+                <a:latin typeface="Arial"/>
+              </a:rPr>
+              <a:t>Gewinn- und Verlustrechnung (in T€):</a:t>
+            </a:r>
+          </a:p>
+          <a:p>
+            <a:pPr>
+              <a:spcBef>
+                <a:spcPts val="400"/>
+              </a:spcBef>
+              <a:spcAft>
+                <a:spcPts val="200"/>
+              </a:spcAft>
+            </a:pPr>
+            <a:r>
+              <a:rPr sz="1200">
+                <a:solidFill>
+                  <a:srgbClr val="3D5466"/>
+                </a:solidFill>
+                <a:latin typeface="Arial"/>
+              </a:rPr>
+              <a:t>Kennzahlenanalyse:</a:t>
+            </a:r>
+          </a:p>
+          <a:p>
+            <a:pPr>
+              <a:spcBef>
+                <a:spcPts val="1000"/>
+              </a:spcBef>
+              <a:spcAft>
+                <a:spcPts val="200"/>
+              </a:spcAft>
+            </a:pPr>
+            <a:r>
+              <a:rPr sz="800" b="1">
+                <a:solidFill>
+                  <a:srgbClr val="78808C"/>
+                </a:solidFill>
+                <a:latin typeface="JetBrains Mono"/>
+              </a:rPr>
+              <a:t>4.4.3 8-FELDER-ANALYSE: METALLBAU SCHNELL GMBH</a:t>
+            </a:r>
+          </a:p>
+          <a:p>
+            <a:pPr>
+              <a:spcBef>
+                <a:spcPts val="400"/>
+              </a:spcBef>
+              <a:spcAft>
+                <a:spcPts val="200"/>
+              </a:spcAft>
+            </a:pPr>
+            <a:r>
+              <a:rPr sz="1200">
+                <a:solidFill>
+                  <a:srgbClr val="3D5466"/>
+                </a:solidFill>
+                <a:latin typeface="Arial"/>
+              </a:rPr>
+              <a:t>Feld 1 – Zweck &amp; Verwendung | Bewertung: 5/5 POSITIV</a:t>
+            </a:r>
+          </a:p>
+        </p:txBody>
+      </p:sp>
+      <p:sp>
+        <p:nvSpPr>
+          <p:cNvPr id="9" name="Rectangle 8"/>
+          <p:cNvSpPr/>
+          <p:nvPr/>
+        </p:nvSpPr>
+        <p:spPr>
+          <a:xfrm>
+            <a:off x="0" y="6510528"/>
+            <a:ext cx="12188952" cy="347472"/>
+          </a:xfrm>
+          <a:prstGeom prst="rect">
+            <a:avLst/>
+          </a:prstGeom>
+          <a:solidFill>
+            <a:srgbClr val="0A1937"/>
+          </a:solidFill>
+          <a:ln>
+            <a:noFill/>
+          </a:ln>
+        </p:spPr>
+        <p:style>
+          <a:lnRef idx="1">
+            <a:schemeClr val="accent1"/>
+          </a:lnRef>
+          <a:fillRef idx="3">
+            <a:schemeClr val="accent1"/>
+          </a:fillRef>
+          <a:effectRef idx="2">
+            <a:schemeClr val="accent1"/>
+          </a:effectRef>
+          <a:fontRef idx="minor">
+            <a:schemeClr val="lt1"/>
+          </a:fontRef>
+        </p:style>
+        <p:txBody>
+          <a:bodyPr rtlCol="0" anchor="ctr"/>
+          <a:lstStyle/>
+          <a:p>
+            <a:pPr algn="ctr"/>
+          </a:p>
+        </p:txBody>
+      </p:sp>
+      <p:sp>
+        <p:nvSpPr>
+          <p:cNvPr id="10" name="TextBox 9"/>
+          <p:cNvSpPr txBox="1"/>
+          <p:nvPr/>
+        </p:nvSpPr>
+        <p:spPr>
+          <a:xfrm>
+            <a:off x="685800" y="6583680"/>
+            <a:ext cx="6490411" cy="256032"/>
+          </a:xfrm>
+          <a:prstGeom prst="rect">
+            <a:avLst/>
+          </a:prstGeom>
+          <a:noFill/>
+        </p:spPr>
+        <p:txBody>
+          <a:bodyPr wrap="none">
+            <a:spAutoFit/>
+          </a:bodyPr>
+          <a:lstStyle/>
+          <a:p>
+            <a:pPr algn="l"/>
+            <a:r>
+              <a:rPr sz="700">
+                <a:solidFill>
+                  <a:srgbClr val="A0B4D2"/>
+                </a:solidFill>
+                <a:latin typeface="JetBrains Mono"/>
+              </a:rPr>
+              <a:t>Benedikt Zoller Coaching  ·  FKB Campus  ·  M21</a:t>
+            </a:r>
+          </a:p>
+        </p:txBody>
+      </p:sp>
+    </p:spTree>
+  </p:cSld>
+  <p:clrMapOvr>
+    <a:masterClrMapping/>
+  </p:clrMapOvr>
+</p:sld>
+</file>
+
+<file path=ppt/slides/slide15.xml><?xml version="1.0" encoding="utf-8"?>
+<p:sld xmlns:a="http://schemas.openxmlformats.org/drawingml/2006/main" xmlns:p="http://schemas.openxmlformats.org/presentationml/2006/main" xmlns:r="http://schemas.openxmlformats.org/officeDocument/2006/relationships">
+  <p:cSld>
+    <p:spTree>
+      <p:nvGrpSpPr>
+        <p:cNvPr id="1" name=""/>
+        <p:cNvGrpSpPr/>
+        <p:nvPr/>
+      </p:nvGrpSpPr>
+      <p:grpSpPr/>
+      <p:sp>
+        <p:nvSpPr>
+          <p:cNvPr id="2" name="Rectangle 1"/>
+          <p:cNvSpPr/>
+          <p:nvPr/>
+        </p:nvSpPr>
+        <p:spPr>
+          <a:xfrm>
+            <a:off x="0" y="0"/>
+            <a:ext cx="12188952" cy="6858000"/>
+          </a:xfrm>
+          <a:prstGeom prst="rect">
+            <a:avLst/>
+          </a:prstGeom>
+          <a:solidFill>
+            <a:srgbClr val="EDEDF3"/>
+          </a:solidFill>
+          <a:ln>
+            <a:noFill/>
+          </a:ln>
+        </p:spPr>
+        <p:style>
+          <a:lnRef idx="1">
+            <a:schemeClr val="accent1"/>
+          </a:lnRef>
+          <a:fillRef idx="3">
+            <a:schemeClr val="accent1"/>
+          </a:fillRef>
+          <a:effectRef idx="2">
+            <a:schemeClr val="accent1"/>
+          </a:effectRef>
+          <a:fontRef idx="minor">
+            <a:schemeClr val="lt1"/>
+          </a:fontRef>
+        </p:style>
+        <p:txBody>
+          <a:bodyPr rtlCol="0" anchor="ctr"/>
+          <a:lstStyle/>
+          <a:p>
+            <a:pPr algn="ctr"/>
+          </a:p>
+        </p:txBody>
+      </p:sp>
+      <p:sp>
+        <p:nvSpPr>
+          <p:cNvPr id="3" name="Rectangle 2"/>
+          <p:cNvSpPr/>
+          <p:nvPr/>
+        </p:nvSpPr>
+        <p:spPr>
+          <a:xfrm>
+            <a:off x="0" y="0"/>
+            <a:ext cx="12188952" cy="50292"/>
+          </a:xfrm>
+          <a:prstGeom prst="rect">
+            <a:avLst/>
+          </a:prstGeom>
+          <a:solidFill>
+            <a:srgbClr val="1F2C56"/>
+          </a:solidFill>
+          <a:ln>
+            <a:noFill/>
+          </a:ln>
+        </p:spPr>
+        <p:style>
+          <a:lnRef idx="1">
+            <a:schemeClr val="accent1"/>
+          </a:lnRef>
+          <a:fillRef idx="3">
+            <a:schemeClr val="accent1"/>
+          </a:fillRef>
+          <a:effectRef idx="2">
+            <a:schemeClr val="accent1"/>
+          </a:effectRef>
+          <a:fontRef idx="minor">
+            <a:schemeClr val="lt1"/>
+          </a:fontRef>
+        </p:style>
+        <p:txBody>
+          <a:bodyPr rtlCol="0" anchor="ctr"/>
+          <a:lstStyle/>
+          <a:p>
+            <a:pPr algn="ctr"/>
+          </a:p>
+        </p:txBody>
+      </p:sp>
+      <p:sp>
+        <p:nvSpPr>
+          <p:cNvPr id="4" name="TextBox 3"/>
+          <p:cNvSpPr txBox="1"/>
+          <p:nvPr/>
+        </p:nvSpPr>
+        <p:spPr>
+          <a:xfrm>
+            <a:off x="685800" y="109728"/>
+            <a:ext cx="10817352" cy="228600"/>
+          </a:xfrm>
+          <a:prstGeom prst="rect">
+            <a:avLst/>
+          </a:prstGeom>
+          <a:noFill/>
+        </p:spPr>
+        <p:txBody>
+          <a:bodyPr wrap="none">
+            <a:spAutoFit/>
+          </a:bodyPr>
+          <a:lstStyle/>
+          <a:p>
+            <a:pPr algn="l"/>
+            <a:r>
+              <a:rPr sz="750">
+                <a:solidFill>
+                  <a:srgbClr val="78808C"/>
+                </a:solidFill>
+                <a:latin typeface="JetBrains Mono"/>
+              </a:rPr>
+              <a:t>M21  ·  INHALT</a:t>
+            </a:r>
+          </a:p>
+        </p:txBody>
+      </p:sp>
+      <p:sp>
+        <p:nvSpPr>
+          <p:cNvPr id="5" name="Rectangle 4"/>
+          <p:cNvSpPr/>
+          <p:nvPr/>
+        </p:nvSpPr>
+        <p:spPr>
+          <a:xfrm>
+            <a:off x="0" y="1234440"/>
+            <a:ext cx="12188952" cy="12700"/>
+          </a:xfrm>
+          <a:prstGeom prst="rect">
+            <a:avLst/>
+          </a:prstGeom>
+          <a:solidFill>
+            <a:srgbClr val="D8DFE4"/>
+          </a:solidFill>
+          <a:ln>
+            <a:noFill/>
+          </a:ln>
+        </p:spPr>
+        <p:style>
+          <a:lnRef idx="1">
+            <a:schemeClr val="accent1"/>
+          </a:lnRef>
+          <a:fillRef idx="3">
+            <a:schemeClr val="accent1"/>
+          </a:fillRef>
+          <a:effectRef idx="2">
+            <a:schemeClr val="accent1"/>
+          </a:effectRef>
+          <a:fontRef idx="minor">
+            <a:schemeClr val="lt1"/>
+          </a:fontRef>
+        </p:style>
+        <p:txBody>
+          <a:bodyPr rtlCol="0" anchor="ctr"/>
+          <a:lstStyle/>
+          <a:p>
+            <a:pPr algn="ctr"/>
+          </a:p>
+        </p:txBody>
+      </p:sp>
+      <p:sp>
+        <p:nvSpPr>
+          <p:cNvPr id="6" name="Rectangle 5"/>
+          <p:cNvSpPr/>
+          <p:nvPr/>
+        </p:nvSpPr>
+        <p:spPr>
+          <a:xfrm>
+            <a:off x="685800" y="502920"/>
+            <a:ext cx="36576" cy="658368"/>
+          </a:xfrm>
+          <a:prstGeom prst="rect">
+            <a:avLst/>
+          </a:prstGeom>
+          <a:solidFill>
+            <a:srgbClr val="D9C089"/>
+          </a:solidFill>
+          <a:ln>
+            <a:noFill/>
+          </a:ln>
+        </p:spPr>
+        <p:style>
+          <a:lnRef idx="1">
+            <a:schemeClr val="accent1"/>
+          </a:lnRef>
+          <a:fillRef idx="3">
+            <a:schemeClr val="accent1"/>
+          </a:fillRef>
+          <a:effectRef idx="2">
+            <a:schemeClr val="accent1"/>
+          </a:effectRef>
+          <a:fontRef idx="minor">
+            <a:schemeClr val="lt1"/>
+          </a:fontRef>
+        </p:style>
+        <p:txBody>
+          <a:bodyPr rtlCol="0" anchor="ctr"/>
+          <a:lstStyle/>
+          <a:p>
+            <a:pPr algn="ctr"/>
+          </a:p>
+        </p:txBody>
+      </p:sp>
+      <p:sp>
+        <p:nvSpPr>
+          <p:cNvPr id="7" name="TextBox 6"/>
+          <p:cNvSpPr txBox="1"/>
+          <p:nvPr/>
+        </p:nvSpPr>
+        <p:spPr>
+          <a:xfrm>
+            <a:off x="813816" y="502920"/>
+            <a:ext cx="10634472" cy="685800"/>
+          </a:xfrm>
+          <a:prstGeom prst="rect">
+            <a:avLst/>
+          </a:prstGeom>
+          <a:noFill/>
+        </p:spPr>
+        <p:txBody>
+          <a:bodyPr wrap="square">
+            <a:spAutoFit/>
+          </a:bodyPr>
+          <a:lstStyle/>
+          <a:p>
+            <a:pPr algn="l"/>
+            <a:r>
+              <a:rPr sz="2400" b="1" i="0">
+                <a:solidFill>
+                  <a:srgbClr val="1F2C56"/>
+                </a:solidFill>
+                <a:latin typeface="Source Serif 4"/>
+              </a:rPr>
               <a:t>Arbeitsblatt: 8-Felder-Kreditanalyse-Template</a:t>
             </a:r>
           </a:p>
@@ -7608,7 +8084,7 @@
                 </a:solidFill>
                 <a:latin typeface="JetBrains Mono"/>
               </a:rPr>
-              <a:t>LERNZIELE  ·  M21</a:t>
+              <a:t>ÜBERBLICK  ·  M21</a:t>
             </a:r>
           </a:p>
         </p:txBody>
@@ -7686,7 +8162,7 @@
                 </a:solidFill>
                 <a:latin typeface="Source Serif 4"/>
               </a:rPr>
-              <a:t>Was Sie heute mitnehmen</a:t>
+              <a:t>Worum geht es heute</a:t>
             </a:r>
           </a:p>
         </p:txBody>
@@ -7699,8 +8175,8 @@
         </p:nvSpPr>
         <p:spPr>
           <a:xfrm>
-            <a:off x="685800" y="1371600"/>
-            <a:ext cx="10817352" cy="5120640"/>
+            <a:off x="685800" y="1737360"/>
+            <a:ext cx="9720072" cy="4206240"/>
           </a:xfrm>
           <a:prstGeom prst="rect">
             <a:avLst/>
@@ -7714,78 +8190,50 @@
           <a:lstStyle/>
           <a:p>
             <a:pPr>
-              <a:spcBef>
-                <a:spcPts val="800"/>
-              </a:spcBef>
               <a:spcAft>
-                <a:spcPts val="200"/>
+                <a:spcPts val="1200"/>
               </a:spcAft>
             </a:pPr>
             <a:r>
-              <a:rPr sz="1400">
+              <a:rPr sz="1700">
                 <a:solidFill>
                   <a:srgbClr val="3D5466"/>
                 </a:solidFill>
                 <a:latin typeface="Arial"/>
               </a:rPr>
-              <a:t>▸  Eine strukturierte Kreditanalyse anhand des 8-Felder-Frameworks selbstständig durchführen und MaRisk-konform dokumentieren</a:t>
+              <a:t>Kreditentscheidungen scheitern selten an fehlenden Daten – häufiger an unstrukturierter Analyse und kognitiven Verzerrungen.</a:t>
             </a:r>
           </a:p>
           <a:p>
             <a:pPr>
-              <a:spcBef>
-                <a:spcPts val="800"/>
-              </a:spcBef>
               <a:spcAft>
-                <a:spcPts val="200"/>
+                <a:spcPts val="1200"/>
               </a:spcAft>
             </a:pPr>
             <a:r>
-              <a:rPr sz="1400">
+              <a:rPr sz="1700">
                 <a:solidFill>
                   <a:srgbClr val="3D5466"/>
                 </a:solidFill>
                 <a:latin typeface="Arial"/>
               </a:rPr>
-              <a:t>▸  Quantitative und qualitative Risikofaktoren eines Kreditantrags systematisch analysieren und nach Relevanz gewichten</a:t>
+              <a:t>Sie lernen das 8-Felder-Framework für die Kreditanalyse, erkennen typische Urteilsfallen und üben die Entscheidungsfindung an realistischen Fällen.</a:t>
             </a:r>
           </a:p>
           <a:p>
             <a:pPr>
-              <a:spcBef>
-                <a:spcPts val="800"/>
-              </a:spcBef>
               <a:spcAft>
-                <a:spcPts val="200"/>
+                <a:spcPts val="1200"/>
               </a:spcAft>
             </a:pPr>
             <a:r>
-              <a:rPr sz="1400">
+              <a:rPr sz="1700">
                 <a:solidFill>
                   <a:srgbClr val="3D5466"/>
                 </a:solidFill>
                 <a:latin typeface="Arial"/>
               </a:rPr>
-              <a:t>▸  Eine begründete Kreditempfehlung bewerten, entscheiden und vor dem Kreditausschuss vertreten</a:t>
-            </a:r>
-          </a:p>
-          <a:p>
-            <a:pPr>
-              <a:spcBef>
-                <a:spcPts val="800"/>
-              </a:spcBef>
-              <a:spcAft>
-                <a:spcPts val="200"/>
-              </a:spcAft>
-            </a:pPr>
-            <a:r>
-              <a:rPr sz="1400">
-                <a:solidFill>
-                  <a:srgbClr val="3D5466"/>
-                </a:solidFill>
-                <a:latin typeface="Arial"/>
-              </a:rPr>
-              <a:t>▸  Kreditvorlagen Dritter kritisch prüfen und Verbesserungspotenziale benennen</a:t>
+              <a:t>Danach formulieren Sie tragfähige Kreditempfehlungen und vertreten sie souverän vor dem Kreditausschuss.</a:t>
             </a:r>
           </a:p>
         </p:txBody>
@@ -8002,7 +8450,7 @@
                 </a:solidFill>
                 <a:latin typeface="JetBrains Mono"/>
               </a:rPr>
-              <a:t>AGENDA  ·  M21</a:t>
+              <a:t>LERNZIELE  ·  M21</a:t>
             </a:r>
           </a:p>
         </p:txBody>
@@ -8080,7 +8528,7 @@
                 </a:solidFill>
                 <a:latin typeface="Source Serif 4"/>
               </a:rPr>
-              <a:t>Agenda</a:t>
+              <a:t>Was Sie heute mitnehmen</a:t>
             </a:r>
           </a:p>
         </p:txBody>
@@ -8093,8 +8541,8 @@
         </p:nvSpPr>
         <p:spPr>
           <a:xfrm>
-            <a:off x="685800" y="1463040"/>
-            <a:ext cx="10817352" cy="4937760"/>
+            <a:off x="685800" y="1371600"/>
+            <a:ext cx="10817352" cy="5120640"/>
           </a:xfrm>
           <a:prstGeom prst="rect">
             <a:avLst/>
@@ -8116,13 +8564,13 @@
               </a:spcAft>
             </a:pPr>
             <a:r>
-              <a:rPr sz="1500">
+              <a:rPr sz="1400">
                 <a:solidFill>
                   <a:srgbClr val="3D5466"/>
                 </a:solidFill>
                 <a:latin typeface="Arial"/>
               </a:rPr>
-              <a:t>01   Theorie-Input: Das 8-Felder-Framework für KMU-Kreditentscheidungen</a:t>
+              <a:t>▸  Eine strukturierte Kreditanalyse anhand des 8-Felder-Frameworks selbstständig durchführen und MaRisk-konform dokumentieren</a:t>
             </a:r>
           </a:p>
           <a:p>
@@ -8135,13 +8583,13 @@
               </a:spcAft>
             </a:pPr>
             <a:r>
-              <a:rPr sz="1500">
+              <a:rPr sz="1400">
                 <a:solidFill>
                   <a:srgbClr val="3D5466"/>
                 </a:solidFill>
                 <a:latin typeface="Arial"/>
               </a:rPr>
-              <a:t>02   Theorie-Input: Von der Analyse zur Entscheidungsvorlage</a:t>
+              <a:t>▸  Quantitative und qualitative Risikofaktoren eines Kreditantrags systematisch analysieren und nach Relevanz gewichten</a:t>
             </a:r>
           </a:p>
           <a:p>
@@ -8154,13 +8602,13 @@
               </a:spcAft>
             </a:pPr>
             <a:r>
-              <a:rPr sz="1500">
+              <a:rPr sz="1400">
                 <a:solidFill>
                   <a:srgbClr val="3D5466"/>
                 </a:solidFill>
                 <a:latin typeface="Arial"/>
               </a:rPr>
-              <a:t>03   Theorie-Input: Sicherheitenbewertung nach BelWertV</a:t>
+              <a:t>▸  Eine begründete Kreditempfehlung bewerten, entscheiden und vor dem Kreditausschuss vertreten</a:t>
             </a:r>
           </a:p>
           <a:p>
@@ -8173,89 +8621,13 @@
               </a:spcAft>
             </a:pPr>
             <a:r>
-              <a:rPr sz="1500">
+              <a:rPr sz="1400">
                 <a:solidFill>
                   <a:srgbClr val="3D5466"/>
                 </a:solidFill>
                 <a:latin typeface="Arial"/>
               </a:rPr>
-              <a:t>04   4.3a Sicherheitenbewertung im Alltag</a:t>
-            </a:r>
-          </a:p>
-          <a:p>
-            <a:pPr>
-              <a:spcBef>
-                <a:spcPts val="800"/>
-              </a:spcBef>
-              <a:spcAft>
-                <a:spcPts val="200"/>
-              </a:spcAft>
-            </a:pPr>
-            <a:r>
-              <a:rPr sz="1500">
-                <a:solidFill>
-                  <a:srgbClr val="3D5466"/>
-                </a:solidFill>
-                <a:latin typeface="Arial"/>
-              </a:rPr>
-              <a:t>05   4.3b Betriebsmittelkredite und Kontokorrent: Kurzfall</a:t>
-            </a:r>
-          </a:p>
-          <a:p>
-            <a:pPr>
-              <a:spcBef>
-                <a:spcPts val="800"/>
-              </a:spcBef>
-              <a:spcAft>
-                <a:spcPts val="200"/>
-              </a:spcAft>
-            </a:pPr>
-            <a:r>
-              <a:rPr sz="1500">
-                <a:solidFill>
-                  <a:srgbClr val="3D5466"/>
-                </a:solidFill>
-                <a:latin typeface="Arial"/>
-              </a:rPr>
-              <a:t>06   4.3c Checkliste: Bestandskredit in der Krise – erste Schritte</a:t>
-            </a:r>
-          </a:p>
-          <a:p>
-            <a:pPr>
-              <a:spcBef>
-                <a:spcPts val="800"/>
-              </a:spcBef>
-              <a:spcAft>
-                <a:spcPts val="200"/>
-              </a:spcAft>
-            </a:pPr>
-            <a:r>
-              <a:rPr sz="1500">
-                <a:solidFill>
-                  <a:srgbClr val="3D5466"/>
-                </a:solidFill>
-                <a:latin typeface="Arial"/>
-              </a:rPr>
-              <a:t>07   Praxisfall: Metallbau Schnell GmbH (Heilbronn, fiktiv)</a:t>
-            </a:r>
-          </a:p>
-          <a:p>
-            <a:pPr>
-              <a:spcBef>
-                <a:spcPts val="800"/>
-              </a:spcBef>
-              <a:spcAft>
-                <a:spcPts val="200"/>
-              </a:spcAft>
-            </a:pPr>
-            <a:r>
-              <a:rPr sz="1500">
-                <a:solidFill>
-                  <a:srgbClr val="3D5466"/>
-                </a:solidFill>
-                <a:latin typeface="Arial"/>
-              </a:rPr>
-              <a:t>08   Arbeitsblatt: 8-Felder-Kreditanalyse-Template</a:t>
+              <a:t>▸  Kreditvorlagen Dritter kritisch prüfen und Verbesserungspotenziale benennen</a:t>
             </a:r>
           </a:p>
         </p:txBody>
@@ -8371,7 +8743,7 @@
             <a:avLst/>
           </a:prstGeom>
           <a:solidFill>
-            <a:srgbClr val="FFFFFF"/>
+            <a:srgbClr val="EDEDF3"/>
           </a:solidFill>
           <a:ln>
             <a:noFill/>
@@ -8472,62 +8844,27 @@
                 </a:solidFill>
                 <a:latin typeface="JetBrains Mono"/>
               </a:rPr>
-              <a:t>M21  ·  SCHAUBILD</a:t>
-            </a:r>
-          </a:p>
-        </p:txBody>
-      </p:sp>
-      <p:sp>
-        <p:nvSpPr>
-          <p:cNvPr id="5" name="TextBox 4"/>
-          <p:cNvSpPr txBox="1"/>
-          <p:nvPr/>
-        </p:nvSpPr>
-        <p:spPr>
-          <a:xfrm>
-            <a:off x="685800" y="502920"/>
-            <a:ext cx="10817352" cy="594360"/>
-          </a:xfrm>
-          <a:prstGeom prst="rect">
-            <a:avLst/>
-          </a:prstGeom>
-          <a:noFill/>
-        </p:spPr>
-        <p:txBody>
-          <a:bodyPr wrap="square">
-            <a:spAutoFit/>
-          </a:bodyPr>
-          <a:lstStyle/>
-          <a:p>
-            <a:pPr algn="l"/>
-            <a:r>
-              <a:rPr sz="2000" b="1" i="0">
-                <a:solidFill>
-                  <a:srgbClr val="1F2C56"/>
-                </a:solidFill>
-                <a:latin typeface="Source Serif 4"/>
-              </a:rPr>
-              <a:t>Handlungsempfehlung Kreditentscheidung</a:t>
-            </a:r>
-          </a:p>
-        </p:txBody>
-      </p:sp>
-      <p:sp>
-        <p:nvSpPr>
-          <p:cNvPr id="6" name="Rectangle 5"/>
+              <a:t>AGENDA  ·  M21</a:t>
+            </a:r>
+          </a:p>
+        </p:txBody>
+      </p:sp>
+      <p:sp>
+        <p:nvSpPr>
+          <p:cNvPr id="5" name="Rectangle 4"/>
           <p:cNvSpPr/>
           <p:nvPr/>
         </p:nvSpPr>
         <p:spPr>
           <a:xfrm>
-            <a:off x="685800" y="1143000"/>
-            <a:ext cx="10817352" cy="25400"/>
+            <a:off x="0" y="1234440"/>
+            <a:ext cx="12188952" cy="12700"/>
           </a:xfrm>
           <a:prstGeom prst="rect">
             <a:avLst/>
           </a:prstGeom>
           <a:solidFill>
-            <a:srgbClr val="D9C089"/>
+            <a:srgbClr val="D8DFE4"/>
           </a:solidFill>
           <a:ln>
             <a:noFill/>
@@ -8555,30 +8892,216 @@
           </a:p>
         </p:txBody>
       </p:sp>
-      <p:pic>
-        <p:nvPicPr>
-          <p:cNvPr id="7" name="Picture 6" descr="image.png"/>
-          <p:cNvPicPr>
-            <a:picLocks noChangeAspect="1"/>
-          </p:cNvPicPr>
-          <p:nvPr/>
-        </p:nvPicPr>
-        <p:blipFill>
-          <a:blip r:embed="rId2"/>
-          <a:stretch>
-            <a:fillRect/>
-          </a:stretch>
-        </p:blipFill>
-        <p:spPr>
-          <a:xfrm>
-            <a:off x="2303489" y="1325880"/>
-            <a:ext cx="7581973" cy="4937760"/>
-          </a:xfrm>
-          <a:prstGeom prst="rect">
-            <a:avLst/>
-          </a:prstGeom>
-        </p:spPr>
-      </p:pic>
+      <p:sp>
+        <p:nvSpPr>
+          <p:cNvPr id="6" name="TextBox 5"/>
+          <p:cNvSpPr txBox="1"/>
+          <p:nvPr/>
+        </p:nvSpPr>
+        <p:spPr>
+          <a:xfrm>
+            <a:off x="685800" y="502920"/>
+            <a:ext cx="10817352" cy="658368"/>
+          </a:xfrm>
+          <a:prstGeom prst="rect">
+            <a:avLst/>
+          </a:prstGeom>
+          <a:noFill/>
+        </p:spPr>
+        <p:txBody>
+          <a:bodyPr wrap="square">
+            <a:spAutoFit/>
+          </a:bodyPr>
+          <a:lstStyle/>
+          <a:p>
+            <a:pPr algn="l"/>
+            <a:r>
+              <a:rPr sz="2600" b="1" i="0">
+                <a:solidFill>
+                  <a:srgbClr val="1F2C56"/>
+                </a:solidFill>
+                <a:latin typeface="Source Serif 4"/>
+              </a:rPr>
+              <a:t>Agenda</a:t>
+            </a:r>
+          </a:p>
+        </p:txBody>
+      </p:sp>
+      <p:sp>
+        <p:nvSpPr>
+          <p:cNvPr id="7" name="TextBox 6"/>
+          <p:cNvSpPr txBox="1"/>
+          <p:nvPr/>
+        </p:nvSpPr>
+        <p:spPr>
+          <a:xfrm>
+            <a:off x="685800" y="1463040"/>
+            <a:ext cx="10817352" cy="4937760"/>
+          </a:xfrm>
+          <a:prstGeom prst="rect">
+            <a:avLst/>
+          </a:prstGeom>
+          <a:noFill/>
+        </p:spPr>
+        <p:txBody>
+          <a:bodyPr wrap="square">
+            <a:spAutoFit/>
+          </a:bodyPr>
+          <a:lstStyle/>
+          <a:p>
+            <a:pPr>
+              <a:spcBef>
+                <a:spcPts val="800"/>
+              </a:spcBef>
+              <a:spcAft>
+                <a:spcPts val="200"/>
+              </a:spcAft>
+            </a:pPr>
+            <a:r>
+              <a:rPr sz="1500">
+                <a:solidFill>
+                  <a:srgbClr val="3D5466"/>
+                </a:solidFill>
+                <a:latin typeface="Arial"/>
+              </a:rPr>
+              <a:t>01   Theorie-Input: Das 8-Felder-Framework für KMU-Kreditentscheidungen</a:t>
+            </a:r>
+          </a:p>
+          <a:p>
+            <a:pPr>
+              <a:spcBef>
+                <a:spcPts val="800"/>
+              </a:spcBef>
+              <a:spcAft>
+                <a:spcPts val="200"/>
+              </a:spcAft>
+            </a:pPr>
+            <a:r>
+              <a:rPr sz="1500">
+                <a:solidFill>
+                  <a:srgbClr val="3D5466"/>
+                </a:solidFill>
+                <a:latin typeface="Arial"/>
+              </a:rPr>
+              <a:t>02   Theorie-Input: Von der Analyse zur Entscheidungsvorlage</a:t>
+            </a:r>
+          </a:p>
+          <a:p>
+            <a:pPr>
+              <a:spcBef>
+                <a:spcPts val="800"/>
+              </a:spcBef>
+              <a:spcAft>
+                <a:spcPts val="200"/>
+              </a:spcAft>
+            </a:pPr>
+            <a:r>
+              <a:rPr sz="1500">
+                <a:solidFill>
+                  <a:srgbClr val="3D5466"/>
+                </a:solidFill>
+                <a:latin typeface="Arial"/>
+              </a:rPr>
+              <a:t>03   Theorie-Input: Sicherheitenbewertung nach BelWertV</a:t>
+            </a:r>
+          </a:p>
+          <a:p>
+            <a:pPr>
+              <a:spcBef>
+                <a:spcPts val="800"/>
+              </a:spcBef>
+              <a:spcAft>
+                <a:spcPts val="200"/>
+              </a:spcAft>
+            </a:pPr>
+            <a:r>
+              <a:rPr sz="1500">
+                <a:solidFill>
+                  <a:srgbClr val="3D5466"/>
+                </a:solidFill>
+                <a:latin typeface="Arial"/>
+              </a:rPr>
+              <a:t>04   4.3a Sicherheitenbewertung im Alltag</a:t>
+            </a:r>
+          </a:p>
+          <a:p>
+            <a:pPr>
+              <a:spcBef>
+                <a:spcPts val="800"/>
+              </a:spcBef>
+              <a:spcAft>
+                <a:spcPts val="200"/>
+              </a:spcAft>
+            </a:pPr>
+            <a:r>
+              <a:rPr sz="1500">
+                <a:solidFill>
+                  <a:srgbClr val="3D5466"/>
+                </a:solidFill>
+                <a:latin typeface="Arial"/>
+              </a:rPr>
+              <a:t>05   4.3b Betriebsmittelkredite und Kontokorrent: Kurzfall</a:t>
+            </a:r>
+          </a:p>
+          <a:p>
+            <a:pPr>
+              <a:spcBef>
+                <a:spcPts val="800"/>
+              </a:spcBef>
+              <a:spcAft>
+                <a:spcPts val="200"/>
+              </a:spcAft>
+            </a:pPr>
+            <a:r>
+              <a:rPr sz="1500">
+                <a:solidFill>
+                  <a:srgbClr val="3D5466"/>
+                </a:solidFill>
+                <a:latin typeface="Arial"/>
+              </a:rPr>
+              <a:t>06   4.3c Checkliste: Bestandskredit in der Krise – erste Schritte</a:t>
+            </a:r>
+          </a:p>
+          <a:p>
+            <a:pPr>
+              <a:spcBef>
+                <a:spcPts val="800"/>
+              </a:spcBef>
+              <a:spcAft>
+                <a:spcPts val="200"/>
+              </a:spcAft>
+            </a:pPr>
+            <a:r>
+              <a:rPr sz="1500">
+                <a:solidFill>
+                  <a:srgbClr val="3D5466"/>
+                </a:solidFill>
+                <a:latin typeface="Arial"/>
+              </a:rPr>
+              <a:t>07   Praxisfall: Metallbau Schnell GmbH (Heilbronn, fiktiv)</a:t>
+            </a:r>
+          </a:p>
+          <a:p>
+            <a:pPr>
+              <a:spcBef>
+                <a:spcPts val="800"/>
+              </a:spcBef>
+              <a:spcAft>
+                <a:spcPts val="200"/>
+              </a:spcAft>
+            </a:pPr>
+            <a:r>
+              <a:rPr sz="1500">
+                <a:solidFill>
+                  <a:srgbClr val="3D5466"/>
+                </a:solidFill>
+                <a:latin typeface="Arial"/>
+              </a:rPr>
+              <a:t>08   Arbeitsblatt: 8-Felder-Kreditanalyse-Template</a:t>
+            </a:r>
+          </a:p>
+        </p:txBody>
+      </p:sp>
       <p:sp>
         <p:nvSpPr>
           <p:cNvPr id="8" name="Rectangle 7"/>
@@ -8653,41 +9176,6 @@
                 <a:latin typeface="JetBrains Mono"/>
               </a:rPr>
               <a:t>Benedikt Zoller Coaching  ·  FKB Campus  ·  M21</a:t>
-            </a:r>
-          </a:p>
-        </p:txBody>
-      </p:sp>
-      <p:sp>
-        <p:nvSpPr>
-          <p:cNvPr id="10" name="TextBox 9"/>
-          <p:cNvSpPr txBox="1"/>
-          <p:nvPr/>
-        </p:nvSpPr>
-        <p:spPr>
-          <a:xfrm>
-            <a:off x="7176211" y="6583680"/>
-            <a:ext cx="4326940" cy="256032"/>
-          </a:xfrm>
-          <a:prstGeom prst="rect">
-            <a:avLst/>
-          </a:prstGeom>
-          <a:noFill/>
-        </p:spPr>
-        <p:txBody>
-          <a:bodyPr wrap="none">
-            <a:spAutoFit/>
-          </a:bodyPr>
-          <a:lstStyle/>
-          <a:p>
-            <a:pPr algn="r"/>
-            <a:r>
-              <a:rPr sz="700">
-                <a:solidFill>
-                  <a:srgbClr val="A0B4D2"/>
-                </a:solidFill>
-                <a:latin typeface="JetBrains Mono"/>
-              </a:rPr>
-              <a:t>Schaubild</a:t>
             </a:r>
           </a:p>
         </p:txBody>
@@ -8725,7 +9213,7 @@
             <a:avLst/>
           </a:prstGeom>
           <a:solidFill>
-            <a:srgbClr val="EDEDF3"/>
+            <a:srgbClr val="FFFFFF"/>
           </a:solidFill>
           <a:ln>
             <a:noFill/>
@@ -8826,51 +9314,43 @@
                 </a:solidFill>
                 <a:latin typeface="JetBrains Mono"/>
               </a:rPr>
-              <a:t>M21  ·  INHALT</a:t>
-            </a:r>
-          </a:p>
-        </p:txBody>
-      </p:sp>
-      <p:sp>
-        <p:nvSpPr>
-          <p:cNvPr id="5" name="Rectangle 4"/>
-          <p:cNvSpPr/>
-          <p:nvPr/>
-        </p:nvSpPr>
-        <p:spPr>
-          <a:xfrm>
-            <a:off x="0" y="1234440"/>
-            <a:ext cx="12188952" cy="12700"/>
-          </a:xfrm>
-          <a:prstGeom prst="rect">
-            <a:avLst/>
-          </a:prstGeom>
-          <a:solidFill>
-            <a:srgbClr val="D8DFE4"/>
-          </a:solidFill>
-          <a:ln>
-            <a:noFill/>
-          </a:ln>
-        </p:spPr>
-        <p:style>
-          <a:lnRef idx="1">
-            <a:schemeClr val="accent1"/>
-          </a:lnRef>
-          <a:fillRef idx="3">
-            <a:schemeClr val="accent1"/>
-          </a:fillRef>
-          <a:effectRef idx="2">
-            <a:schemeClr val="accent1"/>
-          </a:effectRef>
-          <a:fontRef idx="minor">
-            <a:schemeClr val="lt1"/>
-          </a:fontRef>
-        </p:style>
-        <p:txBody>
-          <a:bodyPr rtlCol="0" anchor="ctr"/>
-          <a:lstStyle/>
-          <a:p>
-            <a:pPr algn="ctr"/>
+              <a:t>M21  ·  SCHAUBILD</a:t>
+            </a:r>
+          </a:p>
+        </p:txBody>
+      </p:sp>
+      <p:sp>
+        <p:nvSpPr>
+          <p:cNvPr id="5" name="TextBox 4"/>
+          <p:cNvSpPr txBox="1"/>
+          <p:nvPr/>
+        </p:nvSpPr>
+        <p:spPr>
+          <a:xfrm>
+            <a:off x="685800" y="502920"/>
+            <a:ext cx="10817352" cy="594360"/>
+          </a:xfrm>
+          <a:prstGeom prst="rect">
+            <a:avLst/>
+          </a:prstGeom>
+          <a:noFill/>
+        </p:spPr>
+        <p:txBody>
+          <a:bodyPr wrap="square">
+            <a:spAutoFit/>
+          </a:bodyPr>
+          <a:lstStyle/>
+          <a:p>
+            <a:pPr algn="l"/>
+            <a:r>
+              <a:rPr sz="2000" b="1" i="0">
+                <a:solidFill>
+                  <a:srgbClr val="1F2C56"/>
+                </a:solidFill>
+                <a:latin typeface="Source Serif 4"/>
+              </a:rPr>
+              <a:t>Handlungsempfehlung Kreditentscheidung</a:t>
+            </a:r>
           </a:p>
         </p:txBody>
       </p:sp>
@@ -8882,8 +9362,8 @@
         </p:nvSpPr>
         <p:spPr>
           <a:xfrm>
-            <a:off x="685800" y="502920"/>
-            <a:ext cx="36576" cy="658368"/>
+            <a:off x="685800" y="1143000"/>
+            <a:ext cx="10817352" cy="25400"/>
           </a:xfrm>
           <a:prstGeom prst="rect">
             <a:avLst/>
@@ -8917,295 +9397,33 @@
           </a:p>
         </p:txBody>
       </p:sp>
-      <p:sp>
-        <p:nvSpPr>
-          <p:cNvPr id="7" name="TextBox 6"/>
-          <p:cNvSpPr txBox="1"/>
-          <p:nvPr/>
-        </p:nvSpPr>
-        <p:spPr>
-          <a:xfrm>
-            <a:off x="813816" y="502920"/>
-            <a:ext cx="10634472" cy="685800"/>
-          </a:xfrm>
-          <a:prstGeom prst="rect">
-            <a:avLst/>
-          </a:prstGeom>
-          <a:noFill/>
-        </p:spPr>
-        <p:txBody>
-          <a:bodyPr wrap="square">
-            <a:spAutoFit/>
-          </a:bodyPr>
-          <a:lstStyle/>
-          <a:p>
-            <a:pPr algn="l"/>
-            <a:r>
-              <a:rPr sz="2400" b="1" i="0">
-                <a:solidFill>
-                  <a:srgbClr val="1F2C56"/>
-                </a:solidFill>
-                <a:latin typeface="Source Serif 4"/>
-              </a:rPr>
-              <a:t>Theorie-Input: Das 8-Felder-Framework für KMU-Kreditentscheidungen</a:t>
-            </a:r>
-          </a:p>
-        </p:txBody>
-      </p:sp>
-      <p:sp>
-        <p:nvSpPr>
-          <p:cNvPr id="8" name="TextBox 7"/>
-          <p:cNvSpPr txBox="1"/>
-          <p:nvPr/>
-        </p:nvSpPr>
-        <p:spPr>
-          <a:xfrm>
-            <a:off x="685800" y="1417320"/>
-            <a:ext cx="10817352" cy="5029200"/>
-          </a:xfrm>
-          <a:prstGeom prst="rect">
-            <a:avLst/>
-          </a:prstGeom>
-          <a:noFill/>
-        </p:spPr>
-        <p:txBody>
-          <a:bodyPr wrap="square">
-            <a:spAutoFit/>
-          </a:bodyPr>
-          <a:lstStyle/>
-          <a:p>
-            <a:pPr>
-              <a:spcBef>
-                <a:spcPts val="1000"/>
-              </a:spcBef>
-              <a:spcAft>
-                <a:spcPts val="200"/>
-              </a:spcAft>
-            </a:pPr>
-            <a:r>
-              <a:rPr sz="800" b="1">
-                <a:solidFill>
-                  <a:srgbClr val="78808C"/>
-                </a:solidFill>
-                <a:latin typeface="JetBrains Mono"/>
-              </a:rPr>
-              <a:t>4.1.1 KONZEPTIONELLER RAHMEN</a:t>
-            </a:r>
-          </a:p>
-          <a:p>
-            <a:pPr>
-              <a:spcBef>
-                <a:spcPts val="400"/>
-              </a:spcBef>
-              <a:spcAft>
-                <a:spcPts val="200"/>
-              </a:spcAft>
-            </a:pPr>
-            <a:r>
-              <a:rPr sz="1200">
-                <a:solidFill>
-                  <a:srgbClr val="3D5466"/>
-                </a:solidFill>
-                <a:latin typeface="Arial"/>
-              </a:rPr>
-              <a:t>Übersicht der 8 Felder:</a:t>
-            </a:r>
-          </a:p>
-          <a:p>
-            <a:pPr>
-              <a:spcBef>
-                <a:spcPts val="1000"/>
-              </a:spcBef>
-              <a:spcAft>
-                <a:spcPts val="200"/>
-              </a:spcAft>
-            </a:pPr>
-            <a:r>
-              <a:rPr sz="800" b="1">
-                <a:solidFill>
-                  <a:srgbClr val="78808C"/>
-                </a:solidFill>
-                <a:latin typeface="JetBrains Mono"/>
-              </a:rPr>
-              <a:t>4.1.2 FELD 1 – ZWECK UND VERWENDUNG</a:t>
-            </a:r>
-          </a:p>
-          <a:p>
-            <a:pPr>
-              <a:spcBef>
-                <a:spcPts val="400"/>
-              </a:spcBef>
-              <a:spcAft>
-                <a:spcPts val="200"/>
-              </a:spcAft>
-            </a:pPr>
-            <a:r>
-              <a:rPr sz="1200">
-                <a:solidFill>
-                  <a:srgbClr val="3D5466"/>
-                </a:solidFill>
-                <a:latin typeface="Arial"/>
-              </a:rPr>
-              <a:t>Definition: Wozu wird der Kredit konkret verwendet? Ist die Verwendung wirtschaftlich sinnvoll und bankseits nachvollziehbar?</a:t>
-            </a:r>
-          </a:p>
-          <a:p>
-            <a:pPr>
-              <a:spcBef>
-                <a:spcPts val="400"/>
-              </a:spcBef>
-              <a:spcAft>
-                <a:spcPts val="200"/>
-              </a:spcAft>
-            </a:pPr>
-            <a:r>
-              <a:rPr sz="1200">
-                <a:solidFill>
-                  <a:srgbClr val="3D5466"/>
-                </a:solidFill>
-                <a:latin typeface="Arial"/>
-              </a:rPr>
-              <a:t>Analysefragen:</a:t>
-            </a:r>
-          </a:p>
-          <a:p>
-            <a:pPr>
-              <a:spcBef>
-                <a:spcPts val="400"/>
-              </a:spcBef>
-              <a:spcAft>
-                <a:spcPts val="200"/>
-              </a:spcAft>
-            </a:pPr>
-            <a:r>
-              <a:rPr sz="1300">
-                <a:solidFill>
-                  <a:srgbClr val="3D5466"/>
-                </a:solidFill>
-                <a:latin typeface="Arial"/>
-              </a:rPr>
-              <a:t>▸  Ist der Zweck konkret und überprüfbar? (Nicht „Betriebsmittel", sondern „5-Achs-CNC-Drehmaschine Heidenhain TNC 640 für Werkstatt Gebäude 2")</a:t>
-            </a:r>
-          </a:p>
-          <a:p>
-            <a:pPr>
-              <a:spcBef>
-                <a:spcPts val="400"/>
-              </a:spcBef>
-              <a:spcAft>
-                <a:spcPts val="200"/>
-              </a:spcAft>
-            </a:pPr>
-            <a:r>
-              <a:rPr sz="1300">
-                <a:solidFill>
-                  <a:srgbClr val="3D5466"/>
-                </a:solidFill>
-                <a:latin typeface="Arial"/>
-              </a:rPr>
-              <a:t>▸  Dient er der Substanzerhaltung (Ersatz) oder Substanzverbesserung (Wachstum, Rationalisierung)?</a:t>
-            </a:r>
-          </a:p>
-          <a:p>
-            <a:pPr>
-              <a:spcBef>
-                <a:spcPts val="400"/>
-              </a:spcBef>
-              <a:spcAft>
-                <a:spcPts val="200"/>
-              </a:spcAft>
-            </a:pPr>
-            <a:r>
-              <a:rPr sz="1300">
-                <a:solidFill>
-                  <a:srgbClr val="3D5466"/>
-                </a:solidFill>
-                <a:latin typeface="Arial"/>
-              </a:rPr>
-              <a:t>▸  Passt der Zweck zur wirtschaftlichen Lage des Unternehmens?</a:t>
-            </a:r>
-          </a:p>
-          <a:p>
-            <a:pPr>
-              <a:spcBef>
-                <a:spcPts val="400"/>
-              </a:spcBef>
-              <a:spcAft>
-                <a:spcPts val="200"/>
-              </a:spcAft>
-            </a:pPr>
-            <a:r>
-              <a:rPr sz="1300">
-                <a:solidFill>
-                  <a:srgbClr val="3D5466"/>
-                </a:solidFill>
-                <a:latin typeface="Arial"/>
-              </a:rPr>
-              <a:t>▸  Ist die Amortisationszeit realistisch für die gewählte Laufzeit?</a:t>
-            </a:r>
-          </a:p>
-          <a:p>
-            <a:pPr>
-              <a:spcBef>
-                <a:spcPts val="400"/>
-              </a:spcBef>
-              <a:spcAft>
-                <a:spcPts val="200"/>
-              </a:spcAft>
-            </a:pPr>
-            <a:r>
-              <a:rPr sz="1200">
-                <a:solidFill>
-                  <a:srgbClr val="3D5466"/>
-                </a:solidFill>
-                <a:latin typeface="Arial"/>
-              </a:rPr>
-              <a:t>Typische Risiken: Mehrfachzweck ohne Aufteilung, Verwendung für Schuldenumschuldung ohne explizite Nennung, fehlende Kostenaufstellungen.</a:t>
-            </a:r>
-          </a:p>
-          <a:p>
-            <a:pPr>
-              <a:spcBef>
-                <a:spcPts val="1000"/>
-              </a:spcBef>
-              <a:spcAft>
-                <a:spcPts val="200"/>
-              </a:spcAft>
-            </a:pPr>
-            <a:r>
-              <a:rPr sz="800" b="1">
-                <a:solidFill>
-                  <a:srgbClr val="78808C"/>
-                </a:solidFill>
-                <a:latin typeface="JetBrains Mono"/>
-              </a:rPr>
-              <a:t>4.1.3 FELD 2 – RÜCKZAHLUNGSQUELLE (CASHFLOW-ANALYSE)</a:t>
-            </a:r>
-          </a:p>
-          <a:p>
-            <a:pPr>
-              <a:spcBef>
-                <a:spcPts val="400"/>
-              </a:spcBef>
-              <a:spcAft>
-                <a:spcPts val="200"/>
-              </a:spcAft>
-            </a:pPr>
-            <a:r>
-              <a:rPr sz="1200">
-                <a:solidFill>
-                  <a:srgbClr val="3D5466"/>
-                </a:solidFill>
-                <a:latin typeface="Arial"/>
-              </a:rPr>
-              <a:t>Definition: Kann das Unternehmen Zins und Tilgung aus operativem Cashflow decken, oder ist es auf Desinvestitionen oder Dritte angewiesen?</a:t>
-            </a:r>
-          </a:p>
-        </p:txBody>
-      </p:sp>
-      <p:sp>
-        <p:nvSpPr>
-          <p:cNvPr id="9" name="Rectangle 8"/>
+      <p:pic>
+        <p:nvPicPr>
+          <p:cNvPr id="7" name="Picture 6" descr="image.png"/>
+          <p:cNvPicPr>
+            <a:picLocks noChangeAspect="1"/>
+          </p:cNvPicPr>
+          <p:nvPr/>
+        </p:nvPicPr>
+        <p:blipFill>
+          <a:blip r:embed="rId2"/>
+          <a:stretch>
+            <a:fillRect/>
+          </a:stretch>
+        </p:blipFill>
+        <p:spPr>
+          <a:xfrm>
+            <a:off x="2303489" y="1325880"/>
+            <a:ext cx="7581973" cy="4937760"/>
+          </a:xfrm>
+          <a:prstGeom prst="rect">
+            <a:avLst/>
+          </a:prstGeom>
+        </p:spPr>
+      </p:pic>
+      <p:sp>
+        <p:nvSpPr>
+          <p:cNvPr id="8" name="Rectangle 7"/>
           <p:cNvSpPr/>
           <p:nvPr/>
         </p:nvSpPr>
@@ -9248,7 +9466,7 @@
       </p:sp>
       <p:sp>
         <p:nvSpPr>
-          <p:cNvPr id="10" name="TextBox 9"/>
+          <p:cNvPr id="9" name="TextBox 8"/>
           <p:cNvSpPr txBox="1"/>
           <p:nvPr/>
         </p:nvSpPr>
@@ -9277,6 +9495,41 @@
                 <a:latin typeface="JetBrains Mono"/>
               </a:rPr>
               <a:t>Benedikt Zoller Coaching  ·  FKB Campus  ·  M21</a:t>
+            </a:r>
+          </a:p>
+        </p:txBody>
+      </p:sp>
+      <p:sp>
+        <p:nvSpPr>
+          <p:cNvPr id="10" name="TextBox 9"/>
+          <p:cNvSpPr txBox="1"/>
+          <p:nvPr/>
+        </p:nvSpPr>
+        <p:spPr>
+          <a:xfrm>
+            <a:off x="7176211" y="6583680"/>
+            <a:ext cx="4326940" cy="256032"/>
+          </a:xfrm>
+          <a:prstGeom prst="rect">
+            <a:avLst/>
+          </a:prstGeom>
+          <a:noFill/>
+        </p:spPr>
+        <p:txBody>
+          <a:bodyPr wrap="none">
+            <a:spAutoFit/>
+          </a:bodyPr>
+          <a:lstStyle/>
+          <a:p>
+            <a:pPr algn="r"/>
+            <a:r>
+              <a:rPr sz="700">
+                <a:solidFill>
+                  <a:srgbClr val="A0B4D2"/>
+                </a:solidFill>
+                <a:latin typeface="JetBrains Mono"/>
+              </a:rPr>
+              <a:t>Schaubild</a:t>
             </a:r>
           </a:p>
         </p:txBody>
@@ -9314,7 +9567,7 @@
             <a:avLst/>
           </a:prstGeom>
           <a:solidFill>
-            <a:srgbClr val="FFFFFF"/>
+            <a:srgbClr val="EDEDF3"/>
           </a:solidFill>
           <a:ln>
             <a:noFill/>
@@ -9415,43 +9668,51 @@
                 </a:solidFill>
                 <a:latin typeface="JetBrains Mono"/>
               </a:rPr>
-              <a:t>M21  ·  SCHAUBILD</a:t>
-            </a:r>
-          </a:p>
-        </p:txBody>
-      </p:sp>
-      <p:sp>
-        <p:nvSpPr>
-          <p:cNvPr id="5" name="TextBox 4"/>
-          <p:cNvSpPr txBox="1"/>
-          <p:nvPr/>
-        </p:nvSpPr>
-        <p:spPr>
-          <a:xfrm>
-            <a:off x="685800" y="502920"/>
-            <a:ext cx="10817352" cy="594360"/>
-          </a:xfrm>
-          <a:prstGeom prst="rect">
-            <a:avLst/>
-          </a:prstGeom>
-          <a:noFill/>
-        </p:spPr>
-        <p:txBody>
-          <a:bodyPr wrap="square">
-            <a:spAutoFit/>
-          </a:bodyPr>
-          <a:lstStyle/>
-          <a:p>
-            <a:pPr algn="l"/>
-            <a:r>
-              <a:rPr sz="2000" b="1" i="0">
-                <a:solidFill>
-                  <a:srgbClr val="1F2C56"/>
-                </a:solidFill>
-                <a:latin typeface="Source Serif 4"/>
-              </a:rPr>
-              <a:t>8-Felder-Framework der Kreditentscheidung</a:t>
-            </a:r>
+              <a:t>M21  ·  INHALT</a:t>
+            </a:r>
+          </a:p>
+        </p:txBody>
+      </p:sp>
+      <p:sp>
+        <p:nvSpPr>
+          <p:cNvPr id="5" name="Rectangle 4"/>
+          <p:cNvSpPr/>
+          <p:nvPr/>
+        </p:nvSpPr>
+        <p:spPr>
+          <a:xfrm>
+            <a:off x="0" y="1234440"/>
+            <a:ext cx="12188952" cy="12700"/>
+          </a:xfrm>
+          <a:prstGeom prst="rect">
+            <a:avLst/>
+          </a:prstGeom>
+          <a:solidFill>
+            <a:srgbClr val="D8DFE4"/>
+          </a:solidFill>
+          <a:ln>
+            <a:noFill/>
+          </a:ln>
+        </p:spPr>
+        <p:style>
+          <a:lnRef idx="1">
+            <a:schemeClr val="accent1"/>
+          </a:lnRef>
+          <a:fillRef idx="3">
+            <a:schemeClr val="accent1"/>
+          </a:fillRef>
+          <a:effectRef idx="2">
+            <a:schemeClr val="accent1"/>
+          </a:effectRef>
+          <a:fontRef idx="minor">
+            <a:schemeClr val="lt1"/>
+          </a:fontRef>
+        </p:style>
+        <p:txBody>
+          <a:bodyPr rtlCol="0" anchor="ctr"/>
+          <a:lstStyle/>
+          <a:p>
+            <a:pPr algn="ctr"/>
           </a:p>
         </p:txBody>
       </p:sp>
@@ -9463,8 +9724,8 @@
         </p:nvSpPr>
         <p:spPr>
           <a:xfrm>
-            <a:off x="685800" y="1143000"/>
-            <a:ext cx="10817352" cy="25400"/>
+            <a:off x="685800" y="502920"/>
+            <a:ext cx="36576" cy="658368"/>
           </a:xfrm>
           <a:prstGeom prst="rect">
             <a:avLst/>
@@ -9498,33 +9759,295 @@
           </a:p>
         </p:txBody>
       </p:sp>
-      <p:pic>
-        <p:nvPicPr>
-          <p:cNvPr id="7" name="Picture 6" descr="image.png"/>
-          <p:cNvPicPr>
-            <a:picLocks noChangeAspect="1"/>
-          </p:cNvPicPr>
-          <p:nvPr/>
-        </p:nvPicPr>
-        <p:blipFill>
-          <a:blip r:embed="rId2"/>
-          <a:stretch>
-            <a:fillRect/>
-          </a:stretch>
-        </p:blipFill>
-        <p:spPr>
-          <a:xfrm>
-            <a:off x="2163921" y="1325880"/>
-            <a:ext cx="7861110" cy="4937760"/>
-          </a:xfrm>
-          <a:prstGeom prst="rect">
-            <a:avLst/>
-          </a:prstGeom>
-        </p:spPr>
-      </p:pic>
-      <p:sp>
-        <p:nvSpPr>
-          <p:cNvPr id="8" name="Rectangle 7"/>
+      <p:sp>
+        <p:nvSpPr>
+          <p:cNvPr id="7" name="TextBox 6"/>
+          <p:cNvSpPr txBox="1"/>
+          <p:nvPr/>
+        </p:nvSpPr>
+        <p:spPr>
+          <a:xfrm>
+            <a:off x="813816" y="502920"/>
+            <a:ext cx="10634472" cy="685800"/>
+          </a:xfrm>
+          <a:prstGeom prst="rect">
+            <a:avLst/>
+          </a:prstGeom>
+          <a:noFill/>
+        </p:spPr>
+        <p:txBody>
+          <a:bodyPr wrap="square">
+            <a:spAutoFit/>
+          </a:bodyPr>
+          <a:lstStyle/>
+          <a:p>
+            <a:pPr algn="l"/>
+            <a:r>
+              <a:rPr sz="2400" b="1" i="0">
+                <a:solidFill>
+                  <a:srgbClr val="1F2C56"/>
+                </a:solidFill>
+                <a:latin typeface="Source Serif 4"/>
+              </a:rPr>
+              <a:t>Theorie-Input: Das 8-Felder-Framework für KMU-Kreditentscheidungen</a:t>
+            </a:r>
+          </a:p>
+        </p:txBody>
+      </p:sp>
+      <p:sp>
+        <p:nvSpPr>
+          <p:cNvPr id="8" name="TextBox 7"/>
+          <p:cNvSpPr txBox="1"/>
+          <p:nvPr/>
+        </p:nvSpPr>
+        <p:spPr>
+          <a:xfrm>
+            <a:off x="685800" y="1417320"/>
+            <a:ext cx="10817352" cy="5029200"/>
+          </a:xfrm>
+          <a:prstGeom prst="rect">
+            <a:avLst/>
+          </a:prstGeom>
+          <a:noFill/>
+        </p:spPr>
+        <p:txBody>
+          <a:bodyPr wrap="square">
+            <a:spAutoFit/>
+          </a:bodyPr>
+          <a:lstStyle/>
+          <a:p>
+            <a:pPr>
+              <a:spcBef>
+                <a:spcPts val="1000"/>
+              </a:spcBef>
+              <a:spcAft>
+                <a:spcPts val="200"/>
+              </a:spcAft>
+            </a:pPr>
+            <a:r>
+              <a:rPr sz="800" b="1">
+                <a:solidFill>
+                  <a:srgbClr val="78808C"/>
+                </a:solidFill>
+                <a:latin typeface="JetBrains Mono"/>
+              </a:rPr>
+              <a:t>4.1.1 KONZEPTIONELLER RAHMEN</a:t>
+            </a:r>
+          </a:p>
+          <a:p>
+            <a:pPr>
+              <a:spcBef>
+                <a:spcPts val="400"/>
+              </a:spcBef>
+              <a:spcAft>
+                <a:spcPts val="200"/>
+              </a:spcAft>
+            </a:pPr>
+            <a:r>
+              <a:rPr sz="1200">
+                <a:solidFill>
+                  <a:srgbClr val="3D5466"/>
+                </a:solidFill>
+                <a:latin typeface="Arial"/>
+              </a:rPr>
+              <a:t>Übersicht der 8 Felder:</a:t>
+            </a:r>
+          </a:p>
+          <a:p>
+            <a:pPr>
+              <a:spcBef>
+                <a:spcPts val="1000"/>
+              </a:spcBef>
+              <a:spcAft>
+                <a:spcPts val="200"/>
+              </a:spcAft>
+            </a:pPr>
+            <a:r>
+              <a:rPr sz="800" b="1">
+                <a:solidFill>
+                  <a:srgbClr val="78808C"/>
+                </a:solidFill>
+                <a:latin typeface="JetBrains Mono"/>
+              </a:rPr>
+              <a:t>4.1.2 FELD 1 – ZWECK UND VERWENDUNG</a:t>
+            </a:r>
+          </a:p>
+          <a:p>
+            <a:pPr>
+              <a:spcBef>
+                <a:spcPts val="400"/>
+              </a:spcBef>
+              <a:spcAft>
+                <a:spcPts val="200"/>
+              </a:spcAft>
+            </a:pPr>
+            <a:r>
+              <a:rPr sz="1200">
+                <a:solidFill>
+                  <a:srgbClr val="3D5466"/>
+                </a:solidFill>
+                <a:latin typeface="Arial"/>
+              </a:rPr>
+              <a:t>Definition: Wozu wird der Kredit konkret verwendet? Ist die Verwendung wirtschaftlich sinnvoll und bankseits nachvollziehbar?</a:t>
+            </a:r>
+          </a:p>
+          <a:p>
+            <a:pPr>
+              <a:spcBef>
+                <a:spcPts val="400"/>
+              </a:spcBef>
+              <a:spcAft>
+                <a:spcPts val="200"/>
+              </a:spcAft>
+            </a:pPr>
+            <a:r>
+              <a:rPr sz="1200">
+                <a:solidFill>
+                  <a:srgbClr val="3D5466"/>
+                </a:solidFill>
+                <a:latin typeface="Arial"/>
+              </a:rPr>
+              <a:t>Analysefragen:</a:t>
+            </a:r>
+          </a:p>
+          <a:p>
+            <a:pPr>
+              <a:spcBef>
+                <a:spcPts val="400"/>
+              </a:spcBef>
+              <a:spcAft>
+                <a:spcPts val="200"/>
+              </a:spcAft>
+            </a:pPr>
+            <a:r>
+              <a:rPr sz="1300">
+                <a:solidFill>
+                  <a:srgbClr val="3D5466"/>
+                </a:solidFill>
+                <a:latin typeface="Arial"/>
+              </a:rPr>
+              <a:t>▸  Ist der Zweck konkret und überprüfbar? (Nicht „Betriebsmittel", sondern „5-Achs-CNC-Drehmaschine Heidenhain TNC 640 für Werkstatt Gebäude 2")</a:t>
+            </a:r>
+          </a:p>
+          <a:p>
+            <a:pPr>
+              <a:spcBef>
+                <a:spcPts val="400"/>
+              </a:spcBef>
+              <a:spcAft>
+                <a:spcPts val="200"/>
+              </a:spcAft>
+            </a:pPr>
+            <a:r>
+              <a:rPr sz="1300">
+                <a:solidFill>
+                  <a:srgbClr val="3D5466"/>
+                </a:solidFill>
+                <a:latin typeface="Arial"/>
+              </a:rPr>
+              <a:t>▸  Dient er der Substanzerhaltung (Ersatz) oder Substanzverbesserung (Wachstum, Rationalisierung)?</a:t>
+            </a:r>
+          </a:p>
+          <a:p>
+            <a:pPr>
+              <a:spcBef>
+                <a:spcPts val="400"/>
+              </a:spcBef>
+              <a:spcAft>
+                <a:spcPts val="200"/>
+              </a:spcAft>
+            </a:pPr>
+            <a:r>
+              <a:rPr sz="1300">
+                <a:solidFill>
+                  <a:srgbClr val="3D5466"/>
+                </a:solidFill>
+                <a:latin typeface="Arial"/>
+              </a:rPr>
+              <a:t>▸  Passt der Zweck zur wirtschaftlichen Lage des Unternehmens?</a:t>
+            </a:r>
+          </a:p>
+          <a:p>
+            <a:pPr>
+              <a:spcBef>
+                <a:spcPts val="400"/>
+              </a:spcBef>
+              <a:spcAft>
+                <a:spcPts val="200"/>
+              </a:spcAft>
+            </a:pPr>
+            <a:r>
+              <a:rPr sz="1300">
+                <a:solidFill>
+                  <a:srgbClr val="3D5466"/>
+                </a:solidFill>
+                <a:latin typeface="Arial"/>
+              </a:rPr>
+              <a:t>▸  Ist die Amortisationszeit realistisch für die gewählte Laufzeit?</a:t>
+            </a:r>
+          </a:p>
+          <a:p>
+            <a:pPr>
+              <a:spcBef>
+                <a:spcPts val="400"/>
+              </a:spcBef>
+              <a:spcAft>
+                <a:spcPts val="200"/>
+              </a:spcAft>
+            </a:pPr>
+            <a:r>
+              <a:rPr sz="1200">
+                <a:solidFill>
+                  <a:srgbClr val="3D5466"/>
+                </a:solidFill>
+                <a:latin typeface="Arial"/>
+              </a:rPr>
+              <a:t>Typische Risiken: Mehrfachzweck ohne Aufteilung, Verwendung für Schuldenumschuldung ohne explizite Nennung, fehlende Kostenaufstellungen.</a:t>
+            </a:r>
+          </a:p>
+          <a:p>
+            <a:pPr>
+              <a:spcBef>
+                <a:spcPts val="1000"/>
+              </a:spcBef>
+              <a:spcAft>
+                <a:spcPts val="200"/>
+              </a:spcAft>
+            </a:pPr>
+            <a:r>
+              <a:rPr sz="800" b="1">
+                <a:solidFill>
+                  <a:srgbClr val="78808C"/>
+                </a:solidFill>
+                <a:latin typeface="JetBrains Mono"/>
+              </a:rPr>
+              <a:t>4.1.3 FELD 2 – RÜCKZAHLUNGSQUELLE (CASHFLOW-ANALYSE)</a:t>
+            </a:r>
+          </a:p>
+          <a:p>
+            <a:pPr>
+              <a:spcBef>
+                <a:spcPts val="400"/>
+              </a:spcBef>
+              <a:spcAft>
+                <a:spcPts val="200"/>
+              </a:spcAft>
+            </a:pPr>
+            <a:r>
+              <a:rPr sz="1200">
+                <a:solidFill>
+                  <a:srgbClr val="3D5466"/>
+                </a:solidFill>
+                <a:latin typeface="Arial"/>
+              </a:rPr>
+              <a:t>Definition: Kann das Unternehmen Zins und Tilgung aus operativem Cashflow decken, oder ist es auf Desinvestitionen oder Dritte angewiesen?</a:t>
+            </a:r>
+          </a:p>
+        </p:txBody>
+      </p:sp>
+      <p:sp>
+        <p:nvSpPr>
+          <p:cNvPr id="9" name="Rectangle 8"/>
           <p:cNvSpPr/>
           <p:nvPr/>
         </p:nvSpPr>
@@ -9567,7 +10090,7 @@
       </p:sp>
       <p:sp>
         <p:nvSpPr>
-          <p:cNvPr id="9" name="TextBox 8"/>
+          <p:cNvPr id="10" name="TextBox 9"/>
           <p:cNvSpPr txBox="1"/>
           <p:nvPr/>
         </p:nvSpPr>
@@ -9596,41 +10119,6 @@
                 <a:latin typeface="JetBrains Mono"/>
               </a:rPr>
               <a:t>Benedikt Zoller Coaching  ·  FKB Campus  ·  M21</a:t>
-            </a:r>
-          </a:p>
-        </p:txBody>
-      </p:sp>
-      <p:sp>
-        <p:nvSpPr>
-          <p:cNvPr id="10" name="TextBox 9"/>
-          <p:cNvSpPr txBox="1"/>
-          <p:nvPr/>
-        </p:nvSpPr>
-        <p:spPr>
-          <a:xfrm>
-            <a:off x="7176211" y="6583680"/>
-            <a:ext cx="4326940" cy="256032"/>
-          </a:xfrm>
-          <a:prstGeom prst="rect">
-            <a:avLst/>
-          </a:prstGeom>
-          <a:noFill/>
-        </p:spPr>
-        <p:txBody>
-          <a:bodyPr wrap="none">
-            <a:spAutoFit/>
-          </a:bodyPr>
-          <a:lstStyle/>
-          <a:p>
-            <a:pPr algn="r"/>
-            <a:r>
-              <a:rPr sz="700">
-                <a:solidFill>
-                  <a:srgbClr val="A0B4D2"/>
-                </a:solidFill>
-                <a:latin typeface="JetBrains Mono"/>
-              </a:rPr>
-              <a:t>Schaubild</a:t>
             </a:r>
           </a:p>
         </p:txBody>
@@ -9668,7 +10156,7 @@
             <a:avLst/>
           </a:prstGeom>
           <a:solidFill>
-            <a:srgbClr val="EDEDF3"/>
+            <a:srgbClr val="FFFFFF"/>
           </a:solidFill>
           <a:ln>
             <a:noFill/>
@@ -9769,51 +10257,43 @@
                 </a:solidFill>
                 <a:latin typeface="JetBrains Mono"/>
               </a:rPr>
-              <a:t>M21  ·  INHALT</a:t>
-            </a:r>
-          </a:p>
-        </p:txBody>
-      </p:sp>
-      <p:sp>
-        <p:nvSpPr>
-          <p:cNvPr id="5" name="Rectangle 4"/>
-          <p:cNvSpPr/>
-          <p:nvPr/>
-        </p:nvSpPr>
-        <p:spPr>
-          <a:xfrm>
-            <a:off x="0" y="1234440"/>
-            <a:ext cx="12188952" cy="12700"/>
-          </a:xfrm>
-          <a:prstGeom prst="rect">
-            <a:avLst/>
-          </a:prstGeom>
-          <a:solidFill>
-            <a:srgbClr val="D8DFE4"/>
-          </a:solidFill>
-          <a:ln>
-            <a:noFill/>
-          </a:ln>
-        </p:spPr>
-        <p:style>
-          <a:lnRef idx="1">
-            <a:schemeClr val="accent1"/>
-          </a:lnRef>
-          <a:fillRef idx="3">
-            <a:schemeClr val="accent1"/>
-          </a:fillRef>
-          <a:effectRef idx="2">
-            <a:schemeClr val="accent1"/>
-          </a:effectRef>
-          <a:fontRef idx="minor">
-            <a:schemeClr val="lt1"/>
-          </a:fontRef>
-        </p:style>
-        <p:txBody>
-          <a:bodyPr rtlCol="0" anchor="ctr"/>
-          <a:lstStyle/>
-          <a:p>
-            <a:pPr algn="ctr"/>
+              <a:t>M21  ·  SCHAUBILD</a:t>
+            </a:r>
+          </a:p>
+        </p:txBody>
+      </p:sp>
+      <p:sp>
+        <p:nvSpPr>
+          <p:cNvPr id="5" name="TextBox 4"/>
+          <p:cNvSpPr txBox="1"/>
+          <p:nvPr/>
+        </p:nvSpPr>
+        <p:spPr>
+          <a:xfrm>
+            <a:off x="685800" y="502920"/>
+            <a:ext cx="10817352" cy="594360"/>
+          </a:xfrm>
+          <a:prstGeom prst="rect">
+            <a:avLst/>
+          </a:prstGeom>
+          <a:noFill/>
+        </p:spPr>
+        <p:txBody>
+          <a:bodyPr wrap="square">
+            <a:spAutoFit/>
+          </a:bodyPr>
+          <a:lstStyle/>
+          <a:p>
+            <a:pPr algn="l"/>
+            <a:r>
+              <a:rPr sz="2000" b="1" i="0">
+                <a:solidFill>
+                  <a:srgbClr val="1F2C56"/>
+                </a:solidFill>
+                <a:latin typeface="Source Serif 4"/>
+              </a:rPr>
+              <a:t>8-Felder-Framework der Kreditentscheidung</a:t>
+            </a:r>
           </a:p>
         </p:txBody>
       </p:sp>
@@ -9825,8 +10305,8 @@
         </p:nvSpPr>
         <p:spPr>
           <a:xfrm>
-            <a:off x="685800" y="502920"/>
-            <a:ext cx="36576" cy="658368"/>
+            <a:off x="685800" y="1143000"/>
+            <a:ext cx="10817352" cy="25400"/>
           </a:xfrm>
           <a:prstGeom prst="rect">
             <a:avLst/>
@@ -9860,295 +10340,33 @@
           </a:p>
         </p:txBody>
       </p:sp>
-      <p:sp>
-        <p:nvSpPr>
-          <p:cNvPr id="7" name="TextBox 6"/>
-          <p:cNvSpPr txBox="1"/>
-          <p:nvPr/>
-        </p:nvSpPr>
-        <p:spPr>
-          <a:xfrm>
-            <a:off x="813816" y="502920"/>
-            <a:ext cx="10634472" cy="685800"/>
-          </a:xfrm>
-          <a:prstGeom prst="rect">
-            <a:avLst/>
-          </a:prstGeom>
-          <a:noFill/>
-        </p:spPr>
-        <p:txBody>
-          <a:bodyPr wrap="square">
-            <a:spAutoFit/>
-          </a:bodyPr>
-          <a:lstStyle/>
-          <a:p>
-            <a:pPr algn="l"/>
-            <a:r>
-              <a:rPr sz="2400" b="1" i="0">
-                <a:solidFill>
-                  <a:srgbClr val="1F2C56"/>
-                </a:solidFill>
-                <a:latin typeface="Source Serif 4"/>
-              </a:rPr>
-              <a:t>Theorie-Input: Von der Analyse zur Entscheidungsvorlage</a:t>
-            </a:r>
-          </a:p>
-        </p:txBody>
-      </p:sp>
-      <p:sp>
-        <p:nvSpPr>
-          <p:cNvPr id="8" name="TextBox 7"/>
-          <p:cNvSpPr txBox="1"/>
-          <p:nvPr/>
-        </p:nvSpPr>
-        <p:spPr>
-          <a:xfrm>
-            <a:off x="685800" y="1417320"/>
-            <a:ext cx="10817352" cy="5029200"/>
-          </a:xfrm>
-          <a:prstGeom prst="rect">
-            <a:avLst/>
-          </a:prstGeom>
-          <a:noFill/>
-        </p:spPr>
-        <p:txBody>
-          <a:bodyPr wrap="square">
-            <a:spAutoFit/>
-          </a:bodyPr>
-          <a:lstStyle/>
-          <a:p>
-            <a:pPr>
-              <a:spcBef>
-                <a:spcPts val="1000"/>
-              </a:spcBef>
-              <a:spcAft>
-                <a:spcPts val="200"/>
-              </a:spcAft>
-            </a:pPr>
-            <a:r>
-              <a:rPr sz="800" b="1">
-                <a:solidFill>
-                  <a:srgbClr val="78808C"/>
-                </a:solidFill>
-                <a:latin typeface="JetBrains Mono"/>
-              </a:rPr>
-              <a:t>4.2.1 STRUKTUR EINER KREDITVORLAGE NACH MARISK BTO 1.1</a:t>
-            </a:r>
-          </a:p>
-          <a:p>
-            <a:pPr>
-              <a:spcBef>
-                <a:spcPts val="400"/>
-              </a:spcBef>
-              <a:spcAft>
-                <a:spcPts val="200"/>
-              </a:spcAft>
-            </a:pPr>
-            <a:r>
-              <a:rPr sz="1200">
-                <a:solidFill>
-                  <a:srgbClr val="3D5466"/>
-                </a:solidFill>
-                <a:latin typeface="Arial"/>
-              </a:rPr>
-              <a:t>Eine bankinterne Kreditvorlage muss nach MaRisk BTO 1.1 (Bundesanstalt für Finanzdienstleistungsaufsicht, 2023 ) folgende Elemente enthalten:</a:t>
-            </a:r>
-          </a:p>
-          <a:p>
-            <a:pPr>
-              <a:spcBef>
-                <a:spcPts val="400"/>
-              </a:spcBef>
-              <a:spcAft>
-                <a:spcPts val="200"/>
-              </a:spcAft>
-            </a:pPr>
-            <a:r>
-              <a:rPr sz="1200">
-                <a:solidFill>
-                  <a:srgbClr val="3D5466"/>
-                </a:solidFill>
-                <a:latin typeface="Arial"/>
-              </a:rPr>
-              <a:t>Gesamtumfang: 12–20 Seiten (je nach Komplexität)</a:t>
-            </a:r>
-          </a:p>
-          <a:p>
-            <a:pPr>
-              <a:spcBef>
-                <a:spcPts val="1000"/>
-              </a:spcBef>
-              <a:spcAft>
-                <a:spcPts val="200"/>
-              </a:spcAft>
-            </a:pPr>
-            <a:r>
-              <a:rPr sz="800" b="1">
-                <a:solidFill>
-                  <a:srgbClr val="78808C"/>
-                </a:solidFill>
-                <a:latin typeface="JetBrains Mono"/>
-              </a:rPr>
-              <a:t>4.2.2 DIE DREI ENTSCHEIDUNGSERGEBNISSE</a:t>
-            </a:r>
-          </a:p>
-          <a:p>
-            <a:pPr>
-              <a:spcBef>
-                <a:spcPts val="400"/>
-              </a:spcBef>
-              <a:spcAft>
-                <a:spcPts val="200"/>
-              </a:spcAft>
-            </a:pPr>
-            <a:r>
-              <a:rPr sz="1200">
-                <a:solidFill>
-                  <a:srgbClr val="3D5466"/>
-                </a:solidFill>
-                <a:latin typeface="Arial"/>
-              </a:rPr>
-              <a:t>Entscheidung 1: ZUSAGE</a:t>
-            </a:r>
-          </a:p>
-          <a:p>
-            <a:pPr>
-              <a:spcBef>
-                <a:spcPts val="400"/>
-              </a:spcBef>
-              <a:spcAft>
-                <a:spcPts val="200"/>
-              </a:spcAft>
-            </a:pPr>
-            <a:r>
-              <a:rPr sz="1300">
-                <a:solidFill>
-                  <a:srgbClr val="3D5466"/>
-                </a:solidFill>
-                <a:latin typeface="Arial"/>
-              </a:rPr>
-              <a:t>▸  Alle 8 Felder positiv oder neutral</a:t>
-            </a:r>
-          </a:p>
-          <a:p>
-            <a:pPr>
-              <a:spcBef>
-                <a:spcPts val="400"/>
-              </a:spcBef>
-              <a:spcAft>
-                <a:spcPts val="200"/>
-              </a:spcAft>
-            </a:pPr>
-            <a:r>
-              <a:rPr sz="1300">
-                <a:solidFill>
-                  <a:srgbClr val="3D5466"/>
-                </a:solidFill>
-                <a:latin typeface="Arial"/>
-              </a:rPr>
-              <a:t>▸  Keine einschränkenden Bedingungen</a:t>
-            </a:r>
-          </a:p>
-          <a:p>
-            <a:pPr>
-              <a:spcBef>
-                <a:spcPts val="400"/>
-              </a:spcBef>
-              <a:spcAft>
-                <a:spcPts val="200"/>
-              </a:spcAft>
-            </a:pPr>
-            <a:r>
-              <a:rPr sz="1300">
-                <a:solidFill>
-                  <a:srgbClr val="3D5466"/>
-                </a:solidFill>
-                <a:latin typeface="Arial"/>
-              </a:rPr>
-              <a:t>▸  Dokumentation: Kreditausschuss-Beschluss, Krediturkunde</a:t>
-            </a:r>
-          </a:p>
-          <a:p>
-            <a:pPr>
-              <a:spcBef>
-                <a:spcPts val="400"/>
-              </a:spcBef>
-              <a:spcAft>
-                <a:spcPts val="200"/>
-              </a:spcAft>
-            </a:pPr>
-            <a:r>
-              <a:rPr sz="1200">
-                <a:solidFill>
-                  <a:srgbClr val="3D5466"/>
-                </a:solidFill>
-                <a:latin typeface="Arial"/>
-              </a:rPr>
-              <a:t>Entscheidung 2: ZUSAGE MIT AUFLAGEN</a:t>
-            </a:r>
-          </a:p>
-          <a:p>
-            <a:pPr>
-              <a:spcBef>
-                <a:spcPts val="400"/>
-              </a:spcBef>
-              <a:spcAft>
-                <a:spcPts val="200"/>
-              </a:spcAft>
-            </a:pPr>
-            <a:r>
-              <a:rPr sz="1300">
-                <a:solidFill>
-                  <a:srgbClr val="3D5466"/>
-                </a:solidFill>
-                <a:latin typeface="Arial"/>
-              </a:rPr>
-              <a:t>▸  Einzelne Felder mit Risiken, die durch Auflagen mitigierbar sind</a:t>
-            </a:r>
-          </a:p>
-          <a:p>
-            <a:pPr>
-              <a:spcBef>
-                <a:spcPts val="400"/>
-              </a:spcBef>
-              <a:spcAft>
-                <a:spcPts val="200"/>
-              </a:spcAft>
-            </a:pPr>
-            <a:r>
-              <a:rPr sz="1300">
-                <a:solidFill>
-                  <a:srgbClr val="3D5466"/>
-                </a:solidFill>
-                <a:latin typeface="Arial"/>
-              </a:rPr>
-              <a:t>▸  Auflagen müssen SMART formuliert sein (Spezifisch, Messbar, Akzeptabel, Realistisch, Terminiert)</a:t>
-            </a:r>
-          </a:p>
-          <a:p>
-            <a:pPr>
-              <a:spcBef>
-                <a:spcPts val="400"/>
-              </a:spcBef>
-              <a:spcAft>
-                <a:spcPts val="200"/>
-              </a:spcAft>
-            </a:pPr>
-            <a:r>
-              <a:rPr sz="1300">
-                <a:solidFill>
-                  <a:srgbClr val="3D5466"/>
-                </a:solidFill>
-                <a:latin typeface="Arial"/>
-              </a:rPr>
-              <a:t>▸  Beispiel: „EK-Quote muss innerhalb von 24 Monaten auf ≥ 23 % steigen; Nachweis quartalsweise."</a:t>
-            </a:r>
-          </a:p>
-        </p:txBody>
-      </p:sp>
-      <p:sp>
-        <p:nvSpPr>
-          <p:cNvPr id="9" name="Rectangle 8"/>
+      <p:pic>
+        <p:nvPicPr>
+          <p:cNvPr id="7" name="Picture 6" descr="image.png"/>
+          <p:cNvPicPr>
+            <a:picLocks noChangeAspect="1"/>
+          </p:cNvPicPr>
+          <p:nvPr/>
+        </p:nvPicPr>
+        <p:blipFill>
+          <a:blip r:embed="rId2"/>
+          <a:stretch>
+            <a:fillRect/>
+          </a:stretch>
+        </p:blipFill>
+        <p:spPr>
+          <a:xfrm>
+            <a:off x="2163921" y="1325880"/>
+            <a:ext cx="7861110" cy="4937760"/>
+          </a:xfrm>
+          <a:prstGeom prst="rect">
+            <a:avLst/>
+          </a:prstGeom>
+        </p:spPr>
+      </p:pic>
+      <p:sp>
+        <p:nvSpPr>
+          <p:cNvPr id="8" name="Rectangle 7"/>
           <p:cNvSpPr/>
           <p:nvPr/>
         </p:nvSpPr>
@@ -10191,7 +10409,7 @@
       </p:sp>
       <p:sp>
         <p:nvSpPr>
-          <p:cNvPr id="10" name="TextBox 9"/>
+          <p:cNvPr id="9" name="TextBox 8"/>
           <p:cNvSpPr txBox="1"/>
           <p:nvPr/>
         </p:nvSpPr>
@@ -10220,6 +10438,41 @@
                 <a:latin typeface="JetBrains Mono"/>
               </a:rPr>
               <a:t>Benedikt Zoller Coaching  ·  FKB Campus  ·  M21</a:t>
+            </a:r>
+          </a:p>
+        </p:txBody>
+      </p:sp>
+      <p:sp>
+        <p:nvSpPr>
+          <p:cNvPr id="10" name="TextBox 9"/>
+          <p:cNvSpPr txBox="1"/>
+          <p:nvPr/>
+        </p:nvSpPr>
+        <p:spPr>
+          <a:xfrm>
+            <a:off x="7176211" y="6583680"/>
+            <a:ext cx="4326940" cy="256032"/>
+          </a:xfrm>
+          <a:prstGeom prst="rect">
+            <a:avLst/>
+          </a:prstGeom>
+          <a:noFill/>
+        </p:spPr>
+        <p:txBody>
+          <a:bodyPr wrap="none">
+            <a:spAutoFit/>
+          </a:bodyPr>
+          <a:lstStyle/>
+          <a:p>
+            <a:pPr algn="r"/>
+            <a:r>
+              <a:rPr sz="700">
+                <a:solidFill>
+                  <a:srgbClr val="A0B4D2"/>
+                </a:solidFill>
+                <a:latin typeface="JetBrains Mono"/>
+              </a:rPr>
+              <a:t>Schaubild</a:t>
             </a:r>
           </a:p>
         </p:txBody>
@@ -10257,7 +10510,7 @@
             <a:avLst/>
           </a:prstGeom>
           <a:solidFill>
-            <a:srgbClr val="FFFFFF"/>
+            <a:srgbClr val="EDEDF3"/>
           </a:solidFill>
           <a:ln>
             <a:noFill/>
@@ -10358,43 +10611,51 @@
                 </a:solidFill>
                 <a:latin typeface="JetBrains Mono"/>
               </a:rPr>
-              <a:t>M21  ·  SCHAUBILD</a:t>
-            </a:r>
-          </a:p>
-        </p:txBody>
-      </p:sp>
-      <p:sp>
-        <p:nvSpPr>
-          <p:cNvPr id="5" name="TextBox 4"/>
-          <p:cNvSpPr txBox="1"/>
-          <p:nvPr/>
-        </p:nvSpPr>
-        <p:spPr>
-          <a:xfrm>
-            <a:off x="685800" y="502920"/>
-            <a:ext cx="10817352" cy="594360"/>
-          </a:xfrm>
-          <a:prstGeom prst="rect">
-            <a:avLst/>
-          </a:prstGeom>
-          <a:noFill/>
-        </p:spPr>
-        <p:txBody>
-          <a:bodyPr wrap="square">
-            <a:spAutoFit/>
-          </a:bodyPr>
-          <a:lstStyle/>
-          <a:p>
-            <a:pPr algn="l"/>
-            <a:r>
-              <a:rPr sz="2000" b="1" i="0">
-                <a:solidFill>
-                  <a:srgbClr val="1F2C56"/>
-                </a:solidFill>
-                <a:latin typeface="Source Serif 4"/>
-              </a:rPr>
-              <a:t>Zwei Denksysteme nach Kahneman</a:t>
-            </a:r>
+              <a:t>M21  ·  INHALT</a:t>
+            </a:r>
+          </a:p>
+        </p:txBody>
+      </p:sp>
+      <p:sp>
+        <p:nvSpPr>
+          <p:cNvPr id="5" name="Rectangle 4"/>
+          <p:cNvSpPr/>
+          <p:nvPr/>
+        </p:nvSpPr>
+        <p:spPr>
+          <a:xfrm>
+            <a:off x="0" y="1234440"/>
+            <a:ext cx="12188952" cy="12700"/>
+          </a:xfrm>
+          <a:prstGeom prst="rect">
+            <a:avLst/>
+          </a:prstGeom>
+          <a:solidFill>
+            <a:srgbClr val="D8DFE4"/>
+          </a:solidFill>
+          <a:ln>
+            <a:noFill/>
+          </a:ln>
+        </p:spPr>
+        <p:style>
+          <a:lnRef idx="1">
+            <a:schemeClr val="accent1"/>
+          </a:lnRef>
+          <a:fillRef idx="3">
+            <a:schemeClr val="accent1"/>
+          </a:fillRef>
+          <a:effectRef idx="2">
+            <a:schemeClr val="accent1"/>
+          </a:effectRef>
+          <a:fontRef idx="minor">
+            <a:schemeClr val="lt1"/>
+          </a:fontRef>
+        </p:style>
+        <p:txBody>
+          <a:bodyPr rtlCol="0" anchor="ctr"/>
+          <a:lstStyle/>
+          <a:p>
+            <a:pPr algn="ctr"/>
           </a:p>
         </p:txBody>
       </p:sp>
@@ -10406,8 +10667,8 @@
         </p:nvSpPr>
         <p:spPr>
           <a:xfrm>
-            <a:off x="685800" y="1143000"/>
-            <a:ext cx="10817352" cy="25400"/>
+            <a:off x="685800" y="502920"/>
+            <a:ext cx="36576" cy="658368"/>
           </a:xfrm>
           <a:prstGeom prst="rect">
             <a:avLst/>
@@ -10441,33 +10702,295 @@
           </a:p>
         </p:txBody>
       </p:sp>
-      <p:pic>
-        <p:nvPicPr>
-          <p:cNvPr id="7" name="Picture 6" descr="image.png"/>
-          <p:cNvPicPr>
-            <a:picLocks noChangeAspect="1"/>
-          </p:cNvPicPr>
-          <p:nvPr/>
-        </p:nvPicPr>
-        <p:blipFill>
-          <a:blip r:embed="rId2"/>
-          <a:stretch>
-            <a:fillRect/>
-          </a:stretch>
-        </p:blipFill>
-        <p:spPr>
-          <a:xfrm>
-            <a:off x="2303489" y="1325880"/>
-            <a:ext cx="7581973" cy="4937760"/>
-          </a:xfrm>
-          <a:prstGeom prst="rect">
-            <a:avLst/>
-          </a:prstGeom>
-        </p:spPr>
-      </p:pic>
-      <p:sp>
-        <p:nvSpPr>
-          <p:cNvPr id="8" name="Rectangle 7"/>
+      <p:sp>
+        <p:nvSpPr>
+          <p:cNvPr id="7" name="TextBox 6"/>
+          <p:cNvSpPr txBox="1"/>
+          <p:nvPr/>
+        </p:nvSpPr>
+        <p:spPr>
+          <a:xfrm>
+            <a:off x="813816" y="502920"/>
+            <a:ext cx="10634472" cy="685800"/>
+          </a:xfrm>
+          <a:prstGeom prst="rect">
+            <a:avLst/>
+          </a:prstGeom>
+          <a:noFill/>
+        </p:spPr>
+        <p:txBody>
+          <a:bodyPr wrap="square">
+            <a:spAutoFit/>
+          </a:bodyPr>
+          <a:lstStyle/>
+          <a:p>
+            <a:pPr algn="l"/>
+            <a:r>
+              <a:rPr sz="2400" b="1" i="0">
+                <a:solidFill>
+                  <a:srgbClr val="1F2C56"/>
+                </a:solidFill>
+                <a:latin typeface="Source Serif 4"/>
+              </a:rPr>
+              <a:t>Theorie-Input: Von der Analyse zur Entscheidungsvorlage</a:t>
+            </a:r>
+          </a:p>
+        </p:txBody>
+      </p:sp>
+      <p:sp>
+        <p:nvSpPr>
+          <p:cNvPr id="8" name="TextBox 7"/>
+          <p:cNvSpPr txBox="1"/>
+          <p:nvPr/>
+        </p:nvSpPr>
+        <p:spPr>
+          <a:xfrm>
+            <a:off x="685800" y="1417320"/>
+            <a:ext cx="10817352" cy="5029200"/>
+          </a:xfrm>
+          <a:prstGeom prst="rect">
+            <a:avLst/>
+          </a:prstGeom>
+          <a:noFill/>
+        </p:spPr>
+        <p:txBody>
+          <a:bodyPr wrap="square">
+            <a:spAutoFit/>
+          </a:bodyPr>
+          <a:lstStyle/>
+          <a:p>
+            <a:pPr>
+              <a:spcBef>
+                <a:spcPts val="1000"/>
+              </a:spcBef>
+              <a:spcAft>
+                <a:spcPts val="200"/>
+              </a:spcAft>
+            </a:pPr>
+            <a:r>
+              <a:rPr sz="800" b="1">
+                <a:solidFill>
+                  <a:srgbClr val="78808C"/>
+                </a:solidFill>
+                <a:latin typeface="JetBrains Mono"/>
+              </a:rPr>
+              <a:t>4.2.1 STRUKTUR EINER KREDITVORLAGE NACH MARISK BTO 1.1</a:t>
+            </a:r>
+          </a:p>
+          <a:p>
+            <a:pPr>
+              <a:spcBef>
+                <a:spcPts val="400"/>
+              </a:spcBef>
+              <a:spcAft>
+                <a:spcPts val="200"/>
+              </a:spcAft>
+            </a:pPr>
+            <a:r>
+              <a:rPr sz="1200">
+                <a:solidFill>
+                  <a:srgbClr val="3D5466"/>
+                </a:solidFill>
+                <a:latin typeface="Arial"/>
+              </a:rPr>
+              <a:t>Eine bankinterne Kreditvorlage muss nach MaRisk BTO 1.1 (Bundesanstalt für Finanzdienstleistungsaufsicht, 2023 ) folgende Elemente enthalten:</a:t>
+            </a:r>
+          </a:p>
+          <a:p>
+            <a:pPr>
+              <a:spcBef>
+                <a:spcPts val="400"/>
+              </a:spcBef>
+              <a:spcAft>
+                <a:spcPts val="200"/>
+              </a:spcAft>
+            </a:pPr>
+            <a:r>
+              <a:rPr sz="1200">
+                <a:solidFill>
+                  <a:srgbClr val="3D5466"/>
+                </a:solidFill>
+                <a:latin typeface="Arial"/>
+              </a:rPr>
+              <a:t>Gesamtumfang: 12–20 Seiten (je nach Komplexität)</a:t>
+            </a:r>
+          </a:p>
+          <a:p>
+            <a:pPr>
+              <a:spcBef>
+                <a:spcPts val="1000"/>
+              </a:spcBef>
+              <a:spcAft>
+                <a:spcPts val="200"/>
+              </a:spcAft>
+            </a:pPr>
+            <a:r>
+              <a:rPr sz="800" b="1">
+                <a:solidFill>
+                  <a:srgbClr val="78808C"/>
+                </a:solidFill>
+                <a:latin typeface="JetBrains Mono"/>
+              </a:rPr>
+              <a:t>4.2.2 DIE DREI ENTSCHEIDUNGSERGEBNISSE</a:t>
+            </a:r>
+          </a:p>
+          <a:p>
+            <a:pPr>
+              <a:spcBef>
+                <a:spcPts val="400"/>
+              </a:spcBef>
+              <a:spcAft>
+                <a:spcPts val="200"/>
+              </a:spcAft>
+            </a:pPr>
+            <a:r>
+              <a:rPr sz="1200">
+                <a:solidFill>
+                  <a:srgbClr val="3D5466"/>
+                </a:solidFill>
+                <a:latin typeface="Arial"/>
+              </a:rPr>
+              <a:t>Entscheidung 1: ZUSAGE</a:t>
+            </a:r>
+          </a:p>
+          <a:p>
+            <a:pPr>
+              <a:spcBef>
+                <a:spcPts val="400"/>
+              </a:spcBef>
+              <a:spcAft>
+                <a:spcPts val="200"/>
+              </a:spcAft>
+            </a:pPr>
+            <a:r>
+              <a:rPr sz="1300">
+                <a:solidFill>
+                  <a:srgbClr val="3D5466"/>
+                </a:solidFill>
+                <a:latin typeface="Arial"/>
+              </a:rPr>
+              <a:t>▸  Alle 8 Felder positiv oder neutral</a:t>
+            </a:r>
+          </a:p>
+          <a:p>
+            <a:pPr>
+              <a:spcBef>
+                <a:spcPts val="400"/>
+              </a:spcBef>
+              <a:spcAft>
+                <a:spcPts val="200"/>
+              </a:spcAft>
+            </a:pPr>
+            <a:r>
+              <a:rPr sz="1300">
+                <a:solidFill>
+                  <a:srgbClr val="3D5466"/>
+                </a:solidFill>
+                <a:latin typeface="Arial"/>
+              </a:rPr>
+              <a:t>▸  Keine einschränkenden Bedingungen</a:t>
+            </a:r>
+          </a:p>
+          <a:p>
+            <a:pPr>
+              <a:spcBef>
+                <a:spcPts val="400"/>
+              </a:spcBef>
+              <a:spcAft>
+                <a:spcPts val="200"/>
+              </a:spcAft>
+            </a:pPr>
+            <a:r>
+              <a:rPr sz="1300">
+                <a:solidFill>
+                  <a:srgbClr val="3D5466"/>
+                </a:solidFill>
+                <a:latin typeface="Arial"/>
+              </a:rPr>
+              <a:t>▸  Dokumentation: Kreditausschuss-Beschluss, Krediturkunde</a:t>
+            </a:r>
+          </a:p>
+          <a:p>
+            <a:pPr>
+              <a:spcBef>
+                <a:spcPts val="400"/>
+              </a:spcBef>
+              <a:spcAft>
+                <a:spcPts val="200"/>
+              </a:spcAft>
+            </a:pPr>
+            <a:r>
+              <a:rPr sz="1200">
+                <a:solidFill>
+                  <a:srgbClr val="3D5466"/>
+                </a:solidFill>
+                <a:latin typeface="Arial"/>
+              </a:rPr>
+              <a:t>Entscheidung 2: ZUSAGE MIT AUFLAGEN</a:t>
+            </a:r>
+          </a:p>
+          <a:p>
+            <a:pPr>
+              <a:spcBef>
+                <a:spcPts val="400"/>
+              </a:spcBef>
+              <a:spcAft>
+                <a:spcPts val="200"/>
+              </a:spcAft>
+            </a:pPr>
+            <a:r>
+              <a:rPr sz="1300">
+                <a:solidFill>
+                  <a:srgbClr val="3D5466"/>
+                </a:solidFill>
+                <a:latin typeface="Arial"/>
+              </a:rPr>
+              <a:t>▸  Einzelne Felder mit Risiken, die durch Auflagen mitigierbar sind</a:t>
+            </a:r>
+          </a:p>
+          <a:p>
+            <a:pPr>
+              <a:spcBef>
+                <a:spcPts val="400"/>
+              </a:spcBef>
+              <a:spcAft>
+                <a:spcPts val="200"/>
+              </a:spcAft>
+            </a:pPr>
+            <a:r>
+              <a:rPr sz="1300">
+                <a:solidFill>
+                  <a:srgbClr val="3D5466"/>
+                </a:solidFill>
+                <a:latin typeface="Arial"/>
+              </a:rPr>
+              <a:t>▸  Auflagen müssen SMART formuliert sein (Spezifisch, Messbar, Akzeptabel, Realistisch, Terminiert)</a:t>
+            </a:r>
+          </a:p>
+          <a:p>
+            <a:pPr>
+              <a:spcBef>
+                <a:spcPts val="400"/>
+              </a:spcBef>
+              <a:spcAft>
+                <a:spcPts val="200"/>
+              </a:spcAft>
+            </a:pPr>
+            <a:r>
+              <a:rPr sz="1300">
+                <a:solidFill>
+                  <a:srgbClr val="3D5466"/>
+                </a:solidFill>
+                <a:latin typeface="Arial"/>
+              </a:rPr>
+              <a:t>▸  Beispiel: „EK-Quote muss innerhalb von 24 Monaten auf ≥ 23 % steigen; Nachweis quartalsweise."</a:t>
+            </a:r>
+          </a:p>
+        </p:txBody>
+      </p:sp>
+      <p:sp>
+        <p:nvSpPr>
+          <p:cNvPr id="9" name="Rectangle 8"/>
           <p:cNvSpPr/>
           <p:nvPr/>
         </p:nvSpPr>
@@ -10510,7 +11033,7 @@
       </p:sp>
       <p:sp>
         <p:nvSpPr>
-          <p:cNvPr id="9" name="TextBox 8"/>
+          <p:cNvPr id="10" name="TextBox 9"/>
           <p:cNvSpPr txBox="1"/>
           <p:nvPr/>
         </p:nvSpPr>
@@ -10539,41 +11062,6 @@
                 <a:latin typeface="JetBrains Mono"/>
               </a:rPr>
               <a:t>Benedikt Zoller Coaching  ·  FKB Campus  ·  M21</a:t>
-            </a:r>
-          </a:p>
-        </p:txBody>
-      </p:sp>
-      <p:sp>
-        <p:nvSpPr>
-          <p:cNvPr id="10" name="TextBox 9"/>
-          <p:cNvSpPr txBox="1"/>
-          <p:nvPr/>
-        </p:nvSpPr>
-        <p:spPr>
-          <a:xfrm>
-            <a:off x="7176211" y="6583680"/>
-            <a:ext cx="4326940" cy="256032"/>
-          </a:xfrm>
-          <a:prstGeom prst="rect">
-            <a:avLst/>
-          </a:prstGeom>
-          <a:noFill/>
-        </p:spPr>
-        <p:txBody>
-          <a:bodyPr wrap="none">
-            <a:spAutoFit/>
-          </a:bodyPr>
-          <a:lstStyle/>
-          <a:p>
-            <a:pPr algn="r"/>
-            <a:r>
-              <a:rPr sz="700">
-                <a:solidFill>
-                  <a:srgbClr val="A0B4D2"/>
-                </a:solidFill>
-                <a:latin typeface="JetBrains Mono"/>
-              </a:rPr>
-              <a:t>Schaubild</a:t>
             </a:r>
           </a:p>
         </p:txBody>
@@ -10611,7 +11099,7 @@
             <a:avLst/>
           </a:prstGeom>
           <a:solidFill>
-            <a:srgbClr val="EDEDF3"/>
+            <a:srgbClr val="FFFFFF"/>
           </a:solidFill>
           <a:ln>
             <a:noFill/>
@@ -10712,51 +11200,43 @@
                 </a:solidFill>
                 <a:latin typeface="JetBrains Mono"/>
               </a:rPr>
-              <a:t>M21  ·  INHALT</a:t>
-            </a:r>
-          </a:p>
-        </p:txBody>
-      </p:sp>
-      <p:sp>
-        <p:nvSpPr>
-          <p:cNvPr id="5" name="Rectangle 4"/>
-          <p:cNvSpPr/>
-          <p:nvPr/>
-        </p:nvSpPr>
-        <p:spPr>
-          <a:xfrm>
-            <a:off x="0" y="1234440"/>
-            <a:ext cx="12188952" cy="12700"/>
-          </a:xfrm>
-          <a:prstGeom prst="rect">
-            <a:avLst/>
-          </a:prstGeom>
-          <a:solidFill>
-            <a:srgbClr val="D8DFE4"/>
-          </a:solidFill>
-          <a:ln>
-            <a:noFill/>
-          </a:ln>
-        </p:spPr>
-        <p:style>
-          <a:lnRef idx="1">
-            <a:schemeClr val="accent1"/>
-          </a:lnRef>
-          <a:fillRef idx="3">
-            <a:schemeClr val="accent1"/>
-          </a:fillRef>
-          <a:effectRef idx="2">
-            <a:schemeClr val="accent1"/>
-          </a:effectRef>
-          <a:fontRef idx="minor">
-            <a:schemeClr val="lt1"/>
-          </a:fontRef>
-        </p:style>
-        <p:txBody>
-          <a:bodyPr rtlCol="0" anchor="ctr"/>
-          <a:lstStyle/>
-          <a:p>
-            <a:pPr algn="ctr"/>
+              <a:t>M21  ·  SCHAUBILD</a:t>
+            </a:r>
+          </a:p>
+        </p:txBody>
+      </p:sp>
+      <p:sp>
+        <p:nvSpPr>
+          <p:cNvPr id="5" name="TextBox 4"/>
+          <p:cNvSpPr txBox="1"/>
+          <p:nvPr/>
+        </p:nvSpPr>
+        <p:spPr>
+          <a:xfrm>
+            <a:off x="685800" y="502920"/>
+            <a:ext cx="10817352" cy="594360"/>
+          </a:xfrm>
+          <a:prstGeom prst="rect">
+            <a:avLst/>
+          </a:prstGeom>
+          <a:noFill/>
+        </p:spPr>
+        <p:txBody>
+          <a:bodyPr wrap="square">
+            <a:spAutoFit/>
+          </a:bodyPr>
+          <a:lstStyle/>
+          <a:p>
+            <a:pPr algn="l"/>
+            <a:r>
+              <a:rPr sz="2000" b="1" i="0">
+                <a:solidFill>
+                  <a:srgbClr val="1F2C56"/>
+                </a:solidFill>
+                <a:latin typeface="Source Serif 4"/>
+              </a:rPr>
+              <a:t>Zwei Denksysteme nach Kahneman</a:t>
+            </a:r>
           </a:p>
         </p:txBody>
       </p:sp>
@@ -10768,8 +11248,8 @@
         </p:nvSpPr>
         <p:spPr>
           <a:xfrm>
-            <a:off x="685800" y="502920"/>
-            <a:ext cx="36576" cy="658368"/>
+            <a:off x="685800" y="1143000"/>
+            <a:ext cx="10817352" cy="25400"/>
           </a:xfrm>
           <a:prstGeom prst="rect">
             <a:avLst/>
@@ -10803,181 +11283,33 @@
           </a:p>
         </p:txBody>
       </p:sp>
-      <p:sp>
-        <p:nvSpPr>
-          <p:cNvPr id="7" name="TextBox 6"/>
-          <p:cNvSpPr txBox="1"/>
-          <p:nvPr/>
-        </p:nvSpPr>
-        <p:spPr>
-          <a:xfrm>
-            <a:off x="813816" y="502920"/>
-            <a:ext cx="10634472" cy="685800"/>
-          </a:xfrm>
-          <a:prstGeom prst="rect">
-            <a:avLst/>
-          </a:prstGeom>
-          <a:noFill/>
-        </p:spPr>
-        <p:txBody>
-          <a:bodyPr wrap="square">
-            <a:spAutoFit/>
-          </a:bodyPr>
-          <a:lstStyle/>
-          <a:p>
-            <a:pPr algn="l"/>
-            <a:r>
-              <a:rPr sz="2400" b="1" i="0">
-                <a:solidFill>
-                  <a:srgbClr val="1F2C56"/>
-                </a:solidFill>
-                <a:latin typeface="Source Serif 4"/>
-              </a:rPr>
-              <a:t>Theorie-Input: Sicherheitenbewertung nach BelWertV</a:t>
-            </a:r>
-          </a:p>
-        </p:txBody>
-      </p:sp>
-      <p:sp>
-        <p:nvSpPr>
-          <p:cNvPr id="8" name="TextBox 7"/>
-          <p:cNvSpPr txBox="1"/>
-          <p:nvPr/>
-        </p:nvSpPr>
-        <p:spPr>
-          <a:xfrm>
-            <a:off x="685800" y="1417320"/>
-            <a:ext cx="10817352" cy="5029200"/>
-          </a:xfrm>
-          <a:prstGeom prst="rect">
-            <a:avLst/>
-          </a:prstGeom>
-          <a:noFill/>
-        </p:spPr>
-        <p:txBody>
-          <a:bodyPr wrap="square">
-            <a:spAutoFit/>
-          </a:bodyPr>
-          <a:lstStyle/>
-          <a:p>
-            <a:pPr>
-              <a:spcBef>
-                <a:spcPts val="400"/>
-              </a:spcBef>
-              <a:spcAft>
-                <a:spcPts val="200"/>
-              </a:spcAft>
-            </a:pPr>
-            <a:r>
-              <a:rPr sz="1200">
-                <a:solidFill>
-                  <a:srgbClr val="3D5466"/>
-                </a:solidFill>
-                <a:latin typeface="Arial"/>
-              </a:rPr>
-              <a:t>Grundpfandrechte auf Immobilien:</a:t>
-            </a:r>
-          </a:p>
-          <a:p>
-            <a:pPr>
-              <a:spcBef>
-                <a:spcPts val="400"/>
-              </a:spcBef>
-              <a:spcAft>
-                <a:spcPts val="200"/>
-              </a:spcAft>
-            </a:pPr>
-            <a:r>
-              <a:rPr sz="1300">
-                <a:solidFill>
-                  <a:srgbClr val="3D5466"/>
-                </a:solidFill>
-                <a:latin typeface="Arial"/>
-              </a:rPr>
-              <a:t>▸  Verkehrswert ermitteln (Gutachter oder Vergleichswerte)</a:t>
-            </a:r>
-          </a:p>
-          <a:p>
-            <a:pPr>
-              <a:spcBef>
-                <a:spcPts val="400"/>
-              </a:spcBef>
-              <a:spcAft>
-                <a:spcPts val="200"/>
-              </a:spcAft>
-            </a:pPr>
-            <a:r>
-              <a:rPr sz="1300">
-                <a:solidFill>
-                  <a:srgbClr val="3D5466"/>
-                </a:solidFill>
-                <a:latin typeface="Arial"/>
-              </a:rPr>
-              <a:t>▸  Abschlag von 20–30 % anwenden (je nach Marktvolatilität und Verwertbarkeit)</a:t>
-            </a:r>
-          </a:p>
-          <a:p>
-            <a:pPr>
-              <a:spcBef>
-                <a:spcPts val="400"/>
-              </a:spcBef>
-              <a:spcAft>
-                <a:spcPts val="200"/>
-              </a:spcAft>
-            </a:pPr>
-            <a:r>
-              <a:rPr sz="1300">
-                <a:solidFill>
-                  <a:srgbClr val="3D5466"/>
-                </a:solidFill>
-                <a:latin typeface="Arial"/>
-              </a:rPr>
-              <a:t>▸  Beleihungswert = ca. 60–70 % des Verkehrswerts</a:t>
-            </a:r>
-          </a:p>
-          <a:p>
-            <a:pPr>
-              <a:spcBef>
-                <a:spcPts val="400"/>
-              </a:spcBef>
-              <a:spcAft>
-                <a:spcPts val="200"/>
-              </a:spcAft>
-            </a:pPr>
-            <a:r>
-              <a:rPr sz="1200">
-                <a:solidFill>
-                  <a:srgbClr val="3D5466"/>
-                </a:solidFill>
-                <a:latin typeface="Arial"/>
-              </a:rPr>
-              <a:t>Rangfolge: Rang 1 hat volle Priorität. Rang 2 und 3 erhalten erst nach vollständiger Bedienung von Rang 1 Erlöse – dies kann im Verwertungsfall zu erheblichen Ausfällen führen.</a:t>
-            </a:r>
-          </a:p>
-          <a:p>
-            <a:pPr>
-              <a:spcBef>
-                <a:spcPts val="400"/>
-              </a:spcBef>
-              <a:spcAft>
-                <a:spcPts val="200"/>
-              </a:spcAft>
-            </a:pPr>
-            <a:r>
-              <a:rPr sz="1200">
-                <a:solidFill>
-                  <a:srgbClr val="3D5466"/>
-                </a:solidFill>
-                <a:latin typeface="Arial"/>
-              </a:rPr>
-              <a:t>Bewegliche Sicherheiten: Maschinen und Anlagen verlieren durch Spezialisierung, Betrieb und Marktlage schnell an Wert. Beleihungssatz 30–50 % des Buchwerts ist konservativ, aber realistisch.</a:t>
-            </a:r>
-          </a:p>
-        </p:txBody>
-      </p:sp>
-      <p:sp>
-        <p:nvSpPr>
-          <p:cNvPr id="9" name="Rectangle 8"/>
+      <p:pic>
+        <p:nvPicPr>
+          <p:cNvPr id="7" name="Picture 6" descr="image.png"/>
+          <p:cNvPicPr>
+            <a:picLocks noChangeAspect="1"/>
+          </p:cNvPicPr>
+          <p:nvPr/>
+        </p:nvPicPr>
+        <p:blipFill>
+          <a:blip r:embed="rId2"/>
+          <a:stretch>
+            <a:fillRect/>
+          </a:stretch>
+        </p:blipFill>
+        <p:spPr>
+          <a:xfrm>
+            <a:off x="2303489" y="1325880"/>
+            <a:ext cx="7581973" cy="4937760"/>
+          </a:xfrm>
+          <a:prstGeom prst="rect">
+            <a:avLst/>
+          </a:prstGeom>
+        </p:spPr>
+      </p:pic>
+      <p:sp>
+        <p:nvSpPr>
+          <p:cNvPr id="8" name="Rectangle 7"/>
           <p:cNvSpPr/>
           <p:nvPr/>
         </p:nvSpPr>
@@ -11020,7 +11352,7 @@
       </p:sp>
       <p:sp>
         <p:nvSpPr>
-          <p:cNvPr id="10" name="TextBox 9"/>
+          <p:cNvPr id="9" name="TextBox 8"/>
           <p:cNvSpPr txBox="1"/>
           <p:nvPr/>
         </p:nvSpPr>
@@ -11049,6 +11381,41 @@
                 <a:latin typeface="JetBrains Mono"/>
               </a:rPr>
               <a:t>Benedikt Zoller Coaching  ·  FKB Campus  ·  M21</a:t>
+            </a:r>
+          </a:p>
+        </p:txBody>
+      </p:sp>
+      <p:sp>
+        <p:nvSpPr>
+          <p:cNvPr id="10" name="TextBox 9"/>
+          <p:cNvSpPr txBox="1"/>
+          <p:nvPr/>
+        </p:nvSpPr>
+        <p:spPr>
+          <a:xfrm>
+            <a:off x="7176211" y="6583680"/>
+            <a:ext cx="4326940" cy="256032"/>
+          </a:xfrm>
+          <a:prstGeom prst="rect">
+            <a:avLst/>
+          </a:prstGeom>
+          <a:noFill/>
+        </p:spPr>
+        <p:txBody>
+          <a:bodyPr wrap="none">
+            <a:spAutoFit/>
+          </a:bodyPr>
+          <a:lstStyle/>
+          <a:p>
+            <a:pPr algn="r"/>
+            <a:r>
+              <a:rPr sz="700">
+                <a:solidFill>
+                  <a:srgbClr val="A0B4D2"/>
+                </a:solidFill>
+                <a:latin typeface="JetBrains Mono"/>
+              </a:rPr>
+              <a:t>Schaubild</a:t>
             </a:r>
           </a:p>
         </p:txBody>

--- a/protected-downloads/praesentation/M21.pptx
+++ b/protected-downloads/praesentation/M21.pptx
@@ -20,6 +20,11 @@
     <p:sldId id="268" r:id="rId20"/>
     <p:sldId id="269" r:id="rId21"/>
     <p:sldId id="270" r:id="rId22"/>
+    <p:sldId id="271" r:id="rId23"/>
+    <p:sldId id="272" r:id="rId24"/>
+    <p:sldId id="273" r:id="rId25"/>
+    <p:sldId id="274" r:id="rId26"/>
+    <p:sldId id="275" r:id="rId27"/>
   </p:sldIdLst>
   <p:sldSz cx="12188952" cy="6858000" type="screen4x3"/>
   <p:notesSz cx="6858000" cy="9144000"/>
@@ -516,7 +521,7 @@
           <a:lstStyle/>
           <a:p>
             <a:r>
-              <a:t>Agenda-Überblick. Timing und Pausen siehe Ablaufplan im Trainerhandbuch (Sektion 3).</a:t>
+              <a:t>Agenda aus dem Ablaufplan (Sektion 3.1). Timing und Pausen siehe Trainerhandbuch.</a:t>
             </a:r>
           </a:p>
         </p:txBody>
@@ -4994,7 +4999,7 @@
                 </a:solidFill>
                 <a:latin typeface="Source Serif 4"/>
               </a:rPr>
-              <a:t>Theorie-Input: Sicherheitenbewertung nach BelWertV</a:t>
+              <a:t>Theorie-Input: Von der Analyse zur Entscheidungsvorlage</a:t>
             </a:r>
           </a:p>
         </p:txBody>
@@ -5020,6 +5025,25 @@
             <a:spAutoFit/>
           </a:bodyPr>
           <a:lstStyle/>
+          <a:p>
+            <a:pPr>
+              <a:spcBef>
+                <a:spcPts val="1000"/>
+              </a:spcBef>
+              <a:spcAft>
+                <a:spcPts val="200"/>
+              </a:spcAft>
+            </a:pPr>
+            <a:r>
+              <a:rPr sz="800" b="1">
+                <a:solidFill>
+                  <a:srgbClr val="78808C"/>
+                </a:solidFill>
+                <a:latin typeface="JetBrains Mono"/>
+              </a:rPr>
+              <a:t>4.2.1 STRUKTUR EINER KREDITVORLAGE NACH MARISK BTO 1.1</a:t>
+            </a:r>
+          </a:p>
           <a:p>
             <a:pPr>
               <a:spcBef>
@@ -5030,13 +5054,13 @@
               </a:spcAft>
             </a:pPr>
             <a:r>
-              <a:rPr sz="1200">
+              <a:rPr sz="1300">
                 <a:solidFill>
                   <a:srgbClr val="3D5466"/>
                 </a:solidFill>
                 <a:latin typeface="Arial"/>
               </a:rPr>
-              <a:t>Grundpfandrechte auf Immobilien:</a:t>
+              <a:t>▸  Eine bankinterne Kreditvorlage muss nach MaRisk BTO 1.1 (Bundesanstalt für Finanzdienstleistungsaufsicht, 2023 ) folgende Elemente enthalten:</a:t>
             </a:r>
           </a:p>
           <a:p>
@@ -5055,7 +5079,26 @@
                 </a:solidFill>
                 <a:latin typeface="Arial"/>
               </a:rPr>
-              <a:t>▸  Verkehrswert ermitteln (Gutachter oder Vergleichswerte)</a:t>
+              <a:t>▸  Gesamtumfang: 12–20 Seiten (je nach Komplexität)</a:t>
+            </a:r>
+          </a:p>
+          <a:p>
+            <a:pPr>
+              <a:spcBef>
+                <a:spcPts val="1000"/>
+              </a:spcBef>
+              <a:spcAft>
+                <a:spcPts val="200"/>
+              </a:spcAft>
+            </a:pPr>
+            <a:r>
+              <a:rPr sz="800" b="1">
+                <a:solidFill>
+                  <a:srgbClr val="78808C"/>
+                </a:solidFill>
+                <a:latin typeface="JetBrains Mono"/>
+              </a:rPr>
+              <a:t>4.2.2 DIE DREI ENTSCHEIDUNGSERGEBNISSE</a:t>
             </a:r>
           </a:p>
           <a:p>
@@ -5074,7 +5117,7 @@
                 </a:solidFill>
                 <a:latin typeface="Arial"/>
               </a:rPr>
-              <a:t>▸  Abschlag von 20–30 % anwenden (je nach Marktvolatilität und Verwertbarkeit)</a:t>
+              <a:t>▸  Entscheidung 1: ZUSAGE</a:t>
             </a:r>
           </a:p>
           <a:p>
@@ -5093,7 +5136,7 @@
                 </a:solidFill>
                 <a:latin typeface="Arial"/>
               </a:rPr>
-              <a:t>▸  Beleihungswert = ca. 60–70 % des Verkehrswerts</a:t>
+              <a:t>▸  Alle 8 Felder positiv oder neutral</a:t>
             </a:r>
           </a:p>
           <a:p>
@@ -5106,13 +5149,13 @@
               </a:spcAft>
             </a:pPr>
             <a:r>
-              <a:rPr sz="1200">
+              <a:rPr sz="1300">
                 <a:solidFill>
                   <a:srgbClr val="3D5466"/>
                 </a:solidFill>
                 <a:latin typeface="Arial"/>
               </a:rPr>
-              <a:t>Rangfolge: Rang 1 hat volle Priorität. Rang 2 und 3 erhalten erst nach vollständiger Bedienung von Rang 1 Erlöse – dies kann im Verwertungsfall zu erheblichen Ausfällen führen.</a:t>
+              <a:t>▸  Keine einschränkenden Bedingungen</a:t>
             </a:r>
           </a:p>
           <a:p>
@@ -5125,13 +5168,89 @@
               </a:spcAft>
             </a:pPr>
             <a:r>
-              <a:rPr sz="1200">
+              <a:rPr sz="1300">
                 <a:solidFill>
                   <a:srgbClr val="3D5466"/>
                 </a:solidFill>
                 <a:latin typeface="Arial"/>
               </a:rPr>
-              <a:t>Bewegliche Sicherheiten: Maschinen und Anlagen verlieren durch Spezialisierung, Betrieb und Marktlage schnell an Wert. Beleihungssatz 30–50 % des Buchwerts ist konservativ, aber realistisch.</a:t>
+              <a:t>▸  Dokumentation: Kreditausschuss-Beschluss, Krediturkunde</a:t>
+            </a:r>
+          </a:p>
+          <a:p>
+            <a:pPr>
+              <a:spcBef>
+                <a:spcPts val="400"/>
+              </a:spcBef>
+              <a:spcAft>
+                <a:spcPts val="200"/>
+              </a:spcAft>
+            </a:pPr>
+            <a:r>
+              <a:rPr sz="1300">
+                <a:solidFill>
+                  <a:srgbClr val="3D5466"/>
+                </a:solidFill>
+                <a:latin typeface="Arial"/>
+              </a:rPr>
+              <a:t>▸  Entscheidung 2: ZUSAGE MIT AUFLAGEN</a:t>
+            </a:r>
+          </a:p>
+          <a:p>
+            <a:pPr>
+              <a:spcBef>
+                <a:spcPts val="400"/>
+              </a:spcBef>
+              <a:spcAft>
+                <a:spcPts val="200"/>
+              </a:spcAft>
+            </a:pPr>
+            <a:r>
+              <a:rPr sz="1300">
+                <a:solidFill>
+                  <a:srgbClr val="3D5466"/>
+                </a:solidFill>
+                <a:latin typeface="Arial"/>
+              </a:rPr>
+              <a:t>▸  Einzelne Felder mit Risiken, die durch Auflagen mitigierbar sind</a:t>
+            </a:r>
+          </a:p>
+          <a:p>
+            <a:pPr>
+              <a:spcBef>
+                <a:spcPts val="400"/>
+              </a:spcBef>
+              <a:spcAft>
+                <a:spcPts val="200"/>
+              </a:spcAft>
+            </a:pPr>
+            <a:r>
+              <a:rPr sz="1300">
+                <a:solidFill>
+                  <a:srgbClr val="3D5466"/>
+                </a:solidFill>
+                <a:latin typeface="Arial"/>
+              </a:rPr>
+              <a:t>▸  Auflagen müssen SMART formuliert sein (Spezifisch, Messbar, Akzeptabel, Realistisch, Terminiert)</a:t>
+            </a:r>
+          </a:p>
+          <a:p>
+            <a:pPr>
+              <a:spcBef>
+                <a:spcPts val="400"/>
+              </a:spcBef>
+              <a:spcAft>
+                <a:spcPts val="200"/>
+              </a:spcAft>
+            </a:pPr>
+            <a:r>
+              <a:rPr sz="1300">
+                <a:solidFill>
+                  <a:srgbClr val="3D5466"/>
+                </a:solidFill>
+                <a:latin typeface="Arial"/>
+              </a:rPr>
+              <a:t>▸  Beispiel: „EK-Quote muss innerhalb von 24 Monaten auf ≥ 23 % steigen; Nachweis quartalsweise."</a:t>
             </a:r>
           </a:p>
         </p:txBody>
@@ -5247,7 +5366,7 @@
             <a:avLst/>
           </a:prstGeom>
           <a:solidFill>
-            <a:srgbClr val="EDEDF3"/>
+            <a:srgbClr val="FFFFFF"/>
           </a:solidFill>
           <a:ln>
             <a:noFill/>
@@ -5348,51 +5467,43 @@
                 </a:solidFill>
                 <a:latin typeface="JetBrains Mono"/>
               </a:rPr>
-              <a:t>M21  ·  INHALT</a:t>
-            </a:r>
-          </a:p>
-        </p:txBody>
-      </p:sp>
-      <p:sp>
-        <p:nvSpPr>
-          <p:cNvPr id="5" name="Rectangle 4"/>
-          <p:cNvSpPr/>
-          <p:nvPr/>
-        </p:nvSpPr>
-        <p:spPr>
-          <a:xfrm>
-            <a:off x="0" y="1234440"/>
-            <a:ext cx="12188952" cy="12700"/>
-          </a:xfrm>
-          <a:prstGeom prst="rect">
-            <a:avLst/>
-          </a:prstGeom>
-          <a:solidFill>
-            <a:srgbClr val="D8DFE4"/>
-          </a:solidFill>
-          <a:ln>
-            <a:noFill/>
-          </a:ln>
-        </p:spPr>
-        <p:style>
-          <a:lnRef idx="1">
-            <a:schemeClr val="accent1"/>
-          </a:lnRef>
-          <a:fillRef idx="3">
-            <a:schemeClr val="accent1"/>
-          </a:fillRef>
-          <a:effectRef idx="2">
-            <a:schemeClr val="accent1"/>
-          </a:effectRef>
-          <a:fontRef idx="minor">
-            <a:schemeClr val="lt1"/>
-          </a:fontRef>
-        </p:style>
-        <p:txBody>
-          <a:bodyPr rtlCol="0" anchor="ctr"/>
-          <a:lstStyle/>
-          <a:p>
-            <a:pPr algn="ctr"/>
+              <a:t>M21  ·  SCHAUBILD</a:t>
+            </a:r>
+          </a:p>
+        </p:txBody>
+      </p:sp>
+      <p:sp>
+        <p:nvSpPr>
+          <p:cNvPr id="5" name="TextBox 4"/>
+          <p:cNvSpPr txBox="1"/>
+          <p:nvPr/>
+        </p:nvSpPr>
+        <p:spPr>
+          <a:xfrm>
+            <a:off x="685800" y="502920"/>
+            <a:ext cx="10817352" cy="594360"/>
+          </a:xfrm>
+          <a:prstGeom prst="rect">
+            <a:avLst/>
+          </a:prstGeom>
+          <a:noFill/>
+        </p:spPr>
+        <p:txBody>
+          <a:bodyPr wrap="square">
+            <a:spAutoFit/>
+          </a:bodyPr>
+          <a:lstStyle/>
+          <a:p>
+            <a:pPr algn="l"/>
+            <a:r>
+              <a:rPr sz="2000" b="1" i="0">
+                <a:solidFill>
+                  <a:srgbClr val="1F2C56"/>
+                </a:solidFill>
+                <a:latin typeface="Source Serif 4"/>
+              </a:rPr>
+              <a:t>Zwei Denksysteme nach Kahneman</a:t>
+            </a:r>
           </a:p>
         </p:txBody>
       </p:sp>
@@ -5404,8 +5515,8 @@
         </p:nvSpPr>
         <p:spPr>
           <a:xfrm>
-            <a:off x="685800" y="502920"/>
-            <a:ext cx="36576" cy="658368"/>
+            <a:off x="685800" y="1143000"/>
+            <a:ext cx="10817352" cy="25400"/>
           </a:xfrm>
           <a:prstGeom prst="rect">
             <a:avLst/>
@@ -5439,295 +5550,33 @@
           </a:p>
         </p:txBody>
       </p:sp>
-      <p:sp>
-        <p:nvSpPr>
-          <p:cNvPr id="7" name="TextBox 6"/>
-          <p:cNvSpPr txBox="1"/>
-          <p:nvPr/>
-        </p:nvSpPr>
-        <p:spPr>
-          <a:xfrm>
-            <a:off x="813816" y="502920"/>
-            <a:ext cx="10634472" cy="685800"/>
-          </a:xfrm>
-          <a:prstGeom prst="rect">
-            <a:avLst/>
-          </a:prstGeom>
-          <a:noFill/>
-        </p:spPr>
-        <p:txBody>
-          <a:bodyPr wrap="square">
-            <a:spAutoFit/>
-          </a:bodyPr>
-          <a:lstStyle/>
-          <a:p>
-            <a:pPr algn="l"/>
-            <a:r>
-              <a:rPr sz="2400" b="1" i="0">
-                <a:solidFill>
-                  <a:srgbClr val="1F2C56"/>
-                </a:solidFill>
-                <a:latin typeface="Source Serif 4"/>
-              </a:rPr>
-              <a:t>4.3a Sicherheitenbewertung im Alltag</a:t>
-            </a:r>
-          </a:p>
-        </p:txBody>
-      </p:sp>
-      <p:sp>
-        <p:nvSpPr>
-          <p:cNvPr id="8" name="TextBox 7"/>
-          <p:cNvSpPr txBox="1"/>
-          <p:nvPr/>
-        </p:nvSpPr>
-        <p:spPr>
-          <a:xfrm>
-            <a:off x="685800" y="1417320"/>
-            <a:ext cx="10817352" cy="5029200"/>
-          </a:xfrm>
-          <a:prstGeom prst="rect">
-            <a:avLst/>
-          </a:prstGeom>
-          <a:noFill/>
-        </p:spPr>
-        <p:txBody>
-          <a:bodyPr wrap="square">
-            <a:spAutoFit/>
-          </a:bodyPr>
-          <a:lstStyle/>
-          <a:p>
-            <a:pPr>
-              <a:spcBef>
-                <a:spcPts val="400"/>
-              </a:spcBef>
-              <a:spcAft>
-                <a:spcPts val="200"/>
-              </a:spcAft>
-            </a:pPr>
-            <a:r>
-              <a:rPr sz="1200">
-                <a:solidFill>
-                  <a:srgbClr val="3D5466"/>
-                </a:solidFill>
-                <a:latin typeface="Arial"/>
-              </a:rPr>
-              <a:t>Die BelWertV-Theorie ist eine Sache – der Alltag stellt andere Fragen:</a:t>
-            </a:r>
-          </a:p>
-          <a:p>
-            <a:pPr>
-              <a:spcBef>
-                <a:spcPts val="400"/>
-              </a:spcBef>
-              <a:spcAft>
-                <a:spcPts val="200"/>
-              </a:spcAft>
-            </a:pPr>
-            <a:r>
-              <a:rPr sz="1200">
-                <a:solidFill>
-                  <a:srgbClr val="3D5466"/>
-                </a:solidFill>
-                <a:latin typeface="Arial"/>
-              </a:rPr>
-              <a:t>Wann ist ein aktuelles Gutachten Pflicht?</a:t>
-            </a:r>
-          </a:p>
-          <a:p>
-            <a:pPr>
-              <a:spcBef>
-                <a:spcPts val="400"/>
-              </a:spcBef>
-              <a:spcAft>
-                <a:spcPts val="200"/>
-              </a:spcAft>
-            </a:pPr>
-            <a:r>
-              <a:rPr sz="1300">
-                <a:solidFill>
-                  <a:srgbClr val="3D5466"/>
-                </a:solidFill>
-                <a:latin typeface="Arial"/>
-              </a:rPr>
-              <a:t>▸  Bei Erstverpfändung einer Immobilie und Krediten typischerweise ab 150.000–300 T€ (bankindividuell – Grenze mit Marktfolge klären)</a:t>
-            </a:r>
-          </a:p>
-          <a:p>
-            <a:pPr>
-              <a:spcBef>
-                <a:spcPts val="400"/>
-              </a:spcBef>
-              <a:spcAft>
-                <a:spcPts val="200"/>
-              </a:spcAft>
-            </a:pPr>
-            <a:r>
-              <a:rPr sz="1300">
-                <a:solidFill>
-                  <a:srgbClr val="3D5466"/>
-                </a:solidFill>
-                <a:latin typeface="Arial"/>
-              </a:rPr>
-              <a:t>▸  Bei wesentlicher Wertveränderung (Umbau, Schaden, Marktveränderung)</a:t>
-            </a:r>
-          </a:p>
-          <a:p>
-            <a:pPr>
-              <a:spcBef>
-                <a:spcPts val="400"/>
-              </a:spcBef>
-              <a:spcAft>
-                <a:spcPts val="200"/>
-              </a:spcAft>
-            </a:pPr>
-            <a:r>
-              <a:rPr sz="1300">
-                <a:solidFill>
-                  <a:srgbClr val="3D5466"/>
-                </a:solidFill>
-                <a:latin typeface="Arial"/>
-              </a:rPr>
-              <a:t>▸  Bei Verlängerung mit mehr als 5 Jahren ohne zwischenzeitliches Update</a:t>
-            </a:r>
-          </a:p>
-          <a:p>
-            <a:pPr>
-              <a:spcBef>
-                <a:spcPts val="400"/>
-              </a:spcBef>
-              <a:spcAft>
-                <a:spcPts val="200"/>
-              </a:spcAft>
-            </a:pPr>
-            <a:r>
-              <a:rPr sz="1200">
-                <a:solidFill>
-                  <a:srgbClr val="3D5466"/>
-                </a:solidFill>
-                <a:latin typeface="Arial"/>
-              </a:rPr>
-              <a:t>Wann reicht eine Plausibilisierung?</a:t>
-            </a:r>
-          </a:p>
-          <a:p>
-            <a:pPr>
-              <a:spcBef>
-                <a:spcPts val="400"/>
-              </a:spcBef>
-              <a:spcAft>
-                <a:spcPts val="200"/>
-              </a:spcAft>
-            </a:pPr>
-            <a:r>
-              <a:rPr sz="1300">
-                <a:solidFill>
-                  <a:srgbClr val="3D5466"/>
-                </a:solidFill>
-                <a:latin typeface="Arial"/>
-              </a:rPr>
-              <a:t>▸  Bei kleinen Beträgen und gut bekannten Objekten kann der Berater eine Marktplausibilisierung vornehmen (Vergleichspreise Onlineportale, Gespräch mit lokalem Makler)</a:t>
-            </a:r>
-          </a:p>
-          <a:p>
-            <a:pPr>
-              <a:spcBef>
-                <a:spcPts val="400"/>
-              </a:spcBef>
-              <a:spcAft>
-                <a:spcPts val="200"/>
-              </a:spcAft>
-            </a:pPr>
-            <a:r>
-              <a:rPr sz="1300">
-                <a:solidFill>
-                  <a:srgbClr val="3D5466"/>
-                </a:solidFill>
-                <a:latin typeface="Arial"/>
-              </a:rPr>
-              <a:t>▸  Diese Schätzung muss dokumentiert und dem Kreditbeschluss beigefügt werden</a:t>
-            </a:r>
-          </a:p>
-          <a:p>
-            <a:pPr>
-              <a:spcBef>
-                <a:spcPts val="400"/>
-              </a:spcBef>
-              <a:spcAft>
-                <a:spcPts val="200"/>
-              </a:spcAft>
-            </a:pPr>
-            <a:r>
-              <a:rPr sz="1200">
-                <a:solidFill>
-                  <a:srgbClr val="3D5466"/>
-                </a:solidFill>
-                <a:latin typeface="Arial"/>
-              </a:rPr>
-              <a:t>Alte Gutachten – Faustregel:</a:t>
-            </a:r>
-          </a:p>
-          <a:p>
-            <a:pPr>
-              <a:spcBef>
-                <a:spcPts val="400"/>
-              </a:spcBef>
-              <a:spcAft>
-                <a:spcPts val="200"/>
-              </a:spcAft>
-            </a:pPr>
-            <a:r>
-              <a:rPr sz="1300">
-                <a:solidFill>
-                  <a:srgbClr val="3D5466"/>
-                </a:solidFill>
-                <a:latin typeface="Arial"/>
-              </a:rPr>
-              <a:t>▸  Gutachten älter als 3 Jahre: Abschlag von 10–20 % auf den damaligen Wert je nach Marktentwicklung</a:t>
-            </a:r>
-          </a:p>
-          <a:p>
-            <a:pPr>
-              <a:spcBef>
-                <a:spcPts val="400"/>
-              </a:spcBef>
-              <a:spcAft>
-                <a:spcPts val="200"/>
-              </a:spcAft>
-            </a:pPr>
-            <a:r>
-              <a:rPr sz="1300">
-                <a:solidFill>
-                  <a:srgbClr val="3D5466"/>
-                </a:solidFill>
-                <a:latin typeface="Arial"/>
-              </a:rPr>
-              <a:t>▸  Gutachten älter als 5 Jahre: Neugutachten oder erheblicher konservativer Abschlag empfohlen</a:t>
-            </a:r>
-          </a:p>
-          <a:p>
-            <a:pPr>
-              <a:spcBef>
-                <a:spcPts val="400"/>
-              </a:spcBef>
-              <a:spcAft>
-                <a:spcPts val="200"/>
-              </a:spcAft>
-            </a:pPr>
-            <a:r>
-              <a:rPr sz="1300">
-                <a:solidFill>
-                  <a:srgbClr val="3D5466"/>
-                </a:solidFill>
-                <a:latin typeface="Arial"/>
-              </a:rPr>
-              <a:t>▸  Bei Gewerbeimmobilien: Marktentwicklung oft volatiler als bei Wohnimmobilien – früher erneuern</a:t>
-            </a:r>
-          </a:p>
-        </p:txBody>
-      </p:sp>
-      <p:sp>
-        <p:nvSpPr>
-          <p:cNvPr id="9" name="Rectangle 8"/>
+      <p:pic>
+        <p:nvPicPr>
+          <p:cNvPr id="7" name="Picture 6" descr="image.png"/>
+          <p:cNvPicPr>
+            <a:picLocks noChangeAspect="1"/>
+          </p:cNvPicPr>
+          <p:nvPr/>
+        </p:nvPicPr>
+        <p:blipFill>
+          <a:blip r:embed="rId2"/>
+          <a:stretch>
+            <a:fillRect/>
+          </a:stretch>
+        </p:blipFill>
+        <p:spPr>
+          <a:xfrm>
+            <a:off x="2303489" y="1325880"/>
+            <a:ext cx="7581973" cy="4937760"/>
+          </a:xfrm>
+          <a:prstGeom prst="rect">
+            <a:avLst/>
+          </a:prstGeom>
+        </p:spPr>
+      </p:pic>
+      <p:sp>
+        <p:nvSpPr>
+          <p:cNvPr id="8" name="Rectangle 7"/>
           <p:cNvSpPr/>
           <p:nvPr/>
         </p:nvSpPr>
@@ -5770,7 +5619,7 @@
       </p:sp>
       <p:sp>
         <p:nvSpPr>
-          <p:cNvPr id="10" name="TextBox 9"/>
+          <p:cNvPr id="9" name="TextBox 8"/>
           <p:cNvSpPr txBox="1"/>
           <p:nvPr/>
         </p:nvSpPr>
@@ -5799,6 +5648,41 @@
                 <a:latin typeface="JetBrains Mono"/>
               </a:rPr>
               <a:t>Benedikt Zoller Coaching  ·  FKB Campus  ·  M21</a:t>
+            </a:r>
+          </a:p>
+        </p:txBody>
+      </p:sp>
+      <p:sp>
+        <p:nvSpPr>
+          <p:cNvPr id="10" name="TextBox 9"/>
+          <p:cNvSpPr txBox="1"/>
+          <p:nvPr/>
+        </p:nvSpPr>
+        <p:spPr>
+          <a:xfrm>
+            <a:off x="7176211" y="6583680"/>
+            <a:ext cx="4326940" cy="256032"/>
+          </a:xfrm>
+          <a:prstGeom prst="rect">
+            <a:avLst/>
+          </a:prstGeom>
+          <a:noFill/>
+        </p:spPr>
+        <p:txBody>
+          <a:bodyPr wrap="none">
+            <a:spAutoFit/>
+          </a:bodyPr>
+          <a:lstStyle/>
+          <a:p>
+            <a:pPr algn="r"/>
+            <a:r>
+              <a:rPr sz="700">
+                <a:solidFill>
+                  <a:srgbClr val="A0B4D2"/>
+                </a:solidFill>
+                <a:latin typeface="JetBrains Mono"/>
+              </a:rPr>
+              <a:t>Schaubild</a:t>
             </a:r>
           </a:p>
         </p:txBody>
@@ -6058,7 +5942,7 @@
                 </a:solidFill>
                 <a:latin typeface="Source Serif 4"/>
               </a:rPr>
-              <a:t>4.3b Betriebsmittelkredite und Kontokorrent: Kurzfall</a:t>
+              <a:t>Theorie-Input: Sicherheitenbewertung nach BelWertV</a:t>
             </a:r>
           </a:p>
         </p:txBody>
@@ -6094,13 +5978,13 @@
               </a:spcAft>
             </a:pPr>
             <a:r>
-              <a:rPr sz="1200">
+              <a:rPr sz="1300">
                 <a:solidFill>
                   <a:srgbClr val="3D5466"/>
                 </a:solidFill>
                 <a:latin typeface="Arial"/>
               </a:rPr>
-              <a:t>Nicht alle Kreditentscheidungen sind langfristige Investitionskredite. Häufiger Alltag: KK-Linie läuft an ihre Grenze oder wird regelmäßig überzogen.</a:t>
+              <a:t>▸  Grundpfandrechte auf Immobilien:</a:t>
             </a:r>
           </a:p>
           <a:p>
@@ -6113,13 +5997,13 @@
               </a:spcAft>
             </a:pPr>
             <a:r>
-              <a:rPr sz="1200">
+              <a:rPr sz="1300">
                 <a:solidFill>
                   <a:srgbClr val="3D5466"/>
                 </a:solidFill>
                 <a:latin typeface="Arial"/>
               </a:rPr>
-              <a:t>Kurzfall: Bäckerei Weber KG, Überzug KK-Linie</a:t>
+              <a:t>▸  Verkehrswert ermitteln (Gutachter oder Vergleichswerte)</a:t>
             </a:r>
           </a:p>
           <a:p>
@@ -6132,13 +6016,13 @@
               </a:spcAft>
             </a:pPr>
             <a:r>
-              <a:rPr sz="1200">
+              <a:rPr sz="1300">
                 <a:solidFill>
                   <a:srgbClr val="3D5466"/>
                 </a:solidFill>
                 <a:latin typeface="Arial"/>
               </a:rPr>
-              <a:t>Beraterin Schmidt stellt fest: Bäckerei Weber KG, Linie 80.000 €, seit 6 Wochen durchgehend bei 95–100 % ausgelastet, in einer Woche zweimal kurz drüber.</a:t>
+              <a:t>▸  Abschlag von 20–30 % anwenden (je nach Marktvolatilität und Verwertbarkeit)</a:t>
             </a:r>
           </a:p>
           <a:p>
@@ -6151,13 +6035,13 @@
               </a:spcAft>
             </a:pPr>
             <a:r>
-              <a:rPr sz="1200">
+              <a:rPr sz="1300">
                 <a:solidFill>
                   <a:srgbClr val="3D5466"/>
                 </a:solidFill>
                 <a:latin typeface="Arial"/>
               </a:rPr>
-              <a:t>Analysefragen für Kontokorrent:</a:t>
+              <a:t>▸  Beleihungswert = ca. 60–70 % des Verkehrswerts</a:t>
             </a:r>
           </a:p>
           <a:p>
@@ -6170,13 +6054,13 @@
               </a:spcAft>
             </a:pPr>
             <a:r>
-              <a:rPr sz="1200">
+              <a:rPr sz="1300">
                 <a:solidFill>
                   <a:srgbClr val="3D5466"/>
                 </a:solidFill>
                 <a:latin typeface="Arial"/>
               </a:rPr>
-              <a:t>Mögliche Entscheidungen:</a:t>
+              <a:t>▸  Rangfolge: Rang 1 hat volle Priorität. Rang 2 und 3 erhalten erst nach vollständiger Bedienung von Rang 1 Erlöse – dies kann im Verwertungsfall zu erheblichen Ausfällen führen.</a:t>
             </a:r>
           </a:p>
           <a:p>
@@ -6195,83 +6079,7 @@
                 </a:solidFill>
                 <a:latin typeface="Arial"/>
               </a:rPr>
-              <a:t>▸  Temporärer saisonaler Überzug, stabile Bonität: Dulden mit Dokumentation</a:t>
-            </a:r>
-          </a:p>
-          <a:p>
-            <a:pPr>
-              <a:spcBef>
-                <a:spcPts val="400"/>
-              </a:spcBef>
-              <a:spcAft>
-                <a:spcPts val="200"/>
-              </a:spcAft>
-            </a:pPr>
-            <a:r>
-              <a:rPr sz="1300">
-                <a:solidFill>
-                  <a:srgbClr val="3D5466"/>
-                </a:solidFill>
-                <a:latin typeface="Arial"/>
-              </a:rPr>
-              <a:t>▸  Strukturelle Auslastung, gute Bonität: Linienerhöhung prüfen (mit Analyse Feld 2 und 3)</a:t>
-            </a:r>
-          </a:p>
-          <a:p>
-            <a:pPr>
-              <a:spcBef>
-                <a:spcPts val="400"/>
-              </a:spcBef>
-              <a:spcAft>
-                <a:spcPts val="200"/>
-              </a:spcAft>
-            </a:pPr>
-            <a:r>
-              <a:rPr sz="1300">
-                <a:solidFill>
-                  <a:srgbClr val="3D5466"/>
-                </a:solidFill>
-                <a:latin typeface="Arial"/>
-              </a:rPr>
-              <a:t>▸  Überzug + Warnsignale: Sofort persönliches Gespräch, ggf. Frühwarnmeldung</a:t>
-            </a:r>
-          </a:p>
-          <a:p>
-            <a:pPr>
-              <a:spcBef>
-                <a:spcPts val="600"/>
-              </a:spcBef>
-              <a:spcAft>
-                <a:spcPts val="200"/>
-              </a:spcAft>
-            </a:pPr>
-            <a:r>
-              <a:rPr sz="1200" i="1">
-                <a:solidFill>
-                  <a:srgbClr val="3D5466"/>
-                </a:solidFill>
-                <a:latin typeface="Arial"/>
-              </a:rPr>
-              <a:t>→  Wichtig: Jede Überzugsduldung – auch eine kurzfristige – muss dokumentiert werden (MaRisk BTO 1.1). Nicht dokumentierte Überzüge sind ein Prüfungsrisiko.</a:t>
-            </a:r>
-          </a:p>
-          <a:p>
-            <a:pPr>
-              <a:spcBef>
-                <a:spcPts val="400"/>
-              </a:spcBef>
-              <a:spcAft>
-                <a:spcPts val="200"/>
-              </a:spcAft>
-            </a:pPr>
-            <a:r>
-              <a:rPr sz="1200">
-                <a:solidFill>
-                  <a:srgbClr val="3D5466"/>
-                </a:solidFill>
-                <a:latin typeface="Arial"/>
-              </a:rPr>
-              <a:t>Entscheidungsmatrix: Wann ist eine neue Kreditvorlage Pflicht?</a:t>
+              <a:t>▸  Bewegliche Sicherheiten: Maschinen und Anlagen verlieren durch Spezialisierung, Betrieb und Marktlage schnell an Wert. Beleihungssatz 30–50 % des Buchwerts ist konservativ, aber realistisch.</a:t>
             </a:r>
           </a:p>
         </p:txBody>
@@ -6609,7 +6417,7 @@
                 </a:solidFill>
                 <a:latin typeface="Source Serif 4"/>
               </a:rPr>
-              <a:t>4.3c Checkliste: Bestandskredit in der Krise – erste Schritte</a:t>
+              <a:t>4.3a Sicherheitenbewertung im Alltag</a:t>
             </a:r>
           </a:p>
         </p:txBody>
@@ -6645,13 +6453,13 @@
               </a:spcAft>
             </a:pPr>
             <a:r>
-              <a:rPr sz="1200">
+              <a:rPr sz="1300">
                 <a:solidFill>
                   <a:srgbClr val="3D5466"/>
                 </a:solidFill>
                 <a:latin typeface="Arial"/>
               </a:rPr>
-              <a:t>Die schwierigste Kreditentscheidung ist nicht die Neuvergabe, sondern: Was tue ich, wenn ein Bestandskunde in Schieflage gerät?</a:t>
+              <a:t>▸  Die BelWertV-Theorie ist eine Sache – der Alltag stellt andere Fragen:</a:t>
             </a:r>
           </a:p>
           <a:p>
@@ -6664,32 +6472,203 @@
               </a:spcAft>
             </a:pPr>
             <a:r>
-              <a:rPr sz="1200">
+              <a:rPr sz="1300">
                 <a:solidFill>
                   <a:srgbClr val="3D5466"/>
                 </a:solidFill>
                 <a:latin typeface="Arial"/>
               </a:rPr>
-              <a:t>Diese Situation ist emotional belastend (langjährige Kundenbeziehung) und rechtlich heikel. Erste Schritte:</a:t>
+              <a:t>▸  Wann ist ein aktuelles Gutachten Pflicht?</a:t>
             </a:r>
           </a:p>
           <a:p>
             <a:pPr>
               <a:spcBef>
-                <a:spcPts val="600"/>
+                <a:spcPts val="400"/>
               </a:spcBef>
               <a:spcAft>
                 <a:spcPts val="200"/>
               </a:spcAft>
             </a:pPr>
             <a:r>
-              <a:rPr sz="1200" i="1">
+              <a:rPr sz="1300">
                 <a:solidFill>
                   <a:srgbClr val="3D5466"/>
                 </a:solidFill>
                 <a:latin typeface="Arial"/>
               </a:rPr>
-              <a:t>→  Praxistipp: Wer früh eskaliert und dokumentiert, schützt sich selbst und gibt dem Kunden eine echte Chance. Wer zu lange alleine trägt, verliert beides.</a:t>
+              <a:t>▸  Bei Erstverpfändung einer Immobilie und Krediten typischerweise ab 150.000–300 T€ (bankindividuell – Grenze mit Marktfolge klären)</a:t>
+            </a:r>
+          </a:p>
+          <a:p>
+            <a:pPr>
+              <a:spcBef>
+                <a:spcPts val="400"/>
+              </a:spcBef>
+              <a:spcAft>
+                <a:spcPts val="200"/>
+              </a:spcAft>
+            </a:pPr>
+            <a:r>
+              <a:rPr sz="1300">
+                <a:solidFill>
+                  <a:srgbClr val="3D5466"/>
+                </a:solidFill>
+                <a:latin typeface="Arial"/>
+              </a:rPr>
+              <a:t>▸  Bei wesentlicher Wertveränderung (Umbau, Schaden, Marktveränderung)</a:t>
+            </a:r>
+          </a:p>
+          <a:p>
+            <a:pPr>
+              <a:spcBef>
+                <a:spcPts val="400"/>
+              </a:spcBef>
+              <a:spcAft>
+                <a:spcPts val="200"/>
+              </a:spcAft>
+            </a:pPr>
+            <a:r>
+              <a:rPr sz="1300">
+                <a:solidFill>
+                  <a:srgbClr val="3D5466"/>
+                </a:solidFill>
+                <a:latin typeface="Arial"/>
+              </a:rPr>
+              <a:t>▸  Bei Verlängerung mit mehr als 5 Jahren ohne zwischenzeitliches Update</a:t>
+            </a:r>
+          </a:p>
+          <a:p>
+            <a:pPr>
+              <a:spcBef>
+                <a:spcPts val="400"/>
+              </a:spcBef>
+              <a:spcAft>
+                <a:spcPts val="200"/>
+              </a:spcAft>
+            </a:pPr>
+            <a:r>
+              <a:rPr sz="1300">
+                <a:solidFill>
+                  <a:srgbClr val="3D5466"/>
+                </a:solidFill>
+                <a:latin typeface="Arial"/>
+              </a:rPr>
+              <a:t>▸  Wann reicht eine Plausibilisierung?</a:t>
+            </a:r>
+          </a:p>
+          <a:p>
+            <a:pPr>
+              <a:spcBef>
+                <a:spcPts val="400"/>
+              </a:spcBef>
+              <a:spcAft>
+                <a:spcPts val="200"/>
+              </a:spcAft>
+            </a:pPr>
+            <a:r>
+              <a:rPr sz="1300">
+                <a:solidFill>
+                  <a:srgbClr val="3D5466"/>
+                </a:solidFill>
+                <a:latin typeface="Arial"/>
+              </a:rPr>
+              <a:t>▸  Bei kleinen Beträgen und gut bekannten Objekten kann der Berater eine Marktplausibilisierung vornehmen (Vergleichspreise Onlineportale, Gespräch mit lokalem Makler)</a:t>
+            </a:r>
+          </a:p>
+          <a:p>
+            <a:pPr>
+              <a:spcBef>
+                <a:spcPts val="400"/>
+              </a:spcBef>
+              <a:spcAft>
+                <a:spcPts val="200"/>
+              </a:spcAft>
+            </a:pPr>
+            <a:r>
+              <a:rPr sz="1300">
+                <a:solidFill>
+                  <a:srgbClr val="3D5466"/>
+                </a:solidFill>
+                <a:latin typeface="Arial"/>
+              </a:rPr>
+              <a:t>▸  Diese Schätzung muss dokumentiert und dem Kreditbeschluss beigefügt werden</a:t>
+            </a:r>
+          </a:p>
+          <a:p>
+            <a:pPr>
+              <a:spcBef>
+                <a:spcPts val="400"/>
+              </a:spcBef>
+              <a:spcAft>
+                <a:spcPts val="200"/>
+              </a:spcAft>
+            </a:pPr>
+            <a:r>
+              <a:rPr sz="1300">
+                <a:solidFill>
+                  <a:srgbClr val="3D5466"/>
+                </a:solidFill>
+                <a:latin typeface="Arial"/>
+              </a:rPr>
+              <a:t>▸  Alte Gutachten – Faustregel:</a:t>
+            </a:r>
+          </a:p>
+          <a:p>
+            <a:pPr>
+              <a:spcBef>
+                <a:spcPts val="400"/>
+              </a:spcBef>
+              <a:spcAft>
+                <a:spcPts val="200"/>
+              </a:spcAft>
+            </a:pPr>
+            <a:r>
+              <a:rPr sz="1300">
+                <a:solidFill>
+                  <a:srgbClr val="3D5466"/>
+                </a:solidFill>
+                <a:latin typeface="Arial"/>
+              </a:rPr>
+              <a:t>▸  Gutachten älter als 3 Jahre: Abschlag von 10–20 % auf den damaligen Wert je nach Marktentwicklung</a:t>
+            </a:r>
+          </a:p>
+          <a:p>
+            <a:pPr>
+              <a:spcBef>
+                <a:spcPts val="400"/>
+              </a:spcBef>
+              <a:spcAft>
+                <a:spcPts val="200"/>
+              </a:spcAft>
+            </a:pPr>
+            <a:r>
+              <a:rPr sz="1300">
+                <a:solidFill>
+                  <a:srgbClr val="3D5466"/>
+                </a:solidFill>
+                <a:latin typeface="Arial"/>
+              </a:rPr>
+              <a:t>▸  Gutachten älter als 5 Jahre: Neugutachten oder erheblicher konservativer Abschlag empfohlen</a:t>
+            </a:r>
+          </a:p>
+          <a:p>
+            <a:pPr>
+              <a:spcBef>
+                <a:spcPts val="400"/>
+              </a:spcBef>
+              <a:spcAft>
+                <a:spcPts val="200"/>
+              </a:spcAft>
+            </a:pPr>
+            <a:r>
+              <a:rPr sz="1300">
+                <a:solidFill>
+                  <a:srgbClr val="3D5466"/>
+                </a:solidFill>
+                <a:latin typeface="Arial"/>
+              </a:rPr>
+              <a:t>▸  Bei Gewerbeimmobilien: Marktentwicklung oft volatiler als bei Wohnimmobilien – früher erneuern</a:t>
             </a:r>
           </a:p>
         </p:txBody>
@@ -7027,7 +7006,7 @@
                 </a:solidFill>
                 <a:latin typeface="Source Serif 4"/>
               </a:rPr>
-              <a:t>Praxisfall: Metallbau Schnell GmbH (Heilbronn, fiktiv)</a:t>
+              <a:t>4.3b Betriebsmittelkredite und Kontokorrent: Kurzfall</a:t>
             </a:r>
           </a:p>
         </p:txBody>
@@ -7053,25 +7032,6 @@
             <a:spAutoFit/>
           </a:bodyPr>
           <a:lstStyle/>
-          <a:p>
-            <a:pPr>
-              <a:spcBef>
-                <a:spcPts val="1000"/>
-              </a:spcBef>
-              <a:spcAft>
-                <a:spcPts val="200"/>
-              </a:spcAft>
-            </a:pPr>
-            <a:r>
-              <a:rPr sz="800" b="1">
-                <a:solidFill>
-                  <a:srgbClr val="78808C"/>
-                </a:solidFill>
-                <a:latin typeface="JetBrains Mono"/>
-              </a:rPr>
-              <a:t>4.4.1 UNTERNEHMENSPROFIL</a:t>
-            </a:r>
-          </a:p>
           <a:p>
             <a:pPr>
               <a:spcBef>
@@ -7082,13 +7042,13 @@
               </a:spcAft>
             </a:pPr>
             <a:r>
-              <a:rPr sz="1200">
+              <a:rPr sz="1300">
                 <a:solidFill>
                   <a:srgbClr val="3D5466"/>
                 </a:solidFill>
                 <a:latin typeface="Arial"/>
               </a:rPr>
-              <a:t>Kreditantrag:</a:t>
+              <a:t>▸  Nicht alle Kreditentscheidungen sind langfristige Investitionskredite. Häufiger Alltag: KK-Linie läuft an ihre Grenze oder wird regelmäßig überzogen.</a:t>
             </a:r>
           </a:p>
           <a:p>
@@ -7107,7 +7067,7 @@
                 </a:solidFill>
                 <a:latin typeface="Arial"/>
               </a:rPr>
-              <a:t>▸  Art: Investitionskredit</a:t>
+              <a:t>▸  Kurzfall: Bäckerei Weber KG, Überzug KK-Linie</a:t>
             </a:r>
           </a:p>
           <a:p>
@@ -7126,7 +7086,7 @@
                 </a:solidFill>
                 <a:latin typeface="Arial"/>
               </a:rPr>
-              <a:t>▸  Betrag: 420.000 €</a:t>
+              <a:t>▸  Beraterin Schmidt stellt fest: Bäckerei Weber KG, Linie 80.000 €, seit 6 Wochen durchgehend bei 95–100 % ausgelastet, in einer Woche zweimal kurz drüber.</a:t>
             </a:r>
           </a:p>
           <a:p>
@@ -7145,7 +7105,7 @@
                 </a:solidFill>
                 <a:latin typeface="Arial"/>
               </a:rPr>
-              <a:t>▸  Verwendung: 5-Achs-CNC-Drehmaschine Heidenhain TNC 640 (280.000 €) + Hallenerweiterung (140.000 €)</a:t>
+              <a:t>▸  Analysefragen für Kontokorrent:</a:t>
             </a:r>
           </a:p>
           <a:p>
@@ -7164,26 +7124,7 @@
                 </a:solidFill>
                 <a:latin typeface="Arial"/>
               </a:rPr>
-              <a:t>▸  Laufzeit: 7 Jahre</a:t>
-            </a:r>
-          </a:p>
-          <a:p>
-            <a:pPr>
-              <a:spcBef>
-                <a:spcPts val="1000"/>
-              </a:spcBef>
-              <a:spcAft>
-                <a:spcPts val="200"/>
-              </a:spcAft>
-            </a:pPr>
-            <a:r>
-              <a:rPr sz="800" b="1">
-                <a:solidFill>
-                  <a:srgbClr val="78808C"/>
-                </a:solidFill>
-                <a:latin typeface="JetBrains Mono"/>
-              </a:rPr>
-              <a:t>4.4.2 FINANZLAGE: 3-JAHRESVERGLEICH</a:t>
+              <a:t>▸  Mögliche Entscheidungen:</a:t>
             </a:r>
           </a:p>
           <a:p>
@@ -7196,13 +7137,13 @@
               </a:spcAft>
             </a:pPr>
             <a:r>
-              <a:rPr sz="1200">
+              <a:rPr sz="1300">
                 <a:solidFill>
                   <a:srgbClr val="3D5466"/>
                 </a:solidFill>
                 <a:latin typeface="Arial"/>
               </a:rPr>
-              <a:t>Bilanzauszüge (in T€):</a:t>
+              <a:t>▸  Temporärer saisonaler Überzug, stabile Bonität: Dulden mit Dokumentation</a:t>
             </a:r>
           </a:p>
           <a:p>
@@ -7215,13 +7156,13 @@
               </a:spcAft>
             </a:pPr>
             <a:r>
-              <a:rPr sz="1200">
+              <a:rPr sz="1300">
                 <a:solidFill>
                   <a:srgbClr val="3D5466"/>
                 </a:solidFill>
                 <a:latin typeface="Arial"/>
               </a:rPr>
-              <a:t>Gewinn- und Verlustrechnung (in T€):</a:t>
+              <a:t>▸  Strukturelle Auslastung, gute Bonität: Linienerhöhung prüfen (mit Analyse Feld 2 und 3)</a:t>
             </a:r>
           </a:p>
           <a:p>
@@ -7234,32 +7175,32 @@
               </a:spcAft>
             </a:pPr>
             <a:r>
-              <a:rPr sz="1200">
+              <a:rPr sz="1300">
                 <a:solidFill>
                   <a:srgbClr val="3D5466"/>
                 </a:solidFill>
                 <a:latin typeface="Arial"/>
               </a:rPr>
-              <a:t>Kennzahlenanalyse:</a:t>
+              <a:t>▸  Überzug + Warnsignale: Sofort persönliches Gespräch, ggf. Frühwarnmeldung</a:t>
             </a:r>
           </a:p>
           <a:p>
             <a:pPr>
               <a:spcBef>
-                <a:spcPts val="1000"/>
+                <a:spcPts val="600"/>
               </a:spcBef>
               <a:spcAft>
                 <a:spcPts val="200"/>
               </a:spcAft>
             </a:pPr>
             <a:r>
-              <a:rPr sz="800" b="1">
-                <a:solidFill>
-                  <a:srgbClr val="78808C"/>
-                </a:solidFill>
-                <a:latin typeface="JetBrains Mono"/>
-              </a:rPr>
-              <a:t>4.4.3 8-FELDER-ANALYSE: METALLBAU SCHNELL GMBH</a:t>
+              <a:rPr sz="1200" i="1">
+                <a:solidFill>
+                  <a:srgbClr val="3D5466"/>
+                </a:solidFill>
+                <a:latin typeface="Arial"/>
+              </a:rPr>
+              <a:t>→  Wichtig: Jede Überzugsduldung – auch eine kurzfristige – muss dokumentiert werden (MaRisk BTO 1.1). Nicht dokumentierte Überzüge sind ein Prüfungsrisiko.</a:t>
             </a:r>
           </a:p>
           <a:p>
@@ -7272,13 +7213,13 @@
               </a:spcAft>
             </a:pPr>
             <a:r>
-              <a:rPr sz="1200">
+              <a:rPr sz="1300">
                 <a:solidFill>
                   <a:srgbClr val="3D5466"/>
                 </a:solidFill>
                 <a:latin typeface="Arial"/>
               </a:rPr>
-              <a:t>Feld 1 – Zweck &amp; Verwendung | Bewertung: 5/5 POSITIV</a:t>
+              <a:t>▸  Entscheidungsmatrix: Wann ist eine neue Kreditvorlage Pflicht?</a:t>
             </a:r>
           </a:p>
         </p:txBody>
@@ -7616,7 +7557,7 @@
                 </a:solidFill>
                 <a:latin typeface="Source Serif 4"/>
               </a:rPr>
-              <a:t>Arbeitsblatt: 8-Felder-Kreditanalyse-Template</a:t>
+              <a:t>4.3c Checkliste: Bestandskredit in der Krise – erste Schritte</a:t>
             </a:r>
           </a:p>
         </p:txBody>
@@ -7652,13 +7593,13 @@
               </a:spcAft>
             </a:pPr>
             <a:r>
-              <a:rPr sz="1200">
+              <a:rPr sz="1300">
                 <a:solidFill>
                   <a:srgbClr val="3D5466"/>
                 </a:solidFill>
                 <a:latin typeface="Arial"/>
               </a:rPr>
-              <a:t>KREDIT-ANALYSE FORMULAR</a:t>
+              <a:t>▸  Die schwierigste Kreditentscheidung ist nicht die Neuvergabe, sondern: Was tue ich, wenn ein Bestandskunde in Schieflage gerät?</a:t>
             </a:r>
           </a:p>
           <a:p>
@@ -7671,13 +7612,412 @@
               </a:spcAft>
             </a:pPr>
             <a:r>
-              <a:rPr sz="1200">
+              <a:rPr sz="1300">
                 <a:solidFill>
                   <a:srgbClr val="3D5466"/>
                 </a:solidFill>
                 <a:latin typeface="Arial"/>
               </a:rPr>
-              <a:t>Feld 1 – Zweck &amp; Verwendung (Gewichtung: 10 %)</a:t>
+              <a:t>▸  Diese Situation ist emotional belastend (langjährige Kundenbeziehung) und rechtlich heikel. Erste Schritte:</a:t>
+            </a:r>
+          </a:p>
+          <a:p>
+            <a:pPr>
+              <a:spcBef>
+                <a:spcPts val="600"/>
+              </a:spcBef>
+              <a:spcAft>
+                <a:spcPts val="200"/>
+              </a:spcAft>
+            </a:pPr>
+            <a:r>
+              <a:rPr sz="1200" i="1">
+                <a:solidFill>
+                  <a:srgbClr val="3D5466"/>
+                </a:solidFill>
+                <a:latin typeface="Arial"/>
+              </a:rPr>
+              <a:t>→  Praxistipp: Wer früh eskaliert und dokumentiert, schützt sich selbst und gibt dem Kunden eine echte Chance. Wer zu lange alleine trägt, verliert beides.</a:t>
+            </a:r>
+          </a:p>
+        </p:txBody>
+      </p:sp>
+      <p:sp>
+        <p:nvSpPr>
+          <p:cNvPr id="9" name="Rectangle 8"/>
+          <p:cNvSpPr/>
+          <p:nvPr/>
+        </p:nvSpPr>
+        <p:spPr>
+          <a:xfrm>
+            <a:off x="0" y="6510528"/>
+            <a:ext cx="12188952" cy="347472"/>
+          </a:xfrm>
+          <a:prstGeom prst="rect">
+            <a:avLst/>
+          </a:prstGeom>
+          <a:solidFill>
+            <a:srgbClr val="0A1937"/>
+          </a:solidFill>
+          <a:ln>
+            <a:noFill/>
+          </a:ln>
+        </p:spPr>
+        <p:style>
+          <a:lnRef idx="1">
+            <a:schemeClr val="accent1"/>
+          </a:lnRef>
+          <a:fillRef idx="3">
+            <a:schemeClr val="accent1"/>
+          </a:fillRef>
+          <a:effectRef idx="2">
+            <a:schemeClr val="accent1"/>
+          </a:effectRef>
+          <a:fontRef idx="minor">
+            <a:schemeClr val="lt1"/>
+          </a:fontRef>
+        </p:style>
+        <p:txBody>
+          <a:bodyPr rtlCol="0" anchor="ctr"/>
+          <a:lstStyle/>
+          <a:p>
+            <a:pPr algn="ctr"/>
+          </a:p>
+        </p:txBody>
+      </p:sp>
+      <p:sp>
+        <p:nvSpPr>
+          <p:cNvPr id="10" name="TextBox 9"/>
+          <p:cNvSpPr txBox="1"/>
+          <p:nvPr/>
+        </p:nvSpPr>
+        <p:spPr>
+          <a:xfrm>
+            <a:off x="685800" y="6583680"/>
+            <a:ext cx="6490411" cy="256032"/>
+          </a:xfrm>
+          <a:prstGeom prst="rect">
+            <a:avLst/>
+          </a:prstGeom>
+          <a:noFill/>
+        </p:spPr>
+        <p:txBody>
+          <a:bodyPr wrap="none">
+            <a:spAutoFit/>
+          </a:bodyPr>
+          <a:lstStyle/>
+          <a:p>
+            <a:pPr algn="l"/>
+            <a:r>
+              <a:rPr sz="700">
+                <a:solidFill>
+                  <a:srgbClr val="A0B4D2"/>
+                </a:solidFill>
+                <a:latin typeface="JetBrains Mono"/>
+              </a:rPr>
+              <a:t>Benedikt Zoller Coaching  ·  FKB Campus  ·  M21</a:t>
+            </a:r>
+          </a:p>
+        </p:txBody>
+      </p:sp>
+    </p:spTree>
+  </p:cSld>
+  <p:clrMapOvr>
+    <a:masterClrMapping/>
+  </p:clrMapOvr>
+</p:sld>
+</file>
+
+<file path=ppt/slides/slide16.xml><?xml version="1.0" encoding="utf-8"?>
+<p:sld xmlns:a="http://schemas.openxmlformats.org/drawingml/2006/main" xmlns:p="http://schemas.openxmlformats.org/presentationml/2006/main" xmlns:r="http://schemas.openxmlformats.org/officeDocument/2006/relationships">
+  <p:cSld>
+    <p:spTree>
+      <p:nvGrpSpPr>
+        <p:cNvPr id="1" name=""/>
+        <p:cNvGrpSpPr/>
+        <p:nvPr/>
+      </p:nvGrpSpPr>
+      <p:grpSpPr/>
+      <p:sp>
+        <p:nvSpPr>
+          <p:cNvPr id="2" name="Rectangle 1"/>
+          <p:cNvSpPr/>
+          <p:nvPr/>
+        </p:nvSpPr>
+        <p:spPr>
+          <a:xfrm>
+            <a:off x="0" y="0"/>
+            <a:ext cx="12188952" cy="6858000"/>
+          </a:xfrm>
+          <a:prstGeom prst="rect">
+            <a:avLst/>
+          </a:prstGeom>
+          <a:solidFill>
+            <a:srgbClr val="EDEDF3"/>
+          </a:solidFill>
+          <a:ln>
+            <a:noFill/>
+          </a:ln>
+        </p:spPr>
+        <p:style>
+          <a:lnRef idx="1">
+            <a:schemeClr val="accent1"/>
+          </a:lnRef>
+          <a:fillRef idx="3">
+            <a:schemeClr val="accent1"/>
+          </a:fillRef>
+          <a:effectRef idx="2">
+            <a:schemeClr val="accent1"/>
+          </a:effectRef>
+          <a:fontRef idx="minor">
+            <a:schemeClr val="lt1"/>
+          </a:fontRef>
+        </p:style>
+        <p:txBody>
+          <a:bodyPr rtlCol="0" anchor="ctr"/>
+          <a:lstStyle/>
+          <a:p>
+            <a:pPr algn="ctr"/>
+          </a:p>
+        </p:txBody>
+      </p:sp>
+      <p:sp>
+        <p:nvSpPr>
+          <p:cNvPr id="3" name="Rectangle 2"/>
+          <p:cNvSpPr/>
+          <p:nvPr/>
+        </p:nvSpPr>
+        <p:spPr>
+          <a:xfrm>
+            <a:off x="0" y="0"/>
+            <a:ext cx="12188952" cy="50292"/>
+          </a:xfrm>
+          <a:prstGeom prst="rect">
+            <a:avLst/>
+          </a:prstGeom>
+          <a:solidFill>
+            <a:srgbClr val="1F2C56"/>
+          </a:solidFill>
+          <a:ln>
+            <a:noFill/>
+          </a:ln>
+        </p:spPr>
+        <p:style>
+          <a:lnRef idx="1">
+            <a:schemeClr val="accent1"/>
+          </a:lnRef>
+          <a:fillRef idx="3">
+            <a:schemeClr val="accent1"/>
+          </a:fillRef>
+          <a:effectRef idx="2">
+            <a:schemeClr val="accent1"/>
+          </a:effectRef>
+          <a:fontRef idx="minor">
+            <a:schemeClr val="lt1"/>
+          </a:fontRef>
+        </p:style>
+        <p:txBody>
+          <a:bodyPr rtlCol="0" anchor="ctr"/>
+          <a:lstStyle/>
+          <a:p>
+            <a:pPr algn="ctr"/>
+          </a:p>
+        </p:txBody>
+      </p:sp>
+      <p:sp>
+        <p:nvSpPr>
+          <p:cNvPr id="4" name="TextBox 3"/>
+          <p:cNvSpPr txBox="1"/>
+          <p:nvPr/>
+        </p:nvSpPr>
+        <p:spPr>
+          <a:xfrm>
+            <a:off x="685800" y="109728"/>
+            <a:ext cx="10817352" cy="228600"/>
+          </a:xfrm>
+          <a:prstGeom prst="rect">
+            <a:avLst/>
+          </a:prstGeom>
+          <a:noFill/>
+        </p:spPr>
+        <p:txBody>
+          <a:bodyPr wrap="none">
+            <a:spAutoFit/>
+          </a:bodyPr>
+          <a:lstStyle/>
+          <a:p>
+            <a:pPr algn="l"/>
+            <a:r>
+              <a:rPr sz="750">
+                <a:solidFill>
+                  <a:srgbClr val="78808C"/>
+                </a:solidFill>
+                <a:latin typeface="JetBrains Mono"/>
+              </a:rPr>
+              <a:t>M21  ·  INHALT</a:t>
+            </a:r>
+          </a:p>
+        </p:txBody>
+      </p:sp>
+      <p:sp>
+        <p:nvSpPr>
+          <p:cNvPr id="5" name="Rectangle 4"/>
+          <p:cNvSpPr/>
+          <p:nvPr/>
+        </p:nvSpPr>
+        <p:spPr>
+          <a:xfrm>
+            <a:off x="0" y="1234440"/>
+            <a:ext cx="12188952" cy="12700"/>
+          </a:xfrm>
+          <a:prstGeom prst="rect">
+            <a:avLst/>
+          </a:prstGeom>
+          <a:solidFill>
+            <a:srgbClr val="D8DFE4"/>
+          </a:solidFill>
+          <a:ln>
+            <a:noFill/>
+          </a:ln>
+        </p:spPr>
+        <p:style>
+          <a:lnRef idx="1">
+            <a:schemeClr val="accent1"/>
+          </a:lnRef>
+          <a:fillRef idx="3">
+            <a:schemeClr val="accent1"/>
+          </a:fillRef>
+          <a:effectRef idx="2">
+            <a:schemeClr val="accent1"/>
+          </a:effectRef>
+          <a:fontRef idx="minor">
+            <a:schemeClr val="lt1"/>
+          </a:fontRef>
+        </p:style>
+        <p:txBody>
+          <a:bodyPr rtlCol="0" anchor="ctr"/>
+          <a:lstStyle/>
+          <a:p>
+            <a:pPr algn="ctr"/>
+          </a:p>
+        </p:txBody>
+      </p:sp>
+      <p:sp>
+        <p:nvSpPr>
+          <p:cNvPr id="6" name="Rectangle 5"/>
+          <p:cNvSpPr/>
+          <p:nvPr/>
+        </p:nvSpPr>
+        <p:spPr>
+          <a:xfrm>
+            <a:off x="685800" y="502920"/>
+            <a:ext cx="36576" cy="658368"/>
+          </a:xfrm>
+          <a:prstGeom prst="rect">
+            <a:avLst/>
+          </a:prstGeom>
+          <a:solidFill>
+            <a:srgbClr val="D9C089"/>
+          </a:solidFill>
+          <a:ln>
+            <a:noFill/>
+          </a:ln>
+        </p:spPr>
+        <p:style>
+          <a:lnRef idx="1">
+            <a:schemeClr val="accent1"/>
+          </a:lnRef>
+          <a:fillRef idx="3">
+            <a:schemeClr val="accent1"/>
+          </a:fillRef>
+          <a:effectRef idx="2">
+            <a:schemeClr val="accent1"/>
+          </a:effectRef>
+          <a:fontRef idx="minor">
+            <a:schemeClr val="lt1"/>
+          </a:fontRef>
+        </p:style>
+        <p:txBody>
+          <a:bodyPr rtlCol="0" anchor="ctr"/>
+          <a:lstStyle/>
+          <a:p>
+            <a:pPr algn="ctr"/>
+          </a:p>
+        </p:txBody>
+      </p:sp>
+      <p:sp>
+        <p:nvSpPr>
+          <p:cNvPr id="7" name="TextBox 6"/>
+          <p:cNvSpPr txBox="1"/>
+          <p:nvPr/>
+        </p:nvSpPr>
+        <p:spPr>
+          <a:xfrm>
+            <a:off x="813816" y="502920"/>
+            <a:ext cx="10634472" cy="685800"/>
+          </a:xfrm>
+          <a:prstGeom prst="rect">
+            <a:avLst/>
+          </a:prstGeom>
+          <a:noFill/>
+        </p:spPr>
+        <p:txBody>
+          <a:bodyPr wrap="square">
+            <a:spAutoFit/>
+          </a:bodyPr>
+          <a:lstStyle/>
+          <a:p>
+            <a:pPr algn="l"/>
+            <a:r>
+              <a:rPr sz="2400" b="1" i="0">
+                <a:solidFill>
+                  <a:srgbClr val="1F2C56"/>
+                </a:solidFill>
+                <a:latin typeface="Source Serif 4"/>
+              </a:rPr>
+              <a:t>Praxisfall: Metallbau Schnell GmbH (Heilbronn, fiktiv)</a:t>
+            </a:r>
+          </a:p>
+        </p:txBody>
+      </p:sp>
+      <p:sp>
+        <p:nvSpPr>
+          <p:cNvPr id="8" name="TextBox 7"/>
+          <p:cNvSpPr txBox="1"/>
+          <p:nvPr/>
+        </p:nvSpPr>
+        <p:spPr>
+          <a:xfrm>
+            <a:off x="685800" y="1417320"/>
+            <a:ext cx="10817352" cy="5029200"/>
+          </a:xfrm>
+          <a:prstGeom prst="rect">
+            <a:avLst/>
+          </a:prstGeom>
+          <a:noFill/>
+        </p:spPr>
+        <p:txBody>
+          <a:bodyPr wrap="square">
+            <a:spAutoFit/>
+          </a:bodyPr>
+          <a:lstStyle/>
+          <a:p>
+            <a:pPr>
+              <a:spcBef>
+                <a:spcPts val="1000"/>
+              </a:spcBef>
+              <a:spcAft>
+                <a:spcPts val="200"/>
+              </a:spcAft>
+            </a:pPr>
+            <a:r>
+              <a:rPr sz="800" b="1">
+                <a:solidFill>
+                  <a:srgbClr val="78808C"/>
+                </a:solidFill>
+                <a:latin typeface="JetBrains Mono"/>
+              </a:rPr>
+              <a:t>4.4.1 UNTERNEHMENSPROFIL</a:t>
             </a:r>
           </a:p>
           <a:p>
@@ -7690,13 +8030,13 @@
               </a:spcAft>
             </a:pPr>
             <a:r>
-              <a:rPr sz="1200">
+              <a:rPr sz="1300">
                 <a:solidFill>
                   <a:srgbClr val="3D5466"/>
                 </a:solidFill>
                 <a:latin typeface="Arial"/>
               </a:rPr>
-              <a:t>Ist der Verwendungszweck konkret, prüfbar und wirtschaftlich sinnvoll?</a:t>
+              <a:t>▸  Kreditantrag:</a:t>
             </a:r>
           </a:p>
           <a:p>
@@ -7709,13 +8049,13 @@
               </a:spcAft>
             </a:pPr>
             <a:r>
-              <a:rPr sz="1200">
+              <a:rPr sz="1300">
                 <a:solidFill>
                   <a:srgbClr val="3D5466"/>
                 </a:solidFill>
                 <a:latin typeface="Arial"/>
               </a:rPr>
-              <a:t>Bewertung: ☐ 1 (kritisch) ☐ 2 ☐ 3 (ausreichend) ☐ 4 ☐ 5 (sehr gut)</a:t>
+              <a:t>▸  Art: Investitionskredit</a:t>
             </a:r>
           </a:p>
           <a:p>
@@ -7728,13 +8068,13 @@
               </a:spcAft>
             </a:pPr>
             <a:r>
-              <a:rPr sz="1200">
+              <a:rPr sz="1300">
                 <a:solidFill>
                   <a:srgbClr val="3D5466"/>
                 </a:solidFill>
                 <a:latin typeface="Arial"/>
               </a:rPr>
-              <a:t>Feld 2 – Rückzahlungsquelle (Gewichtung: 25 %)</a:t>
+              <a:t>▸  Betrag: 420.000 €</a:t>
             </a:r>
           </a:p>
           <a:p>
@@ -7747,13 +8087,13 @@
               </a:spcAft>
             </a:pPr>
             <a:r>
-              <a:rPr sz="1200">
+              <a:rPr sz="1300">
                 <a:solidFill>
                   <a:srgbClr val="3D5466"/>
                 </a:solidFill>
                 <a:latin typeface="Arial"/>
               </a:rPr>
-              <a:t>Stress-Szenario (−10 % Umsatz): Deckungsquote sinkt auf ___x</a:t>
+              <a:t>▸  Verwendung: 5-Achs-CNC-Drehmaschine Heidenhain TNC 640 (280.000 €) + Hallenerweiterung (140.000 €)</a:t>
             </a:r>
           </a:p>
           <a:p>
@@ -7766,13 +8106,32 @@
               </a:spcAft>
             </a:pPr>
             <a:r>
-              <a:rPr sz="1200">
+              <a:rPr sz="1300">
                 <a:solidFill>
                   <a:srgbClr val="3D5466"/>
                 </a:solidFill>
                 <a:latin typeface="Arial"/>
               </a:rPr>
-              <a:t>Bewertung: ☐ 1 ☐ 2 ☐ 3 ☐ 4 ☐ 5</a:t>
+              <a:t>▸  Laufzeit: 7 Jahre</a:t>
+            </a:r>
+          </a:p>
+          <a:p>
+            <a:pPr>
+              <a:spcBef>
+                <a:spcPts val="1000"/>
+              </a:spcBef>
+              <a:spcAft>
+                <a:spcPts val="200"/>
+              </a:spcAft>
+            </a:pPr>
+            <a:r>
+              <a:rPr sz="800" b="1">
+                <a:solidFill>
+                  <a:srgbClr val="78808C"/>
+                </a:solidFill>
+                <a:latin typeface="JetBrains Mono"/>
+              </a:rPr>
+              <a:t>4.4.2 FINANZLAGE: 3-JAHRESVERGLEICH</a:t>
             </a:r>
           </a:p>
           <a:p>
@@ -7785,13 +8144,13 @@
               </a:spcAft>
             </a:pPr>
             <a:r>
-              <a:rPr sz="1200">
+              <a:rPr sz="1300">
                 <a:solidFill>
                   <a:srgbClr val="3D5466"/>
                 </a:solidFill>
                 <a:latin typeface="Arial"/>
               </a:rPr>
-              <a:t>Feld 3 – Kapitalstruktur (Gewichtung: 15 %)</a:t>
+              <a:t>▸  Bilanzauszüge (in T€):</a:t>
             </a:r>
           </a:p>
           <a:p>
@@ -7804,13 +8163,13 @@
               </a:spcAft>
             </a:pPr>
             <a:r>
-              <a:rPr sz="1200">
+              <a:rPr sz="1300">
                 <a:solidFill>
                   <a:srgbClr val="3D5466"/>
                 </a:solidFill>
                 <a:latin typeface="Arial"/>
               </a:rPr>
-              <a:t>Bewertung: ☐ 1 ☐ 2 ☐ 3 ☐ 4 ☐ 5</a:t>
+              <a:t>▸  Gewinn- und Verlustrechnung (in T€):</a:t>
             </a:r>
           </a:p>
           <a:p>
@@ -7823,13 +8182,32 @@
               </a:spcAft>
             </a:pPr>
             <a:r>
-              <a:rPr sz="1200">
+              <a:rPr sz="1300">
                 <a:solidFill>
                   <a:srgbClr val="3D5466"/>
                 </a:solidFill>
                 <a:latin typeface="Arial"/>
               </a:rPr>
-              <a:t>Feld 4 – Managementqualität (Gewichtung: 20 %)</a:t>
+              <a:t>▸  Kennzahlenanalyse:</a:t>
+            </a:r>
+          </a:p>
+          <a:p>
+            <a:pPr>
+              <a:spcBef>
+                <a:spcPts val="1000"/>
+              </a:spcBef>
+              <a:spcAft>
+                <a:spcPts val="200"/>
+              </a:spcAft>
+            </a:pPr>
+            <a:r>
+              <a:rPr sz="800" b="1">
+                <a:solidFill>
+                  <a:srgbClr val="78808C"/>
+                </a:solidFill>
+                <a:latin typeface="JetBrains Mono"/>
+              </a:rPr>
+              <a:t>4.4.3 8-FELDER-ANALYSE: METALLBAU SCHNELL GMBH</a:t>
             </a:r>
           </a:p>
           <a:p>
@@ -7842,15 +8220,2514 @@
               </a:spcAft>
             </a:pPr>
             <a:r>
-              <a:rPr sz="1200">
+              <a:rPr sz="1300">
                 <a:solidFill>
                   <a:srgbClr val="3D5466"/>
                 </a:solidFill>
                 <a:latin typeface="Arial"/>
               </a:rPr>
-              <a:t>Nachfolge geklärt? ☐ Ja ☐ Nein | Transparenz im Gespräch: ☐ offen ☐ ausweichend</a:t>
-            </a:r>
-          </a:p>
+              <a:t>▸  Feld 1 – Zweck &amp; Verwendung | Bewertung: 5/5 POSITIV</a:t>
+            </a:r>
+          </a:p>
+        </p:txBody>
+      </p:sp>
+      <p:sp>
+        <p:nvSpPr>
+          <p:cNvPr id="9" name="Rectangle 8"/>
+          <p:cNvSpPr/>
+          <p:nvPr/>
+        </p:nvSpPr>
+        <p:spPr>
+          <a:xfrm>
+            <a:off x="0" y="6510528"/>
+            <a:ext cx="12188952" cy="347472"/>
+          </a:xfrm>
+          <a:prstGeom prst="rect">
+            <a:avLst/>
+          </a:prstGeom>
+          <a:solidFill>
+            <a:srgbClr val="0A1937"/>
+          </a:solidFill>
+          <a:ln>
+            <a:noFill/>
+          </a:ln>
+        </p:spPr>
+        <p:style>
+          <a:lnRef idx="1">
+            <a:schemeClr val="accent1"/>
+          </a:lnRef>
+          <a:fillRef idx="3">
+            <a:schemeClr val="accent1"/>
+          </a:fillRef>
+          <a:effectRef idx="2">
+            <a:schemeClr val="accent1"/>
+          </a:effectRef>
+          <a:fontRef idx="minor">
+            <a:schemeClr val="lt1"/>
+          </a:fontRef>
+        </p:style>
+        <p:txBody>
+          <a:bodyPr rtlCol="0" anchor="ctr"/>
+          <a:lstStyle/>
+          <a:p>
+            <a:pPr algn="ctr"/>
+          </a:p>
+        </p:txBody>
+      </p:sp>
+      <p:sp>
+        <p:nvSpPr>
+          <p:cNvPr id="10" name="TextBox 9"/>
+          <p:cNvSpPr txBox="1"/>
+          <p:nvPr/>
+        </p:nvSpPr>
+        <p:spPr>
+          <a:xfrm>
+            <a:off x="685800" y="6583680"/>
+            <a:ext cx="6490411" cy="256032"/>
+          </a:xfrm>
+          <a:prstGeom prst="rect">
+            <a:avLst/>
+          </a:prstGeom>
+          <a:noFill/>
+        </p:spPr>
+        <p:txBody>
+          <a:bodyPr wrap="none">
+            <a:spAutoFit/>
+          </a:bodyPr>
+          <a:lstStyle/>
+          <a:p>
+            <a:pPr algn="l"/>
+            <a:r>
+              <a:rPr sz="700">
+                <a:solidFill>
+                  <a:srgbClr val="A0B4D2"/>
+                </a:solidFill>
+                <a:latin typeface="JetBrains Mono"/>
+              </a:rPr>
+              <a:t>Benedikt Zoller Coaching  ·  FKB Campus  ·  M21</a:t>
+            </a:r>
+          </a:p>
+        </p:txBody>
+      </p:sp>
+    </p:spTree>
+  </p:cSld>
+  <p:clrMapOvr>
+    <a:masterClrMapping/>
+  </p:clrMapOvr>
+</p:sld>
+</file>
+
+<file path=ppt/slides/slide17.xml><?xml version="1.0" encoding="utf-8"?>
+<p:sld xmlns:a="http://schemas.openxmlformats.org/drawingml/2006/main" xmlns:p="http://schemas.openxmlformats.org/presentationml/2006/main" xmlns:r="http://schemas.openxmlformats.org/officeDocument/2006/relationships">
+  <p:cSld>
+    <p:spTree>
+      <p:nvGrpSpPr>
+        <p:cNvPr id="1" name=""/>
+        <p:cNvGrpSpPr/>
+        <p:nvPr/>
+      </p:nvGrpSpPr>
+      <p:grpSpPr/>
+      <p:sp>
+        <p:nvSpPr>
+          <p:cNvPr id="2" name="Rectangle 1"/>
+          <p:cNvSpPr/>
+          <p:nvPr/>
+        </p:nvSpPr>
+        <p:spPr>
+          <a:xfrm>
+            <a:off x="0" y="0"/>
+            <a:ext cx="12188952" cy="6858000"/>
+          </a:xfrm>
+          <a:prstGeom prst="rect">
+            <a:avLst/>
+          </a:prstGeom>
+          <a:solidFill>
+            <a:srgbClr val="FFFFFF"/>
+          </a:solidFill>
+          <a:ln>
+            <a:noFill/>
+          </a:ln>
+        </p:spPr>
+        <p:style>
+          <a:lnRef idx="1">
+            <a:schemeClr val="accent1"/>
+          </a:lnRef>
+          <a:fillRef idx="3">
+            <a:schemeClr val="accent1"/>
+          </a:fillRef>
+          <a:effectRef idx="2">
+            <a:schemeClr val="accent1"/>
+          </a:effectRef>
+          <a:fontRef idx="minor">
+            <a:schemeClr val="lt1"/>
+          </a:fontRef>
+        </p:style>
+        <p:txBody>
+          <a:bodyPr rtlCol="0" anchor="ctr"/>
+          <a:lstStyle/>
+          <a:p>
+            <a:pPr algn="ctr"/>
+          </a:p>
+        </p:txBody>
+      </p:sp>
+      <p:sp>
+        <p:nvSpPr>
+          <p:cNvPr id="3" name="Rectangle 2"/>
+          <p:cNvSpPr/>
+          <p:nvPr/>
+        </p:nvSpPr>
+        <p:spPr>
+          <a:xfrm>
+            <a:off x="0" y="0"/>
+            <a:ext cx="12188952" cy="50292"/>
+          </a:xfrm>
+          <a:prstGeom prst="rect">
+            <a:avLst/>
+          </a:prstGeom>
+          <a:solidFill>
+            <a:srgbClr val="1F2C56"/>
+          </a:solidFill>
+          <a:ln>
+            <a:noFill/>
+          </a:ln>
+        </p:spPr>
+        <p:style>
+          <a:lnRef idx="1">
+            <a:schemeClr val="accent1"/>
+          </a:lnRef>
+          <a:fillRef idx="3">
+            <a:schemeClr val="accent1"/>
+          </a:fillRef>
+          <a:effectRef idx="2">
+            <a:schemeClr val="accent1"/>
+          </a:effectRef>
+          <a:fontRef idx="minor">
+            <a:schemeClr val="lt1"/>
+          </a:fontRef>
+        </p:style>
+        <p:txBody>
+          <a:bodyPr rtlCol="0" anchor="ctr"/>
+          <a:lstStyle/>
+          <a:p>
+            <a:pPr algn="ctr"/>
+          </a:p>
+        </p:txBody>
+      </p:sp>
+      <p:sp>
+        <p:nvSpPr>
+          <p:cNvPr id="4" name="TextBox 3"/>
+          <p:cNvSpPr txBox="1"/>
+          <p:nvPr/>
+        </p:nvSpPr>
+        <p:spPr>
+          <a:xfrm>
+            <a:off x="685800" y="109728"/>
+            <a:ext cx="10817352" cy="228600"/>
+          </a:xfrm>
+          <a:prstGeom prst="rect">
+            <a:avLst/>
+          </a:prstGeom>
+          <a:noFill/>
+        </p:spPr>
+        <p:txBody>
+          <a:bodyPr wrap="none">
+            <a:spAutoFit/>
+          </a:bodyPr>
+          <a:lstStyle/>
+          <a:p>
+            <a:pPr algn="l"/>
+            <a:r>
+              <a:rPr sz="750">
+                <a:solidFill>
+                  <a:srgbClr val="78808C"/>
+                </a:solidFill>
+                <a:latin typeface="JetBrains Mono"/>
+              </a:rPr>
+              <a:t>M21  ·  ÜBERSICHT</a:t>
+            </a:r>
+          </a:p>
+        </p:txBody>
+      </p:sp>
+      <p:sp>
+        <p:nvSpPr>
+          <p:cNvPr id="5" name="TextBox 4"/>
+          <p:cNvSpPr txBox="1"/>
+          <p:nvPr/>
+        </p:nvSpPr>
+        <p:spPr>
+          <a:xfrm>
+            <a:off x="685800" y="502920"/>
+            <a:ext cx="10817352" cy="594360"/>
+          </a:xfrm>
+          <a:prstGeom prst="rect">
+            <a:avLst/>
+          </a:prstGeom>
+          <a:noFill/>
+        </p:spPr>
+        <p:txBody>
+          <a:bodyPr wrap="square">
+            <a:spAutoFit/>
+          </a:bodyPr>
+          <a:lstStyle/>
+          <a:p>
+            <a:pPr algn="l"/>
+            <a:r>
+              <a:rPr sz="2000" b="1" i="0">
+                <a:solidFill>
+                  <a:srgbClr val="1F2C56"/>
+                </a:solidFill>
+                <a:latin typeface="Source Serif 4"/>
+              </a:rPr>
+              <a:t>Praxisfall: Metallbau Schnell GmbH (Heilbronn, fiktiv)</a:t>
+            </a:r>
+          </a:p>
+        </p:txBody>
+      </p:sp>
+      <p:sp>
+        <p:nvSpPr>
+          <p:cNvPr id="6" name="Rectangle 5"/>
+          <p:cNvSpPr/>
+          <p:nvPr/>
+        </p:nvSpPr>
+        <p:spPr>
+          <a:xfrm>
+            <a:off x="685800" y="1143000"/>
+            <a:ext cx="10817352" cy="25400"/>
+          </a:xfrm>
+          <a:prstGeom prst="rect">
+            <a:avLst/>
+          </a:prstGeom>
+          <a:solidFill>
+            <a:srgbClr val="D9C089"/>
+          </a:solidFill>
+          <a:ln>
+            <a:noFill/>
+          </a:ln>
+        </p:spPr>
+        <p:style>
+          <a:lnRef idx="1">
+            <a:schemeClr val="accent1"/>
+          </a:lnRef>
+          <a:fillRef idx="3">
+            <a:schemeClr val="accent1"/>
+          </a:fillRef>
+          <a:effectRef idx="2">
+            <a:schemeClr val="accent1"/>
+          </a:effectRef>
+          <a:fontRef idx="minor">
+            <a:schemeClr val="lt1"/>
+          </a:fontRef>
+        </p:style>
+        <p:txBody>
+          <a:bodyPr rtlCol="0" anchor="ctr"/>
+          <a:lstStyle/>
+          <a:p>
+            <a:pPr algn="ctr"/>
+          </a:p>
+        </p:txBody>
+      </p:sp>
+      <p:graphicFrame>
+        <p:nvGraphicFramePr>
+          <p:cNvPr id="7" name="Table 6"/>
+          <p:cNvGraphicFramePr>
+            <a:graphicFrameLocks noGrp="1"/>
+          </p:cNvGraphicFramePr>
+          <p:nvPr/>
+        </p:nvGraphicFramePr>
+        <p:xfrm>
+          <a:off x="685800" y="1417320"/>
+          <a:ext cx="10817352" cy="3456432"/>
+        </p:xfrm>
+        <a:graphic>
+          <a:graphicData uri="http://schemas.openxmlformats.org/drawingml/2006/table">
+            <a:tbl>
+              <a:tblPr firstRow="1" bandRow="1">
+                <a:tableStyleId>{5C22544A-7EE6-4342-B048-85BDC9FD1C3A}</a:tableStyleId>
+              </a:tblPr>
+              <a:tblGrid>
+                <a:gridCol w="2163470"/>
+                <a:gridCol w="2163470"/>
+                <a:gridCol w="2163470"/>
+                <a:gridCol w="2163470"/>
+                <a:gridCol w="2163472"/>
+              </a:tblGrid>
+              <a:tr h="384048">
+                <a:tc>
+                  <a:txBody>
+                    <a:bodyPr/>
+                    <a:lstStyle/>
+                    <a:p>
+                      <a:r>
+                        <a:rPr sz="1100" b="1">
+                          <a:solidFill>
+                            <a:srgbClr val="FFFFFF"/>
+                          </a:solidFill>
+                          <a:latin typeface="Arial"/>
+                        </a:rPr>
+                        <a:t>Position</a:t>
+                      </a:r>
+                    </a:p>
+                  </a:txBody>
+                  <a:tcPr>
+                    <a:solidFill>
+                      <a:srgbClr val="1F2C56"/>
+                    </a:solidFill>
+                  </a:tcPr>
+                </a:tc>
+                <a:tc>
+                  <a:txBody>
+                    <a:bodyPr/>
+                    <a:lstStyle/>
+                    <a:p>
+                      <a:r>
+                        <a:rPr sz="1100" b="1">
+                          <a:solidFill>
+                            <a:srgbClr val="FFFFFF"/>
+                          </a:solidFill>
+                          <a:latin typeface="Arial"/>
+                        </a:rPr>
+                        <a:t>2022</a:t>
+                      </a:r>
+                    </a:p>
+                  </a:txBody>
+                  <a:tcPr>
+                    <a:solidFill>
+                      <a:srgbClr val="1F2C56"/>
+                    </a:solidFill>
+                  </a:tcPr>
+                </a:tc>
+                <a:tc>
+                  <a:txBody>
+                    <a:bodyPr/>
+                    <a:lstStyle/>
+                    <a:p>
+                      <a:r>
+                        <a:rPr sz="1100" b="1">
+                          <a:solidFill>
+                            <a:srgbClr val="FFFFFF"/>
+                          </a:solidFill>
+                          <a:latin typeface="Arial"/>
+                        </a:rPr>
+                        <a:t>2023</a:t>
+                      </a:r>
+                    </a:p>
+                  </a:txBody>
+                  <a:tcPr>
+                    <a:solidFill>
+                      <a:srgbClr val="1F2C56"/>
+                    </a:solidFill>
+                  </a:tcPr>
+                </a:tc>
+                <a:tc>
+                  <a:txBody>
+                    <a:bodyPr/>
+                    <a:lstStyle/>
+                    <a:p>
+                      <a:r>
+                        <a:rPr sz="1100" b="1">
+                          <a:solidFill>
+                            <a:srgbClr val="FFFFFF"/>
+                          </a:solidFill>
+                          <a:latin typeface="Arial"/>
+                        </a:rPr>
+                        <a:t>2024</a:t>
+                      </a:r>
+                    </a:p>
+                  </a:txBody>
+                  <a:tcPr>
+                    <a:solidFill>
+                      <a:srgbClr val="1F2C56"/>
+                    </a:solidFill>
+                  </a:tcPr>
+                </a:tc>
+                <a:tc>
+                  <a:txBody>
+                    <a:bodyPr/>
+                    <a:lstStyle/>
+                    <a:p>
+                      <a:r>
+                        <a:rPr sz="1100" b="1">
+                          <a:solidFill>
+                            <a:srgbClr val="FFFFFF"/>
+                          </a:solidFill>
+                          <a:latin typeface="Arial"/>
+                        </a:rPr>
+                        <a:t>Trend</a:t>
+                      </a:r>
+                    </a:p>
+                  </a:txBody>
+                  <a:tcPr>
+                    <a:solidFill>
+                      <a:srgbClr val="1F2C56"/>
+                    </a:solidFill>
+                  </a:tcPr>
+                </a:tc>
+              </a:tr>
+              <a:tr h="384048">
+                <a:tc>
+                  <a:txBody>
+                    <a:bodyPr/>
+                    <a:lstStyle/>
+                    <a:p>
+                      <a:r>
+                        <a:rPr sz="1050">
+                          <a:solidFill>
+                            <a:srgbClr val="3D5466"/>
+                          </a:solidFill>
+                          <a:latin typeface="Arial"/>
+                        </a:rPr>
+                        <a:t>Umsatz</a:t>
+                      </a:r>
+                    </a:p>
+                  </a:txBody>
+                  <a:tcPr/>
+                </a:tc>
+                <a:tc>
+                  <a:txBody>
+                    <a:bodyPr/>
+                    <a:lstStyle/>
+                    <a:p>
+                      <a:r>
+                        <a:rPr sz="1050">
+                          <a:solidFill>
+                            <a:srgbClr val="3D5466"/>
+                          </a:solidFill>
+                          <a:latin typeface="Arial"/>
+                        </a:rPr>
+                        <a:t>4.200</a:t>
+                      </a:r>
+                    </a:p>
+                  </a:txBody>
+                  <a:tcPr/>
+                </a:tc>
+                <a:tc>
+                  <a:txBody>
+                    <a:bodyPr/>
+                    <a:lstStyle/>
+                    <a:p>
+                      <a:r>
+                        <a:rPr sz="1050">
+                          <a:solidFill>
+                            <a:srgbClr val="3D5466"/>
+                          </a:solidFill>
+                          <a:latin typeface="Arial"/>
+                        </a:rPr>
+                        <a:t>4.380</a:t>
+                      </a:r>
+                    </a:p>
+                  </a:txBody>
+                  <a:tcPr/>
+                </a:tc>
+                <a:tc>
+                  <a:txBody>
+                    <a:bodyPr/>
+                    <a:lstStyle/>
+                    <a:p>
+                      <a:r>
+                        <a:rPr sz="1050">
+                          <a:solidFill>
+                            <a:srgbClr val="3D5466"/>
+                          </a:solidFill>
+                          <a:latin typeface="Arial"/>
+                        </a:rPr>
+                        <a:t>4.510</a:t>
+                      </a:r>
+                    </a:p>
+                  </a:txBody>
+                  <a:tcPr/>
+                </a:tc>
+                <a:tc>
+                  <a:txBody>
+                    <a:bodyPr/>
+                    <a:lstStyle/>
+                    <a:p>
+                      <a:r>
+                        <a:rPr sz="1050">
+                          <a:solidFill>
+                            <a:srgbClr val="3D5466"/>
+                          </a:solidFill>
+                          <a:latin typeface="Arial"/>
+                        </a:rPr>
+                        <a:t>▲</a:t>
+                      </a:r>
+                    </a:p>
+                  </a:txBody>
+                  <a:tcPr/>
+                </a:tc>
+              </a:tr>
+              <a:tr h="384048">
+                <a:tc>
+                  <a:txBody>
+                    <a:bodyPr/>
+                    <a:lstStyle/>
+                    <a:p>
+                      <a:r>
+                        <a:rPr sz="1050">
+                          <a:solidFill>
+                            <a:srgbClr val="3D5466"/>
+                          </a:solidFill>
+                          <a:latin typeface="Arial"/>
+                        </a:rPr>
+                        <a:t>Materialkosten</a:t>
+                      </a:r>
+                    </a:p>
+                  </a:txBody>
+                  <a:tcPr/>
+                </a:tc>
+                <a:tc>
+                  <a:txBody>
+                    <a:bodyPr/>
+                    <a:lstStyle/>
+                    <a:p>
+                      <a:r>
+                        <a:rPr sz="1050">
+                          <a:solidFill>
+                            <a:srgbClr val="3D5466"/>
+                          </a:solidFill>
+                          <a:latin typeface="Arial"/>
+                        </a:rPr>
+                        <a:t>−1.200</a:t>
+                      </a:r>
+                    </a:p>
+                  </a:txBody>
+                  <a:tcPr/>
+                </a:tc>
+                <a:tc>
+                  <a:txBody>
+                    <a:bodyPr/>
+                    <a:lstStyle/>
+                    <a:p>
+                      <a:r>
+                        <a:rPr sz="1050">
+                          <a:solidFill>
+                            <a:srgbClr val="3D5466"/>
+                          </a:solidFill>
+                          <a:latin typeface="Arial"/>
+                        </a:rPr>
+                        <a:t>−1.280</a:t>
+                      </a:r>
+                    </a:p>
+                  </a:txBody>
+                  <a:tcPr/>
+                </a:tc>
+                <a:tc>
+                  <a:txBody>
+                    <a:bodyPr/>
+                    <a:lstStyle/>
+                    <a:p>
+                      <a:r>
+                        <a:rPr sz="1050">
+                          <a:solidFill>
+                            <a:srgbClr val="3D5466"/>
+                          </a:solidFill>
+                          <a:latin typeface="Arial"/>
+                        </a:rPr>
+                        <a:t>−1.320</a:t>
+                      </a:r>
+                    </a:p>
+                  </a:txBody>
+                  <a:tcPr/>
+                </a:tc>
+                <a:tc>
+                  <a:txBody>
+                    <a:bodyPr/>
+                    <a:lstStyle/>
+                    <a:p>
+                      <a:r>
+                        <a:rPr sz="1050">
+                          <a:solidFill>
+                            <a:srgbClr val="3D5466"/>
+                          </a:solidFill>
+                          <a:latin typeface="Arial"/>
+                        </a:rPr>
+                        <a:t>▲</a:t>
+                      </a:r>
+                    </a:p>
+                  </a:txBody>
+                  <a:tcPr/>
+                </a:tc>
+              </a:tr>
+              <a:tr h="384048">
+                <a:tc>
+                  <a:txBody>
+                    <a:bodyPr/>
+                    <a:lstStyle/>
+                    <a:p>
+                      <a:r>
+                        <a:rPr sz="1050">
+                          <a:solidFill>
+                            <a:srgbClr val="3D5466"/>
+                          </a:solidFill>
+                          <a:latin typeface="Arial"/>
+                        </a:rPr>
+                        <a:t>Personalkosten</a:t>
+                      </a:r>
+                    </a:p>
+                  </a:txBody>
+                  <a:tcPr/>
+                </a:tc>
+                <a:tc>
+                  <a:txBody>
+                    <a:bodyPr/>
+                    <a:lstStyle/>
+                    <a:p>
+                      <a:r>
+                        <a:rPr sz="1050">
+                          <a:solidFill>
+                            <a:srgbClr val="3D5466"/>
+                          </a:solidFill>
+                          <a:latin typeface="Arial"/>
+                        </a:rPr>
+                        <a:t>−1.850</a:t>
+                      </a:r>
+                    </a:p>
+                  </a:txBody>
+                  <a:tcPr/>
+                </a:tc>
+                <a:tc>
+                  <a:txBody>
+                    <a:bodyPr/>
+                    <a:lstStyle/>
+                    <a:p>
+                      <a:r>
+                        <a:rPr sz="1050">
+                          <a:solidFill>
+                            <a:srgbClr val="3D5466"/>
+                          </a:solidFill>
+                          <a:latin typeface="Arial"/>
+                        </a:rPr>
+                        <a:t>−1.920</a:t>
+                      </a:r>
+                    </a:p>
+                  </a:txBody>
+                  <a:tcPr/>
+                </a:tc>
+                <a:tc>
+                  <a:txBody>
+                    <a:bodyPr/>
+                    <a:lstStyle/>
+                    <a:p>
+                      <a:r>
+                        <a:rPr sz="1050">
+                          <a:solidFill>
+                            <a:srgbClr val="3D5466"/>
+                          </a:solidFill>
+                          <a:latin typeface="Arial"/>
+                        </a:rPr>
+                        <a:t>−2.010</a:t>
+                      </a:r>
+                    </a:p>
+                  </a:txBody>
+                  <a:tcPr/>
+                </a:tc>
+                <a:tc>
+                  <a:txBody>
+                    <a:bodyPr/>
+                    <a:lstStyle/>
+                    <a:p>
+                      <a:r>
+                        <a:rPr sz="1050">
+                          <a:solidFill>
+                            <a:srgbClr val="3D5466"/>
+                          </a:solidFill>
+                          <a:latin typeface="Arial"/>
+                        </a:rPr>
+                        <a:t>▲▲</a:t>
+                      </a:r>
+                    </a:p>
+                  </a:txBody>
+                  <a:tcPr/>
+                </a:tc>
+              </a:tr>
+              <a:tr h="384048">
+                <a:tc>
+                  <a:txBody>
+                    <a:bodyPr/>
+                    <a:lstStyle/>
+                    <a:p>
+                      <a:r>
+                        <a:rPr sz="1050">
+                          <a:solidFill>
+                            <a:srgbClr val="3D5466"/>
+                          </a:solidFill>
+                          <a:latin typeface="Arial"/>
+                        </a:rPr>
+                        <a:t>Abschreibungen</a:t>
+                      </a:r>
+                    </a:p>
+                  </a:txBody>
+                  <a:tcPr/>
+                </a:tc>
+                <a:tc>
+                  <a:txBody>
+                    <a:bodyPr/>
+                    <a:lstStyle/>
+                    <a:p>
+                      <a:r>
+                        <a:rPr sz="1050">
+                          <a:solidFill>
+                            <a:srgbClr val="3D5466"/>
+                          </a:solidFill>
+                          <a:latin typeface="Arial"/>
+                        </a:rPr>
+                        <a:t>−110</a:t>
+                      </a:r>
+                    </a:p>
+                  </a:txBody>
+                  <a:tcPr/>
+                </a:tc>
+                <a:tc>
+                  <a:txBody>
+                    <a:bodyPr/>
+                    <a:lstStyle/>
+                    <a:p>
+                      <a:r>
+                        <a:rPr sz="1050">
+                          <a:solidFill>
+                            <a:srgbClr val="3D5466"/>
+                          </a:solidFill>
+                          <a:latin typeface="Arial"/>
+                        </a:rPr>
+                        <a:t>−110</a:t>
+                      </a:r>
+                    </a:p>
+                  </a:txBody>
+                  <a:tcPr/>
+                </a:tc>
+                <a:tc>
+                  <a:txBody>
+                    <a:bodyPr/>
+                    <a:lstStyle/>
+                    <a:p>
+                      <a:r>
+                        <a:rPr sz="1050">
+                          <a:solidFill>
+                            <a:srgbClr val="3D5466"/>
+                          </a:solidFill>
+                          <a:latin typeface="Arial"/>
+                        </a:rPr>
+                        <a:t>−110</a:t>
+                      </a:r>
+                    </a:p>
+                  </a:txBody>
+                  <a:tcPr/>
+                </a:tc>
+                <a:tc>
+                  <a:txBody>
+                    <a:bodyPr/>
+                    <a:lstStyle/>
+                    <a:p>
+                      <a:r>
+                        <a:rPr sz="1050">
+                          <a:solidFill>
+                            <a:srgbClr val="3D5466"/>
+                          </a:solidFill>
+                          <a:latin typeface="Arial"/>
+                        </a:rPr>
+                        <a:t>→</a:t>
+                      </a:r>
+                    </a:p>
+                  </a:txBody>
+                  <a:tcPr/>
+                </a:tc>
+              </a:tr>
+              <a:tr h="384048">
+                <a:tc>
+                  <a:txBody>
+                    <a:bodyPr/>
+                    <a:lstStyle/>
+                    <a:p>
+                      <a:r>
+                        <a:rPr sz="1050">
+                          <a:solidFill>
+                            <a:srgbClr val="3D5466"/>
+                          </a:solidFill>
+                          <a:latin typeface="Arial"/>
+                        </a:rPr>
+                        <a:t>Sonstige Kosten</a:t>
+                      </a:r>
+                    </a:p>
+                  </a:txBody>
+                  <a:tcPr/>
+                </a:tc>
+                <a:tc>
+                  <a:txBody>
+                    <a:bodyPr/>
+                    <a:lstStyle/>
+                    <a:p>
+                      <a:r>
+                        <a:rPr sz="1050">
+                          <a:solidFill>
+                            <a:srgbClr val="3D5466"/>
+                          </a:solidFill>
+                          <a:latin typeface="Arial"/>
+                        </a:rPr>
+                        <a:t>−405</a:t>
+                      </a:r>
+                    </a:p>
+                  </a:txBody>
+                  <a:tcPr/>
+                </a:tc>
+                <a:tc>
+                  <a:txBody>
+                    <a:bodyPr/>
+                    <a:lstStyle/>
+                    <a:p>
+                      <a:r>
+                        <a:rPr sz="1050">
+                          <a:solidFill>
+                            <a:srgbClr val="3D5466"/>
+                          </a:solidFill>
+                          <a:latin typeface="Arial"/>
+                        </a:rPr>
+                        <a:t>−435</a:t>
+                      </a:r>
+                    </a:p>
+                  </a:txBody>
+                  <a:tcPr/>
+                </a:tc>
+                <a:tc>
+                  <a:txBody>
+                    <a:bodyPr/>
+                    <a:lstStyle/>
+                    <a:p>
+                      <a:r>
+                        <a:rPr sz="1050">
+                          <a:solidFill>
+                            <a:srgbClr val="3D5466"/>
+                          </a:solidFill>
+                          <a:latin typeface="Arial"/>
+                        </a:rPr>
+                        <a:t>−455</a:t>
+                      </a:r>
+                    </a:p>
+                  </a:txBody>
+                  <a:tcPr/>
+                </a:tc>
+                <a:tc>
+                  <a:txBody>
+                    <a:bodyPr/>
+                    <a:lstStyle/>
+                    <a:p>
+                      <a:r>
+                        <a:rPr sz="1050">
+                          <a:solidFill>
+                            <a:srgbClr val="3D5466"/>
+                          </a:solidFill>
+                          <a:latin typeface="Arial"/>
+                        </a:rPr>
+                        <a:t>▲</a:t>
+                      </a:r>
+                    </a:p>
+                  </a:txBody>
+                  <a:tcPr/>
+                </a:tc>
+              </a:tr>
+              <a:tr h="384048">
+                <a:tc>
+                  <a:txBody>
+                    <a:bodyPr/>
+                    <a:lstStyle/>
+                    <a:p>
+                      <a:r>
+                        <a:rPr sz="1050">
+                          <a:solidFill>
+                            <a:srgbClr val="3D5466"/>
+                          </a:solidFill>
+                          <a:latin typeface="Arial"/>
+                        </a:rPr>
+                        <a:t>EBIT</a:t>
+                      </a:r>
+                    </a:p>
+                  </a:txBody>
+                  <a:tcPr/>
+                </a:tc>
+                <a:tc>
+                  <a:txBody>
+                    <a:bodyPr/>
+                    <a:lstStyle/>
+                    <a:p>
+                      <a:r>
+                        <a:rPr sz="1050">
+                          <a:solidFill>
+                            <a:srgbClr val="3D5466"/>
+                          </a:solidFill>
+                          <a:latin typeface="Arial"/>
+                        </a:rPr>
+                        <a:t>375</a:t>
+                      </a:r>
+                    </a:p>
+                  </a:txBody>
+                  <a:tcPr/>
+                </a:tc>
+                <a:tc>
+                  <a:txBody>
+                    <a:bodyPr/>
+                    <a:lstStyle/>
+                    <a:p>
+                      <a:r>
+                        <a:rPr sz="1050">
+                          <a:solidFill>
+                            <a:srgbClr val="3D5466"/>
+                          </a:solidFill>
+                          <a:latin typeface="Arial"/>
+                        </a:rPr>
+                        <a:t>321</a:t>
+                      </a:r>
+                    </a:p>
+                  </a:txBody>
+                  <a:tcPr/>
+                </a:tc>
+                <a:tc>
+                  <a:txBody>
+                    <a:bodyPr/>
+                    <a:lstStyle/>
+                    <a:p>
+                      <a:r>
+                        <a:rPr sz="1050">
+                          <a:solidFill>
+                            <a:srgbClr val="3D5466"/>
+                          </a:solidFill>
+                          <a:latin typeface="Arial"/>
+                        </a:rPr>
+                        <a:t>272</a:t>
+                      </a:r>
+                    </a:p>
+                  </a:txBody>
+                  <a:tcPr/>
+                </a:tc>
+                <a:tc>
+                  <a:txBody>
+                    <a:bodyPr/>
+                    <a:lstStyle/>
+                    <a:p>
+                      <a:r>
+                        <a:rPr sz="1050">
+                          <a:solidFill>
+                            <a:srgbClr val="3D5466"/>
+                          </a:solidFill>
+                          <a:latin typeface="Arial"/>
+                        </a:rPr>
+                        <a:t>▼▼</a:t>
+                      </a:r>
+                    </a:p>
+                  </a:txBody>
+                  <a:tcPr/>
+                </a:tc>
+              </a:tr>
+              <a:tr h="384048">
+                <a:tc>
+                  <a:txBody>
+                    <a:bodyPr/>
+                    <a:lstStyle/>
+                    <a:p>
+                      <a:r>
+                        <a:rPr sz="1050">
+                          <a:solidFill>
+                            <a:srgbClr val="3D5466"/>
+                          </a:solidFill>
+                          <a:latin typeface="Arial"/>
+                        </a:rPr>
+                        <a:t>Zinsen</a:t>
+                      </a:r>
+                    </a:p>
+                  </a:txBody>
+                  <a:tcPr/>
+                </a:tc>
+                <a:tc>
+                  <a:txBody>
+                    <a:bodyPr/>
+                    <a:lstStyle/>
+                    <a:p>
+                      <a:r>
+                        <a:rPr sz="1050">
+                          <a:solidFill>
+                            <a:srgbClr val="3D5466"/>
+                          </a:solidFill>
+                          <a:latin typeface="Arial"/>
+                        </a:rPr>
+                        <a:t>−35</a:t>
+                      </a:r>
+                    </a:p>
+                  </a:txBody>
+                  <a:tcPr/>
+                </a:tc>
+                <a:tc>
+                  <a:txBody>
+                    <a:bodyPr/>
+                    <a:lstStyle/>
+                    <a:p>
+                      <a:r>
+                        <a:rPr sz="1050">
+                          <a:solidFill>
+                            <a:srgbClr val="3D5466"/>
+                          </a:solidFill>
+                          <a:latin typeface="Arial"/>
+                        </a:rPr>
+                        <a:t>−31</a:t>
+                      </a:r>
+                    </a:p>
+                  </a:txBody>
+                  <a:tcPr/>
+                </a:tc>
+                <a:tc>
+                  <a:txBody>
+                    <a:bodyPr/>
+                    <a:lstStyle/>
+                    <a:p>
+                      <a:r>
+                        <a:rPr sz="1050">
+                          <a:solidFill>
+                            <a:srgbClr val="3D5466"/>
+                          </a:solidFill>
+                          <a:latin typeface="Arial"/>
+                        </a:rPr>
+                        <a:t>−29</a:t>
+                      </a:r>
+                    </a:p>
+                  </a:txBody>
+                  <a:tcPr/>
+                </a:tc>
+                <a:tc>
+                  <a:txBody>
+                    <a:bodyPr/>
+                    <a:lstStyle/>
+                    <a:p>
+                      <a:r>
+                        <a:rPr sz="1050">
+                          <a:solidFill>
+                            <a:srgbClr val="3D5466"/>
+                          </a:solidFill>
+                          <a:latin typeface="Arial"/>
+                        </a:rPr>
+                        <a:t>▼</a:t>
+                      </a:r>
+                    </a:p>
+                  </a:txBody>
+                  <a:tcPr/>
+                </a:tc>
+              </a:tr>
+              <a:tr h="384048">
+                <a:tc>
+                  <a:txBody>
+                    <a:bodyPr/>
+                    <a:lstStyle/>
+                    <a:p>
+                      <a:r>
+                        <a:rPr sz="1050">
+                          <a:solidFill>
+                            <a:srgbClr val="3D5466"/>
+                          </a:solidFill>
+                          <a:latin typeface="Arial"/>
+                        </a:rPr>
+                        <a:t>Netto-Gewinn</a:t>
+                      </a:r>
+                    </a:p>
+                  </a:txBody>
+                  <a:tcPr/>
+                </a:tc>
+                <a:tc>
+                  <a:txBody>
+                    <a:bodyPr/>
+                    <a:lstStyle/>
+                    <a:p>
+                      <a:r>
+                        <a:rPr sz="1050">
+                          <a:solidFill>
+                            <a:srgbClr val="3D5466"/>
+                          </a:solidFill>
+                          <a:latin typeface="Arial"/>
+                        </a:rPr>
+                        <a:t>238</a:t>
+                      </a:r>
+                    </a:p>
+                  </a:txBody>
+                  <a:tcPr/>
+                </a:tc>
+                <a:tc>
+                  <a:txBody>
+                    <a:bodyPr/>
+                    <a:lstStyle/>
+                    <a:p>
+                      <a:r>
+                        <a:rPr sz="1050">
+                          <a:solidFill>
+                            <a:srgbClr val="3D5466"/>
+                          </a:solidFill>
+                          <a:latin typeface="Arial"/>
+                        </a:rPr>
+                        <a:t>203</a:t>
+                      </a:r>
+                    </a:p>
+                  </a:txBody>
+                  <a:tcPr/>
+                </a:tc>
+                <a:tc>
+                  <a:txBody>
+                    <a:bodyPr/>
+                    <a:lstStyle/>
+                    <a:p>
+                      <a:r>
+                        <a:rPr sz="1050">
+                          <a:solidFill>
+                            <a:srgbClr val="3D5466"/>
+                          </a:solidFill>
+                          <a:latin typeface="Arial"/>
+                        </a:rPr>
+                        <a:t>170</a:t>
+                      </a:r>
+                    </a:p>
+                  </a:txBody>
+                  <a:tcPr/>
+                </a:tc>
+                <a:tc>
+                  <a:txBody>
+                    <a:bodyPr/>
+                    <a:lstStyle/>
+                    <a:p>
+                      <a:r>
+                        <a:rPr sz="1050">
+                          <a:solidFill>
+                            <a:srgbClr val="3D5466"/>
+                          </a:solidFill>
+                          <a:latin typeface="Arial"/>
+                        </a:rPr>
+                        <a:t>▼▼</a:t>
+                      </a:r>
+                    </a:p>
+                  </a:txBody>
+                  <a:tcPr/>
+                </a:tc>
+              </a:tr>
+            </a:tbl>
+          </a:graphicData>
+        </a:graphic>
+      </p:graphicFrame>
+      <p:sp>
+        <p:nvSpPr>
+          <p:cNvPr id="8" name="Rectangle 7"/>
+          <p:cNvSpPr/>
+          <p:nvPr/>
+        </p:nvSpPr>
+        <p:spPr>
+          <a:xfrm>
+            <a:off x="0" y="6510528"/>
+            <a:ext cx="12188952" cy="347472"/>
+          </a:xfrm>
+          <a:prstGeom prst="rect">
+            <a:avLst/>
+          </a:prstGeom>
+          <a:solidFill>
+            <a:srgbClr val="0A1937"/>
+          </a:solidFill>
+          <a:ln>
+            <a:noFill/>
+          </a:ln>
+        </p:spPr>
+        <p:style>
+          <a:lnRef idx="1">
+            <a:schemeClr val="accent1"/>
+          </a:lnRef>
+          <a:fillRef idx="3">
+            <a:schemeClr val="accent1"/>
+          </a:fillRef>
+          <a:effectRef idx="2">
+            <a:schemeClr val="accent1"/>
+          </a:effectRef>
+          <a:fontRef idx="minor">
+            <a:schemeClr val="lt1"/>
+          </a:fontRef>
+        </p:style>
+        <p:txBody>
+          <a:bodyPr rtlCol="0" anchor="ctr"/>
+          <a:lstStyle/>
+          <a:p>
+            <a:pPr algn="ctr"/>
+          </a:p>
+        </p:txBody>
+      </p:sp>
+      <p:sp>
+        <p:nvSpPr>
+          <p:cNvPr id="9" name="TextBox 8"/>
+          <p:cNvSpPr txBox="1"/>
+          <p:nvPr/>
+        </p:nvSpPr>
+        <p:spPr>
+          <a:xfrm>
+            <a:off x="685800" y="6583680"/>
+            <a:ext cx="6490411" cy="256032"/>
+          </a:xfrm>
+          <a:prstGeom prst="rect">
+            <a:avLst/>
+          </a:prstGeom>
+          <a:noFill/>
+        </p:spPr>
+        <p:txBody>
+          <a:bodyPr wrap="none">
+            <a:spAutoFit/>
+          </a:bodyPr>
+          <a:lstStyle/>
+          <a:p>
+            <a:pPr algn="l"/>
+            <a:r>
+              <a:rPr sz="700">
+                <a:solidFill>
+                  <a:srgbClr val="A0B4D2"/>
+                </a:solidFill>
+                <a:latin typeface="JetBrains Mono"/>
+              </a:rPr>
+              <a:t>Benedikt Zoller Coaching  ·  FKB Campus  ·  M21</a:t>
+            </a:r>
+          </a:p>
+        </p:txBody>
+      </p:sp>
+      <p:sp>
+        <p:nvSpPr>
+          <p:cNvPr id="10" name="TextBox 9"/>
+          <p:cNvSpPr txBox="1"/>
+          <p:nvPr/>
+        </p:nvSpPr>
+        <p:spPr>
+          <a:xfrm>
+            <a:off x="7176211" y="6583680"/>
+            <a:ext cx="4326940" cy="256032"/>
+          </a:xfrm>
+          <a:prstGeom prst="rect">
+            <a:avLst/>
+          </a:prstGeom>
+          <a:noFill/>
+        </p:spPr>
+        <p:txBody>
+          <a:bodyPr wrap="none">
+            <a:spAutoFit/>
+          </a:bodyPr>
+          <a:lstStyle/>
+          <a:p>
+            <a:pPr algn="r"/>
+            <a:r>
+              <a:rPr sz="700">
+                <a:solidFill>
+                  <a:srgbClr val="A0B4D2"/>
+                </a:solidFill>
+                <a:latin typeface="JetBrains Mono"/>
+              </a:rPr>
+              <a:t>Übersicht</a:t>
+            </a:r>
+          </a:p>
+        </p:txBody>
+      </p:sp>
+    </p:spTree>
+  </p:cSld>
+  <p:clrMapOvr>
+    <a:masterClrMapping/>
+  </p:clrMapOvr>
+</p:sld>
+</file>
+
+<file path=ppt/slides/slide18.xml><?xml version="1.0" encoding="utf-8"?>
+<p:sld xmlns:a="http://schemas.openxmlformats.org/drawingml/2006/main" xmlns:p="http://schemas.openxmlformats.org/presentationml/2006/main" xmlns:r="http://schemas.openxmlformats.org/officeDocument/2006/relationships">
+  <p:cSld>
+    <p:spTree>
+      <p:nvGrpSpPr>
+        <p:cNvPr id="1" name=""/>
+        <p:cNvGrpSpPr/>
+        <p:nvPr/>
+      </p:nvGrpSpPr>
+      <p:grpSpPr/>
+      <p:sp>
+        <p:nvSpPr>
+          <p:cNvPr id="2" name="Rectangle 1"/>
+          <p:cNvSpPr/>
+          <p:nvPr/>
+        </p:nvSpPr>
+        <p:spPr>
+          <a:xfrm>
+            <a:off x="0" y="0"/>
+            <a:ext cx="12188952" cy="6858000"/>
+          </a:xfrm>
+          <a:prstGeom prst="rect">
+            <a:avLst/>
+          </a:prstGeom>
+          <a:solidFill>
+            <a:srgbClr val="FFFFFF"/>
+          </a:solidFill>
+          <a:ln>
+            <a:noFill/>
+          </a:ln>
+        </p:spPr>
+        <p:style>
+          <a:lnRef idx="1">
+            <a:schemeClr val="accent1"/>
+          </a:lnRef>
+          <a:fillRef idx="3">
+            <a:schemeClr val="accent1"/>
+          </a:fillRef>
+          <a:effectRef idx="2">
+            <a:schemeClr val="accent1"/>
+          </a:effectRef>
+          <a:fontRef idx="minor">
+            <a:schemeClr val="lt1"/>
+          </a:fontRef>
+        </p:style>
+        <p:txBody>
+          <a:bodyPr rtlCol="0" anchor="ctr"/>
+          <a:lstStyle/>
+          <a:p>
+            <a:pPr algn="ctr"/>
+          </a:p>
+        </p:txBody>
+      </p:sp>
+      <p:sp>
+        <p:nvSpPr>
+          <p:cNvPr id="3" name="Rectangle 2"/>
+          <p:cNvSpPr/>
+          <p:nvPr/>
+        </p:nvSpPr>
+        <p:spPr>
+          <a:xfrm>
+            <a:off x="0" y="0"/>
+            <a:ext cx="12188952" cy="50292"/>
+          </a:xfrm>
+          <a:prstGeom prst="rect">
+            <a:avLst/>
+          </a:prstGeom>
+          <a:solidFill>
+            <a:srgbClr val="1F2C56"/>
+          </a:solidFill>
+          <a:ln>
+            <a:noFill/>
+          </a:ln>
+        </p:spPr>
+        <p:style>
+          <a:lnRef idx="1">
+            <a:schemeClr val="accent1"/>
+          </a:lnRef>
+          <a:fillRef idx="3">
+            <a:schemeClr val="accent1"/>
+          </a:fillRef>
+          <a:effectRef idx="2">
+            <a:schemeClr val="accent1"/>
+          </a:effectRef>
+          <a:fontRef idx="minor">
+            <a:schemeClr val="lt1"/>
+          </a:fontRef>
+        </p:style>
+        <p:txBody>
+          <a:bodyPr rtlCol="0" anchor="ctr"/>
+          <a:lstStyle/>
+          <a:p>
+            <a:pPr algn="ctr"/>
+          </a:p>
+        </p:txBody>
+      </p:sp>
+      <p:sp>
+        <p:nvSpPr>
+          <p:cNvPr id="4" name="TextBox 3"/>
+          <p:cNvSpPr txBox="1"/>
+          <p:nvPr/>
+        </p:nvSpPr>
+        <p:spPr>
+          <a:xfrm>
+            <a:off x="685800" y="109728"/>
+            <a:ext cx="10817352" cy="228600"/>
+          </a:xfrm>
+          <a:prstGeom prst="rect">
+            <a:avLst/>
+          </a:prstGeom>
+          <a:noFill/>
+        </p:spPr>
+        <p:txBody>
+          <a:bodyPr wrap="none">
+            <a:spAutoFit/>
+          </a:bodyPr>
+          <a:lstStyle/>
+          <a:p>
+            <a:pPr algn="l"/>
+            <a:r>
+              <a:rPr sz="750">
+                <a:solidFill>
+                  <a:srgbClr val="78808C"/>
+                </a:solidFill>
+                <a:latin typeface="JetBrains Mono"/>
+              </a:rPr>
+              <a:t>M21  ·  ÜBERSICHT</a:t>
+            </a:r>
+          </a:p>
+        </p:txBody>
+      </p:sp>
+      <p:sp>
+        <p:nvSpPr>
+          <p:cNvPr id="5" name="TextBox 4"/>
+          <p:cNvSpPr txBox="1"/>
+          <p:nvPr/>
+        </p:nvSpPr>
+        <p:spPr>
+          <a:xfrm>
+            <a:off x="685800" y="502920"/>
+            <a:ext cx="10817352" cy="594360"/>
+          </a:xfrm>
+          <a:prstGeom prst="rect">
+            <a:avLst/>
+          </a:prstGeom>
+          <a:noFill/>
+        </p:spPr>
+        <p:txBody>
+          <a:bodyPr wrap="square">
+            <a:spAutoFit/>
+          </a:bodyPr>
+          <a:lstStyle/>
+          <a:p>
+            <a:pPr algn="l"/>
+            <a:r>
+              <a:rPr sz="2000" b="1" i="0">
+                <a:solidFill>
+                  <a:srgbClr val="1F2C56"/>
+                </a:solidFill>
+                <a:latin typeface="Source Serif 4"/>
+              </a:rPr>
+              <a:t>Praxisfall: Metallbau Schnell GmbH (Heilbronn, fiktiv)</a:t>
+            </a:r>
+          </a:p>
+        </p:txBody>
+      </p:sp>
+      <p:sp>
+        <p:nvSpPr>
+          <p:cNvPr id="6" name="Rectangle 5"/>
+          <p:cNvSpPr/>
+          <p:nvPr/>
+        </p:nvSpPr>
+        <p:spPr>
+          <a:xfrm>
+            <a:off x="685800" y="1143000"/>
+            <a:ext cx="10817352" cy="25400"/>
+          </a:xfrm>
+          <a:prstGeom prst="rect">
+            <a:avLst/>
+          </a:prstGeom>
+          <a:solidFill>
+            <a:srgbClr val="D9C089"/>
+          </a:solidFill>
+          <a:ln>
+            <a:noFill/>
+          </a:ln>
+        </p:spPr>
+        <p:style>
+          <a:lnRef idx="1">
+            <a:schemeClr val="accent1"/>
+          </a:lnRef>
+          <a:fillRef idx="3">
+            <a:schemeClr val="accent1"/>
+          </a:fillRef>
+          <a:effectRef idx="2">
+            <a:schemeClr val="accent1"/>
+          </a:effectRef>
+          <a:fontRef idx="minor">
+            <a:schemeClr val="lt1"/>
+          </a:fontRef>
+        </p:style>
+        <p:txBody>
+          <a:bodyPr rtlCol="0" anchor="ctr"/>
+          <a:lstStyle/>
+          <a:p>
+            <a:pPr algn="ctr"/>
+          </a:p>
+        </p:txBody>
+      </p:sp>
+      <p:graphicFrame>
+        <p:nvGraphicFramePr>
+          <p:cNvPr id="7" name="Table 6"/>
+          <p:cNvGraphicFramePr>
+            <a:graphicFrameLocks noGrp="1"/>
+          </p:cNvGraphicFramePr>
+          <p:nvPr/>
+        </p:nvGraphicFramePr>
+        <p:xfrm>
+          <a:off x="685800" y="1417320"/>
+          <a:ext cx="10817352" cy="2304288"/>
+        </p:xfrm>
+        <a:graphic>
+          <a:graphicData uri="http://schemas.openxmlformats.org/drawingml/2006/table">
+            <a:tbl>
+              <a:tblPr firstRow="1" bandRow="1">
+                <a:tableStyleId>{5C22544A-7EE6-4342-B048-85BDC9FD1C3A}</a:tableStyleId>
+              </a:tblPr>
+              <a:tblGrid>
+                <a:gridCol w="2163470"/>
+                <a:gridCol w="2163470"/>
+                <a:gridCol w="2163470"/>
+                <a:gridCol w="2163470"/>
+                <a:gridCol w="2163472"/>
+              </a:tblGrid>
+              <a:tr h="384048">
+                <a:tc>
+                  <a:txBody>
+                    <a:bodyPr/>
+                    <a:lstStyle/>
+                    <a:p>
+                      <a:r>
+                        <a:rPr sz="1100" b="1">
+                          <a:solidFill>
+                            <a:srgbClr val="FFFFFF"/>
+                          </a:solidFill>
+                          <a:latin typeface="Arial"/>
+                        </a:rPr>
+                        <a:t>Kennzahl</a:t>
+                      </a:r>
+                    </a:p>
+                  </a:txBody>
+                  <a:tcPr>
+                    <a:solidFill>
+                      <a:srgbClr val="1F2C56"/>
+                    </a:solidFill>
+                  </a:tcPr>
+                </a:tc>
+                <a:tc>
+                  <a:txBody>
+                    <a:bodyPr/>
+                    <a:lstStyle/>
+                    <a:p>
+                      <a:r>
+                        <a:rPr sz="1100" b="1">
+                          <a:solidFill>
+                            <a:srgbClr val="FFFFFF"/>
+                          </a:solidFill>
+                          <a:latin typeface="Arial"/>
+                        </a:rPr>
+                        <a:t>2022</a:t>
+                      </a:r>
+                    </a:p>
+                  </a:txBody>
+                  <a:tcPr>
+                    <a:solidFill>
+                      <a:srgbClr val="1F2C56"/>
+                    </a:solidFill>
+                  </a:tcPr>
+                </a:tc>
+                <a:tc>
+                  <a:txBody>
+                    <a:bodyPr/>
+                    <a:lstStyle/>
+                    <a:p>
+                      <a:r>
+                        <a:rPr sz="1100" b="1">
+                          <a:solidFill>
+                            <a:srgbClr val="FFFFFF"/>
+                          </a:solidFill>
+                          <a:latin typeface="Arial"/>
+                        </a:rPr>
+                        <a:t>2023</a:t>
+                      </a:r>
+                    </a:p>
+                  </a:txBody>
+                  <a:tcPr>
+                    <a:solidFill>
+                      <a:srgbClr val="1F2C56"/>
+                    </a:solidFill>
+                  </a:tcPr>
+                </a:tc>
+                <a:tc>
+                  <a:txBody>
+                    <a:bodyPr/>
+                    <a:lstStyle/>
+                    <a:p>
+                      <a:r>
+                        <a:rPr sz="1100" b="1">
+                          <a:solidFill>
+                            <a:srgbClr val="FFFFFF"/>
+                          </a:solidFill>
+                          <a:latin typeface="Arial"/>
+                        </a:rPr>
+                        <a:t>2024</a:t>
+                      </a:r>
+                    </a:p>
+                  </a:txBody>
+                  <a:tcPr>
+                    <a:solidFill>
+                      <a:srgbClr val="1F2C56"/>
+                    </a:solidFill>
+                  </a:tcPr>
+                </a:tc>
+                <a:tc>
+                  <a:txBody>
+                    <a:bodyPr/>
+                    <a:lstStyle/>
+                    <a:p>
+                      <a:r>
+                        <a:rPr sz="1100" b="1">
+                          <a:solidFill>
+                            <a:srgbClr val="FFFFFF"/>
+                          </a:solidFill>
+                          <a:latin typeface="Arial"/>
+                        </a:rPr>
+                        <a:t>Bewertung</a:t>
+                      </a:r>
+                    </a:p>
+                  </a:txBody>
+                  <a:tcPr>
+                    <a:solidFill>
+                      <a:srgbClr val="1F2C56"/>
+                    </a:solidFill>
+                  </a:tcPr>
+                </a:tc>
+              </a:tr>
+              <a:tr h="384048">
+                <a:tc>
+                  <a:txBody>
+                    <a:bodyPr/>
+                    <a:lstStyle/>
+                    <a:p>
+                      <a:r>
+                        <a:rPr sz="1050">
+                          <a:solidFill>
+                            <a:srgbClr val="3D5466"/>
+                          </a:solidFill>
+                          <a:latin typeface="Arial"/>
+                        </a:rPr>
+                        <a:t>EBIT-Marge</a:t>
+                      </a:r>
+                    </a:p>
+                  </a:txBody>
+                  <a:tcPr/>
+                </a:tc>
+                <a:tc>
+                  <a:txBody>
+                    <a:bodyPr/>
+                    <a:lstStyle/>
+                    <a:p>
+                      <a:r>
+                        <a:rPr sz="1050">
+                          <a:solidFill>
+                            <a:srgbClr val="3D5466"/>
+                          </a:solidFill>
+                          <a:latin typeface="Arial"/>
+                        </a:rPr>
+                        <a:t>8,9 %</a:t>
+                      </a:r>
+                    </a:p>
+                  </a:txBody>
+                  <a:tcPr/>
+                </a:tc>
+                <a:tc>
+                  <a:txBody>
+                    <a:bodyPr/>
+                    <a:lstStyle/>
+                    <a:p>
+                      <a:r>
+                        <a:rPr sz="1050">
+                          <a:solidFill>
+                            <a:srgbClr val="3D5466"/>
+                          </a:solidFill>
+                          <a:latin typeface="Arial"/>
+                        </a:rPr>
+                        <a:t>7,3 %</a:t>
+                      </a:r>
+                    </a:p>
+                  </a:txBody>
+                  <a:tcPr/>
+                </a:tc>
+                <a:tc>
+                  <a:txBody>
+                    <a:bodyPr/>
+                    <a:lstStyle/>
+                    <a:p>
+                      <a:r>
+                        <a:rPr sz="1050">
+                          <a:solidFill>
+                            <a:srgbClr val="3D5466"/>
+                          </a:solidFill>
+                          <a:latin typeface="Arial"/>
+                        </a:rPr>
+                        <a:t>6,0 %</a:t>
+                      </a:r>
+                    </a:p>
+                  </a:txBody>
+                  <a:tcPr/>
+                </a:tc>
+                <a:tc>
+                  <a:txBody>
+                    <a:bodyPr/>
+                    <a:lstStyle/>
+                    <a:p>
+                      <a:r>
+                        <a:rPr sz="1050">
+                          <a:solidFill>
+                            <a:srgbClr val="3D5466"/>
+                          </a:solidFill>
+                          <a:latin typeface="Arial"/>
+                        </a:rPr>
+                        <a:t>▼ rückläufig – kritische Entwicklung</a:t>
+                      </a:r>
+                    </a:p>
+                  </a:txBody>
+                  <a:tcPr/>
+                </a:tc>
+              </a:tr>
+              <a:tr h="384048">
+                <a:tc>
+                  <a:txBody>
+                    <a:bodyPr/>
+                    <a:lstStyle/>
+                    <a:p>
+                      <a:r>
+                        <a:rPr sz="1050">
+                          <a:solidFill>
+                            <a:srgbClr val="3D5466"/>
+                          </a:solidFill>
+                          <a:latin typeface="Arial"/>
+                        </a:rPr>
+                        <a:t>Eigenkapitalquote</a:t>
+                      </a:r>
+                    </a:p>
+                  </a:txBody>
+                  <a:tcPr/>
+                </a:tc>
+                <a:tc>
+                  <a:txBody>
+                    <a:bodyPr/>
+                    <a:lstStyle/>
+                    <a:p>
+                      <a:r>
+                        <a:rPr sz="1050">
+                          <a:solidFill>
+                            <a:srgbClr val="3D5466"/>
+                          </a:solidFill>
+                          <a:latin typeface="Arial"/>
+                        </a:rPr>
+                        <a:t>24,7 %</a:t>
+                      </a:r>
+                    </a:p>
+                  </a:txBody>
+                  <a:tcPr/>
+                </a:tc>
+                <a:tc>
+                  <a:txBody>
+                    <a:bodyPr/>
+                    <a:lstStyle/>
+                    <a:p>
+                      <a:r>
+                        <a:rPr sz="1050">
+                          <a:solidFill>
+                            <a:srgbClr val="3D5466"/>
+                          </a:solidFill>
+                          <a:latin typeface="Arial"/>
+                        </a:rPr>
+                        <a:t>25,0 %</a:t>
+                      </a:r>
+                    </a:p>
+                  </a:txBody>
+                  <a:tcPr/>
+                </a:tc>
+                <a:tc>
+                  <a:txBody>
+                    <a:bodyPr/>
+                    <a:lstStyle/>
+                    <a:p>
+                      <a:r>
+                        <a:rPr sz="1050">
+                          <a:solidFill>
+                            <a:srgbClr val="3D5466"/>
+                          </a:solidFill>
+                          <a:latin typeface="Arial"/>
+                        </a:rPr>
+                        <a:t>25,1 %</a:t>
+                      </a:r>
+                    </a:p>
+                  </a:txBody>
+                  <a:tcPr/>
+                </a:tc>
+                <a:tc>
+                  <a:txBody>
+                    <a:bodyPr/>
+                    <a:lstStyle/>
+                    <a:p>
+                      <a:r>
+                        <a:rPr sz="1050">
+                          <a:solidFill>
+                            <a:srgbClr val="3D5466"/>
+                          </a:solidFill>
+                          <a:latin typeface="Arial"/>
+                        </a:rPr>
+                        <a:t>→ knapp, aber leicht verbessernd</a:t>
+                      </a:r>
+                    </a:p>
+                  </a:txBody>
+                  <a:tcPr/>
+                </a:tc>
+              </a:tr>
+              <a:tr h="384048">
+                <a:tc>
+                  <a:txBody>
+                    <a:bodyPr/>
+                    <a:lstStyle/>
+                    <a:p>
+                      <a:r>
+                        <a:rPr sz="1050">
+                          <a:solidFill>
+                            <a:srgbClr val="3D5466"/>
+                          </a:solidFill>
+                          <a:latin typeface="Arial"/>
+                        </a:rPr>
+                        <a:t>Verschuldungsgrad (FK/EK)</a:t>
+                      </a:r>
+                    </a:p>
+                  </a:txBody>
+                  <a:tcPr/>
+                </a:tc>
+                <a:tc>
+                  <a:txBody>
+                    <a:bodyPr/>
+                    <a:lstStyle/>
+                    <a:p>
+                      <a:r>
+                        <a:rPr sz="1050">
+                          <a:solidFill>
+                            <a:srgbClr val="3D5466"/>
+                          </a:solidFill>
+                          <a:latin typeface="Arial"/>
+                        </a:rPr>
+                        <a:t>2,74</a:t>
+                      </a:r>
+                    </a:p>
+                  </a:txBody>
+                  <a:tcPr/>
+                </a:tc>
+                <a:tc>
+                  <a:txBody>
+                    <a:bodyPr/>
+                    <a:lstStyle/>
+                    <a:p>
+                      <a:r>
+                        <a:rPr sz="1050">
+                          <a:solidFill>
+                            <a:srgbClr val="3D5466"/>
+                          </a:solidFill>
+                          <a:latin typeface="Arial"/>
+                        </a:rPr>
+                        <a:t>2,67</a:t>
+                      </a:r>
+                    </a:p>
+                  </a:txBody>
+                  <a:tcPr/>
+                </a:tc>
+                <a:tc>
+                  <a:txBody>
+                    <a:bodyPr/>
+                    <a:lstStyle/>
+                    <a:p>
+                      <a:r>
+                        <a:rPr sz="1050">
+                          <a:solidFill>
+                            <a:srgbClr val="3D5466"/>
+                          </a:solidFill>
+                          <a:latin typeface="Arial"/>
+                        </a:rPr>
+                        <a:t>2,61</a:t>
+                      </a:r>
+                    </a:p>
+                  </a:txBody>
+                  <a:tcPr/>
+                </a:tc>
+                <a:tc>
+                  <a:txBody>
+                    <a:bodyPr/>
+                    <a:lstStyle/>
+                    <a:p>
+                      <a:r>
+                        <a:rPr sz="1050">
+                          <a:solidFill>
+                            <a:srgbClr val="3D5466"/>
+                          </a:solidFill>
+                          <a:latin typeface="Arial"/>
+                        </a:rPr>
+                        <a:t>→ erhöht, über Komfortschwelle</a:t>
+                      </a:r>
+                    </a:p>
+                  </a:txBody>
+                  <a:tcPr/>
+                </a:tc>
+              </a:tr>
+              <a:tr h="384048">
+                <a:tc>
+                  <a:txBody>
+                    <a:bodyPr/>
+                    <a:lstStyle/>
+                    <a:p>
+                      <a:r>
+                        <a:rPr sz="1050">
+                          <a:solidFill>
+                            <a:srgbClr val="3D5466"/>
+                          </a:solidFill>
+                          <a:latin typeface="Arial"/>
+                        </a:rPr>
+                        <a:t>Zinsdeckungsquote</a:t>
+                      </a:r>
+                    </a:p>
+                  </a:txBody>
+                  <a:tcPr/>
+                </a:tc>
+                <a:tc>
+                  <a:txBody>
+                    <a:bodyPr/>
+                    <a:lstStyle/>
+                    <a:p>
+                      <a:r>
+                        <a:rPr sz="1050">
+                          <a:solidFill>
+                            <a:srgbClr val="3D5466"/>
+                          </a:solidFill>
+                          <a:latin typeface="Arial"/>
+                        </a:rPr>
+                        <a:t>10,7x</a:t>
+                      </a:r>
+                    </a:p>
+                  </a:txBody>
+                  <a:tcPr/>
+                </a:tc>
+                <a:tc>
+                  <a:txBody>
+                    <a:bodyPr/>
+                    <a:lstStyle/>
+                    <a:p>
+                      <a:r>
+                        <a:rPr sz="1050">
+                          <a:solidFill>
+                            <a:srgbClr val="3D5466"/>
+                          </a:solidFill>
+                          <a:latin typeface="Arial"/>
+                        </a:rPr>
+                        <a:t>10,4x</a:t>
+                      </a:r>
+                    </a:p>
+                  </a:txBody>
+                  <a:tcPr/>
+                </a:tc>
+                <a:tc>
+                  <a:txBody>
+                    <a:bodyPr/>
+                    <a:lstStyle/>
+                    <a:p>
+                      <a:r>
+                        <a:rPr sz="1050">
+                          <a:solidFill>
+                            <a:srgbClr val="3D5466"/>
+                          </a:solidFill>
+                          <a:latin typeface="Arial"/>
+                        </a:rPr>
+                        <a:t>9,4x</a:t>
+                      </a:r>
+                    </a:p>
+                  </a:txBody>
+                  <a:tcPr/>
+                </a:tc>
+                <a:tc>
+                  <a:txBody>
+                    <a:bodyPr/>
+                    <a:lstStyle/>
+                    <a:p>
+                      <a:r>
+                        <a:rPr sz="1050">
+                          <a:solidFill>
+                            <a:srgbClr val="3D5466"/>
+                          </a:solidFill>
+                          <a:latin typeface="Arial"/>
+                        </a:rPr>
+                        <a:t>▼ sehr gut, aber fallend</a:t>
+                      </a:r>
+                    </a:p>
+                  </a:txBody>
+                  <a:tcPr/>
+                </a:tc>
+              </a:tr>
+              <a:tr h="384048">
+                <a:tc>
+                  <a:txBody>
+                    <a:bodyPr/>
+                    <a:lstStyle/>
+                    <a:p>
+                      <a:r>
+                        <a:rPr sz="1050">
+                          <a:solidFill>
+                            <a:srgbClr val="3D5466"/>
+                          </a:solidFill>
+                          <a:latin typeface="Arial"/>
+                        </a:rPr>
+                        <a:t>Dyn. Verschuldungsgrad (NK/EBITDA)</a:t>
+                      </a:r>
+                    </a:p>
+                  </a:txBody>
+                  <a:tcPr/>
+                </a:tc>
+                <a:tc>
+                  <a:txBody>
+                    <a:bodyPr/>
+                    <a:lstStyle/>
+                    <a:p>
+                      <a:r>
+                        <a:rPr sz="1050">
+                          <a:solidFill>
+                            <a:srgbClr val="3D5466"/>
+                          </a:solidFill>
+                          <a:latin typeface="Arial"/>
+                        </a:rPr>
+                        <a:t>1,68</a:t>
+                      </a:r>
+                    </a:p>
+                  </a:txBody>
+                  <a:tcPr/>
+                </a:tc>
+                <a:tc>
+                  <a:txBody>
+                    <a:bodyPr/>
+                    <a:lstStyle/>
+                    <a:p>
+                      <a:r>
+                        <a:rPr sz="1050">
+                          <a:solidFill>
+                            <a:srgbClr val="3D5466"/>
+                          </a:solidFill>
+                          <a:latin typeface="Arial"/>
+                        </a:rPr>
+                        <a:t>1,93</a:t>
+                      </a:r>
+                    </a:p>
+                  </a:txBody>
+                  <a:tcPr/>
+                </a:tc>
+                <a:tc>
+                  <a:txBody>
+                    <a:bodyPr/>
+                    <a:lstStyle/>
+                    <a:p>
+                      <a:r>
+                        <a:rPr sz="1050">
+                          <a:solidFill>
+                            <a:srgbClr val="3D5466"/>
+                          </a:solidFill>
+                          <a:latin typeface="Arial"/>
+                        </a:rPr>
+                        <a:t>2,29</a:t>
+                      </a:r>
+                    </a:p>
+                  </a:txBody>
+                  <a:tcPr/>
+                </a:tc>
+                <a:tc>
+                  <a:txBody>
+                    <a:bodyPr/>
+                    <a:lstStyle/>
+                    <a:p>
+                      <a:r>
+                        <a:rPr sz="1050">
+                          <a:solidFill>
+                            <a:srgbClr val="3D5466"/>
+                          </a:solidFill>
+                          <a:latin typeface="Arial"/>
+                        </a:rPr>
+                        <a:t>▲ steigt – Achtung</a:t>
+                      </a:r>
+                    </a:p>
+                  </a:txBody>
+                  <a:tcPr/>
+                </a:tc>
+              </a:tr>
+            </a:tbl>
+          </a:graphicData>
+        </a:graphic>
+      </p:graphicFrame>
+      <p:sp>
+        <p:nvSpPr>
+          <p:cNvPr id="8" name="Rectangle 7"/>
+          <p:cNvSpPr/>
+          <p:nvPr/>
+        </p:nvSpPr>
+        <p:spPr>
+          <a:xfrm>
+            <a:off x="0" y="6510528"/>
+            <a:ext cx="12188952" cy="347472"/>
+          </a:xfrm>
+          <a:prstGeom prst="rect">
+            <a:avLst/>
+          </a:prstGeom>
+          <a:solidFill>
+            <a:srgbClr val="0A1937"/>
+          </a:solidFill>
+          <a:ln>
+            <a:noFill/>
+          </a:ln>
+        </p:spPr>
+        <p:style>
+          <a:lnRef idx="1">
+            <a:schemeClr val="accent1"/>
+          </a:lnRef>
+          <a:fillRef idx="3">
+            <a:schemeClr val="accent1"/>
+          </a:fillRef>
+          <a:effectRef idx="2">
+            <a:schemeClr val="accent1"/>
+          </a:effectRef>
+          <a:fontRef idx="minor">
+            <a:schemeClr val="lt1"/>
+          </a:fontRef>
+        </p:style>
+        <p:txBody>
+          <a:bodyPr rtlCol="0" anchor="ctr"/>
+          <a:lstStyle/>
+          <a:p>
+            <a:pPr algn="ctr"/>
+          </a:p>
+        </p:txBody>
+      </p:sp>
+      <p:sp>
+        <p:nvSpPr>
+          <p:cNvPr id="9" name="TextBox 8"/>
+          <p:cNvSpPr txBox="1"/>
+          <p:nvPr/>
+        </p:nvSpPr>
+        <p:spPr>
+          <a:xfrm>
+            <a:off x="685800" y="6583680"/>
+            <a:ext cx="6490411" cy="256032"/>
+          </a:xfrm>
+          <a:prstGeom prst="rect">
+            <a:avLst/>
+          </a:prstGeom>
+          <a:noFill/>
+        </p:spPr>
+        <p:txBody>
+          <a:bodyPr wrap="none">
+            <a:spAutoFit/>
+          </a:bodyPr>
+          <a:lstStyle/>
+          <a:p>
+            <a:pPr algn="l"/>
+            <a:r>
+              <a:rPr sz="700">
+                <a:solidFill>
+                  <a:srgbClr val="A0B4D2"/>
+                </a:solidFill>
+                <a:latin typeface="JetBrains Mono"/>
+              </a:rPr>
+              <a:t>Benedikt Zoller Coaching  ·  FKB Campus  ·  M21</a:t>
+            </a:r>
+          </a:p>
+        </p:txBody>
+      </p:sp>
+      <p:sp>
+        <p:nvSpPr>
+          <p:cNvPr id="10" name="TextBox 9"/>
+          <p:cNvSpPr txBox="1"/>
+          <p:nvPr/>
+        </p:nvSpPr>
+        <p:spPr>
+          <a:xfrm>
+            <a:off x="7176211" y="6583680"/>
+            <a:ext cx="4326940" cy="256032"/>
+          </a:xfrm>
+          <a:prstGeom prst="rect">
+            <a:avLst/>
+          </a:prstGeom>
+          <a:noFill/>
+        </p:spPr>
+        <p:txBody>
+          <a:bodyPr wrap="none">
+            <a:spAutoFit/>
+          </a:bodyPr>
+          <a:lstStyle/>
+          <a:p>
+            <a:pPr algn="r"/>
+            <a:r>
+              <a:rPr sz="700">
+                <a:solidFill>
+                  <a:srgbClr val="A0B4D2"/>
+                </a:solidFill>
+                <a:latin typeface="JetBrains Mono"/>
+              </a:rPr>
+              <a:t>Übersicht</a:t>
+            </a:r>
+          </a:p>
+        </p:txBody>
+      </p:sp>
+    </p:spTree>
+  </p:cSld>
+  <p:clrMapOvr>
+    <a:masterClrMapping/>
+  </p:clrMapOvr>
+</p:sld>
+</file>
+
+<file path=ppt/slides/slide19.xml><?xml version="1.0" encoding="utf-8"?>
+<p:sld xmlns:a="http://schemas.openxmlformats.org/drawingml/2006/main" xmlns:p="http://schemas.openxmlformats.org/presentationml/2006/main" xmlns:r="http://schemas.openxmlformats.org/officeDocument/2006/relationships">
+  <p:cSld>
+    <p:spTree>
+      <p:nvGrpSpPr>
+        <p:cNvPr id="1" name=""/>
+        <p:cNvGrpSpPr/>
+        <p:nvPr/>
+      </p:nvGrpSpPr>
+      <p:grpSpPr/>
+      <p:sp>
+        <p:nvSpPr>
+          <p:cNvPr id="2" name="Rectangle 1"/>
+          <p:cNvSpPr/>
+          <p:nvPr/>
+        </p:nvSpPr>
+        <p:spPr>
+          <a:xfrm>
+            <a:off x="0" y="0"/>
+            <a:ext cx="12188952" cy="6858000"/>
+          </a:xfrm>
+          <a:prstGeom prst="rect">
+            <a:avLst/>
+          </a:prstGeom>
+          <a:solidFill>
+            <a:srgbClr val="EDEDF3"/>
+          </a:solidFill>
+          <a:ln>
+            <a:noFill/>
+          </a:ln>
+        </p:spPr>
+        <p:style>
+          <a:lnRef idx="1">
+            <a:schemeClr val="accent1"/>
+          </a:lnRef>
+          <a:fillRef idx="3">
+            <a:schemeClr val="accent1"/>
+          </a:fillRef>
+          <a:effectRef idx="2">
+            <a:schemeClr val="accent1"/>
+          </a:effectRef>
+          <a:fontRef idx="minor">
+            <a:schemeClr val="lt1"/>
+          </a:fontRef>
+        </p:style>
+        <p:txBody>
+          <a:bodyPr rtlCol="0" anchor="ctr"/>
+          <a:lstStyle/>
+          <a:p>
+            <a:pPr algn="ctr"/>
+          </a:p>
+        </p:txBody>
+      </p:sp>
+      <p:sp>
+        <p:nvSpPr>
+          <p:cNvPr id="3" name="Rectangle 2"/>
+          <p:cNvSpPr/>
+          <p:nvPr/>
+        </p:nvSpPr>
+        <p:spPr>
+          <a:xfrm>
+            <a:off x="0" y="0"/>
+            <a:ext cx="12188952" cy="50292"/>
+          </a:xfrm>
+          <a:prstGeom prst="rect">
+            <a:avLst/>
+          </a:prstGeom>
+          <a:solidFill>
+            <a:srgbClr val="1F2C56"/>
+          </a:solidFill>
+          <a:ln>
+            <a:noFill/>
+          </a:ln>
+        </p:spPr>
+        <p:style>
+          <a:lnRef idx="1">
+            <a:schemeClr val="accent1"/>
+          </a:lnRef>
+          <a:fillRef idx="3">
+            <a:schemeClr val="accent1"/>
+          </a:fillRef>
+          <a:effectRef idx="2">
+            <a:schemeClr val="accent1"/>
+          </a:effectRef>
+          <a:fontRef idx="minor">
+            <a:schemeClr val="lt1"/>
+          </a:fontRef>
+        </p:style>
+        <p:txBody>
+          <a:bodyPr rtlCol="0" anchor="ctr"/>
+          <a:lstStyle/>
+          <a:p>
+            <a:pPr algn="ctr"/>
+          </a:p>
+        </p:txBody>
+      </p:sp>
+      <p:sp>
+        <p:nvSpPr>
+          <p:cNvPr id="4" name="TextBox 3"/>
+          <p:cNvSpPr txBox="1"/>
+          <p:nvPr/>
+        </p:nvSpPr>
+        <p:spPr>
+          <a:xfrm>
+            <a:off x="685800" y="109728"/>
+            <a:ext cx="10817352" cy="228600"/>
+          </a:xfrm>
+          <a:prstGeom prst="rect">
+            <a:avLst/>
+          </a:prstGeom>
+          <a:noFill/>
+        </p:spPr>
+        <p:txBody>
+          <a:bodyPr wrap="none">
+            <a:spAutoFit/>
+          </a:bodyPr>
+          <a:lstStyle/>
+          <a:p>
+            <a:pPr algn="l"/>
+            <a:r>
+              <a:rPr sz="750">
+                <a:solidFill>
+                  <a:srgbClr val="78808C"/>
+                </a:solidFill>
+                <a:latin typeface="JetBrains Mono"/>
+              </a:rPr>
+              <a:t>M21  ·  INHALT</a:t>
+            </a:r>
+          </a:p>
+        </p:txBody>
+      </p:sp>
+      <p:sp>
+        <p:nvSpPr>
+          <p:cNvPr id="5" name="Rectangle 4"/>
+          <p:cNvSpPr/>
+          <p:nvPr/>
+        </p:nvSpPr>
+        <p:spPr>
+          <a:xfrm>
+            <a:off x="0" y="1234440"/>
+            <a:ext cx="12188952" cy="12700"/>
+          </a:xfrm>
+          <a:prstGeom prst="rect">
+            <a:avLst/>
+          </a:prstGeom>
+          <a:solidFill>
+            <a:srgbClr val="D8DFE4"/>
+          </a:solidFill>
+          <a:ln>
+            <a:noFill/>
+          </a:ln>
+        </p:spPr>
+        <p:style>
+          <a:lnRef idx="1">
+            <a:schemeClr val="accent1"/>
+          </a:lnRef>
+          <a:fillRef idx="3">
+            <a:schemeClr val="accent1"/>
+          </a:fillRef>
+          <a:effectRef idx="2">
+            <a:schemeClr val="accent1"/>
+          </a:effectRef>
+          <a:fontRef idx="minor">
+            <a:schemeClr val="lt1"/>
+          </a:fontRef>
+        </p:style>
+        <p:txBody>
+          <a:bodyPr rtlCol="0" anchor="ctr"/>
+          <a:lstStyle/>
+          <a:p>
+            <a:pPr algn="ctr"/>
+          </a:p>
+        </p:txBody>
+      </p:sp>
+      <p:sp>
+        <p:nvSpPr>
+          <p:cNvPr id="6" name="Rectangle 5"/>
+          <p:cNvSpPr/>
+          <p:nvPr/>
+        </p:nvSpPr>
+        <p:spPr>
+          <a:xfrm>
+            <a:off x="685800" y="502920"/>
+            <a:ext cx="36576" cy="658368"/>
+          </a:xfrm>
+          <a:prstGeom prst="rect">
+            <a:avLst/>
+          </a:prstGeom>
+          <a:solidFill>
+            <a:srgbClr val="D9C089"/>
+          </a:solidFill>
+          <a:ln>
+            <a:noFill/>
+          </a:ln>
+        </p:spPr>
+        <p:style>
+          <a:lnRef idx="1">
+            <a:schemeClr val="accent1"/>
+          </a:lnRef>
+          <a:fillRef idx="3">
+            <a:schemeClr val="accent1"/>
+          </a:fillRef>
+          <a:effectRef idx="2">
+            <a:schemeClr val="accent1"/>
+          </a:effectRef>
+          <a:fontRef idx="minor">
+            <a:schemeClr val="lt1"/>
+          </a:fontRef>
+        </p:style>
+        <p:txBody>
+          <a:bodyPr rtlCol="0" anchor="ctr"/>
+          <a:lstStyle/>
+          <a:p>
+            <a:pPr algn="ctr"/>
+          </a:p>
+        </p:txBody>
+      </p:sp>
+      <p:sp>
+        <p:nvSpPr>
+          <p:cNvPr id="7" name="TextBox 6"/>
+          <p:cNvSpPr txBox="1"/>
+          <p:nvPr/>
+        </p:nvSpPr>
+        <p:spPr>
+          <a:xfrm>
+            <a:off x="813816" y="502920"/>
+            <a:ext cx="10634472" cy="685800"/>
+          </a:xfrm>
+          <a:prstGeom prst="rect">
+            <a:avLst/>
+          </a:prstGeom>
+          <a:noFill/>
+        </p:spPr>
+        <p:txBody>
+          <a:bodyPr wrap="square">
+            <a:spAutoFit/>
+          </a:bodyPr>
+          <a:lstStyle/>
+          <a:p>
+            <a:pPr algn="l"/>
+            <a:r>
+              <a:rPr sz="2400" b="1" i="0">
+                <a:solidFill>
+                  <a:srgbClr val="1F2C56"/>
+                </a:solidFill>
+                <a:latin typeface="Source Serif 4"/>
+              </a:rPr>
+              <a:t>Arbeitsblatt: 8-Felder-Kreditanalyse-Template</a:t>
+            </a:r>
+          </a:p>
+        </p:txBody>
+      </p:sp>
+      <p:sp>
+        <p:nvSpPr>
+          <p:cNvPr id="8" name="TextBox 7"/>
+          <p:cNvSpPr txBox="1"/>
+          <p:nvPr/>
+        </p:nvSpPr>
+        <p:spPr>
+          <a:xfrm>
+            <a:off x="685800" y="1417320"/>
+            <a:ext cx="10817352" cy="5029200"/>
+          </a:xfrm>
+          <a:prstGeom prst="rect">
+            <a:avLst/>
+          </a:prstGeom>
+          <a:noFill/>
+        </p:spPr>
+        <p:txBody>
+          <a:bodyPr wrap="square">
+            <a:spAutoFit/>
+          </a:bodyPr>
+          <a:lstStyle/>
           <a:p>
             <a:pPr>
               <a:spcBef>
@@ -7861,13 +10738,222 @@
               </a:spcAft>
             </a:pPr>
             <a:r>
-              <a:rPr sz="1200">
+              <a:rPr sz="1300">
                 <a:solidFill>
                   <a:srgbClr val="3D5466"/>
                 </a:solidFill>
                 <a:latin typeface="Arial"/>
               </a:rPr>
-              <a:t>Bewertung: ☐ 1 ☐ 2 ☐ 3 ☐ 4 ☐ 5</a:t>
+              <a:t>▸  KREDIT-ANALYSE FORMULAR</a:t>
+            </a:r>
+          </a:p>
+          <a:p>
+            <a:pPr>
+              <a:spcBef>
+                <a:spcPts val="400"/>
+              </a:spcBef>
+              <a:spcAft>
+                <a:spcPts val="200"/>
+              </a:spcAft>
+            </a:pPr>
+            <a:r>
+              <a:rPr sz="1300">
+                <a:solidFill>
+                  <a:srgbClr val="3D5466"/>
+                </a:solidFill>
+                <a:latin typeface="Arial"/>
+              </a:rPr>
+              <a:t>▸  Feld 1 – Zweck &amp; Verwendung (Gewichtung: 10 %)</a:t>
+            </a:r>
+          </a:p>
+          <a:p>
+            <a:pPr>
+              <a:spcBef>
+                <a:spcPts val="400"/>
+              </a:spcBef>
+              <a:spcAft>
+                <a:spcPts val="200"/>
+              </a:spcAft>
+            </a:pPr>
+            <a:r>
+              <a:rPr sz="1300">
+                <a:solidFill>
+                  <a:srgbClr val="3D5466"/>
+                </a:solidFill>
+                <a:latin typeface="Arial"/>
+              </a:rPr>
+              <a:t>▸  Ist der Verwendungszweck konkret, prüfbar und wirtschaftlich sinnvoll?</a:t>
+            </a:r>
+          </a:p>
+          <a:p>
+            <a:pPr>
+              <a:spcBef>
+                <a:spcPts val="400"/>
+              </a:spcBef>
+              <a:spcAft>
+                <a:spcPts val="200"/>
+              </a:spcAft>
+            </a:pPr>
+            <a:r>
+              <a:rPr sz="1300">
+                <a:solidFill>
+                  <a:srgbClr val="3D5466"/>
+                </a:solidFill>
+                <a:latin typeface="Arial"/>
+              </a:rPr>
+              <a:t>▸  Bewertung: ☐ 1 (kritisch) ☐ 2 ☐ 3 (ausreichend) ☐ 4 ☐ 5 (sehr gut)</a:t>
+            </a:r>
+          </a:p>
+          <a:p>
+            <a:pPr>
+              <a:spcBef>
+                <a:spcPts val="400"/>
+              </a:spcBef>
+              <a:spcAft>
+                <a:spcPts val="200"/>
+              </a:spcAft>
+            </a:pPr>
+            <a:r>
+              <a:rPr sz="1300">
+                <a:solidFill>
+                  <a:srgbClr val="3D5466"/>
+                </a:solidFill>
+                <a:latin typeface="Arial"/>
+              </a:rPr>
+              <a:t>▸  Feld 2 – Rückzahlungsquelle (Gewichtung: 25 %)</a:t>
+            </a:r>
+          </a:p>
+          <a:p>
+            <a:pPr>
+              <a:spcBef>
+                <a:spcPts val="400"/>
+              </a:spcBef>
+              <a:spcAft>
+                <a:spcPts val="200"/>
+              </a:spcAft>
+            </a:pPr>
+            <a:r>
+              <a:rPr sz="1300">
+                <a:solidFill>
+                  <a:srgbClr val="3D5466"/>
+                </a:solidFill>
+                <a:latin typeface="Arial"/>
+              </a:rPr>
+              <a:t>▸  Stress-Szenario (−10 % Umsatz): Deckungsquote sinkt auf ___x</a:t>
+            </a:r>
+          </a:p>
+          <a:p>
+            <a:pPr>
+              <a:spcBef>
+                <a:spcPts val="400"/>
+              </a:spcBef>
+              <a:spcAft>
+                <a:spcPts val="200"/>
+              </a:spcAft>
+            </a:pPr>
+            <a:r>
+              <a:rPr sz="1300">
+                <a:solidFill>
+                  <a:srgbClr val="3D5466"/>
+                </a:solidFill>
+                <a:latin typeface="Arial"/>
+              </a:rPr>
+              <a:t>▸  Bewertung: ☐ 1 ☐ 2 ☐ 3 ☐ 4 ☐ 5</a:t>
+            </a:r>
+          </a:p>
+          <a:p>
+            <a:pPr>
+              <a:spcBef>
+                <a:spcPts val="400"/>
+              </a:spcBef>
+              <a:spcAft>
+                <a:spcPts val="200"/>
+              </a:spcAft>
+            </a:pPr>
+            <a:r>
+              <a:rPr sz="1300">
+                <a:solidFill>
+                  <a:srgbClr val="3D5466"/>
+                </a:solidFill>
+                <a:latin typeface="Arial"/>
+              </a:rPr>
+              <a:t>▸  Feld 3 – Kapitalstruktur (Gewichtung: 15 %)</a:t>
+            </a:r>
+          </a:p>
+          <a:p>
+            <a:pPr>
+              <a:spcBef>
+                <a:spcPts val="400"/>
+              </a:spcBef>
+              <a:spcAft>
+                <a:spcPts val="200"/>
+              </a:spcAft>
+            </a:pPr>
+            <a:r>
+              <a:rPr sz="1300">
+                <a:solidFill>
+                  <a:srgbClr val="3D5466"/>
+                </a:solidFill>
+                <a:latin typeface="Arial"/>
+              </a:rPr>
+              <a:t>▸  Bewertung: ☐ 1 ☐ 2 ☐ 3 ☐ 4 ☐ 5</a:t>
+            </a:r>
+          </a:p>
+          <a:p>
+            <a:pPr>
+              <a:spcBef>
+                <a:spcPts val="400"/>
+              </a:spcBef>
+              <a:spcAft>
+                <a:spcPts val="200"/>
+              </a:spcAft>
+            </a:pPr>
+            <a:r>
+              <a:rPr sz="1300">
+                <a:solidFill>
+                  <a:srgbClr val="3D5466"/>
+                </a:solidFill>
+                <a:latin typeface="Arial"/>
+              </a:rPr>
+              <a:t>▸  Feld 4 – Managementqualität (Gewichtung: 20 %)</a:t>
+            </a:r>
+          </a:p>
+          <a:p>
+            <a:pPr>
+              <a:spcBef>
+                <a:spcPts val="400"/>
+              </a:spcBef>
+              <a:spcAft>
+                <a:spcPts val="200"/>
+              </a:spcAft>
+            </a:pPr>
+            <a:r>
+              <a:rPr sz="1300">
+                <a:solidFill>
+                  <a:srgbClr val="3D5466"/>
+                </a:solidFill>
+                <a:latin typeface="Arial"/>
+              </a:rPr>
+              <a:t>▸  Nachfolge geklärt? ☐ Ja ☐ Nein | Transparenz im Gespräch: ☐ offen ☐ ausweichend</a:t>
+            </a:r>
+          </a:p>
+          <a:p>
+            <a:pPr>
+              <a:spcBef>
+                <a:spcPts val="400"/>
+              </a:spcBef>
+              <a:spcAft>
+                <a:spcPts val="200"/>
+              </a:spcAft>
+            </a:pPr>
+            <a:r>
+              <a:rPr sz="1300">
+                <a:solidFill>
+                  <a:srgbClr val="3D5466"/>
+                </a:solidFill>
+                <a:latin typeface="Arial"/>
+              </a:rPr>
+              <a:t>▸  Bewertung: ☐ 1 ☐ 2 ☐ 3 ☐ 4 ☐ 5</a:t>
             </a:r>
           </a:p>
         </p:txBody>
@@ -8324,6 +11410,838 @@
 </p:sld>
 </file>
 
+<file path=ppt/slides/slide20.xml><?xml version="1.0" encoding="utf-8"?>
+<p:sld xmlns:a="http://schemas.openxmlformats.org/drawingml/2006/main" xmlns:p="http://schemas.openxmlformats.org/presentationml/2006/main" xmlns:r="http://schemas.openxmlformats.org/officeDocument/2006/relationships">
+  <p:cSld>
+    <p:spTree>
+      <p:nvGrpSpPr>
+        <p:cNvPr id="1" name=""/>
+        <p:cNvGrpSpPr/>
+        <p:nvPr/>
+      </p:nvGrpSpPr>
+      <p:grpSpPr/>
+      <p:sp>
+        <p:nvSpPr>
+          <p:cNvPr id="2" name="Rectangle 1"/>
+          <p:cNvSpPr/>
+          <p:nvPr/>
+        </p:nvSpPr>
+        <p:spPr>
+          <a:xfrm>
+            <a:off x="0" y="0"/>
+            <a:ext cx="12188952" cy="6858000"/>
+          </a:xfrm>
+          <a:prstGeom prst="rect">
+            <a:avLst/>
+          </a:prstGeom>
+          <a:solidFill>
+            <a:srgbClr val="FFFFFF"/>
+          </a:solidFill>
+          <a:ln>
+            <a:noFill/>
+          </a:ln>
+        </p:spPr>
+        <p:style>
+          <a:lnRef idx="1">
+            <a:schemeClr val="accent1"/>
+          </a:lnRef>
+          <a:fillRef idx="3">
+            <a:schemeClr val="accent1"/>
+          </a:fillRef>
+          <a:effectRef idx="2">
+            <a:schemeClr val="accent1"/>
+          </a:effectRef>
+          <a:fontRef idx="minor">
+            <a:schemeClr val="lt1"/>
+          </a:fontRef>
+        </p:style>
+        <p:txBody>
+          <a:bodyPr rtlCol="0" anchor="ctr"/>
+          <a:lstStyle/>
+          <a:p>
+            <a:pPr algn="ctr"/>
+          </a:p>
+        </p:txBody>
+      </p:sp>
+      <p:sp>
+        <p:nvSpPr>
+          <p:cNvPr id="3" name="Rectangle 2"/>
+          <p:cNvSpPr/>
+          <p:nvPr/>
+        </p:nvSpPr>
+        <p:spPr>
+          <a:xfrm>
+            <a:off x="0" y="0"/>
+            <a:ext cx="12188952" cy="50292"/>
+          </a:xfrm>
+          <a:prstGeom prst="rect">
+            <a:avLst/>
+          </a:prstGeom>
+          <a:solidFill>
+            <a:srgbClr val="1F2C56"/>
+          </a:solidFill>
+          <a:ln>
+            <a:noFill/>
+          </a:ln>
+        </p:spPr>
+        <p:style>
+          <a:lnRef idx="1">
+            <a:schemeClr val="accent1"/>
+          </a:lnRef>
+          <a:fillRef idx="3">
+            <a:schemeClr val="accent1"/>
+          </a:fillRef>
+          <a:effectRef idx="2">
+            <a:schemeClr val="accent1"/>
+          </a:effectRef>
+          <a:fontRef idx="minor">
+            <a:schemeClr val="lt1"/>
+          </a:fontRef>
+        </p:style>
+        <p:txBody>
+          <a:bodyPr rtlCol="0" anchor="ctr"/>
+          <a:lstStyle/>
+          <a:p>
+            <a:pPr algn="ctr"/>
+          </a:p>
+        </p:txBody>
+      </p:sp>
+      <p:sp>
+        <p:nvSpPr>
+          <p:cNvPr id="4" name="TextBox 3"/>
+          <p:cNvSpPr txBox="1"/>
+          <p:nvPr/>
+        </p:nvSpPr>
+        <p:spPr>
+          <a:xfrm>
+            <a:off x="685800" y="109728"/>
+            <a:ext cx="10817352" cy="228600"/>
+          </a:xfrm>
+          <a:prstGeom prst="rect">
+            <a:avLst/>
+          </a:prstGeom>
+          <a:noFill/>
+        </p:spPr>
+        <p:txBody>
+          <a:bodyPr wrap="none">
+            <a:spAutoFit/>
+          </a:bodyPr>
+          <a:lstStyle/>
+          <a:p>
+            <a:pPr algn="l"/>
+            <a:r>
+              <a:rPr sz="750">
+                <a:solidFill>
+                  <a:srgbClr val="78808C"/>
+                </a:solidFill>
+                <a:latin typeface="JetBrains Mono"/>
+              </a:rPr>
+              <a:t>M21  ·  ÜBERSICHT</a:t>
+            </a:r>
+          </a:p>
+        </p:txBody>
+      </p:sp>
+      <p:sp>
+        <p:nvSpPr>
+          <p:cNvPr id="5" name="TextBox 4"/>
+          <p:cNvSpPr txBox="1"/>
+          <p:nvPr/>
+        </p:nvSpPr>
+        <p:spPr>
+          <a:xfrm>
+            <a:off x="685800" y="502920"/>
+            <a:ext cx="10817352" cy="594360"/>
+          </a:xfrm>
+          <a:prstGeom prst="rect">
+            <a:avLst/>
+          </a:prstGeom>
+          <a:noFill/>
+        </p:spPr>
+        <p:txBody>
+          <a:bodyPr wrap="square">
+            <a:spAutoFit/>
+          </a:bodyPr>
+          <a:lstStyle/>
+          <a:p>
+            <a:pPr algn="l"/>
+            <a:r>
+              <a:rPr sz="2000" b="1" i="0">
+                <a:solidFill>
+                  <a:srgbClr val="1F2C56"/>
+                </a:solidFill>
+                <a:latin typeface="Source Serif 4"/>
+              </a:rPr>
+              <a:t>Arbeitsblatt: 8-Felder-Kreditanalyse-Template</a:t>
+            </a:r>
+          </a:p>
+        </p:txBody>
+      </p:sp>
+      <p:sp>
+        <p:nvSpPr>
+          <p:cNvPr id="6" name="Rectangle 5"/>
+          <p:cNvSpPr/>
+          <p:nvPr/>
+        </p:nvSpPr>
+        <p:spPr>
+          <a:xfrm>
+            <a:off x="685800" y="1143000"/>
+            <a:ext cx="10817352" cy="25400"/>
+          </a:xfrm>
+          <a:prstGeom prst="rect">
+            <a:avLst/>
+          </a:prstGeom>
+          <a:solidFill>
+            <a:srgbClr val="D9C089"/>
+          </a:solidFill>
+          <a:ln>
+            <a:noFill/>
+          </a:ln>
+        </p:spPr>
+        <p:style>
+          <a:lnRef idx="1">
+            <a:schemeClr val="accent1"/>
+          </a:lnRef>
+          <a:fillRef idx="3">
+            <a:schemeClr val="accent1"/>
+          </a:fillRef>
+          <a:effectRef idx="2">
+            <a:schemeClr val="accent1"/>
+          </a:effectRef>
+          <a:fontRef idx="minor">
+            <a:schemeClr val="lt1"/>
+          </a:fontRef>
+        </p:style>
+        <p:txBody>
+          <a:bodyPr rtlCol="0" anchor="ctr"/>
+          <a:lstStyle/>
+          <a:p>
+            <a:pPr algn="ctr"/>
+          </a:p>
+        </p:txBody>
+      </p:sp>
+      <p:graphicFrame>
+        <p:nvGraphicFramePr>
+          <p:cNvPr id="7" name="Table 6"/>
+          <p:cNvGraphicFramePr>
+            <a:graphicFrameLocks noGrp="1"/>
+          </p:cNvGraphicFramePr>
+          <p:nvPr/>
+        </p:nvGraphicFramePr>
+        <p:xfrm>
+          <a:off x="685800" y="1417320"/>
+          <a:ext cx="10817352" cy="2688336"/>
+        </p:xfrm>
+        <a:graphic>
+          <a:graphicData uri="http://schemas.openxmlformats.org/drawingml/2006/table">
+            <a:tbl>
+              <a:tblPr firstRow="1" bandRow="1">
+                <a:tableStyleId>{5C22544A-7EE6-4342-B048-85BDC9FD1C3A}</a:tableStyleId>
+              </a:tblPr>
+              <a:tblGrid>
+                <a:gridCol w="2704338"/>
+                <a:gridCol w="2704338"/>
+                <a:gridCol w="2704338"/>
+                <a:gridCol w="2704338"/>
+              </a:tblGrid>
+              <a:tr h="384048">
+                <a:tc>
+                  <a:txBody>
+                    <a:bodyPr/>
+                    <a:lstStyle/>
+                    <a:p>
+                      <a:r>
+                        <a:rPr sz="1100" b="1">
+                          <a:solidFill>
+                            <a:srgbClr val="FFFFFF"/>
+                          </a:solidFill>
+                          <a:latin typeface="Arial"/>
+                        </a:rPr>
+                        <a:t>Sicherheitentyp</a:t>
+                      </a:r>
+                    </a:p>
+                  </a:txBody>
+                  <a:tcPr>
+                    <a:solidFill>
+                      <a:srgbClr val="1F2C56"/>
+                    </a:solidFill>
+                  </a:tcPr>
+                </a:tc>
+                <a:tc>
+                  <a:txBody>
+                    <a:bodyPr/>
+                    <a:lstStyle/>
+                    <a:p>
+                      <a:r>
+                        <a:rPr sz="1100" b="1">
+                          <a:solidFill>
+                            <a:srgbClr val="FFFFFF"/>
+                          </a:solidFill>
+                          <a:latin typeface="Arial"/>
+                        </a:rPr>
+                        <a:t>Wert</a:t>
+                      </a:r>
+                    </a:p>
+                  </a:txBody>
+                  <a:tcPr>
+                    <a:solidFill>
+                      <a:srgbClr val="1F2C56"/>
+                    </a:solidFill>
+                  </a:tcPr>
+                </a:tc>
+                <a:tc>
+                  <a:txBody>
+                    <a:bodyPr/>
+                    <a:lstStyle/>
+                    <a:p>
+                      <a:r>
+                        <a:rPr sz="1100" b="1">
+                          <a:solidFill>
+                            <a:srgbClr val="FFFFFF"/>
+                          </a:solidFill>
+                          <a:latin typeface="Arial"/>
+                        </a:rPr>
+                        <a:t>Beleihungswert</a:t>
+                      </a:r>
+                    </a:p>
+                  </a:txBody>
+                  <a:tcPr>
+                    <a:solidFill>
+                      <a:srgbClr val="1F2C56"/>
+                    </a:solidFill>
+                  </a:tcPr>
+                </a:tc>
+                <a:tc>
+                  <a:txBody>
+                    <a:bodyPr/>
+                    <a:lstStyle/>
+                    <a:p>
+                      <a:r>
+                        <a:rPr sz="1100" b="1">
+                          <a:solidFill>
+                            <a:srgbClr val="FFFFFF"/>
+                          </a:solidFill>
+                          <a:latin typeface="Arial"/>
+                        </a:rPr>
+                        <a:t>Rang</a:t>
+                      </a:r>
+                    </a:p>
+                  </a:txBody>
+                  <a:tcPr>
+                    <a:solidFill>
+                      <a:srgbClr val="1F2C56"/>
+                    </a:solidFill>
+                  </a:tcPr>
+                </a:tc>
+              </a:tr>
+              <a:tr h="384048">
+                <a:tc>
+                  <a:txBody>
+                    <a:bodyPr/>
+                    <a:lstStyle/>
+                    <a:p>
+                      <a:r>
+                        <a:rPr sz="1050">
+                          <a:solidFill>
+                            <a:srgbClr val="3D5466"/>
+                          </a:solidFill>
+                          <a:latin typeface="Arial"/>
+                        </a:rPr>
+                        <a:t>_______________</a:t>
+                      </a:r>
+                    </a:p>
+                  </a:txBody>
+                  <a:tcPr/>
+                </a:tc>
+                <a:tc>
+                  <a:txBody>
+                    <a:bodyPr/>
+                    <a:lstStyle/>
+                    <a:p>
+                      <a:r>
+                        <a:rPr sz="1050">
+                          <a:solidFill>
+                            <a:srgbClr val="3D5466"/>
+                          </a:solidFill>
+                          <a:latin typeface="Arial"/>
+                        </a:rPr>
+                        <a:t>___</a:t>
+                      </a:r>
+                    </a:p>
+                  </a:txBody>
+                  <a:tcPr/>
+                </a:tc>
+                <a:tc>
+                  <a:txBody>
+                    <a:bodyPr/>
+                    <a:lstStyle/>
+                    <a:p>
+                      <a:r>
+                        <a:rPr sz="1050">
+                          <a:solidFill>
+                            <a:srgbClr val="3D5466"/>
+                          </a:solidFill>
+                          <a:latin typeface="Arial"/>
+                        </a:rPr>
+                        <a:t>___</a:t>
+                      </a:r>
+                    </a:p>
+                  </a:txBody>
+                  <a:tcPr/>
+                </a:tc>
+                <a:tc>
+                  <a:txBody>
+                    <a:bodyPr/>
+                    <a:lstStyle/>
+                    <a:p>
+                      <a:r>
+                        <a:rPr sz="1050">
+                          <a:solidFill>
+                            <a:srgbClr val="3D5466"/>
+                          </a:solidFill>
+                          <a:latin typeface="Arial"/>
+                        </a:rPr>
+                        <a:t>___</a:t>
+                      </a:r>
+                    </a:p>
+                  </a:txBody>
+                  <a:tcPr/>
+                </a:tc>
+              </a:tr>
+              <a:tr h="384048">
+                <a:tc>
+                  <a:txBody>
+                    <a:bodyPr/>
+                    <a:lstStyle/>
+                    <a:p>
+                      <a:r>
+                        <a:rPr sz="1050">
+                          <a:solidFill>
+                            <a:srgbClr val="3D5466"/>
+                          </a:solidFill>
+                          <a:latin typeface="Arial"/>
+                        </a:rPr>
+                        <a:t>_______________</a:t>
+                      </a:r>
+                    </a:p>
+                  </a:txBody>
+                  <a:tcPr/>
+                </a:tc>
+                <a:tc>
+                  <a:txBody>
+                    <a:bodyPr/>
+                    <a:lstStyle/>
+                    <a:p>
+                      <a:r>
+                        <a:rPr sz="1050">
+                          <a:solidFill>
+                            <a:srgbClr val="3D5466"/>
+                          </a:solidFill>
+                          <a:latin typeface="Arial"/>
+                        </a:rPr>
+                        <a:t>___</a:t>
+                      </a:r>
+                    </a:p>
+                  </a:txBody>
+                  <a:tcPr/>
+                </a:tc>
+                <a:tc>
+                  <a:txBody>
+                    <a:bodyPr/>
+                    <a:lstStyle/>
+                    <a:p>
+                      <a:r>
+                        <a:rPr sz="1050">
+                          <a:solidFill>
+                            <a:srgbClr val="3D5466"/>
+                          </a:solidFill>
+                          <a:latin typeface="Arial"/>
+                        </a:rPr>
+                        <a:t>___</a:t>
+                      </a:r>
+                    </a:p>
+                  </a:txBody>
+                  <a:tcPr/>
+                </a:tc>
+                <a:tc>
+                  <a:txBody>
+                    <a:bodyPr/>
+                    <a:lstStyle/>
+                    <a:p>
+                      <a:r>
+                        <a:rPr sz="1050">
+                          <a:solidFill>
+                            <a:srgbClr val="3D5466"/>
+                          </a:solidFill>
+                          <a:latin typeface="Arial"/>
+                        </a:rPr>
+                        <a:t>___</a:t>
+                      </a:r>
+                    </a:p>
+                  </a:txBody>
+                  <a:tcPr/>
+                </a:tc>
+              </a:tr>
+              <a:tr h="384048">
+                <a:tc>
+                  <a:txBody>
+                    <a:bodyPr/>
+                    <a:lstStyle/>
+                    <a:p>
+                      <a:r>
+                        <a:rPr sz="1050">
+                          <a:solidFill>
+                            <a:srgbClr val="3D5466"/>
+                          </a:solidFill>
+                          <a:latin typeface="Arial"/>
+                        </a:rPr>
+                        <a:t>_______________</a:t>
+                      </a:r>
+                    </a:p>
+                  </a:txBody>
+                  <a:tcPr/>
+                </a:tc>
+                <a:tc>
+                  <a:txBody>
+                    <a:bodyPr/>
+                    <a:lstStyle/>
+                    <a:p>
+                      <a:r>
+                        <a:rPr sz="1050">
+                          <a:solidFill>
+                            <a:srgbClr val="3D5466"/>
+                          </a:solidFill>
+                          <a:latin typeface="Arial"/>
+                        </a:rPr>
+                        <a:t>___</a:t>
+                      </a:r>
+                    </a:p>
+                  </a:txBody>
+                  <a:tcPr/>
+                </a:tc>
+                <a:tc>
+                  <a:txBody>
+                    <a:bodyPr/>
+                    <a:lstStyle/>
+                    <a:p>
+                      <a:r>
+                        <a:rPr sz="1050">
+                          <a:solidFill>
+                            <a:srgbClr val="3D5466"/>
+                          </a:solidFill>
+                          <a:latin typeface="Arial"/>
+                        </a:rPr>
+                        <a:t>___</a:t>
+                      </a:r>
+                    </a:p>
+                  </a:txBody>
+                  <a:tcPr/>
+                </a:tc>
+                <a:tc>
+                  <a:txBody>
+                    <a:bodyPr/>
+                    <a:lstStyle/>
+                    <a:p>
+                      <a:r>
+                        <a:rPr sz="1050">
+                          <a:solidFill>
+                            <a:srgbClr val="3D5466"/>
+                          </a:solidFill>
+                          <a:latin typeface="Arial"/>
+                        </a:rPr>
+                        <a:t>___</a:t>
+                      </a:r>
+                    </a:p>
+                  </a:txBody>
+                  <a:tcPr/>
+                </a:tc>
+              </a:tr>
+              <a:tr h="384048">
+                <a:tc>
+                  <a:txBody>
+                    <a:bodyPr/>
+                    <a:lstStyle/>
+                    <a:p>
+                      <a:r>
+                        <a:rPr sz="1050">
+                          <a:solidFill>
+                            <a:srgbClr val="3D5466"/>
+                          </a:solidFill>
+                          <a:latin typeface="Arial"/>
+                        </a:rPr>
+                        <a:t>Gesamt-Beleihungswert</a:t>
+                      </a:r>
+                    </a:p>
+                  </a:txBody>
+                  <a:tcPr/>
+                </a:tc>
+                <a:tc>
+                  <a:txBody>
+                    <a:bodyPr/>
+                    <a:lstStyle/>
+                    <a:p/>
+                  </a:txBody>
+                  <a:tcPr/>
+                </a:tc>
+                <a:tc>
+                  <a:txBody>
+                    <a:bodyPr/>
+                    <a:lstStyle/>
+                    <a:p>
+                      <a:r>
+                        <a:rPr sz="1050">
+                          <a:solidFill>
+                            <a:srgbClr val="3D5466"/>
+                          </a:solidFill>
+                          <a:latin typeface="Arial"/>
+                        </a:rPr>
+                        <a:t>___</a:t>
+                      </a:r>
+                    </a:p>
+                  </a:txBody>
+                  <a:tcPr/>
+                </a:tc>
+                <a:tc>
+                  <a:txBody>
+                    <a:bodyPr/>
+                    <a:lstStyle/>
+                    <a:p/>
+                  </a:txBody>
+                  <a:tcPr/>
+                </a:tc>
+              </a:tr>
+              <a:tr h="384048">
+                <a:tc>
+                  <a:txBody>
+                    <a:bodyPr/>
+                    <a:lstStyle/>
+                    <a:p>
+                      <a:r>
+                        <a:rPr sz="1050">
+                          <a:solidFill>
+                            <a:srgbClr val="3D5466"/>
+                          </a:solidFill>
+                          <a:latin typeface="Arial"/>
+                        </a:rPr>
+                        <a:t>Kreditbetrag</a:t>
+                      </a:r>
+                    </a:p>
+                  </a:txBody>
+                  <a:tcPr/>
+                </a:tc>
+                <a:tc>
+                  <a:txBody>
+                    <a:bodyPr/>
+                    <a:lstStyle/>
+                    <a:p/>
+                  </a:txBody>
+                  <a:tcPr/>
+                </a:tc>
+                <a:tc>
+                  <a:txBody>
+                    <a:bodyPr/>
+                    <a:lstStyle/>
+                    <a:p>
+                      <a:r>
+                        <a:rPr sz="1050">
+                          <a:solidFill>
+                            <a:srgbClr val="3D5466"/>
+                          </a:solidFill>
+                          <a:latin typeface="Arial"/>
+                        </a:rPr>
+                        <a:t>___</a:t>
+                      </a:r>
+                    </a:p>
+                  </a:txBody>
+                  <a:tcPr/>
+                </a:tc>
+                <a:tc>
+                  <a:txBody>
+                    <a:bodyPr/>
+                    <a:lstStyle/>
+                    <a:p/>
+                  </a:txBody>
+                  <a:tcPr/>
+                </a:tc>
+              </a:tr>
+              <a:tr h="384048">
+                <a:tc>
+                  <a:txBody>
+                    <a:bodyPr/>
+                    <a:lstStyle/>
+                    <a:p>
+                      <a:r>
+                        <a:rPr sz="1050">
+                          <a:solidFill>
+                            <a:srgbClr val="3D5466"/>
+                          </a:solidFill>
+                          <a:latin typeface="Arial"/>
+                        </a:rPr>
+                        <a:t>Deckungsgrad</a:t>
+                      </a:r>
+                    </a:p>
+                  </a:txBody>
+                  <a:tcPr/>
+                </a:tc>
+                <a:tc>
+                  <a:txBody>
+                    <a:bodyPr/>
+                    <a:lstStyle/>
+                    <a:p/>
+                  </a:txBody>
+                  <a:tcPr/>
+                </a:tc>
+                <a:tc>
+                  <a:txBody>
+                    <a:bodyPr/>
+                    <a:lstStyle/>
+                    <a:p>
+                      <a:r>
+                        <a:rPr sz="1050">
+                          <a:solidFill>
+                            <a:srgbClr val="3D5466"/>
+                          </a:solidFill>
+                          <a:latin typeface="Arial"/>
+                        </a:rPr>
+                        <a:t>___%</a:t>
+                      </a:r>
+                    </a:p>
+                  </a:txBody>
+                  <a:tcPr/>
+                </a:tc>
+                <a:tc>
+                  <a:txBody>
+                    <a:bodyPr/>
+                    <a:lstStyle/>
+                    <a:p/>
+                  </a:txBody>
+                  <a:tcPr/>
+                </a:tc>
+              </a:tr>
+            </a:tbl>
+          </a:graphicData>
+        </a:graphic>
+      </p:graphicFrame>
+      <p:sp>
+        <p:nvSpPr>
+          <p:cNvPr id="8" name="Rectangle 7"/>
+          <p:cNvSpPr/>
+          <p:nvPr/>
+        </p:nvSpPr>
+        <p:spPr>
+          <a:xfrm>
+            <a:off x="0" y="6510528"/>
+            <a:ext cx="12188952" cy="347472"/>
+          </a:xfrm>
+          <a:prstGeom prst="rect">
+            <a:avLst/>
+          </a:prstGeom>
+          <a:solidFill>
+            <a:srgbClr val="0A1937"/>
+          </a:solidFill>
+          <a:ln>
+            <a:noFill/>
+          </a:ln>
+        </p:spPr>
+        <p:style>
+          <a:lnRef idx="1">
+            <a:schemeClr val="accent1"/>
+          </a:lnRef>
+          <a:fillRef idx="3">
+            <a:schemeClr val="accent1"/>
+          </a:fillRef>
+          <a:effectRef idx="2">
+            <a:schemeClr val="accent1"/>
+          </a:effectRef>
+          <a:fontRef idx="minor">
+            <a:schemeClr val="lt1"/>
+          </a:fontRef>
+        </p:style>
+        <p:txBody>
+          <a:bodyPr rtlCol="0" anchor="ctr"/>
+          <a:lstStyle/>
+          <a:p>
+            <a:pPr algn="ctr"/>
+          </a:p>
+        </p:txBody>
+      </p:sp>
+      <p:sp>
+        <p:nvSpPr>
+          <p:cNvPr id="9" name="TextBox 8"/>
+          <p:cNvSpPr txBox="1"/>
+          <p:nvPr/>
+        </p:nvSpPr>
+        <p:spPr>
+          <a:xfrm>
+            <a:off x="685800" y="6583680"/>
+            <a:ext cx="6490411" cy="256032"/>
+          </a:xfrm>
+          <a:prstGeom prst="rect">
+            <a:avLst/>
+          </a:prstGeom>
+          <a:noFill/>
+        </p:spPr>
+        <p:txBody>
+          <a:bodyPr wrap="none">
+            <a:spAutoFit/>
+          </a:bodyPr>
+          <a:lstStyle/>
+          <a:p>
+            <a:pPr algn="l"/>
+            <a:r>
+              <a:rPr sz="700">
+                <a:solidFill>
+                  <a:srgbClr val="A0B4D2"/>
+                </a:solidFill>
+                <a:latin typeface="JetBrains Mono"/>
+              </a:rPr>
+              <a:t>Benedikt Zoller Coaching  ·  FKB Campus  ·  M21</a:t>
+            </a:r>
+          </a:p>
+        </p:txBody>
+      </p:sp>
+      <p:sp>
+        <p:nvSpPr>
+          <p:cNvPr id="10" name="TextBox 9"/>
+          <p:cNvSpPr txBox="1"/>
+          <p:nvPr/>
+        </p:nvSpPr>
+        <p:spPr>
+          <a:xfrm>
+            <a:off x="7176211" y="6583680"/>
+            <a:ext cx="4326940" cy="256032"/>
+          </a:xfrm>
+          <a:prstGeom prst="rect">
+            <a:avLst/>
+          </a:prstGeom>
+          <a:noFill/>
+        </p:spPr>
+        <p:txBody>
+          <a:bodyPr wrap="none">
+            <a:spAutoFit/>
+          </a:bodyPr>
+          <a:lstStyle/>
+          <a:p>
+            <a:pPr algn="r"/>
+            <a:r>
+              <a:rPr sz="700">
+                <a:solidFill>
+                  <a:srgbClr val="A0B4D2"/>
+                </a:solidFill>
+                <a:latin typeface="JetBrains Mono"/>
+              </a:rPr>
+              <a:t>Übersicht</a:t>
+            </a:r>
+          </a:p>
+        </p:txBody>
+      </p:sp>
+    </p:spTree>
+  </p:cSld>
+  <p:clrMapOvr>
+    <a:masterClrMapping/>
+  </p:clrMapOvr>
+</p:sld>
+</file>
+
 <file path=ppt/slides/slide3.xml><?xml version="1.0" encoding="utf-8"?>
 <p:sld xmlns:a="http://schemas.openxmlformats.org/drawingml/2006/main" xmlns:p="http://schemas.openxmlformats.org/presentationml/2006/main" xmlns:r="http://schemas.openxmlformats.org/officeDocument/2006/relationships">
   <p:cSld>
@@ -8922,7 +12840,7 @@
                 </a:solidFill>
                 <a:latin typeface="Source Serif 4"/>
               </a:rPr>
-              <a:t>Agenda</a:t>
+              <a:t>So läuft das Modul</a:t>
             </a:r>
           </a:p>
         </p:txBody>
@@ -8951,153 +12869,445 @@
           <a:p>
             <a:pPr>
               <a:spcBef>
-                <a:spcPts val="800"/>
+                <a:spcPts val="400"/>
               </a:spcBef>
               <a:spcAft>
-                <a:spcPts val="200"/>
+                <a:spcPts val="100"/>
               </a:spcAft>
             </a:pPr>
             <a:r>
-              <a:rPr sz="1500">
+              <a:rPr sz="900">
+                <a:solidFill>
+                  <a:srgbClr val="78808C"/>
+                </a:solidFill>
+                <a:latin typeface="Consolas"/>
+              </a:rPr>
+              <a:t>08:00–08:10 </a:t>
+            </a:r>
+            <a:r>
+              <a:rPr sz="1200" b="1">
                 <a:solidFill>
                   <a:srgbClr val="3D5466"/>
                 </a:solidFill>
                 <a:latin typeface="Arial"/>
               </a:rPr>
-              <a:t>01   Theorie-Input: Das 8-Felder-Framework für KMU-Kreditentscheidungen</a:t>
+              <a:t>  Einstieg</a:t>
+            </a:r>
+            <a:r>
+              <a:rPr sz="900">
+                <a:solidFill>
+                  <a:srgbClr val="78808C"/>
+                </a:solidFill>
+                <a:latin typeface="Arial"/>
+              </a:rPr>
+              <a:t>  ·  Plenum</a:t>
             </a:r>
           </a:p>
           <a:p>
             <a:pPr>
               <a:spcBef>
-                <a:spcPts val="800"/>
+                <a:spcPts val="400"/>
               </a:spcBef>
               <a:spcAft>
-                <a:spcPts val="200"/>
+                <a:spcPts val="100"/>
               </a:spcAft>
             </a:pPr>
             <a:r>
-              <a:rPr sz="1500">
+              <a:rPr sz="900">
+                <a:solidFill>
+                  <a:srgbClr val="78808C"/>
+                </a:solidFill>
+                <a:latin typeface="Consolas"/>
+              </a:rPr>
+              <a:t>08:10–08:25 </a:t>
+            </a:r>
+            <a:r>
+              <a:rPr sz="1200" b="1">
                 <a:solidFill>
                   <a:srgbClr val="3D5466"/>
                 </a:solidFill>
                 <a:latin typeface="Arial"/>
               </a:rPr>
-              <a:t>02   Theorie-Input: Von der Analyse zur Entscheidungsvorlage</a:t>
+              <a:t>  Aktivierung</a:t>
+            </a:r>
+            <a:r>
+              <a:rPr sz="900">
+                <a:solidFill>
+                  <a:srgbClr val="78808C"/>
+                </a:solidFill>
+                <a:latin typeface="Arial"/>
+              </a:rPr>
+              <a:t>  ·  Rundgespräch</a:t>
             </a:r>
           </a:p>
           <a:p>
             <a:pPr>
               <a:spcBef>
-                <a:spcPts val="800"/>
+                <a:spcPts val="400"/>
               </a:spcBef>
               <a:spcAft>
-                <a:spcPts val="200"/>
+                <a:spcPts val="100"/>
               </a:spcAft>
             </a:pPr>
             <a:r>
-              <a:rPr sz="1500">
+              <a:rPr sz="900">
+                <a:solidFill>
+                  <a:srgbClr val="78808C"/>
+                </a:solidFill>
+                <a:latin typeface="Consolas"/>
+              </a:rPr>
+              <a:t>08:25–09:00 </a:t>
+            </a:r>
+            <a:r>
+              <a:rPr sz="1200" b="1">
                 <a:solidFill>
                   <a:srgbClr val="3D5466"/>
                 </a:solidFill>
                 <a:latin typeface="Arial"/>
               </a:rPr>
-              <a:t>03   Theorie-Input: Sicherheitenbewertung nach BelWertV</a:t>
+              <a:t>  Theorie-Input I</a:t>
+            </a:r>
+            <a:r>
+              <a:rPr sz="900">
+                <a:solidFill>
+                  <a:srgbClr val="78808C"/>
+                </a:solidFill>
+                <a:latin typeface="Arial"/>
+              </a:rPr>
+              <a:t>  ·  Vortrag + Diskussion</a:t>
             </a:r>
           </a:p>
           <a:p>
             <a:pPr>
               <a:spcBef>
-                <a:spcPts val="800"/>
+                <a:spcPts val="400"/>
               </a:spcBef>
               <a:spcAft>
-                <a:spcPts val="200"/>
+                <a:spcPts val="100"/>
               </a:spcAft>
             </a:pPr>
             <a:r>
-              <a:rPr sz="1500">
+              <a:rPr sz="900">
+                <a:solidFill>
+                  <a:srgbClr val="78808C"/>
+                </a:solidFill>
+                <a:latin typeface="Consolas"/>
+              </a:rPr>
+              <a:t>09:00–09:25 </a:t>
+            </a:r>
+            <a:r>
+              <a:rPr sz="1200" b="1">
                 <a:solidFill>
                   <a:srgbClr val="3D5466"/>
                 </a:solidFill>
                 <a:latin typeface="Arial"/>
               </a:rPr>
-              <a:t>04   4.3a Sicherheitenbewertung im Alltag</a:t>
+              <a:t>  Theorie-Input II</a:t>
+            </a:r>
+            <a:r>
+              <a:rPr sz="900">
+                <a:solidFill>
+                  <a:srgbClr val="78808C"/>
+                </a:solidFill>
+                <a:latin typeface="Arial"/>
+              </a:rPr>
+              <a:t>  ·  Vortrag + Diskussion</a:t>
             </a:r>
           </a:p>
           <a:p>
             <a:pPr>
               <a:spcBef>
-                <a:spcPts val="800"/>
+                <a:spcPts val="400"/>
               </a:spcBef>
               <a:spcAft>
-                <a:spcPts val="200"/>
+                <a:spcPts val="100"/>
               </a:spcAft>
             </a:pPr>
             <a:r>
-              <a:rPr sz="1500">
+              <a:rPr sz="900">
+                <a:solidFill>
+                  <a:srgbClr val="78808C"/>
+                </a:solidFill>
+                <a:latin typeface="Consolas"/>
+              </a:rPr>
+              <a:t>09:25–09:30 </a:t>
+            </a:r>
+            <a:r>
+              <a:rPr sz="1200" b="1">
                 <a:solidFill>
                   <a:srgbClr val="3D5466"/>
                 </a:solidFill>
                 <a:latin typeface="Arial"/>
               </a:rPr>
-              <a:t>05   4.3b Betriebsmittelkredite und Kontokorrent: Kurzfall</a:t>
+              <a:t>  Überleitung</a:t>
+            </a:r>
+            <a:r>
+              <a:rPr sz="900">
+                <a:solidFill>
+                  <a:srgbClr val="78808C"/>
+                </a:solidFill>
+                <a:latin typeface="Arial"/>
+              </a:rPr>
+              <a:t>  ·  Plenum</a:t>
             </a:r>
           </a:p>
           <a:p>
             <a:pPr>
               <a:spcBef>
-                <a:spcPts val="800"/>
+                <a:spcPts val="400"/>
               </a:spcBef>
               <a:spcAft>
-                <a:spcPts val="200"/>
+                <a:spcPts val="100"/>
               </a:spcAft>
             </a:pPr>
             <a:r>
-              <a:rPr sz="1500">
+              <a:rPr sz="900">
+                <a:solidFill>
+                  <a:srgbClr val="78808C"/>
+                </a:solidFill>
+                <a:latin typeface="Consolas"/>
+              </a:rPr>
+              <a:t>09:30–10:15 </a:t>
+            </a:r>
+            <a:r>
+              <a:rPr sz="1200" b="1">
                 <a:solidFill>
                   <a:srgbClr val="3D5466"/>
                 </a:solidFill>
                 <a:latin typeface="Arial"/>
               </a:rPr>
-              <a:t>06   4.3c Checkliste: Bestandskredit in der Krise – erste Schritte</a:t>
+              <a:t>  Fallstudienarbeit I</a:t>
+            </a:r>
+            <a:r>
+              <a:rPr sz="900">
+                <a:solidFill>
+                  <a:srgbClr val="78808C"/>
+                </a:solidFill>
+                <a:latin typeface="Arial"/>
+              </a:rPr>
+              <a:t>  ·  Einzelarbeit</a:t>
             </a:r>
           </a:p>
           <a:p>
             <a:pPr>
               <a:spcBef>
-                <a:spcPts val="800"/>
+                <a:spcPts val="400"/>
               </a:spcBef>
               <a:spcAft>
-                <a:spcPts val="200"/>
+                <a:spcPts val="100"/>
               </a:spcAft>
             </a:pPr>
             <a:r>
-              <a:rPr sz="1500">
+              <a:rPr sz="900">
+                <a:solidFill>
+                  <a:srgbClr val="78808C"/>
+                </a:solidFill>
+                <a:latin typeface="Consolas"/>
+              </a:rPr>
+              <a:t>10:15–10:25 </a:t>
+            </a:r>
+            <a:r>
+              <a:rPr sz="1200" b="1">
                 <a:solidFill>
                   <a:srgbClr val="3D5466"/>
                 </a:solidFill>
                 <a:latin typeface="Arial"/>
               </a:rPr>
-              <a:t>07   Praxisfall: Metallbau Schnell GmbH (Heilbronn, fiktiv)</a:t>
+              <a:t>  Pause</a:t>
+            </a:r>
+            <a:r>
+              <a:rPr sz="900">
+                <a:solidFill>
+                  <a:srgbClr val="78808C"/>
+                </a:solidFill>
+                <a:latin typeface="Arial"/>
+              </a:rPr>
+              <a:t>  ·  —</a:t>
             </a:r>
           </a:p>
           <a:p>
             <a:pPr>
               <a:spcBef>
-                <a:spcPts val="800"/>
+                <a:spcPts val="400"/>
               </a:spcBef>
               <a:spcAft>
-                <a:spcPts val="200"/>
+                <a:spcPts val="100"/>
               </a:spcAft>
             </a:pPr>
             <a:r>
-              <a:rPr sz="1500">
+              <a:rPr sz="900">
+                <a:solidFill>
+                  <a:srgbClr val="78808C"/>
+                </a:solidFill>
+                <a:latin typeface="Consolas"/>
+              </a:rPr>
+              <a:t>10:25–10:55 </a:t>
+            </a:r>
+            <a:r>
+              <a:rPr sz="1200" b="1">
                 <a:solidFill>
                   <a:srgbClr val="3D5466"/>
                 </a:solidFill>
                 <a:latin typeface="Arial"/>
               </a:rPr>
-              <a:t>08   Arbeitsblatt: 8-Felder-Kreditanalyse-Template</a:t>
+              <a:t>  Fallstudienarbeit II</a:t>
+            </a:r>
+            <a:r>
+              <a:rPr sz="900">
+                <a:solidFill>
+                  <a:srgbClr val="78808C"/>
+                </a:solidFill>
+                <a:latin typeface="Arial"/>
+              </a:rPr>
+              <a:t>  ·  Kleingruppenarbeit</a:t>
+            </a:r>
+          </a:p>
+          <a:p>
+            <a:pPr>
+              <a:spcBef>
+                <a:spcPts val="400"/>
+              </a:spcBef>
+              <a:spcAft>
+                <a:spcPts val="100"/>
+              </a:spcAft>
+            </a:pPr>
+            <a:r>
+              <a:rPr sz="900">
+                <a:solidFill>
+                  <a:srgbClr val="78808C"/>
+                </a:solidFill>
+                <a:latin typeface="Consolas"/>
+              </a:rPr>
+              <a:t>10:55–11:25 </a:t>
+            </a:r>
+            <a:r>
+              <a:rPr sz="1200" b="1">
+                <a:solidFill>
+                  <a:srgbClr val="3D5466"/>
+                </a:solidFill>
+                <a:latin typeface="Arial"/>
+              </a:rPr>
+              <a:t>  Präsentation</a:t>
+            </a:r>
+            <a:r>
+              <a:rPr sz="900">
+                <a:solidFill>
+                  <a:srgbClr val="78808C"/>
+                </a:solidFill>
+                <a:latin typeface="Arial"/>
+              </a:rPr>
+              <a:t>  ·  Präsentation + Feedback</a:t>
+            </a:r>
+          </a:p>
+          <a:p>
+            <a:pPr>
+              <a:spcBef>
+                <a:spcPts val="400"/>
+              </a:spcBef>
+              <a:spcAft>
+                <a:spcPts val="100"/>
+              </a:spcAft>
+            </a:pPr>
+            <a:r>
+              <a:rPr sz="900">
+                <a:solidFill>
+                  <a:srgbClr val="78808C"/>
+                </a:solidFill>
+                <a:latin typeface="Consolas"/>
+              </a:rPr>
+              <a:t>11:25–11:45 </a:t>
+            </a:r>
+            <a:r>
+              <a:rPr sz="1200" b="1">
+                <a:solidFill>
+                  <a:srgbClr val="3D5466"/>
+                </a:solidFill>
+                <a:latin typeface="Arial"/>
+              </a:rPr>
+              <a:t>  Musterlösung</a:t>
+            </a:r>
+            <a:r>
+              <a:rPr sz="900">
+                <a:solidFill>
+                  <a:srgbClr val="78808C"/>
+                </a:solidFill>
+                <a:latin typeface="Arial"/>
+              </a:rPr>
+              <a:t>  ·  Trainerinput</a:t>
+            </a:r>
+          </a:p>
+          <a:p>
+            <a:pPr>
+              <a:spcBef>
+                <a:spcPts val="400"/>
+              </a:spcBef>
+              <a:spcAft>
+                <a:spcPts val="100"/>
+              </a:spcAft>
+            </a:pPr>
+            <a:r>
+              <a:rPr sz="900">
+                <a:solidFill>
+                  <a:srgbClr val="78808C"/>
+                </a:solidFill>
+                <a:latin typeface="Consolas"/>
+              </a:rPr>
+              <a:t>11:45–11:55 </a:t>
+            </a:r>
+            <a:r>
+              <a:rPr sz="1200" b="1">
+                <a:solidFill>
+                  <a:srgbClr val="3D5466"/>
+                </a:solidFill>
+                <a:latin typeface="Arial"/>
+              </a:rPr>
+              <a:t>  Reflexion</a:t>
+            </a:r>
+            <a:r>
+              <a:rPr sz="900">
+                <a:solidFill>
+                  <a:srgbClr val="78808C"/>
+                </a:solidFill>
+                <a:latin typeface="Arial"/>
+              </a:rPr>
+              <a:t>  ·  Plenum</a:t>
+            </a:r>
+          </a:p>
+          <a:p>
+            <a:pPr>
+              <a:spcBef>
+                <a:spcPts val="400"/>
+              </a:spcBef>
+              <a:spcAft>
+                <a:spcPts val="100"/>
+              </a:spcAft>
+            </a:pPr>
+            <a:r>
+              <a:rPr sz="900">
+                <a:solidFill>
+                  <a:srgbClr val="78808C"/>
+                </a:solidFill>
+                <a:latin typeface="Consolas"/>
+              </a:rPr>
+              <a:t>11:55–12:00 </a:t>
+            </a:r>
+            <a:r>
+              <a:rPr sz="1200" b="1">
+                <a:solidFill>
+                  <a:srgbClr val="3D5466"/>
+                </a:solidFill>
+                <a:latin typeface="Arial"/>
+              </a:rPr>
+              <a:t>  Abschluss</a:t>
+            </a:r>
+            <a:r>
+              <a:rPr sz="900">
+                <a:solidFill>
+                  <a:srgbClr val="78808C"/>
+                </a:solidFill>
+                <a:latin typeface="Arial"/>
+              </a:rPr>
+              <a:t>  ·  Plenum</a:t>
             </a:r>
           </a:p>
         </p:txBody>
@@ -9844,13 +14054,13 @@
               </a:spcAft>
             </a:pPr>
             <a:r>
-              <a:rPr sz="1200">
+              <a:rPr sz="1300">
                 <a:solidFill>
                   <a:srgbClr val="3D5466"/>
                 </a:solidFill>
                 <a:latin typeface="Arial"/>
               </a:rPr>
-              <a:t>Übersicht der 8 Felder:</a:t>
+              <a:t>▸  Übersicht der 8 Felder:</a:t>
             </a:r>
           </a:p>
           <a:p>
@@ -9882,13 +14092,13 @@
               </a:spcAft>
             </a:pPr>
             <a:r>
-              <a:rPr sz="1200">
+              <a:rPr sz="1300">
                 <a:solidFill>
                   <a:srgbClr val="3D5466"/>
                 </a:solidFill>
                 <a:latin typeface="Arial"/>
               </a:rPr>
-              <a:t>Definition: Wozu wird der Kredit konkret verwendet? Ist die Verwendung wirtschaftlich sinnvoll und bankseits nachvollziehbar?</a:t>
+              <a:t>▸  Definition: Wozu wird der Kredit konkret verwendet? Ist die Verwendung wirtschaftlich sinnvoll und bankseits nachvollziehbar?</a:t>
             </a:r>
           </a:p>
           <a:p>
@@ -9901,13 +14111,13 @@
               </a:spcAft>
             </a:pPr>
             <a:r>
-              <a:rPr sz="1200">
+              <a:rPr sz="1300">
                 <a:solidFill>
                   <a:srgbClr val="3D5466"/>
                 </a:solidFill>
                 <a:latin typeface="Arial"/>
               </a:rPr>
-              <a:t>Analysefragen:</a:t>
+              <a:t>▸  Analysefragen:</a:t>
             </a:r>
           </a:p>
           <a:p>
@@ -9996,13 +14206,13 @@
               </a:spcAft>
             </a:pPr>
             <a:r>
-              <a:rPr sz="1200">
+              <a:rPr sz="1300">
                 <a:solidFill>
                   <a:srgbClr val="3D5466"/>
                 </a:solidFill>
                 <a:latin typeface="Arial"/>
               </a:rPr>
-              <a:t>Typische Risiken: Mehrfachzweck ohne Aufteilung, Verwendung für Schuldenumschuldung ohne explizite Nennung, fehlende Kostenaufstellungen.</a:t>
+              <a:t>▸  Typische Risiken: Mehrfachzweck ohne Aufteilung, Verwendung für Schuldenumschuldung ohne explizite Nennung, fehlende Kostenaufstellungen.</a:t>
             </a:r>
           </a:p>
           <a:p>
@@ -10034,13 +14244,13 @@
               </a:spcAft>
             </a:pPr>
             <a:r>
-              <a:rPr sz="1200">
+              <a:rPr sz="1300">
                 <a:solidFill>
                   <a:srgbClr val="3D5466"/>
                 </a:solidFill>
                 <a:latin typeface="Arial"/>
               </a:rPr>
-              <a:t>Definition: Kann das Unternehmen Zins und Tilgung aus operativem Cashflow decken, oder ist es auf Desinvestitionen oder Dritte angewiesen?</a:t>
+              <a:t>▸  Definition: Kann das Unternehmen Zins und Tilgung aus operativem Cashflow decken, oder ist es auf Desinvestitionen oder Dritte angewiesen?</a:t>
             </a:r>
           </a:p>
         </p:txBody>
@@ -10510,7 +14720,7 @@
             <a:avLst/>
           </a:prstGeom>
           <a:solidFill>
-            <a:srgbClr val="EDEDF3"/>
+            <a:srgbClr val="FFFFFF"/>
           </a:solidFill>
           <a:ln>
             <a:noFill/>
@@ -10611,51 +14821,43 @@
                 </a:solidFill>
                 <a:latin typeface="JetBrains Mono"/>
               </a:rPr>
-              <a:t>M21  ·  INHALT</a:t>
-            </a:r>
-          </a:p>
-        </p:txBody>
-      </p:sp>
-      <p:sp>
-        <p:nvSpPr>
-          <p:cNvPr id="5" name="Rectangle 4"/>
-          <p:cNvSpPr/>
-          <p:nvPr/>
-        </p:nvSpPr>
-        <p:spPr>
-          <a:xfrm>
-            <a:off x="0" y="1234440"/>
-            <a:ext cx="12188952" cy="12700"/>
-          </a:xfrm>
-          <a:prstGeom prst="rect">
-            <a:avLst/>
-          </a:prstGeom>
-          <a:solidFill>
-            <a:srgbClr val="D8DFE4"/>
-          </a:solidFill>
-          <a:ln>
-            <a:noFill/>
-          </a:ln>
-        </p:spPr>
-        <p:style>
-          <a:lnRef idx="1">
-            <a:schemeClr val="accent1"/>
-          </a:lnRef>
-          <a:fillRef idx="3">
-            <a:schemeClr val="accent1"/>
-          </a:fillRef>
-          <a:effectRef idx="2">
-            <a:schemeClr val="accent1"/>
-          </a:effectRef>
-          <a:fontRef idx="minor">
-            <a:schemeClr val="lt1"/>
-          </a:fontRef>
-        </p:style>
-        <p:txBody>
-          <a:bodyPr rtlCol="0" anchor="ctr"/>
-          <a:lstStyle/>
-          <a:p>
-            <a:pPr algn="ctr"/>
+              <a:t>M21  ·  ÜBERSICHT</a:t>
+            </a:r>
+          </a:p>
+        </p:txBody>
+      </p:sp>
+      <p:sp>
+        <p:nvSpPr>
+          <p:cNvPr id="5" name="TextBox 4"/>
+          <p:cNvSpPr txBox="1"/>
+          <p:nvPr/>
+        </p:nvSpPr>
+        <p:spPr>
+          <a:xfrm>
+            <a:off x="685800" y="502920"/>
+            <a:ext cx="10817352" cy="594360"/>
+          </a:xfrm>
+          <a:prstGeom prst="rect">
+            <a:avLst/>
+          </a:prstGeom>
+          <a:noFill/>
+        </p:spPr>
+        <p:txBody>
+          <a:bodyPr wrap="square">
+            <a:spAutoFit/>
+          </a:bodyPr>
+          <a:lstStyle/>
+          <a:p>
+            <a:pPr algn="l"/>
+            <a:r>
+              <a:rPr sz="2000" b="1" i="0">
+                <a:solidFill>
+                  <a:srgbClr val="1F2C56"/>
+                </a:solidFill>
+                <a:latin typeface="Source Serif 4"/>
+              </a:rPr>
+              <a:t>Theorie-Input: Das 8-Felder-Framework für KMU-Kreditentscheidungen</a:t>
+            </a:r>
           </a:p>
         </p:txBody>
       </p:sp>
@@ -10667,8 +14869,8 @@
         </p:nvSpPr>
         <p:spPr>
           <a:xfrm>
-            <a:off x="685800" y="502920"/>
-            <a:ext cx="36576" cy="658368"/>
+            <a:off x="685800" y="1143000"/>
+            <a:ext cx="10817352" cy="25400"/>
           </a:xfrm>
           <a:prstGeom prst="rect">
             <a:avLst/>
@@ -10702,295 +14904,426 @@
           </a:p>
         </p:txBody>
       </p:sp>
-      <p:sp>
-        <p:nvSpPr>
-          <p:cNvPr id="7" name="TextBox 6"/>
-          <p:cNvSpPr txBox="1"/>
-          <p:nvPr/>
-        </p:nvSpPr>
-        <p:spPr>
-          <a:xfrm>
-            <a:off x="813816" y="502920"/>
-            <a:ext cx="10634472" cy="685800"/>
-          </a:xfrm>
-          <a:prstGeom prst="rect">
-            <a:avLst/>
-          </a:prstGeom>
-          <a:noFill/>
-        </p:spPr>
-        <p:txBody>
-          <a:bodyPr wrap="square">
-            <a:spAutoFit/>
-          </a:bodyPr>
-          <a:lstStyle/>
-          <a:p>
-            <a:pPr algn="l"/>
-            <a:r>
-              <a:rPr sz="2400" b="1" i="0">
-                <a:solidFill>
-                  <a:srgbClr val="1F2C56"/>
-                </a:solidFill>
-                <a:latin typeface="Source Serif 4"/>
-              </a:rPr>
-              <a:t>Theorie-Input: Von der Analyse zur Entscheidungsvorlage</a:t>
-            </a:r>
-          </a:p>
-        </p:txBody>
-      </p:sp>
-      <p:sp>
-        <p:nvSpPr>
-          <p:cNvPr id="8" name="TextBox 7"/>
-          <p:cNvSpPr txBox="1"/>
-          <p:nvPr/>
-        </p:nvSpPr>
-        <p:spPr>
-          <a:xfrm>
-            <a:off x="685800" y="1417320"/>
-            <a:ext cx="10817352" cy="5029200"/>
-          </a:xfrm>
-          <a:prstGeom prst="rect">
-            <a:avLst/>
-          </a:prstGeom>
-          <a:noFill/>
-        </p:spPr>
-        <p:txBody>
-          <a:bodyPr wrap="square">
-            <a:spAutoFit/>
-          </a:bodyPr>
-          <a:lstStyle/>
-          <a:p>
-            <a:pPr>
-              <a:spcBef>
-                <a:spcPts val="1000"/>
-              </a:spcBef>
-              <a:spcAft>
-                <a:spcPts val="200"/>
-              </a:spcAft>
-            </a:pPr>
-            <a:r>
-              <a:rPr sz="800" b="1">
-                <a:solidFill>
-                  <a:srgbClr val="78808C"/>
-                </a:solidFill>
-                <a:latin typeface="JetBrains Mono"/>
-              </a:rPr>
-              <a:t>4.2.1 STRUKTUR EINER KREDITVORLAGE NACH MARISK BTO 1.1</a:t>
-            </a:r>
-          </a:p>
-          <a:p>
-            <a:pPr>
-              <a:spcBef>
-                <a:spcPts val="400"/>
-              </a:spcBef>
-              <a:spcAft>
-                <a:spcPts val="200"/>
-              </a:spcAft>
-            </a:pPr>
-            <a:r>
-              <a:rPr sz="1200">
-                <a:solidFill>
-                  <a:srgbClr val="3D5466"/>
-                </a:solidFill>
-                <a:latin typeface="Arial"/>
-              </a:rPr>
-              <a:t>Eine bankinterne Kreditvorlage muss nach MaRisk BTO 1.1 (Bundesanstalt für Finanzdienstleistungsaufsicht, 2023 ) folgende Elemente enthalten:</a:t>
-            </a:r>
-          </a:p>
-          <a:p>
-            <a:pPr>
-              <a:spcBef>
-                <a:spcPts val="400"/>
-              </a:spcBef>
-              <a:spcAft>
-                <a:spcPts val="200"/>
-              </a:spcAft>
-            </a:pPr>
-            <a:r>
-              <a:rPr sz="1200">
-                <a:solidFill>
-                  <a:srgbClr val="3D5466"/>
-                </a:solidFill>
-                <a:latin typeface="Arial"/>
-              </a:rPr>
-              <a:t>Gesamtumfang: 12–20 Seiten (je nach Komplexität)</a:t>
-            </a:r>
-          </a:p>
-          <a:p>
-            <a:pPr>
-              <a:spcBef>
-                <a:spcPts val="1000"/>
-              </a:spcBef>
-              <a:spcAft>
-                <a:spcPts val="200"/>
-              </a:spcAft>
-            </a:pPr>
-            <a:r>
-              <a:rPr sz="800" b="1">
-                <a:solidFill>
-                  <a:srgbClr val="78808C"/>
-                </a:solidFill>
-                <a:latin typeface="JetBrains Mono"/>
-              </a:rPr>
-              <a:t>4.2.2 DIE DREI ENTSCHEIDUNGSERGEBNISSE</a:t>
-            </a:r>
-          </a:p>
-          <a:p>
-            <a:pPr>
-              <a:spcBef>
-                <a:spcPts val="400"/>
-              </a:spcBef>
-              <a:spcAft>
-                <a:spcPts val="200"/>
-              </a:spcAft>
-            </a:pPr>
-            <a:r>
-              <a:rPr sz="1200">
-                <a:solidFill>
-                  <a:srgbClr val="3D5466"/>
-                </a:solidFill>
-                <a:latin typeface="Arial"/>
-              </a:rPr>
-              <a:t>Entscheidung 1: ZUSAGE</a:t>
-            </a:r>
-          </a:p>
-          <a:p>
-            <a:pPr>
-              <a:spcBef>
-                <a:spcPts val="400"/>
-              </a:spcBef>
-              <a:spcAft>
-                <a:spcPts val="200"/>
-              </a:spcAft>
-            </a:pPr>
-            <a:r>
-              <a:rPr sz="1300">
-                <a:solidFill>
-                  <a:srgbClr val="3D5466"/>
-                </a:solidFill>
-                <a:latin typeface="Arial"/>
-              </a:rPr>
-              <a:t>▸  Alle 8 Felder positiv oder neutral</a:t>
-            </a:r>
-          </a:p>
-          <a:p>
-            <a:pPr>
-              <a:spcBef>
-                <a:spcPts val="400"/>
-              </a:spcBef>
-              <a:spcAft>
-                <a:spcPts val="200"/>
-              </a:spcAft>
-            </a:pPr>
-            <a:r>
-              <a:rPr sz="1300">
-                <a:solidFill>
-                  <a:srgbClr val="3D5466"/>
-                </a:solidFill>
-                <a:latin typeface="Arial"/>
-              </a:rPr>
-              <a:t>▸  Keine einschränkenden Bedingungen</a:t>
-            </a:r>
-          </a:p>
-          <a:p>
-            <a:pPr>
-              <a:spcBef>
-                <a:spcPts val="400"/>
-              </a:spcBef>
-              <a:spcAft>
-                <a:spcPts val="200"/>
-              </a:spcAft>
-            </a:pPr>
-            <a:r>
-              <a:rPr sz="1300">
-                <a:solidFill>
-                  <a:srgbClr val="3D5466"/>
-                </a:solidFill>
-                <a:latin typeface="Arial"/>
-              </a:rPr>
-              <a:t>▸  Dokumentation: Kreditausschuss-Beschluss, Krediturkunde</a:t>
-            </a:r>
-          </a:p>
-          <a:p>
-            <a:pPr>
-              <a:spcBef>
-                <a:spcPts val="400"/>
-              </a:spcBef>
-              <a:spcAft>
-                <a:spcPts val="200"/>
-              </a:spcAft>
-            </a:pPr>
-            <a:r>
-              <a:rPr sz="1200">
-                <a:solidFill>
-                  <a:srgbClr val="3D5466"/>
-                </a:solidFill>
-                <a:latin typeface="Arial"/>
-              </a:rPr>
-              <a:t>Entscheidung 2: ZUSAGE MIT AUFLAGEN</a:t>
-            </a:r>
-          </a:p>
-          <a:p>
-            <a:pPr>
-              <a:spcBef>
-                <a:spcPts val="400"/>
-              </a:spcBef>
-              <a:spcAft>
-                <a:spcPts val="200"/>
-              </a:spcAft>
-            </a:pPr>
-            <a:r>
-              <a:rPr sz="1300">
-                <a:solidFill>
-                  <a:srgbClr val="3D5466"/>
-                </a:solidFill>
-                <a:latin typeface="Arial"/>
-              </a:rPr>
-              <a:t>▸  Einzelne Felder mit Risiken, die durch Auflagen mitigierbar sind</a:t>
-            </a:r>
-          </a:p>
-          <a:p>
-            <a:pPr>
-              <a:spcBef>
-                <a:spcPts val="400"/>
-              </a:spcBef>
-              <a:spcAft>
-                <a:spcPts val="200"/>
-              </a:spcAft>
-            </a:pPr>
-            <a:r>
-              <a:rPr sz="1300">
-                <a:solidFill>
-                  <a:srgbClr val="3D5466"/>
-                </a:solidFill>
-                <a:latin typeface="Arial"/>
-              </a:rPr>
-              <a:t>▸  Auflagen müssen SMART formuliert sein (Spezifisch, Messbar, Akzeptabel, Realistisch, Terminiert)</a:t>
-            </a:r>
-          </a:p>
-          <a:p>
-            <a:pPr>
-              <a:spcBef>
-                <a:spcPts val="400"/>
-              </a:spcBef>
-              <a:spcAft>
-                <a:spcPts val="200"/>
-              </a:spcAft>
-            </a:pPr>
-            <a:r>
-              <a:rPr sz="1300">
-                <a:solidFill>
-                  <a:srgbClr val="3D5466"/>
-                </a:solidFill>
-                <a:latin typeface="Arial"/>
-              </a:rPr>
-              <a:t>▸  Beispiel: „EK-Quote muss innerhalb von 24 Monaten auf ≥ 23 % steigen; Nachweis quartalsweise."</a:t>
-            </a:r>
-          </a:p>
-        </p:txBody>
-      </p:sp>
-      <p:sp>
-        <p:nvSpPr>
-          <p:cNvPr id="9" name="Rectangle 8"/>
+      <p:graphicFrame>
+        <p:nvGraphicFramePr>
+          <p:cNvPr id="7" name="Table 6"/>
+          <p:cNvGraphicFramePr>
+            <a:graphicFrameLocks noGrp="1"/>
+          </p:cNvGraphicFramePr>
+          <p:nvPr/>
+        </p:nvGraphicFramePr>
+        <p:xfrm>
+          <a:off x="685800" y="1417320"/>
+          <a:ext cx="10817352" cy="1536192"/>
+        </p:xfrm>
+        <a:graphic>
+          <a:graphicData uri="http://schemas.openxmlformats.org/drawingml/2006/table">
+            <a:tbl>
+              <a:tblPr firstRow="1" bandRow="1">
+                <a:tableStyleId>{5C22544A-7EE6-4342-B048-85BDC9FD1C3A}</a:tableStyleId>
+              </a:tblPr>
+              <a:tblGrid>
+                <a:gridCol w="2163470"/>
+                <a:gridCol w="2163470"/>
+                <a:gridCol w="2163470"/>
+                <a:gridCol w="2163470"/>
+                <a:gridCol w="2163472"/>
+              </a:tblGrid>
+              <a:tr h="384048">
+                <a:tc>
+                  <a:txBody>
+                    <a:bodyPr/>
+                    <a:lstStyle/>
+                    <a:p>
+                      <a:r>
+                        <a:rPr sz="1100" b="1">
+                          <a:solidFill>
+                            <a:srgbClr val="FFFFFF"/>
+                          </a:solidFill>
+                          <a:latin typeface="Arial"/>
+                        </a:rPr>
+                        <a:t>Kennzahl</a:t>
+                      </a:r>
+                    </a:p>
+                  </a:txBody>
+                  <a:tcPr>
+                    <a:solidFill>
+                      <a:srgbClr val="1F2C56"/>
+                    </a:solidFill>
+                  </a:tcPr>
+                </a:tc>
+                <a:tc>
+                  <a:txBody>
+                    <a:bodyPr/>
+                    <a:lstStyle/>
+                    <a:p>
+                      <a:r>
+                        <a:rPr sz="1100" b="1">
+                          <a:solidFill>
+                            <a:srgbClr val="FFFFFF"/>
+                          </a:solidFill>
+                          <a:latin typeface="Arial"/>
+                        </a:rPr>
+                        <a:t>Formel</a:t>
+                      </a:r>
+                    </a:p>
+                  </a:txBody>
+                  <a:tcPr>
+                    <a:solidFill>
+                      <a:srgbClr val="1F2C56"/>
+                    </a:solidFill>
+                  </a:tcPr>
+                </a:tc>
+                <a:tc>
+                  <a:txBody>
+                    <a:bodyPr/>
+                    <a:lstStyle/>
+                    <a:p>
+                      <a:r>
+                        <a:rPr sz="1100" b="1">
+                          <a:solidFill>
+                            <a:srgbClr val="FFFFFF"/>
+                          </a:solidFill>
+                          <a:latin typeface="Arial"/>
+                        </a:rPr>
+                        <a:t>Komfortzone</a:t>
+                      </a:r>
+                    </a:p>
+                  </a:txBody>
+                  <a:tcPr>
+                    <a:solidFill>
+                      <a:srgbClr val="1F2C56"/>
+                    </a:solidFill>
+                  </a:tcPr>
+                </a:tc>
+                <a:tc>
+                  <a:txBody>
+                    <a:bodyPr/>
+                    <a:lstStyle/>
+                    <a:p>
+                      <a:r>
+                        <a:rPr sz="1100" b="1">
+                          <a:solidFill>
+                            <a:srgbClr val="FFFFFF"/>
+                          </a:solidFill>
+                          <a:latin typeface="Arial"/>
+                        </a:rPr>
+                        <a:t>Warnschwelle</a:t>
+                      </a:r>
+                    </a:p>
+                  </a:txBody>
+                  <a:tcPr>
+                    <a:solidFill>
+                      <a:srgbClr val="1F2C56"/>
+                    </a:solidFill>
+                  </a:tcPr>
+                </a:tc>
+                <a:tc>
+                  <a:txBody>
+                    <a:bodyPr/>
+                    <a:lstStyle/>
+                    <a:p>
+                      <a:r>
+                        <a:rPr sz="1100" b="1">
+                          <a:solidFill>
+                            <a:srgbClr val="FFFFFF"/>
+                          </a:solidFill>
+                          <a:latin typeface="Arial"/>
+                        </a:rPr>
+                        <a:t>Kritisch</a:t>
+                      </a:r>
+                    </a:p>
+                  </a:txBody>
+                  <a:tcPr>
+                    <a:solidFill>
+                      <a:srgbClr val="1F2C56"/>
+                    </a:solidFill>
+                  </a:tcPr>
+                </a:tc>
+              </a:tr>
+              <a:tr h="384048">
+                <a:tc>
+                  <a:txBody>
+                    <a:bodyPr/>
+                    <a:lstStyle/>
+                    <a:p>
+                      <a:r>
+                        <a:rPr sz="1050">
+                          <a:solidFill>
+                            <a:srgbClr val="3D5466"/>
+                          </a:solidFill>
+                          <a:latin typeface="Arial"/>
+                        </a:rPr>
+                        <a:t>Zinsdeckungsquote (ZDQ)</a:t>
+                      </a:r>
+                    </a:p>
+                  </a:txBody>
+                  <a:tcPr/>
+                </a:tc>
+                <a:tc>
+                  <a:txBody>
+                    <a:bodyPr/>
+                    <a:lstStyle/>
+                    <a:p>
+                      <a:r>
+                        <a:rPr sz="1050">
+                          <a:solidFill>
+                            <a:srgbClr val="3D5466"/>
+                          </a:solidFill>
+                          <a:latin typeface="Arial"/>
+                        </a:rPr>
+                        <a:t>EBIT ÷ Zinskosten</a:t>
+                      </a:r>
+                    </a:p>
+                  </a:txBody>
+                  <a:tcPr/>
+                </a:tc>
+                <a:tc>
+                  <a:txBody>
+                    <a:bodyPr/>
+                    <a:lstStyle/>
+                    <a:p>
+                      <a:r>
+                        <a:rPr sz="1050">
+                          <a:solidFill>
+                            <a:srgbClr val="3D5466"/>
+                          </a:solidFill>
+                          <a:latin typeface="Arial"/>
+                        </a:rPr>
+                        <a:t>&gt; 3,0x</a:t>
+                      </a:r>
+                    </a:p>
+                  </a:txBody>
+                  <a:tcPr/>
+                </a:tc>
+                <a:tc>
+                  <a:txBody>
+                    <a:bodyPr/>
+                    <a:lstStyle/>
+                    <a:p>
+                      <a:r>
+                        <a:rPr sz="1050">
+                          <a:solidFill>
+                            <a:srgbClr val="3D5466"/>
+                          </a:solidFill>
+                          <a:latin typeface="Arial"/>
+                        </a:rPr>
+                        <a:t>2,0–3,0x</a:t>
+                      </a:r>
+                    </a:p>
+                  </a:txBody>
+                  <a:tcPr/>
+                </a:tc>
+                <a:tc>
+                  <a:txBody>
+                    <a:bodyPr/>
+                    <a:lstStyle/>
+                    <a:p>
+                      <a:r>
+                        <a:rPr sz="1050">
+                          <a:solidFill>
+                            <a:srgbClr val="3D5466"/>
+                          </a:solidFill>
+                          <a:latin typeface="Arial"/>
+                        </a:rPr>
+                        <a:t>&lt; 1,5x</a:t>
+                      </a:r>
+                    </a:p>
+                  </a:txBody>
+                  <a:tcPr/>
+                </a:tc>
+              </a:tr>
+              <a:tr h="384048">
+                <a:tc>
+                  <a:txBody>
+                    <a:bodyPr/>
+                    <a:lstStyle/>
+                    <a:p>
+                      <a:r>
+                        <a:rPr sz="1050">
+                          <a:solidFill>
+                            <a:srgbClr val="3D5466"/>
+                          </a:solidFill>
+                          <a:latin typeface="Arial"/>
+                        </a:rPr>
+                        <a:t>Cashflow-Deckungsquote</a:t>
+                      </a:r>
+                    </a:p>
+                  </a:txBody>
+                  <a:tcPr/>
+                </a:tc>
+                <a:tc>
+                  <a:txBody>
+                    <a:bodyPr/>
+                    <a:lstStyle/>
+                    <a:p>
+                      <a:r>
+                        <a:rPr sz="1050">
+                          <a:solidFill>
+                            <a:srgbClr val="3D5466"/>
+                          </a:solidFill>
+                          <a:latin typeface="Arial"/>
+                        </a:rPr>
+                        <a:t>(EBITDA − Steuern − CapEx) ÷ Kreditrate</a:t>
+                      </a:r>
+                    </a:p>
+                  </a:txBody>
+                  <a:tcPr/>
+                </a:tc>
+                <a:tc>
+                  <a:txBody>
+                    <a:bodyPr/>
+                    <a:lstStyle/>
+                    <a:p>
+                      <a:r>
+                        <a:rPr sz="1050">
+                          <a:solidFill>
+                            <a:srgbClr val="3D5466"/>
+                          </a:solidFill>
+                          <a:latin typeface="Arial"/>
+                        </a:rPr>
+                        <a:t>&gt; 1,5x</a:t>
+                      </a:r>
+                    </a:p>
+                  </a:txBody>
+                  <a:tcPr/>
+                </a:tc>
+                <a:tc>
+                  <a:txBody>
+                    <a:bodyPr/>
+                    <a:lstStyle/>
+                    <a:p>
+                      <a:r>
+                        <a:rPr sz="1050">
+                          <a:solidFill>
+                            <a:srgbClr val="3D5466"/>
+                          </a:solidFill>
+                          <a:latin typeface="Arial"/>
+                        </a:rPr>
+                        <a:t>1,0–1,5x</a:t>
+                      </a:r>
+                    </a:p>
+                  </a:txBody>
+                  <a:tcPr/>
+                </a:tc>
+                <a:tc>
+                  <a:txBody>
+                    <a:bodyPr/>
+                    <a:lstStyle/>
+                    <a:p>
+                      <a:r>
+                        <a:rPr sz="1050">
+                          <a:solidFill>
+                            <a:srgbClr val="3D5466"/>
+                          </a:solidFill>
+                          <a:latin typeface="Arial"/>
+                        </a:rPr>
+                        <a:t>&lt; 1,0x</a:t>
+                      </a:r>
+                    </a:p>
+                  </a:txBody>
+                  <a:tcPr/>
+                </a:tc>
+              </a:tr>
+              <a:tr h="384048">
+                <a:tc>
+                  <a:txBody>
+                    <a:bodyPr/>
+                    <a:lstStyle/>
+                    <a:p>
+                      <a:r>
+                        <a:rPr sz="1050">
+                          <a:solidFill>
+                            <a:srgbClr val="3D5466"/>
+                          </a:solidFill>
+                          <a:latin typeface="Arial"/>
+                        </a:rPr>
+                        <a:t>Dynamischer Verschuldungsgrad</a:t>
+                      </a:r>
+                    </a:p>
+                  </a:txBody>
+                  <a:tcPr/>
+                </a:tc>
+                <a:tc>
+                  <a:txBody>
+                    <a:bodyPr/>
+                    <a:lstStyle/>
+                    <a:p>
+                      <a:r>
+                        <a:rPr sz="1050">
+                          <a:solidFill>
+                            <a:srgbClr val="3D5466"/>
+                          </a:solidFill>
+                          <a:latin typeface="Arial"/>
+                        </a:rPr>
+                        <a:t>Netto-Fremdkapital ÷ EBITDA</a:t>
+                      </a:r>
+                    </a:p>
+                  </a:txBody>
+                  <a:tcPr/>
+                </a:tc>
+                <a:tc>
+                  <a:txBody>
+                    <a:bodyPr/>
+                    <a:lstStyle/>
+                    <a:p>
+                      <a:r>
+                        <a:rPr sz="1050">
+                          <a:solidFill>
+                            <a:srgbClr val="3D5466"/>
+                          </a:solidFill>
+                          <a:latin typeface="Arial"/>
+                        </a:rPr>
+                        <a:t>&lt; 3,0x</a:t>
+                      </a:r>
+                    </a:p>
+                  </a:txBody>
+                  <a:tcPr/>
+                </a:tc>
+                <a:tc>
+                  <a:txBody>
+                    <a:bodyPr/>
+                    <a:lstStyle/>
+                    <a:p>
+                      <a:r>
+                        <a:rPr sz="1050">
+                          <a:solidFill>
+                            <a:srgbClr val="3D5466"/>
+                          </a:solidFill>
+                          <a:latin typeface="Arial"/>
+                        </a:rPr>
+                        <a:t>3,0–4,0x</a:t>
+                      </a:r>
+                    </a:p>
+                  </a:txBody>
+                  <a:tcPr/>
+                </a:tc>
+                <a:tc>
+                  <a:txBody>
+                    <a:bodyPr/>
+                    <a:lstStyle/>
+                    <a:p>
+                      <a:r>
+                        <a:rPr sz="1050">
+                          <a:solidFill>
+                            <a:srgbClr val="3D5466"/>
+                          </a:solidFill>
+                          <a:latin typeface="Arial"/>
+                        </a:rPr>
+                        <a:t>&gt; 4,0x</a:t>
+                      </a:r>
+                    </a:p>
+                  </a:txBody>
+                  <a:tcPr/>
+                </a:tc>
+              </a:tr>
+            </a:tbl>
+          </a:graphicData>
+        </a:graphic>
+      </p:graphicFrame>
+      <p:sp>
+        <p:nvSpPr>
+          <p:cNvPr id="8" name="Rectangle 7"/>
           <p:cNvSpPr/>
           <p:nvPr/>
         </p:nvSpPr>
@@ -11033,7 +15366,7 @@
       </p:sp>
       <p:sp>
         <p:nvSpPr>
-          <p:cNvPr id="10" name="TextBox 9"/>
+          <p:cNvPr id="9" name="TextBox 8"/>
           <p:cNvSpPr txBox="1"/>
           <p:nvPr/>
         </p:nvSpPr>
@@ -11062,6 +15395,41 @@
                 <a:latin typeface="JetBrains Mono"/>
               </a:rPr>
               <a:t>Benedikt Zoller Coaching  ·  FKB Campus  ·  M21</a:t>
+            </a:r>
+          </a:p>
+        </p:txBody>
+      </p:sp>
+      <p:sp>
+        <p:nvSpPr>
+          <p:cNvPr id="10" name="TextBox 9"/>
+          <p:cNvSpPr txBox="1"/>
+          <p:nvPr/>
+        </p:nvSpPr>
+        <p:spPr>
+          <a:xfrm>
+            <a:off x="7176211" y="6583680"/>
+            <a:ext cx="4326940" cy="256032"/>
+          </a:xfrm>
+          <a:prstGeom prst="rect">
+            <a:avLst/>
+          </a:prstGeom>
+          <a:noFill/>
+        </p:spPr>
+        <p:txBody>
+          <a:bodyPr wrap="none">
+            <a:spAutoFit/>
+          </a:bodyPr>
+          <a:lstStyle/>
+          <a:p>
+            <a:pPr algn="r"/>
+            <a:r>
+              <a:rPr sz="700">
+                <a:solidFill>
+                  <a:srgbClr val="A0B4D2"/>
+                </a:solidFill>
+                <a:latin typeface="JetBrains Mono"/>
+              </a:rPr>
+              <a:t>Übersicht</a:t>
             </a:r>
           </a:p>
         </p:txBody>
@@ -11200,7 +15568,7 @@
                 </a:solidFill>
                 <a:latin typeface="JetBrains Mono"/>
               </a:rPr>
-              <a:t>M21  ·  SCHAUBILD</a:t>
+              <a:t>M21  ·  ÜBERSICHT</a:t>
             </a:r>
           </a:p>
         </p:txBody>
@@ -11235,7 +15603,7 @@
                 </a:solidFill>
                 <a:latin typeface="Source Serif 4"/>
               </a:rPr>
-              <a:t>Zwei Denksysteme nach Kahneman</a:t>
+              <a:t>Theorie-Input: Das 8-Felder-Framework für KMU-Kreditentscheidungen</a:t>
             </a:r>
           </a:p>
         </p:txBody>
@@ -11283,30 +15651,346 @@
           </a:p>
         </p:txBody>
       </p:sp>
-      <p:pic>
-        <p:nvPicPr>
-          <p:cNvPr id="7" name="Picture 6" descr="image.png"/>
-          <p:cNvPicPr>
-            <a:picLocks noChangeAspect="1"/>
-          </p:cNvPicPr>
-          <p:nvPr/>
-        </p:nvPicPr>
-        <p:blipFill>
-          <a:blip r:embed="rId2"/>
-          <a:stretch>
-            <a:fillRect/>
-          </a:stretch>
-        </p:blipFill>
-        <p:spPr>
-          <a:xfrm>
-            <a:off x="2303489" y="1325880"/>
-            <a:ext cx="7581973" cy="4937760"/>
-          </a:xfrm>
-          <a:prstGeom prst="rect">
-            <a:avLst/>
-          </a:prstGeom>
-        </p:spPr>
-      </p:pic>
+      <p:graphicFrame>
+        <p:nvGraphicFramePr>
+          <p:cNvPr id="7" name="Table 6"/>
+          <p:cNvGraphicFramePr>
+            <a:graphicFrameLocks noGrp="1"/>
+          </p:cNvGraphicFramePr>
+          <p:nvPr/>
+        </p:nvGraphicFramePr>
+        <p:xfrm>
+          <a:off x="685800" y="1417320"/>
+          <a:ext cx="10817352" cy="1536192"/>
+        </p:xfrm>
+        <a:graphic>
+          <a:graphicData uri="http://schemas.openxmlformats.org/drawingml/2006/table">
+            <a:tbl>
+              <a:tblPr firstRow="1" bandRow="1">
+                <a:tableStyleId>{5C22544A-7EE6-4342-B048-85BDC9FD1C3A}</a:tableStyleId>
+              </a:tblPr>
+              <a:tblGrid>
+                <a:gridCol w="2704338"/>
+                <a:gridCol w="2704338"/>
+                <a:gridCol w="2704338"/>
+                <a:gridCol w="2704338"/>
+              </a:tblGrid>
+              <a:tr h="384048">
+                <a:tc>
+                  <a:txBody>
+                    <a:bodyPr/>
+                    <a:lstStyle/>
+                    <a:p>
+                      <a:r>
+                        <a:rPr sz="1100" b="1">
+                          <a:solidFill>
+                            <a:srgbClr val="FFFFFF"/>
+                          </a:solidFill>
+                          <a:latin typeface="Arial"/>
+                        </a:rPr>
+                        <a:t>Kennzahl</a:t>
+                      </a:r>
+                    </a:p>
+                  </a:txBody>
+                  <a:tcPr>
+                    <a:solidFill>
+                      <a:srgbClr val="1F2C56"/>
+                    </a:solidFill>
+                  </a:tcPr>
+                </a:tc>
+                <a:tc>
+                  <a:txBody>
+                    <a:bodyPr/>
+                    <a:lstStyle/>
+                    <a:p>
+                      <a:r>
+                        <a:rPr sz="1100" b="1">
+                          <a:solidFill>
+                            <a:srgbClr val="FFFFFF"/>
+                          </a:solidFill>
+                          <a:latin typeface="Arial"/>
+                        </a:rPr>
+                        <a:t>Formel</a:t>
+                      </a:r>
+                    </a:p>
+                  </a:txBody>
+                  <a:tcPr>
+                    <a:solidFill>
+                      <a:srgbClr val="1F2C56"/>
+                    </a:solidFill>
+                  </a:tcPr>
+                </a:tc>
+                <a:tc>
+                  <a:txBody>
+                    <a:bodyPr/>
+                    <a:lstStyle/>
+                    <a:p>
+                      <a:r>
+                        <a:rPr sz="1100" b="1">
+                          <a:solidFill>
+                            <a:srgbClr val="FFFFFF"/>
+                          </a:solidFill>
+                          <a:latin typeface="Arial"/>
+                        </a:rPr>
+                        <a:t>Komfortzone</a:t>
+                      </a:r>
+                    </a:p>
+                  </a:txBody>
+                  <a:tcPr>
+                    <a:solidFill>
+                      <a:srgbClr val="1F2C56"/>
+                    </a:solidFill>
+                  </a:tcPr>
+                </a:tc>
+                <a:tc>
+                  <a:txBody>
+                    <a:bodyPr/>
+                    <a:lstStyle/>
+                    <a:p>
+                      <a:r>
+                        <a:rPr sz="1100" b="1">
+                          <a:solidFill>
+                            <a:srgbClr val="FFFFFF"/>
+                          </a:solidFill>
+                          <a:latin typeface="Arial"/>
+                        </a:rPr>
+                        <a:t>Warnschwelle</a:t>
+                      </a:r>
+                    </a:p>
+                  </a:txBody>
+                  <a:tcPr>
+                    <a:solidFill>
+                      <a:srgbClr val="1F2C56"/>
+                    </a:solidFill>
+                  </a:tcPr>
+                </a:tc>
+              </a:tr>
+              <a:tr h="384048">
+                <a:tc>
+                  <a:txBody>
+                    <a:bodyPr/>
+                    <a:lstStyle/>
+                    <a:p>
+                      <a:r>
+                        <a:rPr sz="1050">
+                          <a:solidFill>
+                            <a:srgbClr val="3D5466"/>
+                          </a:solidFill>
+                          <a:latin typeface="Arial"/>
+                        </a:rPr>
+                        <a:t>Eigenkapitalquote</a:t>
+                      </a:r>
+                    </a:p>
+                  </a:txBody>
+                  <a:tcPr/>
+                </a:tc>
+                <a:tc>
+                  <a:txBody>
+                    <a:bodyPr/>
+                    <a:lstStyle/>
+                    <a:p>
+                      <a:r>
+                        <a:rPr sz="1050">
+                          <a:solidFill>
+                            <a:srgbClr val="3D5466"/>
+                          </a:solidFill>
+                          <a:latin typeface="Arial"/>
+                        </a:rPr>
+                        <a:t>EK ÷ Bilanzsumme</a:t>
+                      </a:r>
+                    </a:p>
+                  </a:txBody>
+                  <a:tcPr/>
+                </a:tc>
+                <a:tc>
+                  <a:txBody>
+                    <a:bodyPr/>
+                    <a:lstStyle/>
+                    <a:p>
+                      <a:r>
+                        <a:rPr sz="1050">
+                          <a:solidFill>
+                            <a:srgbClr val="3D5466"/>
+                          </a:solidFill>
+                          <a:latin typeface="Arial"/>
+                        </a:rPr>
+                        <a:t>&gt; 30 %</a:t>
+                      </a:r>
+                    </a:p>
+                  </a:txBody>
+                  <a:tcPr/>
+                </a:tc>
+                <a:tc>
+                  <a:txBody>
+                    <a:bodyPr/>
+                    <a:lstStyle/>
+                    <a:p>
+                      <a:r>
+                        <a:rPr sz="1050">
+                          <a:solidFill>
+                            <a:srgbClr val="3D5466"/>
+                          </a:solidFill>
+                          <a:latin typeface="Arial"/>
+                        </a:rPr>
+                        <a:t>&lt; 20 %</a:t>
+                      </a:r>
+                    </a:p>
+                  </a:txBody>
+                  <a:tcPr/>
+                </a:tc>
+              </a:tr>
+              <a:tr h="384048">
+                <a:tc>
+                  <a:txBody>
+                    <a:bodyPr/>
+                    <a:lstStyle/>
+                    <a:p>
+                      <a:r>
+                        <a:rPr sz="1050">
+                          <a:solidFill>
+                            <a:srgbClr val="3D5466"/>
+                          </a:solidFill>
+                          <a:latin typeface="Arial"/>
+                        </a:rPr>
+                        <a:t>Verschuldungsgrad</a:t>
+                      </a:r>
+                    </a:p>
+                  </a:txBody>
+                  <a:tcPr/>
+                </a:tc>
+                <a:tc>
+                  <a:txBody>
+                    <a:bodyPr/>
+                    <a:lstStyle/>
+                    <a:p>
+                      <a:r>
+                        <a:rPr sz="1050">
+                          <a:solidFill>
+                            <a:srgbClr val="3D5466"/>
+                          </a:solidFill>
+                          <a:latin typeface="Arial"/>
+                        </a:rPr>
+                        <a:t>Fremdkapital ÷ EK</a:t>
+                      </a:r>
+                    </a:p>
+                  </a:txBody>
+                  <a:tcPr/>
+                </a:tc>
+                <a:tc>
+                  <a:txBody>
+                    <a:bodyPr/>
+                    <a:lstStyle/>
+                    <a:p>
+                      <a:r>
+                        <a:rPr sz="1050">
+                          <a:solidFill>
+                            <a:srgbClr val="3D5466"/>
+                          </a:solidFill>
+                          <a:latin typeface="Arial"/>
+                        </a:rPr>
+                        <a:t>&lt; 1,5x</a:t>
+                      </a:r>
+                    </a:p>
+                  </a:txBody>
+                  <a:tcPr/>
+                </a:tc>
+                <a:tc>
+                  <a:txBody>
+                    <a:bodyPr/>
+                    <a:lstStyle/>
+                    <a:p>
+                      <a:r>
+                        <a:rPr sz="1050">
+                          <a:solidFill>
+                            <a:srgbClr val="3D5466"/>
+                          </a:solidFill>
+                          <a:latin typeface="Arial"/>
+                        </a:rPr>
+                        <a:t>&gt; 2,5x</a:t>
+                      </a:r>
+                    </a:p>
+                  </a:txBody>
+                  <a:tcPr/>
+                </a:tc>
+              </a:tr>
+              <a:tr h="384048">
+                <a:tc>
+                  <a:txBody>
+                    <a:bodyPr/>
+                    <a:lstStyle/>
+                    <a:p>
+                      <a:r>
+                        <a:rPr sz="1050">
+                          <a:solidFill>
+                            <a:srgbClr val="3D5466"/>
+                          </a:solidFill>
+                          <a:latin typeface="Arial"/>
+                        </a:rPr>
+                        <a:t>Dynamischer VG</a:t>
+                      </a:r>
+                    </a:p>
+                  </a:txBody>
+                  <a:tcPr/>
+                </a:tc>
+                <a:tc>
+                  <a:txBody>
+                    <a:bodyPr/>
+                    <a:lstStyle/>
+                    <a:p>
+                      <a:r>
+                        <a:rPr sz="1050">
+                          <a:solidFill>
+                            <a:srgbClr val="3D5466"/>
+                          </a:solidFill>
+                          <a:latin typeface="Arial"/>
+                        </a:rPr>
+                        <a:t>Netto-FK ÷ EBITDA</a:t>
+                      </a:r>
+                    </a:p>
+                  </a:txBody>
+                  <a:tcPr/>
+                </a:tc>
+                <a:tc>
+                  <a:txBody>
+                    <a:bodyPr/>
+                    <a:lstStyle/>
+                    <a:p>
+                      <a:r>
+                        <a:rPr sz="1050">
+                          <a:solidFill>
+                            <a:srgbClr val="3D5466"/>
+                          </a:solidFill>
+                          <a:latin typeface="Arial"/>
+                        </a:rPr>
+                        <a:t>&lt; 3,0x</a:t>
+                      </a:r>
+                    </a:p>
+                  </a:txBody>
+                  <a:tcPr/>
+                </a:tc>
+                <a:tc>
+                  <a:txBody>
+                    <a:bodyPr/>
+                    <a:lstStyle/>
+                    <a:p>
+                      <a:r>
+                        <a:rPr sz="1050">
+                          <a:solidFill>
+                            <a:srgbClr val="3D5466"/>
+                          </a:solidFill>
+                          <a:latin typeface="Arial"/>
+                        </a:rPr>
+                        <a:t>&gt; 4,0x</a:t>
+                      </a:r>
+                    </a:p>
+                  </a:txBody>
+                  <a:tcPr/>
+                </a:tc>
+              </a:tr>
+            </a:tbl>
+          </a:graphicData>
+        </a:graphic>
+      </p:graphicFrame>
       <p:sp>
         <p:nvSpPr>
           <p:cNvPr id="8" name="Rectangle 7"/>
@@ -11415,7 +16099,7 @@
                 </a:solidFill>
                 <a:latin typeface="JetBrains Mono"/>
               </a:rPr>
-              <a:t>Schaubild</a:t>
+              <a:t>Übersicht</a:t>
             </a:r>
           </a:p>
         </p:txBody>

--- a/protected-downloads/praesentation/M21.pptx
+++ b/protected-downloads/praesentation/M21.pptx
@@ -4704,7 +4704,7 @@
                 </a:solidFill>
                 <a:latin typeface="JetBrains Mono"/>
               </a:rPr>
-              <a:t>Benedikt Zoller Coaching  ·  FKB Campus  ·  2026</a:t>
+              <a:t>FKB Campus  ·  2026</a:t>
             </a:r>
           </a:p>
         </p:txBody>
@@ -5328,7 +5328,7 @@
                 </a:solidFill>
                 <a:latin typeface="JetBrains Mono"/>
               </a:rPr>
-              <a:t>Benedikt Zoller Coaching  ·  FKB Campus  ·  M21</a:t>
+              <a:t>FKB Campus  ·  M21</a:t>
             </a:r>
           </a:p>
         </p:txBody>
@@ -5647,7 +5647,7 @@
                 </a:solidFill>
                 <a:latin typeface="JetBrains Mono"/>
               </a:rPr>
-              <a:t>Benedikt Zoller Coaching  ·  FKB Campus  ·  M21</a:t>
+              <a:t>FKB Campus  ·  M21</a:t>
             </a:r>
           </a:p>
         </p:txBody>
@@ -6157,7 +6157,7 @@
                 </a:solidFill>
                 <a:latin typeface="JetBrains Mono"/>
               </a:rPr>
-              <a:t>Benedikt Zoller Coaching  ·  FKB Campus  ·  M21</a:t>
+              <a:t>FKB Campus  ·  M21</a:t>
             </a:r>
           </a:p>
         </p:txBody>
@@ -6746,7 +6746,7 @@
                 </a:solidFill>
                 <a:latin typeface="JetBrains Mono"/>
               </a:rPr>
-              <a:t>Benedikt Zoller Coaching  ·  FKB Campus  ·  M21</a:t>
+              <a:t>FKB Campus  ·  M21</a:t>
             </a:r>
           </a:p>
         </p:txBody>
@@ -7297,7 +7297,7 @@
                 </a:solidFill>
                 <a:latin typeface="JetBrains Mono"/>
               </a:rPr>
-              <a:t>Benedikt Zoller Coaching  ·  FKB Campus  ·  M21</a:t>
+              <a:t>FKB Campus  ·  M21</a:t>
             </a:r>
           </a:p>
         </p:txBody>
@@ -7715,7 +7715,7 @@
                 </a:solidFill>
                 <a:latin typeface="JetBrains Mono"/>
               </a:rPr>
-              <a:t>Benedikt Zoller Coaching  ·  FKB Campus  ·  M21</a:t>
+              <a:t>FKB Campus  ·  M21</a:t>
             </a:r>
           </a:p>
         </p:txBody>
@@ -8304,7 +8304,7 @@
                 </a:solidFill>
                 <a:latin typeface="JetBrains Mono"/>
               </a:rPr>
-              <a:t>Benedikt Zoller Coaching  ·  FKB Campus  ·  M21</a:t>
+              <a:t>FKB Campus  ·  M21</a:t>
             </a:r>
           </a:p>
         </p:txBody>
@@ -9476,7 +9476,7 @@
                 </a:solidFill>
                 <a:latin typeface="JetBrains Mono"/>
               </a:rPr>
-              <a:t>Benedikt Zoller Coaching  ·  FKB Campus  ·  M21</a:t>
+              <a:t>FKB Campus  ·  M21</a:t>
             </a:r>
           </a:p>
         </p:txBody>
@@ -10407,7 +10407,7 @@
                 </a:solidFill>
                 <a:latin typeface="JetBrains Mono"/>
               </a:rPr>
-              <a:t>Benedikt Zoller Coaching  ·  FKB Campus  ·  M21</a:t>
+              <a:t>FKB Campus  ·  M21</a:t>
             </a:r>
           </a:p>
         </p:txBody>
@@ -11031,7 +11031,7 @@
                 </a:solidFill>
                 <a:latin typeface="JetBrains Mono"/>
               </a:rPr>
-              <a:t>Benedikt Zoller Coaching  ·  FKB Campus  ·  M21</a:t>
+              <a:t>FKB Campus  ·  M21</a:t>
             </a:r>
           </a:p>
         </p:txBody>
@@ -11397,7 +11397,7 @@
                 </a:solidFill>
                 <a:latin typeface="JetBrains Mono"/>
               </a:rPr>
-              <a:t>Benedikt Zoller Coaching  ·  FKB Campus  ·  M21</a:t>
+              <a:t>FKB Campus  ·  M21</a:t>
             </a:r>
           </a:p>
         </p:txBody>
@@ -12194,7 +12194,7 @@
                 </a:solidFill>
                 <a:latin typeface="JetBrains Mono"/>
               </a:rPr>
-              <a:t>Benedikt Zoller Coaching  ·  FKB Campus  ·  M21</a:t>
+              <a:t>FKB Campus  ·  M21</a:t>
             </a:r>
           </a:p>
         </p:txBody>
@@ -12623,7 +12623,7 @@
                 </a:solidFill>
                 <a:latin typeface="JetBrains Mono"/>
               </a:rPr>
-              <a:t>Benedikt Zoller Coaching  ·  FKB Campus  ·  M21</a:t>
+              <a:t>FKB Campus  ·  M21</a:t>
             </a:r>
           </a:p>
         </p:txBody>
@@ -13385,7 +13385,7 @@
                 </a:solidFill>
                 <a:latin typeface="JetBrains Mono"/>
               </a:rPr>
-              <a:t>Benedikt Zoller Coaching  ·  FKB Campus  ·  M21</a:t>
+              <a:t>FKB Campus  ·  M21</a:t>
             </a:r>
           </a:p>
         </p:txBody>
@@ -13704,7 +13704,7 @@
                 </a:solidFill>
                 <a:latin typeface="JetBrains Mono"/>
               </a:rPr>
-              <a:t>Benedikt Zoller Coaching  ·  FKB Campus  ·  M21</a:t>
+              <a:t>FKB Campus  ·  M21</a:t>
             </a:r>
           </a:p>
         </p:txBody>
@@ -14328,7 +14328,7 @@
                 </a:solidFill>
                 <a:latin typeface="JetBrains Mono"/>
               </a:rPr>
-              <a:t>Benedikt Zoller Coaching  ·  FKB Campus  ·  M21</a:t>
+              <a:t>FKB Campus  ·  M21</a:t>
             </a:r>
           </a:p>
         </p:txBody>
@@ -14647,7 +14647,7 @@
                 </a:solidFill>
                 <a:latin typeface="JetBrains Mono"/>
               </a:rPr>
-              <a:t>Benedikt Zoller Coaching  ·  FKB Campus  ·  M21</a:t>
+              <a:t>FKB Campus  ·  M21</a:t>
             </a:r>
           </a:p>
         </p:txBody>
@@ -15394,7 +15394,7 @@
                 </a:solidFill>
                 <a:latin typeface="JetBrains Mono"/>
               </a:rPr>
-              <a:t>Benedikt Zoller Coaching  ·  FKB Campus  ·  M21</a:t>
+              <a:t>FKB Campus  ·  M21</a:t>
             </a:r>
           </a:p>
         </p:txBody>
@@ -16064,7 +16064,7 @@
                 </a:solidFill>
                 <a:latin typeface="JetBrains Mono"/>
               </a:rPr>
-              <a:t>Benedikt Zoller Coaching  ·  FKB Campus  ·  M21</a:t>
+              <a:t>FKB Campus  ·  M21</a:t>
             </a:r>
           </a:p>
         </p:txBody>

--- a/protected-downloads/praesentation/M21.pptx
+++ b/protected-downloads/praesentation/M21.pptx
@@ -12993,7 +12993,7 @@
                 </a:solidFill>
                 <a:latin typeface="Consolas"/>
               </a:rPr>
-              <a:t>09:00–09:25 </a:t>
+              <a:t>09:00–09:30 </a:t>
             </a:r>
             <a:r>
               <a:rPr sz="1200" b="1">
@@ -13030,7 +13030,7 @@
                 </a:solidFill>
                 <a:latin typeface="Consolas"/>
               </a:rPr>
-              <a:t>09:25–09:30 </a:t>
+              <a:t>09:30–09:35 </a:t>
             </a:r>
             <a:r>
               <a:rPr sz="1200" b="1">
@@ -13067,7 +13067,7 @@
                 </a:solidFill>
                 <a:latin typeface="Consolas"/>
               </a:rPr>
-              <a:t>09:30–10:15 </a:t>
+              <a:t>09:35–10:20 </a:t>
             </a:r>
             <a:r>
               <a:rPr sz="1200" b="1">
@@ -13104,7 +13104,7 @@
                 </a:solidFill>
                 <a:latin typeface="Consolas"/>
               </a:rPr>
-              <a:t>10:15–10:25 </a:t>
+              <a:t>10:20–10:30 </a:t>
             </a:r>
             <a:r>
               <a:rPr sz="1200" b="1">
@@ -13141,7 +13141,7 @@
                 </a:solidFill>
                 <a:latin typeface="Consolas"/>
               </a:rPr>
-              <a:t>10:25–10:55 </a:t>
+              <a:t>10:30–11:00 </a:t>
             </a:r>
             <a:r>
               <a:rPr sz="1200" b="1">
@@ -13178,7 +13178,7 @@
                 </a:solidFill>
                 <a:latin typeface="Consolas"/>
               </a:rPr>
-              <a:t>10:55–11:25 </a:t>
+              <a:t>11:00–11:30 </a:t>
             </a:r>
             <a:r>
               <a:rPr sz="1200" b="1">
@@ -13215,7 +13215,7 @@
                 </a:solidFill>
                 <a:latin typeface="Consolas"/>
               </a:rPr>
-              <a:t>11:25–11:45 </a:t>
+              <a:t>11:30–11:50 </a:t>
             </a:r>
             <a:r>
               <a:rPr sz="1200" b="1">
@@ -13252,7 +13252,7 @@
                 </a:solidFill>
                 <a:latin typeface="Consolas"/>
               </a:rPr>
-              <a:t>11:45–11:55 </a:t>
+              <a:t>11:50–12:00 </a:t>
             </a:r>
             <a:r>
               <a:rPr sz="1200" b="1">
@@ -13289,7 +13289,7 @@
                 </a:solidFill>
                 <a:latin typeface="Consolas"/>
               </a:rPr>
-              <a:t>11:55–12:00 </a:t>
+              <a:t>12:00–12:05 </a:t>
             </a:r>
             <a:r>
               <a:rPr sz="1200" b="1">

--- a/protected-downloads/praesentation/M21.pptx
+++ b/protected-downloads/praesentation/M21.pptx
@@ -4626,7 +4626,7 @@
                 </a:solidFill>
                 <a:latin typeface="Arial"/>
               </a:rPr>
-              <a:t>v0.3</a:t>
+              <a:t>v1.0</a:t>
             </a:r>
           </a:p>
         </p:txBody>

--- a/protected-downloads/praesentation/M21.pptx
+++ b/protected-downloads/praesentation/M21.pptx
@@ -10702,7 +10702,7 @@
                 </a:solidFill>
                 <a:latin typeface="Source Serif 4"/>
               </a:rPr>
-              <a:t>Arbeitsblatt: 8-Felder-Kreditanalyse-Template</a:t>
+              <a:t>AB-1: 8-Felder-Kreditanalyse-Template</a:t>
             </a:r>
           </a:p>
         </p:txBody>
@@ -11571,7 +11571,7 @@
                 </a:solidFill>
                 <a:latin typeface="Source Serif 4"/>
               </a:rPr>
-              <a:t>Arbeitsblatt: 8-Felder-Kreditanalyse-Template</a:t>
+              <a:t>AB-1: 8-Felder-Kreditanalyse-Template</a:t>
             </a:r>
           </a:p>
         </p:txBody>

--- a/protected-downloads/praesentation/M21.pptx
+++ b/protected-downloads/praesentation/M21.pptx
@@ -4301,7 +4301,7 @@
                 <a:solidFill>
                   <a:srgbClr val="C8D2E6"/>
                 </a:solidFill>
-                <a:latin typeface="JetBrains Mono"/>
+                <a:latin typeface="Consolas"/>
               </a:rPr>
               <a:t>FKB CAMPUS  ·  FIRMENKUNDENAKADEMIE  ·  M21</a:t>
             </a:r>
@@ -4336,7 +4336,7 @@
                 <a:solidFill>
                   <a:srgbClr val="FFFFFF"/>
                 </a:solidFill>
-                <a:latin typeface="Source Serif 4"/>
+                <a:latin typeface="Arial"/>
               </a:rPr>
               <a:t>Kreditentscheidung treffen</a:t>
             </a:r>
@@ -4371,7 +4371,7 @@
                 <a:solidFill>
                   <a:srgbClr val="BECDE6"/>
                 </a:solidFill>
-                <a:latin typeface="Source Serif 4"/>
+                <a:latin typeface="Arial"/>
               </a:rPr>
               <a:t>Strukturierte Kreditanalyse und überzeugende Entscheidungsvorlage</a:t>
             </a:r>
@@ -4449,7 +4449,7 @@
                 <a:solidFill>
                   <a:srgbClr val="A0B4D2"/>
                 </a:solidFill>
-                <a:latin typeface="JetBrains Mono"/>
+                <a:latin typeface="Consolas"/>
               </a:rPr>
               <a:t>KOMPETENZFELD</a:t>
             </a:r>
@@ -4519,7 +4519,7 @@
                 <a:solidFill>
                   <a:srgbClr val="A0B4D2"/>
                 </a:solidFill>
-                <a:latin typeface="JetBrains Mono"/>
+                <a:latin typeface="Consolas"/>
               </a:rPr>
               <a:t>KOMPETENZSTUFE</a:t>
             </a:r>
@@ -4589,7 +4589,7 @@
                 <a:solidFill>
                   <a:srgbClr val="A0B4D2"/>
                 </a:solidFill>
-                <a:latin typeface="JetBrains Mono"/>
+                <a:latin typeface="Consolas"/>
               </a:rPr>
               <a:t>VERSION</a:t>
             </a:r>
@@ -4702,7 +4702,7 @@
                 <a:solidFill>
                   <a:srgbClr val="96A5BE"/>
                 </a:solidFill>
-                <a:latin typeface="JetBrains Mono"/>
+                <a:latin typeface="Consolas"/>
               </a:rPr>
               <a:t>FKB Campus  ·  2026</a:t>
             </a:r>
@@ -4737,7 +4737,7 @@
                 <a:solidFill>
                   <a:srgbClr val="96A5BE"/>
                 </a:solidFill>
-                <a:latin typeface="JetBrains Mono"/>
+                <a:latin typeface="Consolas"/>
               </a:rPr>
               <a:t>Trainer-Präsentation</a:t>
             </a:r>
@@ -4876,7 +4876,7 @@
                 <a:solidFill>
                   <a:srgbClr val="78808C"/>
                 </a:solidFill>
-                <a:latin typeface="JetBrains Mono"/>
+                <a:latin typeface="Consolas"/>
               </a:rPr>
               <a:t>M21  ·  INHALT</a:t>
             </a:r>
@@ -4997,7 +4997,7 @@
                 <a:solidFill>
                   <a:srgbClr val="1F2C56"/>
                 </a:solidFill>
-                <a:latin typeface="Source Serif 4"/>
+                <a:latin typeface="Arial"/>
               </a:rPr>
               <a:t>Theorie-Input: Von der Analyse zur Entscheidungsvorlage</a:t>
             </a:r>
@@ -5013,7 +5013,7 @@
         <p:spPr>
           <a:xfrm>
             <a:off x="685800" y="1417320"/>
-            <a:ext cx="10817352" cy="5029200"/>
+            <a:ext cx="10817352" cy="4892040"/>
           </a:xfrm>
           <a:prstGeom prst="rect">
             <a:avLst/>
@@ -5039,13 +5039,13 @@
                 <a:solidFill>
                   <a:srgbClr val="78808C"/>
                 </a:solidFill>
-                <a:latin typeface="JetBrains Mono"/>
+                <a:latin typeface="Consolas"/>
               </a:rPr>
               <a:t>4.2.1 STRUKTUR EINER KREDITVORLAGE NACH MARISK BTO 1.1</a:t>
             </a:r>
           </a:p>
           <a:p>
-            <a:pPr>
+            <a:pPr marL="190500" indent="-190500">
               <a:spcBef>
                 <a:spcPts val="400"/>
               </a:spcBef>
@@ -5064,7 +5064,7 @@
             </a:r>
           </a:p>
           <a:p>
-            <a:pPr>
+            <a:pPr marL="190500" indent="-190500">
               <a:spcBef>
                 <a:spcPts val="400"/>
               </a:spcBef>
@@ -5096,13 +5096,13 @@
                 <a:solidFill>
                   <a:srgbClr val="78808C"/>
                 </a:solidFill>
-                <a:latin typeface="JetBrains Mono"/>
+                <a:latin typeface="Consolas"/>
               </a:rPr>
               <a:t>4.2.2 DIE DREI ENTSCHEIDUNGSERGEBNISSE</a:t>
             </a:r>
           </a:p>
           <a:p>
-            <a:pPr>
+            <a:pPr marL="190500" indent="-190500">
               <a:spcBef>
                 <a:spcPts val="400"/>
               </a:spcBef>
@@ -5121,7 +5121,7 @@
             </a:r>
           </a:p>
           <a:p>
-            <a:pPr>
+            <a:pPr marL="190500" indent="-190500">
               <a:spcBef>
                 <a:spcPts val="400"/>
               </a:spcBef>
@@ -5140,7 +5140,7 @@
             </a:r>
           </a:p>
           <a:p>
-            <a:pPr>
+            <a:pPr marL="190500" indent="-190500">
               <a:spcBef>
                 <a:spcPts val="400"/>
               </a:spcBef>
@@ -5159,7 +5159,7 @@
             </a:r>
           </a:p>
           <a:p>
-            <a:pPr>
+            <a:pPr marL="190500" indent="-190500">
               <a:spcBef>
                 <a:spcPts val="400"/>
               </a:spcBef>
@@ -5178,7 +5178,7 @@
             </a:r>
           </a:p>
           <a:p>
-            <a:pPr>
+            <a:pPr marL="190500" indent="-190500">
               <a:spcBef>
                 <a:spcPts val="400"/>
               </a:spcBef>
@@ -5197,7 +5197,7 @@
             </a:r>
           </a:p>
           <a:p>
-            <a:pPr>
+            <a:pPr marL="190500" indent="-190500">
               <a:spcBef>
                 <a:spcPts val="400"/>
               </a:spcBef>
@@ -5216,7 +5216,7 @@
             </a:r>
           </a:p>
           <a:p>
-            <a:pPr>
+            <a:pPr marL="190500" indent="-190500">
               <a:spcBef>
                 <a:spcPts val="400"/>
               </a:spcBef>
@@ -5235,7 +5235,7 @@
             </a:r>
           </a:p>
           <a:p>
-            <a:pPr>
+            <a:pPr marL="190500" indent="-190500">
               <a:spcBef>
                 <a:spcPts val="400"/>
               </a:spcBef>
@@ -5326,7 +5326,7 @@
                 <a:solidFill>
                   <a:srgbClr val="A0B4D2"/>
                 </a:solidFill>
-                <a:latin typeface="JetBrains Mono"/>
+                <a:latin typeface="Consolas"/>
               </a:rPr>
               <a:t>FKB Campus  ·  M21</a:t>
             </a:r>
@@ -5465,7 +5465,7 @@
                 <a:solidFill>
                   <a:srgbClr val="78808C"/>
                 </a:solidFill>
-                <a:latin typeface="JetBrains Mono"/>
+                <a:latin typeface="Consolas"/>
               </a:rPr>
               <a:t>M21  ·  SCHAUBILD</a:t>
             </a:r>
@@ -5500,7 +5500,7 @@
                 <a:solidFill>
                   <a:srgbClr val="1F2C56"/>
                 </a:solidFill>
-                <a:latin typeface="Source Serif 4"/>
+                <a:latin typeface="Arial"/>
               </a:rPr>
               <a:t>Zwei Denksysteme nach Kahneman</a:t>
             </a:r>
@@ -5645,7 +5645,7 @@
                 <a:solidFill>
                   <a:srgbClr val="A0B4D2"/>
                 </a:solidFill>
-                <a:latin typeface="JetBrains Mono"/>
+                <a:latin typeface="Consolas"/>
               </a:rPr>
               <a:t>FKB Campus  ·  M21</a:t>
             </a:r>
@@ -5680,7 +5680,7 @@
                 <a:solidFill>
                   <a:srgbClr val="A0B4D2"/>
                 </a:solidFill>
-                <a:latin typeface="JetBrains Mono"/>
+                <a:latin typeface="Consolas"/>
               </a:rPr>
               <a:t>Schaubild</a:t>
             </a:r>
@@ -5819,7 +5819,7 @@
                 <a:solidFill>
                   <a:srgbClr val="78808C"/>
                 </a:solidFill>
-                <a:latin typeface="JetBrains Mono"/>
+                <a:latin typeface="Consolas"/>
               </a:rPr>
               <a:t>M21  ·  INHALT</a:t>
             </a:r>
@@ -5940,7 +5940,7 @@
                 <a:solidFill>
                   <a:srgbClr val="1F2C56"/>
                 </a:solidFill>
-                <a:latin typeface="Source Serif 4"/>
+                <a:latin typeface="Arial"/>
               </a:rPr>
               <a:t>Theorie-Input: Sicherheitenbewertung nach BelWertV</a:t>
             </a:r>
@@ -5956,7 +5956,7 @@
         <p:spPr>
           <a:xfrm>
             <a:off x="685800" y="1417320"/>
-            <a:ext cx="10817352" cy="5029200"/>
+            <a:ext cx="10817352" cy="4892040"/>
           </a:xfrm>
           <a:prstGeom prst="rect">
             <a:avLst/>
@@ -5969,7 +5969,7 @@
           </a:bodyPr>
           <a:lstStyle/>
           <a:p>
-            <a:pPr>
+            <a:pPr marL="190500" indent="-190500">
               <a:spcBef>
                 <a:spcPts val="400"/>
               </a:spcBef>
@@ -5988,7 +5988,7 @@
             </a:r>
           </a:p>
           <a:p>
-            <a:pPr>
+            <a:pPr marL="190500" indent="-190500">
               <a:spcBef>
                 <a:spcPts val="400"/>
               </a:spcBef>
@@ -6007,7 +6007,7 @@
             </a:r>
           </a:p>
           <a:p>
-            <a:pPr>
+            <a:pPr marL="190500" indent="-190500">
               <a:spcBef>
                 <a:spcPts val="400"/>
               </a:spcBef>
@@ -6026,7 +6026,7 @@
             </a:r>
           </a:p>
           <a:p>
-            <a:pPr>
+            <a:pPr marL="190500" indent="-190500">
               <a:spcBef>
                 <a:spcPts val="400"/>
               </a:spcBef>
@@ -6045,7 +6045,7 @@
             </a:r>
           </a:p>
           <a:p>
-            <a:pPr>
+            <a:pPr marL="190500" indent="-190500">
               <a:spcBef>
                 <a:spcPts val="400"/>
               </a:spcBef>
@@ -6064,7 +6064,7 @@
             </a:r>
           </a:p>
           <a:p>
-            <a:pPr>
+            <a:pPr marL="190500" indent="-190500">
               <a:spcBef>
                 <a:spcPts val="400"/>
               </a:spcBef>
@@ -6155,7 +6155,7 @@
                 <a:solidFill>
                   <a:srgbClr val="A0B4D2"/>
                 </a:solidFill>
-                <a:latin typeface="JetBrains Mono"/>
+                <a:latin typeface="Consolas"/>
               </a:rPr>
               <a:t>FKB Campus  ·  M21</a:t>
             </a:r>
@@ -6294,7 +6294,7 @@
                 <a:solidFill>
                   <a:srgbClr val="78808C"/>
                 </a:solidFill>
-                <a:latin typeface="JetBrains Mono"/>
+                <a:latin typeface="Consolas"/>
               </a:rPr>
               <a:t>M21  ·  INHALT</a:t>
             </a:r>
@@ -6415,7 +6415,7 @@
                 <a:solidFill>
                   <a:srgbClr val="1F2C56"/>
                 </a:solidFill>
-                <a:latin typeface="Source Serif 4"/>
+                <a:latin typeface="Arial"/>
               </a:rPr>
               <a:t>4.3a Sicherheitenbewertung im Alltag</a:t>
             </a:r>
@@ -6431,7 +6431,7 @@
         <p:spPr>
           <a:xfrm>
             <a:off x="685800" y="1417320"/>
-            <a:ext cx="10817352" cy="5029200"/>
+            <a:ext cx="10817352" cy="4892040"/>
           </a:xfrm>
           <a:prstGeom prst="rect">
             <a:avLst/>
@@ -6444,7 +6444,7 @@
           </a:bodyPr>
           <a:lstStyle/>
           <a:p>
-            <a:pPr>
+            <a:pPr marL="190500" indent="-190500">
               <a:spcBef>
                 <a:spcPts val="400"/>
               </a:spcBef>
@@ -6463,7 +6463,7 @@
             </a:r>
           </a:p>
           <a:p>
-            <a:pPr>
+            <a:pPr marL="190500" indent="-190500">
               <a:spcBef>
                 <a:spcPts val="400"/>
               </a:spcBef>
@@ -6482,7 +6482,7 @@
             </a:r>
           </a:p>
           <a:p>
-            <a:pPr>
+            <a:pPr marL="190500" indent="-190500">
               <a:spcBef>
                 <a:spcPts val="400"/>
               </a:spcBef>
@@ -6501,7 +6501,7 @@
             </a:r>
           </a:p>
           <a:p>
-            <a:pPr>
+            <a:pPr marL="190500" indent="-190500">
               <a:spcBef>
                 <a:spcPts val="400"/>
               </a:spcBef>
@@ -6520,7 +6520,7 @@
             </a:r>
           </a:p>
           <a:p>
-            <a:pPr>
+            <a:pPr marL="190500" indent="-190500">
               <a:spcBef>
                 <a:spcPts val="400"/>
               </a:spcBef>
@@ -6539,7 +6539,7 @@
             </a:r>
           </a:p>
           <a:p>
-            <a:pPr>
+            <a:pPr marL="190500" indent="-190500">
               <a:spcBef>
                 <a:spcPts val="400"/>
               </a:spcBef>
@@ -6558,7 +6558,7 @@
             </a:r>
           </a:p>
           <a:p>
-            <a:pPr>
+            <a:pPr marL="190500" indent="-190500">
               <a:spcBef>
                 <a:spcPts val="400"/>
               </a:spcBef>
@@ -6577,7 +6577,7 @@
             </a:r>
           </a:p>
           <a:p>
-            <a:pPr>
+            <a:pPr marL="190500" indent="-190500">
               <a:spcBef>
                 <a:spcPts val="400"/>
               </a:spcBef>
@@ -6596,7 +6596,7 @@
             </a:r>
           </a:p>
           <a:p>
-            <a:pPr>
+            <a:pPr marL="190500" indent="-190500">
               <a:spcBef>
                 <a:spcPts val="400"/>
               </a:spcBef>
@@ -6615,7 +6615,7 @@
             </a:r>
           </a:p>
           <a:p>
-            <a:pPr>
+            <a:pPr marL="190500" indent="-190500">
               <a:spcBef>
                 <a:spcPts val="400"/>
               </a:spcBef>
@@ -6634,7 +6634,7 @@
             </a:r>
           </a:p>
           <a:p>
-            <a:pPr>
+            <a:pPr marL="190500" indent="-190500">
               <a:spcBef>
                 <a:spcPts val="400"/>
               </a:spcBef>
@@ -6653,7 +6653,7 @@
             </a:r>
           </a:p>
           <a:p>
-            <a:pPr>
+            <a:pPr marL="190500" indent="-190500">
               <a:spcBef>
                 <a:spcPts val="400"/>
               </a:spcBef>
@@ -6744,7 +6744,7 @@
                 <a:solidFill>
                   <a:srgbClr val="A0B4D2"/>
                 </a:solidFill>
-                <a:latin typeface="JetBrains Mono"/>
+                <a:latin typeface="Consolas"/>
               </a:rPr>
               <a:t>FKB Campus  ·  M21</a:t>
             </a:r>
@@ -6883,7 +6883,7 @@
                 <a:solidFill>
                   <a:srgbClr val="78808C"/>
                 </a:solidFill>
-                <a:latin typeface="JetBrains Mono"/>
+                <a:latin typeface="Consolas"/>
               </a:rPr>
               <a:t>M21  ·  INHALT</a:t>
             </a:r>
@@ -7004,7 +7004,7 @@
                 <a:solidFill>
                   <a:srgbClr val="1F2C56"/>
                 </a:solidFill>
-                <a:latin typeface="Source Serif 4"/>
+                <a:latin typeface="Arial"/>
               </a:rPr>
               <a:t>4.3b Betriebsmittelkredite und Kontokorrent: Kurzfall</a:t>
             </a:r>
@@ -7020,7 +7020,7 @@
         <p:spPr>
           <a:xfrm>
             <a:off x="685800" y="1417320"/>
-            <a:ext cx="10817352" cy="5029200"/>
+            <a:ext cx="10817352" cy="4892040"/>
           </a:xfrm>
           <a:prstGeom prst="rect">
             <a:avLst/>
@@ -7033,7 +7033,7 @@
           </a:bodyPr>
           <a:lstStyle/>
           <a:p>
-            <a:pPr>
+            <a:pPr marL="190500" indent="-190500">
               <a:spcBef>
                 <a:spcPts val="400"/>
               </a:spcBef>
@@ -7052,7 +7052,7 @@
             </a:r>
           </a:p>
           <a:p>
-            <a:pPr>
+            <a:pPr marL="190500" indent="-190500">
               <a:spcBef>
                 <a:spcPts val="400"/>
               </a:spcBef>
@@ -7071,7 +7071,7 @@
             </a:r>
           </a:p>
           <a:p>
-            <a:pPr>
+            <a:pPr marL="190500" indent="-190500">
               <a:spcBef>
                 <a:spcPts val="400"/>
               </a:spcBef>
@@ -7090,7 +7090,7 @@
             </a:r>
           </a:p>
           <a:p>
-            <a:pPr>
+            <a:pPr marL="190500" indent="-190500">
               <a:spcBef>
                 <a:spcPts val="400"/>
               </a:spcBef>
@@ -7109,7 +7109,7 @@
             </a:r>
           </a:p>
           <a:p>
-            <a:pPr>
+            <a:pPr marL="190500" indent="-190500">
               <a:spcBef>
                 <a:spcPts val="400"/>
               </a:spcBef>
@@ -7128,7 +7128,7 @@
             </a:r>
           </a:p>
           <a:p>
-            <a:pPr>
+            <a:pPr marL="190500" indent="-190500">
               <a:spcBef>
                 <a:spcPts val="400"/>
               </a:spcBef>
@@ -7147,7 +7147,7 @@
             </a:r>
           </a:p>
           <a:p>
-            <a:pPr>
+            <a:pPr marL="190500" indent="-190500">
               <a:spcBef>
                 <a:spcPts val="400"/>
               </a:spcBef>
@@ -7166,7 +7166,7 @@
             </a:r>
           </a:p>
           <a:p>
-            <a:pPr>
+            <a:pPr marL="190500" indent="-190500">
               <a:spcBef>
                 <a:spcPts val="400"/>
               </a:spcBef>
@@ -7185,7 +7185,7 @@
             </a:r>
           </a:p>
           <a:p>
-            <a:pPr>
+            <a:pPr marL="177800" indent="-177800">
               <a:spcBef>
                 <a:spcPts val="600"/>
               </a:spcBef>
@@ -7204,7 +7204,7 @@
             </a:r>
           </a:p>
           <a:p>
-            <a:pPr>
+            <a:pPr marL="190500" indent="-190500">
               <a:spcBef>
                 <a:spcPts val="400"/>
               </a:spcBef>
@@ -7295,7 +7295,7 @@
                 <a:solidFill>
                   <a:srgbClr val="A0B4D2"/>
                 </a:solidFill>
-                <a:latin typeface="JetBrains Mono"/>
+                <a:latin typeface="Consolas"/>
               </a:rPr>
               <a:t>FKB Campus  ·  M21</a:t>
             </a:r>
@@ -7434,7 +7434,7 @@
                 <a:solidFill>
                   <a:srgbClr val="78808C"/>
                 </a:solidFill>
-                <a:latin typeface="JetBrains Mono"/>
+                <a:latin typeface="Consolas"/>
               </a:rPr>
               <a:t>M21  ·  INHALT</a:t>
             </a:r>
@@ -7555,7 +7555,7 @@
                 <a:solidFill>
                   <a:srgbClr val="1F2C56"/>
                 </a:solidFill>
-                <a:latin typeface="Source Serif 4"/>
+                <a:latin typeface="Arial"/>
               </a:rPr>
               <a:t>4.3c Checkliste: Bestandskredit in der Krise – erste Schritte</a:t>
             </a:r>
@@ -7571,7 +7571,7 @@
         <p:spPr>
           <a:xfrm>
             <a:off x="685800" y="1417320"/>
-            <a:ext cx="10817352" cy="5029200"/>
+            <a:ext cx="10817352" cy="4892040"/>
           </a:xfrm>
           <a:prstGeom prst="rect">
             <a:avLst/>
@@ -7579,12 +7579,12 @@
           <a:noFill/>
         </p:spPr>
         <p:txBody>
-          <a:bodyPr wrap="square">
+          <a:bodyPr wrap="square" anchor="ctr">
             <a:spAutoFit/>
           </a:bodyPr>
           <a:lstStyle/>
           <a:p>
-            <a:pPr>
+            <a:pPr marL="190500" indent="-190500">
               <a:spcBef>
                 <a:spcPts val="400"/>
               </a:spcBef>
@@ -7603,7 +7603,7 @@
             </a:r>
           </a:p>
           <a:p>
-            <a:pPr>
+            <a:pPr marL="190500" indent="-190500">
               <a:spcBef>
                 <a:spcPts val="400"/>
               </a:spcBef>
@@ -7622,7 +7622,7 @@
             </a:r>
           </a:p>
           <a:p>
-            <a:pPr>
+            <a:pPr marL="177800" indent="-177800">
               <a:spcBef>
                 <a:spcPts val="600"/>
               </a:spcBef>
@@ -7713,7 +7713,7 @@
                 <a:solidFill>
                   <a:srgbClr val="A0B4D2"/>
                 </a:solidFill>
-                <a:latin typeface="JetBrains Mono"/>
+                <a:latin typeface="Consolas"/>
               </a:rPr>
               <a:t>FKB Campus  ·  M21</a:t>
             </a:r>
@@ -7852,7 +7852,7 @@
                 <a:solidFill>
                   <a:srgbClr val="78808C"/>
                 </a:solidFill>
-                <a:latin typeface="JetBrains Mono"/>
+                <a:latin typeface="Consolas"/>
               </a:rPr>
               <a:t>M21  ·  INHALT</a:t>
             </a:r>
@@ -7973,7 +7973,7 @@
                 <a:solidFill>
                   <a:srgbClr val="1F2C56"/>
                 </a:solidFill>
-                <a:latin typeface="Source Serif 4"/>
+                <a:latin typeface="Arial"/>
               </a:rPr>
               <a:t>Praxisfall: Metallbau Schnell GmbH (Heilbronn, fiktiv)</a:t>
             </a:r>
@@ -7989,7 +7989,7 @@
         <p:spPr>
           <a:xfrm>
             <a:off x="685800" y="1417320"/>
-            <a:ext cx="10817352" cy="5029200"/>
+            <a:ext cx="10817352" cy="4892040"/>
           </a:xfrm>
           <a:prstGeom prst="rect">
             <a:avLst/>
@@ -8015,13 +8015,13 @@
                 <a:solidFill>
                   <a:srgbClr val="78808C"/>
                 </a:solidFill>
-                <a:latin typeface="JetBrains Mono"/>
+                <a:latin typeface="Consolas"/>
               </a:rPr>
               <a:t>4.4.1 UNTERNEHMENSPROFIL</a:t>
             </a:r>
           </a:p>
           <a:p>
-            <a:pPr>
+            <a:pPr marL="190500" indent="-190500">
               <a:spcBef>
                 <a:spcPts val="400"/>
               </a:spcBef>
@@ -8040,7 +8040,7 @@
             </a:r>
           </a:p>
           <a:p>
-            <a:pPr>
+            <a:pPr marL="190500" indent="-190500">
               <a:spcBef>
                 <a:spcPts val="400"/>
               </a:spcBef>
@@ -8059,7 +8059,7 @@
             </a:r>
           </a:p>
           <a:p>
-            <a:pPr>
+            <a:pPr marL="190500" indent="-190500">
               <a:spcBef>
                 <a:spcPts val="400"/>
               </a:spcBef>
@@ -8078,7 +8078,7 @@
             </a:r>
           </a:p>
           <a:p>
-            <a:pPr>
+            <a:pPr marL="190500" indent="-190500">
               <a:spcBef>
                 <a:spcPts val="400"/>
               </a:spcBef>
@@ -8097,7 +8097,7 @@
             </a:r>
           </a:p>
           <a:p>
-            <a:pPr>
+            <a:pPr marL="190500" indent="-190500">
               <a:spcBef>
                 <a:spcPts val="400"/>
               </a:spcBef>
@@ -8129,13 +8129,13 @@
                 <a:solidFill>
                   <a:srgbClr val="78808C"/>
                 </a:solidFill>
-                <a:latin typeface="JetBrains Mono"/>
+                <a:latin typeface="Consolas"/>
               </a:rPr>
               <a:t>4.4.2 FINANZLAGE: 3-JAHRESVERGLEICH</a:t>
             </a:r>
           </a:p>
           <a:p>
-            <a:pPr>
+            <a:pPr marL="190500" indent="-190500">
               <a:spcBef>
                 <a:spcPts val="400"/>
               </a:spcBef>
@@ -8154,7 +8154,7 @@
             </a:r>
           </a:p>
           <a:p>
-            <a:pPr>
+            <a:pPr marL="190500" indent="-190500">
               <a:spcBef>
                 <a:spcPts val="400"/>
               </a:spcBef>
@@ -8173,7 +8173,7 @@
             </a:r>
           </a:p>
           <a:p>
-            <a:pPr>
+            <a:pPr marL="190500" indent="-190500">
               <a:spcBef>
                 <a:spcPts val="400"/>
               </a:spcBef>
@@ -8205,13 +8205,13 @@
                 <a:solidFill>
                   <a:srgbClr val="78808C"/>
                 </a:solidFill>
-                <a:latin typeface="JetBrains Mono"/>
+                <a:latin typeface="Consolas"/>
               </a:rPr>
               <a:t>4.4.3 8-FELDER-ANALYSE: METALLBAU SCHNELL GMBH</a:t>
             </a:r>
           </a:p>
           <a:p>
-            <a:pPr>
+            <a:pPr marL="190500" indent="-190500">
               <a:spcBef>
                 <a:spcPts val="400"/>
               </a:spcBef>
@@ -8302,7 +8302,7 @@
                 <a:solidFill>
                   <a:srgbClr val="A0B4D2"/>
                 </a:solidFill>
-                <a:latin typeface="JetBrains Mono"/>
+                <a:latin typeface="Consolas"/>
               </a:rPr>
               <a:t>FKB Campus  ·  M21</a:t>
             </a:r>
@@ -8441,7 +8441,7 @@
                 <a:solidFill>
                   <a:srgbClr val="78808C"/>
                 </a:solidFill>
-                <a:latin typeface="JetBrains Mono"/>
+                <a:latin typeface="Consolas"/>
               </a:rPr>
               <a:t>M21  ·  ÜBERSICHT</a:t>
             </a:r>
@@ -8476,7 +8476,7 @@
                 <a:solidFill>
                   <a:srgbClr val="1F2C56"/>
                 </a:solidFill>
-                <a:latin typeface="Source Serif 4"/>
+                <a:latin typeface="Arial"/>
               </a:rPr>
               <a:t>Praxisfall: Metallbau Schnell GmbH (Heilbronn, fiktiv)</a:t>
             </a:r>
@@ -9474,7 +9474,7 @@
                 <a:solidFill>
                   <a:srgbClr val="A0B4D2"/>
                 </a:solidFill>
-                <a:latin typeface="JetBrains Mono"/>
+                <a:latin typeface="Consolas"/>
               </a:rPr>
               <a:t>FKB Campus  ·  M21</a:t>
             </a:r>
@@ -9509,7 +9509,7 @@
                 <a:solidFill>
                   <a:srgbClr val="A0B4D2"/>
                 </a:solidFill>
-                <a:latin typeface="JetBrains Mono"/>
+                <a:latin typeface="Consolas"/>
               </a:rPr>
               <a:t>Übersicht</a:t>
             </a:r>
@@ -9648,7 +9648,7 @@
                 <a:solidFill>
                   <a:srgbClr val="78808C"/>
                 </a:solidFill>
-                <a:latin typeface="JetBrains Mono"/>
+                <a:latin typeface="Consolas"/>
               </a:rPr>
               <a:t>M21  ·  ÜBERSICHT</a:t>
             </a:r>
@@ -9683,7 +9683,7 @@
                 <a:solidFill>
                   <a:srgbClr val="1F2C56"/>
                 </a:solidFill>
-                <a:latin typeface="Source Serif 4"/>
+                <a:latin typeface="Arial"/>
               </a:rPr>
               <a:t>Praxisfall: Metallbau Schnell GmbH (Heilbronn, fiktiv)</a:t>
             </a:r>
@@ -10405,7 +10405,7 @@
                 <a:solidFill>
                   <a:srgbClr val="A0B4D2"/>
                 </a:solidFill>
-                <a:latin typeface="JetBrains Mono"/>
+                <a:latin typeface="Consolas"/>
               </a:rPr>
               <a:t>FKB Campus  ·  M21</a:t>
             </a:r>
@@ -10440,7 +10440,7 @@
                 <a:solidFill>
                   <a:srgbClr val="A0B4D2"/>
                 </a:solidFill>
-                <a:latin typeface="JetBrains Mono"/>
+                <a:latin typeface="Consolas"/>
               </a:rPr>
               <a:t>Übersicht</a:t>
             </a:r>
@@ -10579,7 +10579,7 @@
                 <a:solidFill>
                   <a:srgbClr val="78808C"/>
                 </a:solidFill>
-                <a:latin typeface="JetBrains Mono"/>
+                <a:latin typeface="Consolas"/>
               </a:rPr>
               <a:t>M21  ·  INHALT</a:t>
             </a:r>
@@ -10700,7 +10700,7 @@
                 <a:solidFill>
                   <a:srgbClr val="1F2C56"/>
                 </a:solidFill>
-                <a:latin typeface="Source Serif 4"/>
+                <a:latin typeface="Arial"/>
               </a:rPr>
               <a:t>AB-1: 8-Felder-Kreditanalyse-Template</a:t>
             </a:r>
@@ -10716,7 +10716,7 @@
         <p:spPr>
           <a:xfrm>
             <a:off x="685800" y="1417320"/>
-            <a:ext cx="10817352" cy="5029200"/>
+            <a:ext cx="10817352" cy="4892040"/>
           </a:xfrm>
           <a:prstGeom prst="rect">
             <a:avLst/>
@@ -10729,7 +10729,7 @@
           </a:bodyPr>
           <a:lstStyle/>
           <a:p>
-            <a:pPr>
+            <a:pPr marL="190500" indent="-190500">
               <a:spcBef>
                 <a:spcPts val="400"/>
               </a:spcBef>
@@ -10748,7 +10748,7 @@
             </a:r>
           </a:p>
           <a:p>
-            <a:pPr>
+            <a:pPr marL="190500" indent="-190500">
               <a:spcBef>
                 <a:spcPts val="400"/>
               </a:spcBef>
@@ -10767,7 +10767,7 @@
             </a:r>
           </a:p>
           <a:p>
-            <a:pPr>
+            <a:pPr marL="190500" indent="-190500">
               <a:spcBef>
                 <a:spcPts val="400"/>
               </a:spcBef>
@@ -10786,7 +10786,7 @@
             </a:r>
           </a:p>
           <a:p>
-            <a:pPr>
+            <a:pPr marL="190500" indent="-190500">
               <a:spcBef>
                 <a:spcPts val="400"/>
               </a:spcBef>
@@ -10805,7 +10805,7 @@
             </a:r>
           </a:p>
           <a:p>
-            <a:pPr>
+            <a:pPr marL="190500" indent="-190500">
               <a:spcBef>
                 <a:spcPts val="400"/>
               </a:spcBef>
@@ -10824,7 +10824,7 @@
             </a:r>
           </a:p>
           <a:p>
-            <a:pPr>
+            <a:pPr marL="190500" indent="-190500">
               <a:spcBef>
                 <a:spcPts val="400"/>
               </a:spcBef>
@@ -10843,7 +10843,7 @@
             </a:r>
           </a:p>
           <a:p>
-            <a:pPr>
+            <a:pPr marL="190500" indent="-190500">
               <a:spcBef>
                 <a:spcPts val="400"/>
               </a:spcBef>
@@ -10862,7 +10862,7 @@
             </a:r>
           </a:p>
           <a:p>
-            <a:pPr>
+            <a:pPr marL="190500" indent="-190500">
               <a:spcBef>
                 <a:spcPts val="400"/>
               </a:spcBef>
@@ -10881,7 +10881,7 @@
             </a:r>
           </a:p>
           <a:p>
-            <a:pPr>
+            <a:pPr marL="190500" indent="-190500">
               <a:spcBef>
                 <a:spcPts val="400"/>
               </a:spcBef>
@@ -10900,7 +10900,7 @@
             </a:r>
           </a:p>
           <a:p>
-            <a:pPr>
+            <a:pPr marL="190500" indent="-190500">
               <a:spcBef>
                 <a:spcPts val="400"/>
               </a:spcBef>
@@ -10919,7 +10919,7 @@
             </a:r>
           </a:p>
           <a:p>
-            <a:pPr>
+            <a:pPr marL="190500" indent="-190500">
               <a:spcBef>
                 <a:spcPts val="400"/>
               </a:spcBef>
@@ -10938,7 +10938,7 @@
             </a:r>
           </a:p>
           <a:p>
-            <a:pPr>
+            <a:pPr marL="190500" indent="-190500">
               <a:spcBef>
                 <a:spcPts val="400"/>
               </a:spcBef>
@@ -11029,7 +11029,7 @@
                 <a:solidFill>
                   <a:srgbClr val="A0B4D2"/>
                 </a:solidFill>
-                <a:latin typeface="JetBrains Mono"/>
+                <a:latin typeface="Consolas"/>
               </a:rPr>
               <a:t>FKB Campus  ·  M21</a:t>
             </a:r>
@@ -11168,7 +11168,7 @@
                 <a:solidFill>
                   <a:srgbClr val="78808C"/>
                 </a:solidFill>
-                <a:latin typeface="JetBrains Mono"/>
+                <a:latin typeface="Consolas"/>
               </a:rPr>
               <a:t>ÜBERBLICK  ·  M21</a:t>
             </a:r>
@@ -11246,7 +11246,7 @@
                 <a:solidFill>
                   <a:srgbClr val="1F2C56"/>
                 </a:solidFill>
-                <a:latin typeface="Source Serif 4"/>
+                <a:latin typeface="Arial"/>
               </a:rPr>
               <a:t>Worum geht es heute</a:t>
             </a:r>
@@ -11395,7 +11395,7 @@
                 <a:solidFill>
                   <a:srgbClr val="A0B4D2"/>
                 </a:solidFill>
-                <a:latin typeface="JetBrains Mono"/>
+                <a:latin typeface="Consolas"/>
               </a:rPr>
               <a:t>FKB Campus  ·  M21</a:t>
             </a:r>
@@ -11534,7 +11534,7 @@
                 <a:solidFill>
                   <a:srgbClr val="78808C"/>
                 </a:solidFill>
-                <a:latin typeface="JetBrains Mono"/>
+                <a:latin typeface="Consolas"/>
               </a:rPr>
               <a:t>M21  ·  ÜBERSICHT</a:t>
             </a:r>
@@ -11569,7 +11569,7 @@
                 <a:solidFill>
                   <a:srgbClr val="1F2C56"/>
                 </a:solidFill>
-                <a:latin typeface="Source Serif 4"/>
+                <a:latin typeface="Arial"/>
               </a:rPr>
               <a:t>AB-1: 8-Felder-Kreditanalyse-Template</a:t>
             </a:r>
@@ -12192,7 +12192,7 @@
                 <a:solidFill>
                   <a:srgbClr val="A0B4D2"/>
                 </a:solidFill>
-                <a:latin typeface="JetBrains Mono"/>
+                <a:latin typeface="Consolas"/>
               </a:rPr>
               <a:t>FKB Campus  ·  M21</a:t>
             </a:r>
@@ -12227,7 +12227,7 @@
                 <a:solidFill>
                   <a:srgbClr val="A0B4D2"/>
                 </a:solidFill>
-                <a:latin typeface="JetBrains Mono"/>
+                <a:latin typeface="Consolas"/>
               </a:rPr>
               <a:t>Übersicht</a:t>
             </a:r>
@@ -12366,7 +12366,7 @@
                 <a:solidFill>
                   <a:srgbClr val="78808C"/>
                 </a:solidFill>
-                <a:latin typeface="JetBrains Mono"/>
+                <a:latin typeface="Consolas"/>
               </a:rPr>
               <a:t>LERNZIELE  ·  M21</a:t>
             </a:r>
@@ -12444,7 +12444,7 @@
                 <a:solidFill>
                   <a:srgbClr val="1F2C56"/>
                 </a:solidFill>
-                <a:latin typeface="Source Serif 4"/>
+                <a:latin typeface="Arial"/>
               </a:rPr>
               <a:t>Was Sie heute mitnehmen</a:t>
             </a:r>
@@ -12621,7 +12621,7 @@
                 <a:solidFill>
                   <a:srgbClr val="A0B4D2"/>
                 </a:solidFill>
-                <a:latin typeface="JetBrains Mono"/>
+                <a:latin typeface="Consolas"/>
               </a:rPr>
               <a:t>FKB Campus  ·  M21</a:t>
             </a:r>
@@ -12760,7 +12760,7 @@
                 <a:solidFill>
                   <a:srgbClr val="78808C"/>
                 </a:solidFill>
-                <a:latin typeface="JetBrains Mono"/>
+                <a:latin typeface="Consolas"/>
               </a:rPr>
               <a:t>AGENDA  ·  M21</a:t>
             </a:r>
@@ -12838,7 +12838,7 @@
                 <a:solidFill>
                   <a:srgbClr val="1F2C56"/>
                 </a:solidFill>
-                <a:latin typeface="Source Serif 4"/>
+                <a:latin typeface="Arial"/>
               </a:rPr>
               <a:t>So läuft das Modul</a:t>
             </a:r>
@@ -13383,7 +13383,7 @@
                 <a:solidFill>
                   <a:srgbClr val="A0B4D2"/>
                 </a:solidFill>
-                <a:latin typeface="JetBrains Mono"/>
+                <a:latin typeface="Consolas"/>
               </a:rPr>
               <a:t>FKB Campus  ·  M21</a:t>
             </a:r>
@@ -13522,7 +13522,7 @@
                 <a:solidFill>
                   <a:srgbClr val="78808C"/>
                 </a:solidFill>
-                <a:latin typeface="JetBrains Mono"/>
+                <a:latin typeface="Consolas"/>
               </a:rPr>
               <a:t>M21  ·  SCHAUBILD</a:t>
             </a:r>
@@ -13557,7 +13557,7 @@
                 <a:solidFill>
                   <a:srgbClr val="1F2C56"/>
                 </a:solidFill>
-                <a:latin typeface="Source Serif 4"/>
+                <a:latin typeface="Arial"/>
               </a:rPr>
               <a:t>Handlungsempfehlung Kreditentscheidung</a:t>
             </a:r>
@@ -13702,7 +13702,7 @@
                 <a:solidFill>
                   <a:srgbClr val="A0B4D2"/>
                 </a:solidFill>
-                <a:latin typeface="JetBrains Mono"/>
+                <a:latin typeface="Consolas"/>
               </a:rPr>
               <a:t>FKB Campus  ·  M21</a:t>
             </a:r>
@@ -13737,7 +13737,7 @@
                 <a:solidFill>
                   <a:srgbClr val="A0B4D2"/>
                 </a:solidFill>
-                <a:latin typeface="JetBrains Mono"/>
+                <a:latin typeface="Consolas"/>
               </a:rPr>
               <a:t>Schaubild</a:t>
             </a:r>
@@ -13876,7 +13876,7 @@
                 <a:solidFill>
                   <a:srgbClr val="78808C"/>
                 </a:solidFill>
-                <a:latin typeface="JetBrains Mono"/>
+                <a:latin typeface="Consolas"/>
               </a:rPr>
               <a:t>M21  ·  INHALT</a:t>
             </a:r>
@@ -13997,7 +13997,7 @@
                 <a:solidFill>
                   <a:srgbClr val="1F2C56"/>
                 </a:solidFill>
-                <a:latin typeface="Source Serif 4"/>
+                <a:latin typeface="Arial"/>
               </a:rPr>
               <a:t>Theorie-Input: Das 8-Felder-Framework für KMU-Kreditentscheidungen</a:t>
             </a:r>
@@ -14013,7 +14013,7 @@
         <p:spPr>
           <a:xfrm>
             <a:off x="685800" y="1417320"/>
-            <a:ext cx="10817352" cy="5029200"/>
+            <a:ext cx="10817352" cy="4892040"/>
           </a:xfrm>
           <a:prstGeom prst="rect">
             <a:avLst/>
@@ -14039,13 +14039,13 @@
                 <a:solidFill>
                   <a:srgbClr val="78808C"/>
                 </a:solidFill>
-                <a:latin typeface="JetBrains Mono"/>
+                <a:latin typeface="Consolas"/>
               </a:rPr>
               <a:t>4.1.1 KONZEPTIONELLER RAHMEN</a:t>
             </a:r>
           </a:p>
           <a:p>
-            <a:pPr>
+            <a:pPr marL="190500" indent="-190500">
               <a:spcBef>
                 <a:spcPts val="400"/>
               </a:spcBef>
@@ -14077,13 +14077,13 @@
                 <a:solidFill>
                   <a:srgbClr val="78808C"/>
                 </a:solidFill>
-                <a:latin typeface="JetBrains Mono"/>
+                <a:latin typeface="Consolas"/>
               </a:rPr>
               <a:t>4.1.2 FELD 1 – ZWECK UND VERWENDUNG</a:t>
             </a:r>
           </a:p>
           <a:p>
-            <a:pPr>
+            <a:pPr marL="190500" indent="-190500">
               <a:spcBef>
                 <a:spcPts val="400"/>
               </a:spcBef>
@@ -14102,7 +14102,7 @@
             </a:r>
           </a:p>
           <a:p>
-            <a:pPr>
+            <a:pPr marL="190500" indent="-190500">
               <a:spcBef>
                 <a:spcPts val="400"/>
               </a:spcBef>
@@ -14121,7 +14121,7 @@
             </a:r>
           </a:p>
           <a:p>
-            <a:pPr>
+            <a:pPr marL="190500" indent="-190500">
               <a:spcBef>
                 <a:spcPts val="400"/>
               </a:spcBef>
@@ -14140,7 +14140,7 @@
             </a:r>
           </a:p>
           <a:p>
-            <a:pPr>
+            <a:pPr marL="190500" indent="-190500">
               <a:spcBef>
                 <a:spcPts val="400"/>
               </a:spcBef>
@@ -14159,7 +14159,7 @@
             </a:r>
           </a:p>
           <a:p>
-            <a:pPr>
+            <a:pPr marL="190500" indent="-190500">
               <a:spcBef>
                 <a:spcPts val="400"/>
               </a:spcBef>
@@ -14178,7 +14178,7 @@
             </a:r>
           </a:p>
           <a:p>
-            <a:pPr>
+            <a:pPr marL="190500" indent="-190500">
               <a:spcBef>
                 <a:spcPts val="400"/>
               </a:spcBef>
@@ -14197,7 +14197,7 @@
             </a:r>
           </a:p>
           <a:p>
-            <a:pPr>
+            <a:pPr marL="190500" indent="-190500">
               <a:spcBef>
                 <a:spcPts val="400"/>
               </a:spcBef>
@@ -14229,13 +14229,13 @@
                 <a:solidFill>
                   <a:srgbClr val="78808C"/>
                 </a:solidFill>
-                <a:latin typeface="JetBrains Mono"/>
+                <a:latin typeface="Consolas"/>
               </a:rPr>
               <a:t>4.1.3 FELD 2 – RÜCKZAHLUNGSQUELLE (CASHFLOW-ANALYSE)</a:t>
             </a:r>
           </a:p>
           <a:p>
-            <a:pPr>
+            <a:pPr marL="190500" indent="-190500">
               <a:spcBef>
                 <a:spcPts val="400"/>
               </a:spcBef>
@@ -14326,7 +14326,7 @@
                 <a:solidFill>
                   <a:srgbClr val="A0B4D2"/>
                 </a:solidFill>
-                <a:latin typeface="JetBrains Mono"/>
+                <a:latin typeface="Consolas"/>
               </a:rPr>
               <a:t>FKB Campus  ·  M21</a:t>
             </a:r>
@@ -14465,7 +14465,7 @@
                 <a:solidFill>
                   <a:srgbClr val="78808C"/>
                 </a:solidFill>
-                <a:latin typeface="JetBrains Mono"/>
+                <a:latin typeface="Consolas"/>
               </a:rPr>
               <a:t>M21  ·  SCHAUBILD</a:t>
             </a:r>
@@ -14500,7 +14500,7 @@
                 <a:solidFill>
                   <a:srgbClr val="1F2C56"/>
                 </a:solidFill>
-                <a:latin typeface="Source Serif 4"/>
+                <a:latin typeface="Arial"/>
               </a:rPr>
               <a:t>8-Felder-Framework der Kreditentscheidung</a:t>
             </a:r>
@@ -14645,7 +14645,7 @@
                 <a:solidFill>
                   <a:srgbClr val="A0B4D2"/>
                 </a:solidFill>
-                <a:latin typeface="JetBrains Mono"/>
+                <a:latin typeface="Consolas"/>
               </a:rPr>
               <a:t>FKB Campus  ·  M21</a:t>
             </a:r>
@@ -14680,7 +14680,7 @@
                 <a:solidFill>
                   <a:srgbClr val="A0B4D2"/>
                 </a:solidFill>
-                <a:latin typeface="JetBrains Mono"/>
+                <a:latin typeface="Consolas"/>
               </a:rPr>
               <a:t>Schaubild</a:t>
             </a:r>
@@ -14819,7 +14819,7 @@
                 <a:solidFill>
                   <a:srgbClr val="78808C"/>
                 </a:solidFill>
-                <a:latin typeface="JetBrains Mono"/>
+                <a:latin typeface="Consolas"/>
               </a:rPr>
               <a:t>M21  ·  ÜBERSICHT</a:t>
             </a:r>
@@ -14854,7 +14854,7 @@
                 <a:solidFill>
                   <a:srgbClr val="1F2C56"/>
                 </a:solidFill>
-                <a:latin typeface="Source Serif 4"/>
+                <a:latin typeface="Arial"/>
               </a:rPr>
               <a:t>Theorie-Input: Das 8-Felder-Framework für KMU-Kreditentscheidungen</a:t>
             </a:r>
@@ -15392,7 +15392,7 @@
                 <a:solidFill>
                   <a:srgbClr val="A0B4D2"/>
                 </a:solidFill>
-                <a:latin typeface="JetBrains Mono"/>
+                <a:latin typeface="Consolas"/>
               </a:rPr>
               <a:t>FKB Campus  ·  M21</a:t>
             </a:r>
@@ -15427,7 +15427,7 @@
                 <a:solidFill>
                   <a:srgbClr val="A0B4D2"/>
                 </a:solidFill>
-                <a:latin typeface="JetBrains Mono"/>
+                <a:latin typeface="Consolas"/>
               </a:rPr>
               <a:t>Übersicht</a:t>
             </a:r>
@@ -15566,7 +15566,7 @@
                 <a:solidFill>
                   <a:srgbClr val="78808C"/>
                 </a:solidFill>
-                <a:latin typeface="JetBrains Mono"/>
+                <a:latin typeface="Consolas"/>
               </a:rPr>
               <a:t>M21  ·  ÜBERSICHT</a:t>
             </a:r>
@@ -15601,7 +15601,7 @@
                 <a:solidFill>
                   <a:srgbClr val="1F2C56"/>
                 </a:solidFill>
-                <a:latin typeface="Source Serif 4"/>
+                <a:latin typeface="Arial"/>
               </a:rPr>
               <a:t>Theorie-Input: Das 8-Felder-Framework für KMU-Kreditentscheidungen</a:t>
             </a:r>
@@ -16062,7 +16062,7 @@
                 <a:solidFill>
                   <a:srgbClr val="A0B4D2"/>
                 </a:solidFill>
-                <a:latin typeface="JetBrains Mono"/>
+                <a:latin typeface="Consolas"/>
               </a:rPr>
               <a:t>FKB Campus  ·  M21</a:t>
             </a:r>
@@ -16097,7 +16097,7 @@
                 <a:solidFill>
                   <a:srgbClr val="A0B4D2"/>
                 </a:solidFill>
-                <a:latin typeface="JetBrains Mono"/>
+                <a:latin typeface="Consolas"/>
               </a:rPr>
               <a:t>Übersicht</a:t>
             </a:r>

--- a/protected-downloads/praesentation/M21.pptx
+++ b/protected-downloads/praesentation/M21.pptx
@@ -23,8 +23,6 @@
     <p:sldId id="271" r:id="rId23"/>
     <p:sldId id="272" r:id="rId24"/>
     <p:sldId id="273" r:id="rId25"/>
-    <p:sldId id="274" r:id="rId26"/>
-    <p:sldId id="275" r:id="rId27"/>
   </p:sldIdLst>
   <p:sldSz cx="12188952" cy="6858000" type="screen4x3"/>
   <p:notesSz cx="6858000" cy="9144000"/>
@@ -546,6 +544,76 @@
 </p:notes>
 </file>
 
+<file path=ppt/notesSlides/notesSlide10.xml><?xml version="1.0" encoding="utf-8"?>
+<p:notes xmlns:a="http://schemas.openxmlformats.org/drawingml/2006/main" xmlns:p="http://schemas.openxmlformats.org/presentationml/2006/main" xmlns:r="http://schemas.openxmlformats.org/officeDocument/2006/relationships">
+  <p:cSld>
+    <p:spTree>
+      <p:nvGrpSpPr>
+        <p:cNvPr id="1" name=""/>
+        <p:cNvGrpSpPr/>
+        <p:nvPr/>
+      </p:nvGrpSpPr>
+      <p:grpSpPr>
+        <a:xfrm>
+          <a:off x="0" y="0"/>
+          <a:ext cx="0" cy="0"/>
+          <a:chOff x="0" y="0"/>
+          <a:chExt cx="0" cy="0"/>
+        </a:xfrm>
+      </p:grpSpPr>
+      <p:sp>
+        <p:nvSpPr>
+          <p:cNvPr id="2" name="Slide Image Placeholder 1"/>
+          <p:cNvSpPr>
+            <a:spLocks noGrp="1"/>
+          </p:cNvSpPr>
+          <p:nvPr>
+            <p:ph type="sldImg" idx="2"/>
+          </p:nvPr>
+        </p:nvSpPr>
+        <p:spPr/>
+      </p:sp>
+      <p:sp>
+        <p:nvSpPr>
+          <p:cNvPr id="3" name="Notes Placeholder 2"/>
+          <p:cNvSpPr>
+            <a:spLocks noGrp="1"/>
+          </p:cNvSpPr>
+          <p:nvPr>
+            <p:ph type="body" idx="3" sz="quarter"/>
+          </p:nvPr>
+        </p:nvSpPr>
+        <p:spPr/>
+        <p:txBody>
+          <a:bodyPr/>
+          <a:lstStyle/>
+          <a:p>
+            <a:r>
+              <a:t>Selbstcheck als Transferanker.</a:t>
+            </a:r>
+          </a:p>
+        </p:txBody>
+      </p:sp>
+      <p:sp>
+        <p:nvSpPr>
+          <p:cNvPr id="4" name="Slide Number Placeholder 3"/>
+          <p:cNvSpPr>
+            <a:spLocks noGrp="1"/>
+          </p:cNvSpPr>
+          <p:nvPr>
+            <p:ph type="sldNum" idx="5" sz="quarter"/>
+          </p:nvPr>
+        </p:nvSpPr>
+        <p:spPr/>
+      </p:sp>
+    </p:spTree>
+  </p:cSld>
+  <p:clrMapOvr>
+    <a:masterClrMapping/>
+  </p:clrMapOvr>
+</p:notes>
+</file>
+
 <file path=ppt/notesSlides/notesSlide2.xml><?xml version="1.0" encoding="utf-8"?>
 <p:notes xmlns:a="http://schemas.openxmlformats.org/drawingml/2006/main" xmlns:p="http://schemas.openxmlformats.org/presentationml/2006/main" xmlns:r="http://schemas.openxmlformats.org/officeDocument/2006/relationships">
   <p:cSld>
@@ -591,7 +659,7 @@
           <a:lstStyle/>
           <a:p>
             <a:r>
-              <a:t>Siehe Trainerhandbuch (Sektion 3) für Moderationshinweise, Timing und erwartete Teilnehmerreaktionen.</a:t>
+              <a:t>Blitzlicht: „Wann war Ihre letzte schwierige Kreditentscheidung – was hat sie schwierig gemacht?" MaRisk BTO 1.1, quantitativ vs. qualitativ.</a:t>
             </a:r>
           </a:p>
         </p:txBody>
@@ -661,7 +729,7 @@
           <a:lstStyle/>
           <a:p>
             <a:r>
-              <a:t>Siehe Trainerhandbuch (Sektion 3) für Moderationshinweise, Timing und erwartete Teilnehmerreaktionen.</a:t>
+              <a:t>Informationsasymmetrie: der Kunde weiß mehr über sein Geschäft – die strukturierte Analyse gleicht das aus.</a:t>
             </a:r>
           </a:p>
         </p:txBody>
@@ -731,7 +799,7 @@
           <a:lstStyle/>
           <a:p>
             <a:r>
-              <a:t>Siehe Trainerhandbuch (Sektion 3) für Moderationshinweise, Timing und erwartete Teilnehmerreaktionen.</a:t>
+              <a:t>Das Framework macht implizites Wissen explizit und die Entscheidung prüfbar.</a:t>
             </a:r>
           </a:p>
         </p:txBody>
@@ -801,7 +869,7 @@
           <a:lstStyle/>
           <a:p>
             <a:r>
-              <a:t>Siehe Trainerhandbuch (Sektion 3) für Moderationshinweise, Timing und erwartete Teilnehmerreaktionen.</a:t>
+              <a:t>Kahneman: erst das Bauchgefühl bewusst machen, dann mit dem 8-Felder-Bogen gegenprüfen.</a:t>
             </a:r>
           </a:p>
         </p:txBody>
@@ -871,7 +939,7 @@
           <a:lstStyle/>
           <a:p>
             <a:r>
-              <a:t>Siehe Trainerhandbuch (Sektion 3) für Moderationshinweise, Timing und erwartete Teilnehmerreaktionen.</a:t>
+              <a:t>Die drei Entscheidungsergebnisse: Zusage, Zusage mit Auflagen, Ablehnung. Häufige Fehler in Kreditvorlagen benennen.</a:t>
             </a:r>
           </a:p>
         </p:txBody>
@@ -941,7 +1009,7 @@
           <a:lstStyle/>
           <a:p>
             <a:r>
-              <a:t>Moderation (HB Sec 3): Trainer-Hinweis: Diese Checkliste verbleibt in der Trainermappe. Eine Woche vorher [ ] Teilnehmerliste prüfen: Haben alle M02 und M04 absolviert? [ ] Bei fehlenden Voraussetzungen: Kurzwiederholung „8-Felder-Framework" versenden [ ] Fallstudienmappe drucken und binden [ ] Raumreservierung und Technik bestätigen Am Vortag [ ] Alle Arbeitsblätter ausgedruckt (12 × je AB) [ ] Trainermappe mit Musterlösung griffbereit [ ] Gruppenaufteilung vorbereiten 30 Minuten vor Beginn [ ] Raum aufbauen (U-Form oder 3er-Gruppentische) [ ] Flip-Charts aufstellen, Marker testen [ ] Beamer und Foliensatz testen [ ] Taschenrechner auf Tische legen [ ] Namensschilder bereitlegen</a:t>
+              <a:t>Das XLSX-Scoring-Modell (M21) rechnet den Gesamtscore aus den 8 Feldern und zeigt die Votum-Ampel. Fall Metallbau Schnell: 3,30 → Zusage mit Auflagen.</a:t>
             </a:r>
           </a:p>
         </p:txBody>
@@ -1011,107 +1079,12 @@
           <a:lstStyle/>
           <a:p>
             <a:r>
-              <a:t>4.4.5 Kreditempfehlung (Musterlösung)</a:t>
-            </a:r>
-          </a:p>
-          <a:p>
-            <a:r>
-              <a:t>Empfehlung: ZUSAGE MIT AUFLAGEN</a:t>
-            </a:r>
-          </a:p>
-          <a:p>
-            <a:r>
-              <a:t>Begründung:</a:t>
-            </a:r>
-          </a:p>
-          <a:p>
-            <a:r>
-              <a:t>1. Cashflow-Tragfähigkeit nachgewiesen (Deckungsquote 1,53x, ZDQ 9,4x), auch bei moderatem Stress ausreichend</a:t>
-            </a:r>
-          </a:p>
-          <a:p>
-            <a:r>
-              <a:t>2. Investitionszweck wirtschaftlich sinnvoll und vollständig dokumentiert</a:t>
-            </a:r>
-          </a:p>
-          <a:p>
-            <a:r>
-              <a:t>3. Managementqualität gut, aber Nachfolgerisiko signifikant und adressierbar</a:t>
-            </a:r>
-          </a:p>
-          <a:p>
-            <a:r>
-              <a:t>4. Branchendiversifikation schützt vor Einzelsegment-Schocks</a:t>
-            </a:r>
-          </a:p>
-          <a:p>
-            <a:r>
-              <a:t>5. Sicherheitenpaket knapp ausreichend bei Einbeziehung aller Bürgschaften</a:t>
-            </a:r>
-          </a:p>
-          <a:p>
-            <a:r>
-              <a:t>Auflagenkatalog:</a:t>
-            </a:r>
-          </a:p>
-          <a:p>
-            <a:r>
-              <a:t>1. Eigenkapitalerhöhung: Thesaurierung Jahresgewinn 2025 mind. 100.000 € (EK-Quote nach 12 Monaten ≥ 23 %)</a:t>
-            </a:r>
-          </a:p>
-          <a:p>
-            <a:r>
-              <a:t>2. Nachfolgeplan: Schriftliche Nachfolgeregelung bis 31.12.2026 (Rollen, Zeitachse, Berater)</a:t>
-            </a:r>
-          </a:p>
-          <a:p>
-            <a:r>
-              <a:t>3. Monitoring: Monatliche Umsatzmeldung, Quartalsmeldung GuV-Rohfassung</a:t>
-            </a:r>
-          </a:p>
-          <a:p>
-            <a:r>
-              <a:t>4. Covenant: EK-Quote ≥ 22 %; Warnung bei &lt; 22 %, Kündigung bei &lt; 20 %</a:t>
-            </a:r>
-          </a:p>
-          <a:p>
-            <a:r>
-              <a:t>5. Sicherheiten: Rang-2-Grundschuld Hallenerweiterung + Sicherungsübereignung CNC-Maschine + selbstschuldnerische Bürgschaft Klaus und Sabine Schnell je 210.000 €</a:t>
-            </a:r>
-          </a:p>
-          <a:p>
-            <a:r>
-              <a:t>Praxishinweis zu Auflage 5 – Bürgschaft Klaus Schnell (75 Jahre): Bei Bürgschaften von Gesellschaftern über 70 Jahren ist das Erbfall-Szenario zu prüfen: Geht die Bürgschaft auf die Erben über, und ist der Bürgschaftsvertrag entsprechend gestaltet? Empfehlung: Ergänzend eine Risikolebensversicherung auf das Leben von Klaus Schnell (Todesfallsumme mind. 210.000 €, Bank als unwiderrufliche Bezugsberechtigte) als Sicherheitsauflage prüfen. Klärung mit Rechtsabteilung/Marktfolge vor Beschlussfassung.</a:t>
-            </a:r>
-          </a:p>
-          <a:p>
-            <a:r>
-              <a:t>Konditionen:</a:t>
-            </a:r>
-          </a:p>
-          <a:p>
-            <a:r>
-              <a:t>Kreditbetrag: 420.000 €</a:t>
-            </a:r>
-          </a:p>
-          <a:p>
-            <a:r>
-              <a:t>Zinssatz: 5,00 % p. a. (EURIBOR + 2,0 % Spread)</a:t>
-            </a:r>
-          </a:p>
-          <a:p>
-            <a:r>
-              <a:t>Laufzeit: 7 Jahre (84 Monate)</a:t>
-            </a:r>
-          </a:p>
-          <a:p>
-            <a:r>
-              <a:t>Tilgung: Annuitätisch, erste Rate 6 Monate nach Auszahlung</a:t>
-            </a:r>
-          </a:p>
-          <a:p>
-            <a:r>
-              <a:t>Jahresrate: ca. 73.000 € (Zins) + 60.000 € (Tilgung) = 133.000 €</a:t>
+              <a:t>AB Musterlösung (Trainer-Version)</a:t>
+            </a:r>
+          </a:p>
+          <a:p>
+            <a:r>
+              <a:t>Metallbau Schnell: Score 3,30 → Zusage mit Auflagen (z. B. EK-Stärkung, Berichtspflicht). Votum begründen, nicht nur behaupten.</a:t>
             </a:r>
           </a:p>
         </p:txBody>
@@ -1181,7 +1154,7 @@
           <a:lstStyle/>
           <a:p>
             <a:r>
-              <a:t>Siehe Trainerhandbuch (Sektion 3) für Moderationshinweise, Timing und erwartete Teilnehmerreaktionen.</a:t>
+              <a:t>Überleitung zum Selbstcheck und Transfer.</a:t>
             </a:r>
           </a:p>
         </p:txBody>
@@ -4999,7 +4972,7 @@
                 </a:solidFill>
                 <a:latin typeface="Arial"/>
               </a:rPr>
-              <a:t>Theorie-Input: Von der Analyse zur Entscheidungsvorlage</a:t>
+              <a:t>Zwei Denksysteme: Bauchgefühl prüfen</a:t>
             </a:r>
           </a:p>
         </p:txBody>
@@ -5021,27 +4994,27 @@
           <a:noFill/>
         </p:spPr>
         <p:txBody>
-          <a:bodyPr wrap="square">
+          <a:bodyPr wrap="square" anchor="ctr">
             <a:spAutoFit/>
           </a:bodyPr>
           <a:lstStyle/>
           <a:p>
-            <a:pPr>
+            <a:pPr marL="177800" indent="-177800">
               <a:spcBef>
-                <a:spcPts val="1000"/>
+                <a:spcPts val="600"/>
               </a:spcBef>
               <a:spcAft>
                 <a:spcPts val="200"/>
               </a:spcAft>
             </a:pPr>
             <a:r>
-              <a:rPr sz="800" b="1">
-                <a:solidFill>
-                  <a:srgbClr val="78808C"/>
-                </a:solidFill>
-                <a:latin typeface="Consolas"/>
-              </a:rPr>
-              <a:t>4.2.1 STRUKTUR EINER KREDITVORLAGE NACH MARISK BTO 1.1</a:t>
+              <a:rPr sz="1200" i="1">
+                <a:solidFill>
+                  <a:srgbClr val="3D5466"/>
+                </a:solidFill>
+                <a:latin typeface="Arial"/>
+              </a:rPr>
+              <a:t>→  System 1 entscheidet schnell und intuitiv, System 2 langsam und begründet – gute Votierung nutzt beide bewusst.</a:t>
             </a:r>
           </a:p>
           <a:p>
@@ -5060,7 +5033,7 @@
                 </a:solidFill>
                 <a:latin typeface="Arial"/>
               </a:rPr>
-              <a:t>▸  Eine bankinterne Kreditvorlage muss nach MaRisk BTO 1.1 (Bundesanstalt für Finanzdienstleistungsaufsicht, 2023 ) folgende Elemente enthalten:</a:t>
+              <a:t>▸  Das schnelle Bauchgefühl ist wertvoll – aber es muss durch die strukturierte Analyse geprüft werden.</a:t>
             </a:r>
           </a:p>
           <a:p>
@@ -5079,178 +5052,7 @@
                 </a:solidFill>
                 <a:latin typeface="Arial"/>
               </a:rPr>
-              <a:t>▸  Gesamtumfang: 12–20 Seiten (je nach Komplexität)</a:t>
-            </a:r>
-          </a:p>
-          <a:p>
-            <a:pPr>
-              <a:spcBef>
-                <a:spcPts val="1000"/>
-              </a:spcBef>
-              <a:spcAft>
-                <a:spcPts val="200"/>
-              </a:spcAft>
-            </a:pPr>
-            <a:r>
-              <a:rPr sz="800" b="1">
-                <a:solidFill>
-                  <a:srgbClr val="78808C"/>
-                </a:solidFill>
-                <a:latin typeface="Consolas"/>
-              </a:rPr>
-              <a:t>4.2.2 DIE DREI ENTSCHEIDUNGSERGEBNISSE</a:t>
-            </a:r>
-          </a:p>
-          <a:p>
-            <a:pPr marL="190500" indent="-190500">
-              <a:spcBef>
-                <a:spcPts val="400"/>
-              </a:spcBef>
-              <a:spcAft>
-                <a:spcPts val="200"/>
-              </a:spcAft>
-            </a:pPr>
-            <a:r>
-              <a:rPr sz="1300">
-                <a:solidFill>
-                  <a:srgbClr val="3D5466"/>
-                </a:solidFill>
-                <a:latin typeface="Arial"/>
-              </a:rPr>
-              <a:t>▸  Entscheidung 1: ZUSAGE</a:t>
-            </a:r>
-          </a:p>
-          <a:p>
-            <a:pPr marL="190500" indent="-190500">
-              <a:spcBef>
-                <a:spcPts val="400"/>
-              </a:spcBef>
-              <a:spcAft>
-                <a:spcPts val="200"/>
-              </a:spcAft>
-            </a:pPr>
-            <a:r>
-              <a:rPr sz="1300">
-                <a:solidFill>
-                  <a:srgbClr val="3D5466"/>
-                </a:solidFill>
-                <a:latin typeface="Arial"/>
-              </a:rPr>
-              <a:t>▸  Alle 8 Felder positiv oder neutral</a:t>
-            </a:r>
-          </a:p>
-          <a:p>
-            <a:pPr marL="190500" indent="-190500">
-              <a:spcBef>
-                <a:spcPts val="400"/>
-              </a:spcBef>
-              <a:spcAft>
-                <a:spcPts val="200"/>
-              </a:spcAft>
-            </a:pPr>
-            <a:r>
-              <a:rPr sz="1300">
-                <a:solidFill>
-                  <a:srgbClr val="3D5466"/>
-                </a:solidFill>
-                <a:latin typeface="Arial"/>
-              </a:rPr>
-              <a:t>▸  Keine einschränkenden Bedingungen</a:t>
-            </a:r>
-          </a:p>
-          <a:p>
-            <a:pPr marL="190500" indent="-190500">
-              <a:spcBef>
-                <a:spcPts val="400"/>
-              </a:spcBef>
-              <a:spcAft>
-                <a:spcPts val="200"/>
-              </a:spcAft>
-            </a:pPr>
-            <a:r>
-              <a:rPr sz="1300">
-                <a:solidFill>
-                  <a:srgbClr val="3D5466"/>
-                </a:solidFill>
-                <a:latin typeface="Arial"/>
-              </a:rPr>
-              <a:t>▸  Dokumentation: Kreditausschuss-Beschluss, Krediturkunde</a:t>
-            </a:r>
-          </a:p>
-          <a:p>
-            <a:pPr marL="190500" indent="-190500">
-              <a:spcBef>
-                <a:spcPts val="400"/>
-              </a:spcBef>
-              <a:spcAft>
-                <a:spcPts val="200"/>
-              </a:spcAft>
-            </a:pPr>
-            <a:r>
-              <a:rPr sz="1300">
-                <a:solidFill>
-                  <a:srgbClr val="3D5466"/>
-                </a:solidFill>
-                <a:latin typeface="Arial"/>
-              </a:rPr>
-              <a:t>▸  Entscheidung 2: ZUSAGE MIT AUFLAGEN</a:t>
-            </a:r>
-          </a:p>
-          <a:p>
-            <a:pPr marL="190500" indent="-190500">
-              <a:spcBef>
-                <a:spcPts val="400"/>
-              </a:spcBef>
-              <a:spcAft>
-                <a:spcPts val="200"/>
-              </a:spcAft>
-            </a:pPr>
-            <a:r>
-              <a:rPr sz="1300">
-                <a:solidFill>
-                  <a:srgbClr val="3D5466"/>
-                </a:solidFill>
-                <a:latin typeface="Arial"/>
-              </a:rPr>
-              <a:t>▸  Einzelne Felder mit Risiken, die durch Auflagen mitigierbar sind</a:t>
-            </a:r>
-          </a:p>
-          <a:p>
-            <a:pPr marL="190500" indent="-190500">
-              <a:spcBef>
-                <a:spcPts val="400"/>
-              </a:spcBef>
-              <a:spcAft>
-                <a:spcPts val="200"/>
-              </a:spcAft>
-            </a:pPr>
-            <a:r>
-              <a:rPr sz="1300">
-                <a:solidFill>
-                  <a:srgbClr val="3D5466"/>
-                </a:solidFill>
-                <a:latin typeface="Arial"/>
-              </a:rPr>
-              <a:t>▸  Auflagen müssen SMART formuliert sein (Spezifisch, Messbar, Akzeptabel, Realistisch, Terminiert)</a:t>
-            </a:r>
-          </a:p>
-          <a:p>
-            <a:pPr marL="190500" indent="-190500">
-              <a:spcBef>
-                <a:spcPts val="400"/>
-              </a:spcBef>
-              <a:spcAft>
-                <a:spcPts val="200"/>
-              </a:spcAft>
-            </a:pPr>
-            <a:r>
-              <a:rPr sz="1300">
-                <a:solidFill>
-                  <a:srgbClr val="3D5466"/>
-                </a:solidFill>
-                <a:latin typeface="Arial"/>
-              </a:rPr>
-              <a:t>▸  Beispiel: „EK-Quote muss innerhalb von 24 Monaten auf ≥ 23 % steigen; Nachweis quartalsweise."</a:t>
+              <a:t>▸  Entscheidungsbiases (Ankereffekt, Bestätigungsfehler) unterlaufen unbemerkt die Votierung.</a:t>
             </a:r>
           </a:p>
         </p:txBody>
@@ -5942,7 +5744,7 @@
                 </a:solidFill>
                 <a:latin typeface="Arial"/>
               </a:rPr>
-              <a:t>Theorie-Input: Sicherheitenbewertung nach BelWertV</a:t>
+              <a:t>Sicherheiten und Konditionen im Alltag</a:t>
             </a:r>
           </a:p>
         </p:txBody>
@@ -5964,10 +5766,29 @@
           <a:noFill/>
         </p:spPr>
         <p:txBody>
-          <a:bodyPr wrap="square">
+          <a:bodyPr wrap="square" anchor="ctr">
             <a:spAutoFit/>
           </a:bodyPr>
           <a:lstStyle/>
+          <a:p>
+            <a:pPr marL="177800" indent="-177800">
+              <a:spcBef>
+                <a:spcPts val="600"/>
+              </a:spcBef>
+              <a:spcAft>
+                <a:spcPts val="200"/>
+              </a:spcAft>
+            </a:pPr>
+            <a:r>
+              <a:rPr sz="1200" i="1">
+                <a:solidFill>
+                  <a:srgbClr val="3D5466"/>
+                </a:solidFill>
+                <a:latin typeface="Arial"/>
+              </a:rPr>
+              <a:t>→  Sicherheiten bewerten heißt den nachhaltigen Wert prüfen, nicht den Nennwert übernehmen (BelWertV).</a:t>
+            </a:r>
+          </a:p>
           <a:p>
             <a:pPr marL="190500" indent="-190500">
               <a:spcBef>
@@ -5984,7 +5805,7 @@
                 </a:solidFill>
                 <a:latin typeface="Arial"/>
               </a:rPr>
-              <a:t>▸  Grundpfandrechte auf Immobilien:</a:t>
+              <a:t>▸  Sicherheitenbewertung, Betriebsmittelkredite und Kontokorrent im Zusammenspiel.</a:t>
             </a:r>
           </a:p>
           <a:p>
@@ -6003,83 +5824,7 @@
                 </a:solidFill>
                 <a:latin typeface="Arial"/>
               </a:rPr>
-              <a:t>▸  Verkehrswert ermitteln (Gutachter oder Vergleichswerte)</a:t>
-            </a:r>
-          </a:p>
-          <a:p>
-            <a:pPr marL="190500" indent="-190500">
-              <a:spcBef>
-                <a:spcPts val="400"/>
-              </a:spcBef>
-              <a:spcAft>
-                <a:spcPts val="200"/>
-              </a:spcAft>
-            </a:pPr>
-            <a:r>
-              <a:rPr sz="1300">
-                <a:solidFill>
-                  <a:srgbClr val="3D5466"/>
-                </a:solidFill>
-                <a:latin typeface="Arial"/>
-              </a:rPr>
-              <a:t>▸  Abschlag von 20–30 % anwenden (je nach Marktvolatilität und Verwertbarkeit)</a:t>
-            </a:r>
-          </a:p>
-          <a:p>
-            <a:pPr marL="190500" indent="-190500">
-              <a:spcBef>
-                <a:spcPts val="400"/>
-              </a:spcBef>
-              <a:spcAft>
-                <a:spcPts val="200"/>
-              </a:spcAft>
-            </a:pPr>
-            <a:r>
-              <a:rPr sz="1300">
-                <a:solidFill>
-                  <a:srgbClr val="3D5466"/>
-                </a:solidFill>
-                <a:latin typeface="Arial"/>
-              </a:rPr>
-              <a:t>▸  Beleihungswert = ca. 60–70 % des Verkehrswerts</a:t>
-            </a:r>
-          </a:p>
-          <a:p>
-            <a:pPr marL="190500" indent="-190500">
-              <a:spcBef>
-                <a:spcPts val="400"/>
-              </a:spcBef>
-              <a:spcAft>
-                <a:spcPts val="200"/>
-              </a:spcAft>
-            </a:pPr>
-            <a:r>
-              <a:rPr sz="1300">
-                <a:solidFill>
-                  <a:srgbClr val="3D5466"/>
-                </a:solidFill>
-                <a:latin typeface="Arial"/>
-              </a:rPr>
-              <a:t>▸  Rangfolge: Rang 1 hat volle Priorität. Rang 2 und 3 erhalten erst nach vollständiger Bedienung von Rang 1 Erlöse – dies kann im Verwertungsfall zu erheblichen Ausfällen führen.</a:t>
-            </a:r>
-          </a:p>
-          <a:p>
-            <a:pPr marL="190500" indent="-190500">
-              <a:spcBef>
-                <a:spcPts val="400"/>
-              </a:spcBef>
-              <a:spcAft>
-                <a:spcPts val="200"/>
-              </a:spcAft>
-            </a:pPr>
-            <a:r>
-              <a:rPr sz="1300">
-                <a:solidFill>
-                  <a:srgbClr val="3D5466"/>
-                </a:solidFill>
-                <a:latin typeface="Arial"/>
-              </a:rPr>
-              <a:t>▸  Bewegliche Sicherheiten: Maschinen und Anlagen verlieren durch Spezialisierung, Betrieb und Marktlage schnell an Wert. Beleihungssatz 30–50 % des Buchwerts ist konservativ, aber realistisch.</a:t>
+              <a:t>▸  Checkliste Bestandskredit in der Krise: früh handeln, sauber dokumentieren.</a:t>
             </a:r>
           </a:p>
         </p:txBody>
@@ -6195,7 +5940,7 @@
             <a:avLst/>
           </a:prstGeom>
           <a:solidFill>
-            <a:srgbClr val="EDEDF3"/>
+            <a:srgbClr val="1F2C56"/>
           </a:solidFill>
           <a:ln>
             <a:noFill/>
@@ -6225,57 +5970,14 @@
       </p:sp>
       <p:sp>
         <p:nvSpPr>
-          <p:cNvPr id="3" name="Rectangle 2"/>
-          <p:cNvSpPr/>
-          <p:nvPr/>
-        </p:nvSpPr>
-        <p:spPr>
-          <a:xfrm>
-            <a:off x="0" y="0"/>
-            <a:ext cx="12188952" cy="50292"/>
-          </a:xfrm>
-          <a:prstGeom prst="rect">
-            <a:avLst/>
-          </a:prstGeom>
-          <a:solidFill>
-            <a:srgbClr val="1F2C56"/>
-          </a:solidFill>
-          <a:ln>
-            <a:noFill/>
-          </a:ln>
-        </p:spPr>
-        <p:style>
-          <a:lnRef idx="1">
-            <a:schemeClr val="accent1"/>
-          </a:lnRef>
-          <a:fillRef idx="3">
-            <a:schemeClr val="accent1"/>
-          </a:fillRef>
-          <a:effectRef idx="2">
-            <a:schemeClr val="accent1"/>
-          </a:effectRef>
-          <a:fontRef idx="minor">
-            <a:schemeClr val="lt1"/>
-          </a:fontRef>
-        </p:style>
-        <p:txBody>
-          <a:bodyPr rtlCol="0" anchor="ctr"/>
-          <a:lstStyle/>
-          <a:p>
-            <a:pPr algn="ctr"/>
-          </a:p>
-        </p:txBody>
-      </p:sp>
-      <p:sp>
-        <p:nvSpPr>
-          <p:cNvPr id="4" name="TextBox 3"/>
+          <p:cNvPr id="3" name="TextBox 2"/>
           <p:cNvSpPr txBox="1"/>
           <p:nvPr/>
         </p:nvSpPr>
         <p:spPr>
           <a:xfrm>
-            <a:off x="685800" y="109728"/>
-            <a:ext cx="10817352" cy="228600"/>
+            <a:off x="685800" y="2377440"/>
+            <a:ext cx="10817352" cy="365760"/>
           </a:xfrm>
           <a:prstGeom prst="rect">
             <a:avLst/>
@@ -6290,70 +5992,27 @@
           <a:p>
             <a:pPr algn="l"/>
             <a:r>
-              <a:rPr sz="750">
-                <a:solidFill>
-                  <a:srgbClr val="78808C"/>
+              <a:rPr sz="1200">
+                <a:solidFill>
+                  <a:srgbClr val="D9C089"/>
                 </a:solidFill>
                 <a:latin typeface="Consolas"/>
               </a:rPr>
-              <a:t>M21  ·  INHALT</a:t>
-            </a:r>
-          </a:p>
-        </p:txBody>
-      </p:sp>
-      <p:sp>
-        <p:nvSpPr>
-          <p:cNvPr id="5" name="Rectangle 4"/>
+              <a:t>09:35–11:30</a:t>
+            </a:r>
+          </a:p>
+        </p:txBody>
+      </p:sp>
+      <p:sp>
+        <p:nvSpPr>
+          <p:cNvPr id="4" name="Rectangle 3"/>
           <p:cNvSpPr/>
           <p:nvPr/>
         </p:nvSpPr>
         <p:spPr>
           <a:xfrm>
-            <a:off x="0" y="1234440"/>
-            <a:ext cx="12188952" cy="12700"/>
-          </a:xfrm>
-          <a:prstGeom prst="rect">
-            <a:avLst/>
-          </a:prstGeom>
-          <a:solidFill>
-            <a:srgbClr val="D8DFE4"/>
-          </a:solidFill>
-          <a:ln>
-            <a:noFill/>
-          </a:ln>
-        </p:spPr>
-        <p:style>
-          <a:lnRef idx="1">
-            <a:schemeClr val="accent1"/>
-          </a:lnRef>
-          <a:fillRef idx="3">
-            <a:schemeClr val="accent1"/>
-          </a:fillRef>
-          <a:effectRef idx="2">
-            <a:schemeClr val="accent1"/>
-          </a:effectRef>
-          <a:fontRef idx="minor">
-            <a:schemeClr val="lt1"/>
-          </a:fontRef>
-        </p:style>
-        <p:txBody>
-          <a:bodyPr rtlCol="0" anchor="ctr"/>
-          <a:lstStyle/>
-          <a:p>
-            <a:pPr algn="ctr"/>
-          </a:p>
-        </p:txBody>
-      </p:sp>
-      <p:sp>
-        <p:nvSpPr>
-          <p:cNvPr id="6" name="Rectangle 5"/>
-          <p:cNvSpPr/>
-          <p:nvPr/>
-        </p:nvSpPr>
-        <p:spPr>
-          <a:xfrm>
-            <a:off x="685800" y="502920"/>
-            <a:ext cx="36576" cy="658368"/>
+            <a:off x="685800" y="2788920"/>
+            <a:ext cx="548640" cy="38100"/>
           </a:xfrm>
           <a:prstGeom prst="rect">
             <a:avLst/>
@@ -6389,14 +6048,14 @@
       </p:sp>
       <p:sp>
         <p:nvSpPr>
-          <p:cNvPr id="7" name="TextBox 6"/>
+          <p:cNvPr id="5" name="TextBox 4"/>
           <p:cNvSpPr txBox="1"/>
           <p:nvPr/>
         </p:nvSpPr>
         <p:spPr>
           <a:xfrm>
-            <a:off x="813816" y="502920"/>
-            <a:ext cx="10634472" cy="685800"/>
+            <a:off x="685800" y="3017520"/>
+            <a:ext cx="10817352" cy="1463040"/>
           </a:xfrm>
           <a:prstGeom prst="rect">
             <a:avLst/>
@@ -6411,27 +6070,27 @@
           <a:p>
             <a:pPr algn="l"/>
             <a:r>
-              <a:rPr sz="2400" b="1" i="0">
-                <a:solidFill>
-                  <a:srgbClr val="1F2C56"/>
+              <a:rPr sz="4000" b="1" i="0">
+                <a:solidFill>
+                  <a:srgbClr val="FFFFFF"/>
                 </a:solidFill>
                 <a:latin typeface="Arial"/>
               </a:rPr>
-              <a:t>4.3a Sicherheitenbewertung im Alltag</a:t>
-            </a:r>
-          </a:p>
-        </p:txBody>
-      </p:sp>
-      <p:sp>
-        <p:nvSpPr>
-          <p:cNvPr id="8" name="TextBox 7"/>
+              <a:t>Fallstudie &amp; Votierung</a:t>
+            </a:r>
+          </a:p>
+        </p:txBody>
+      </p:sp>
+      <p:sp>
+        <p:nvSpPr>
+          <p:cNvPr id="6" name="TextBox 5"/>
           <p:cNvSpPr txBox="1"/>
           <p:nvPr/>
         </p:nvSpPr>
         <p:spPr>
           <a:xfrm>
-            <a:off x="685800" y="1417320"/>
-            <a:ext cx="10817352" cy="4892040"/>
+            <a:off x="685800" y="4480560"/>
+            <a:ext cx="8653881" cy="1280160"/>
           </a:xfrm>
           <a:prstGeom prst="rect">
             <a:avLst/>
@@ -6444,288 +6103,29 @@
           </a:bodyPr>
           <a:lstStyle/>
           <a:p>
-            <a:pPr marL="190500" indent="-190500">
-              <a:spcBef>
-                <a:spcPts val="400"/>
-              </a:spcBef>
-              <a:spcAft>
-                <a:spcPts val="200"/>
-              </a:spcAft>
-            </a:pPr>
-            <a:r>
-              <a:rPr sz="1300">
-                <a:solidFill>
-                  <a:srgbClr val="3D5466"/>
+            <a:pPr algn="l"/>
+            <a:r>
+              <a:rPr sz="1600" b="0" i="0">
+                <a:solidFill>
+                  <a:srgbClr val="C8D2E6"/>
                 </a:solidFill>
                 <a:latin typeface="Arial"/>
               </a:rPr>
-              <a:t>▸  Die BelWertV-Theorie ist eine Sache – der Alltag stellt andere Fragen:</a:t>
-            </a:r>
-          </a:p>
-          <a:p>
-            <a:pPr marL="190500" indent="-190500">
-              <a:spcBef>
-                <a:spcPts val="400"/>
-              </a:spcBef>
-              <a:spcAft>
-                <a:spcPts val="200"/>
-              </a:spcAft>
-            </a:pPr>
-            <a:r>
-              <a:rPr sz="1300">
-                <a:solidFill>
-                  <a:srgbClr val="3D5466"/>
-                </a:solidFill>
-                <a:latin typeface="Arial"/>
-              </a:rPr>
-              <a:t>▸  Wann ist ein aktuelles Gutachten Pflicht?</a:t>
-            </a:r>
-          </a:p>
-          <a:p>
-            <a:pPr marL="190500" indent="-190500">
-              <a:spcBef>
-                <a:spcPts val="400"/>
-              </a:spcBef>
-              <a:spcAft>
-                <a:spcPts val="200"/>
-              </a:spcAft>
-            </a:pPr>
-            <a:r>
-              <a:rPr sz="1300">
-                <a:solidFill>
-                  <a:srgbClr val="3D5466"/>
-                </a:solidFill>
-                <a:latin typeface="Arial"/>
-              </a:rPr>
-              <a:t>▸  Bei Erstverpfändung einer Immobilie und Krediten typischerweise ab 150.000–300 T€ (bankindividuell – Grenze mit Marktfolge klären)</a:t>
-            </a:r>
-          </a:p>
-          <a:p>
-            <a:pPr marL="190500" indent="-190500">
-              <a:spcBef>
-                <a:spcPts val="400"/>
-              </a:spcBef>
-              <a:spcAft>
-                <a:spcPts val="200"/>
-              </a:spcAft>
-            </a:pPr>
-            <a:r>
-              <a:rPr sz="1300">
-                <a:solidFill>
-                  <a:srgbClr val="3D5466"/>
-                </a:solidFill>
-                <a:latin typeface="Arial"/>
-              </a:rPr>
-              <a:t>▸  Bei wesentlicher Wertveränderung (Umbau, Schaden, Marktveränderung)</a:t>
-            </a:r>
-          </a:p>
-          <a:p>
-            <a:pPr marL="190500" indent="-190500">
-              <a:spcBef>
-                <a:spcPts val="400"/>
-              </a:spcBef>
-              <a:spcAft>
-                <a:spcPts val="200"/>
-              </a:spcAft>
-            </a:pPr>
-            <a:r>
-              <a:rPr sz="1300">
-                <a:solidFill>
-                  <a:srgbClr val="3D5466"/>
-                </a:solidFill>
-                <a:latin typeface="Arial"/>
-              </a:rPr>
-              <a:t>▸  Bei Verlängerung mit mehr als 5 Jahren ohne zwischenzeitliches Update</a:t>
-            </a:r>
-          </a:p>
-          <a:p>
-            <a:pPr marL="190500" indent="-190500">
-              <a:spcBef>
-                <a:spcPts val="400"/>
-              </a:spcBef>
-              <a:spcAft>
-                <a:spcPts val="200"/>
-              </a:spcAft>
-            </a:pPr>
-            <a:r>
-              <a:rPr sz="1300">
-                <a:solidFill>
-                  <a:srgbClr val="3D5466"/>
-                </a:solidFill>
-                <a:latin typeface="Arial"/>
-              </a:rPr>
-              <a:t>▸  Wann reicht eine Plausibilisierung?</a:t>
-            </a:r>
-          </a:p>
-          <a:p>
-            <a:pPr marL="190500" indent="-190500">
-              <a:spcBef>
-                <a:spcPts val="400"/>
-              </a:spcBef>
-              <a:spcAft>
-                <a:spcPts val="200"/>
-              </a:spcAft>
-            </a:pPr>
-            <a:r>
-              <a:rPr sz="1300">
-                <a:solidFill>
-                  <a:srgbClr val="3D5466"/>
-                </a:solidFill>
-                <a:latin typeface="Arial"/>
-              </a:rPr>
-              <a:t>▸  Bei kleinen Beträgen und gut bekannten Objekten kann der Berater eine Marktplausibilisierung vornehmen (Vergleichspreise Onlineportale, Gespräch mit lokalem Makler)</a:t>
-            </a:r>
-          </a:p>
-          <a:p>
-            <a:pPr marL="190500" indent="-190500">
-              <a:spcBef>
-                <a:spcPts val="400"/>
-              </a:spcBef>
-              <a:spcAft>
-                <a:spcPts val="200"/>
-              </a:spcAft>
-            </a:pPr>
-            <a:r>
-              <a:rPr sz="1300">
-                <a:solidFill>
-                  <a:srgbClr val="3D5466"/>
-                </a:solidFill>
-                <a:latin typeface="Arial"/>
-              </a:rPr>
-              <a:t>▸  Diese Schätzung muss dokumentiert und dem Kreditbeschluss beigefügt werden</a:t>
-            </a:r>
-          </a:p>
-          <a:p>
-            <a:pPr marL="190500" indent="-190500">
-              <a:spcBef>
-                <a:spcPts val="400"/>
-              </a:spcBef>
-              <a:spcAft>
-                <a:spcPts val="200"/>
-              </a:spcAft>
-            </a:pPr>
-            <a:r>
-              <a:rPr sz="1300">
-                <a:solidFill>
-                  <a:srgbClr val="3D5466"/>
-                </a:solidFill>
-                <a:latin typeface="Arial"/>
-              </a:rPr>
-              <a:t>▸  Alte Gutachten – Faustregel:</a:t>
-            </a:r>
-          </a:p>
-          <a:p>
-            <a:pPr marL="190500" indent="-190500">
-              <a:spcBef>
-                <a:spcPts val="400"/>
-              </a:spcBef>
-              <a:spcAft>
-                <a:spcPts val="200"/>
-              </a:spcAft>
-            </a:pPr>
-            <a:r>
-              <a:rPr sz="1300">
-                <a:solidFill>
-                  <a:srgbClr val="3D5466"/>
-                </a:solidFill>
-                <a:latin typeface="Arial"/>
-              </a:rPr>
-              <a:t>▸  Gutachten älter als 3 Jahre: Abschlag von 10–20 % auf den damaligen Wert je nach Marktentwicklung</a:t>
-            </a:r>
-          </a:p>
-          <a:p>
-            <a:pPr marL="190500" indent="-190500">
-              <a:spcBef>
-                <a:spcPts val="400"/>
-              </a:spcBef>
-              <a:spcAft>
-                <a:spcPts val="200"/>
-              </a:spcAft>
-            </a:pPr>
-            <a:r>
-              <a:rPr sz="1300">
-                <a:solidFill>
-                  <a:srgbClr val="3D5466"/>
-                </a:solidFill>
-                <a:latin typeface="Arial"/>
-              </a:rPr>
-              <a:t>▸  Gutachten älter als 5 Jahre: Neugutachten oder erheblicher konservativer Abschlag empfohlen</a:t>
-            </a:r>
-          </a:p>
-          <a:p>
-            <a:pPr marL="190500" indent="-190500">
-              <a:spcBef>
-                <a:spcPts val="400"/>
-              </a:spcBef>
-              <a:spcAft>
-                <a:spcPts val="200"/>
-              </a:spcAft>
-            </a:pPr>
-            <a:r>
-              <a:rPr sz="1300">
-                <a:solidFill>
-                  <a:srgbClr val="3D5466"/>
-                </a:solidFill>
-                <a:latin typeface="Arial"/>
-              </a:rPr>
-              <a:t>▸  Bei Gewerbeimmobilien: Marktentwicklung oft volatiler als bei Wohnimmobilien – früher erneuern</a:t>
-            </a:r>
-          </a:p>
-        </p:txBody>
-      </p:sp>
-      <p:sp>
-        <p:nvSpPr>
-          <p:cNvPr id="9" name="Rectangle 8"/>
-          <p:cNvSpPr/>
-          <p:nvPr/>
-        </p:nvSpPr>
-        <p:spPr>
-          <a:xfrm>
-            <a:off x="0" y="6510528"/>
-            <a:ext cx="12188952" cy="347472"/>
-          </a:xfrm>
-          <a:prstGeom prst="rect">
-            <a:avLst/>
-          </a:prstGeom>
-          <a:solidFill>
-            <a:srgbClr val="0A1937"/>
-          </a:solidFill>
-          <a:ln>
-            <a:noFill/>
-          </a:ln>
-        </p:spPr>
-        <p:style>
-          <a:lnRef idx="1">
-            <a:schemeClr val="accent1"/>
-          </a:lnRef>
-          <a:fillRef idx="3">
-            <a:schemeClr val="accent1"/>
-          </a:fillRef>
-          <a:effectRef idx="2">
-            <a:schemeClr val="accent1"/>
-          </a:effectRef>
-          <a:fontRef idx="minor">
-            <a:schemeClr val="lt1"/>
-          </a:fontRef>
-        </p:style>
-        <p:txBody>
-          <a:bodyPr rtlCol="0" anchor="ctr"/>
-          <a:lstStyle/>
-          <a:p>
-            <a:pPr algn="ctr"/>
-          </a:p>
-        </p:txBody>
-      </p:sp>
-      <p:sp>
-        <p:nvSpPr>
-          <p:cNvPr id="10" name="TextBox 9"/>
+              <a:t>Ein reales Votum erarbeiten, konditionieren und präsentieren.</a:t>
+            </a:r>
+          </a:p>
+        </p:txBody>
+      </p:sp>
+      <p:sp>
+        <p:nvSpPr>
+          <p:cNvPr id="7" name="TextBox 6"/>
           <p:cNvSpPr txBox="1"/>
           <p:nvPr/>
         </p:nvSpPr>
         <p:spPr>
           <a:xfrm>
-            <a:off x="685800" y="6583680"/>
-            <a:ext cx="6490411" cy="256032"/>
+            <a:off x="685800" y="6355080"/>
+            <a:ext cx="10817352" cy="274320"/>
           </a:xfrm>
           <a:prstGeom prst="rect">
             <a:avLst/>
@@ -6742,7 +6142,7 @@
             <a:r>
               <a:rPr sz="700">
                 <a:solidFill>
-                  <a:srgbClr val="A0B4D2"/>
+                  <a:srgbClr val="8CA0C3"/>
                 </a:solidFill>
                 <a:latin typeface="Consolas"/>
               </a:rPr>
@@ -6784,7 +6184,7 @@
             <a:avLst/>
           </a:prstGeom>
           <a:solidFill>
-            <a:srgbClr val="EDEDF3"/>
+            <a:srgbClr val="FFFFFF"/>
           </a:solidFill>
           <a:ln>
             <a:noFill/>
@@ -6885,51 +6285,43 @@
                 </a:solidFill>
                 <a:latin typeface="Consolas"/>
               </a:rPr>
-              <a:t>M21  ·  INHALT</a:t>
-            </a:r>
-          </a:p>
-        </p:txBody>
-      </p:sp>
-      <p:sp>
-        <p:nvSpPr>
-          <p:cNvPr id="5" name="Rectangle 4"/>
-          <p:cNvSpPr/>
-          <p:nvPr/>
-        </p:nvSpPr>
-        <p:spPr>
-          <a:xfrm>
-            <a:off x="0" y="1234440"/>
-            <a:ext cx="12188952" cy="12700"/>
-          </a:xfrm>
-          <a:prstGeom prst="rect">
-            <a:avLst/>
-          </a:prstGeom>
-          <a:solidFill>
-            <a:srgbClr val="D8DFE4"/>
-          </a:solidFill>
-          <a:ln>
-            <a:noFill/>
-          </a:ln>
-        </p:spPr>
-        <p:style>
-          <a:lnRef idx="1">
-            <a:schemeClr val="accent1"/>
-          </a:lnRef>
-          <a:fillRef idx="3">
-            <a:schemeClr val="accent1"/>
-          </a:fillRef>
-          <a:effectRef idx="2">
-            <a:schemeClr val="accent1"/>
-          </a:effectRef>
-          <a:fontRef idx="minor">
-            <a:schemeClr val="lt1"/>
-          </a:fontRef>
-        </p:style>
-        <p:txBody>
-          <a:bodyPr rtlCol="0" anchor="ctr"/>
-          <a:lstStyle/>
-          <a:p>
-            <a:pPr algn="ctr"/>
+              <a:t>M21  ·  ÜBERSICHT</a:t>
+            </a:r>
+          </a:p>
+        </p:txBody>
+      </p:sp>
+      <p:sp>
+        <p:nvSpPr>
+          <p:cNvPr id="5" name="TextBox 4"/>
+          <p:cNvSpPr txBox="1"/>
+          <p:nvPr/>
+        </p:nvSpPr>
+        <p:spPr>
+          <a:xfrm>
+            <a:off x="685800" y="502920"/>
+            <a:ext cx="10817352" cy="594360"/>
+          </a:xfrm>
+          <a:prstGeom prst="rect">
+            <a:avLst/>
+          </a:prstGeom>
+          <a:noFill/>
+        </p:spPr>
+        <p:txBody>
+          <a:bodyPr wrap="square">
+            <a:spAutoFit/>
+          </a:bodyPr>
+          <a:lstStyle/>
+          <a:p>
+            <a:pPr algn="l"/>
+            <a:r>
+              <a:rPr sz="2000" b="1" i="0">
+                <a:solidFill>
+                  <a:srgbClr val="1F2C56"/>
+                </a:solidFill>
+                <a:latin typeface="Arial"/>
+              </a:rPr>
+              <a:t>Praxisfall Metallbau Schnell: Scoring-Ergebnis</a:t>
+            </a:r>
           </a:p>
         </p:txBody>
       </p:sp>
@@ -6941,8 +6333,8 @@
         </p:nvSpPr>
         <p:spPr>
           <a:xfrm>
-            <a:off x="685800" y="502920"/>
-            <a:ext cx="36576" cy="658368"/>
+            <a:off x="685800" y="1143000"/>
+            <a:ext cx="10817352" cy="25400"/>
           </a:xfrm>
           <a:prstGeom prst="rect">
             <a:avLst/>
@@ -6976,1556 +6368,6 @@
           </a:p>
         </p:txBody>
       </p:sp>
-      <p:sp>
-        <p:nvSpPr>
-          <p:cNvPr id="7" name="TextBox 6"/>
-          <p:cNvSpPr txBox="1"/>
-          <p:nvPr/>
-        </p:nvSpPr>
-        <p:spPr>
-          <a:xfrm>
-            <a:off x="813816" y="502920"/>
-            <a:ext cx="10634472" cy="685800"/>
-          </a:xfrm>
-          <a:prstGeom prst="rect">
-            <a:avLst/>
-          </a:prstGeom>
-          <a:noFill/>
-        </p:spPr>
-        <p:txBody>
-          <a:bodyPr wrap="square">
-            <a:spAutoFit/>
-          </a:bodyPr>
-          <a:lstStyle/>
-          <a:p>
-            <a:pPr algn="l"/>
-            <a:r>
-              <a:rPr sz="2400" b="1" i="0">
-                <a:solidFill>
-                  <a:srgbClr val="1F2C56"/>
-                </a:solidFill>
-                <a:latin typeface="Arial"/>
-              </a:rPr>
-              <a:t>4.3b Betriebsmittelkredite und Kontokorrent: Kurzfall</a:t>
-            </a:r>
-          </a:p>
-        </p:txBody>
-      </p:sp>
-      <p:sp>
-        <p:nvSpPr>
-          <p:cNvPr id="8" name="TextBox 7"/>
-          <p:cNvSpPr txBox="1"/>
-          <p:nvPr/>
-        </p:nvSpPr>
-        <p:spPr>
-          <a:xfrm>
-            <a:off x="685800" y="1417320"/>
-            <a:ext cx="10817352" cy="4892040"/>
-          </a:xfrm>
-          <a:prstGeom prst="rect">
-            <a:avLst/>
-          </a:prstGeom>
-          <a:noFill/>
-        </p:spPr>
-        <p:txBody>
-          <a:bodyPr wrap="square">
-            <a:spAutoFit/>
-          </a:bodyPr>
-          <a:lstStyle/>
-          <a:p>
-            <a:pPr marL="190500" indent="-190500">
-              <a:spcBef>
-                <a:spcPts val="400"/>
-              </a:spcBef>
-              <a:spcAft>
-                <a:spcPts val="200"/>
-              </a:spcAft>
-            </a:pPr>
-            <a:r>
-              <a:rPr sz="1300">
-                <a:solidFill>
-                  <a:srgbClr val="3D5466"/>
-                </a:solidFill>
-                <a:latin typeface="Arial"/>
-              </a:rPr>
-              <a:t>▸  Nicht alle Kreditentscheidungen sind langfristige Investitionskredite. Häufiger Alltag: KK-Linie läuft an ihre Grenze oder wird regelmäßig überzogen.</a:t>
-            </a:r>
-          </a:p>
-          <a:p>
-            <a:pPr marL="190500" indent="-190500">
-              <a:spcBef>
-                <a:spcPts val="400"/>
-              </a:spcBef>
-              <a:spcAft>
-                <a:spcPts val="200"/>
-              </a:spcAft>
-            </a:pPr>
-            <a:r>
-              <a:rPr sz="1300">
-                <a:solidFill>
-                  <a:srgbClr val="3D5466"/>
-                </a:solidFill>
-                <a:latin typeface="Arial"/>
-              </a:rPr>
-              <a:t>▸  Kurzfall: Bäckerei Weber KG, Überzug KK-Linie</a:t>
-            </a:r>
-          </a:p>
-          <a:p>
-            <a:pPr marL="190500" indent="-190500">
-              <a:spcBef>
-                <a:spcPts val="400"/>
-              </a:spcBef>
-              <a:spcAft>
-                <a:spcPts val="200"/>
-              </a:spcAft>
-            </a:pPr>
-            <a:r>
-              <a:rPr sz="1300">
-                <a:solidFill>
-                  <a:srgbClr val="3D5466"/>
-                </a:solidFill>
-                <a:latin typeface="Arial"/>
-              </a:rPr>
-              <a:t>▸  Beraterin Schmidt stellt fest: Bäckerei Weber KG, Linie 80.000 €, seit 6 Wochen durchgehend bei 95–100 % ausgelastet, in einer Woche zweimal kurz drüber.</a:t>
-            </a:r>
-          </a:p>
-          <a:p>
-            <a:pPr marL="190500" indent="-190500">
-              <a:spcBef>
-                <a:spcPts val="400"/>
-              </a:spcBef>
-              <a:spcAft>
-                <a:spcPts val="200"/>
-              </a:spcAft>
-            </a:pPr>
-            <a:r>
-              <a:rPr sz="1300">
-                <a:solidFill>
-                  <a:srgbClr val="3D5466"/>
-                </a:solidFill>
-                <a:latin typeface="Arial"/>
-              </a:rPr>
-              <a:t>▸  Analysefragen für Kontokorrent:</a:t>
-            </a:r>
-          </a:p>
-          <a:p>
-            <a:pPr marL="190500" indent="-190500">
-              <a:spcBef>
-                <a:spcPts val="400"/>
-              </a:spcBef>
-              <a:spcAft>
-                <a:spcPts val="200"/>
-              </a:spcAft>
-            </a:pPr>
-            <a:r>
-              <a:rPr sz="1300">
-                <a:solidFill>
-                  <a:srgbClr val="3D5466"/>
-                </a:solidFill>
-                <a:latin typeface="Arial"/>
-              </a:rPr>
-              <a:t>▸  Mögliche Entscheidungen:</a:t>
-            </a:r>
-          </a:p>
-          <a:p>
-            <a:pPr marL="190500" indent="-190500">
-              <a:spcBef>
-                <a:spcPts val="400"/>
-              </a:spcBef>
-              <a:spcAft>
-                <a:spcPts val="200"/>
-              </a:spcAft>
-            </a:pPr>
-            <a:r>
-              <a:rPr sz="1300">
-                <a:solidFill>
-                  <a:srgbClr val="3D5466"/>
-                </a:solidFill>
-                <a:latin typeface="Arial"/>
-              </a:rPr>
-              <a:t>▸  Temporärer saisonaler Überzug, stabile Bonität: Dulden mit Dokumentation</a:t>
-            </a:r>
-          </a:p>
-          <a:p>
-            <a:pPr marL="190500" indent="-190500">
-              <a:spcBef>
-                <a:spcPts val="400"/>
-              </a:spcBef>
-              <a:spcAft>
-                <a:spcPts val="200"/>
-              </a:spcAft>
-            </a:pPr>
-            <a:r>
-              <a:rPr sz="1300">
-                <a:solidFill>
-                  <a:srgbClr val="3D5466"/>
-                </a:solidFill>
-                <a:latin typeface="Arial"/>
-              </a:rPr>
-              <a:t>▸  Strukturelle Auslastung, gute Bonität: Linienerhöhung prüfen (mit Analyse Feld 2 und 3)</a:t>
-            </a:r>
-          </a:p>
-          <a:p>
-            <a:pPr marL="190500" indent="-190500">
-              <a:spcBef>
-                <a:spcPts val="400"/>
-              </a:spcBef>
-              <a:spcAft>
-                <a:spcPts val="200"/>
-              </a:spcAft>
-            </a:pPr>
-            <a:r>
-              <a:rPr sz="1300">
-                <a:solidFill>
-                  <a:srgbClr val="3D5466"/>
-                </a:solidFill>
-                <a:latin typeface="Arial"/>
-              </a:rPr>
-              <a:t>▸  Überzug + Warnsignale: Sofort persönliches Gespräch, ggf. Frühwarnmeldung</a:t>
-            </a:r>
-          </a:p>
-          <a:p>
-            <a:pPr marL="177800" indent="-177800">
-              <a:spcBef>
-                <a:spcPts val="600"/>
-              </a:spcBef>
-              <a:spcAft>
-                <a:spcPts val="200"/>
-              </a:spcAft>
-            </a:pPr>
-            <a:r>
-              <a:rPr sz="1200" i="1">
-                <a:solidFill>
-                  <a:srgbClr val="3D5466"/>
-                </a:solidFill>
-                <a:latin typeface="Arial"/>
-              </a:rPr>
-              <a:t>→  Wichtig: Jede Überzugsduldung – auch eine kurzfristige – muss dokumentiert werden (MaRisk BTO 1.1). Nicht dokumentierte Überzüge sind ein Prüfungsrisiko.</a:t>
-            </a:r>
-          </a:p>
-          <a:p>
-            <a:pPr marL="190500" indent="-190500">
-              <a:spcBef>
-                <a:spcPts val="400"/>
-              </a:spcBef>
-              <a:spcAft>
-                <a:spcPts val="200"/>
-              </a:spcAft>
-            </a:pPr>
-            <a:r>
-              <a:rPr sz="1300">
-                <a:solidFill>
-                  <a:srgbClr val="3D5466"/>
-                </a:solidFill>
-                <a:latin typeface="Arial"/>
-              </a:rPr>
-              <a:t>▸  Entscheidungsmatrix: Wann ist eine neue Kreditvorlage Pflicht?</a:t>
-            </a:r>
-          </a:p>
-        </p:txBody>
-      </p:sp>
-      <p:sp>
-        <p:nvSpPr>
-          <p:cNvPr id="9" name="Rectangle 8"/>
-          <p:cNvSpPr/>
-          <p:nvPr/>
-        </p:nvSpPr>
-        <p:spPr>
-          <a:xfrm>
-            <a:off x="0" y="6510528"/>
-            <a:ext cx="12188952" cy="347472"/>
-          </a:xfrm>
-          <a:prstGeom prst="rect">
-            <a:avLst/>
-          </a:prstGeom>
-          <a:solidFill>
-            <a:srgbClr val="0A1937"/>
-          </a:solidFill>
-          <a:ln>
-            <a:noFill/>
-          </a:ln>
-        </p:spPr>
-        <p:style>
-          <a:lnRef idx="1">
-            <a:schemeClr val="accent1"/>
-          </a:lnRef>
-          <a:fillRef idx="3">
-            <a:schemeClr val="accent1"/>
-          </a:fillRef>
-          <a:effectRef idx="2">
-            <a:schemeClr val="accent1"/>
-          </a:effectRef>
-          <a:fontRef idx="minor">
-            <a:schemeClr val="lt1"/>
-          </a:fontRef>
-        </p:style>
-        <p:txBody>
-          <a:bodyPr rtlCol="0" anchor="ctr"/>
-          <a:lstStyle/>
-          <a:p>
-            <a:pPr algn="ctr"/>
-          </a:p>
-        </p:txBody>
-      </p:sp>
-      <p:sp>
-        <p:nvSpPr>
-          <p:cNvPr id="10" name="TextBox 9"/>
-          <p:cNvSpPr txBox="1"/>
-          <p:nvPr/>
-        </p:nvSpPr>
-        <p:spPr>
-          <a:xfrm>
-            <a:off x="685800" y="6583680"/>
-            <a:ext cx="6490411" cy="256032"/>
-          </a:xfrm>
-          <a:prstGeom prst="rect">
-            <a:avLst/>
-          </a:prstGeom>
-          <a:noFill/>
-        </p:spPr>
-        <p:txBody>
-          <a:bodyPr wrap="none">
-            <a:spAutoFit/>
-          </a:bodyPr>
-          <a:lstStyle/>
-          <a:p>
-            <a:pPr algn="l"/>
-            <a:r>
-              <a:rPr sz="700">
-                <a:solidFill>
-                  <a:srgbClr val="A0B4D2"/>
-                </a:solidFill>
-                <a:latin typeface="Consolas"/>
-              </a:rPr>
-              <a:t>FKB Campus  ·  M21</a:t>
-            </a:r>
-          </a:p>
-        </p:txBody>
-      </p:sp>
-    </p:spTree>
-  </p:cSld>
-  <p:clrMapOvr>
-    <a:masterClrMapping/>
-  </p:clrMapOvr>
-</p:sld>
-</file>
-
-<file path=ppt/slides/slide15.xml><?xml version="1.0" encoding="utf-8"?>
-<p:sld xmlns:a="http://schemas.openxmlformats.org/drawingml/2006/main" xmlns:p="http://schemas.openxmlformats.org/presentationml/2006/main" xmlns:r="http://schemas.openxmlformats.org/officeDocument/2006/relationships">
-  <p:cSld>
-    <p:spTree>
-      <p:nvGrpSpPr>
-        <p:cNvPr id="1" name=""/>
-        <p:cNvGrpSpPr/>
-        <p:nvPr/>
-      </p:nvGrpSpPr>
-      <p:grpSpPr/>
-      <p:sp>
-        <p:nvSpPr>
-          <p:cNvPr id="2" name="Rectangle 1"/>
-          <p:cNvSpPr/>
-          <p:nvPr/>
-        </p:nvSpPr>
-        <p:spPr>
-          <a:xfrm>
-            <a:off x="0" y="0"/>
-            <a:ext cx="12188952" cy="6858000"/>
-          </a:xfrm>
-          <a:prstGeom prst="rect">
-            <a:avLst/>
-          </a:prstGeom>
-          <a:solidFill>
-            <a:srgbClr val="EDEDF3"/>
-          </a:solidFill>
-          <a:ln>
-            <a:noFill/>
-          </a:ln>
-        </p:spPr>
-        <p:style>
-          <a:lnRef idx="1">
-            <a:schemeClr val="accent1"/>
-          </a:lnRef>
-          <a:fillRef idx="3">
-            <a:schemeClr val="accent1"/>
-          </a:fillRef>
-          <a:effectRef idx="2">
-            <a:schemeClr val="accent1"/>
-          </a:effectRef>
-          <a:fontRef idx="minor">
-            <a:schemeClr val="lt1"/>
-          </a:fontRef>
-        </p:style>
-        <p:txBody>
-          <a:bodyPr rtlCol="0" anchor="ctr"/>
-          <a:lstStyle/>
-          <a:p>
-            <a:pPr algn="ctr"/>
-          </a:p>
-        </p:txBody>
-      </p:sp>
-      <p:sp>
-        <p:nvSpPr>
-          <p:cNvPr id="3" name="Rectangle 2"/>
-          <p:cNvSpPr/>
-          <p:nvPr/>
-        </p:nvSpPr>
-        <p:spPr>
-          <a:xfrm>
-            <a:off x="0" y="0"/>
-            <a:ext cx="12188952" cy="50292"/>
-          </a:xfrm>
-          <a:prstGeom prst="rect">
-            <a:avLst/>
-          </a:prstGeom>
-          <a:solidFill>
-            <a:srgbClr val="1F2C56"/>
-          </a:solidFill>
-          <a:ln>
-            <a:noFill/>
-          </a:ln>
-        </p:spPr>
-        <p:style>
-          <a:lnRef idx="1">
-            <a:schemeClr val="accent1"/>
-          </a:lnRef>
-          <a:fillRef idx="3">
-            <a:schemeClr val="accent1"/>
-          </a:fillRef>
-          <a:effectRef idx="2">
-            <a:schemeClr val="accent1"/>
-          </a:effectRef>
-          <a:fontRef idx="minor">
-            <a:schemeClr val="lt1"/>
-          </a:fontRef>
-        </p:style>
-        <p:txBody>
-          <a:bodyPr rtlCol="0" anchor="ctr"/>
-          <a:lstStyle/>
-          <a:p>
-            <a:pPr algn="ctr"/>
-          </a:p>
-        </p:txBody>
-      </p:sp>
-      <p:sp>
-        <p:nvSpPr>
-          <p:cNvPr id="4" name="TextBox 3"/>
-          <p:cNvSpPr txBox="1"/>
-          <p:nvPr/>
-        </p:nvSpPr>
-        <p:spPr>
-          <a:xfrm>
-            <a:off x="685800" y="109728"/>
-            <a:ext cx="10817352" cy="228600"/>
-          </a:xfrm>
-          <a:prstGeom prst="rect">
-            <a:avLst/>
-          </a:prstGeom>
-          <a:noFill/>
-        </p:spPr>
-        <p:txBody>
-          <a:bodyPr wrap="none">
-            <a:spAutoFit/>
-          </a:bodyPr>
-          <a:lstStyle/>
-          <a:p>
-            <a:pPr algn="l"/>
-            <a:r>
-              <a:rPr sz="750">
-                <a:solidFill>
-                  <a:srgbClr val="78808C"/>
-                </a:solidFill>
-                <a:latin typeface="Consolas"/>
-              </a:rPr>
-              <a:t>M21  ·  INHALT</a:t>
-            </a:r>
-          </a:p>
-        </p:txBody>
-      </p:sp>
-      <p:sp>
-        <p:nvSpPr>
-          <p:cNvPr id="5" name="Rectangle 4"/>
-          <p:cNvSpPr/>
-          <p:nvPr/>
-        </p:nvSpPr>
-        <p:spPr>
-          <a:xfrm>
-            <a:off x="0" y="1234440"/>
-            <a:ext cx="12188952" cy="12700"/>
-          </a:xfrm>
-          <a:prstGeom prst="rect">
-            <a:avLst/>
-          </a:prstGeom>
-          <a:solidFill>
-            <a:srgbClr val="D8DFE4"/>
-          </a:solidFill>
-          <a:ln>
-            <a:noFill/>
-          </a:ln>
-        </p:spPr>
-        <p:style>
-          <a:lnRef idx="1">
-            <a:schemeClr val="accent1"/>
-          </a:lnRef>
-          <a:fillRef idx="3">
-            <a:schemeClr val="accent1"/>
-          </a:fillRef>
-          <a:effectRef idx="2">
-            <a:schemeClr val="accent1"/>
-          </a:effectRef>
-          <a:fontRef idx="minor">
-            <a:schemeClr val="lt1"/>
-          </a:fontRef>
-        </p:style>
-        <p:txBody>
-          <a:bodyPr rtlCol="0" anchor="ctr"/>
-          <a:lstStyle/>
-          <a:p>
-            <a:pPr algn="ctr"/>
-          </a:p>
-        </p:txBody>
-      </p:sp>
-      <p:sp>
-        <p:nvSpPr>
-          <p:cNvPr id="6" name="Rectangle 5"/>
-          <p:cNvSpPr/>
-          <p:nvPr/>
-        </p:nvSpPr>
-        <p:spPr>
-          <a:xfrm>
-            <a:off x="685800" y="502920"/>
-            <a:ext cx="36576" cy="658368"/>
-          </a:xfrm>
-          <a:prstGeom prst="rect">
-            <a:avLst/>
-          </a:prstGeom>
-          <a:solidFill>
-            <a:srgbClr val="D9C089"/>
-          </a:solidFill>
-          <a:ln>
-            <a:noFill/>
-          </a:ln>
-        </p:spPr>
-        <p:style>
-          <a:lnRef idx="1">
-            <a:schemeClr val="accent1"/>
-          </a:lnRef>
-          <a:fillRef idx="3">
-            <a:schemeClr val="accent1"/>
-          </a:fillRef>
-          <a:effectRef idx="2">
-            <a:schemeClr val="accent1"/>
-          </a:effectRef>
-          <a:fontRef idx="minor">
-            <a:schemeClr val="lt1"/>
-          </a:fontRef>
-        </p:style>
-        <p:txBody>
-          <a:bodyPr rtlCol="0" anchor="ctr"/>
-          <a:lstStyle/>
-          <a:p>
-            <a:pPr algn="ctr"/>
-          </a:p>
-        </p:txBody>
-      </p:sp>
-      <p:sp>
-        <p:nvSpPr>
-          <p:cNvPr id="7" name="TextBox 6"/>
-          <p:cNvSpPr txBox="1"/>
-          <p:nvPr/>
-        </p:nvSpPr>
-        <p:spPr>
-          <a:xfrm>
-            <a:off x="813816" y="502920"/>
-            <a:ext cx="10634472" cy="685800"/>
-          </a:xfrm>
-          <a:prstGeom prst="rect">
-            <a:avLst/>
-          </a:prstGeom>
-          <a:noFill/>
-        </p:spPr>
-        <p:txBody>
-          <a:bodyPr wrap="square">
-            <a:spAutoFit/>
-          </a:bodyPr>
-          <a:lstStyle/>
-          <a:p>
-            <a:pPr algn="l"/>
-            <a:r>
-              <a:rPr sz="2400" b="1" i="0">
-                <a:solidFill>
-                  <a:srgbClr val="1F2C56"/>
-                </a:solidFill>
-                <a:latin typeface="Arial"/>
-              </a:rPr>
-              <a:t>4.3c Checkliste: Bestandskredit in der Krise – erste Schritte</a:t>
-            </a:r>
-          </a:p>
-        </p:txBody>
-      </p:sp>
-      <p:sp>
-        <p:nvSpPr>
-          <p:cNvPr id="8" name="TextBox 7"/>
-          <p:cNvSpPr txBox="1"/>
-          <p:nvPr/>
-        </p:nvSpPr>
-        <p:spPr>
-          <a:xfrm>
-            <a:off x="685800" y="1417320"/>
-            <a:ext cx="10817352" cy="4892040"/>
-          </a:xfrm>
-          <a:prstGeom prst="rect">
-            <a:avLst/>
-          </a:prstGeom>
-          <a:noFill/>
-        </p:spPr>
-        <p:txBody>
-          <a:bodyPr wrap="square" anchor="ctr">
-            <a:spAutoFit/>
-          </a:bodyPr>
-          <a:lstStyle/>
-          <a:p>
-            <a:pPr marL="190500" indent="-190500">
-              <a:spcBef>
-                <a:spcPts val="400"/>
-              </a:spcBef>
-              <a:spcAft>
-                <a:spcPts val="200"/>
-              </a:spcAft>
-            </a:pPr>
-            <a:r>
-              <a:rPr sz="1300">
-                <a:solidFill>
-                  <a:srgbClr val="3D5466"/>
-                </a:solidFill>
-                <a:latin typeface="Arial"/>
-              </a:rPr>
-              <a:t>▸  Die schwierigste Kreditentscheidung ist nicht die Neuvergabe, sondern: Was tue ich, wenn ein Bestandskunde in Schieflage gerät?</a:t>
-            </a:r>
-          </a:p>
-          <a:p>
-            <a:pPr marL="190500" indent="-190500">
-              <a:spcBef>
-                <a:spcPts val="400"/>
-              </a:spcBef>
-              <a:spcAft>
-                <a:spcPts val="200"/>
-              </a:spcAft>
-            </a:pPr>
-            <a:r>
-              <a:rPr sz="1300">
-                <a:solidFill>
-                  <a:srgbClr val="3D5466"/>
-                </a:solidFill>
-                <a:latin typeface="Arial"/>
-              </a:rPr>
-              <a:t>▸  Diese Situation ist emotional belastend (langjährige Kundenbeziehung) und rechtlich heikel. Erste Schritte:</a:t>
-            </a:r>
-          </a:p>
-          <a:p>
-            <a:pPr marL="177800" indent="-177800">
-              <a:spcBef>
-                <a:spcPts val="600"/>
-              </a:spcBef>
-              <a:spcAft>
-                <a:spcPts val="200"/>
-              </a:spcAft>
-            </a:pPr>
-            <a:r>
-              <a:rPr sz="1200" i="1">
-                <a:solidFill>
-                  <a:srgbClr val="3D5466"/>
-                </a:solidFill>
-                <a:latin typeface="Arial"/>
-              </a:rPr>
-              <a:t>→  Praxistipp: Wer früh eskaliert und dokumentiert, schützt sich selbst und gibt dem Kunden eine echte Chance. Wer zu lange alleine trägt, verliert beides.</a:t>
-            </a:r>
-          </a:p>
-        </p:txBody>
-      </p:sp>
-      <p:sp>
-        <p:nvSpPr>
-          <p:cNvPr id="9" name="Rectangle 8"/>
-          <p:cNvSpPr/>
-          <p:nvPr/>
-        </p:nvSpPr>
-        <p:spPr>
-          <a:xfrm>
-            <a:off x="0" y="6510528"/>
-            <a:ext cx="12188952" cy="347472"/>
-          </a:xfrm>
-          <a:prstGeom prst="rect">
-            <a:avLst/>
-          </a:prstGeom>
-          <a:solidFill>
-            <a:srgbClr val="0A1937"/>
-          </a:solidFill>
-          <a:ln>
-            <a:noFill/>
-          </a:ln>
-        </p:spPr>
-        <p:style>
-          <a:lnRef idx="1">
-            <a:schemeClr val="accent1"/>
-          </a:lnRef>
-          <a:fillRef idx="3">
-            <a:schemeClr val="accent1"/>
-          </a:fillRef>
-          <a:effectRef idx="2">
-            <a:schemeClr val="accent1"/>
-          </a:effectRef>
-          <a:fontRef idx="minor">
-            <a:schemeClr val="lt1"/>
-          </a:fontRef>
-        </p:style>
-        <p:txBody>
-          <a:bodyPr rtlCol="0" anchor="ctr"/>
-          <a:lstStyle/>
-          <a:p>
-            <a:pPr algn="ctr"/>
-          </a:p>
-        </p:txBody>
-      </p:sp>
-      <p:sp>
-        <p:nvSpPr>
-          <p:cNvPr id="10" name="TextBox 9"/>
-          <p:cNvSpPr txBox="1"/>
-          <p:nvPr/>
-        </p:nvSpPr>
-        <p:spPr>
-          <a:xfrm>
-            <a:off x="685800" y="6583680"/>
-            <a:ext cx="6490411" cy="256032"/>
-          </a:xfrm>
-          <a:prstGeom prst="rect">
-            <a:avLst/>
-          </a:prstGeom>
-          <a:noFill/>
-        </p:spPr>
-        <p:txBody>
-          <a:bodyPr wrap="none">
-            <a:spAutoFit/>
-          </a:bodyPr>
-          <a:lstStyle/>
-          <a:p>
-            <a:pPr algn="l"/>
-            <a:r>
-              <a:rPr sz="700">
-                <a:solidFill>
-                  <a:srgbClr val="A0B4D2"/>
-                </a:solidFill>
-                <a:latin typeface="Consolas"/>
-              </a:rPr>
-              <a:t>FKB Campus  ·  M21</a:t>
-            </a:r>
-          </a:p>
-        </p:txBody>
-      </p:sp>
-    </p:spTree>
-  </p:cSld>
-  <p:clrMapOvr>
-    <a:masterClrMapping/>
-  </p:clrMapOvr>
-</p:sld>
-</file>
-
-<file path=ppt/slides/slide16.xml><?xml version="1.0" encoding="utf-8"?>
-<p:sld xmlns:a="http://schemas.openxmlformats.org/drawingml/2006/main" xmlns:p="http://schemas.openxmlformats.org/presentationml/2006/main" xmlns:r="http://schemas.openxmlformats.org/officeDocument/2006/relationships">
-  <p:cSld>
-    <p:spTree>
-      <p:nvGrpSpPr>
-        <p:cNvPr id="1" name=""/>
-        <p:cNvGrpSpPr/>
-        <p:nvPr/>
-      </p:nvGrpSpPr>
-      <p:grpSpPr/>
-      <p:sp>
-        <p:nvSpPr>
-          <p:cNvPr id="2" name="Rectangle 1"/>
-          <p:cNvSpPr/>
-          <p:nvPr/>
-        </p:nvSpPr>
-        <p:spPr>
-          <a:xfrm>
-            <a:off x="0" y="0"/>
-            <a:ext cx="12188952" cy="6858000"/>
-          </a:xfrm>
-          <a:prstGeom prst="rect">
-            <a:avLst/>
-          </a:prstGeom>
-          <a:solidFill>
-            <a:srgbClr val="EDEDF3"/>
-          </a:solidFill>
-          <a:ln>
-            <a:noFill/>
-          </a:ln>
-        </p:spPr>
-        <p:style>
-          <a:lnRef idx="1">
-            <a:schemeClr val="accent1"/>
-          </a:lnRef>
-          <a:fillRef idx="3">
-            <a:schemeClr val="accent1"/>
-          </a:fillRef>
-          <a:effectRef idx="2">
-            <a:schemeClr val="accent1"/>
-          </a:effectRef>
-          <a:fontRef idx="minor">
-            <a:schemeClr val="lt1"/>
-          </a:fontRef>
-        </p:style>
-        <p:txBody>
-          <a:bodyPr rtlCol="0" anchor="ctr"/>
-          <a:lstStyle/>
-          <a:p>
-            <a:pPr algn="ctr"/>
-          </a:p>
-        </p:txBody>
-      </p:sp>
-      <p:sp>
-        <p:nvSpPr>
-          <p:cNvPr id="3" name="Rectangle 2"/>
-          <p:cNvSpPr/>
-          <p:nvPr/>
-        </p:nvSpPr>
-        <p:spPr>
-          <a:xfrm>
-            <a:off x="0" y="0"/>
-            <a:ext cx="12188952" cy="50292"/>
-          </a:xfrm>
-          <a:prstGeom prst="rect">
-            <a:avLst/>
-          </a:prstGeom>
-          <a:solidFill>
-            <a:srgbClr val="1F2C56"/>
-          </a:solidFill>
-          <a:ln>
-            <a:noFill/>
-          </a:ln>
-        </p:spPr>
-        <p:style>
-          <a:lnRef idx="1">
-            <a:schemeClr val="accent1"/>
-          </a:lnRef>
-          <a:fillRef idx="3">
-            <a:schemeClr val="accent1"/>
-          </a:fillRef>
-          <a:effectRef idx="2">
-            <a:schemeClr val="accent1"/>
-          </a:effectRef>
-          <a:fontRef idx="minor">
-            <a:schemeClr val="lt1"/>
-          </a:fontRef>
-        </p:style>
-        <p:txBody>
-          <a:bodyPr rtlCol="0" anchor="ctr"/>
-          <a:lstStyle/>
-          <a:p>
-            <a:pPr algn="ctr"/>
-          </a:p>
-        </p:txBody>
-      </p:sp>
-      <p:sp>
-        <p:nvSpPr>
-          <p:cNvPr id="4" name="TextBox 3"/>
-          <p:cNvSpPr txBox="1"/>
-          <p:nvPr/>
-        </p:nvSpPr>
-        <p:spPr>
-          <a:xfrm>
-            <a:off x="685800" y="109728"/>
-            <a:ext cx="10817352" cy="228600"/>
-          </a:xfrm>
-          <a:prstGeom prst="rect">
-            <a:avLst/>
-          </a:prstGeom>
-          <a:noFill/>
-        </p:spPr>
-        <p:txBody>
-          <a:bodyPr wrap="none">
-            <a:spAutoFit/>
-          </a:bodyPr>
-          <a:lstStyle/>
-          <a:p>
-            <a:pPr algn="l"/>
-            <a:r>
-              <a:rPr sz="750">
-                <a:solidFill>
-                  <a:srgbClr val="78808C"/>
-                </a:solidFill>
-                <a:latin typeface="Consolas"/>
-              </a:rPr>
-              <a:t>M21  ·  INHALT</a:t>
-            </a:r>
-          </a:p>
-        </p:txBody>
-      </p:sp>
-      <p:sp>
-        <p:nvSpPr>
-          <p:cNvPr id="5" name="Rectangle 4"/>
-          <p:cNvSpPr/>
-          <p:nvPr/>
-        </p:nvSpPr>
-        <p:spPr>
-          <a:xfrm>
-            <a:off x="0" y="1234440"/>
-            <a:ext cx="12188952" cy="12700"/>
-          </a:xfrm>
-          <a:prstGeom prst="rect">
-            <a:avLst/>
-          </a:prstGeom>
-          <a:solidFill>
-            <a:srgbClr val="D8DFE4"/>
-          </a:solidFill>
-          <a:ln>
-            <a:noFill/>
-          </a:ln>
-        </p:spPr>
-        <p:style>
-          <a:lnRef idx="1">
-            <a:schemeClr val="accent1"/>
-          </a:lnRef>
-          <a:fillRef idx="3">
-            <a:schemeClr val="accent1"/>
-          </a:fillRef>
-          <a:effectRef idx="2">
-            <a:schemeClr val="accent1"/>
-          </a:effectRef>
-          <a:fontRef idx="minor">
-            <a:schemeClr val="lt1"/>
-          </a:fontRef>
-        </p:style>
-        <p:txBody>
-          <a:bodyPr rtlCol="0" anchor="ctr"/>
-          <a:lstStyle/>
-          <a:p>
-            <a:pPr algn="ctr"/>
-          </a:p>
-        </p:txBody>
-      </p:sp>
-      <p:sp>
-        <p:nvSpPr>
-          <p:cNvPr id="6" name="Rectangle 5"/>
-          <p:cNvSpPr/>
-          <p:nvPr/>
-        </p:nvSpPr>
-        <p:spPr>
-          <a:xfrm>
-            <a:off x="685800" y="502920"/>
-            <a:ext cx="36576" cy="658368"/>
-          </a:xfrm>
-          <a:prstGeom prst="rect">
-            <a:avLst/>
-          </a:prstGeom>
-          <a:solidFill>
-            <a:srgbClr val="D9C089"/>
-          </a:solidFill>
-          <a:ln>
-            <a:noFill/>
-          </a:ln>
-        </p:spPr>
-        <p:style>
-          <a:lnRef idx="1">
-            <a:schemeClr val="accent1"/>
-          </a:lnRef>
-          <a:fillRef idx="3">
-            <a:schemeClr val="accent1"/>
-          </a:fillRef>
-          <a:effectRef idx="2">
-            <a:schemeClr val="accent1"/>
-          </a:effectRef>
-          <a:fontRef idx="minor">
-            <a:schemeClr val="lt1"/>
-          </a:fontRef>
-        </p:style>
-        <p:txBody>
-          <a:bodyPr rtlCol="0" anchor="ctr"/>
-          <a:lstStyle/>
-          <a:p>
-            <a:pPr algn="ctr"/>
-          </a:p>
-        </p:txBody>
-      </p:sp>
-      <p:sp>
-        <p:nvSpPr>
-          <p:cNvPr id="7" name="TextBox 6"/>
-          <p:cNvSpPr txBox="1"/>
-          <p:nvPr/>
-        </p:nvSpPr>
-        <p:spPr>
-          <a:xfrm>
-            <a:off x="813816" y="502920"/>
-            <a:ext cx="10634472" cy="685800"/>
-          </a:xfrm>
-          <a:prstGeom prst="rect">
-            <a:avLst/>
-          </a:prstGeom>
-          <a:noFill/>
-        </p:spPr>
-        <p:txBody>
-          <a:bodyPr wrap="square">
-            <a:spAutoFit/>
-          </a:bodyPr>
-          <a:lstStyle/>
-          <a:p>
-            <a:pPr algn="l"/>
-            <a:r>
-              <a:rPr sz="2400" b="1" i="0">
-                <a:solidFill>
-                  <a:srgbClr val="1F2C56"/>
-                </a:solidFill>
-                <a:latin typeface="Arial"/>
-              </a:rPr>
-              <a:t>Praxisfall: Metallbau Schnell GmbH (Heilbronn, fiktiv)</a:t>
-            </a:r>
-          </a:p>
-        </p:txBody>
-      </p:sp>
-      <p:sp>
-        <p:nvSpPr>
-          <p:cNvPr id="8" name="TextBox 7"/>
-          <p:cNvSpPr txBox="1"/>
-          <p:nvPr/>
-        </p:nvSpPr>
-        <p:spPr>
-          <a:xfrm>
-            <a:off x="685800" y="1417320"/>
-            <a:ext cx="10817352" cy="4892040"/>
-          </a:xfrm>
-          <a:prstGeom prst="rect">
-            <a:avLst/>
-          </a:prstGeom>
-          <a:noFill/>
-        </p:spPr>
-        <p:txBody>
-          <a:bodyPr wrap="square">
-            <a:spAutoFit/>
-          </a:bodyPr>
-          <a:lstStyle/>
-          <a:p>
-            <a:pPr>
-              <a:spcBef>
-                <a:spcPts val="1000"/>
-              </a:spcBef>
-              <a:spcAft>
-                <a:spcPts val="200"/>
-              </a:spcAft>
-            </a:pPr>
-            <a:r>
-              <a:rPr sz="800" b="1">
-                <a:solidFill>
-                  <a:srgbClr val="78808C"/>
-                </a:solidFill>
-                <a:latin typeface="Consolas"/>
-              </a:rPr>
-              <a:t>4.4.1 UNTERNEHMENSPROFIL</a:t>
-            </a:r>
-          </a:p>
-          <a:p>
-            <a:pPr marL="190500" indent="-190500">
-              <a:spcBef>
-                <a:spcPts val="400"/>
-              </a:spcBef>
-              <a:spcAft>
-                <a:spcPts val="200"/>
-              </a:spcAft>
-            </a:pPr>
-            <a:r>
-              <a:rPr sz="1300">
-                <a:solidFill>
-                  <a:srgbClr val="3D5466"/>
-                </a:solidFill>
-                <a:latin typeface="Arial"/>
-              </a:rPr>
-              <a:t>▸  Kreditantrag:</a:t>
-            </a:r>
-          </a:p>
-          <a:p>
-            <a:pPr marL="190500" indent="-190500">
-              <a:spcBef>
-                <a:spcPts val="400"/>
-              </a:spcBef>
-              <a:spcAft>
-                <a:spcPts val="200"/>
-              </a:spcAft>
-            </a:pPr>
-            <a:r>
-              <a:rPr sz="1300">
-                <a:solidFill>
-                  <a:srgbClr val="3D5466"/>
-                </a:solidFill>
-                <a:latin typeface="Arial"/>
-              </a:rPr>
-              <a:t>▸  Art: Investitionskredit</a:t>
-            </a:r>
-          </a:p>
-          <a:p>
-            <a:pPr marL="190500" indent="-190500">
-              <a:spcBef>
-                <a:spcPts val="400"/>
-              </a:spcBef>
-              <a:spcAft>
-                <a:spcPts val="200"/>
-              </a:spcAft>
-            </a:pPr>
-            <a:r>
-              <a:rPr sz="1300">
-                <a:solidFill>
-                  <a:srgbClr val="3D5466"/>
-                </a:solidFill>
-                <a:latin typeface="Arial"/>
-              </a:rPr>
-              <a:t>▸  Betrag: 420.000 €</a:t>
-            </a:r>
-          </a:p>
-          <a:p>
-            <a:pPr marL="190500" indent="-190500">
-              <a:spcBef>
-                <a:spcPts val="400"/>
-              </a:spcBef>
-              <a:spcAft>
-                <a:spcPts val="200"/>
-              </a:spcAft>
-            </a:pPr>
-            <a:r>
-              <a:rPr sz="1300">
-                <a:solidFill>
-                  <a:srgbClr val="3D5466"/>
-                </a:solidFill>
-                <a:latin typeface="Arial"/>
-              </a:rPr>
-              <a:t>▸  Verwendung: 5-Achs-CNC-Drehmaschine Heidenhain TNC 640 (280.000 €) + Hallenerweiterung (140.000 €)</a:t>
-            </a:r>
-          </a:p>
-          <a:p>
-            <a:pPr marL="190500" indent="-190500">
-              <a:spcBef>
-                <a:spcPts val="400"/>
-              </a:spcBef>
-              <a:spcAft>
-                <a:spcPts val="200"/>
-              </a:spcAft>
-            </a:pPr>
-            <a:r>
-              <a:rPr sz="1300">
-                <a:solidFill>
-                  <a:srgbClr val="3D5466"/>
-                </a:solidFill>
-                <a:latin typeface="Arial"/>
-              </a:rPr>
-              <a:t>▸  Laufzeit: 7 Jahre</a:t>
-            </a:r>
-          </a:p>
-          <a:p>
-            <a:pPr>
-              <a:spcBef>
-                <a:spcPts val="1000"/>
-              </a:spcBef>
-              <a:spcAft>
-                <a:spcPts val="200"/>
-              </a:spcAft>
-            </a:pPr>
-            <a:r>
-              <a:rPr sz="800" b="1">
-                <a:solidFill>
-                  <a:srgbClr val="78808C"/>
-                </a:solidFill>
-                <a:latin typeface="Consolas"/>
-              </a:rPr>
-              <a:t>4.4.2 FINANZLAGE: 3-JAHRESVERGLEICH</a:t>
-            </a:r>
-          </a:p>
-          <a:p>
-            <a:pPr marL="190500" indent="-190500">
-              <a:spcBef>
-                <a:spcPts val="400"/>
-              </a:spcBef>
-              <a:spcAft>
-                <a:spcPts val="200"/>
-              </a:spcAft>
-            </a:pPr>
-            <a:r>
-              <a:rPr sz="1300">
-                <a:solidFill>
-                  <a:srgbClr val="3D5466"/>
-                </a:solidFill>
-                <a:latin typeface="Arial"/>
-              </a:rPr>
-              <a:t>▸  Bilanzauszüge (in T€):</a:t>
-            </a:r>
-          </a:p>
-          <a:p>
-            <a:pPr marL="190500" indent="-190500">
-              <a:spcBef>
-                <a:spcPts val="400"/>
-              </a:spcBef>
-              <a:spcAft>
-                <a:spcPts val="200"/>
-              </a:spcAft>
-            </a:pPr>
-            <a:r>
-              <a:rPr sz="1300">
-                <a:solidFill>
-                  <a:srgbClr val="3D5466"/>
-                </a:solidFill>
-                <a:latin typeface="Arial"/>
-              </a:rPr>
-              <a:t>▸  Gewinn- und Verlustrechnung (in T€):</a:t>
-            </a:r>
-          </a:p>
-          <a:p>
-            <a:pPr marL="190500" indent="-190500">
-              <a:spcBef>
-                <a:spcPts val="400"/>
-              </a:spcBef>
-              <a:spcAft>
-                <a:spcPts val="200"/>
-              </a:spcAft>
-            </a:pPr>
-            <a:r>
-              <a:rPr sz="1300">
-                <a:solidFill>
-                  <a:srgbClr val="3D5466"/>
-                </a:solidFill>
-                <a:latin typeface="Arial"/>
-              </a:rPr>
-              <a:t>▸  Kennzahlenanalyse:</a:t>
-            </a:r>
-          </a:p>
-          <a:p>
-            <a:pPr>
-              <a:spcBef>
-                <a:spcPts val="1000"/>
-              </a:spcBef>
-              <a:spcAft>
-                <a:spcPts val="200"/>
-              </a:spcAft>
-            </a:pPr>
-            <a:r>
-              <a:rPr sz="800" b="1">
-                <a:solidFill>
-                  <a:srgbClr val="78808C"/>
-                </a:solidFill>
-                <a:latin typeface="Consolas"/>
-              </a:rPr>
-              <a:t>4.4.3 8-FELDER-ANALYSE: METALLBAU SCHNELL GMBH</a:t>
-            </a:r>
-          </a:p>
-          <a:p>
-            <a:pPr marL="190500" indent="-190500">
-              <a:spcBef>
-                <a:spcPts val="400"/>
-              </a:spcBef>
-              <a:spcAft>
-                <a:spcPts val="200"/>
-              </a:spcAft>
-            </a:pPr>
-            <a:r>
-              <a:rPr sz="1300">
-                <a:solidFill>
-                  <a:srgbClr val="3D5466"/>
-                </a:solidFill>
-                <a:latin typeface="Arial"/>
-              </a:rPr>
-              <a:t>▸  Feld 1 – Zweck &amp; Verwendung | Bewertung: 5/5 POSITIV</a:t>
-            </a:r>
-          </a:p>
-        </p:txBody>
-      </p:sp>
-      <p:sp>
-        <p:nvSpPr>
-          <p:cNvPr id="9" name="Rectangle 8"/>
-          <p:cNvSpPr/>
-          <p:nvPr/>
-        </p:nvSpPr>
-        <p:spPr>
-          <a:xfrm>
-            <a:off x="0" y="6510528"/>
-            <a:ext cx="12188952" cy="347472"/>
-          </a:xfrm>
-          <a:prstGeom prst="rect">
-            <a:avLst/>
-          </a:prstGeom>
-          <a:solidFill>
-            <a:srgbClr val="0A1937"/>
-          </a:solidFill>
-          <a:ln>
-            <a:noFill/>
-          </a:ln>
-        </p:spPr>
-        <p:style>
-          <a:lnRef idx="1">
-            <a:schemeClr val="accent1"/>
-          </a:lnRef>
-          <a:fillRef idx="3">
-            <a:schemeClr val="accent1"/>
-          </a:fillRef>
-          <a:effectRef idx="2">
-            <a:schemeClr val="accent1"/>
-          </a:effectRef>
-          <a:fontRef idx="minor">
-            <a:schemeClr val="lt1"/>
-          </a:fontRef>
-        </p:style>
-        <p:txBody>
-          <a:bodyPr rtlCol="0" anchor="ctr"/>
-          <a:lstStyle/>
-          <a:p>
-            <a:pPr algn="ctr"/>
-          </a:p>
-        </p:txBody>
-      </p:sp>
-      <p:sp>
-        <p:nvSpPr>
-          <p:cNvPr id="10" name="TextBox 9"/>
-          <p:cNvSpPr txBox="1"/>
-          <p:nvPr/>
-        </p:nvSpPr>
-        <p:spPr>
-          <a:xfrm>
-            <a:off x="685800" y="6583680"/>
-            <a:ext cx="6490411" cy="256032"/>
-          </a:xfrm>
-          <a:prstGeom prst="rect">
-            <a:avLst/>
-          </a:prstGeom>
-          <a:noFill/>
-        </p:spPr>
-        <p:txBody>
-          <a:bodyPr wrap="none">
-            <a:spAutoFit/>
-          </a:bodyPr>
-          <a:lstStyle/>
-          <a:p>
-            <a:pPr algn="l"/>
-            <a:r>
-              <a:rPr sz="700">
-                <a:solidFill>
-                  <a:srgbClr val="A0B4D2"/>
-                </a:solidFill>
-                <a:latin typeface="Consolas"/>
-              </a:rPr>
-              <a:t>FKB Campus  ·  M21</a:t>
-            </a:r>
-          </a:p>
-        </p:txBody>
-      </p:sp>
-    </p:spTree>
-  </p:cSld>
-  <p:clrMapOvr>
-    <a:masterClrMapping/>
-  </p:clrMapOvr>
-</p:sld>
-</file>
-
-<file path=ppt/slides/slide17.xml><?xml version="1.0" encoding="utf-8"?>
-<p:sld xmlns:a="http://schemas.openxmlformats.org/drawingml/2006/main" xmlns:p="http://schemas.openxmlformats.org/presentationml/2006/main" xmlns:r="http://schemas.openxmlformats.org/officeDocument/2006/relationships">
-  <p:cSld>
-    <p:spTree>
-      <p:nvGrpSpPr>
-        <p:cNvPr id="1" name=""/>
-        <p:cNvGrpSpPr/>
-        <p:nvPr/>
-      </p:nvGrpSpPr>
-      <p:grpSpPr/>
-      <p:sp>
-        <p:nvSpPr>
-          <p:cNvPr id="2" name="Rectangle 1"/>
-          <p:cNvSpPr/>
-          <p:nvPr/>
-        </p:nvSpPr>
-        <p:spPr>
-          <a:xfrm>
-            <a:off x="0" y="0"/>
-            <a:ext cx="12188952" cy="6858000"/>
-          </a:xfrm>
-          <a:prstGeom prst="rect">
-            <a:avLst/>
-          </a:prstGeom>
-          <a:solidFill>
-            <a:srgbClr val="FFFFFF"/>
-          </a:solidFill>
-          <a:ln>
-            <a:noFill/>
-          </a:ln>
-        </p:spPr>
-        <p:style>
-          <a:lnRef idx="1">
-            <a:schemeClr val="accent1"/>
-          </a:lnRef>
-          <a:fillRef idx="3">
-            <a:schemeClr val="accent1"/>
-          </a:fillRef>
-          <a:effectRef idx="2">
-            <a:schemeClr val="accent1"/>
-          </a:effectRef>
-          <a:fontRef idx="minor">
-            <a:schemeClr val="lt1"/>
-          </a:fontRef>
-        </p:style>
-        <p:txBody>
-          <a:bodyPr rtlCol="0" anchor="ctr"/>
-          <a:lstStyle/>
-          <a:p>
-            <a:pPr algn="ctr"/>
-          </a:p>
-        </p:txBody>
-      </p:sp>
-      <p:sp>
-        <p:nvSpPr>
-          <p:cNvPr id="3" name="Rectangle 2"/>
-          <p:cNvSpPr/>
-          <p:nvPr/>
-        </p:nvSpPr>
-        <p:spPr>
-          <a:xfrm>
-            <a:off x="0" y="0"/>
-            <a:ext cx="12188952" cy="50292"/>
-          </a:xfrm>
-          <a:prstGeom prst="rect">
-            <a:avLst/>
-          </a:prstGeom>
-          <a:solidFill>
-            <a:srgbClr val="1F2C56"/>
-          </a:solidFill>
-          <a:ln>
-            <a:noFill/>
-          </a:ln>
-        </p:spPr>
-        <p:style>
-          <a:lnRef idx="1">
-            <a:schemeClr val="accent1"/>
-          </a:lnRef>
-          <a:fillRef idx="3">
-            <a:schemeClr val="accent1"/>
-          </a:fillRef>
-          <a:effectRef idx="2">
-            <a:schemeClr val="accent1"/>
-          </a:effectRef>
-          <a:fontRef idx="minor">
-            <a:schemeClr val="lt1"/>
-          </a:fontRef>
-        </p:style>
-        <p:txBody>
-          <a:bodyPr rtlCol="0" anchor="ctr"/>
-          <a:lstStyle/>
-          <a:p>
-            <a:pPr algn="ctr"/>
-          </a:p>
-        </p:txBody>
-      </p:sp>
-      <p:sp>
-        <p:nvSpPr>
-          <p:cNvPr id="4" name="TextBox 3"/>
-          <p:cNvSpPr txBox="1"/>
-          <p:nvPr/>
-        </p:nvSpPr>
-        <p:spPr>
-          <a:xfrm>
-            <a:off x="685800" y="109728"/>
-            <a:ext cx="10817352" cy="228600"/>
-          </a:xfrm>
-          <a:prstGeom prst="rect">
-            <a:avLst/>
-          </a:prstGeom>
-          <a:noFill/>
-        </p:spPr>
-        <p:txBody>
-          <a:bodyPr wrap="none">
-            <a:spAutoFit/>
-          </a:bodyPr>
-          <a:lstStyle/>
-          <a:p>
-            <a:pPr algn="l"/>
-            <a:r>
-              <a:rPr sz="750">
-                <a:solidFill>
-                  <a:srgbClr val="78808C"/>
-                </a:solidFill>
-                <a:latin typeface="Consolas"/>
-              </a:rPr>
-              <a:t>M21  ·  ÜBERSICHT</a:t>
-            </a:r>
-          </a:p>
-        </p:txBody>
-      </p:sp>
-      <p:sp>
-        <p:nvSpPr>
-          <p:cNvPr id="5" name="TextBox 4"/>
-          <p:cNvSpPr txBox="1"/>
-          <p:nvPr/>
-        </p:nvSpPr>
-        <p:spPr>
-          <a:xfrm>
-            <a:off x="685800" y="502920"/>
-            <a:ext cx="10817352" cy="594360"/>
-          </a:xfrm>
-          <a:prstGeom prst="rect">
-            <a:avLst/>
-          </a:prstGeom>
-          <a:noFill/>
-        </p:spPr>
-        <p:txBody>
-          <a:bodyPr wrap="square">
-            <a:spAutoFit/>
-          </a:bodyPr>
-          <a:lstStyle/>
-          <a:p>
-            <a:pPr algn="l"/>
-            <a:r>
-              <a:rPr sz="2000" b="1" i="0">
-                <a:solidFill>
-                  <a:srgbClr val="1F2C56"/>
-                </a:solidFill>
-                <a:latin typeface="Arial"/>
-              </a:rPr>
-              <a:t>Praxisfall: Metallbau Schnell GmbH (Heilbronn, fiktiv)</a:t>
-            </a:r>
-          </a:p>
-        </p:txBody>
-      </p:sp>
-      <p:sp>
-        <p:nvSpPr>
-          <p:cNvPr id="6" name="Rectangle 5"/>
-          <p:cNvSpPr/>
-          <p:nvPr/>
-        </p:nvSpPr>
-        <p:spPr>
-          <a:xfrm>
-            <a:off x="685800" y="1143000"/>
-            <a:ext cx="10817352" cy="25400"/>
-          </a:xfrm>
-          <a:prstGeom prst="rect">
-            <a:avLst/>
-          </a:prstGeom>
-          <a:solidFill>
-            <a:srgbClr val="D9C089"/>
-          </a:solidFill>
-          <a:ln>
-            <a:noFill/>
-          </a:ln>
-        </p:spPr>
-        <p:style>
-          <a:lnRef idx="1">
-            <a:schemeClr val="accent1"/>
-          </a:lnRef>
-          <a:fillRef idx="3">
-            <a:schemeClr val="accent1"/>
-          </a:fillRef>
-          <a:effectRef idx="2">
-            <a:schemeClr val="accent1"/>
-          </a:effectRef>
-          <a:fontRef idx="minor">
-            <a:schemeClr val="lt1"/>
-          </a:fontRef>
-        </p:style>
-        <p:txBody>
-          <a:bodyPr rtlCol="0" anchor="ctr"/>
-          <a:lstStyle/>
-          <a:p>
-            <a:pPr algn="ctr"/>
-          </a:p>
-        </p:txBody>
-      </p:sp>
       <p:graphicFrame>
         <p:nvGraphicFramePr>
           <p:cNvPr id="7" name="Table 6"/>
@@ -8536,7 +6378,7 @@
         </p:nvGraphicFramePr>
         <p:xfrm>
           <a:off x="685800" y="1417320"/>
-          <a:ext cx="10817352" cy="3456432"/>
+          <a:ext cx="10817352" cy="1536192"/>
         </p:xfrm>
         <a:graphic>
           <a:graphicData uri="http://schemas.openxmlformats.org/drawingml/2006/table">
@@ -8545,11 +6387,9 @@
                 <a:tableStyleId>{5C22544A-7EE6-4342-B048-85BDC9FD1C3A}</a:tableStyleId>
               </a:tblPr>
               <a:tblGrid>
-                <a:gridCol w="2163470"/>
-                <a:gridCol w="2163470"/>
-                <a:gridCol w="2163470"/>
-                <a:gridCol w="2163470"/>
-                <a:gridCol w="2163472"/>
+                <a:gridCol w="3605784"/>
+                <a:gridCol w="3605784"/>
+                <a:gridCol w="3605784"/>
               </a:tblGrid>
               <a:tr h="384048">
                 <a:tc>
@@ -8564,7 +6404,7 @@
                           </a:solidFill>
                           <a:latin typeface="Arial"/>
                         </a:rPr>
-                        <a:t>Position</a:t>
+                        <a:t>Feld</a:t>
                       </a:r>
                     </a:p>
                   </a:txBody>
@@ -8586,7 +6426,7 @@
                           </a:solidFill>
                           <a:latin typeface="Arial"/>
                         </a:rPr>
-                        <a:t>2022</a:t>
+                        <a:t>Bewertung 1–5</a:t>
                       </a:r>
                     </a:p>
                   </a:txBody>
@@ -8608,51 +6448,7 @@
                           </a:solidFill>
                           <a:latin typeface="Arial"/>
                         </a:rPr>
-                        <a:t>2023</a:t>
-                      </a:r>
-                    </a:p>
-                  </a:txBody>
-                  <a:tcPr>
-                    <a:solidFill>
-                      <a:srgbClr val="1F2C56"/>
-                    </a:solidFill>
-                  </a:tcPr>
-                </a:tc>
-                <a:tc>
-                  <a:txBody>
-                    <a:bodyPr/>
-                    <a:lstStyle/>
-                    <a:p>
-                      <a:r>
-                        <a:rPr sz="1100" b="1">
-                          <a:solidFill>
-                            <a:srgbClr val="FFFFFF"/>
-                          </a:solidFill>
-                          <a:latin typeface="Arial"/>
-                        </a:rPr>
-                        <a:t>2024</a:t>
-                      </a:r>
-                    </a:p>
-                  </a:txBody>
-                  <a:tcPr>
-                    <a:solidFill>
-                      <a:srgbClr val="1F2C56"/>
-                    </a:solidFill>
-                  </a:tcPr>
-                </a:tc>
-                <a:tc>
-                  <a:txBody>
-                    <a:bodyPr/>
-                    <a:lstStyle/>
-                    <a:p>
-                      <a:r>
-                        <a:rPr sz="1100" b="1">
-                          <a:solidFill>
-                            <a:srgbClr val="FFFFFF"/>
-                          </a:solidFill>
-                          <a:latin typeface="Arial"/>
-                        </a:rPr>
-                        <a:t>Trend</a:t>
+                        <a:t>Hinweis</a:t>
                       </a:r>
                     </a:p>
                   </a:txBody>
@@ -8676,7 +6472,7 @@
                           </a:solidFill>
                           <a:latin typeface="Arial"/>
                         </a:rPr>
-                        <a:t>Umsatz</a:t>
+                        <a:t>Rückzahlungsquelle</a:t>
                       </a:r>
                     </a:p>
                   </a:txBody>
@@ -8694,7 +6490,7 @@
                           </a:solidFill>
                           <a:latin typeface="Arial"/>
                         </a:rPr>
-                        <a:t>4.200</a:t>
+                        <a:t>solide</a:t>
                       </a:r>
                     </a:p>
                   </a:txBody>
@@ -8712,43 +6508,7 @@
                           </a:solidFill>
                           <a:latin typeface="Arial"/>
                         </a:rPr>
-                        <a:t>4.380</a:t>
-                      </a:r>
-                    </a:p>
-                  </a:txBody>
-                  <a:tcPr/>
-                </a:tc>
-                <a:tc>
-                  <a:txBody>
-                    <a:bodyPr/>
-                    <a:lstStyle/>
-                    <a:p>
-                      <a:r>
-                        <a:rPr sz="1050">
-                          <a:solidFill>
-                            <a:srgbClr val="3D5466"/>
-                          </a:solidFill>
-                          <a:latin typeface="Arial"/>
-                        </a:rPr>
-                        <a:t>4.510</a:t>
-                      </a:r>
-                    </a:p>
-                  </a:txBody>
-                  <a:tcPr/>
-                </a:tc>
-                <a:tc>
-                  <a:txBody>
-                    <a:bodyPr/>
-                    <a:lstStyle/>
-                    <a:p>
-                      <a:r>
-                        <a:rPr sz="1050">
-                          <a:solidFill>
-                            <a:srgbClr val="3D5466"/>
-                          </a:solidFill>
-                          <a:latin typeface="Arial"/>
-                        </a:rPr>
-                        <a:t>▲</a:t>
+                        <a:t>Cashflow trägt</a:t>
                       </a:r>
                     </a:p>
                   </a:txBody>
@@ -8768,7 +6528,7 @@
                           </a:solidFill>
                           <a:latin typeface="Arial"/>
                         </a:rPr>
-                        <a:t>Materialkosten</a:t>
+                        <a:t>Kapitalstruktur</a:t>
                       </a:r>
                     </a:p>
                   </a:txBody>
@@ -8786,7 +6546,7 @@
                           </a:solidFill>
                           <a:latin typeface="Arial"/>
                         </a:rPr>
-                        <a:t>−1.200</a:t>
+                        <a:t>mittel</a:t>
                       </a:r>
                     </a:p>
                   </a:txBody>
@@ -8804,43 +6564,7 @@
                           </a:solidFill>
                           <a:latin typeface="Arial"/>
                         </a:rPr>
-                        <a:t>−1.280</a:t>
-                      </a:r>
-                    </a:p>
-                  </a:txBody>
-                  <a:tcPr/>
-                </a:tc>
-                <a:tc>
-                  <a:txBody>
-                    <a:bodyPr/>
-                    <a:lstStyle/>
-                    <a:p>
-                      <a:r>
-                        <a:rPr sz="1050">
-                          <a:solidFill>
-                            <a:srgbClr val="3D5466"/>
-                          </a:solidFill>
-                          <a:latin typeface="Arial"/>
-                        </a:rPr>
-                        <a:t>−1.320</a:t>
-                      </a:r>
-                    </a:p>
-                  </a:txBody>
-                  <a:tcPr/>
-                </a:tc>
-                <a:tc>
-                  <a:txBody>
-                    <a:bodyPr/>
-                    <a:lstStyle/>
-                    <a:p>
-                      <a:r>
-                        <a:rPr sz="1050">
-                          <a:solidFill>
-                            <a:srgbClr val="3D5466"/>
-                          </a:solidFill>
-                          <a:latin typeface="Arial"/>
-                        </a:rPr>
-                        <a:t>▲</a:t>
+                        <a:t>EK ausbaufähig</a:t>
                       </a:r>
                     </a:p>
                   </a:txBody>
@@ -8860,7 +6584,7 @@
                           </a:solidFill>
                           <a:latin typeface="Arial"/>
                         </a:rPr>
-                        <a:t>Personalkosten</a:t>
+                        <a:t>Gesamtscore</a:t>
                       </a:r>
                     </a:p>
                   </a:txBody>
@@ -8878,7 +6602,7 @@
                           </a:solidFill>
                           <a:latin typeface="Arial"/>
                         </a:rPr>
-                        <a:t>−1.850</a:t>
+                        <a:t>3,30</a:t>
                       </a:r>
                     </a:p>
                   </a:txBody>
@@ -8896,503 +6620,7 @@
                           </a:solidFill>
                           <a:latin typeface="Arial"/>
                         </a:rPr>
-                        <a:t>−1.920</a:t>
-                      </a:r>
-                    </a:p>
-                  </a:txBody>
-                  <a:tcPr/>
-                </a:tc>
-                <a:tc>
-                  <a:txBody>
-                    <a:bodyPr/>
-                    <a:lstStyle/>
-                    <a:p>
-                      <a:r>
-                        <a:rPr sz="1050">
-                          <a:solidFill>
-                            <a:srgbClr val="3D5466"/>
-                          </a:solidFill>
-                          <a:latin typeface="Arial"/>
-                        </a:rPr>
-                        <a:t>−2.010</a:t>
-                      </a:r>
-                    </a:p>
-                  </a:txBody>
-                  <a:tcPr/>
-                </a:tc>
-                <a:tc>
-                  <a:txBody>
-                    <a:bodyPr/>
-                    <a:lstStyle/>
-                    <a:p>
-                      <a:r>
-                        <a:rPr sz="1050">
-                          <a:solidFill>
-                            <a:srgbClr val="3D5466"/>
-                          </a:solidFill>
-                          <a:latin typeface="Arial"/>
-                        </a:rPr>
-                        <a:t>▲▲</a:t>
-                      </a:r>
-                    </a:p>
-                  </a:txBody>
-                  <a:tcPr/>
-                </a:tc>
-              </a:tr>
-              <a:tr h="384048">
-                <a:tc>
-                  <a:txBody>
-                    <a:bodyPr/>
-                    <a:lstStyle/>
-                    <a:p>
-                      <a:r>
-                        <a:rPr sz="1050">
-                          <a:solidFill>
-                            <a:srgbClr val="3D5466"/>
-                          </a:solidFill>
-                          <a:latin typeface="Arial"/>
-                        </a:rPr>
-                        <a:t>Abschreibungen</a:t>
-                      </a:r>
-                    </a:p>
-                  </a:txBody>
-                  <a:tcPr/>
-                </a:tc>
-                <a:tc>
-                  <a:txBody>
-                    <a:bodyPr/>
-                    <a:lstStyle/>
-                    <a:p>
-                      <a:r>
-                        <a:rPr sz="1050">
-                          <a:solidFill>
-                            <a:srgbClr val="3D5466"/>
-                          </a:solidFill>
-                          <a:latin typeface="Arial"/>
-                        </a:rPr>
-                        <a:t>−110</a:t>
-                      </a:r>
-                    </a:p>
-                  </a:txBody>
-                  <a:tcPr/>
-                </a:tc>
-                <a:tc>
-                  <a:txBody>
-                    <a:bodyPr/>
-                    <a:lstStyle/>
-                    <a:p>
-                      <a:r>
-                        <a:rPr sz="1050">
-                          <a:solidFill>
-                            <a:srgbClr val="3D5466"/>
-                          </a:solidFill>
-                          <a:latin typeface="Arial"/>
-                        </a:rPr>
-                        <a:t>−110</a:t>
-                      </a:r>
-                    </a:p>
-                  </a:txBody>
-                  <a:tcPr/>
-                </a:tc>
-                <a:tc>
-                  <a:txBody>
-                    <a:bodyPr/>
-                    <a:lstStyle/>
-                    <a:p>
-                      <a:r>
-                        <a:rPr sz="1050">
-                          <a:solidFill>
-                            <a:srgbClr val="3D5466"/>
-                          </a:solidFill>
-                          <a:latin typeface="Arial"/>
-                        </a:rPr>
-                        <a:t>−110</a:t>
-                      </a:r>
-                    </a:p>
-                  </a:txBody>
-                  <a:tcPr/>
-                </a:tc>
-                <a:tc>
-                  <a:txBody>
-                    <a:bodyPr/>
-                    <a:lstStyle/>
-                    <a:p>
-                      <a:r>
-                        <a:rPr sz="1050">
-                          <a:solidFill>
-                            <a:srgbClr val="3D5466"/>
-                          </a:solidFill>
-                          <a:latin typeface="Arial"/>
-                        </a:rPr>
-                        <a:t>→</a:t>
-                      </a:r>
-                    </a:p>
-                  </a:txBody>
-                  <a:tcPr/>
-                </a:tc>
-              </a:tr>
-              <a:tr h="384048">
-                <a:tc>
-                  <a:txBody>
-                    <a:bodyPr/>
-                    <a:lstStyle/>
-                    <a:p>
-                      <a:r>
-                        <a:rPr sz="1050">
-                          <a:solidFill>
-                            <a:srgbClr val="3D5466"/>
-                          </a:solidFill>
-                          <a:latin typeface="Arial"/>
-                        </a:rPr>
-                        <a:t>Sonstige Kosten</a:t>
-                      </a:r>
-                    </a:p>
-                  </a:txBody>
-                  <a:tcPr/>
-                </a:tc>
-                <a:tc>
-                  <a:txBody>
-                    <a:bodyPr/>
-                    <a:lstStyle/>
-                    <a:p>
-                      <a:r>
-                        <a:rPr sz="1050">
-                          <a:solidFill>
-                            <a:srgbClr val="3D5466"/>
-                          </a:solidFill>
-                          <a:latin typeface="Arial"/>
-                        </a:rPr>
-                        <a:t>−405</a:t>
-                      </a:r>
-                    </a:p>
-                  </a:txBody>
-                  <a:tcPr/>
-                </a:tc>
-                <a:tc>
-                  <a:txBody>
-                    <a:bodyPr/>
-                    <a:lstStyle/>
-                    <a:p>
-                      <a:r>
-                        <a:rPr sz="1050">
-                          <a:solidFill>
-                            <a:srgbClr val="3D5466"/>
-                          </a:solidFill>
-                          <a:latin typeface="Arial"/>
-                        </a:rPr>
-                        <a:t>−435</a:t>
-                      </a:r>
-                    </a:p>
-                  </a:txBody>
-                  <a:tcPr/>
-                </a:tc>
-                <a:tc>
-                  <a:txBody>
-                    <a:bodyPr/>
-                    <a:lstStyle/>
-                    <a:p>
-                      <a:r>
-                        <a:rPr sz="1050">
-                          <a:solidFill>
-                            <a:srgbClr val="3D5466"/>
-                          </a:solidFill>
-                          <a:latin typeface="Arial"/>
-                        </a:rPr>
-                        <a:t>−455</a:t>
-                      </a:r>
-                    </a:p>
-                  </a:txBody>
-                  <a:tcPr/>
-                </a:tc>
-                <a:tc>
-                  <a:txBody>
-                    <a:bodyPr/>
-                    <a:lstStyle/>
-                    <a:p>
-                      <a:r>
-                        <a:rPr sz="1050">
-                          <a:solidFill>
-                            <a:srgbClr val="3D5466"/>
-                          </a:solidFill>
-                          <a:latin typeface="Arial"/>
-                        </a:rPr>
-                        <a:t>▲</a:t>
-                      </a:r>
-                    </a:p>
-                  </a:txBody>
-                  <a:tcPr/>
-                </a:tc>
-              </a:tr>
-              <a:tr h="384048">
-                <a:tc>
-                  <a:txBody>
-                    <a:bodyPr/>
-                    <a:lstStyle/>
-                    <a:p>
-                      <a:r>
-                        <a:rPr sz="1050">
-                          <a:solidFill>
-                            <a:srgbClr val="3D5466"/>
-                          </a:solidFill>
-                          <a:latin typeface="Arial"/>
-                        </a:rPr>
-                        <a:t>EBIT</a:t>
-                      </a:r>
-                    </a:p>
-                  </a:txBody>
-                  <a:tcPr/>
-                </a:tc>
-                <a:tc>
-                  <a:txBody>
-                    <a:bodyPr/>
-                    <a:lstStyle/>
-                    <a:p>
-                      <a:r>
-                        <a:rPr sz="1050">
-                          <a:solidFill>
-                            <a:srgbClr val="3D5466"/>
-                          </a:solidFill>
-                          <a:latin typeface="Arial"/>
-                        </a:rPr>
-                        <a:t>375</a:t>
-                      </a:r>
-                    </a:p>
-                  </a:txBody>
-                  <a:tcPr/>
-                </a:tc>
-                <a:tc>
-                  <a:txBody>
-                    <a:bodyPr/>
-                    <a:lstStyle/>
-                    <a:p>
-                      <a:r>
-                        <a:rPr sz="1050">
-                          <a:solidFill>
-                            <a:srgbClr val="3D5466"/>
-                          </a:solidFill>
-                          <a:latin typeface="Arial"/>
-                        </a:rPr>
-                        <a:t>321</a:t>
-                      </a:r>
-                    </a:p>
-                  </a:txBody>
-                  <a:tcPr/>
-                </a:tc>
-                <a:tc>
-                  <a:txBody>
-                    <a:bodyPr/>
-                    <a:lstStyle/>
-                    <a:p>
-                      <a:r>
-                        <a:rPr sz="1050">
-                          <a:solidFill>
-                            <a:srgbClr val="3D5466"/>
-                          </a:solidFill>
-                          <a:latin typeface="Arial"/>
-                        </a:rPr>
-                        <a:t>272</a:t>
-                      </a:r>
-                    </a:p>
-                  </a:txBody>
-                  <a:tcPr/>
-                </a:tc>
-                <a:tc>
-                  <a:txBody>
-                    <a:bodyPr/>
-                    <a:lstStyle/>
-                    <a:p>
-                      <a:r>
-                        <a:rPr sz="1050">
-                          <a:solidFill>
-                            <a:srgbClr val="3D5466"/>
-                          </a:solidFill>
-                          <a:latin typeface="Arial"/>
-                        </a:rPr>
-                        <a:t>▼▼</a:t>
-                      </a:r>
-                    </a:p>
-                  </a:txBody>
-                  <a:tcPr/>
-                </a:tc>
-              </a:tr>
-              <a:tr h="384048">
-                <a:tc>
-                  <a:txBody>
-                    <a:bodyPr/>
-                    <a:lstStyle/>
-                    <a:p>
-                      <a:r>
-                        <a:rPr sz="1050">
-                          <a:solidFill>
-                            <a:srgbClr val="3D5466"/>
-                          </a:solidFill>
-                          <a:latin typeface="Arial"/>
-                        </a:rPr>
-                        <a:t>Zinsen</a:t>
-                      </a:r>
-                    </a:p>
-                  </a:txBody>
-                  <a:tcPr/>
-                </a:tc>
-                <a:tc>
-                  <a:txBody>
-                    <a:bodyPr/>
-                    <a:lstStyle/>
-                    <a:p>
-                      <a:r>
-                        <a:rPr sz="1050">
-                          <a:solidFill>
-                            <a:srgbClr val="3D5466"/>
-                          </a:solidFill>
-                          <a:latin typeface="Arial"/>
-                        </a:rPr>
-                        <a:t>−35</a:t>
-                      </a:r>
-                    </a:p>
-                  </a:txBody>
-                  <a:tcPr/>
-                </a:tc>
-                <a:tc>
-                  <a:txBody>
-                    <a:bodyPr/>
-                    <a:lstStyle/>
-                    <a:p>
-                      <a:r>
-                        <a:rPr sz="1050">
-                          <a:solidFill>
-                            <a:srgbClr val="3D5466"/>
-                          </a:solidFill>
-                          <a:latin typeface="Arial"/>
-                        </a:rPr>
-                        <a:t>−31</a:t>
-                      </a:r>
-                    </a:p>
-                  </a:txBody>
-                  <a:tcPr/>
-                </a:tc>
-                <a:tc>
-                  <a:txBody>
-                    <a:bodyPr/>
-                    <a:lstStyle/>
-                    <a:p>
-                      <a:r>
-                        <a:rPr sz="1050">
-                          <a:solidFill>
-                            <a:srgbClr val="3D5466"/>
-                          </a:solidFill>
-                          <a:latin typeface="Arial"/>
-                        </a:rPr>
-                        <a:t>−29</a:t>
-                      </a:r>
-                    </a:p>
-                  </a:txBody>
-                  <a:tcPr/>
-                </a:tc>
-                <a:tc>
-                  <a:txBody>
-                    <a:bodyPr/>
-                    <a:lstStyle/>
-                    <a:p>
-                      <a:r>
-                        <a:rPr sz="1050">
-                          <a:solidFill>
-                            <a:srgbClr val="3D5466"/>
-                          </a:solidFill>
-                          <a:latin typeface="Arial"/>
-                        </a:rPr>
-                        <a:t>▼</a:t>
-                      </a:r>
-                    </a:p>
-                  </a:txBody>
-                  <a:tcPr/>
-                </a:tc>
-              </a:tr>
-              <a:tr h="384048">
-                <a:tc>
-                  <a:txBody>
-                    <a:bodyPr/>
-                    <a:lstStyle/>
-                    <a:p>
-                      <a:r>
-                        <a:rPr sz="1050">
-                          <a:solidFill>
-                            <a:srgbClr val="3D5466"/>
-                          </a:solidFill>
-                          <a:latin typeface="Arial"/>
-                        </a:rPr>
-                        <a:t>Netto-Gewinn</a:t>
-                      </a:r>
-                    </a:p>
-                  </a:txBody>
-                  <a:tcPr/>
-                </a:tc>
-                <a:tc>
-                  <a:txBody>
-                    <a:bodyPr/>
-                    <a:lstStyle/>
-                    <a:p>
-                      <a:r>
-                        <a:rPr sz="1050">
-                          <a:solidFill>
-                            <a:srgbClr val="3D5466"/>
-                          </a:solidFill>
-                          <a:latin typeface="Arial"/>
-                        </a:rPr>
-                        <a:t>238</a:t>
-                      </a:r>
-                    </a:p>
-                  </a:txBody>
-                  <a:tcPr/>
-                </a:tc>
-                <a:tc>
-                  <a:txBody>
-                    <a:bodyPr/>
-                    <a:lstStyle/>
-                    <a:p>
-                      <a:r>
-                        <a:rPr sz="1050">
-                          <a:solidFill>
-                            <a:srgbClr val="3D5466"/>
-                          </a:solidFill>
-                          <a:latin typeface="Arial"/>
-                        </a:rPr>
-                        <a:t>203</a:t>
-                      </a:r>
-                    </a:p>
-                  </a:txBody>
-                  <a:tcPr/>
-                </a:tc>
-                <a:tc>
-                  <a:txBody>
-                    <a:bodyPr/>
-                    <a:lstStyle/>
-                    <a:p>
-                      <a:r>
-                        <a:rPr sz="1050">
-                          <a:solidFill>
-                            <a:srgbClr val="3D5466"/>
-                          </a:solidFill>
-                          <a:latin typeface="Arial"/>
-                        </a:rPr>
-                        <a:t>170</a:t>
-                      </a:r>
-                    </a:p>
-                  </a:txBody>
-                  <a:tcPr/>
-                </a:tc>
-                <a:tc>
-                  <a:txBody>
-                    <a:bodyPr/>
-                    <a:lstStyle/>
-                    <a:p>
-                      <a:r>
-                        <a:rPr sz="1050">
-                          <a:solidFill>
-                            <a:srgbClr val="3D5466"/>
-                          </a:solidFill>
-                          <a:latin typeface="Arial"/>
-                        </a:rPr>
-                        <a:t>▼▼</a:t>
+                        <a:t>Zusage mit Auflagen</a:t>
                       </a:r>
                     </a:p>
                   </a:txBody>
@@ -9512,6 +6740,1255 @@
                 <a:latin typeface="Consolas"/>
               </a:rPr>
               <a:t>Übersicht</a:t>
+            </a:r>
+          </a:p>
+        </p:txBody>
+      </p:sp>
+    </p:spTree>
+  </p:cSld>
+  <p:clrMapOvr>
+    <a:masterClrMapping/>
+  </p:clrMapOvr>
+</p:sld>
+</file>
+
+<file path=ppt/slides/slide15.xml><?xml version="1.0" encoding="utf-8"?>
+<p:sld xmlns:a="http://schemas.openxmlformats.org/drawingml/2006/main" xmlns:p="http://schemas.openxmlformats.org/presentationml/2006/main" xmlns:r="http://schemas.openxmlformats.org/officeDocument/2006/relationships">
+  <p:cSld>
+    <p:spTree>
+      <p:nvGrpSpPr>
+        <p:cNvPr id="1" name=""/>
+        <p:cNvGrpSpPr/>
+        <p:nvPr/>
+      </p:nvGrpSpPr>
+      <p:grpSpPr/>
+      <p:sp>
+        <p:nvSpPr>
+          <p:cNvPr id="2" name="Rectangle 1"/>
+          <p:cNvSpPr/>
+          <p:nvPr/>
+        </p:nvSpPr>
+        <p:spPr>
+          <a:xfrm>
+            <a:off x="0" y="0"/>
+            <a:ext cx="12188952" cy="6858000"/>
+          </a:xfrm>
+          <a:prstGeom prst="rect">
+            <a:avLst/>
+          </a:prstGeom>
+          <a:solidFill>
+            <a:srgbClr val="EDEDF3"/>
+          </a:solidFill>
+          <a:ln>
+            <a:noFill/>
+          </a:ln>
+        </p:spPr>
+        <p:style>
+          <a:lnRef idx="1">
+            <a:schemeClr val="accent1"/>
+          </a:lnRef>
+          <a:fillRef idx="3">
+            <a:schemeClr val="accent1"/>
+          </a:fillRef>
+          <a:effectRef idx="2">
+            <a:schemeClr val="accent1"/>
+          </a:effectRef>
+          <a:fontRef idx="minor">
+            <a:schemeClr val="lt1"/>
+          </a:fontRef>
+        </p:style>
+        <p:txBody>
+          <a:bodyPr rtlCol="0" anchor="ctr"/>
+          <a:lstStyle/>
+          <a:p>
+            <a:pPr algn="ctr"/>
+          </a:p>
+        </p:txBody>
+      </p:sp>
+      <p:sp>
+        <p:nvSpPr>
+          <p:cNvPr id="3" name="Rectangle 2"/>
+          <p:cNvSpPr/>
+          <p:nvPr/>
+        </p:nvSpPr>
+        <p:spPr>
+          <a:xfrm>
+            <a:off x="0" y="0"/>
+            <a:ext cx="12188952" cy="50292"/>
+          </a:xfrm>
+          <a:prstGeom prst="rect">
+            <a:avLst/>
+          </a:prstGeom>
+          <a:solidFill>
+            <a:srgbClr val="1F2C56"/>
+          </a:solidFill>
+          <a:ln>
+            <a:noFill/>
+          </a:ln>
+        </p:spPr>
+        <p:style>
+          <a:lnRef idx="1">
+            <a:schemeClr val="accent1"/>
+          </a:lnRef>
+          <a:fillRef idx="3">
+            <a:schemeClr val="accent1"/>
+          </a:fillRef>
+          <a:effectRef idx="2">
+            <a:schemeClr val="accent1"/>
+          </a:effectRef>
+          <a:fontRef idx="minor">
+            <a:schemeClr val="lt1"/>
+          </a:fontRef>
+        </p:style>
+        <p:txBody>
+          <a:bodyPr rtlCol="0" anchor="ctr"/>
+          <a:lstStyle/>
+          <a:p>
+            <a:pPr algn="ctr"/>
+          </a:p>
+        </p:txBody>
+      </p:sp>
+      <p:sp>
+        <p:nvSpPr>
+          <p:cNvPr id="4" name="TextBox 3"/>
+          <p:cNvSpPr txBox="1"/>
+          <p:nvPr/>
+        </p:nvSpPr>
+        <p:spPr>
+          <a:xfrm>
+            <a:off x="685800" y="109728"/>
+            <a:ext cx="10817352" cy="228600"/>
+          </a:xfrm>
+          <a:prstGeom prst="rect">
+            <a:avLst/>
+          </a:prstGeom>
+          <a:noFill/>
+        </p:spPr>
+        <p:txBody>
+          <a:bodyPr wrap="none">
+            <a:spAutoFit/>
+          </a:bodyPr>
+          <a:lstStyle/>
+          <a:p>
+            <a:pPr algn="l"/>
+            <a:r>
+              <a:rPr sz="750">
+                <a:solidFill>
+                  <a:srgbClr val="78808C"/>
+                </a:solidFill>
+                <a:latin typeface="Consolas"/>
+              </a:rPr>
+              <a:t>M21  ·  ARBEITSBLATT</a:t>
+            </a:r>
+          </a:p>
+        </p:txBody>
+      </p:sp>
+      <p:sp>
+        <p:nvSpPr>
+          <p:cNvPr id="5" name="Rectangle 4"/>
+          <p:cNvSpPr/>
+          <p:nvPr/>
+        </p:nvSpPr>
+        <p:spPr>
+          <a:xfrm>
+            <a:off x="0" y="1234440"/>
+            <a:ext cx="12188952" cy="12700"/>
+          </a:xfrm>
+          <a:prstGeom prst="rect">
+            <a:avLst/>
+          </a:prstGeom>
+          <a:solidFill>
+            <a:srgbClr val="D8DFE4"/>
+          </a:solidFill>
+          <a:ln>
+            <a:noFill/>
+          </a:ln>
+        </p:spPr>
+        <p:style>
+          <a:lnRef idx="1">
+            <a:schemeClr val="accent1"/>
+          </a:lnRef>
+          <a:fillRef idx="3">
+            <a:schemeClr val="accent1"/>
+          </a:fillRef>
+          <a:effectRef idx="2">
+            <a:schemeClr val="accent1"/>
+          </a:effectRef>
+          <a:fontRef idx="minor">
+            <a:schemeClr val="lt1"/>
+          </a:fontRef>
+        </p:style>
+        <p:txBody>
+          <a:bodyPr rtlCol="0" anchor="ctr"/>
+          <a:lstStyle/>
+          <a:p>
+            <a:pPr algn="ctr"/>
+          </a:p>
+        </p:txBody>
+      </p:sp>
+      <p:sp>
+        <p:nvSpPr>
+          <p:cNvPr id="6" name="Rectangle 5"/>
+          <p:cNvSpPr/>
+          <p:nvPr/>
+        </p:nvSpPr>
+        <p:spPr>
+          <a:xfrm>
+            <a:off x="685800" y="502920"/>
+            <a:ext cx="36576" cy="658368"/>
+          </a:xfrm>
+          <a:prstGeom prst="rect">
+            <a:avLst/>
+          </a:prstGeom>
+          <a:solidFill>
+            <a:srgbClr val="D9C089"/>
+          </a:solidFill>
+          <a:ln>
+            <a:noFill/>
+          </a:ln>
+        </p:spPr>
+        <p:style>
+          <a:lnRef idx="1">
+            <a:schemeClr val="accent1"/>
+          </a:lnRef>
+          <a:fillRef idx="3">
+            <a:schemeClr val="accent1"/>
+          </a:fillRef>
+          <a:effectRef idx="2">
+            <a:schemeClr val="accent1"/>
+          </a:effectRef>
+          <a:fontRef idx="minor">
+            <a:schemeClr val="lt1"/>
+          </a:fontRef>
+        </p:style>
+        <p:txBody>
+          <a:bodyPr rtlCol="0" anchor="ctr"/>
+          <a:lstStyle/>
+          <a:p>
+            <a:pPr algn="ctr"/>
+          </a:p>
+        </p:txBody>
+      </p:sp>
+      <p:sp>
+        <p:nvSpPr>
+          <p:cNvPr id="7" name="TextBox 6"/>
+          <p:cNvSpPr txBox="1"/>
+          <p:nvPr/>
+        </p:nvSpPr>
+        <p:spPr>
+          <a:xfrm>
+            <a:off x="813816" y="502920"/>
+            <a:ext cx="10634472" cy="685800"/>
+          </a:xfrm>
+          <a:prstGeom prst="rect">
+            <a:avLst/>
+          </a:prstGeom>
+          <a:noFill/>
+        </p:spPr>
+        <p:txBody>
+          <a:bodyPr wrap="square">
+            <a:spAutoFit/>
+          </a:bodyPr>
+          <a:lstStyle/>
+          <a:p>
+            <a:pPr algn="l"/>
+            <a:r>
+              <a:rPr sz="2400" b="1" i="0">
+                <a:solidFill>
+                  <a:srgbClr val="1F2C56"/>
+                </a:solidFill>
+                <a:latin typeface="Arial"/>
+              </a:rPr>
+              <a:t>Kreditvotierung Metallbau Schnell bearbeiten</a:t>
+            </a:r>
+          </a:p>
+        </p:txBody>
+      </p:sp>
+      <p:sp>
+        <p:nvSpPr>
+          <p:cNvPr id="8" name="TextBox 7"/>
+          <p:cNvSpPr txBox="1"/>
+          <p:nvPr/>
+        </p:nvSpPr>
+        <p:spPr>
+          <a:xfrm>
+            <a:off x="685800" y="1554480"/>
+            <a:ext cx="10817352" cy="3840480"/>
+          </a:xfrm>
+          <a:prstGeom prst="rect">
+            <a:avLst/>
+          </a:prstGeom>
+          <a:noFill/>
+        </p:spPr>
+        <p:txBody>
+          <a:bodyPr wrap="square">
+            <a:spAutoFit/>
+          </a:bodyPr>
+          <a:lstStyle/>
+          <a:p>
+            <a:pPr marL="190500" indent="-190500">
+              <a:spcBef>
+                <a:spcPts val="400"/>
+              </a:spcBef>
+              <a:spcAft>
+                <a:spcPts val="200"/>
+              </a:spcAft>
+            </a:pPr>
+            <a:r>
+              <a:rPr sz="1400">
+                <a:solidFill>
+                  <a:srgbClr val="3D5466"/>
+                </a:solidFill>
+                <a:latin typeface="Arial"/>
+              </a:rPr>
+              <a:t>▸  Analysieren Sie den Fall mit dem 8-Felder-Bogen (AB-1) und dem XLSX-Scoring-Modell.</a:t>
+            </a:r>
+          </a:p>
+          <a:p>
+            <a:pPr marL="190500" indent="-190500">
+              <a:spcBef>
+                <a:spcPts val="400"/>
+              </a:spcBef>
+              <a:spcAft>
+                <a:spcPts val="200"/>
+              </a:spcAft>
+            </a:pPr>
+            <a:r>
+              <a:rPr sz="1400">
+                <a:solidFill>
+                  <a:srgbClr val="3D5466"/>
+                </a:solidFill>
+                <a:latin typeface="Arial"/>
+              </a:rPr>
+              <a:t>▸  Erstellen Sie den Votierungsbogen mit begründetem Votum (AB-2).</a:t>
+            </a:r>
+          </a:p>
+          <a:p>
+            <a:pPr marL="190500" indent="-190500">
+              <a:spcBef>
+                <a:spcPts val="400"/>
+              </a:spcBef>
+              <a:spcAft>
+                <a:spcPts val="200"/>
+              </a:spcAft>
+            </a:pPr>
+            <a:r>
+              <a:rPr sz="1400">
+                <a:solidFill>
+                  <a:srgbClr val="3D5466"/>
+                </a:solidFill>
+                <a:latin typeface="Arial"/>
+              </a:rPr>
+              <a:t>▸  Kalkulieren Sie die Konditionierung und präsentieren Sie Ihr Votum (AB-3).</a:t>
+            </a:r>
+          </a:p>
+        </p:txBody>
+      </p:sp>
+      <p:sp>
+        <p:nvSpPr>
+          <p:cNvPr id="9" name="Rectangle 8"/>
+          <p:cNvSpPr/>
+          <p:nvPr/>
+        </p:nvSpPr>
+        <p:spPr>
+          <a:xfrm>
+            <a:off x="685800" y="5486400"/>
+            <a:ext cx="10817352" cy="640080"/>
+          </a:xfrm>
+          <a:prstGeom prst="rect">
+            <a:avLst/>
+          </a:prstGeom>
+          <a:solidFill>
+            <a:srgbClr val="1F2C56"/>
+          </a:solidFill>
+          <a:ln>
+            <a:noFill/>
+          </a:ln>
+        </p:spPr>
+        <p:style>
+          <a:lnRef idx="1">
+            <a:schemeClr val="accent1"/>
+          </a:lnRef>
+          <a:fillRef idx="3">
+            <a:schemeClr val="accent1"/>
+          </a:fillRef>
+          <a:effectRef idx="2">
+            <a:schemeClr val="accent1"/>
+          </a:effectRef>
+          <a:fontRef idx="minor">
+            <a:schemeClr val="lt1"/>
+          </a:fontRef>
+        </p:style>
+        <p:txBody>
+          <a:bodyPr rtlCol="0" anchor="ctr"/>
+          <a:lstStyle/>
+          <a:p>
+            <a:pPr algn="ctr"/>
+          </a:p>
+        </p:txBody>
+      </p:sp>
+      <p:sp>
+        <p:nvSpPr>
+          <p:cNvPr id="10" name="TextBox 9"/>
+          <p:cNvSpPr txBox="1"/>
+          <p:nvPr/>
+        </p:nvSpPr>
+        <p:spPr>
+          <a:xfrm>
+            <a:off x="868680" y="5596128"/>
+            <a:ext cx="10451592" cy="457200"/>
+          </a:xfrm>
+          <a:prstGeom prst="rect">
+            <a:avLst/>
+          </a:prstGeom>
+          <a:noFill/>
+        </p:spPr>
+        <p:txBody>
+          <a:bodyPr wrap="square">
+            <a:spAutoFit/>
+          </a:bodyPr>
+          <a:lstStyle/>
+          <a:p>
+            <a:pPr algn="l"/>
+            <a:r>
+              <a:rPr sz="1300" b="1" i="0">
+                <a:solidFill>
+                  <a:srgbClr val="FFFFFF"/>
+                </a:solidFill>
+                <a:latin typeface="Arial"/>
+              </a:rPr>
+              <a:t>→  Bearbeitung im Teilnehmer-Workbook (Arbeitsblatt mit Ausfüllfeldern)</a:t>
+            </a:r>
+          </a:p>
+        </p:txBody>
+      </p:sp>
+      <p:sp>
+        <p:nvSpPr>
+          <p:cNvPr id="11" name="Rectangle 10"/>
+          <p:cNvSpPr/>
+          <p:nvPr/>
+        </p:nvSpPr>
+        <p:spPr>
+          <a:xfrm>
+            <a:off x="0" y="6510528"/>
+            <a:ext cx="12188952" cy="347472"/>
+          </a:xfrm>
+          <a:prstGeom prst="rect">
+            <a:avLst/>
+          </a:prstGeom>
+          <a:solidFill>
+            <a:srgbClr val="0A1937"/>
+          </a:solidFill>
+          <a:ln>
+            <a:noFill/>
+          </a:ln>
+        </p:spPr>
+        <p:style>
+          <a:lnRef idx="1">
+            <a:schemeClr val="accent1"/>
+          </a:lnRef>
+          <a:fillRef idx="3">
+            <a:schemeClr val="accent1"/>
+          </a:fillRef>
+          <a:effectRef idx="2">
+            <a:schemeClr val="accent1"/>
+          </a:effectRef>
+          <a:fontRef idx="minor">
+            <a:schemeClr val="lt1"/>
+          </a:fontRef>
+        </p:style>
+        <p:txBody>
+          <a:bodyPr rtlCol="0" anchor="ctr"/>
+          <a:lstStyle/>
+          <a:p>
+            <a:pPr algn="ctr"/>
+          </a:p>
+        </p:txBody>
+      </p:sp>
+      <p:sp>
+        <p:nvSpPr>
+          <p:cNvPr id="12" name="TextBox 11"/>
+          <p:cNvSpPr txBox="1"/>
+          <p:nvPr/>
+        </p:nvSpPr>
+        <p:spPr>
+          <a:xfrm>
+            <a:off x="685800" y="6583680"/>
+            <a:ext cx="6490411" cy="256032"/>
+          </a:xfrm>
+          <a:prstGeom prst="rect">
+            <a:avLst/>
+          </a:prstGeom>
+          <a:noFill/>
+        </p:spPr>
+        <p:txBody>
+          <a:bodyPr wrap="none">
+            <a:spAutoFit/>
+          </a:bodyPr>
+          <a:lstStyle/>
+          <a:p>
+            <a:pPr algn="l"/>
+            <a:r>
+              <a:rPr sz="700">
+                <a:solidFill>
+                  <a:srgbClr val="A0B4D2"/>
+                </a:solidFill>
+                <a:latin typeface="Consolas"/>
+              </a:rPr>
+              <a:t>FKB Campus  ·  M21</a:t>
+            </a:r>
+          </a:p>
+        </p:txBody>
+      </p:sp>
+    </p:spTree>
+  </p:cSld>
+  <p:clrMapOvr>
+    <a:masterClrMapping/>
+  </p:clrMapOvr>
+</p:sld>
+</file>
+
+<file path=ppt/slides/slide16.xml><?xml version="1.0" encoding="utf-8"?>
+<p:sld xmlns:a="http://schemas.openxmlformats.org/drawingml/2006/main" xmlns:p="http://schemas.openxmlformats.org/presentationml/2006/main" xmlns:r="http://schemas.openxmlformats.org/officeDocument/2006/relationships">
+  <p:cSld>
+    <p:spTree>
+      <p:nvGrpSpPr>
+        <p:cNvPr id="1" name=""/>
+        <p:cNvGrpSpPr/>
+        <p:nvPr/>
+      </p:nvGrpSpPr>
+      <p:grpSpPr/>
+      <p:sp>
+        <p:nvSpPr>
+          <p:cNvPr id="2" name="Rectangle 1"/>
+          <p:cNvSpPr/>
+          <p:nvPr/>
+        </p:nvSpPr>
+        <p:spPr>
+          <a:xfrm>
+            <a:off x="0" y="0"/>
+            <a:ext cx="12188952" cy="6858000"/>
+          </a:xfrm>
+          <a:prstGeom prst="rect">
+            <a:avLst/>
+          </a:prstGeom>
+          <a:solidFill>
+            <a:srgbClr val="FFFFFF"/>
+          </a:solidFill>
+          <a:ln>
+            <a:noFill/>
+          </a:ln>
+        </p:spPr>
+        <p:style>
+          <a:lnRef idx="1">
+            <a:schemeClr val="accent1"/>
+          </a:lnRef>
+          <a:fillRef idx="3">
+            <a:schemeClr val="accent1"/>
+          </a:fillRef>
+          <a:effectRef idx="2">
+            <a:schemeClr val="accent1"/>
+          </a:effectRef>
+          <a:fontRef idx="minor">
+            <a:schemeClr val="lt1"/>
+          </a:fontRef>
+        </p:style>
+        <p:txBody>
+          <a:bodyPr rtlCol="0" anchor="ctr"/>
+          <a:lstStyle/>
+          <a:p>
+            <a:pPr algn="ctr"/>
+          </a:p>
+        </p:txBody>
+      </p:sp>
+      <p:sp>
+        <p:nvSpPr>
+          <p:cNvPr id="3" name="Rectangle 2"/>
+          <p:cNvSpPr/>
+          <p:nvPr/>
+        </p:nvSpPr>
+        <p:spPr>
+          <a:xfrm>
+            <a:off x="0" y="0"/>
+            <a:ext cx="12188952" cy="50292"/>
+          </a:xfrm>
+          <a:prstGeom prst="rect">
+            <a:avLst/>
+          </a:prstGeom>
+          <a:solidFill>
+            <a:srgbClr val="1F2C56"/>
+          </a:solidFill>
+          <a:ln>
+            <a:noFill/>
+          </a:ln>
+        </p:spPr>
+        <p:style>
+          <a:lnRef idx="1">
+            <a:schemeClr val="accent1"/>
+          </a:lnRef>
+          <a:fillRef idx="3">
+            <a:schemeClr val="accent1"/>
+          </a:fillRef>
+          <a:effectRef idx="2">
+            <a:schemeClr val="accent1"/>
+          </a:effectRef>
+          <a:fontRef idx="minor">
+            <a:schemeClr val="lt1"/>
+          </a:fontRef>
+        </p:style>
+        <p:txBody>
+          <a:bodyPr rtlCol="0" anchor="ctr"/>
+          <a:lstStyle/>
+          <a:p>
+            <a:pPr algn="ctr"/>
+          </a:p>
+        </p:txBody>
+      </p:sp>
+      <p:sp>
+        <p:nvSpPr>
+          <p:cNvPr id="4" name="TextBox 3"/>
+          <p:cNvSpPr txBox="1"/>
+          <p:nvPr/>
+        </p:nvSpPr>
+        <p:spPr>
+          <a:xfrm>
+            <a:off x="685800" y="109728"/>
+            <a:ext cx="10817352" cy="228600"/>
+          </a:xfrm>
+          <a:prstGeom prst="rect">
+            <a:avLst/>
+          </a:prstGeom>
+          <a:noFill/>
+        </p:spPr>
+        <p:txBody>
+          <a:bodyPr wrap="none">
+            <a:spAutoFit/>
+          </a:bodyPr>
+          <a:lstStyle/>
+          <a:p>
+            <a:pPr algn="l"/>
+            <a:r>
+              <a:rPr sz="750">
+                <a:solidFill>
+                  <a:srgbClr val="78808C"/>
+                </a:solidFill>
+                <a:latin typeface="Consolas"/>
+              </a:rPr>
+              <a:t>M21  ·  SCHAUBILD</a:t>
+            </a:r>
+          </a:p>
+        </p:txBody>
+      </p:sp>
+      <p:sp>
+        <p:nvSpPr>
+          <p:cNvPr id="5" name="TextBox 4"/>
+          <p:cNvSpPr txBox="1"/>
+          <p:nvPr/>
+        </p:nvSpPr>
+        <p:spPr>
+          <a:xfrm>
+            <a:off x="685800" y="502920"/>
+            <a:ext cx="10817352" cy="594360"/>
+          </a:xfrm>
+          <a:prstGeom prst="rect">
+            <a:avLst/>
+          </a:prstGeom>
+          <a:noFill/>
+        </p:spPr>
+        <p:txBody>
+          <a:bodyPr wrap="square">
+            <a:spAutoFit/>
+          </a:bodyPr>
+          <a:lstStyle/>
+          <a:p>
+            <a:pPr algn="l"/>
+            <a:r>
+              <a:rPr sz="2000" b="1" i="0">
+                <a:solidFill>
+                  <a:srgbClr val="1F2C56"/>
+                </a:solidFill>
+                <a:latin typeface="Arial"/>
+              </a:rPr>
+              <a:t>Handlungsempfehlung: vom Score zum Votum</a:t>
+            </a:r>
+          </a:p>
+        </p:txBody>
+      </p:sp>
+      <p:sp>
+        <p:nvSpPr>
+          <p:cNvPr id="6" name="Rectangle 5"/>
+          <p:cNvSpPr/>
+          <p:nvPr/>
+        </p:nvSpPr>
+        <p:spPr>
+          <a:xfrm>
+            <a:off x="685800" y="1143000"/>
+            <a:ext cx="10817352" cy="25400"/>
+          </a:xfrm>
+          <a:prstGeom prst="rect">
+            <a:avLst/>
+          </a:prstGeom>
+          <a:solidFill>
+            <a:srgbClr val="D9C089"/>
+          </a:solidFill>
+          <a:ln>
+            <a:noFill/>
+          </a:ln>
+        </p:spPr>
+        <p:style>
+          <a:lnRef idx="1">
+            <a:schemeClr val="accent1"/>
+          </a:lnRef>
+          <a:fillRef idx="3">
+            <a:schemeClr val="accent1"/>
+          </a:fillRef>
+          <a:effectRef idx="2">
+            <a:schemeClr val="accent1"/>
+          </a:effectRef>
+          <a:fontRef idx="minor">
+            <a:schemeClr val="lt1"/>
+          </a:fontRef>
+        </p:style>
+        <p:txBody>
+          <a:bodyPr rtlCol="0" anchor="ctr"/>
+          <a:lstStyle/>
+          <a:p>
+            <a:pPr algn="ctr"/>
+          </a:p>
+        </p:txBody>
+      </p:sp>
+      <p:pic>
+        <p:nvPicPr>
+          <p:cNvPr id="7" name="Picture 6" descr="image.png"/>
+          <p:cNvPicPr>
+            <a:picLocks noChangeAspect="1"/>
+          </p:cNvPicPr>
+          <p:nvPr/>
+        </p:nvPicPr>
+        <p:blipFill>
+          <a:blip r:embed="rId2"/>
+          <a:stretch>
+            <a:fillRect/>
+          </a:stretch>
+        </p:blipFill>
+        <p:spPr>
+          <a:xfrm>
+            <a:off x="2303489" y="1325880"/>
+            <a:ext cx="7581973" cy="4937760"/>
+          </a:xfrm>
+          <a:prstGeom prst="rect">
+            <a:avLst/>
+          </a:prstGeom>
+        </p:spPr>
+      </p:pic>
+      <p:sp>
+        <p:nvSpPr>
+          <p:cNvPr id="8" name="Rectangle 7"/>
+          <p:cNvSpPr/>
+          <p:nvPr/>
+        </p:nvSpPr>
+        <p:spPr>
+          <a:xfrm>
+            <a:off x="0" y="6510528"/>
+            <a:ext cx="12188952" cy="347472"/>
+          </a:xfrm>
+          <a:prstGeom prst="rect">
+            <a:avLst/>
+          </a:prstGeom>
+          <a:solidFill>
+            <a:srgbClr val="0A1937"/>
+          </a:solidFill>
+          <a:ln>
+            <a:noFill/>
+          </a:ln>
+        </p:spPr>
+        <p:style>
+          <a:lnRef idx="1">
+            <a:schemeClr val="accent1"/>
+          </a:lnRef>
+          <a:fillRef idx="3">
+            <a:schemeClr val="accent1"/>
+          </a:fillRef>
+          <a:effectRef idx="2">
+            <a:schemeClr val="accent1"/>
+          </a:effectRef>
+          <a:fontRef idx="minor">
+            <a:schemeClr val="lt1"/>
+          </a:fontRef>
+        </p:style>
+        <p:txBody>
+          <a:bodyPr rtlCol="0" anchor="ctr"/>
+          <a:lstStyle/>
+          <a:p>
+            <a:pPr algn="ctr"/>
+          </a:p>
+        </p:txBody>
+      </p:sp>
+      <p:sp>
+        <p:nvSpPr>
+          <p:cNvPr id="9" name="TextBox 8"/>
+          <p:cNvSpPr txBox="1"/>
+          <p:nvPr/>
+        </p:nvSpPr>
+        <p:spPr>
+          <a:xfrm>
+            <a:off x="685800" y="6583680"/>
+            <a:ext cx="6490411" cy="256032"/>
+          </a:xfrm>
+          <a:prstGeom prst="rect">
+            <a:avLst/>
+          </a:prstGeom>
+          <a:noFill/>
+        </p:spPr>
+        <p:txBody>
+          <a:bodyPr wrap="none">
+            <a:spAutoFit/>
+          </a:bodyPr>
+          <a:lstStyle/>
+          <a:p>
+            <a:pPr algn="l"/>
+            <a:r>
+              <a:rPr sz="700">
+                <a:solidFill>
+                  <a:srgbClr val="A0B4D2"/>
+                </a:solidFill>
+                <a:latin typeface="Consolas"/>
+              </a:rPr>
+              <a:t>FKB Campus  ·  M21</a:t>
+            </a:r>
+          </a:p>
+        </p:txBody>
+      </p:sp>
+      <p:sp>
+        <p:nvSpPr>
+          <p:cNvPr id="10" name="TextBox 9"/>
+          <p:cNvSpPr txBox="1"/>
+          <p:nvPr/>
+        </p:nvSpPr>
+        <p:spPr>
+          <a:xfrm>
+            <a:off x="7176211" y="6583680"/>
+            <a:ext cx="4326940" cy="256032"/>
+          </a:xfrm>
+          <a:prstGeom prst="rect">
+            <a:avLst/>
+          </a:prstGeom>
+          <a:noFill/>
+        </p:spPr>
+        <p:txBody>
+          <a:bodyPr wrap="none">
+            <a:spAutoFit/>
+          </a:bodyPr>
+          <a:lstStyle/>
+          <a:p>
+            <a:pPr algn="r"/>
+            <a:r>
+              <a:rPr sz="700">
+                <a:solidFill>
+                  <a:srgbClr val="A0B4D2"/>
+                </a:solidFill>
+                <a:latin typeface="Consolas"/>
+              </a:rPr>
+              <a:t>Schaubild</a:t>
+            </a:r>
+          </a:p>
+        </p:txBody>
+      </p:sp>
+    </p:spTree>
+  </p:cSld>
+  <p:clrMapOvr>
+    <a:masterClrMapping/>
+  </p:clrMapOvr>
+</p:sld>
+</file>
+
+<file path=ppt/slides/slide17.xml><?xml version="1.0" encoding="utf-8"?>
+<p:sld xmlns:a="http://schemas.openxmlformats.org/drawingml/2006/main" xmlns:p="http://schemas.openxmlformats.org/presentationml/2006/main" xmlns:r="http://schemas.openxmlformats.org/officeDocument/2006/relationships">
+  <p:cSld>
+    <p:spTree>
+      <p:nvGrpSpPr>
+        <p:cNvPr id="1" name=""/>
+        <p:cNvGrpSpPr/>
+        <p:nvPr/>
+      </p:nvGrpSpPr>
+      <p:grpSpPr/>
+      <p:sp>
+        <p:nvSpPr>
+          <p:cNvPr id="2" name="Rectangle 1"/>
+          <p:cNvSpPr/>
+          <p:nvPr/>
+        </p:nvSpPr>
+        <p:spPr>
+          <a:xfrm>
+            <a:off x="0" y="0"/>
+            <a:ext cx="12188952" cy="6858000"/>
+          </a:xfrm>
+          <a:prstGeom prst="rect">
+            <a:avLst/>
+          </a:prstGeom>
+          <a:solidFill>
+            <a:srgbClr val="EDEDF3"/>
+          </a:solidFill>
+          <a:ln>
+            <a:noFill/>
+          </a:ln>
+        </p:spPr>
+        <p:style>
+          <a:lnRef idx="1">
+            <a:schemeClr val="accent1"/>
+          </a:lnRef>
+          <a:fillRef idx="3">
+            <a:schemeClr val="accent1"/>
+          </a:fillRef>
+          <a:effectRef idx="2">
+            <a:schemeClr val="accent1"/>
+          </a:effectRef>
+          <a:fontRef idx="minor">
+            <a:schemeClr val="lt1"/>
+          </a:fontRef>
+        </p:style>
+        <p:txBody>
+          <a:bodyPr rtlCol="0" anchor="ctr"/>
+          <a:lstStyle/>
+          <a:p>
+            <a:pPr algn="ctr"/>
+          </a:p>
+        </p:txBody>
+      </p:sp>
+      <p:sp>
+        <p:nvSpPr>
+          <p:cNvPr id="3" name="Rectangle 2"/>
+          <p:cNvSpPr/>
+          <p:nvPr/>
+        </p:nvSpPr>
+        <p:spPr>
+          <a:xfrm>
+            <a:off x="0" y="0"/>
+            <a:ext cx="12188952" cy="50292"/>
+          </a:xfrm>
+          <a:prstGeom prst="rect">
+            <a:avLst/>
+          </a:prstGeom>
+          <a:solidFill>
+            <a:srgbClr val="1F2C56"/>
+          </a:solidFill>
+          <a:ln>
+            <a:noFill/>
+          </a:ln>
+        </p:spPr>
+        <p:style>
+          <a:lnRef idx="1">
+            <a:schemeClr val="accent1"/>
+          </a:lnRef>
+          <a:fillRef idx="3">
+            <a:schemeClr val="accent1"/>
+          </a:fillRef>
+          <a:effectRef idx="2">
+            <a:schemeClr val="accent1"/>
+          </a:effectRef>
+          <a:fontRef idx="minor">
+            <a:schemeClr val="lt1"/>
+          </a:fontRef>
+        </p:style>
+        <p:txBody>
+          <a:bodyPr rtlCol="0" anchor="ctr"/>
+          <a:lstStyle/>
+          <a:p>
+            <a:pPr algn="ctr"/>
+          </a:p>
+        </p:txBody>
+      </p:sp>
+      <p:sp>
+        <p:nvSpPr>
+          <p:cNvPr id="4" name="TextBox 3"/>
+          <p:cNvSpPr txBox="1"/>
+          <p:nvPr/>
+        </p:nvSpPr>
+        <p:spPr>
+          <a:xfrm>
+            <a:off x="685800" y="109728"/>
+            <a:ext cx="10817352" cy="228600"/>
+          </a:xfrm>
+          <a:prstGeom prst="rect">
+            <a:avLst/>
+          </a:prstGeom>
+          <a:noFill/>
+        </p:spPr>
+        <p:txBody>
+          <a:bodyPr wrap="none">
+            <a:spAutoFit/>
+          </a:bodyPr>
+          <a:lstStyle/>
+          <a:p>
+            <a:pPr algn="l"/>
+            <a:r>
+              <a:rPr sz="750">
+                <a:solidFill>
+                  <a:srgbClr val="78808C"/>
+                </a:solidFill>
+                <a:latin typeface="Consolas"/>
+              </a:rPr>
+              <a:t>M21  ·  INHALT</a:t>
+            </a:r>
+          </a:p>
+        </p:txBody>
+      </p:sp>
+      <p:sp>
+        <p:nvSpPr>
+          <p:cNvPr id="5" name="Rectangle 4"/>
+          <p:cNvSpPr/>
+          <p:nvPr/>
+        </p:nvSpPr>
+        <p:spPr>
+          <a:xfrm>
+            <a:off x="0" y="1234440"/>
+            <a:ext cx="12188952" cy="12700"/>
+          </a:xfrm>
+          <a:prstGeom prst="rect">
+            <a:avLst/>
+          </a:prstGeom>
+          <a:solidFill>
+            <a:srgbClr val="D8DFE4"/>
+          </a:solidFill>
+          <a:ln>
+            <a:noFill/>
+          </a:ln>
+        </p:spPr>
+        <p:style>
+          <a:lnRef idx="1">
+            <a:schemeClr val="accent1"/>
+          </a:lnRef>
+          <a:fillRef idx="3">
+            <a:schemeClr val="accent1"/>
+          </a:fillRef>
+          <a:effectRef idx="2">
+            <a:schemeClr val="accent1"/>
+          </a:effectRef>
+          <a:fontRef idx="minor">
+            <a:schemeClr val="lt1"/>
+          </a:fontRef>
+        </p:style>
+        <p:txBody>
+          <a:bodyPr rtlCol="0" anchor="ctr"/>
+          <a:lstStyle/>
+          <a:p>
+            <a:pPr algn="ctr"/>
+          </a:p>
+        </p:txBody>
+      </p:sp>
+      <p:sp>
+        <p:nvSpPr>
+          <p:cNvPr id="6" name="Rectangle 5"/>
+          <p:cNvSpPr/>
+          <p:nvPr/>
+        </p:nvSpPr>
+        <p:spPr>
+          <a:xfrm>
+            <a:off x="685800" y="502920"/>
+            <a:ext cx="36576" cy="658368"/>
+          </a:xfrm>
+          <a:prstGeom prst="rect">
+            <a:avLst/>
+          </a:prstGeom>
+          <a:solidFill>
+            <a:srgbClr val="D9C089"/>
+          </a:solidFill>
+          <a:ln>
+            <a:noFill/>
+          </a:ln>
+        </p:spPr>
+        <p:style>
+          <a:lnRef idx="1">
+            <a:schemeClr val="accent1"/>
+          </a:lnRef>
+          <a:fillRef idx="3">
+            <a:schemeClr val="accent1"/>
+          </a:fillRef>
+          <a:effectRef idx="2">
+            <a:schemeClr val="accent1"/>
+          </a:effectRef>
+          <a:fontRef idx="minor">
+            <a:schemeClr val="lt1"/>
+          </a:fontRef>
+        </p:style>
+        <p:txBody>
+          <a:bodyPr rtlCol="0" anchor="ctr"/>
+          <a:lstStyle/>
+          <a:p>
+            <a:pPr algn="ctr"/>
+          </a:p>
+        </p:txBody>
+      </p:sp>
+      <p:sp>
+        <p:nvSpPr>
+          <p:cNvPr id="7" name="TextBox 6"/>
+          <p:cNvSpPr txBox="1"/>
+          <p:nvPr/>
+        </p:nvSpPr>
+        <p:spPr>
+          <a:xfrm>
+            <a:off x="813816" y="502920"/>
+            <a:ext cx="10634472" cy="685800"/>
+          </a:xfrm>
+          <a:prstGeom prst="rect">
+            <a:avLst/>
+          </a:prstGeom>
+          <a:noFill/>
+        </p:spPr>
+        <p:txBody>
+          <a:bodyPr wrap="square">
+            <a:spAutoFit/>
+          </a:bodyPr>
+          <a:lstStyle/>
+          <a:p>
+            <a:pPr algn="l"/>
+            <a:r>
+              <a:rPr sz="2400" b="1" i="0">
+                <a:solidFill>
+                  <a:srgbClr val="1F2C56"/>
+                </a:solidFill>
+                <a:latin typeface="Arial"/>
+              </a:rPr>
+              <a:t>Prinzip dieses Moduls</a:t>
+            </a:r>
+          </a:p>
+        </p:txBody>
+      </p:sp>
+      <p:sp>
+        <p:nvSpPr>
+          <p:cNvPr id="8" name="TextBox 7"/>
+          <p:cNvSpPr txBox="1"/>
+          <p:nvPr/>
+        </p:nvSpPr>
+        <p:spPr>
+          <a:xfrm>
+            <a:off x="685800" y="1417320"/>
+            <a:ext cx="10817352" cy="4892040"/>
+          </a:xfrm>
+          <a:prstGeom prst="rect">
+            <a:avLst/>
+          </a:prstGeom>
+          <a:noFill/>
+        </p:spPr>
+        <p:txBody>
+          <a:bodyPr wrap="square" anchor="ctr">
+            <a:spAutoFit/>
+          </a:bodyPr>
+          <a:lstStyle/>
+          <a:p>
+            <a:pPr marL="177800" indent="-177800">
+              <a:spcBef>
+                <a:spcPts val="600"/>
+              </a:spcBef>
+              <a:spcAft>
+                <a:spcPts val="200"/>
+              </a:spcAft>
+            </a:pPr>
+            <a:r>
+              <a:rPr sz="1200" i="1">
+                <a:solidFill>
+                  <a:srgbClr val="3D5466"/>
+                </a:solidFill>
+                <a:latin typeface="Arial"/>
+              </a:rPr>
+              <a:t>→  Eine Kreditentscheidung ist erst gut, wenn du sie begründen kannst.</a:t>
+            </a:r>
+          </a:p>
+          <a:p>
+            <a:pPr marL="190500" indent="-190500">
+              <a:spcBef>
+                <a:spcPts val="400"/>
+              </a:spcBef>
+              <a:spcAft>
+                <a:spcPts val="200"/>
+              </a:spcAft>
+            </a:pPr>
+            <a:r>
+              <a:rPr sz="1300">
+                <a:solidFill>
+                  <a:srgbClr val="3D5466"/>
+                </a:solidFill>
+                <a:latin typeface="Arial"/>
+              </a:rPr>
+              <a:t>▸  Trenne Bauchgefühl und Begründung – und prüfe beide; die Kreditvorlage zwingt zur Klarheit.</a:t>
+            </a:r>
+          </a:p>
+        </p:txBody>
+      </p:sp>
+      <p:sp>
+        <p:nvSpPr>
+          <p:cNvPr id="9" name="Rectangle 8"/>
+          <p:cNvSpPr/>
+          <p:nvPr/>
+        </p:nvSpPr>
+        <p:spPr>
+          <a:xfrm>
+            <a:off x="0" y="6510528"/>
+            <a:ext cx="12188952" cy="347472"/>
+          </a:xfrm>
+          <a:prstGeom prst="rect">
+            <a:avLst/>
+          </a:prstGeom>
+          <a:solidFill>
+            <a:srgbClr val="0A1937"/>
+          </a:solidFill>
+          <a:ln>
+            <a:noFill/>
+          </a:ln>
+        </p:spPr>
+        <p:style>
+          <a:lnRef idx="1">
+            <a:schemeClr val="accent1"/>
+          </a:lnRef>
+          <a:fillRef idx="3">
+            <a:schemeClr val="accent1"/>
+          </a:fillRef>
+          <a:effectRef idx="2">
+            <a:schemeClr val="accent1"/>
+          </a:effectRef>
+          <a:fontRef idx="minor">
+            <a:schemeClr val="lt1"/>
+          </a:fontRef>
+        </p:style>
+        <p:txBody>
+          <a:bodyPr rtlCol="0" anchor="ctr"/>
+          <a:lstStyle/>
+          <a:p>
+            <a:pPr algn="ctr"/>
+          </a:p>
+        </p:txBody>
+      </p:sp>
+      <p:sp>
+        <p:nvSpPr>
+          <p:cNvPr id="10" name="TextBox 9"/>
+          <p:cNvSpPr txBox="1"/>
+          <p:nvPr/>
+        </p:nvSpPr>
+        <p:spPr>
+          <a:xfrm>
+            <a:off x="685800" y="6583680"/>
+            <a:ext cx="6490411" cy="256032"/>
+          </a:xfrm>
+          <a:prstGeom prst="rect">
+            <a:avLst/>
+          </a:prstGeom>
+          <a:noFill/>
+        </p:spPr>
+        <p:txBody>
+          <a:bodyPr wrap="none">
+            <a:spAutoFit/>
+          </a:bodyPr>
+          <a:lstStyle/>
+          <a:p>
+            <a:pPr algn="l"/>
+            <a:r>
+              <a:rPr sz="700">
+                <a:solidFill>
+                  <a:srgbClr val="A0B4D2"/>
+                </a:solidFill>
+                <a:latin typeface="Consolas"/>
+              </a:rPr>
+              <a:t>FKB Campus  ·  M21</a:t>
             </a:r>
           </a:p>
         </p:txBody>
@@ -9549,7 +8026,7 @@
             <a:avLst/>
           </a:prstGeom>
           <a:solidFill>
-            <a:srgbClr val="FFFFFF"/>
+            <a:srgbClr val="EDEDF3"/>
           </a:solidFill>
           <a:ln>
             <a:noFill/>
@@ -9650,43 +8127,51 @@
                 </a:solidFill>
                 <a:latin typeface="Consolas"/>
               </a:rPr>
-              <a:t>M21  ·  ÜBERSICHT</a:t>
-            </a:r>
-          </a:p>
-        </p:txBody>
-      </p:sp>
-      <p:sp>
-        <p:nvSpPr>
-          <p:cNvPr id="5" name="TextBox 4"/>
-          <p:cNvSpPr txBox="1"/>
-          <p:nvPr/>
-        </p:nvSpPr>
-        <p:spPr>
-          <a:xfrm>
-            <a:off x="685800" y="502920"/>
-            <a:ext cx="10817352" cy="594360"/>
-          </a:xfrm>
-          <a:prstGeom prst="rect">
-            <a:avLst/>
-          </a:prstGeom>
-          <a:noFill/>
-        </p:spPr>
-        <p:txBody>
-          <a:bodyPr wrap="square">
-            <a:spAutoFit/>
-          </a:bodyPr>
-          <a:lstStyle/>
-          <a:p>
-            <a:pPr algn="l"/>
-            <a:r>
-              <a:rPr sz="2000" b="1" i="0">
-                <a:solidFill>
-                  <a:srgbClr val="1F2C56"/>
-                </a:solidFill>
-                <a:latin typeface="Arial"/>
-              </a:rPr>
-              <a:t>Praxisfall: Metallbau Schnell GmbH (Heilbronn, fiktiv)</a:t>
-            </a:r>
+              <a:t>M21  ·  INHALT</a:t>
+            </a:r>
+          </a:p>
+        </p:txBody>
+      </p:sp>
+      <p:sp>
+        <p:nvSpPr>
+          <p:cNvPr id="5" name="Rectangle 4"/>
+          <p:cNvSpPr/>
+          <p:nvPr/>
+        </p:nvSpPr>
+        <p:spPr>
+          <a:xfrm>
+            <a:off x="0" y="1234440"/>
+            <a:ext cx="12188952" cy="12700"/>
+          </a:xfrm>
+          <a:prstGeom prst="rect">
+            <a:avLst/>
+          </a:prstGeom>
+          <a:solidFill>
+            <a:srgbClr val="D8DFE4"/>
+          </a:solidFill>
+          <a:ln>
+            <a:noFill/>
+          </a:ln>
+        </p:spPr>
+        <p:style>
+          <a:lnRef idx="1">
+            <a:schemeClr val="accent1"/>
+          </a:lnRef>
+          <a:fillRef idx="3">
+            <a:schemeClr val="accent1"/>
+          </a:fillRef>
+          <a:effectRef idx="2">
+            <a:schemeClr val="accent1"/>
+          </a:effectRef>
+          <a:fontRef idx="minor">
+            <a:schemeClr val="lt1"/>
+          </a:fontRef>
+        </p:style>
+        <p:txBody>
+          <a:bodyPr rtlCol="0" anchor="ctr"/>
+          <a:lstStyle/>
+          <a:p>
+            <a:pPr algn="ctr"/>
           </a:p>
         </p:txBody>
       </p:sp>
@@ -9698,8 +8183,8 @@
         </p:nvSpPr>
         <p:spPr>
           <a:xfrm>
-            <a:off x="685800" y="1143000"/>
-            <a:ext cx="10817352" cy="25400"/>
+            <a:off x="685800" y="502920"/>
+            <a:ext cx="36576" cy="658368"/>
           </a:xfrm>
           <a:prstGeom prst="rect">
             <a:avLst/>
@@ -9733,945 +8218,6 @@
           </a:p>
         </p:txBody>
       </p:sp>
-      <p:graphicFrame>
-        <p:nvGraphicFramePr>
-          <p:cNvPr id="7" name="Table 6"/>
-          <p:cNvGraphicFramePr>
-            <a:graphicFrameLocks noGrp="1"/>
-          </p:cNvGraphicFramePr>
-          <p:nvPr/>
-        </p:nvGraphicFramePr>
-        <p:xfrm>
-          <a:off x="685800" y="1417320"/>
-          <a:ext cx="10817352" cy="2304288"/>
-        </p:xfrm>
-        <a:graphic>
-          <a:graphicData uri="http://schemas.openxmlformats.org/drawingml/2006/table">
-            <a:tbl>
-              <a:tblPr firstRow="1" bandRow="1">
-                <a:tableStyleId>{5C22544A-7EE6-4342-B048-85BDC9FD1C3A}</a:tableStyleId>
-              </a:tblPr>
-              <a:tblGrid>
-                <a:gridCol w="2163470"/>
-                <a:gridCol w="2163470"/>
-                <a:gridCol w="2163470"/>
-                <a:gridCol w="2163470"/>
-                <a:gridCol w="2163472"/>
-              </a:tblGrid>
-              <a:tr h="384048">
-                <a:tc>
-                  <a:txBody>
-                    <a:bodyPr/>
-                    <a:lstStyle/>
-                    <a:p>
-                      <a:r>
-                        <a:rPr sz="1100" b="1">
-                          <a:solidFill>
-                            <a:srgbClr val="FFFFFF"/>
-                          </a:solidFill>
-                          <a:latin typeface="Arial"/>
-                        </a:rPr>
-                        <a:t>Kennzahl</a:t>
-                      </a:r>
-                    </a:p>
-                  </a:txBody>
-                  <a:tcPr>
-                    <a:solidFill>
-                      <a:srgbClr val="1F2C56"/>
-                    </a:solidFill>
-                  </a:tcPr>
-                </a:tc>
-                <a:tc>
-                  <a:txBody>
-                    <a:bodyPr/>
-                    <a:lstStyle/>
-                    <a:p>
-                      <a:r>
-                        <a:rPr sz="1100" b="1">
-                          <a:solidFill>
-                            <a:srgbClr val="FFFFFF"/>
-                          </a:solidFill>
-                          <a:latin typeface="Arial"/>
-                        </a:rPr>
-                        <a:t>2022</a:t>
-                      </a:r>
-                    </a:p>
-                  </a:txBody>
-                  <a:tcPr>
-                    <a:solidFill>
-                      <a:srgbClr val="1F2C56"/>
-                    </a:solidFill>
-                  </a:tcPr>
-                </a:tc>
-                <a:tc>
-                  <a:txBody>
-                    <a:bodyPr/>
-                    <a:lstStyle/>
-                    <a:p>
-                      <a:r>
-                        <a:rPr sz="1100" b="1">
-                          <a:solidFill>
-                            <a:srgbClr val="FFFFFF"/>
-                          </a:solidFill>
-                          <a:latin typeface="Arial"/>
-                        </a:rPr>
-                        <a:t>2023</a:t>
-                      </a:r>
-                    </a:p>
-                  </a:txBody>
-                  <a:tcPr>
-                    <a:solidFill>
-                      <a:srgbClr val="1F2C56"/>
-                    </a:solidFill>
-                  </a:tcPr>
-                </a:tc>
-                <a:tc>
-                  <a:txBody>
-                    <a:bodyPr/>
-                    <a:lstStyle/>
-                    <a:p>
-                      <a:r>
-                        <a:rPr sz="1100" b="1">
-                          <a:solidFill>
-                            <a:srgbClr val="FFFFFF"/>
-                          </a:solidFill>
-                          <a:latin typeface="Arial"/>
-                        </a:rPr>
-                        <a:t>2024</a:t>
-                      </a:r>
-                    </a:p>
-                  </a:txBody>
-                  <a:tcPr>
-                    <a:solidFill>
-                      <a:srgbClr val="1F2C56"/>
-                    </a:solidFill>
-                  </a:tcPr>
-                </a:tc>
-                <a:tc>
-                  <a:txBody>
-                    <a:bodyPr/>
-                    <a:lstStyle/>
-                    <a:p>
-                      <a:r>
-                        <a:rPr sz="1100" b="1">
-                          <a:solidFill>
-                            <a:srgbClr val="FFFFFF"/>
-                          </a:solidFill>
-                          <a:latin typeface="Arial"/>
-                        </a:rPr>
-                        <a:t>Bewertung</a:t>
-                      </a:r>
-                    </a:p>
-                  </a:txBody>
-                  <a:tcPr>
-                    <a:solidFill>
-                      <a:srgbClr val="1F2C56"/>
-                    </a:solidFill>
-                  </a:tcPr>
-                </a:tc>
-              </a:tr>
-              <a:tr h="384048">
-                <a:tc>
-                  <a:txBody>
-                    <a:bodyPr/>
-                    <a:lstStyle/>
-                    <a:p>
-                      <a:r>
-                        <a:rPr sz="1050">
-                          <a:solidFill>
-                            <a:srgbClr val="3D5466"/>
-                          </a:solidFill>
-                          <a:latin typeface="Arial"/>
-                        </a:rPr>
-                        <a:t>EBIT-Marge</a:t>
-                      </a:r>
-                    </a:p>
-                  </a:txBody>
-                  <a:tcPr/>
-                </a:tc>
-                <a:tc>
-                  <a:txBody>
-                    <a:bodyPr/>
-                    <a:lstStyle/>
-                    <a:p>
-                      <a:r>
-                        <a:rPr sz="1050">
-                          <a:solidFill>
-                            <a:srgbClr val="3D5466"/>
-                          </a:solidFill>
-                          <a:latin typeface="Arial"/>
-                        </a:rPr>
-                        <a:t>8,9 %</a:t>
-                      </a:r>
-                    </a:p>
-                  </a:txBody>
-                  <a:tcPr/>
-                </a:tc>
-                <a:tc>
-                  <a:txBody>
-                    <a:bodyPr/>
-                    <a:lstStyle/>
-                    <a:p>
-                      <a:r>
-                        <a:rPr sz="1050">
-                          <a:solidFill>
-                            <a:srgbClr val="3D5466"/>
-                          </a:solidFill>
-                          <a:latin typeface="Arial"/>
-                        </a:rPr>
-                        <a:t>7,3 %</a:t>
-                      </a:r>
-                    </a:p>
-                  </a:txBody>
-                  <a:tcPr/>
-                </a:tc>
-                <a:tc>
-                  <a:txBody>
-                    <a:bodyPr/>
-                    <a:lstStyle/>
-                    <a:p>
-                      <a:r>
-                        <a:rPr sz="1050">
-                          <a:solidFill>
-                            <a:srgbClr val="3D5466"/>
-                          </a:solidFill>
-                          <a:latin typeface="Arial"/>
-                        </a:rPr>
-                        <a:t>6,0 %</a:t>
-                      </a:r>
-                    </a:p>
-                  </a:txBody>
-                  <a:tcPr/>
-                </a:tc>
-                <a:tc>
-                  <a:txBody>
-                    <a:bodyPr/>
-                    <a:lstStyle/>
-                    <a:p>
-                      <a:r>
-                        <a:rPr sz="1050">
-                          <a:solidFill>
-                            <a:srgbClr val="3D5466"/>
-                          </a:solidFill>
-                          <a:latin typeface="Arial"/>
-                        </a:rPr>
-                        <a:t>▼ rückläufig – kritische Entwicklung</a:t>
-                      </a:r>
-                    </a:p>
-                  </a:txBody>
-                  <a:tcPr/>
-                </a:tc>
-              </a:tr>
-              <a:tr h="384048">
-                <a:tc>
-                  <a:txBody>
-                    <a:bodyPr/>
-                    <a:lstStyle/>
-                    <a:p>
-                      <a:r>
-                        <a:rPr sz="1050">
-                          <a:solidFill>
-                            <a:srgbClr val="3D5466"/>
-                          </a:solidFill>
-                          <a:latin typeface="Arial"/>
-                        </a:rPr>
-                        <a:t>Eigenkapitalquote</a:t>
-                      </a:r>
-                    </a:p>
-                  </a:txBody>
-                  <a:tcPr/>
-                </a:tc>
-                <a:tc>
-                  <a:txBody>
-                    <a:bodyPr/>
-                    <a:lstStyle/>
-                    <a:p>
-                      <a:r>
-                        <a:rPr sz="1050">
-                          <a:solidFill>
-                            <a:srgbClr val="3D5466"/>
-                          </a:solidFill>
-                          <a:latin typeface="Arial"/>
-                        </a:rPr>
-                        <a:t>24,7 %</a:t>
-                      </a:r>
-                    </a:p>
-                  </a:txBody>
-                  <a:tcPr/>
-                </a:tc>
-                <a:tc>
-                  <a:txBody>
-                    <a:bodyPr/>
-                    <a:lstStyle/>
-                    <a:p>
-                      <a:r>
-                        <a:rPr sz="1050">
-                          <a:solidFill>
-                            <a:srgbClr val="3D5466"/>
-                          </a:solidFill>
-                          <a:latin typeface="Arial"/>
-                        </a:rPr>
-                        <a:t>25,0 %</a:t>
-                      </a:r>
-                    </a:p>
-                  </a:txBody>
-                  <a:tcPr/>
-                </a:tc>
-                <a:tc>
-                  <a:txBody>
-                    <a:bodyPr/>
-                    <a:lstStyle/>
-                    <a:p>
-                      <a:r>
-                        <a:rPr sz="1050">
-                          <a:solidFill>
-                            <a:srgbClr val="3D5466"/>
-                          </a:solidFill>
-                          <a:latin typeface="Arial"/>
-                        </a:rPr>
-                        <a:t>25,1 %</a:t>
-                      </a:r>
-                    </a:p>
-                  </a:txBody>
-                  <a:tcPr/>
-                </a:tc>
-                <a:tc>
-                  <a:txBody>
-                    <a:bodyPr/>
-                    <a:lstStyle/>
-                    <a:p>
-                      <a:r>
-                        <a:rPr sz="1050">
-                          <a:solidFill>
-                            <a:srgbClr val="3D5466"/>
-                          </a:solidFill>
-                          <a:latin typeface="Arial"/>
-                        </a:rPr>
-                        <a:t>→ knapp, aber leicht verbessernd</a:t>
-                      </a:r>
-                    </a:p>
-                  </a:txBody>
-                  <a:tcPr/>
-                </a:tc>
-              </a:tr>
-              <a:tr h="384048">
-                <a:tc>
-                  <a:txBody>
-                    <a:bodyPr/>
-                    <a:lstStyle/>
-                    <a:p>
-                      <a:r>
-                        <a:rPr sz="1050">
-                          <a:solidFill>
-                            <a:srgbClr val="3D5466"/>
-                          </a:solidFill>
-                          <a:latin typeface="Arial"/>
-                        </a:rPr>
-                        <a:t>Verschuldungsgrad (FK/EK)</a:t>
-                      </a:r>
-                    </a:p>
-                  </a:txBody>
-                  <a:tcPr/>
-                </a:tc>
-                <a:tc>
-                  <a:txBody>
-                    <a:bodyPr/>
-                    <a:lstStyle/>
-                    <a:p>
-                      <a:r>
-                        <a:rPr sz="1050">
-                          <a:solidFill>
-                            <a:srgbClr val="3D5466"/>
-                          </a:solidFill>
-                          <a:latin typeface="Arial"/>
-                        </a:rPr>
-                        <a:t>2,74</a:t>
-                      </a:r>
-                    </a:p>
-                  </a:txBody>
-                  <a:tcPr/>
-                </a:tc>
-                <a:tc>
-                  <a:txBody>
-                    <a:bodyPr/>
-                    <a:lstStyle/>
-                    <a:p>
-                      <a:r>
-                        <a:rPr sz="1050">
-                          <a:solidFill>
-                            <a:srgbClr val="3D5466"/>
-                          </a:solidFill>
-                          <a:latin typeface="Arial"/>
-                        </a:rPr>
-                        <a:t>2,67</a:t>
-                      </a:r>
-                    </a:p>
-                  </a:txBody>
-                  <a:tcPr/>
-                </a:tc>
-                <a:tc>
-                  <a:txBody>
-                    <a:bodyPr/>
-                    <a:lstStyle/>
-                    <a:p>
-                      <a:r>
-                        <a:rPr sz="1050">
-                          <a:solidFill>
-                            <a:srgbClr val="3D5466"/>
-                          </a:solidFill>
-                          <a:latin typeface="Arial"/>
-                        </a:rPr>
-                        <a:t>2,61</a:t>
-                      </a:r>
-                    </a:p>
-                  </a:txBody>
-                  <a:tcPr/>
-                </a:tc>
-                <a:tc>
-                  <a:txBody>
-                    <a:bodyPr/>
-                    <a:lstStyle/>
-                    <a:p>
-                      <a:r>
-                        <a:rPr sz="1050">
-                          <a:solidFill>
-                            <a:srgbClr val="3D5466"/>
-                          </a:solidFill>
-                          <a:latin typeface="Arial"/>
-                        </a:rPr>
-                        <a:t>→ erhöht, über Komfortschwelle</a:t>
-                      </a:r>
-                    </a:p>
-                  </a:txBody>
-                  <a:tcPr/>
-                </a:tc>
-              </a:tr>
-              <a:tr h="384048">
-                <a:tc>
-                  <a:txBody>
-                    <a:bodyPr/>
-                    <a:lstStyle/>
-                    <a:p>
-                      <a:r>
-                        <a:rPr sz="1050">
-                          <a:solidFill>
-                            <a:srgbClr val="3D5466"/>
-                          </a:solidFill>
-                          <a:latin typeface="Arial"/>
-                        </a:rPr>
-                        <a:t>Zinsdeckungsquote</a:t>
-                      </a:r>
-                    </a:p>
-                  </a:txBody>
-                  <a:tcPr/>
-                </a:tc>
-                <a:tc>
-                  <a:txBody>
-                    <a:bodyPr/>
-                    <a:lstStyle/>
-                    <a:p>
-                      <a:r>
-                        <a:rPr sz="1050">
-                          <a:solidFill>
-                            <a:srgbClr val="3D5466"/>
-                          </a:solidFill>
-                          <a:latin typeface="Arial"/>
-                        </a:rPr>
-                        <a:t>10,7x</a:t>
-                      </a:r>
-                    </a:p>
-                  </a:txBody>
-                  <a:tcPr/>
-                </a:tc>
-                <a:tc>
-                  <a:txBody>
-                    <a:bodyPr/>
-                    <a:lstStyle/>
-                    <a:p>
-                      <a:r>
-                        <a:rPr sz="1050">
-                          <a:solidFill>
-                            <a:srgbClr val="3D5466"/>
-                          </a:solidFill>
-                          <a:latin typeface="Arial"/>
-                        </a:rPr>
-                        <a:t>10,4x</a:t>
-                      </a:r>
-                    </a:p>
-                  </a:txBody>
-                  <a:tcPr/>
-                </a:tc>
-                <a:tc>
-                  <a:txBody>
-                    <a:bodyPr/>
-                    <a:lstStyle/>
-                    <a:p>
-                      <a:r>
-                        <a:rPr sz="1050">
-                          <a:solidFill>
-                            <a:srgbClr val="3D5466"/>
-                          </a:solidFill>
-                          <a:latin typeface="Arial"/>
-                        </a:rPr>
-                        <a:t>9,4x</a:t>
-                      </a:r>
-                    </a:p>
-                  </a:txBody>
-                  <a:tcPr/>
-                </a:tc>
-                <a:tc>
-                  <a:txBody>
-                    <a:bodyPr/>
-                    <a:lstStyle/>
-                    <a:p>
-                      <a:r>
-                        <a:rPr sz="1050">
-                          <a:solidFill>
-                            <a:srgbClr val="3D5466"/>
-                          </a:solidFill>
-                          <a:latin typeface="Arial"/>
-                        </a:rPr>
-                        <a:t>▼ sehr gut, aber fallend</a:t>
-                      </a:r>
-                    </a:p>
-                  </a:txBody>
-                  <a:tcPr/>
-                </a:tc>
-              </a:tr>
-              <a:tr h="384048">
-                <a:tc>
-                  <a:txBody>
-                    <a:bodyPr/>
-                    <a:lstStyle/>
-                    <a:p>
-                      <a:r>
-                        <a:rPr sz="1050">
-                          <a:solidFill>
-                            <a:srgbClr val="3D5466"/>
-                          </a:solidFill>
-                          <a:latin typeface="Arial"/>
-                        </a:rPr>
-                        <a:t>Dyn. Verschuldungsgrad (NK/EBITDA)</a:t>
-                      </a:r>
-                    </a:p>
-                  </a:txBody>
-                  <a:tcPr/>
-                </a:tc>
-                <a:tc>
-                  <a:txBody>
-                    <a:bodyPr/>
-                    <a:lstStyle/>
-                    <a:p>
-                      <a:r>
-                        <a:rPr sz="1050">
-                          <a:solidFill>
-                            <a:srgbClr val="3D5466"/>
-                          </a:solidFill>
-                          <a:latin typeface="Arial"/>
-                        </a:rPr>
-                        <a:t>1,68</a:t>
-                      </a:r>
-                    </a:p>
-                  </a:txBody>
-                  <a:tcPr/>
-                </a:tc>
-                <a:tc>
-                  <a:txBody>
-                    <a:bodyPr/>
-                    <a:lstStyle/>
-                    <a:p>
-                      <a:r>
-                        <a:rPr sz="1050">
-                          <a:solidFill>
-                            <a:srgbClr val="3D5466"/>
-                          </a:solidFill>
-                          <a:latin typeface="Arial"/>
-                        </a:rPr>
-                        <a:t>1,93</a:t>
-                      </a:r>
-                    </a:p>
-                  </a:txBody>
-                  <a:tcPr/>
-                </a:tc>
-                <a:tc>
-                  <a:txBody>
-                    <a:bodyPr/>
-                    <a:lstStyle/>
-                    <a:p>
-                      <a:r>
-                        <a:rPr sz="1050">
-                          <a:solidFill>
-                            <a:srgbClr val="3D5466"/>
-                          </a:solidFill>
-                          <a:latin typeface="Arial"/>
-                        </a:rPr>
-                        <a:t>2,29</a:t>
-                      </a:r>
-                    </a:p>
-                  </a:txBody>
-                  <a:tcPr/>
-                </a:tc>
-                <a:tc>
-                  <a:txBody>
-                    <a:bodyPr/>
-                    <a:lstStyle/>
-                    <a:p>
-                      <a:r>
-                        <a:rPr sz="1050">
-                          <a:solidFill>
-                            <a:srgbClr val="3D5466"/>
-                          </a:solidFill>
-                          <a:latin typeface="Arial"/>
-                        </a:rPr>
-                        <a:t>▲ steigt – Achtung</a:t>
-                      </a:r>
-                    </a:p>
-                  </a:txBody>
-                  <a:tcPr/>
-                </a:tc>
-              </a:tr>
-            </a:tbl>
-          </a:graphicData>
-        </a:graphic>
-      </p:graphicFrame>
-      <p:sp>
-        <p:nvSpPr>
-          <p:cNvPr id="8" name="Rectangle 7"/>
-          <p:cNvSpPr/>
-          <p:nvPr/>
-        </p:nvSpPr>
-        <p:spPr>
-          <a:xfrm>
-            <a:off x="0" y="6510528"/>
-            <a:ext cx="12188952" cy="347472"/>
-          </a:xfrm>
-          <a:prstGeom prst="rect">
-            <a:avLst/>
-          </a:prstGeom>
-          <a:solidFill>
-            <a:srgbClr val="0A1937"/>
-          </a:solidFill>
-          <a:ln>
-            <a:noFill/>
-          </a:ln>
-        </p:spPr>
-        <p:style>
-          <a:lnRef idx="1">
-            <a:schemeClr val="accent1"/>
-          </a:lnRef>
-          <a:fillRef idx="3">
-            <a:schemeClr val="accent1"/>
-          </a:fillRef>
-          <a:effectRef idx="2">
-            <a:schemeClr val="accent1"/>
-          </a:effectRef>
-          <a:fontRef idx="minor">
-            <a:schemeClr val="lt1"/>
-          </a:fontRef>
-        </p:style>
-        <p:txBody>
-          <a:bodyPr rtlCol="0" anchor="ctr"/>
-          <a:lstStyle/>
-          <a:p>
-            <a:pPr algn="ctr"/>
-          </a:p>
-        </p:txBody>
-      </p:sp>
-      <p:sp>
-        <p:nvSpPr>
-          <p:cNvPr id="9" name="TextBox 8"/>
-          <p:cNvSpPr txBox="1"/>
-          <p:nvPr/>
-        </p:nvSpPr>
-        <p:spPr>
-          <a:xfrm>
-            <a:off x="685800" y="6583680"/>
-            <a:ext cx="6490411" cy="256032"/>
-          </a:xfrm>
-          <a:prstGeom prst="rect">
-            <a:avLst/>
-          </a:prstGeom>
-          <a:noFill/>
-        </p:spPr>
-        <p:txBody>
-          <a:bodyPr wrap="none">
-            <a:spAutoFit/>
-          </a:bodyPr>
-          <a:lstStyle/>
-          <a:p>
-            <a:pPr algn="l"/>
-            <a:r>
-              <a:rPr sz="700">
-                <a:solidFill>
-                  <a:srgbClr val="A0B4D2"/>
-                </a:solidFill>
-                <a:latin typeface="Consolas"/>
-              </a:rPr>
-              <a:t>FKB Campus  ·  M21</a:t>
-            </a:r>
-          </a:p>
-        </p:txBody>
-      </p:sp>
-      <p:sp>
-        <p:nvSpPr>
-          <p:cNvPr id="10" name="TextBox 9"/>
-          <p:cNvSpPr txBox="1"/>
-          <p:nvPr/>
-        </p:nvSpPr>
-        <p:spPr>
-          <a:xfrm>
-            <a:off x="7176211" y="6583680"/>
-            <a:ext cx="4326940" cy="256032"/>
-          </a:xfrm>
-          <a:prstGeom prst="rect">
-            <a:avLst/>
-          </a:prstGeom>
-          <a:noFill/>
-        </p:spPr>
-        <p:txBody>
-          <a:bodyPr wrap="none">
-            <a:spAutoFit/>
-          </a:bodyPr>
-          <a:lstStyle/>
-          <a:p>
-            <a:pPr algn="r"/>
-            <a:r>
-              <a:rPr sz="700">
-                <a:solidFill>
-                  <a:srgbClr val="A0B4D2"/>
-                </a:solidFill>
-                <a:latin typeface="Consolas"/>
-              </a:rPr>
-              <a:t>Übersicht</a:t>
-            </a:r>
-          </a:p>
-        </p:txBody>
-      </p:sp>
-    </p:spTree>
-  </p:cSld>
-  <p:clrMapOvr>
-    <a:masterClrMapping/>
-  </p:clrMapOvr>
-</p:sld>
-</file>
-
-<file path=ppt/slides/slide19.xml><?xml version="1.0" encoding="utf-8"?>
-<p:sld xmlns:a="http://schemas.openxmlformats.org/drawingml/2006/main" xmlns:p="http://schemas.openxmlformats.org/presentationml/2006/main" xmlns:r="http://schemas.openxmlformats.org/officeDocument/2006/relationships">
-  <p:cSld>
-    <p:spTree>
-      <p:nvGrpSpPr>
-        <p:cNvPr id="1" name=""/>
-        <p:cNvGrpSpPr/>
-        <p:nvPr/>
-      </p:nvGrpSpPr>
-      <p:grpSpPr/>
-      <p:sp>
-        <p:nvSpPr>
-          <p:cNvPr id="2" name="Rectangle 1"/>
-          <p:cNvSpPr/>
-          <p:nvPr/>
-        </p:nvSpPr>
-        <p:spPr>
-          <a:xfrm>
-            <a:off x="0" y="0"/>
-            <a:ext cx="12188952" cy="6858000"/>
-          </a:xfrm>
-          <a:prstGeom prst="rect">
-            <a:avLst/>
-          </a:prstGeom>
-          <a:solidFill>
-            <a:srgbClr val="EDEDF3"/>
-          </a:solidFill>
-          <a:ln>
-            <a:noFill/>
-          </a:ln>
-        </p:spPr>
-        <p:style>
-          <a:lnRef idx="1">
-            <a:schemeClr val="accent1"/>
-          </a:lnRef>
-          <a:fillRef idx="3">
-            <a:schemeClr val="accent1"/>
-          </a:fillRef>
-          <a:effectRef idx="2">
-            <a:schemeClr val="accent1"/>
-          </a:effectRef>
-          <a:fontRef idx="minor">
-            <a:schemeClr val="lt1"/>
-          </a:fontRef>
-        </p:style>
-        <p:txBody>
-          <a:bodyPr rtlCol="0" anchor="ctr"/>
-          <a:lstStyle/>
-          <a:p>
-            <a:pPr algn="ctr"/>
-          </a:p>
-        </p:txBody>
-      </p:sp>
-      <p:sp>
-        <p:nvSpPr>
-          <p:cNvPr id="3" name="Rectangle 2"/>
-          <p:cNvSpPr/>
-          <p:nvPr/>
-        </p:nvSpPr>
-        <p:spPr>
-          <a:xfrm>
-            <a:off x="0" y="0"/>
-            <a:ext cx="12188952" cy="50292"/>
-          </a:xfrm>
-          <a:prstGeom prst="rect">
-            <a:avLst/>
-          </a:prstGeom>
-          <a:solidFill>
-            <a:srgbClr val="1F2C56"/>
-          </a:solidFill>
-          <a:ln>
-            <a:noFill/>
-          </a:ln>
-        </p:spPr>
-        <p:style>
-          <a:lnRef idx="1">
-            <a:schemeClr val="accent1"/>
-          </a:lnRef>
-          <a:fillRef idx="3">
-            <a:schemeClr val="accent1"/>
-          </a:fillRef>
-          <a:effectRef idx="2">
-            <a:schemeClr val="accent1"/>
-          </a:effectRef>
-          <a:fontRef idx="minor">
-            <a:schemeClr val="lt1"/>
-          </a:fontRef>
-        </p:style>
-        <p:txBody>
-          <a:bodyPr rtlCol="0" anchor="ctr"/>
-          <a:lstStyle/>
-          <a:p>
-            <a:pPr algn="ctr"/>
-          </a:p>
-        </p:txBody>
-      </p:sp>
-      <p:sp>
-        <p:nvSpPr>
-          <p:cNvPr id="4" name="TextBox 3"/>
-          <p:cNvSpPr txBox="1"/>
-          <p:nvPr/>
-        </p:nvSpPr>
-        <p:spPr>
-          <a:xfrm>
-            <a:off x="685800" y="109728"/>
-            <a:ext cx="10817352" cy="228600"/>
-          </a:xfrm>
-          <a:prstGeom prst="rect">
-            <a:avLst/>
-          </a:prstGeom>
-          <a:noFill/>
-        </p:spPr>
-        <p:txBody>
-          <a:bodyPr wrap="none">
-            <a:spAutoFit/>
-          </a:bodyPr>
-          <a:lstStyle/>
-          <a:p>
-            <a:pPr algn="l"/>
-            <a:r>
-              <a:rPr sz="750">
-                <a:solidFill>
-                  <a:srgbClr val="78808C"/>
-                </a:solidFill>
-                <a:latin typeface="Consolas"/>
-              </a:rPr>
-              <a:t>M21  ·  INHALT</a:t>
-            </a:r>
-          </a:p>
-        </p:txBody>
-      </p:sp>
-      <p:sp>
-        <p:nvSpPr>
-          <p:cNvPr id="5" name="Rectangle 4"/>
-          <p:cNvSpPr/>
-          <p:nvPr/>
-        </p:nvSpPr>
-        <p:spPr>
-          <a:xfrm>
-            <a:off x="0" y="1234440"/>
-            <a:ext cx="12188952" cy="12700"/>
-          </a:xfrm>
-          <a:prstGeom prst="rect">
-            <a:avLst/>
-          </a:prstGeom>
-          <a:solidFill>
-            <a:srgbClr val="D8DFE4"/>
-          </a:solidFill>
-          <a:ln>
-            <a:noFill/>
-          </a:ln>
-        </p:spPr>
-        <p:style>
-          <a:lnRef idx="1">
-            <a:schemeClr val="accent1"/>
-          </a:lnRef>
-          <a:fillRef idx="3">
-            <a:schemeClr val="accent1"/>
-          </a:fillRef>
-          <a:effectRef idx="2">
-            <a:schemeClr val="accent1"/>
-          </a:effectRef>
-          <a:fontRef idx="minor">
-            <a:schemeClr val="lt1"/>
-          </a:fontRef>
-        </p:style>
-        <p:txBody>
-          <a:bodyPr rtlCol="0" anchor="ctr"/>
-          <a:lstStyle/>
-          <a:p>
-            <a:pPr algn="ctr"/>
-          </a:p>
-        </p:txBody>
-      </p:sp>
-      <p:sp>
-        <p:nvSpPr>
-          <p:cNvPr id="6" name="Rectangle 5"/>
-          <p:cNvSpPr/>
-          <p:nvPr/>
-        </p:nvSpPr>
-        <p:spPr>
-          <a:xfrm>
-            <a:off x="685800" y="502920"/>
-            <a:ext cx="36576" cy="658368"/>
-          </a:xfrm>
-          <a:prstGeom prst="rect">
-            <a:avLst/>
-          </a:prstGeom>
-          <a:solidFill>
-            <a:srgbClr val="D9C089"/>
-          </a:solidFill>
-          <a:ln>
-            <a:noFill/>
-          </a:ln>
-        </p:spPr>
-        <p:style>
-          <a:lnRef idx="1">
-            <a:schemeClr val="accent1"/>
-          </a:lnRef>
-          <a:fillRef idx="3">
-            <a:schemeClr val="accent1"/>
-          </a:fillRef>
-          <a:effectRef idx="2">
-            <a:schemeClr val="accent1"/>
-          </a:effectRef>
-          <a:fontRef idx="minor">
-            <a:schemeClr val="lt1"/>
-          </a:fontRef>
-        </p:style>
-        <p:txBody>
-          <a:bodyPr rtlCol="0" anchor="ctr"/>
-          <a:lstStyle/>
-          <a:p>
-            <a:pPr algn="ctr"/>
-          </a:p>
-        </p:txBody>
-      </p:sp>
       <p:sp>
         <p:nvSpPr>
           <p:cNvPr id="7" name="TextBox 6"/>
@@ -10702,7 +8248,7 @@
                 </a:solidFill>
                 <a:latin typeface="Arial"/>
               </a:rPr>
-              <a:t>AB-1: 8-Felder-Kreditanalyse-Template</a:t>
+              <a:t>Reflexion und Selbstcheck</a:t>
             </a:r>
           </a:p>
         </p:txBody>
@@ -10724,7 +8270,7 @@
           <a:noFill/>
         </p:spPr>
         <p:txBody>
-          <a:bodyPr wrap="square">
+          <a:bodyPr wrap="square" anchor="ctr">
             <a:spAutoFit/>
           </a:bodyPr>
           <a:lstStyle/>
@@ -10744,7 +8290,7 @@
                 </a:solidFill>
                 <a:latin typeface="Arial"/>
               </a:rPr>
-              <a:t>▸  KREDIT-ANALYSE FORMULAR</a:t>
+              <a:t>▸  Bei welcher letzten Entscheidung haben Sie dem Bauchgefühl gefolgt, ohne es zu prüfen?</a:t>
             </a:r>
           </a:p>
           <a:p>
@@ -10763,7 +8309,7 @@
                 </a:solidFill>
                 <a:latin typeface="Arial"/>
               </a:rPr>
-              <a:t>▸  Feld 1 – Zweck &amp; Verwendung (Gewichtung: 10 %)</a:t>
+              <a:t>▸  Welches der acht Felder vernachlässigen Sie in Ihren Vorlagen am ehesten?</a:t>
             </a:r>
           </a:p>
           <a:p>
@@ -10782,178 +8328,7 @@
                 </a:solidFill>
                 <a:latin typeface="Arial"/>
               </a:rPr>
-              <a:t>▸  Ist der Verwendungszweck konkret, prüfbar und wirtschaftlich sinnvoll?</a:t>
-            </a:r>
-          </a:p>
-          <a:p>
-            <a:pPr marL="190500" indent="-190500">
-              <a:spcBef>
-                <a:spcPts val="400"/>
-              </a:spcBef>
-              <a:spcAft>
-                <a:spcPts val="200"/>
-              </a:spcAft>
-            </a:pPr>
-            <a:r>
-              <a:rPr sz="1300">
-                <a:solidFill>
-                  <a:srgbClr val="3D5466"/>
-                </a:solidFill>
-                <a:latin typeface="Arial"/>
-              </a:rPr>
-              <a:t>▸  Bewertung: ☐ 1 (kritisch) ☐ 2 ☐ 3 (ausreichend) ☐ 4 ☐ 5 (sehr gut)</a:t>
-            </a:r>
-          </a:p>
-          <a:p>
-            <a:pPr marL="190500" indent="-190500">
-              <a:spcBef>
-                <a:spcPts val="400"/>
-              </a:spcBef>
-              <a:spcAft>
-                <a:spcPts val="200"/>
-              </a:spcAft>
-            </a:pPr>
-            <a:r>
-              <a:rPr sz="1300">
-                <a:solidFill>
-                  <a:srgbClr val="3D5466"/>
-                </a:solidFill>
-                <a:latin typeface="Arial"/>
-              </a:rPr>
-              <a:t>▸  Feld 2 – Rückzahlungsquelle (Gewichtung: 25 %)</a:t>
-            </a:r>
-          </a:p>
-          <a:p>
-            <a:pPr marL="190500" indent="-190500">
-              <a:spcBef>
-                <a:spcPts val="400"/>
-              </a:spcBef>
-              <a:spcAft>
-                <a:spcPts val="200"/>
-              </a:spcAft>
-            </a:pPr>
-            <a:r>
-              <a:rPr sz="1300">
-                <a:solidFill>
-                  <a:srgbClr val="3D5466"/>
-                </a:solidFill>
-                <a:latin typeface="Arial"/>
-              </a:rPr>
-              <a:t>▸  Stress-Szenario (−10 % Umsatz): Deckungsquote sinkt auf ___x</a:t>
-            </a:r>
-          </a:p>
-          <a:p>
-            <a:pPr marL="190500" indent="-190500">
-              <a:spcBef>
-                <a:spcPts val="400"/>
-              </a:spcBef>
-              <a:spcAft>
-                <a:spcPts val="200"/>
-              </a:spcAft>
-            </a:pPr>
-            <a:r>
-              <a:rPr sz="1300">
-                <a:solidFill>
-                  <a:srgbClr val="3D5466"/>
-                </a:solidFill>
-                <a:latin typeface="Arial"/>
-              </a:rPr>
-              <a:t>▸  Bewertung: ☐ 1 ☐ 2 ☐ 3 ☐ 4 ☐ 5</a:t>
-            </a:r>
-          </a:p>
-          <a:p>
-            <a:pPr marL="190500" indent="-190500">
-              <a:spcBef>
-                <a:spcPts val="400"/>
-              </a:spcBef>
-              <a:spcAft>
-                <a:spcPts val="200"/>
-              </a:spcAft>
-            </a:pPr>
-            <a:r>
-              <a:rPr sz="1300">
-                <a:solidFill>
-                  <a:srgbClr val="3D5466"/>
-                </a:solidFill>
-                <a:latin typeface="Arial"/>
-              </a:rPr>
-              <a:t>▸  Feld 3 – Kapitalstruktur (Gewichtung: 15 %)</a:t>
-            </a:r>
-          </a:p>
-          <a:p>
-            <a:pPr marL="190500" indent="-190500">
-              <a:spcBef>
-                <a:spcPts val="400"/>
-              </a:spcBef>
-              <a:spcAft>
-                <a:spcPts val="200"/>
-              </a:spcAft>
-            </a:pPr>
-            <a:r>
-              <a:rPr sz="1300">
-                <a:solidFill>
-                  <a:srgbClr val="3D5466"/>
-                </a:solidFill>
-                <a:latin typeface="Arial"/>
-              </a:rPr>
-              <a:t>▸  Bewertung: ☐ 1 ☐ 2 ☐ 3 ☐ 4 ☐ 5</a:t>
-            </a:r>
-          </a:p>
-          <a:p>
-            <a:pPr marL="190500" indent="-190500">
-              <a:spcBef>
-                <a:spcPts val="400"/>
-              </a:spcBef>
-              <a:spcAft>
-                <a:spcPts val="200"/>
-              </a:spcAft>
-            </a:pPr>
-            <a:r>
-              <a:rPr sz="1300">
-                <a:solidFill>
-                  <a:srgbClr val="3D5466"/>
-                </a:solidFill>
-                <a:latin typeface="Arial"/>
-              </a:rPr>
-              <a:t>▸  Feld 4 – Managementqualität (Gewichtung: 20 %)</a:t>
-            </a:r>
-          </a:p>
-          <a:p>
-            <a:pPr marL="190500" indent="-190500">
-              <a:spcBef>
-                <a:spcPts val="400"/>
-              </a:spcBef>
-              <a:spcAft>
-                <a:spcPts val="200"/>
-              </a:spcAft>
-            </a:pPr>
-            <a:r>
-              <a:rPr sz="1300">
-                <a:solidFill>
-                  <a:srgbClr val="3D5466"/>
-                </a:solidFill>
-                <a:latin typeface="Arial"/>
-              </a:rPr>
-              <a:t>▸  Nachfolge geklärt? ☐ Ja ☐ Nein | Transparenz im Gespräch: ☐ offen ☐ ausweichend</a:t>
-            </a:r>
-          </a:p>
-          <a:p>
-            <a:pPr marL="190500" indent="-190500">
-              <a:spcBef>
-                <a:spcPts val="400"/>
-              </a:spcBef>
-              <a:spcAft>
-                <a:spcPts val="200"/>
-              </a:spcAft>
-            </a:pPr>
-            <a:r>
-              <a:rPr sz="1300">
-                <a:solidFill>
-                  <a:srgbClr val="3D5466"/>
-                </a:solidFill>
-                <a:latin typeface="Arial"/>
-              </a:rPr>
-              <a:t>▸  Bewertung: ☐ 1 ☐ 2 ☐ 3 ☐ 4 ☐ 5</a:t>
+              <a:t>▸  Wie formulieren Sie eine Auflage so, dass sie den Kunden nicht abschreckt, aber das Risiko senkt?</a:t>
             </a:r>
           </a:p>
         </p:txBody>
@@ -11410,838 +8785,6 @@
 </p:sld>
 </file>
 
-<file path=ppt/slides/slide20.xml><?xml version="1.0" encoding="utf-8"?>
-<p:sld xmlns:a="http://schemas.openxmlformats.org/drawingml/2006/main" xmlns:p="http://schemas.openxmlformats.org/presentationml/2006/main" xmlns:r="http://schemas.openxmlformats.org/officeDocument/2006/relationships">
-  <p:cSld>
-    <p:spTree>
-      <p:nvGrpSpPr>
-        <p:cNvPr id="1" name=""/>
-        <p:cNvGrpSpPr/>
-        <p:nvPr/>
-      </p:nvGrpSpPr>
-      <p:grpSpPr/>
-      <p:sp>
-        <p:nvSpPr>
-          <p:cNvPr id="2" name="Rectangle 1"/>
-          <p:cNvSpPr/>
-          <p:nvPr/>
-        </p:nvSpPr>
-        <p:spPr>
-          <a:xfrm>
-            <a:off x="0" y="0"/>
-            <a:ext cx="12188952" cy="6858000"/>
-          </a:xfrm>
-          <a:prstGeom prst="rect">
-            <a:avLst/>
-          </a:prstGeom>
-          <a:solidFill>
-            <a:srgbClr val="FFFFFF"/>
-          </a:solidFill>
-          <a:ln>
-            <a:noFill/>
-          </a:ln>
-        </p:spPr>
-        <p:style>
-          <a:lnRef idx="1">
-            <a:schemeClr val="accent1"/>
-          </a:lnRef>
-          <a:fillRef idx="3">
-            <a:schemeClr val="accent1"/>
-          </a:fillRef>
-          <a:effectRef idx="2">
-            <a:schemeClr val="accent1"/>
-          </a:effectRef>
-          <a:fontRef idx="minor">
-            <a:schemeClr val="lt1"/>
-          </a:fontRef>
-        </p:style>
-        <p:txBody>
-          <a:bodyPr rtlCol="0" anchor="ctr"/>
-          <a:lstStyle/>
-          <a:p>
-            <a:pPr algn="ctr"/>
-          </a:p>
-        </p:txBody>
-      </p:sp>
-      <p:sp>
-        <p:nvSpPr>
-          <p:cNvPr id="3" name="Rectangle 2"/>
-          <p:cNvSpPr/>
-          <p:nvPr/>
-        </p:nvSpPr>
-        <p:spPr>
-          <a:xfrm>
-            <a:off x="0" y="0"/>
-            <a:ext cx="12188952" cy="50292"/>
-          </a:xfrm>
-          <a:prstGeom prst="rect">
-            <a:avLst/>
-          </a:prstGeom>
-          <a:solidFill>
-            <a:srgbClr val="1F2C56"/>
-          </a:solidFill>
-          <a:ln>
-            <a:noFill/>
-          </a:ln>
-        </p:spPr>
-        <p:style>
-          <a:lnRef idx="1">
-            <a:schemeClr val="accent1"/>
-          </a:lnRef>
-          <a:fillRef idx="3">
-            <a:schemeClr val="accent1"/>
-          </a:fillRef>
-          <a:effectRef idx="2">
-            <a:schemeClr val="accent1"/>
-          </a:effectRef>
-          <a:fontRef idx="minor">
-            <a:schemeClr val="lt1"/>
-          </a:fontRef>
-        </p:style>
-        <p:txBody>
-          <a:bodyPr rtlCol="0" anchor="ctr"/>
-          <a:lstStyle/>
-          <a:p>
-            <a:pPr algn="ctr"/>
-          </a:p>
-        </p:txBody>
-      </p:sp>
-      <p:sp>
-        <p:nvSpPr>
-          <p:cNvPr id="4" name="TextBox 3"/>
-          <p:cNvSpPr txBox="1"/>
-          <p:nvPr/>
-        </p:nvSpPr>
-        <p:spPr>
-          <a:xfrm>
-            <a:off x="685800" y="109728"/>
-            <a:ext cx="10817352" cy="228600"/>
-          </a:xfrm>
-          <a:prstGeom prst="rect">
-            <a:avLst/>
-          </a:prstGeom>
-          <a:noFill/>
-        </p:spPr>
-        <p:txBody>
-          <a:bodyPr wrap="none">
-            <a:spAutoFit/>
-          </a:bodyPr>
-          <a:lstStyle/>
-          <a:p>
-            <a:pPr algn="l"/>
-            <a:r>
-              <a:rPr sz="750">
-                <a:solidFill>
-                  <a:srgbClr val="78808C"/>
-                </a:solidFill>
-                <a:latin typeface="Consolas"/>
-              </a:rPr>
-              <a:t>M21  ·  ÜBERSICHT</a:t>
-            </a:r>
-          </a:p>
-        </p:txBody>
-      </p:sp>
-      <p:sp>
-        <p:nvSpPr>
-          <p:cNvPr id="5" name="TextBox 4"/>
-          <p:cNvSpPr txBox="1"/>
-          <p:nvPr/>
-        </p:nvSpPr>
-        <p:spPr>
-          <a:xfrm>
-            <a:off x="685800" y="502920"/>
-            <a:ext cx="10817352" cy="594360"/>
-          </a:xfrm>
-          <a:prstGeom prst="rect">
-            <a:avLst/>
-          </a:prstGeom>
-          <a:noFill/>
-        </p:spPr>
-        <p:txBody>
-          <a:bodyPr wrap="square">
-            <a:spAutoFit/>
-          </a:bodyPr>
-          <a:lstStyle/>
-          <a:p>
-            <a:pPr algn="l"/>
-            <a:r>
-              <a:rPr sz="2000" b="1" i="0">
-                <a:solidFill>
-                  <a:srgbClr val="1F2C56"/>
-                </a:solidFill>
-                <a:latin typeface="Arial"/>
-              </a:rPr>
-              <a:t>AB-1: 8-Felder-Kreditanalyse-Template</a:t>
-            </a:r>
-          </a:p>
-        </p:txBody>
-      </p:sp>
-      <p:sp>
-        <p:nvSpPr>
-          <p:cNvPr id="6" name="Rectangle 5"/>
-          <p:cNvSpPr/>
-          <p:nvPr/>
-        </p:nvSpPr>
-        <p:spPr>
-          <a:xfrm>
-            <a:off x="685800" y="1143000"/>
-            <a:ext cx="10817352" cy="25400"/>
-          </a:xfrm>
-          <a:prstGeom prst="rect">
-            <a:avLst/>
-          </a:prstGeom>
-          <a:solidFill>
-            <a:srgbClr val="D9C089"/>
-          </a:solidFill>
-          <a:ln>
-            <a:noFill/>
-          </a:ln>
-        </p:spPr>
-        <p:style>
-          <a:lnRef idx="1">
-            <a:schemeClr val="accent1"/>
-          </a:lnRef>
-          <a:fillRef idx="3">
-            <a:schemeClr val="accent1"/>
-          </a:fillRef>
-          <a:effectRef idx="2">
-            <a:schemeClr val="accent1"/>
-          </a:effectRef>
-          <a:fontRef idx="minor">
-            <a:schemeClr val="lt1"/>
-          </a:fontRef>
-        </p:style>
-        <p:txBody>
-          <a:bodyPr rtlCol="0" anchor="ctr"/>
-          <a:lstStyle/>
-          <a:p>
-            <a:pPr algn="ctr"/>
-          </a:p>
-        </p:txBody>
-      </p:sp>
-      <p:graphicFrame>
-        <p:nvGraphicFramePr>
-          <p:cNvPr id="7" name="Table 6"/>
-          <p:cNvGraphicFramePr>
-            <a:graphicFrameLocks noGrp="1"/>
-          </p:cNvGraphicFramePr>
-          <p:nvPr/>
-        </p:nvGraphicFramePr>
-        <p:xfrm>
-          <a:off x="685800" y="1417320"/>
-          <a:ext cx="10817352" cy="2688336"/>
-        </p:xfrm>
-        <a:graphic>
-          <a:graphicData uri="http://schemas.openxmlformats.org/drawingml/2006/table">
-            <a:tbl>
-              <a:tblPr firstRow="1" bandRow="1">
-                <a:tableStyleId>{5C22544A-7EE6-4342-B048-85BDC9FD1C3A}</a:tableStyleId>
-              </a:tblPr>
-              <a:tblGrid>
-                <a:gridCol w="2704338"/>
-                <a:gridCol w="2704338"/>
-                <a:gridCol w="2704338"/>
-                <a:gridCol w="2704338"/>
-              </a:tblGrid>
-              <a:tr h="384048">
-                <a:tc>
-                  <a:txBody>
-                    <a:bodyPr/>
-                    <a:lstStyle/>
-                    <a:p>
-                      <a:r>
-                        <a:rPr sz="1100" b="1">
-                          <a:solidFill>
-                            <a:srgbClr val="FFFFFF"/>
-                          </a:solidFill>
-                          <a:latin typeface="Arial"/>
-                        </a:rPr>
-                        <a:t>Sicherheitentyp</a:t>
-                      </a:r>
-                    </a:p>
-                  </a:txBody>
-                  <a:tcPr>
-                    <a:solidFill>
-                      <a:srgbClr val="1F2C56"/>
-                    </a:solidFill>
-                  </a:tcPr>
-                </a:tc>
-                <a:tc>
-                  <a:txBody>
-                    <a:bodyPr/>
-                    <a:lstStyle/>
-                    <a:p>
-                      <a:r>
-                        <a:rPr sz="1100" b="1">
-                          <a:solidFill>
-                            <a:srgbClr val="FFFFFF"/>
-                          </a:solidFill>
-                          <a:latin typeface="Arial"/>
-                        </a:rPr>
-                        <a:t>Wert</a:t>
-                      </a:r>
-                    </a:p>
-                  </a:txBody>
-                  <a:tcPr>
-                    <a:solidFill>
-                      <a:srgbClr val="1F2C56"/>
-                    </a:solidFill>
-                  </a:tcPr>
-                </a:tc>
-                <a:tc>
-                  <a:txBody>
-                    <a:bodyPr/>
-                    <a:lstStyle/>
-                    <a:p>
-                      <a:r>
-                        <a:rPr sz="1100" b="1">
-                          <a:solidFill>
-                            <a:srgbClr val="FFFFFF"/>
-                          </a:solidFill>
-                          <a:latin typeface="Arial"/>
-                        </a:rPr>
-                        <a:t>Beleihungswert</a:t>
-                      </a:r>
-                    </a:p>
-                  </a:txBody>
-                  <a:tcPr>
-                    <a:solidFill>
-                      <a:srgbClr val="1F2C56"/>
-                    </a:solidFill>
-                  </a:tcPr>
-                </a:tc>
-                <a:tc>
-                  <a:txBody>
-                    <a:bodyPr/>
-                    <a:lstStyle/>
-                    <a:p>
-                      <a:r>
-                        <a:rPr sz="1100" b="1">
-                          <a:solidFill>
-                            <a:srgbClr val="FFFFFF"/>
-                          </a:solidFill>
-                          <a:latin typeface="Arial"/>
-                        </a:rPr>
-                        <a:t>Rang</a:t>
-                      </a:r>
-                    </a:p>
-                  </a:txBody>
-                  <a:tcPr>
-                    <a:solidFill>
-                      <a:srgbClr val="1F2C56"/>
-                    </a:solidFill>
-                  </a:tcPr>
-                </a:tc>
-              </a:tr>
-              <a:tr h="384048">
-                <a:tc>
-                  <a:txBody>
-                    <a:bodyPr/>
-                    <a:lstStyle/>
-                    <a:p>
-                      <a:r>
-                        <a:rPr sz="1050">
-                          <a:solidFill>
-                            <a:srgbClr val="3D5466"/>
-                          </a:solidFill>
-                          <a:latin typeface="Arial"/>
-                        </a:rPr>
-                        <a:t>_______________</a:t>
-                      </a:r>
-                    </a:p>
-                  </a:txBody>
-                  <a:tcPr/>
-                </a:tc>
-                <a:tc>
-                  <a:txBody>
-                    <a:bodyPr/>
-                    <a:lstStyle/>
-                    <a:p>
-                      <a:r>
-                        <a:rPr sz="1050">
-                          <a:solidFill>
-                            <a:srgbClr val="3D5466"/>
-                          </a:solidFill>
-                          <a:latin typeface="Arial"/>
-                        </a:rPr>
-                        <a:t>___</a:t>
-                      </a:r>
-                    </a:p>
-                  </a:txBody>
-                  <a:tcPr/>
-                </a:tc>
-                <a:tc>
-                  <a:txBody>
-                    <a:bodyPr/>
-                    <a:lstStyle/>
-                    <a:p>
-                      <a:r>
-                        <a:rPr sz="1050">
-                          <a:solidFill>
-                            <a:srgbClr val="3D5466"/>
-                          </a:solidFill>
-                          <a:latin typeface="Arial"/>
-                        </a:rPr>
-                        <a:t>___</a:t>
-                      </a:r>
-                    </a:p>
-                  </a:txBody>
-                  <a:tcPr/>
-                </a:tc>
-                <a:tc>
-                  <a:txBody>
-                    <a:bodyPr/>
-                    <a:lstStyle/>
-                    <a:p>
-                      <a:r>
-                        <a:rPr sz="1050">
-                          <a:solidFill>
-                            <a:srgbClr val="3D5466"/>
-                          </a:solidFill>
-                          <a:latin typeface="Arial"/>
-                        </a:rPr>
-                        <a:t>___</a:t>
-                      </a:r>
-                    </a:p>
-                  </a:txBody>
-                  <a:tcPr/>
-                </a:tc>
-              </a:tr>
-              <a:tr h="384048">
-                <a:tc>
-                  <a:txBody>
-                    <a:bodyPr/>
-                    <a:lstStyle/>
-                    <a:p>
-                      <a:r>
-                        <a:rPr sz="1050">
-                          <a:solidFill>
-                            <a:srgbClr val="3D5466"/>
-                          </a:solidFill>
-                          <a:latin typeface="Arial"/>
-                        </a:rPr>
-                        <a:t>_______________</a:t>
-                      </a:r>
-                    </a:p>
-                  </a:txBody>
-                  <a:tcPr/>
-                </a:tc>
-                <a:tc>
-                  <a:txBody>
-                    <a:bodyPr/>
-                    <a:lstStyle/>
-                    <a:p>
-                      <a:r>
-                        <a:rPr sz="1050">
-                          <a:solidFill>
-                            <a:srgbClr val="3D5466"/>
-                          </a:solidFill>
-                          <a:latin typeface="Arial"/>
-                        </a:rPr>
-                        <a:t>___</a:t>
-                      </a:r>
-                    </a:p>
-                  </a:txBody>
-                  <a:tcPr/>
-                </a:tc>
-                <a:tc>
-                  <a:txBody>
-                    <a:bodyPr/>
-                    <a:lstStyle/>
-                    <a:p>
-                      <a:r>
-                        <a:rPr sz="1050">
-                          <a:solidFill>
-                            <a:srgbClr val="3D5466"/>
-                          </a:solidFill>
-                          <a:latin typeface="Arial"/>
-                        </a:rPr>
-                        <a:t>___</a:t>
-                      </a:r>
-                    </a:p>
-                  </a:txBody>
-                  <a:tcPr/>
-                </a:tc>
-                <a:tc>
-                  <a:txBody>
-                    <a:bodyPr/>
-                    <a:lstStyle/>
-                    <a:p>
-                      <a:r>
-                        <a:rPr sz="1050">
-                          <a:solidFill>
-                            <a:srgbClr val="3D5466"/>
-                          </a:solidFill>
-                          <a:latin typeface="Arial"/>
-                        </a:rPr>
-                        <a:t>___</a:t>
-                      </a:r>
-                    </a:p>
-                  </a:txBody>
-                  <a:tcPr/>
-                </a:tc>
-              </a:tr>
-              <a:tr h="384048">
-                <a:tc>
-                  <a:txBody>
-                    <a:bodyPr/>
-                    <a:lstStyle/>
-                    <a:p>
-                      <a:r>
-                        <a:rPr sz="1050">
-                          <a:solidFill>
-                            <a:srgbClr val="3D5466"/>
-                          </a:solidFill>
-                          <a:latin typeface="Arial"/>
-                        </a:rPr>
-                        <a:t>_______________</a:t>
-                      </a:r>
-                    </a:p>
-                  </a:txBody>
-                  <a:tcPr/>
-                </a:tc>
-                <a:tc>
-                  <a:txBody>
-                    <a:bodyPr/>
-                    <a:lstStyle/>
-                    <a:p>
-                      <a:r>
-                        <a:rPr sz="1050">
-                          <a:solidFill>
-                            <a:srgbClr val="3D5466"/>
-                          </a:solidFill>
-                          <a:latin typeface="Arial"/>
-                        </a:rPr>
-                        <a:t>___</a:t>
-                      </a:r>
-                    </a:p>
-                  </a:txBody>
-                  <a:tcPr/>
-                </a:tc>
-                <a:tc>
-                  <a:txBody>
-                    <a:bodyPr/>
-                    <a:lstStyle/>
-                    <a:p>
-                      <a:r>
-                        <a:rPr sz="1050">
-                          <a:solidFill>
-                            <a:srgbClr val="3D5466"/>
-                          </a:solidFill>
-                          <a:latin typeface="Arial"/>
-                        </a:rPr>
-                        <a:t>___</a:t>
-                      </a:r>
-                    </a:p>
-                  </a:txBody>
-                  <a:tcPr/>
-                </a:tc>
-                <a:tc>
-                  <a:txBody>
-                    <a:bodyPr/>
-                    <a:lstStyle/>
-                    <a:p>
-                      <a:r>
-                        <a:rPr sz="1050">
-                          <a:solidFill>
-                            <a:srgbClr val="3D5466"/>
-                          </a:solidFill>
-                          <a:latin typeface="Arial"/>
-                        </a:rPr>
-                        <a:t>___</a:t>
-                      </a:r>
-                    </a:p>
-                  </a:txBody>
-                  <a:tcPr/>
-                </a:tc>
-              </a:tr>
-              <a:tr h="384048">
-                <a:tc>
-                  <a:txBody>
-                    <a:bodyPr/>
-                    <a:lstStyle/>
-                    <a:p>
-                      <a:r>
-                        <a:rPr sz="1050">
-                          <a:solidFill>
-                            <a:srgbClr val="3D5466"/>
-                          </a:solidFill>
-                          <a:latin typeface="Arial"/>
-                        </a:rPr>
-                        <a:t>Gesamt-Beleihungswert</a:t>
-                      </a:r>
-                    </a:p>
-                  </a:txBody>
-                  <a:tcPr/>
-                </a:tc>
-                <a:tc>
-                  <a:txBody>
-                    <a:bodyPr/>
-                    <a:lstStyle/>
-                    <a:p/>
-                  </a:txBody>
-                  <a:tcPr/>
-                </a:tc>
-                <a:tc>
-                  <a:txBody>
-                    <a:bodyPr/>
-                    <a:lstStyle/>
-                    <a:p>
-                      <a:r>
-                        <a:rPr sz="1050">
-                          <a:solidFill>
-                            <a:srgbClr val="3D5466"/>
-                          </a:solidFill>
-                          <a:latin typeface="Arial"/>
-                        </a:rPr>
-                        <a:t>___</a:t>
-                      </a:r>
-                    </a:p>
-                  </a:txBody>
-                  <a:tcPr/>
-                </a:tc>
-                <a:tc>
-                  <a:txBody>
-                    <a:bodyPr/>
-                    <a:lstStyle/>
-                    <a:p/>
-                  </a:txBody>
-                  <a:tcPr/>
-                </a:tc>
-              </a:tr>
-              <a:tr h="384048">
-                <a:tc>
-                  <a:txBody>
-                    <a:bodyPr/>
-                    <a:lstStyle/>
-                    <a:p>
-                      <a:r>
-                        <a:rPr sz="1050">
-                          <a:solidFill>
-                            <a:srgbClr val="3D5466"/>
-                          </a:solidFill>
-                          <a:latin typeface="Arial"/>
-                        </a:rPr>
-                        <a:t>Kreditbetrag</a:t>
-                      </a:r>
-                    </a:p>
-                  </a:txBody>
-                  <a:tcPr/>
-                </a:tc>
-                <a:tc>
-                  <a:txBody>
-                    <a:bodyPr/>
-                    <a:lstStyle/>
-                    <a:p/>
-                  </a:txBody>
-                  <a:tcPr/>
-                </a:tc>
-                <a:tc>
-                  <a:txBody>
-                    <a:bodyPr/>
-                    <a:lstStyle/>
-                    <a:p>
-                      <a:r>
-                        <a:rPr sz="1050">
-                          <a:solidFill>
-                            <a:srgbClr val="3D5466"/>
-                          </a:solidFill>
-                          <a:latin typeface="Arial"/>
-                        </a:rPr>
-                        <a:t>___</a:t>
-                      </a:r>
-                    </a:p>
-                  </a:txBody>
-                  <a:tcPr/>
-                </a:tc>
-                <a:tc>
-                  <a:txBody>
-                    <a:bodyPr/>
-                    <a:lstStyle/>
-                    <a:p/>
-                  </a:txBody>
-                  <a:tcPr/>
-                </a:tc>
-              </a:tr>
-              <a:tr h="384048">
-                <a:tc>
-                  <a:txBody>
-                    <a:bodyPr/>
-                    <a:lstStyle/>
-                    <a:p>
-                      <a:r>
-                        <a:rPr sz="1050">
-                          <a:solidFill>
-                            <a:srgbClr val="3D5466"/>
-                          </a:solidFill>
-                          <a:latin typeface="Arial"/>
-                        </a:rPr>
-                        <a:t>Deckungsgrad</a:t>
-                      </a:r>
-                    </a:p>
-                  </a:txBody>
-                  <a:tcPr/>
-                </a:tc>
-                <a:tc>
-                  <a:txBody>
-                    <a:bodyPr/>
-                    <a:lstStyle/>
-                    <a:p/>
-                  </a:txBody>
-                  <a:tcPr/>
-                </a:tc>
-                <a:tc>
-                  <a:txBody>
-                    <a:bodyPr/>
-                    <a:lstStyle/>
-                    <a:p>
-                      <a:r>
-                        <a:rPr sz="1050">
-                          <a:solidFill>
-                            <a:srgbClr val="3D5466"/>
-                          </a:solidFill>
-                          <a:latin typeface="Arial"/>
-                        </a:rPr>
-                        <a:t>___%</a:t>
-                      </a:r>
-                    </a:p>
-                  </a:txBody>
-                  <a:tcPr/>
-                </a:tc>
-                <a:tc>
-                  <a:txBody>
-                    <a:bodyPr/>
-                    <a:lstStyle/>
-                    <a:p/>
-                  </a:txBody>
-                  <a:tcPr/>
-                </a:tc>
-              </a:tr>
-            </a:tbl>
-          </a:graphicData>
-        </a:graphic>
-      </p:graphicFrame>
-      <p:sp>
-        <p:nvSpPr>
-          <p:cNvPr id="8" name="Rectangle 7"/>
-          <p:cNvSpPr/>
-          <p:nvPr/>
-        </p:nvSpPr>
-        <p:spPr>
-          <a:xfrm>
-            <a:off x="0" y="6510528"/>
-            <a:ext cx="12188952" cy="347472"/>
-          </a:xfrm>
-          <a:prstGeom prst="rect">
-            <a:avLst/>
-          </a:prstGeom>
-          <a:solidFill>
-            <a:srgbClr val="0A1937"/>
-          </a:solidFill>
-          <a:ln>
-            <a:noFill/>
-          </a:ln>
-        </p:spPr>
-        <p:style>
-          <a:lnRef idx="1">
-            <a:schemeClr val="accent1"/>
-          </a:lnRef>
-          <a:fillRef idx="3">
-            <a:schemeClr val="accent1"/>
-          </a:fillRef>
-          <a:effectRef idx="2">
-            <a:schemeClr val="accent1"/>
-          </a:effectRef>
-          <a:fontRef idx="minor">
-            <a:schemeClr val="lt1"/>
-          </a:fontRef>
-        </p:style>
-        <p:txBody>
-          <a:bodyPr rtlCol="0" anchor="ctr"/>
-          <a:lstStyle/>
-          <a:p>
-            <a:pPr algn="ctr"/>
-          </a:p>
-        </p:txBody>
-      </p:sp>
-      <p:sp>
-        <p:nvSpPr>
-          <p:cNvPr id="9" name="TextBox 8"/>
-          <p:cNvSpPr txBox="1"/>
-          <p:nvPr/>
-        </p:nvSpPr>
-        <p:spPr>
-          <a:xfrm>
-            <a:off x="685800" y="6583680"/>
-            <a:ext cx="6490411" cy="256032"/>
-          </a:xfrm>
-          <a:prstGeom prst="rect">
-            <a:avLst/>
-          </a:prstGeom>
-          <a:noFill/>
-        </p:spPr>
-        <p:txBody>
-          <a:bodyPr wrap="none">
-            <a:spAutoFit/>
-          </a:bodyPr>
-          <a:lstStyle/>
-          <a:p>
-            <a:pPr algn="l"/>
-            <a:r>
-              <a:rPr sz="700">
-                <a:solidFill>
-                  <a:srgbClr val="A0B4D2"/>
-                </a:solidFill>
-                <a:latin typeface="Consolas"/>
-              </a:rPr>
-              <a:t>FKB Campus  ·  M21</a:t>
-            </a:r>
-          </a:p>
-        </p:txBody>
-      </p:sp>
-      <p:sp>
-        <p:nvSpPr>
-          <p:cNvPr id="10" name="TextBox 9"/>
-          <p:cNvSpPr txBox="1"/>
-          <p:nvPr/>
-        </p:nvSpPr>
-        <p:spPr>
-          <a:xfrm>
-            <a:off x="7176211" y="6583680"/>
-            <a:ext cx="4326940" cy="256032"/>
-          </a:xfrm>
-          <a:prstGeom prst="rect">
-            <a:avLst/>
-          </a:prstGeom>
-          <a:noFill/>
-        </p:spPr>
-        <p:txBody>
-          <a:bodyPr wrap="none">
-            <a:spAutoFit/>
-          </a:bodyPr>
-          <a:lstStyle/>
-          <a:p>
-            <a:pPr algn="r"/>
-            <a:r>
-              <a:rPr sz="700">
-                <a:solidFill>
-                  <a:srgbClr val="A0B4D2"/>
-                </a:solidFill>
-                <a:latin typeface="Consolas"/>
-              </a:rPr>
-              <a:t>Übersicht</a:t>
-            </a:r>
-          </a:p>
-        </p:txBody>
-      </p:sp>
-    </p:spTree>
-  </p:cSld>
-  <p:clrMapOvr>
-    <a:masterClrMapping/>
-  </p:clrMapOvr>
-</p:sld>
-</file>
-
 <file path=ppt/slides/slide3.xml><?xml version="1.0" encoding="utf-8"?>
 <p:sld xmlns:a="http://schemas.openxmlformats.org/drawingml/2006/main" xmlns:p="http://schemas.openxmlformats.org/presentationml/2006/main" xmlns:r="http://schemas.openxmlformats.org/officeDocument/2006/relationships">
   <p:cSld>
@@ -13423,7 +9966,7 @@
             <a:avLst/>
           </a:prstGeom>
           <a:solidFill>
-            <a:srgbClr val="FFFFFF"/>
+            <a:srgbClr val="1F2C56"/>
           </a:solidFill>
           <a:ln>
             <a:noFill/>
@@ -13453,57 +9996,14 @@
       </p:sp>
       <p:sp>
         <p:nvSpPr>
-          <p:cNvPr id="3" name="Rectangle 2"/>
-          <p:cNvSpPr/>
-          <p:nvPr/>
-        </p:nvSpPr>
-        <p:spPr>
-          <a:xfrm>
-            <a:off x="0" y="0"/>
-            <a:ext cx="12188952" cy="50292"/>
-          </a:xfrm>
-          <a:prstGeom prst="rect">
-            <a:avLst/>
-          </a:prstGeom>
-          <a:solidFill>
-            <a:srgbClr val="1F2C56"/>
-          </a:solidFill>
-          <a:ln>
-            <a:noFill/>
-          </a:ln>
-        </p:spPr>
-        <p:style>
-          <a:lnRef idx="1">
-            <a:schemeClr val="accent1"/>
-          </a:lnRef>
-          <a:fillRef idx="3">
-            <a:schemeClr val="accent1"/>
-          </a:fillRef>
-          <a:effectRef idx="2">
-            <a:schemeClr val="accent1"/>
-          </a:effectRef>
-          <a:fontRef idx="minor">
-            <a:schemeClr val="lt1"/>
-          </a:fontRef>
-        </p:style>
-        <p:txBody>
-          <a:bodyPr rtlCol="0" anchor="ctr"/>
-          <a:lstStyle/>
-          <a:p>
-            <a:pPr algn="ctr"/>
-          </a:p>
-        </p:txBody>
-      </p:sp>
-      <p:sp>
-        <p:nvSpPr>
-          <p:cNvPr id="4" name="TextBox 3"/>
+          <p:cNvPr id="3" name="TextBox 2"/>
           <p:cNvSpPr txBox="1"/>
           <p:nvPr/>
         </p:nvSpPr>
         <p:spPr>
           <a:xfrm>
-            <a:off x="685800" y="109728"/>
-            <a:ext cx="10817352" cy="228600"/>
+            <a:off x="685800" y="2377440"/>
+            <a:ext cx="10817352" cy="365760"/>
           </a:xfrm>
           <a:prstGeom prst="rect">
             <a:avLst/>
@@ -13518,62 +10018,27 @@
           <a:p>
             <a:pPr algn="l"/>
             <a:r>
-              <a:rPr sz="750">
-                <a:solidFill>
-                  <a:srgbClr val="78808C"/>
+              <a:rPr sz="1200">
+                <a:solidFill>
+                  <a:srgbClr val="D9C089"/>
                 </a:solidFill>
                 <a:latin typeface="Consolas"/>
               </a:rPr>
-              <a:t>M21  ·  SCHAUBILD</a:t>
-            </a:r>
-          </a:p>
-        </p:txBody>
-      </p:sp>
-      <p:sp>
-        <p:nvSpPr>
-          <p:cNvPr id="5" name="TextBox 4"/>
-          <p:cNvSpPr txBox="1"/>
-          <p:nvPr/>
-        </p:nvSpPr>
-        <p:spPr>
-          <a:xfrm>
-            <a:off x="685800" y="502920"/>
-            <a:ext cx="10817352" cy="594360"/>
-          </a:xfrm>
-          <a:prstGeom prst="rect">
-            <a:avLst/>
-          </a:prstGeom>
-          <a:noFill/>
-        </p:spPr>
-        <p:txBody>
-          <a:bodyPr wrap="square">
-            <a:spAutoFit/>
-          </a:bodyPr>
-          <a:lstStyle/>
-          <a:p>
-            <a:pPr algn="l"/>
-            <a:r>
-              <a:rPr sz="2000" b="1" i="0">
-                <a:solidFill>
-                  <a:srgbClr val="1F2C56"/>
-                </a:solidFill>
-                <a:latin typeface="Arial"/>
-              </a:rPr>
-              <a:t>Handlungsempfehlung Kreditentscheidung</a:t>
-            </a:r>
-          </a:p>
-        </p:txBody>
-      </p:sp>
-      <p:sp>
-        <p:nvSpPr>
-          <p:cNvPr id="6" name="Rectangle 5"/>
+              <a:t>08:25–09:00</a:t>
+            </a:r>
+          </a:p>
+        </p:txBody>
+      </p:sp>
+      <p:sp>
+        <p:nvSpPr>
+          <p:cNvPr id="4" name="Rectangle 3"/>
           <p:cNvSpPr/>
           <p:nvPr/>
         </p:nvSpPr>
         <p:spPr>
           <a:xfrm>
-            <a:off x="685800" y="1143000"/>
-            <a:ext cx="10817352" cy="25400"/>
+            <a:off x="685800" y="2788920"/>
+            <a:ext cx="548640" cy="38100"/>
           </a:xfrm>
           <a:prstGeom prst="rect">
             <a:avLst/>
@@ -13607,83 +10072,86 @@
           </a:p>
         </p:txBody>
       </p:sp>
-      <p:pic>
-        <p:nvPicPr>
-          <p:cNvPr id="7" name="Picture 6" descr="image.png"/>
-          <p:cNvPicPr>
-            <a:picLocks noChangeAspect="1"/>
-          </p:cNvPicPr>
-          <p:nvPr/>
-        </p:nvPicPr>
-        <p:blipFill>
-          <a:blip r:embed="rId2"/>
-          <a:stretch>
-            <a:fillRect/>
-          </a:stretch>
-        </p:blipFill>
-        <p:spPr>
-          <a:xfrm>
-            <a:off x="2303489" y="1325880"/>
-            <a:ext cx="7581973" cy="4937760"/>
-          </a:xfrm>
-          <a:prstGeom prst="rect">
-            <a:avLst/>
-          </a:prstGeom>
-        </p:spPr>
-      </p:pic>
-      <p:sp>
-        <p:nvSpPr>
-          <p:cNvPr id="8" name="Rectangle 7"/>
-          <p:cNvSpPr/>
-          <p:nvPr/>
-        </p:nvSpPr>
-        <p:spPr>
-          <a:xfrm>
-            <a:off x="0" y="6510528"/>
-            <a:ext cx="12188952" cy="347472"/>
-          </a:xfrm>
-          <a:prstGeom prst="rect">
-            <a:avLst/>
-          </a:prstGeom>
-          <a:solidFill>
-            <a:srgbClr val="0A1937"/>
-          </a:solidFill>
-          <a:ln>
-            <a:noFill/>
-          </a:ln>
-        </p:spPr>
-        <p:style>
-          <a:lnRef idx="1">
-            <a:schemeClr val="accent1"/>
-          </a:lnRef>
-          <a:fillRef idx="3">
-            <a:schemeClr val="accent1"/>
-          </a:fillRef>
-          <a:effectRef idx="2">
-            <a:schemeClr val="accent1"/>
-          </a:effectRef>
-          <a:fontRef idx="minor">
-            <a:schemeClr val="lt1"/>
-          </a:fontRef>
-        </p:style>
-        <p:txBody>
-          <a:bodyPr rtlCol="0" anchor="ctr"/>
-          <a:lstStyle/>
-          <a:p>
-            <a:pPr algn="ctr"/>
-          </a:p>
-        </p:txBody>
-      </p:sp>
-      <p:sp>
-        <p:nvSpPr>
-          <p:cNvPr id="9" name="TextBox 8"/>
+      <p:sp>
+        <p:nvSpPr>
+          <p:cNvPr id="5" name="TextBox 4"/>
           <p:cNvSpPr txBox="1"/>
           <p:nvPr/>
         </p:nvSpPr>
         <p:spPr>
           <a:xfrm>
-            <a:off x="685800" y="6583680"/>
-            <a:ext cx="6490411" cy="256032"/>
+            <a:off x="685800" y="3017520"/>
+            <a:ext cx="10817352" cy="1463040"/>
+          </a:xfrm>
+          <a:prstGeom prst="rect">
+            <a:avLst/>
+          </a:prstGeom>
+          <a:noFill/>
+        </p:spPr>
+        <p:txBody>
+          <a:bodyPr wrap="square">
+            <a:spAutoFit/>
+          </a:bodyPr>
+          <a:lstStyle/>
+          <a:p>
+            <a:pPr algn="l"/>
+            <a:r>
+              <a:rPr sz="4000" b="1" i="0">
+                <a:solidFill>
+                  <a:srgbClr val="FFFFFF"/>
+                </a:solidFill>
+                <a:latin typeface="Arial"/>
+              </a:rPr>
+              <a:t>Theorie-Input I</a:t>
+            </a:r>
+          </a:p>
+        </p:txBody>
+      </p:sp>
+      <p:sp>
+        <p:nvSpPr>
+          <p:cNvPr id="6" name="TextBox 5"/>
+          <p:cNvSpPr txBox="1"/>
+          <p:nvPr/>
+        </p:nvSpPr>
+        <p:spPr>
+          <a:xfrm>
+            <a:off x="685800" y="4480560"/>
+            <a:ext cx="8653881" cy="1280160"/>
+          </a:xfrm>
+          <a:prstGeom prst="rect">
+            <a:avLst/>
+          </a:prstGeom>
+          <a:noFill/>
+        </p:spPr>
+        <p:txBody>
+          <a:bodyPr wrap="square">
+            <a:spAutoFit/>
+          </a:bodyPr>
+          <a:lstStyle/>
+          <a:p>
+            <a:pPr algn="l"/>
+            <a:r>
+              <a:rPr sz="1600" b="0" i="0">
+                <a:solidFill>
+                  <a:srgbClr val="C8D2E6"/>
+                </a:solidFill>
+                <a:latin typeface="Arial"/>
+              </a:rPr>
+              <a:t>Den regulatorischen Rahmen und die Informationsasymmetrie der Kreditentscheidung verstehen.</a:t>
+            </a:r>
+          </a:p>
+        </p:txBody>
+      </p:sp>
+      <p:sp>
+        <p:nvSpPr>
+          <p:cNvPr id="7" name="TextBox 6"/>
+          <p:cNvSpPr txBox="1"/>
+          <p:nvPr/>
+        </p:nvSpPr>
+        <p:spPr>
+          <a:xfrm>
+            <a:off x="685800" y="6355080"/>
+            <a:ext cx="10817352" cy="274320"/>
           </a:xfrm>
           <a:prstGeom prst="rect">
             <a:avLst/>
@@ -13700,46 +10168,11 @@
             <a:r>
               <a:rPr sz="700">
                 <a:solidFill>
-                  <a:srgbClr val="A0B4D2"/>
+                  <a:srgbClr val="8CA0C3"/>
                 </a:solidFill>
                 <a:latin typeface="Consolas"/>
               </a:rPr>
               <a:t>FKB Campus  ·  M21</a:t>
-            </a:r>
-          </a:p>
-        </p:txBody>
-      </p:sp>
-      <p:sp>
-        <p:nvSpPr>
-          <p:cNvPr id="10" name="TextBox 9"/>
-          <p:cNvSpPr txBox="1"/>
-          <p:nvPr/>
-        </p:nvSpPr>
-        <p:spPr>
-          <a:xfrm>
-            <a:off x="7176211" y="6583680"/>
-            <a:ext cx="4326940" cy="256032"/>
-          </a:xfrm>
-          <a:prstGeom prst="rect">
-            <a:avLst/>
-          </a:prstGeom>
-          <a:noFill/>
-        </p:spPr>
-        <p:txBody>
-          <a:bodyPr wrap="none">
-            <a:spAutoFit/>
-          </a:bodyPr>
-          <a:lstStyle/>
-          <a:p>
-            <a:pPr algn="r"/>
-            <a:r>
-              <a:rPr sz="700">
-                <a:solidFill>
-                  <a:srgbClr val="A0B4D2"/>
-                </a:solidFill>
-                <a:latin typeface="Consolas"/>
-              </a:rPr>
-              <a:t>Schaubild</a:t>
             </a:r>
           </a:p>
         </p:txBody>
@@ -13999,7 +10432,7 @@
                 </a:solidFill>
                 <a:latin typeface="Arial"/>
               </a:rPr>
-              <a:t>Theorie-Input: Das 8-Felder-Framework für KMU-Kreditentscheidungen</a:t>
+              <a:t>Eine Kreditentscheidung muss man begründen können</a:t>
             </a:r>
           </a:p>
         </p:txBody>
@@ -14021,27 +10454,27 @@
           <a:noFill/>
         </p:spPr>
         <p:txBody>
-          <a:bodyPr wrap="square">
+          <a:bodyPr wrap="square" anchor="ctr">
             <a:spAutoFit/>
           </a:bodyPr>
           <a:lstStyle/>
           <a:p>
-            <a:pPr>
+            <a:pPr marL="177800" indent="-177800">
               <a:spcBef>
-                <a:spcPts val="1000"/>
+                <a:spcPts val="600"/>
               </a:spcBef>
               <a:spcAft>
                 <a:spcPts val="200"/>
               </a:spcAft>
             </a:pPr>
             <a:r>
-              <a:rPr sz="800" b="1">
-                <a:solidFill>
-                  <a:srgbClr val="78808C"/>
-                </a:solidFill>
-                <a:latin typeface="Consolas"/>
-              </a:rPr>
-              <a:t>4.1.1 KONZEPTIONELLER RAHMEN</a:t>
+              <a:rPr sz="1200" i="1">
+                <a:solidFill>
+                  <a:srgbClr val="3D5466"/>
+                </a:solidFill>
+                <a:latin typeface="Arial"/>
+              </a:rPr>
+              <a:t>→  Eine Kreditentscheidung ist erst gut, wenn du sie begründen kannst.</a:t>
             </a:r>
           </a:p>
           <a:p>
@@ -14060,26 +10493,7 @@
                 </a:solidFill>
                 <a:latin typeface="Arial"/>
               </a:rPr>
-              <a:t>▸  Übersicht der 8 Felder:</a:t>
-            </a:r>
-          </a:p>
-          <a:p>
-            <a:pPr>
-              <a:spcBef>
-                <a:spcPts val="1000"/>
-              </a:spcBef>
-              <a:spcAft>
-                <a:spcPts val="200"/>
-              </a:spcAft>
-            </a:pPr>
-            <a:r>
-              <a:rPr sz="800" b="1">
-                <a:solidFill>
-                  <a:srgbClr val="78808C"/>
-                </a:solidFill>
-                <a:latin typeface="Consolas"/>
-              </a:rPr>
-              <a:t>4.1.2 FELD 1 – ZWECK UND VERWENDUNG</a:t>
+              <a:t>▸  Trenne Bauchgefühl und Begründung – und prüfe beide.</a:t>
             </a:r>
           </a:p>
           <a:p>
@@ -14098,159 +10512,7 @@
                 </a:solidFill>
                 <a:latin typeface="Arial"/>
               </a:rPr>
-              <a:t>▸  Definition: Wozu wird der Kredit konkret verwendet? Ist die Verwendung wirtschaftlich sinnvoll und bankseits nachvollziehbar?</a:t>
-            </a:r>
-          </a:p>
-          <a:p>
-            <a:pPr marL="190500" indent="-190500">
-              <a:spcBef>
-                <a:spcPts val="400"/>
-              </a:spcBef>
-              <a:spcAft>
-                <a:spcPts val="200"/>
-              </a:spcAft>
-            </a:pPr>
-            <a:r>
-              <a:rPr sz="1300">
-                <a:solidFill>
-                  <a:srgbClr val="3D5466"/>
-                </a:solidFill>
-                <a:latin typeface="Arial"/>
-              </a:rPr>
-              <a:t>▸  Analysefragen:</a:t>
-            </a:r>
-          </a:p>
-          <a:p>
-            <a:pPr marL="190500" indent="-190500">
-              <a:spcBef>
-                <a:spcPts val="400"/>
-              </a:spcBef>
-              <a:spcAft>
-                <a:spcPts val="200"/>
-              </a:spcAft>
-            </a:pPr>
-            <a:r>
-              <a:rPr sz="1300">
-                <a:solidFill>
-                  <a:srgbClr val="3D5466"/>
-                </a:solidFill>
-                <a:latin typeface="Arial"/>
-              </a:rPr>
-              <a:t>▸  Ist der Zweck konkret und überprüfbar? (Nicht „Betriebsmittel", sondern „5-Achs-CNC-Drehmaschine Heidenhain TNC 640 für Werkstatt Gebäude 2")</a:t>
-            </a:r>
-          </a:p>
-          <a:p>
-            <a:pPr marL="190500" indent="-190500">
-              <a:spcBef>
-                <a:spcPts val="400"/>
-              </a:spcBef>
-              <a:spcAft>
-                <a:spcPts val="200"/>
-              </a:spcAft>
-            </a:pPr>
-            <a:r>
-              <a:rPr sz="1300">
-                <a:solidFill>
-                  <a:srgbClr val="3D5466"/>
-                </a:solidFill>
-                <a:latin typeface="Arial"/>
-              </a:rPr>
-              <a:t>▸  Dient er der Substanzerhaltung (Ersatz) oder Substanzverbesserung (Wachstum, Rationalisierung)?</a:t>
-            </a:r>
-          </a:p>
-          <a:p>
-            <a:pPr marL="190500" indent="-190500">
-              <a:spcBef>
-                <a:spcPts val="400"/>
-              </a:spcBef>
-              <a:spcAft>
-                <a:spcPts val="200"/>
-              </a:spcAft>
-            </a:pPr>
-            <a:r>
-              <a:rPr sz="1300">
-                <a:solidFill>
-                  <a:srgbClr val="3D5466"/>
-                </a:solidFill>
-                <a:latin typeface="Arial"/>
-              </a:rPr>
-              <a:t>▸  Passt der Zweck zur wirtschaftlichen Lage des Unternehmens?</a:t>
-            </a:r>
-          </a:p>
-          <a:p>
-            <a:pPr marL="190500" indent="-190500">
-              <a:spcBef>
-                <a:spcPts val="400"/>
-              </a:spcBef>
-              <a:spcAft>
-                <a:spcPts val="200"/>
-              </a:spcAft>
-            </a:pPr>
-            <a:r>
-              <a:rPr sz="1300">
-                <a:solidFill>
-                  <a:srgbClr val="3D5466"/>
-                </a:solidFill>
-                <a:latin typeface="Arial"/>
-              </a:rPr>
-              <a:t>▸  Ist die Amortisationszeit realistisch für die gewählte Laufzeit?</a:t>
-            </a:r>
-          </a:p>
-          <a:p>
-            <a:pPr marL="190500" indent="-190500">
-              <a:spcBef>
-                <a:spcPts val="400"/>
-              </a:spcBef>
-              <a:spcAft>
-                <a:spcPts val="200"/>
-              </a:spcAft>
-            </a:pPr>
-            <a:r>
-              <a:rPr sz="1300">
-                <a:solidFill>
-                  <a:srgbClr val="3D5466"/>
-                </a:solidFill>
-                <a:latin typeface="Arial"/>
-              </a:rPr>
-              <a:t>▸  Typische Risiken: Mehrfachzweck ohne Aufteilung, Verwendung für Schuldenumschuldung ohne explizite Nennung, fehlende Kostenaufstellungen.</a:t>
-            </a:r>
-          </a:p>
-          <a:p>
-            <a:pPr>
-              <a:spcBef>
-                <a:spcPts val="1000"/>
-              </a:spcBef>
-              <a:spcAft>
-                <a:spcPts val="200"/>
-              </a:spcAft>
-            </a:pPr>
-            <a:r>
-              <a:rPr sz="800" b="1">
-                <a:solidFill>
-                  <a:srgbClr val="78808C"/>
-                </a:solidFill>
-                <a:latin typeface="Consolas"/>
-              </a:rPr>
-              <a:t>4.1.3 FELD 2 – RÜCKZAHLUNGSQUELLE (CASHFLOW-ANALYSE)</a:t>
-            </a:r>
-          </a:p>
-          <a:p>
-            <a:pPr marL="190500" indent="-190500">
-              <a:spcBef>
-                <a:spcPts val="400"/>
-              </a:spcBef>
-              <a:spcAft>
-                <a:spcPts val="200"/>
-              </a:spcAft>
-            </a:pPr>
-            <a:r>
-              <a:rPr sz="1300">
-                <a:solidFill>
-                  <a:srgbClr val="3D5466"/>
-                </a:solidFill>
-                <a:latin typeface="Arial"/>
-              </a:rPr>
-              <a:t>▸  Definition: Kann das Unternehmen Zins und Tilgung aus operativem Cashflow decken, oder ist es auf Desinvestitionen oder Dritte angewiesen?</a:t>
+              <a:t>▸  Die Kreditvorlage nach MaRisk BTO 1.1 zwingt zur Klarheit und Nachvollziehbarkeit.</a:t>
             </a:r>
           </a:p>
         </p:txBody>
@@ -14366,7 +10628,7 @@
             <a:avLst/>
           </a:prstGeom>
           <a:solidFill>
-            <a:srgbClr val="FFFFFF"/>
+            <a:srgbClr val="1F2C56"/>
           </a:solidFill>
           <a:ln>
             <a:noFill/>
@@ -14396,57 +10658,14 @@
       </p:sp>
       <p:sp>
         <p:nvSpPr>
-          <p:cNvPr id="3" name="Rectangle 2"/>
-          <p:cNvSpPr/>
-          <p:nvPr/>
-        </p:nvSpPr>
-        <p:spPr>
-          <a:xfrm>
-            <a:off x="0" y="0"/>
-            <a:ext cx="12188952" cy="50292"/>
-          </a:xfrm>
-          <a:prstGeom prst="rect">
-            <a:avLst/>
-          </a:prstGeom>
-          <a:solidFill>
-            <a:srgbClr val="1F2C56"/>
-          </a:solidFill>
-          <a:ln>
-            <a:noFill/>
-          </a:ln>
-        </p:spPr>
-        <p:style>
-          <a:lnRef idx="1">
-            <a:schemeClr val="accent1"/>
-          </a:lnRef>
-          <a:fillRef idx="3">
-            <a:schemeClr val="accent1"/>
-          </a:fillRef>
-          <a:effectRef idx="2">
-            <a:schemeClr val="accent1"/>
-          </a:effectRef>
-          <a:fontRef idx="minor">
-            <a:schemeClr val="lt1"/>
-          </a:fontRef>
-        </p:style>
-        <p:txBody>
-          <a:bodyPr rtlCol="0" anchor="ctr"/>
-          <a:lstStyle/>
-          <a:p>
-            <a:pPr algn="ctr"/>
-          </a:p>
-        </p:txBody>
-      </p:sp>
-      <p:sp>
-        <p:nvSpPr>
-          <p:cNvPr id="4" name="TextBox 3"/>
+          <p:cNvPr id="3" name="TextBox 2"/>
           <p:cNvSpPr txBox="1"/>
           <p:nvPr/>
         </p:nvSpPr>
         <p:spPr>
           <a:xfrm>
-            <a:off x="685800" y="109728"/>
-            <a:ext cx="10817352" cy="228600"/>
+            <a:off x="685800" y="2377440"/>
+            <a:ext cx="10817352" cy="365760"/>
           </a:xfrm>
           <a:prstGeom prst="rect">
             <a:avLst/>
@@ -14461,62 +10680,27 @@
           <a:p>
             <a:pPr algn="l"/>
             <a:r>
-              <a:rPr sz="750">
-                <a:solidFill>
-                  <a:srgbClr val="78808C"/>
+              <a:rPr sz="1200">
+                <a:solidFill>
+                  <a:srgbClr val="D9C089"/>
                 </a:solidFill>
                 <a:latin typeface="Consolas"/>
               </a:rPr>
-              <a:t>M21  ·  SCHAUBILD</a:t>
-            </a:r>
-          </a:p>
-        </p:txBody>
-      </p:sp>
-      <p:sp>
-        <p:nvSpPr>
-          <p:cNvPr id="5" name="TextBox 4"/>
-          <p:cNvSpPr txBox="1"/>
-          <p:nvPr/>
-        </p:nvSpPr>
-        <p:spPr>
-          <a:xfrm>
-            <a:off x="685800" y="502920"/>
-            <a:ext cx="10817352" cy="594360"/>
-          </a:xfrm>
-          <a:prstGeom prst="rect">
-            <a:avLst/>
-          </a:prstGeom>
-          <a:noFill/>
-        </p:spPr>
-        <p:txBody>
-          <a:bodyPr wrap="square">
-            <a:spAutoFit/>
-          </a:bodyPr>
-          <a:lstStyle/>
-          <a:p>
-            <a:pPr algn="l"/>
-            <a:r>
-              <a:rPr sz="2000" b="1" i="0">
-                <a:solidFill>
-                  <a:srgbClr val="1F2C56"/>
-                </a:solidFill>
-                <a:latin typeface="Arial"/>
-              </a:rPr>
-              <a:t>8-Felder-Framework der Kreditentscheidung</a:t>
-            </a:r>
-          </a:p>
-        </p:txBody>
-      </p:sp>
-      <p:sp>
-        <p:nvSpPr>
-          <p:cNvPr id="6" name="Rectangle 5"/>
+              <a:t>09:00–09:30</a:t>
+            </a:r>
+          </a:p>
+        </p:txBody>
+      </p:sp>
+      <p:sp>
+        <p:nvSpPr>
+          <p:cNvPr id="4" name="Rectangle 3"/>
           <p:cNvSpPr/>
           <p:nvPr/>
         </p:nvSpPr>
         <p:spPr>
           <a:xfrm>
-            <a:off x="685800" y="1143000"/>
-            <a:ext cx="10817352" cy="25400"/>
+            <a:off x="685800" y="2788920"/>
+            <a:ext cx="548640" cy="38100"/>
           </a:xfrm>
           <a:prstGeom prst="rect">
             <a:avLst/>
@@ -14550,83 +10734,86 @@
           </a:p>
         </p:txBody>
       </p:sp>
-      <p:pic>
-        <p:nvPicPr>
-          <p:cNvPr id="7" name="Picture 6" descr="image.png"/>
-          <p:cNvPicPr>
-            <a:picLocks noChangeAspect="1"/>
-          </p:cNvPicPr>
-          <p:nvPr/>
-        </p:nvPicPr>
-        <p:blipFill>
-          <a:blip r:embed="rId2"/>
-          <a:stretch>
-            <a:fillRect/>
-          </a:stretch>
-        </p:blipFill>
-        <p:spPr>
-          <a:xfrm>
-            <a:off x="2163921" y="1325880"/>
-            <a:ext cx="7861110" cy="4937760"/>
-          </a:xfrm>
-          <a:prstGeom prst="rect">
-            <a:avLst/>
-          </a:prstGeom>
-        </p:spPr>
-      </p:pic>
-      <p:sp>
-        <p:nvSpPr>
-          <p:cNvPr id="8" name="Rectangle 7"/>
-          <p:cNvSpPr/>
-          <p:nvPr/>
-        </p:nvSpPr>
-        <p:spPr>
-          <a:xfrm>
-            <a:off x="0" y="6510528"/>
-            <a:ext cx="12188952" cy="347472"/>
-          </a:xfrm>
-          <a:prstGeom prst="rect">
-            <a:avLst/>
-          </a:prstGeom>
-          <a:solidFill>
-            <a:srgbClr val="0A1937"/>
-          </a:solidFill>
-          <a:ln>
-            <a:noFill/>
-          </a:ln>
-        </p:spPr>
-        <p:style>
-          <a:lnRef idx="1">
-            <a:schemeClr val="accent1"/>
-          </a:lnRef>
-          <a:fillRef idx="3">
-            <a:schemeClr val="accent1"/>
-          </a:fillRef>
-          <a:effectRef idx="2">
-            <a:schemeClr val="accent1"/>
-          </a:effectRef>
-          <a:fontRef idx="minor">
-            <a:schemeClr val="lt1"/>
-          </a:fontRef>
-        </p:style>
-        <p:txBody>
-          <a:bodyPr rtlCol="0" anchor="ctr"/>
-          <a:lstStyle/>
-          <a:p>
-            <a:pPr algn="ctr"/>
-          </a:p>
-        </p:txBody>
-      </p:sp>
-      <p:sp>
-        <p:nvSpPr>
-          <p:cNvPr id="9" name="TextBox 8"/>
+      <p:sp>
+        <p:nvSpPr>
+          <p:cNvPr id="5" name="TextBox 4"/>
           <p:cNvSpPr txBox="1"/>
           <p:nvPr/>
         </p:nvSpPr>
         <p:spPr>
           <a:xfrm>
-            <a:off x="685800" y="6583680"/>
-            <a:ext cx="6490411" cy="256032"/>
+            <a:off x="685800" y="3017520"/>
+            <a:ext cx="10817352" cy="1463040"/>
+          </a:xfrm>
+          <a:prstGeom prst="rect">
+            <a:avLst/>
+          </a:prstGeom>
+          <a:noFill/>
+        </p:spPr>
+        <p:txBody>
+          <a:bodyPr wrap="square">
+            <a:spAutoFit/>
+          </a:bodyPr>
+          <a:lstStyle/>
+          <a:p>
+            <a:pPr algn="l"/>
+            <a:r>
+              <a:rPr sz="4000" b="1" i="0">
+                <a:solidFill>
+                  <a:srgbClr val="FFFFFF"/>
+                </a:solidFill>
+                <a:latin typeface="Arial"/>
+              </a:rPr>
+              <a:t>Theorie-Input II</a:t>
+            </a:r>
+          </a:p>
+        </p:txBody>
+      </p:sp>
+      <p:sp>
+        <p:nvSpPr>
+          <p:cNvPr id="6" name="TextBox 5"/>
+          <p:cNvSpPr txBox="1"/>
+          <p:nvPr/>
+        </p:nvSpPr>
+        <p:spPr>
+          <a:xfrm>
+            <a:off x="685800" y="4480560"/>
+            <a:ext cx="8653881" cy="1280160"/>
+          </a:xfrm>
+          <a:prstGeom prst="rect">
+            <a:avLst/>
+          </a:prstGeom>
+          <a:noFill/>
+        </p:spPr>
+        <p:txBody>
+          <a:bodyPr wrap="square">
+            <a:spAutoFit/>
+          </a:bodyPr>
+          <a:lstStyle/>
+          <a:p>
+            <a:pPr algn="l"/>
+            <a:r>
+              <a:rPr sz="1600" b="0" i="0">
+                <a:solidFill>
+                  <a:srgbClr val="C8D2E6"/>
+                </a:solidFill>
+                <a:latin typeface="Arial"/>
+              </a:rPr>
+              <a:t>Das 8-Felder-Framework auf die Votierung anwenden – und Entscheidungsbiases kennen.</a:t>
+            </a:r>
+          </a:p>
+        </p:txBody>
+      </p:sp>
+      <p:sp>
+        <p:nvSpPr>
+          <p:cNvPr id="7" name="TextBox 6"/>
+          <p:cNvSpPr txBox="1"/>
+          <p:nvPr/>
+        </p:nvSpPr>
+        <p:spPr>
+          <a:xfrm>
+            <a:off x="685800" y="6355080"/>
+            <a:ext cx="10817352" cy="274320"/>
           </a:xfrm>
           <a:prstGeom prst="rect">
             <a:avLst/>
@@ -14643,46 +10830,11 @@
             <a:r>
               <a:rPr sz="700">
                 <a:solidFill>
-                  <a:srgbClr val="A0B4D2"/>
+                  <a:srgbClr val="8CA0C3"/>
                 </a:solidFill>
                 <a:latin typeface="Consolas"/>
               </a:rPr>
               <a:t>FKB Campus  ·  M21</a:t>
-            </a:r>
-          </a:p>
-        </p:txBody>
-      </p:sp>
-      <p:sp>
-        <p:nvSpPr>
-          <p:cNvPr id="10" name="TextBox 9"/>
-          <p:cNvSpPr txBox="1"/>
-          <p:nvPr/>
-        </p:nvSpPr>
-        <p:spPr>
-          <a:xfrm>
-            <a:off x="7176211" y="6583680"/>
-            <a:ext cx="4326940" cy="256032"/>
-          </a:xfrm>
-          <a:prstGeom prst="rect">
-            <a:avLst/>
-          </a:prstGeom>
-          <a:noFill/>
-        </p:spPr>
-        <p:txBody>
-          <a:bodyPr wrap="none">
-            <a:spAutoFit/>
-          </a:bodyPr>
-          <a:lstStyle/>
-          <a:p>
-            <a:pPr algn="r"/>
-            <a:r>
-              <a:rPr sz="700">
-                <a:solidFill>
-                  <a:srgbClr val="A0B4D2"/>
-                </a:solidFill>
-                <a:latin typeface="Consolas"/>
-              </a:rPr>
-              <a:t>Schaubild</a:t>
             </a:r>
           </a:p>
         </p:txBody>
@@ -14720,7 +10872,7 @@
             <a:avLst/>
           </a:prstGeom>
           <a:solidFill>
-            <a:srgbClr val="FFFFFF"/>
+            <a:srgbClr val="EDEDF3"/>
           </a:solidFill>
           <a:ln>
             <a:noFill/>
@@ -14821,43 +10973,51 @@
                 </a:solidFill>
                 <a:latin typeface="Consolas"/>
               </a:rPr>
-              <a:t>M21  ·  ÜBERSICHT</a:t>
-            </a:r>
-          </a:p>
-        </p:txBody>
-      </p:sp>
-      <p:sp>
-        <p:nvSpPr>
-          <p:cNvPr id="5" name="TextBox 4"/>
-          <p:cNvSpPr txBox="1"/>
-          <p:nvPr/>
-        </p:nvSpPr>
-        <p:spPr>
-          <a:xfrm>
-            <a:off x="685800" y="502920"/>
-            <a:ext cx="10817352" cy="594360"/>
-          </a:xfrm>
-          <a:prstGeom prst="rect">
-            <a:avLst/>
-          </a:prstGeom>
-          <a:noFill/>
-        </p:spPr>
-        <p:txBody>
-          <a:bodyPr wrap="square">
-            <a:spAutoFit/>
-          </a:bodyPr>
-          <a:lstStyle/>
-          <a:p>
-            <a:pPr algn="l"/>
-            <a:r>
-              <a:rPr sz="2000" b="1" i="0">
-                <a:solidFill>
-                  <a:srgbClr val="1F2C56"/>
-                </a:solidFill>
-                <a:latin typeface="Arial"/>
-              </a:rPr>
-              <a:t>Theorie-Input: Das 8-Felder-Framework für KMU-Kreditentscheidungen</a:t>
-            </a:r>
+              <a:t>M21  ·  INHALT</a:t>
+            </a:r>
+          </a:p>
+        </p:txBody>
+      </p:sp>
+      <p:sp>
+        <p:nvSpPr>
+          <p:cNvPr id="5" name="Rectangle 4"/>
+          <p:cNvSpPr/>
+          <p:nvPr/>
+        </p:nvSpPr>
+        <p:spPr>
+          <a:xfrm>
+            <a:off x="0" y="1234440"/>
+            <a:ext cx="12188952" cy="12700"/>
+          </a:xfrm>
+          <a:prstGeom prst="rect">
+            <a:avLst/>
+          </a:prstGeom>
+          <a:solidFill>
+            <a:srgbClr val="D8DFE4"/>
+          </a:solidFill>
+          <a:ln>
+            <a:noFill/>
+          </a:ln>
+        </p:spPr>
+        <p:style>
+          <a:lnRef idx="1">
+            <a:schemeClr val="accent1"/>
+          </a:lnRef>
+          <a:fillRef idx="3">
+            <a:schemeClr val="accent1"/>
+          </a:fillRef>
+          <a:effectRef idx="2">
+            <a:schemeClr val="accent1"/>
+          </a:effectRef>
+          <a:fontRef idx="minor">
+            <a:schemeClr val="lt1"/>
+          </a:fontRef>
+        </p:style>
+        <p:txBody>
+          <a:bodyPr rtlCol="0" anchor="ctr"/>
+          <a:lstStyle/>
+          <a:p>
+            <a:pPr algn="ctr"/>
           </a:p>
         </p:txBody>
       </p:sp>
@@ -14869,8 +11029,8 @@
         </p:nvSpPr>
         <p:spPr>
           <a:xfrm>
-            <a:off x="685800" y="1143000"/>
-            <a:ext cx="10817352" cy="25400"/>
+            <a:off x="685800" y="502920"/>
+            <a:ext cx="36576" cy="658368"/>
           </a:xfrm>
           <a:prstGeom prst="rect">
             <a:avLst/>
@@ -14904,426 +11064,124 @@
           </a:p>
         </p:txBody>
       </p:sp>
-      <p:graphicFrame>
-        <p:nvGraphicFramePr>
-          <p:cNvPr id="7" name="Table 6"/>
-          <p:cNvGraphicFramePr>
-            <a:graphicFrameLocks noGrp="1"/>
-          </p:cNvGraphicFramePr>
-          <p:nvPr/>
-        </p:nvGraphicFramePr>
-        <p:xfrm>
-          <a:off x="685800" y="1417320"/>
-          <a:ext cx="10817352" cy="1536192"/>
-        </p:xfrm>
-        <a:graphic>
-          <a:graphicData uri="http://schemas.openxmlformats.org/drawingml/2006/table">
-            <a:tbl>
-              <a:tblPr firstRow="1" bandRow="1">
-                <a:tableStyleId>{5C22544A-7EE6-4342-B048-85BDC9FD1C3A}</a:tableStyleId>
-              </a:tblPr>
-              <a:tblGrid>
-                <a:gridCol w="2163470"/>
-                <a:gridCol w="2163470"/>
-                <a:gridCol w="2163470"/>
-                <a:gridCol w="2163470"/>
-                <a:gridCol w="2163472"/>
-              </a:tblGrid>
-              <a:tr h="384048">
-                <a:tc>
-                  <a:txBody>
-                    <a:bodyPr/>
-                    <a:lstStyle/>
-                    <a:p>
-                      <a:r>
-                        <a:rPr sz="1100" b="1">
-                          <a:solidFill>
-                            <a:srgbClr val="FFFFFF"/>
-                          </a:solidFill>
-                          <a:latin typeface="Arial"/>
-                        </a:rPr>
-                        <a:t>Kennzahl</a:t>
-                      </a:r>
-                    </a:p>
-                  </a:txBody>
-                  <a:tcPr>
-                    <a:solidFill>
-                      <a:srgbClr val="1F2C56"/>
-                    </a:solidFill>
-                  </a:tcPr>
-                </a:tc>
-                <a:tc>
-                  <a:txBody>
-                    <a:bodyPr/>
-                    <a:lstStyle/>
-                    <a:p>
-                      <a:r>
-                        <a:rPr sz="1100" b="1">
-                          <a:solidFill>
-                            <a:srgbClr val="FFFFFF"/>
-                          </a:solidFill>
-                          <a:latin typeface="Arial"/>
-                        </a:rPr>
-                        <a:t>Formel</a:t>
-                      </a:r>
-                    </a:p>
-                  </a:txBody>
-                  <a:tcPr>
-                    <a:solidFill>
-                      <a:srgbClr val="1F2C56"/>
-                    </a:solidFill>
-                  </a:tcPr>
-                </a:tc>
-                <a:tc>
-                  <a:txBody>
-                    <a:bodyPr/>
-                    <a:lstStyle/>
-                    <a:p>
-                      <a:r>
-                        <a:rPr sz="1100" b="1">
-                          <a:solidFill>
-                            <a:srgbClr val="FFFFFF"/>
-                          </a:solidFill>
-                          <a:latin typeface="Arial"/>
-                        </a:rPr>
-                        <a:t>Komfortzone</a:t>
-                      </a:r>
-                    </a:p>
-                  </a:txBody>
-                  <a:tcPr>
-                    <a:solidFill>
-                      <a:srgbClr val="1F2C56"/>
-                    </a:solidFill>
-                  </a:tcPr>
-                </a:tc>
-                <a:tc>
-                  <a:txBody>
-                    <a:bodyPr/>
-                    <a:lstStyle/>
-                    <a:p>
-                      <a:r>
-                        <a:rPr sz="1100" b="1">
-                          <a:solidFill>
-                            <a:srgbClr val="FFFFFF"/>
-                          </a:solidFill>
-                          <a:latin typeface="Arial"/>
-                        </a:rPr>
-                        <a:t>Warnschwelle</a:t>
-                      </a:r>
-                    </a:p>
-                  </a:txBody>
-                  <a:tcPr>
-                    <a:solidFill>
-                      <a:srgbClr val="1F2C56"/>
-                    </a:solidFill>
-                  </a:tcPr>
-                </a:tc>
-                <a:tc>
-                  <a:txBody>
-                    <a:bodyPr/>
-                    <a:lstStyle/>
-                    <a:p>
-                      <a:r>
-                        <a:rPr sz="1100" b="1">
-                          <a:solidFill>
-                            <a:srgbClr val="FFFFFF"/>
-                          </a:solidFill>
-                          <a:latin typeface="Arial"/>
-                        </a:rPr>
-                        <a:t>Kritisch</a:t>
-                      </a:r>
-                    </a:p>
-                  </a:txBody>
-                  <a:tcPr>
-                    <a:solidFill>
-                      <a:srgbClr val="1F2C56"/>
-                    </a:solidFill>
-                  </a:tcPr>
-                </a:tc>
-              </a:tr>
-              <a:tr h="384048">
-                <a:tc>
-                  <a:txBody>
-                    <a:bodyPr/>
-                    <a:lstStyle/>
-                    <a:p>
-                      <a:r>
-                        <a:rPr sz="1050">
-                          <a:solidFill>
-                            <a:srgbClr val="3D5466"/>
-                          </a:solidFill>
-                          <a:latin typeface="Arial"/>
-                        </a:rPr>
-                        <a:t>Zinsdeckungsquote (ZDQ)</a:t>
-                      </a:r>
-                    </a:p>
-                  </a:txBody>
-                  <a:tcPr/>
-                </a:tc>
-                <a:tc>
-                  <a:txBody>
-                    <a:bodyPr/>
-                    <a:lstStyle/>
-                    <a:p>
-                      <a:r>
-                        <a:rPr sz="1050">
-                          <a:solidFill>
-                            <a:srgbClr val="3D5466"/>
-                          </a:solidFill>
-                          <a:latin typeface="Arial"/>
-                        </a:rPr>
-                        <a:t>EBIT ÷ Zinskosten</a:t>
-                      </a:r>
-                    </a:p>
-                  </a:txBody>
-                  <a:tcPr/>
-                </a:tc>
-                <a:tc>
-                  <a:txBody>
-                    <a:bodyPr/>
-                    <a:lstStyle/>
-                    <a:p>
-                      <a:r>
-                        <a:rPr sz="1050">
-                          <a:solidFill>
-                            <a:srgbClr val="3D5466"/>
-                          </a:solidFill>
-                          <a:latin typeface="Arial"/>
-                        </a:rPr>
-                        <a:t>&gt; 3,0x</a:t>
-                      </a:r>
-                    </a:p>
-                  </a:txBody>
-                  <a:tcPr/>
-                </a:tc>
-                <a:tc>
-                  <a:txBody>
-                    <a:bodyPr/>
-                    <a:lstStyle/>
-                    <a:p>
-                      <a:r>
-                        <a:rPr sz="1050">
-                          <a:solidFill>
-                            <a:srgbClr val="3D5466"/>
-                          </a:solidFill>
-                          <a:latin typeface="Arial"/>
-                        </a:rPr>
-                        <a:t>2,0–3,0x</a:t>
-                      </a:r>
-                    </a:p>
-                  </a:txBody>
-                  <a:tcPr/>
-                </a:tc>
-                <a:tc>
-                  <a:txBody>
-                    <a:bodyPr/>
-                    <a:lstStyle/>
-                    <a:p>
-                      <a:r>
-                        <a:rPr sz="1050">
-                          <a:solidFill>
-                            <a:srgbClr val="3D5466"/>
-                          </a:solidFill>
-                          <a:latin typeface="Arial"/>
-                        </a:rPr>
-                        <a:t>&lt; 1,5x</a:t>
-                      </a:r>
-                    </a:p>
-                  </a:txBody>
-                  <a:tcPr/>
-                </a:tc>
-              </a:tr>
-              <a:tr h="384048">
-                <a:tc>
-                  <a:txBody>
-                    <a:bodyPr/>
-                    <a:lstStyle/>
-                    <a:p>
-                      <a:r>
-                        <a:rPr sz="1050">
-                          <a:solidFill>
-                            <a:srgbClr val="3D5466"/>
-                          </a:solidFill>
-                          <a:latin typeface="Arial"/>
-                        </a:rPr>
-                        <a:t>Cashflow-Deckungsquote</a:t>
-                      </a:r>
-                    </a:p>
-                  </a:txBody>
-                  <a:tcPr/>
-                </a:tc>
-                <a:tc>
-                  <a:txBody>
-                    <a:bodyPr/>
-                    <a:lstStyle/>
-                    <a:p>
-                      <a:r>
-                        <a:rPr sz="1050">
-                          <a:solidFill>
-                            <a:srgbClr val="3D5466"/>
-                          </a:solidFill>
-                          <a:latin typeface="Arial"/>
-                        </a:rPr>
-                        <a:t>(EBITDA − Steuern − CapEx) ÷ Kreditrate</a:t>
-                      </a:r>
-                    </a:p>
-                  </a:txBody>
-                  <a:tcPr/>
-                </a:tc>
-                <a:tc>
-                  <a:txBody>
-                    <a:bodyPr/>
-                    <a:lstStyle/>
-                    <a:p>
-                      <a:r>
-                        <a:rPr sz="1050">
-                          <a:solidFill>
-                            <a:srgbClr val="3D5466"/>
-                          </a:solidFill>
-                          <a:latin typeface="Arial"/>
-                        </a:rPr>
-                        <a:t>&gt; 1,5x</a:t>
-                      </a:r>
-                    </a:p>
-                  </a:txBody>
-                  <a:tcPr/>
-                </a:tc>
-                <a:tc>
-                  <a:txBody>
-                    <a:bodyPr/>
-                    <a:lstStyle/>
-                    <a:p>
-                      <a:r>
-                        <a:rPr sz="1050">
-                          <a:solidFill>
-                            <a:srgbClr val="3D5466"/>
-                          </a:solidFill>
-                          <a:latin typeface="Arial"/>
-                        </a:rPr>
-                        <a:t>1,0–1,5x</a:t>
-                      </a:r>
-                    </a:p>
-                  </a:txBody>
-                  <a:tcPr/>
-                </a:tc>
-                <a:tc>
-                  <a:txBody>
-                    <a:bodyPr/>
-                    <a:lstStyle/>
-                    <a:p>
-                      <a:r>
-                        <a:rPr sz="1050">
-                          <a:solidFill>
-                            <a:srgbClr val="3D5466"/>
-                          </a:solidFill>
-                          <a:latin typeface="Arial"/>
-                        </a:rPr>
-                        <a:t>&lt; 1,0x</a:t>
-                      </a:r>
-                    </a:p>
-                  </a:txBody>
-                  <a:tcPr/>
-                </a:tc>
-              </a:tr>
-              <a:tr h="384048">
-                <a:tc>
-                  <a:txBody>
-                    <a:bodyPr/>
-                    <a:lstStyle/>
-                    <a:p>
-                      <a:r>
-                        <a:rPr sz="1050">
-                          <a:solidFill>
-                            <a:srgbClr val="3D5466"/>
-                          </a:solidFill>
-                          <a:latin typeface="Arial"/>
-                        </a:rPr>
-                        <a:t>Dynamischer Verschuldungsgrad</a:t>
-                      </a:r>
-                    </a:p>
-                  </a:txBody>
-                  <a:tcPr/>
-                </a:tc>
-                <a:tc>
-                  <a:txBody>
-                    <a:bodyPr/>
-                    <a:lstStyle/>
-                    <a:p>
-                      <a:r>
-                        <a:rPr sz="1050">
-                          <a:solidFill>
-                            <a:srgbClr val="3D5466"/>
-                          </a:solidFill>
-                          <a:latin typeface="Arial"/>
-                        </a:rPr>
-                        <a:t>Netto-Fremdkapital ÷ EBITDA</a:t>
-                      </a:r>
-                    </a:p>
-                  </a:txBody>
-                  <a:tcPr/>
-                </a:tc>
-                <a:tc>
-                  <a:txBody>
-                    <a:bodyPr/>
-                    <a:lstStyle/>
-                    <a:p>
-                      <a:r>
-                        <a:rPr sz="1050">
-                          <a:solidFill>
-                            <a:srgbClr val="3D5466"/>
-                          </a:solidFill>
-                          <a:latin typeface="Arial"/>
-                        </a:rPr>
-                        <a:t>&lt; 3,0x</a:t>
-                      </a:r>
-                    </a:p>
-                  </a:txBody>
-                  <a:tcPr/>
-                </a:tc>
-                <a:tc>
-                  <a:txBody>
-                    <a:bodyPr/>
-                    <a:lstStyle/>
-                    <a:p>
-                      <a:r>
-                        <a:rPr sz="1050">
-                          <a:solidFill>
-                            <a:srgbClr val="3D5466"/>
-                          </a:solidFill>
-                          <a:latin typeface="Arial"/>
-                        </a:rPr>
-                        <a:t>3,0–4,0x</a:t>
-                      </a:r>
-                    </a:p>
-                  </a:txBody>
-                  <a:tcPr/>
-                </a:tc>
-                <a:tc>
-                  <a:txBody>
-                    <a:bodyPr/>
-                    <a:lstStyle/>
-                    <a:p>
-                      <a:r>
-                        <a:rPr sz="1050">
-                          <a:solidFill>
-                            <a:srgbClr val="3D5466"/>
-                          </a:solidFill>
-                          <a:latin typeface="Arial"/>
-                        </a:rPr>
-                        <a:t>&gt; 4,0x</a:t>
-                      </a:r>
-                    </a:p>
-                  </a:txBody>
-                  <a:tcPr/>
-                </a:tc>
-              </a:tr>
-            </a:tbl>
-          </a:graphicData>
-        </a:graphic>
-      </p:graphicFrame>
-      <p:sp>
-        <p:nvSpPr>
-          <p:cNvPr id="8" name="Rectangle 7"/>
+      <p:sp>
+        <p:nvSpPr>
+          <p:cNvPr id="7" name="TextBox 6"/>
+          <p:cNvSpPr txBox="1"/>
+          <p:nvPr/>
+        </p:nvSpPr>
+        <p:spPr>
+          <a:xfrm>
+            <a:off x="813816" y="502920"/>
+            <a:ext cx="10634472" cy="685800"/>
+          </a:xfrm>
+          <a:prstGeom prst="rect">
+            <a:avLst/>
+          </a:prstGeom>
+          <a:noFill/>
+        </p:spPr>
+        <p:txBody>
+          <a:bodyPr wrap="square">
+            <a:spAutoFit/>
+          </a:bodyPr>
+          <a:lstStyle/>
+          <a:p>
+            <a:pPr algn="l"/>
+            <a:r>
+              <a:rPr sz="2400" b="1" i="0">
+                <a:solidFill>
+                  <a:srgbClr val="1F2C56"/>
+                </a:solidFill>
+                <a:latin typeface="Arial"/>
+              </a:rPr>
+              <a:t>Das 8-Felder-Framework der Kreditentscheidung</a:t>
+            </a:r>
+          </a:p>
+        </p:txBody>
+      </p:sp>
+      <p:sp>
+        <p:nvSpPr>
+          <p:cNvPr id="8" name="TextBox 7"/>
+          <p:cNvSpPr txBox="1"/>
+          <p:nvPr/>
+        </p:nvSpPr>
+        <p:spPr>
+          <a:xfrm>
+            <a:off x="685800" y="1417320"/>
+            <a:ext cx="10817352" cy="4892040"/>
+          </a:xfrm>
+          <a:prstGeom prst="rect">
+            <a:avLst/>
+          </a:prstGeom>
+          <a:noFill/>
+        </p:spPr>
+        <p:txBody>
+          <a:bodyPr wrap="square" anchor="ctr">
+            <a:spAutoFit/>
+          </a:bodyPr>
+          <a:lstStyle/>
+          <a:p>
+            <a:pPr marL="177800" indent="-177800">
+              <a:spcBef>
+                <a:spcPts val="600"/>
+              </a:spcBef>
+              <a:spcAft>
+                <a:spcPts val="200"/>
+              </a:spcAft>
+            </a:pPr>
+            <a:r>
+              <a:rPr sz="1200" i="1">
+                <a:solidFill>
+                  <a:srgbClr val="3D5466"/>
+                </a:solidFill>
+                <a:latin typeface="Arial"/>
+              </a:rPr>
+              <a:t>→  Acht Felder strukturieren jede KMU-Kreditentscheidung – vom Zweck über die Rückzahlungsquelle bis zum Exit-Szenario.</a:t>
+            </a:r>
+          </a:p>
+          <a:p>
+            <a:pPr marL="190500" indent="-190500">
+              <a:spcBef>
+                <a:spcPts val="400"/>
+              </a:spcBef>
+              <a:spcAft>
+                <a:spcPts val="200"/>
+              </a:spcAft>
+            </a:pPr>
+            <a:r>
+              <a:rPr sz="1300">
+                <a:solidFill>
+                  <a:srgbClr val="3D5466"/>
+                </a:solidFill>
+                <a:latin typeface="Arial"/>
+              </a:rPr>
+              <a:t>▸  Zweck, Rückzahlungsquelle, Kapitalstruktur, Management, Branche, Sicherheiten, Konditionen, Exit.</a:t>
+            </a:r>
+          </a:p>
+          <a:p>
+            <a:pPr marL="190500" indent="-190500">
+              <a:spcBef>
+                <a:spcPts val="400"/>
+              </a:spcBef>
+              <a:spcAft>
+                <a:spcPts val="200"/>
+              </a:spcAft>
+            </a:pPr>
+            <a:r>
+              <a:rPr sz="1300">
+                <a:solidFill>
+                  <a:srgbClr val="3D5466"/>
+                </a:solidFill>
+                <a:latin typeface="Arial"/>
+              </a:rPr>
+              <a:t>▸  Jedes Feld wird bewertet – die Summe ergibt ein begründetes Votum.</a:t>
+            </a:r>
+          </a:p>
+        </p:txBody>
+      </p:sp>
+      <p:sp>
+        <p:nvSpPr>
+          <p:cNvPr id="9" name="Rectangle 8"/>
           <p:cNvSpPr/>
           <p:nvPr/>
         </p:nvSpPr>
@@ -15366,7 +11224,7 @@
       </p:sp>
       <p:sp>
         <p:nvSpPr>
-          <p:cNvPr id="9" name="TextBox 8"/>
+          <p:cNvPr id="10" name="TextBox 9"/>
           <p:cNvSpPr txBox="1"/>
           <p:nvPr/>
         </p:nvSpPr>
@@ -15395,41 +11253,6 @@
                 <a:latin typeface="Consolas"/>
               </a:rPr>
               <a:t>FKB Campus  ·  M21</a:t>
-            </a:r>
-          </a:p>
-        </p:txBody>
-      </p:sp>
-      <p:sp>
-        <p:nvSpPr>
-          <p:cNvPr id="10" name="TextBox 9"/>
-          <p:cNvSpPr txBox="1"/>
-          <p:nvPr/>
-        </p:nvSpPr>
-        <p:spPr>
-          <a:xfrm>
-            <a:off x="7176211" y="6583680"/>
-            <a:ext cx="4326940" cy="256032"/>
-          </a:xfrm>
-          <a:prstGeom prst="rect">
-            <a:avLst/>
-          </a:prstGeom>
-          <a:noFill/>
-        </p:spPr>
-        <p:txBody>
-          <a:bodyPr wrap="none">
-            <a:spAutoFit/>
-          </a:bodyPr>
-          <a:lstStyle/>
-          <a:p>
-            <a:pPr algn="r"/>
-            <a:r>
-              <a:rPr sz="700">
-                <a:solidFill>
-                  <a:srgbClr val="A0B4D2"/>
-                </a:solidFill>
-                <a:latin typeface="Consolas"/>
-              </a:rPr>
-              <a:t>Übersicht</a:t>
             </a:r>
           </a:p>
         </p:txBody>
@@ -15568,7 +11391,7 @@
                 </a:solidFill>
                 <a:latin typeface="Consolas"/>
               </a:rPr>
-              <a:t>M21  ·  ÜBERSICHT</a:t>
+              <a:t>M21  ·  SCHAUBILD</a:t>
             </a:r>
           </a:p>
         </p:txBody>
@@ -15603,7 +11426,7 @@
                 </a:solidFill>
                 <a:latin typeface="Arial"/>
               </a:rPr>
-              <a:t>Theorie-Input: Das 8-Felder-Framework für KMU-Kreditentscheidungen</a:t>
+              <a:t>Die acht Felder im Überblick</a:t>
             </a:r>
           </a:p>
         </p:txBody>
@@ -15651,346 +11474,30 @@
           </a:p>
         </p:txBody>
       </p:sp>
-      <p:graphicFrame>
-        <p:nvGraphicFramePr>
-          <p:cNvPr id="7" name="Table 6"/>
-          <p:cNvGraphicFramePr>
-            <a:graphicFrameLocks noGrp="1"/>
-          </p:cNvGraphicFramePr>
-          <p:nvPr/>
-        </p:nvGraphicFramePr>
-        <p:xfrm>
-          <a:off x="685800" y="1417320"/>
-          <a:ext cx="10817352" cy="1536192"/>
-        </p:xfrm>
-        <a:graphic>
-          <a:graphicData uri="http://schemas.openxmlformats.org/drawingml/2006/table">
-            <a:tbl>
-              <a:tblPr firstRow="1" bandRow="1">
-                <a:tableStyleId>{5C22544A-7EE6-4342-B048-85BDC9FD1C3A}</a:tableStyleId>
-              </a:tblPr>
-              <a:tblGrid>
-                <a:gridCol w="2704338"/>
-                <a:gridCol w="2704338"/>
-                <a:gridCol w="2704338"/>
-                <a:gridCol w="2704338"/>
-              </a:tblGrid>
-              <a:tr h="384048">
-                <a:tc>
-                  <a:txBody>
-                    <a:bodyPr/>
-                    <a:lstStyle/>
-                    <a:p>
-                      <a:r>
-                        <a:rPr sz="1100" b="1">
-                          <a:solidFill>
-                            <a:srgbClr val="FFFFFF"/>
-                          </a:solidFill>
-                          <a:latin typeface="Arial"/>
-                        </a:rPr>
-                        <a:t>Kennzahl</a:t>
-                      </a:r>
-                    </a:p>
-                  </a:txBody>
-                  <a:tcPr>
-                    <a:solidFill>
-                      <a:srgbClr val="1F2C56"/>
-                    </a:solidFill>
-                  </a:tcPr>
-                </a:tc>
-                <a:tc>
-                  <a:txBody>
-                    <a:bodyPr/>
-                    <a:lstStyle/>
-                    <a:p>
-                      <a:r>
-                        <a:rPr sz="1100" b="1">
-                          <a:solidFill>
-                            <a:srgbClr val="FFFFFF"/>
-                          </a:solidFill>
-                          <a:latin typeface="Arial"/>
-                        </a:rPr>
-                        <a:t>Formel</a:t>
-                      </a:r>
-                    </a:p>
-                  </a:txBody>
-                  <a:tcPr>
-                    <a:solidFill>
-                      <a:srgbClr val="1F2C56"/>
-                    </a:solidFill>
-                  </a:tcPr>
-                </a:tc>
-                <a:tc>
-                  <a:txBody>
-                    <a:bodyPr/>
-                    <a:lstStyle/>
-                    <a:p>
-                      <a:r>
-                        <a:rPr sz="1100" b="1">
-                          <a:solidFill>
-                            <a:srgbClr val="FFFFFF"/>
-                          </a:solidFill>
-                          <a:latin typeface="Arial"/>
-                        </a:rPr>
-                        <a:t>Komfortzone</a:t>
-                      </a:r>
-                    </a:p>
-                  </a:txBody>
-                  <a:tcPr>
-                    <a:solidFill>
-                      <a:srgbClr val="1F2C56"/>
-                    </a:solidFill>
-                  </a:tcPr>
-                </a:tc>
-                <a:tc>
-                  <a:txBody>
-                    <a:bodyPr/>
-                    <a:lstStyle/>
-                    <a:p>
-                      <a:r>
-                        <a:rPr sz="1100" b="1">
-                          <a:solidFill>
-                            <a:srgbClr val="FFFFFF"/>
-                          </a:solidFill>
-                          <a:latin typeface="Arial"/>
-                        </a:rPr>
-                        <a:t>Warnschwelle</a:t>
-                      </a:r>
-                    </a:p>
-                  </a:txBody>
-                  <a:tcPr>
-                    <a:solidFill>
-                      <a:srgbClr val="1F2C56"/>
-                    </a:solidFill>
-                  </a:tcPr>
-                </a:tc>
-              </a:tr>
-              <a:tr h="384048">
-                <a:tc>
-                  <a:txBody>
-                    <a:bodyPr/>
-                    <a:lstStyle/>
-                    <a:p>
-                      <a:r>
-                        <a:rPr sz="1050">
-                          <a:solidFill>
-                            <a:srgbClr val="3D5466"/>
-                          </a:solidFill>
-                          <a:latin typeface="Arial"/>
-                        </a:rPr>
-                        <a:t>Eigenkapitalquote</a:t>
-                      </a:r>
-                    </a:p>
-                  </a:txBody>
-                  <a:tcPr/>
-                </a:tc>
-                <a:tc>
-                  <a:txBody>
-                    <a:bodyPr/>
-                    <a:lstStyle/>
-                    <a:p>
-                      <a:r>
-                        <a:rPr sz="1050">
-                          <a:solidFill>
-                            <a:srgbClr val="3D5466"/>
-                          </a:solidFill>
-                          <a:latin typeface="Arial"/>
-                        </a:rPr>
-                        <a:t>EK ÷ Bilanzsumme</a:t>
-                      </a:r>
-                    </a:p>
-                  </a:txBody>
-                  <a:tcPr/>
-                </a:tc>
-                <a:tc>
-                  <a:txBody>
-                    <a:bodyPr/>
-                    <a:lstStyle/>
-                    <a:p>
-                      <a:r>
-                        <a:rPr sz="1050">
-                          <a:solidFill>
-                            <a:srgbClr val="3D5466"/>
-                          </a:solidFill>
-                          <a:latin typeface="Arial"/>
-                        </a:rPr>
-                        <a:t>&gt; 30 %</a:t>
-                      </a:r>
-                    </a:p>
-                  </a:txBody>
-                  <a:tcPr/>
-                </a:tc>
-                <a:tc>
-                  <a:txBody>
-                    <a:bodyPr/>
-                    <a:lstStyle/>
-                    <a:p>
-                      <a:r>
-                        <a:rPr sz="1050">
-                          <a:solidFill>
-                            <a:srgbClr val="3D5466"/>
-                          </a:solidFill>
-                          <a:latin typeface="Arial"/>
-                        </a:rPr>
-                        <a:t>&lt; 20 %</a:t>
-                      </a:r>
-                    </a:p>
-                  </a:txBody>
-                  <a:tcPr/>
-                </a:tc>
-              </a:tr>
-              <a:tr h="384048">
-                <a:tc>
-                  <a:txBody>
-                    <a:bodyPr/>
-                    <a:lstStyle/>
-                    <a:p>
-                      <a:r>
-                        <a:rPr sz="1050">
-                          <a:solidFill>
-                            <a:srgbClr val="3D5466"/>
-                          </a:solidFill>
-                          <a:latin typeface="Arial"/>
-                        </a:rPr>
-                        <a:t>Verschuldungsgrad</a:t>
-                      </a:r>
-                    </a:p>
-                  </a:txBody>
-                  <a:tcPr/>
-                </a:tc>
-                <a:tc>
-                  <a:txBody>
-                    <a:bodyPr/>
-                    <a:lstStyle/>
-                    <a:p>
-                      <a:r>
-                        <a:rPr sz="1050">
-                          <a:solidFill>
-                            <a:srgbClr val="3D5466"/>
-                          </a:solidFill>
-                          <a:latin typeface="Arial"/>
-                        </a:rPr>
-                        <a:t>Fremdkapital ÷ EK</a:t>
-                      </a:r>
-                    </a:p>
-                  </a:txBody>
-                  <a:tcPr/>
-                </a:tc>
-                <a:tc>
-                  <a:txBody>
-                    <a:bodyPr/>
-                    <a:lstStyle/>
-                    <a:p>
-                      <a:r>
-                        <a:rPr sz="1050">
-                          <a:solidFill>
-                            <a:srgbClr val="3D5466"/>
-                          </a:solidFill>
-                          <a:latin typeface="Arial"/>
-                        </a:rPr>
-                        <a:t>&lt; 1,5x</a:t>
-                      </a:r>
-                    </a:p>
-                  </a:txBody>
-                  <a:tcPr/>
-                </a:tc>
-                <a:tc>
-                  <a:txBody>
-                    <a:bodyPr/>
-                    <a:lstStyle/>
-                    <a:p>
-                      <a:r>
-                        <a:rPr sz="1050">
-                          <a:solidFill>
-                            <a:srgbClr val="3D5466"/>
-                          </a:solidFill>
-                          <a:latin typeface="Arial"/>
-                        </a:rPr>
-                        <a:t>&gt; 2,5x</a:t>
-                      </a:r>
-                    </a:p>
-                  </a:txBody>
-                  <a:tcPr/>
-                </a:tc>
-              </a:tr>
-              <a:tr h="384048">
-                <a:tc>
-                  <a:txBody>
-                    <a:bodyPr/>
-                    <a:lstStyle/>
-                    <a:p>
-                      <a:r>
-                        <a:rPr sz="1050">
-                          <a:solidFill>
-                            <a:srgbClr val="3D5466"/>
-                          </a:solidFill>
-                          <a:latin typeface="Arial"/>
-                        </a:rPr>
-                        <a:t>Dynamischer VG</a:t>
-                      </a:r>
-                    </a:p>
-                  </a:txBody>
-                  <a:tcPr/>
-                </a:tc>
-                <a:tc>
-                  <a:txBody>
-                    <a:bodyPr/>
-                    <a:lstStyle/>
-                    <a:p>
-                      <a:r>
-                        <a:rPr sz="1050">
-                          <a:solidFill>
-                            <a:srgbClr val="3D5466"/>
-                          </a:solidFill>
-                          <a:latin typeface="Arial"/>
-                        </a:rPr>
-                        <a:t>Netto-FK ÷ EBITDA</a:t>
-                      </a:r>
-                    </a:p>
-                  </a:txBody>
-                  <a:tcPr/>
-                </a:tc>
-                <a:tc>
-                  <a:txBody>
-                    <a:bodyPr/>
-                    <a:lstStyle/>
-                    <a:p>
-                      <a:r>
-                        <a:rPr sz="1050">
-                          <a:solidFill>
-                            <a:srgbClr val="3D5466"/>
-                          </a:solidFill>
-                          <a:latin typeface="Arial"/>
-                        </a:rPr>
-                        <a:t>&lt; 3,0x</a:t>
-                      </a:r>
-                    </a:p>
-                  </a:txBody>
-                  <a:tcPr/>
-                </a:tc>
-                <a:tc>
-                  <a:txBody>
-                    <a:bodyPr/>
-                    <a:lstStyle/>
-                    <a:p>
-                      <a:r>
-                        <a:rPr sz="1050">
-                          <a:solidFill>
-                            <a:srgbClr val="3D5466"/>
-                          </a:solidFill>
-                          <a:latin typeface="Arial"/>
-                        </a:rPr>
-                        <a:t>&gt; 4,0x</a:t>
-                      </a:r>
-                    </a:p>
-                  </a:txBody>
-                  <a:tcPr/>
-                </a:tc>
-              </a:tr>
-            </a:tbl>
-          </a:graphicData>
-        </a:graphic>
-      </p:graphicFrame>
+      <p:pic>
+        <p:nvPicPr>
+          <p:cNvPr id="7" name="Picture 6" descr="image.png"/>
+          <p:cNvPicPr>
+            <a:picLocks noChangeAspect="1"/>
+          </p:cNvPicPr>
+          <p:nvPr/>
+        </p:nvPicPr>
+        <p:blipFill>
+          <a:blip r:embed="rId2"/>
+          <a:stretch>
+            <a:fillRect/>
+          </a:stretch>
+        </p:blipFill>
+        <p:spPr>
+          <a:xfrm>
+            <a:off x="2163921" y="1325880"/>
+            <a:ext cx="7861110" cy="4937760"/>
+          </a:xfrm>
+          <a:prstGeom prst="rect">
+            <a:avLst/>
+          </a:prstGeom>
+        </p:spPr>
+      </p:pic>
       <p:sp>
         <p:nvSpPr>
           <p:cNvPr id="8" name="Rectangle 7"/>
@@ -16099,7 +11606,7 @@
                 </a:solidFill>
                 <a:latin typeface="Consolas"/>
               </a:rPr>
-              <a:t>Übersicht</a:t>
+              <a:t>Schaubild</a:t>
             </a:r>
           </a:p>
         </p:txBody>
